--- a/docs/praesentation/Ergebnisse_Matrix_Pencil_Arbeitsfassung.pptx
+++ b/docs/praesentation/Ergebnisse_Matrix_Pencil_Arbeitsfassung.pptx
@@ -24,9 +24,11 @@
     <p:sldId id="272" r:id="rId18"/>
     <p:sldId id="273" r:id="rId19"/>
     <p:sldId id="274" r:id="rId20"/>
+    <p:sldId id="275" r:id="rId21"/>
+    <p:sldId id="276" r:id="rId22"/>
   </p:sldIdLst>
   <p:notesMasterIdLst>
-    <p:notesMasterId r:id="rId21"/>
+    <p:notesMasterId r:id="rId23"/>
   </p:notesMasterIdLst>
   <p:sldSz cx="12192000" cy="6858000"/>
   <p:notesSz cx="6858000" cy="12192000"/>
@@ -125,12 +127,12 @@
   <p:extLst>
     <p:ext uri="{521415D9-36F7-43E2-AB2F-B90AF26B5E84}">
       <p14:sectionLst xmlns:p14="http://schemas.microsoft.com/office/powerpoint/2010/main">
-        <p14:section name="Einstieg" id="{66c91b54-c569-2d96-3eeb-47ac41c6cea0}">
+        <p14:section name="Einstieg" id="{4bac640b-556c-0495-b3fc-84fa57367ae5}">
           <p14:sldIdLst>
             <p14:sldId id="256"/>
           </p14:sldIdLst>
         </p14:section>
-        <p14:section name="Hintergrund" id="{9a6b2687-1e15-5753-84e4-aa6d6db2fa8a}">
+        <p14:section name="Hintergrund" id="{926dad61-436f-68ac-da81-d7d8f100d7b3}">
           <p14:sldIdLst>
             <p14:sldId id="257"/>
             <p14:sldId id="258"/>
@@ -138,38 +140,44 @@
             <p14:sldId id="260"/>
           </p14:sldIdLst>
         </p14:section>
-        <p14:section name="Methode" id="{7eb5202a-72cb-c36d-2ba4-deb08dbd93e7}">
+        <p14:section name="Methode" id="{cf913497-1967-6eaf-f330-0a98e6f27a02}">
           <p14:sldIdLst>
             <p14:sldId id="261"/>
             <p14:sldId id="262"/>
             <p14:sldId id="263"/>
             <p14:sldId id="264"/>
             <p14:sldId id="265"/>
+            <p14:sldId id="266"/>
           </p14:sldIdLst>
         </p14:section>
-        <p14:section name="Prüfungen" id="{fbc1f4ac-bc33-aeb4-a1eb-148caa89017f}">
+        <p14:section name="Prüfungen" id="{8a0bd692-f19c-1c8f-d9ea-2e3cd469dbca}">
           <p14:sldIdLst>
-            <p14:sldId id="266"/>
             <p14:sldId id="267"/>
+            <p14:sldId id="268"/>
           </p14:sldIdLst>
         </p14:section>
-        <p14:section name="Leistungsmessungen" id="{c4682c6a-4338-37bd-d4ce-9762f4965a9f}">
+        <p14:section name="Leistungsmessungen" id="{0611af2a-8ca0-d0b6-4efe-08598c848d57}">
           <p14:sldIdLst>
-            <p14:sldId id="268"/>
             <p14:sldId id="269"/>
             <p14:sldId id="270"/>
+            <p14:sldId id="271"/>
           </p14:sldIdLst>
         </p14:section>
-        <p14:section name="Mexiko" id="{2cfbe93c-cab5-cec5-afb7-eaadcd89fa65}">
+        <p14:section name="Mexiko" id="{f2644408-8d89-5ef1-e56b-0dd051c48244}">
           <p14:sldIdLst>
-            <p14:sldId id="271"/>
             <p14:sldId id="272"/>
             <p14:sldId id="273"/>
+            <p14:sldId id="274"/>
           </p14:sldIdLst>
         </p14:section>
-        <p14:section name="Fazit" id="{4a5c7b2a-1bc6-5231-8362-5aee53dd40c2}">
+        <p14:section name="Fazit" id="{5790930e-f0d5-9ebe-6fe8-ba1970f3a5e9}">
           <p14:sldIdLst>
-            <p14:sldId id="274"/>
+            <p14:sldId id="275"/>
+          </p14:sldIdLst>
+        </p14:section>
+        <p14:section name="Anhang" id="{78cb7833-c1b2-6cf1-03aa-63d481b918db}">
+          <p14:sldIdLst>
+            <p14:sldId id="276"/>
           </p14:sldIdLst>
         </p14:section>
       </p14:sectionLst>
@@ -667,10 +675,11 @@
           <a:p>
             <a:r>
               <a:rPr lang="en-US" dirty="0"/>
-              <a:t>Hier ein konkreter Pol aus der negativen Sprungantwort. Die Eigenwertberechnung liefert ungefähr 0,988 plus 0,142 i. Diese Zahl wurde aus der Messung geschätzt und nicht vorgegeben.
-Eine komplexe Zahl hat einen Betrag und einen Winkel. Der Betrag r, etwa 0,998084, sagt: Pro Abtastschritt bleiben rund 99,8 Prozent der Amplitude erhalten. Der Winkel Theta, etwa 0,1425 Radiant, ist der Phasenfortschritt innerhalb von 0,01 Sekunden. Er ist nicht die Anfangsphase.
-Rechts oben: Teilen wir den Winkel durch zwei Pi und durch die Schrittdauer, erhalten wir 2,268 Hertz. Darunter: Der natürliche Logarithmus von r, geteilt durch die Schrittdauer, ergibt die Abklingrate Sigma von etwa minus 0,192 pro Sekunde. Nach einer Sekunde ist die Amplitude also auf rund 82,6 Prozent gesunken.
-Beide Werte passen zu der Ablesung an der Kurve auf Folie 7. Eine reelle Schwingung braucht dabei zwei Pole: z und seinen konjugierten Partner. Ordnung zwölf heißt deshalb nicht zwölf Schwingungen; hier sind es vier schwingende Paare und vier reelle Anteile.</a:t>
+              <a:t>Wie entsteht aus Messpunkten die kleine Matrix B? Hier dieselben Schritte wie im Programm, nur mit sieben Werten, damit man jede Zahl sehen kann.
+Erstens: Als Messwerte nehmen wir eine einzelne gedämpfte Schwingung. Betrag und Winkel stammen vom Pol der negativen Sprungantwort, den wir gleich genauer ansehen. Das ergibt die sieben Werte oben.
+Zweitens: Mit drei Spalten bilden wir die Hankel-Matrizen. In H0 steht in jeder Zeile ein Ausschnitt von drei aufeinanderfolgenden Werten, jede Zeile einen Wert später. Auf jeder Gegendiagonale steht deshalb derselbe Wert. H1 ist genauso aufgebaut, beginnt aber einen Wert später: Die erste Zeile von H1 ist die zweite Zeile von H0.
+Drittens: Die Singulärwertzerlegung von H0 liefert drei Singulärwerte: 3,179, 0,067 und praktisch null. Nur zwei Richtungen tragen also Information. Das passt: Eine reelle Schwingung entsteht aus einem konjugierten Polpaar. Wir behalten deshalb r gleich zwei Richtungen; im Projekt sind es zwölf.
+Viertens: Aus den behaltenen Richtungen entsteht die reduzierte Matrix B. Sie ist nur noch zwei mal zwei groß. Ihre Eigenwerte sind 0,988 plus minus 0,142 i, genau der Pol z und sein konjugierter Partner, mit denen wir die Werte erzeugt haben. Das Verfahren findet also aus den Messpunkten allein die richtigen Pole wieder.</a:t>
             </a:r>
             <a:endParaRPr lang="en-US" dirty="0"/>
           </a:p>
@@ -758,10 +767,10 @@
           <a:p>
             <a:r>
               <a:rPr lang="en-US" dirty="0"/>
-              <a:t>Wie prüft man, ob der Filter wirklich den gewünschten Anteil entfernt? Man braucht ein Signal, dessen Bestandteile man vorher kennt.
-Dieses künstliche Signal enthält einen Grundwertsprung und zwei Schwingungen, eine bei 2,24 Hertz und eine bei 5 Hertz. Entfernt werden soll nur die erste. Die Sollkurve ist das erwartete Ergebnis: Grundwert plus die 5-Hertz-Schwingung.
-Blau ist der Eingang, Orange die Filterausgabe, schwarz gestrichelt die Sollkurve. Orange und Schwarz liegen exakt übereinander. Die verbleibenden Wellen sind erwünscht, denn der 5-Hertz-Anteil soll bleiben.
-Über alle 1200 Werte bleibt die größte Abweichung unter drei mal zehn hoch minus dreizehn. Der Rechenablauf ist damit für ein rauschfreies Beispiel bestätigt. Rauschen und Modellfehler einer echten Messung prüft dieser Test nicht.</a:t>
+              <a:t>Hier ein konkreter Pol aus der negativen Sprungantwort. Die Eigenwertberechnung liefert ungefähr 0,988 plus 0,142 i, derselbe Wert wie im Rechenbeispiel eben. Diese Zahl wurde aus der Messung geschätzt und nicht vorgegeben.
+Eine komplexe Zahl hat einen Betrag und einen Winkel. Der Betrag r, etwa 0,998084, sagt: Pro Abtastschritt bleiben rund 99,8 Prozent der Amplitude erhalten. Der Winkel Theta, etwa 0,1425 Radiant, ist der Phasenfortschritt innerhalb von 0,01 Sekunden. Er ist nicht die Anfangsphase.
+Rechts oben: Teilen wir den Winkel durch zwei Pi und durch die Schrittdauer, erhalten wir 2,268 Hertz. Darunter: Der natürliche Logarithmus von r, geteilt durch die Schrittdauer, ergibt die Abklingrate Sigma von etwa minus 0,192 pro Sekunde. Nach einer Sekunde ist die Amplitude also auf rund 82,6 Prozent gesunken.
+Beide Werte passen zu der Ablesung an der Kurve auf Folie 7. Eine reelle Schwingung braucht dabei zwei Pole: z und seinen konjugierten Partner. Ordnung zwölf heißt deshalb nicht zwölf Schwingungen; hier sind es vier schwingende Paare und vier reelle Anteile.</a:t>
             </a:r>
             <a:endParaRPr lang="en-US" dirty="0"/>
           </a:p>
@@ -849,10 +858,10 @@
           <a:p>
             <a:r>
               <a:rPr lang="en-US" dirty="0"/>
-              <a:t>Die zweite Prüfung fragt: Findet Matrix Pencil die Konstanten eines bekannten Modells wieder?
-Der Datensatz Lanczos1 vom amerikanischen Normungsinstitut NIST enthält 24 künstlich erzeugte Werte. Sie entstehen aus drei Anteilen, die nur abklingen und nicht pendeln. Die veröffentlichten Referenzparameter sind die drei Gewichte und die drei Abklingraten eins, drei und fünf pro x-Einheit. Für die Achsen sind keine Einheiten angegeben.
-Blau sind die NIST-Daten, Orange ist das Matrix-Pencil-Modell. Die Tabelle vergleicht die veröffentlichten Werte mit unserer Schätzung: Auf vier Nachkommastellen sind sie identisch. Der relative Modellfehler liegt bei 8,74 mal zehn hoch minus vierzehn.
-Anders als später bei Mexiko sind diese Referenzwerte Bestandteile eines bekannten künstlichen Modells und keine Schätzungen aus einer Messung. Nach diesen beiden kontrollierten Prüfungen folgen die Ergebnisse der Leistungsmessungen.</a:t>
+              <a:t>Wie prüft man, ob der Filter wirklich den gewünschten Anteil entfernt? Man braucht ein Signal, dessen Bestandteile man vorher kennt.
+Dieses künstliche Signal enthält einen Grundwertsprung und zwei Schwingungen, eine bei 2,24 Hertz und eine bei 5 Hertz. Entfernt werden soll nur die erste. Die Sollkurve ist das erwartete Ergebnis: Grundwert plus die 5-Hertz-Schwingung.
+Blau ist der Eingang, Orange die Filterausgabe, schwarz gestrichelt die Sollkurve. Orange und Schwarz liegen exakt übereinander. Die verbleibenden Wellen sind erwünscht, denn der 5-Hertz-Anteil soll bleiben.
+Über alle 1200 Werte bleibt die größte Abweichung unter drei mal zehn hoch minus dreizehn. Der Rechenablauf ist damit für ein rauschfreies Beispiel bestätigt. Rauschen und Modellfehler einer echten Messung prüft dieser Test nicht.</a:t>
             </a:r>
             <a:endParaRPr lang="en-US" dirty="0"/>
           </a:p>
@@ -940,11 +949,10 @@
           <a:p>
             <a:r>
               <a:rPr lang="en-US" dirty="0"/>
-              <a:t>Die Tabelle fasst beide Leistungsmessungen zusammen, jeweils mit Ordnung zwölf von einer bis sieben Sekunden.
-In beiden Messungen liegt die dominante Schwingung bei 2,268 Hertz. Beim negativen Sprung klingt sie schneller ab, mit minus 0,192 pro Sekunde gegenüber minus 0,107. Die Anfangsamplitude bezieht sich auf den Beginn des Analyseabschnitts bei einer Sekunde und ist in der Dateieinheit angegeben, also vor der Division durch eine Million.
-Beide Modelle bilden die Messung auf dem Schätzraster mit weniger als einem Prozent Fehler nach, und beide Abzüge werden freigegeben.
-Der Unterschied steckt in der Zerlegung: Beim positiven Sprung liegt ein zweiter Anteil bei 2,480 Hertz im Zielband. Er klingt deutlich schneller ab und wird mit abgezogen. Ein ähnlich kleiner Gesamtfehler bedeutet also nicht dieselbe Zerlegung.
-Die letzte Zeile ist eine spektrale Vergleichsgröße: die Summe der quadrierten FFT-Beträge im Zielband zwischen vier und sieben Sekunden, vor und nach dem Abzug. Sie ist keine physikalische Energie.</a:t>
+              <a:t>Die zweite Prüfung fragt: Findet Matrix Pencil die Konstanten eines bekannten Modells wieder?
+Der Datensatz Lanczos1 vom amerikanischen Normungsinstitut NIST enthält 24 künstlich erzeugte Werte. Sie entstehen aus drei Anteilen, die nur abklingen und nicht pendeln. Die veröffentlichten Referenzparameter sind die drei Gewichte und die drei Abklingraten eins, drei und fünf pro x-Einheit. Für die Achsen sind keine Einheiten angegeben.
+Blau sind die NIST-Daten, Orange ist das Matrix-Pencil-Modell. Die Tabelle vergleicht die veröffentlichten Werte mit unserer Schätzung: Auf vier Nachkommastellen sind sie identisch. Der relative Modellfehler liegt bei 8,74 mal zehn hoch minus vierzehn.
+Anders als später bei Mexiko sind diese Referenzwerte Bestandteile eines bekannten künstlichen Modells und keine Schätzungen aus einer Messung. Nach diesen beiden kontrollierten Prüfungen folgen die Ergebnisse der Leistungsmessungen.</a:t>
             </a:r>
             <a:endParaRPr lang="en-US" dirty="0"/>
           </a:p>
@@ -1032,10 +1040,11 @@
           <a:p>
             <a:r>
               <a:rPr lang="en-US" dirty="0"/>
-              <a:t>Diese Folie zeigt die Filterung der negativen Sprungantwort. Blau ist die Messung, Orange die Filterausgabe. Links steht der gesamte Verlauf, rechts der Abschnitt von vier bis sieben Sekunden vergrößert. In beiden Diagrammen ist P pos durch eine Million geteilt.
-Entfernt wird ein Polpaar, die Schwingung bei 2,268 Hertz. Im rechten Ausschnitt ist der Effekt deutlich: Die Pendelung verschwindet, übrig bleibt der langsam steigende Verlauf. Im linken Diagramm würde der große Übergang diesen Unterschied optisch verdecken; deshalb der vergrößerte Ausschnitt.
-Vor einer Sekunde sind Messung und Ausgabe identisch. Danach ist die Differenz genau der berechnete Abzugsanteil. Die Bandenergie im Zielband sinkt zwischen vier und sieben Sekunden um 99,999 Prozent.
-Eine unabhängig bekannte, saubere Sollkurve gibt es für diese Messung nicht. Die Folie belegt den rechnerischen Eingriff, aber keine vollständig abgesicherte physikalische Bereinigung.</a:t>
+              <a:t>Die Tabelle fasst beide Leistungsmessungen zusammen, jeweils mit Ordnung zwölf von einer bis sieben Sekunden.
+In beiden Messungen liegt die dominante Schwingung bei 2,268 Hertz. Beim negativen Sprung klingt sie schneller ab, mit minus 0,192 pro Sekunde gegenüber minus 0,107. Die Anfangsamplitude bezieht sich auf den Beginn des Analyseabschnitts bei einer Sekunde und ist in der Dateieinheit angegeben, also vor der Division durch eine Million.
+Beide Modelle bilden die Messung auf dem Schätzraster mit weniger als einem Prozent Fehler nach, und beide Abzüge werden freigegeben.
+Der Unterschied steckt in der Zerlegung: Beim positiven Sprung liegt ein zweiter Anteil bei 2,480 Hertz im Zielband. Er klingt deutlich schneller ab und wird mit abgezogen. Ein ähnlich kleiner Gesamtfehler bedeutet also nicht dieselbe Zerlegung.
+Die letzte Zeile ist eine spektrale Vergleichsgröße: die Summe der quadrierten FFT-Beträge im Zielband zwischen vier und sieben Sekunden, vor und nach dem Abzug. Sie ist keine physikalische Energie.</a:t>
             </a:r>
             <a:endParaRPr lang="en-US" dirty="0"/>
           </a:p>
@@ -1123,10 +1132,10 @@
           <a:p>
             <a:r>
               <a:rPr lang="en-US" dirty="0"/>
-              <a:t>Auch hier ist die Messung blau und die Filterausgabe orange, links der gesamte Verlauf, rechts der Abschnitt von vier bis sieben Sekunden.
-Beim positiven Frequenzsprung bricht P pos kurz nach einer Sekunde stark ein und pendelt danach. Abgezogen werden zwei Schwingungsanteile: der dominante bei 2,268 Hertz und ein zweiter bei 2,480 Hertz, der deutlich schneller abklingt. Die orange Kurve ist also die Messung minus die Summe beider Anteile.
-Im Ausschnitt bleiben kleine Restwellen sichtbar, die Bandenergie im Zielband sinkt aber um 99,87 Prozent. Vor einer Sekunde bleiben alle Werte unverändert.
-Das Gesamtmodell passt mit weniger als einem Prozent Fehler. Daraus folgt aber noch nicht, dass beide Anteile eindeutig reale Vorgänge beschreiben. Als Nächstes prüfen wir das Verfahren an einem externen Fall mit veröffentlichten Vergleichswerten.</a:t>
+              <a:t>Diese Folie zeigt die Filterung der negativen Sprungantwort. Blau ist die Messung, Orange die Filterausgabe. Links steht der gesamte Verlauf, rechts der Abschnitt von vier bis sieben Sekunden vergrößert. In beiden Diagrammen ist P pos durch eine Million geteilt.
+Entfernt wird ein Polpaar, die Schwingung bei 2,268 Hertz. Im rechten Ausschnitt ist der Effekt deutlich: Die Pendelung verschwindet, übrig bleibt der langsam steigende Verlauf. Im linken Diagramm würde der große Übergang diesen Unterschied optisch verdecken; deshalb der vergrößerte Ausschnitt.
+Vor einer Sekunde sind Messung und Ausgabe identisch. Danach ist die Differenz genau der berechnete Abzugsanteil. Die Bandenergie im Zielband sinkt zwischen vier und sieben Sekunden um 99,999 Prozent.
+Eine unabhängig bekannte, saubere Sollkurve gibt es für diese Messung nicht. Die Folie belegt den rechnerischen Eingriff, aber keine vollständig abgesicherte physikalische Bereinigung.</a:t>
             </a:r>
             <a:endParaRPr lang="en-US" dirty="0"/>
           </a:p>
@@ -1214,10 +1223,10 @@
           <a:p>
             <a:r>
               <a:rPr lang="en-US" dirty="0"/>
-              <a:t>Jetzt wechseln wir zu einem externen Referenzfall. Wichtig: Die Messgröße ist hier nicht die Leistung, sondern die Netzfrequenz selbst, in Hertz. Die Aufzeichnung gehört zu einem Netzereignis in Mexiko vom 28. Dezember 2020; wir haben sie nicht selbst gemessen.
-Links sehen wir 301 Werte über 30 Sekunden im Abstand von einer Zehntelsekunde. Die Netzfrequenz liegt knapp unter 60 Hertz und schwankt langsam darüber und darunter; die Ausschläge werden kleiner.
-Andere Autoren haben dieselbe Zeitreihe im ROMA-Handbuch mit der ERA-Methode ausgewertet. Die Tabelle stellt ihre gerundeten Werte unseren Matrix-Pencil-Ergebnissen bei Ordnung zwölf gegenüber. Alle drei Frequenzen weichen um weniger als 0,06 Prozent ab, und auch die Abklingraten passen.
-Das spricht dafür, dass beide Verfahren ähnliche Schwingungsanteile erkennen. Die Autorenwerte sind jedoch Schätzungen, keine bekannten Wahrheitswerte. Die nächste Folie stellt eine andere Frage: Wie gut bildet das Gesamtmodell die ganze Kurve nach?</a:t>
+              <a:t>Auch hier ist die Messung blau und die Filterausgabe orange, links der gesamte Verlauf, rechts der Abschnitt von vier bis sieben Sekunden.
+Beim positiven Frequenzsprung bricht P pos kurz nach einer Sekunde stark ein und pendelt danach. Abgezogen werden zwei Schwingungsanteile: der dominante bei 2,268 Hertz und ein zweiter bei 2,480 Hertz, der deutlich schneller abklingt. Die orange Kurve ist also die Messung minus die Summe beider Anteile.
+Im Ausschnitt bleiben kleine Restwellen sichtbar, die Bandenergie im Zielband sinkt aber um 99,87 Prozent. Vor einer Sekunde bleiben alle Werte unverändert.
+Das Gesamtmodell passt mit weniger als einem Prozent Fehler. Daraus folgt aber noch nicht, dass beide Anteile eindeutig reale Vorgänge beschreiben. Als Nächstes prüfen wir das Verfahren an einem externen Fall mit veröffentlichten Vergleichswerten.</a:t>
             </a:r>
             <a:endParaRPr lang="en-US" dirty="0"/>
           </a:p>
@@ -1305,10 +1314,10 @@
           <a:p>
             <a:r>
               <a:rPr lang="en-US" dirty="0"/>
-              <a:t>Oben vergleichen wir die gemessene Netzfrequenz mit der Summe aller geschätzten Modellanteile. Der Mittelwert von etwa 59,773 Hertz ist abgezogen; die Achse zeigt deshalb Abweichungen in Millihertz. Unten steht der Rest: Messwert minus Modellwert an jedem Zeitpunkt.
-Über große Bereiche liegen beide Kurven dicht zusammen. Zwischen 240 und 243 Sekunden treten aber schnelle Änderungen auf, die das Modell nicht nachbildet. Dieser kurze Abschnitt trägt etwa 55 Prozent zur Fehlerquadratsumme bei. Seine Ursache bleibt offen.
-Die 17,05 Prozent entstehen so: Die typische Modellabweichung, der RMSE, beträgt 5,565 Millihertz. Bezogen wird sie auf die Stärke der gemessenen Schwankung, deren RMS 32,646 Millihertz beträgt. Verglichen werden also Signalwerte an denselben 301 Zeitpunkten, keine Frequenzen.
-Deshalb können die Frequenzen sehr gut stimmen, während das Gesamtmodell einen deutlichen Fehler hat. Der Fehler liegt über der eingestellten Grenze von zehn Prozent, und der Code blockiert den Abzug: Die Filterausgabe ist exakt das Eingangssignal. Die zehn Prozent sind eine heuristische Schutzregel des Prototyps.</a:t>
+              <a:t>Jetzt wechseln wir zu einem externen Referenzfall. Wichtig: Die Messgröße ist hier nicht die Leistung, sondern die Netzfrequenz selbst, in Hertz. Die Aufzeichnung gehört zu einem Netzereignis in Mexiko vom 28. Dezember 2020; wir haben sie nicht selbst gemessen.
+Links sehen wir 301 Werte über 30 Sekunden im Abstand von einer Zehntelsekunde. Die Netzfrequenz liegt knapp unter 60 Hertz und schwankt langsam darüber und darunter; die Ausschläge werden kleiner.
+Andere Autoren haben dieselbe Zeitreihe im ROMA-Handbuch mit der ERA-Methode ausgewertet. Die Tabelle stellt ihre gerundeten Werte unseren Matrix-Pencil-Ergebnissen bei Ordnung zwölf gegenüber. Alle drei Frequenzen weichen um weniger als 0,06 Prozent ab, und auch die Abklingraten passen.
+Das spricht dafür, dass beide Verfahren ähnliche Schwingungsanteile erkennen. Die Autorenwerte sind jedoch Schätzungen, keine bekannten Wahrheitswerte. Die nächste Folie stellt eine andere Frage: Wie gut bildet das Gesamtmodell die ganze Kurve nach?</a:t>
             </a:r>
             <a:endParaRPr lang="en-US" dirty="0"/>
           </a:p>
@@ -1396,10 +1405,10 @@
           <a:p>
             <a:r>
               <a:rPr lang="en-US" dirty="0"/>
-              <a:t>Würde eine höhere Ordnung das Problem lösen? Links steht der relative Fehler über der Modellordnung. Mit mehr Exponentialanteilen passt sich die Modellkurve immer besser an: 17,05 Prozent bei Ordnung zwölf, 12,83 bei 24 und 8,76 Prozent bei 36. Damit läge der Fehler unter der Zehn-Prozent-Grenze.
-Rechts sehen wir, warum das allein nicht reicht. Hier wird das Modell nur aus jedem zweiten Messwert geschätzt, also aus 151 Punkten; die 150 Zwischenpunkte bleiben unbenutzt. Blau ist der Fehler auf den verwendeten Punkten, Orange auf den ausgelassenen. Bei Ordnung 36 sind es 4,72 und 10,13 Prozent. Bei Ordnung 72 sinkt Blau auf 0,36 Prozent, Orange steigt aber auf 13,99 Prozent. Das ist ein Hinweis auf Überanpassung.
-Dazu verändert sich die Zerlegung: Für die Mode nahe 0,72 Hertz nennen die Autoren eine Amplitude von etwa 0,004 Hertz. Ordnung zwölf liefert 0,0045, Ordnung 36 dagegen 0,0213 Hertz. Eine bessere Gesamtkurve bedeutet also keine bessere physikalische Beschreibung.
-Diese Prüfung bleibt innerhalb derselben Aufzeichnung; benachbarte Werte hängen zusammen. Eine unabhängige Messung wäre der stärkere Nachweis.</a:t>
+              <a:t>Oben vergleichen wir die gemessene Netzfrequenz mit der Summe aller geschätzten Modellanteile. Der Mittelwert von etwa 59,773 Hertz ist abgezogen; die Achse zeigt deshalb Abweichungen in Millihertz. Unten steht der Rest: Messwert minus Modellwert an jedem Zeitpunkt.
+Über große Bereiche liegen beide Kurven dicht zusammen. Zwischen 240 und 243 Sekunden treten aber schnelle Änderungen auf, die das Modell nicht nachbildet. Dieser kurze Abschnitt trägt etwa 55 Prozent zur Fehlerquadratsumme bei. Seine Ursache bleibt offen.
+Die 17,05 Prozent entstehen so: Die typische Modellabweichung, der RMSE, beträgt 5,565 Millihertz. Bezogen wird sie auf die Stärke der gemessenen Schwankung, deren RMS 32,646 Millihertz beträgt. Verglichen werden also Signalwerte an denselben 301 Zeitpunkten, keine Frequenzen.
+Deshalb können die Frequenzen sehr gut stimmen, während das Gesamtmodell einen deutlichen Fehler hat. Der Fehler liegt über der eingestellten Grenze von zehn Prozent, und der Code blockiert den Abzug: Die Filterausgabe ist exakt das Eingangssignal. Die zehn Prozent sind eine heuristische Schutzregel des Prototyps.</a:t>
             </a:r>
             <a:endParaRPr lang="en-US" dirty="0"/>
           </a:p>
@@ -1487,10 +1496,10 @@
           <a:p>
             <a:r>
               <a:rPr lang="en-US" dirty="0"/>
-              <a:t>Zum Schluss die beiden Datengruppen nebeneinander.
-Links unsere Projektmessungen des Leistungskanals P pos. In beiden Sprungantworten liegt die Pendelung bei etwa 2,268 Hertz. Das Modell bildet die Messungen mit 0,763 und 0,594 Prozent Fehler nach, und beide Abzüge werden mit der Standardeinstellung freigegeben. Beim positiven Sprung werden dabei zwei Anteile abgezogen.
-Rechts der externe Fall aus Mexiko mit der Netzfrequenz als Messgröße. Die Frequenzen stimmen sehr gut mit der Veröffentlichung überein. Das Gesamtmodell hat bei Ordnung zwölf aber 17,05 Prozent Fehler, deshalb bleibt der Abzug blockiert. Eine höhere Ordnung senkt den Kurvenfehler, verändert aber die Zerlegung und zeigt Überanpassung.
-Daraus folgt: Eine gut erkannte Frequenz bestätigt noch keine ausreichende Rekonstruktion, und eine ausgeführte Filterung beweist noch keine physikalisch richtige Bereinigung. Für die realen Messungen fehlt eine unabhängig bekannte, saubere Referenzkurve. Diese Grenze gehört zur Bewertung der Ergebnisse dazu.</a:t>
+              <a:t>Würde eine höhere Ordnung das Problem lösen? Links steht der relative Fehler über der Modellordnung. Mit mehr Exponentialanteilen passt sich die Modellkurve immer besser an: 17,05 Prozent bei Ordnung zwölf, 12,83 bei 24 und 8,76 Prozent bei 36. Damit läge der Fehler unter der Zehn-Prozent-Grenze.
+Rechts sehen wir, warum das allein nicht reicht. Hier wird das Modell nur aus jedem zweiten Messwert geschätzt, also aus 151 Punkten; die 150 Zwischenpunkte bleiben unbenutzt. Blau ist der Fehler auf den verwendeten Punkten, Orange auf den ausgelassenen. Bei Ordnung 36 sind es 4,72 und 10,13 Prozent. Bei Ordnung 72 sinkt Blau auf 0,36 Prozent, Orange steigt aber auf 13,99 Prozent. Das ist ein Hinweis auf Überanpassung.
+Dazu verändert sich die Zerlegung: Für die Mode nahe 0,72 Hertz nennen die Autoren eine Amplitude von etwa 0,004 Hertz. Ordnung zwölf liefert 0,0045, Ordnung 36 dagegen 0,0213 Hertz. Eine bessere Gesamtkurve bedeutet also keine bessere physikalische Beschreibung.
+Diese Prüfung bleibt innerhalb derselben Aufzeichnung; benachbarte Werte hängen zusammen. Eine unabhängige Messung wäre der stärkere Nachweis.</a:t>
             </a:r>
             <a:endParaRPr lang="en-US" dirty="0"/>
           </a:p>
@@ -1624,6 +1633,187 @@
 </p:notes>
 </file>
 
+<file path=ppt/notesSlides/notesSlide20.xml><?xml version="1.0" encoding="utf-8"?>
+<p:notes xmlns:a="http://schemas.openxmlformats.org/drawingml/2006/main" xmlns:r="http://schemas.openxmlformats.org/officeDocument/2006/relationships" xmlns:p="http://schemas.openxmlformats.org/presentationml/2006/main">
+  <p:cSld>
+    <p:spTree>
+      <p:nvGrpSpPr>
+        <p:cNvPr id="1" name=""/>
+        <p:cNvGrpSpPr/>
+        <p:nvPr/>
+      </p:nvGrpSpPr>
+      <p:grpSpPr>
+        <a:xfrm>
+          <a:off x="0" y="0"/>
+          <a:ext cx="0" cy="0"/>
+          <a:chOff x="0" y="0"/>
+          <a:chExt cx="0" cy="0"/>
+        </a:xfrm>
+      </p:grpSpPr>
+      <p:sp>
+        <p:nvSpPr>
+          <p:cNvPr id="2" name="Slide Image Placeholder 1"/>
+          <p:cNvSpPr>
+            <a:spLocks noGrp="1" noRot="1" noChangeAspect="1"/>
+          </p:cNvSpPr>
+          <p:nvPr>
+            <p:ph type="sldImg"/>
+          </p:nvPr>
+        </p:nvSpPr>
+        <p:spPr/>
+      </p:sp>
+      <p:sp>
+        <p:nvSpPr>
+          <p:cNvPr id="3" name="Notes Placeholder 2"/>
+          <p:cNvSpPr>
+            <a:spLocks noGrp="1"/>
+          </p:cNvSpPr>
+          <p:nvPr>
+            <p:ph type="body" idx="1"/>
+          </p:nvPr>
+        </p:nvSpPr>
+        <p:spPr/>
+        <p:txBody>
+          <a:bodyPr/>
+          <a:lstStyle/>
+          <a:p>
+            <a:r>
+              <a:rPr lang="en-US" dirty="0"/>
+              <a:t>Zum Schluss die beiden Datengruppen nebeneinander.
+Links unsere Projektmessungen des Leistungskanals P pos. In beiden Sprungantworten liegt die Pendelung bei etwa 2,268 Hertz. Das Modell bildet die Messungen mit 0,763 und 0,594 Prozent Fehler nach, und beide Abzüge werden mit der Standardeinstellung freigegeben. Beim positiven Sprung werden dabei zwei Anteile abgezogen.
+Rechts der externe Fall aus Mexiko mit der Netzfrequenz als Messgröße. Die Frequenzen stimmen sehr gut mit der Veröffentlichung überein. Das Gesamtmodell hat bei Ordnung zwölf aber 17,05 Prozent Fehler, deshalb bleibt der Abzug blockiert. Eine höhere Ordnung senkt den Kurvenfehler, verändert aber die Zerlegung und zeigt Überanpassung.
+Daraus folgt: Eine gut erkannte Frequenz bestätigt noch keine ausreichende Rekonstruktion, und eine ausgeführte Filterung beweist noch keine physikalisch richtige Bereinigung. Für die realen Messungen fehlt eine unabhängig bekannte, saubere Referenzkurve. Diese Grenze gehört zur Bewertung der Ergebnisse dazu.</a:t>
+            </a:r>
+            <a:endParaRPr lang="en-US" dirty="0"/>
+          </a:p>
+        </p:txBody>
+      </p:sp>
+      <p:sp>
+        <p:nvSpPr>
+          <p:cNvPr id="4" name="Slide Number Placeholder 3"/>
+          <p:cNvSpPr>
+            <a:spLocks noGrp="1"/>
+          </p:cNvSpPr>
+          <p:nvPr>
+            <p:ph type="sldNum" sz="quarter" idx="10"/>
+          </p:nvPr>
+        </p:nvSpPr>
+        <p:spPr/>
+        <p:txBody>
+          <a:bodyPr/>
+          <a:lstStyle/>
+          <a:p>
+            <a:fld id="{F7021451-1387-4CA6-816F-3879F97B5CBC}" type="slidenum">
+              <a:rPr lang="en-US"/>
+              <a:t>20</a:t>
+            </a:fld>
+            <a:endParaRPr lang="en-US"/>
+          </a:p>
+        </p:txBody>
+      </p:sp>
+    </p:spTree>
+    <p:extLst>
+      <p:ext uri="{BB962C8B-B14F-4D97-AF65-F5344CB8AC3E}">
+        <p14:creationId xmlns:p14="http://schemas.microsoft.com/office/powerpoint/2010/main" val="1024086991"/>
+      </p:ext>
+    </p:extLst>
+  </p:cSld>
+  <p:clrMapOvr>
+    <a:masterClrMapping/>
+  </p:clrMapOvr>
+</p:notes>
+</file>
+
+<file path=ppt/notesSlides/notesSlide21.xml><?xml version="1.0" encoding="utf-8"?>
+<p:notes xmlns:a="http://schemas.openxmlformats.org/drawingml/2006/main" xmlns:r="http://schemas.openxmlformats.org/officeDocument/2006/relationships" xmlns:p="http://schemas.openxmlformats.org/presentationml/2006/main">
+  <p:cSld>
+    <p:spTree>
+      <p:nvGrpSpPr>
+        <p:cNvPr id="1" name=""/>
+        <p:cNvGrpSpPr/>
+        <p:nvPr/>
+      </p:nvGrpSpPr>
+      <p:grpSpPr>
+        <a:xfrm>
+          <a:off x="0" y="0"/>
+          <a:ext cx="0" cy="0"/>
+          <a:chOff x="0" y="0"/>
+          <a:chExt cx="0" cy="0"/>
+        </a:xfrm>
+      </p:grpSpPr>
+      <p:sp>
+        <p:nvSpPr>
+          <p:cNvPr id="2" name="Slide Image Placeholder 1"/>
+          <p:cNvSpPr>
+            <a:spLocks noGrp="1" noRot="1" noChangeAspect="1"/>
+          </p:cNvSpPr>
+          <p:nvPr>
+            <p:ph type="sldImg"/>
+          </p:nvPr>
+        </p:nvSpPr>
+        <p:spPr/>
+      </p:sp>
+      <p:sp>
+        <p:nvSpPr>
+          <p:cNvPr id="3" name="Notes Placeholder 2"/>
+          <p:cNvSpPr>
+            <a:spLocks noGrp="1"/>
+          </p:cNvSpPr>
+          <p:nvPr>
+            <p:ph type="body" idx="1"/>
+          </p:nvPr>
+        </p:nvSpPr>
+        <p:spPr/>
+        <p:txBody>
+          <a:bodyPr/>
+          <a:lstStyle/>
+          <a:p>
+            <a:r>
+              <a:rPr lang="en-US" dirty="0"/>
+              <a:t>Zum Nachschlagen die Abkürzungen und Formelzeichen der Präsentation.
+Die Begriffe aus dem FNN-Hinweis: SCR ist das Kurzschlussleistungsverhältnis, also das Verhältnis der Kurzschlussleistung am Netzanschlusspunkt zur Anlagenleistung; es beschreibt, wie stark das Netz an dieser Stelle ist. PEmax ist die maximale Wirkleistung der Einheit, definiert als höchster Zehn-Minuten-Mittelwert. p1 ist die Mitsystem-Wirkleistung der Grundschwingung, die bei der Prüfung aufgezeichnet wird. AV21 und AV32 sind Amplitudenverhältnisse aufeinanderfolgender Überschwinger nach dem Sprung. TR8 ist die Technische Richtlinie 8 der FGW für die Zertifizierung; die TR8-Hinweise im FNN-Hinweis sind die Bewertungsgrundlage.
+Die übrigen Kürzel: ERA ist das Schätzverfahren, das die Autoren des ROMA-Handbuchs verwendet haben. FNET ist das Messnetz, aus dem die mexikanische Netzfrequenzaufzeichnung stammt. NIST ist das amerikanische Normungsinstitut, StRD seine statistischen Referenzdatensätze. SVD ist die Singulärwertzerlegung, RMS der Effektivwert und RMSE die Wurzel aus dem mittleren Fehlerquadrat.</a:t>
+            </a:r>
+            <a:endParaRPr lang="en-US" dirty="0"/>
+          </a:p>
+        </p:txBody>
+      </p:sp>
+      <p:sp>
+        <p:nvSpPr>
+          <p:cNvPr id="4" name="Slide Number Placeholder 3"/>
+          <p:cNvSpPr>
+            <a:spLocks noGrp="1"/>
+          </p:cNvSpPr>
+          <p:nvPr>
+            <p:ph type="sldNum" sz="quarter" idx="10"/>
+          </p:nvPr>
+        </p:nvSpPr>
+        <p:spPr/>
+        <p:txBody>
+          <a:bodyPr/>
+          <a:lstStyle/>
+          <a:p>
+            <a:fld id="{F7021451-1387-4CA6-816F-3879F97B5CBC}" type="slidenum">
+              <a:rPr lang="en-US"/>
+              <a:t>21</a:t>
+            </a:fld>
+            <a:endParaRPr lang="en-US"/>
+          </a:p>
+        </p:txBody>
+      </p:sp>
+    </p:spTree>
+    <p:extLst>
+      <p:ext uri="{BB962C8B-B14F-4D97-AF65-F5344CB8AC3E}">
+        <p14:creationId xmlns:p14="http://schemas.microsoft.com/office/powerpoint/2010/main" val="1024086991"/>
+      </p:ext>
+    </p:extLst>
+  </p:cSld>
+  <p:clrMapOvr>
+    <a:masterClrMapping/>
+  </p:clrMapOvr>
+</p:notes>
+</file>
+
 <file path=ppt/notesSlides/notesSlide3.xml><?xml version="1.0" encoding="utf-8"?>
 <p:notes xmlns:a="http://schemas.openxmlformats.org/drawingml/2006/main" xmlns:r="http://schemas.openxmlformats.org/officeDocument/2006/relationships" xmlns:p="http://schemas.openxmlformats.org/presentationml/2006/main">
   <p:cSld>
@@ -1671,10 +1861,10 @@
             <a:r>
               <a:rPr lang="en-US" dirty="0"/>
               <a:t>Was genau fordert der FNN-Hinweis? Drei Stellen sind für uns wichtig.
-Abschnitt 4.2.1.12: Die netzbildende Einheit muss Frequenz-Leistungspendelungen zwischen 0,05 und 10 Hertz dämpfen. Das Dämpfungsmaß darf 0,5 nicht unterschreiten.
-Abschnitt 5.5.5.8 beschreibt die Prüfung. Bei Messverfahren 1 wird die Frequenz sprungförmig um etwa 250 bis 500 Millihertz geändert, bei 50 bis 75 Prozent der maximalen Wirkleistung. Unsere Messung passt dazu: Die Frequenz springt von 50,0 auf 49,5 Hertz, also um 500 Millihertz.
-Ausgewertet werden die ersten bis zu vier Maxima und Minima der Wirkleistung. Nach dem TR8-Hinweis gilt die Anforderung als erfüllt, wenn das Dämpfungsmaß mindestens 0,45 beträgt. Sind drei Maxima und Minima erkennbar, müssen außerdem die Amplitudenverhältnisse aufeinanderfolgender Extrema unter 0,2 liegen. Beide Grenzen passen zusammen: Bei D gleich 0,45 schrumpft der Ausschlag von einem Extremum zum nächsten auf etwa 0,2.
-Rechts steht die Definition: D ist der Betrag der Abklingrate, geteilt durch den Betrag des Eigenwerts. Für die 2,27-Hertz-Pendelung unserer Messung ergibt das etwa 0,013, weit unter 0,45. Wenn diese Pendelung mechanisch bedingt ist und nicht herausgerechnet wird, bestimmt sie die Bewertung, obwohl sie nichts über die Regelung der Anlage aussagt. Ob sie tatsächlich mechanisch ist, ist in unseren Daten nicht dokumentiert; im Projekt wird sie als Resonanz um 2,2 Hertz angenommen.</a:t>
+Abschnitt 4.2.1.12: Die netzbildende Einheit muss Frequenz-Leistungspendelungen zwischen 0,05 und 10 Hertz dämpfen. Das Dämpfungsmaß darf 0,5 nicht unterschreiten. Nachzuweisen ist das bei einem SCR von mindestens 3. SCR steht für Short Circuit Ratio, auf Deutsch Kurzschlussleistungsverhältnis: das Verhältnis der Kurzschlussleistung am Netzanschlusspunkt zur Leistung der Anlage. Je größer der Wert, desto stärker ist das Netz an dieser Stelle.
+Abschnitt 5.5.5.8 beschreibt die Prüfung. Bei Messverfahren 1 springt die Frequenz um etwa 250 bis 500 Millihertz, während die Einheit 50 bis 75 Prozent ihrer maximalen Wirkleistung PEmax einspeist. Gemessen wird p1, die Mitsystem-Wirkleistung der Grundschwingung. Unsere Messung passt dazu: Die Frequenz springt von 50,0 auf 49,5 Hertz, also um 500 Millihertz.
+Ausgewertet werden die Überschwinger der Wirkleistung nach dem Sprung, gemessen gegenüber dem neuen Endwert. AV21 ist der zweite Überschwinger geteilt durch den ersten, AV32 der dritte durch den zweiten. Nach dem TR8-Hinweis, also der Bewertungsgrundlage für die Zertifizierung, muss das Dämpfungsmaß mindestens 0,45 betragen. Sind drei Extrema erkennbar, müssen beide Amplitudenverhältnisse unter 0,2 liegen. Beide Grenzen passen zusammen: Bei D gleich 0,45 schrumpft ein Überschwinger zum nächsten auf etwa 0,2.
+Rechts steht die Definition des Dämpfungsmaßes. Für die 2,27-Hertz-Pendelung unserer Messung ergibt sie etwa 0,013, weit unter 0,45. Wenn diese Pendelung mechanisch bedingt ist und nicht herausgerechnet wird, bestimmt sie die Bewertung, obwohl sie nichts über die Regelung der Anlage aussagt. Ob sie tatsächlich mechanisch ist, ist in unseren Daten nicht dokumentiert; im Projekt wird eine Resonanz um 2,2 Hertz angenommen.</a:t>
             </a:r>
             <a:endParaRPr lang="en-US" dirty="0"/>
           </a:p>
@@ -1762,9 +1952,9 @@
           <a:p>
             <a:r>
               <a:rPr lang="en-US" dirty="0"/>
-              <a:t>Anhang A.V des FNN-Hinweises beschreibt, wie mechanische Schwingungen aus dem Wirkleistungs- oder Frequenzverlauf entfernt werden dürfen. Die linke Spalte gibt die vier Schritte des Anhangs wieder, die rechte zeigt, wie unser Programm sie umsetzt.
+              <a:t>Anhang A.V des FNN-Hinweises beschreibt, wie mechanische Schwingungen aus dem Wirkleistungs- oder Frequenzverlauf entfernt werden dürfen. Oben steht das Modell aus dem Anhang: eine Summe gedämpfter Kosinusschwingungen, jede mit Amplitude A, Dämpfung d, Frequenz f und Phase phi. Die Tabelle gibt die vier Schritte wieder, rechts daneben unsere Umsetzung.
 Erstens wird der Verlauf vor dem Ereignis abgeschnitten; die Zeit beginnt mit dem Sprung. Bei uns beginnt die Analyse bei einer Sekunde.
-Zweitens wird das Signal in gedämpfte Schwingungen zerlegt, jede mit Amplitude, Dämpfung, Frequenz und Phase. Der Hinweis nennt dafür die Prony-Analyse. Wir verwenden Matrix Pencil: Es schätzt dasselbe Modell, ist aber weniger rauschempfindlich.
+Zweitens wird das Signal nach diesem Modell zerlegt. Der Hinweis nennt dafür die Prony-Analyse. Wir verwenden Matrix Pencil: Es schätzt dasselbe Modell, ist aber weniger rauschempfindlich.
 Drittens werden die gefundenen Frequenzen mit den Herstellerangaben verglichen. Der Hersteller darf bis zu drei mechanische Resonanzfrequenzen nennen, jeweils mit einem Toleranzband von plus minus 0,1 Hertz bzw. plus minus 20 Prozent. Im Projekt nehmen wir eine Resonanz bei 2,2 Hertz an; mit 20 Prozent ergibt das 1,76 bis 2,64 Hertz.
 Viertens werden nur die Komponenten in diesem Band abgezogen. Laut Abschnitt 5.5.5.8.4 müssen beide Verläufe, vor und nach der Bereinigung, im Messbericht dargestellt werden.
 Damit ist auch klar, was das Verfahren nicht darf: beliebige störende Schwingungen entfernen. Sonst ließe sich eine Anlage künstlich besser darstellen.</a:t>
@@ -2041,7 +2231,7 @@
               <a:t>Bevor wir rechnen, lesen wir die Schwingung direkt an der Kurve ab. Gezeigt sind alle 20 001 Messpunkte zwischen zwei und sieben Sekunden; die Werte liegen 0,25 Millisekunden auseinander, das sind 4000 Werte pro Sekunde.
 Wichtig für die Achse: Sie beginnt nicht bei null, sondern zeigt nur den Bereich von 6,85 bis 7,00. Die Schwingung ist in Wirklichkeit nur etwa 1,3 Prozent des Signalniveaus groß. Auf einer Achse ab null wäre sie kaum zu sehen.
 Zwischen dem ersten und dem letzten markierten Maximum liegen zehn Perioden in 4,41 Sekunden. Eine Periode dauert also 0,441 Sekunden, und die Frequenz ist eins durch T, rund 2,268 Hertz.
-Der Ausschlag von Spitze zu Spitze sinkt von 0,087 auf 0,038. Daraus folgt grob eine Abklingrate von minus 0,19 pro Sekunde. Das Modell liefert später fast dieselben Werte. Diese Ablesung ist eine Plausibilitätsprüfung, kein Ersatz für das Modell.
+Der Ausschlag von Spitze zu Spitze sinkt von 0,087 auf 0,038. Der natürliche Logarithmus dieses Verhältnisses, geteilt durch die vergangene Zeit, ergibt grob eine Abklingrate von minus 0,19 pro Sekunde. Das Modell liefert später fast dieselben Werte. Diese Ablesung ist eine Plausibilitätsprüfung, kein Ersatz für das Modell.
 Außerdem steigt die Mittellinie langsam an: Das Signal pendelt um einen sich ändernden Verlauf, nicht um einen festen Wert.</a:t>
             </a:r>
             <a:endParaRPr lang="en-US" dirty="0"/>
@@ -2132,9 +2322,9 @@
               <a:rPr lang="en-US" dirty="0"/>
               <a:t>Bevor wir die Rechenschritte ansehen, die Grundidee.
 Links: Ein einzelner gedämpfter Schwingungsanteil hat eine einfache Eigenschaft. Der nächste Abtastwert entsteht aus dem aktuellen durch Multiplikation mit derselben komplexen Zahl z. Der Betrag von z sagt, wie schnell der Anteil abklingt, der Winkel, wie schnell er sich dreht, also die Frequenz.
-Mitte: Die Messung ist eine Summe vieler solcher Anteile, deshalb kann man nicht einfach zwei Messwerte durcheinander teilen. Aber wir können die ganze Messkurve gegen sich selbst um einen Schritt verschieben. In der verschobenen Matrix H1 ist jeder Anteil mit seinem eigenen z multipliziert.
+Mitte: Die Messung ist eine Summe vieler solcher Anteile, deshalb kann man nicht einfach zwei Messwerte durcheinander teilen. Aber wir können die ganze Messkurve gegen sich selbst um einen Schritt verschieben. Die verschobene Hankel-Matrix H1 enthält dieselben Zeilen wie H0, nur jeweils eine Zeile später. Darin ist jeder Anteil mit seinem eigenen z multipliziert.
 Rechts: Bildet man H1 minus z mal H0, dann verliert diese Matrix genau dann an Rang, wenn z einer der Pole des Signals ist. Ein solcher Ausdruck mit einem freien Parameter heißt Matrizenbüschel, englisch Matrix Pencil. Daher der Name.
-Der Vorteil gegenüber der klassischen Prony-Methode, die der FNN-Hinweis nennt: Prony bestimmt die Pole als Nullstellen eines Polynoms, was empfindlich auf Rauschen reagiert. Matrix Pencil reduziert die Daten zuerst mit einer Singulärwertzerlegung auf die wichtigsten Richtungen und bestimmt die Pole dann als Eigenwerte. Hua und Sarkar haben 1990 gezeigt, dass das bei unbekannter Dämpfung weniger rauschempfindlich ist als die SVD-Prony-Variante.</a:t>
+Der Vorteil gegenüber der klassischen Prony-Methode, die der FNN-Hinweis nennt: Prony bestimmt die Pole als Nullstellen eines Polynoms, was empfindlich auf Rauschen reagiert. Matrix Pencil reduziert die Daten zuerst mit einer Singulärwertzerlegung, kurz SVD, auf die wichtigsten Richtungen und bestimmt die Pole dann als Eigenwerte. Hua und Sarkar haben 1990 gezeigt, dass das bei unbekannter Dämpfung weniger rauschempfindlich ist als die SVD-Prony-Variante.</a:t>
             </a:r>
             <a:endParaRPr lang="en-US" dirty="0"/>
           </a:p>
@@ -2223,10 +2413,10 @@
             <a:r>
               <a:rPr lang="en-US" dirty="0"/>
               <a:t>So kommt das Verfahren von der Kurve zu den Schwingungsparametern.
-Erstens: Wir nehmen P pos von einer bis sieben Sekunden und ziehen den Mittelwert ab. Nach einem Tiefpass werden aus 4000 Werten pro Sekunde 100. Der Tiefpass verhindert, dass beim Ausdünnen schnelle Anteile als langsame Schwingungen erscheinen.
-Zweitens: Aus dieser Folge entstehen zwei Hankel-Matrizen. Jede Zeile ist ein Ausschnitt der Kurve, die nächste Zeile beginnt einen Wert später. H1 ist dieselbe Anordnung, nur um einen Zeitschritt von 0,01 Sekunden verschoben. Bei 601 Werten und 256 Spalten hat jede Matrix 345 Zeilen.
-Drittens: Die Singulärwertzerlegung von H0 behält die zwölf wichtigsten Richtungen. Daraus entsteht die kleine Matrix B mit zwölf Zeilen und Spalten. Ihre Eigenwerte sind die diskreten Pole z: Jeder Pol sagt, mit welchem komplexen Faktor sich ein Modellanteil von Schritt zu Schritt ändert.
-Viertens: Die Gewichte aller Anteile werden gemeinsam auf dem ursprünglichen Messraster angepasst. Abgezogen wird ein Anteil nur, wenn die Prüfregeln erfüllt sind: Fitfehler höchstens zehn Prozent, Pol im Zielband, relative Dämpfung höchstens 0,3 und ein begrenzter Abzug. Diese Regeln sind heuristische Schutzregeln, kein physikalischer Nachweis.</a:t>
+Erstens: Wir nehmen P pos von einer bis sieben Sekunden und ziehen den Mittelwert ab. Nach einem Tiefpass werden aus 4000 Werten pro Sekunde 100. Der Tiefpass verhindert, dass beim Ausdünnen schnelle Anteile als langsame Schwingungen erscheinen. Die Formel rechts: x von k ist der Leistungswert zum k-ten Zeitpunkt nach t0, abzüglich des Mittelwerts; zwischen zwei Werten liegen 0,01 Sekunden.
+Zweitens: Aus dieser Folge entstehen zwei Hankel-Matrizen. Jede Zeile ist ein Ausschnitt der Kurve, die nächste Zeile beginnt einen Wert später. H1 ist dieselbe Anordnung, nur um einen Zeitschritt verschoben. Bei 601 Werten und 256 Spalten hat jede Matrix 345 Zeilen.
+Drittens: Die Singulärwertzerlegung von H0 behält die zwölf wichtigsten Richtungen. Daraus entsteht die kleine Matrix B mit zwölf Zeilen und Spalten. Ihre Eigenwerte sind die diskreten Pole z. Wie das konkret aussieht, zeigt die nächste Folie an einem kleinen Zahlenbeispiel.
+Viertens: Die Gewichte aller Anteile werden gemeinsam auf dem ursprünglichen Messraster angepasst. Abgezogen wird ein Anteil nur, wenn die Prüfregeln erfüllt sind: relativer Fehler höchstens zehn Prozent, Pol im Zielband, relative Dämpfung höchstens 0,3 und ein begrenzter Abzug. Diese Regeln sind heuristische Schutzregeln, kein physikalischer Nachweis.</a:t>
             </a:r>
             <a:endParaRPr lang="en-US" dirty="0"/>
           </a:p>
@@ -3237,7 +3427,7 @@
                 <a:ea typeface="Consolas" pitchFamily="34" charset="-122"/>
                 <a:cs typeface="Consolas" pitchFamily="34" charset="-120"/>
               </a:rPr>
-              <a:t>NEGATIVER SPRUNG · DOMINANTER POL</a:t>
+              <a:t>REDUZIERTE MATRIX SCHRITT FÜR SCHRITT</a:t>
             </a:r>
             <a:endParaRPr lang="en-US" sz="1200" dirty="0"/>
           </a:p>
@@ -3278,7 +3468,7 @@
                 <a:ea typeface="Calibri" pitchFamily="34" charset="-122"/>
                 <a:cs typeface="Calibri" pitchFamily="34" charset="-120"/>
               </a:rPr>
-              <a:t>Vom Pol zu Frequenz und Abklingrate</a:t>
+              <a:t>Rechenbeispiel: von 7 Messwerten zu B</a:t>
             </a:r>
             <a:endParaRPr lang="en-US" sz="3200" dirty="0"/>
           </a:p>
@@ -3320,7 +3510,7 @@
                 <a:ea typeface="Calibri" pitchFamily="34" charset="-122"/>
                 <a:cs typeface="Calibri" pitchFamily="34" charset="-120"/>
               </a:rPr>
-              <a:t>Ordnung 12, Schätzraster 100 Werte/s · Der konjugierte Pol z̄ gehört zur selben reellen Schwingung</a:t>
+              <a:t>Im Projekt dieselben Schritte mit 601 Werten: H0, H1 je 345 × 256, r = 12, B ist 12 × 12</a:t>
             </a:r>
             <a:endParaRPr lang="en-US" sz="1200" dirty="0"/>
           </a:p>
@@ -3328,14 +3518,338 @@
       </p:sp>
       <p:sp>
         <p:nvSpPr>
-          <p:cNvPr id="6" name="Text 3"/>
+          <p:cNvPr id="6" name="Shape 3"/>
+          <p:cNvSpPr/>
+          <p:nvPr/>
+        </p:nvSpPr>
+        <p:spPr>
+          <a:xfrm>
+            <a:off x="812800" y="1828800"/>
+            <a:ext cx="5181600" cy="1879600"/>
+          </a:xfrm>
+          <a:prstGeom prst="roundRect">
+            <a:avLst>
+              <a:gd name="adj" fmla="val 5351"/>
+            </a:avLst>
+          </a:prstGeom>
+          <a:solidFill>
+            <a:srgbClr val="FCFCFB"/>
+          </a:solidFill>
+          <a:ln w="9525">
+            <a:solidFill>
+              <a:srgbClr val="E1E0D9"/>
+            </a:solidFill>
+            <a:prstDash val="solid"/>
+          </a:ln>
+        </p:spPr>
+      </p:sp>
+      <p:sp>
+        <p:nvSpPr>
+          <p:cNvPr id="7" name="Text 4"/>
           <p:cNvSpPr txBox="1"/>
           <p:nvPr/>
         </p:nvSpPr>
         <p:spPr>
           <a:xfrm>
-            <a:off x="812800" y="2286000"/>
-            <a:ext cx="5080000" cy="215900"/>
+            <a:off x="990600" y="1981200"/>
+            <a:ext cx="4826000" cy="266700"/>
+          </a:xfrm>
+          <a:prstGeom prst="rect">
+            <a:avLst/>
+          </a:prstGeom>
+          <a:noFill/>
+          <a:ln/>
+        </p:spPr>
+        <p:txBody>
+          <a:bodyPr wrap="square" lIns="0" tIns="0" rIns="0" bIns="0" rtlCol="0" anchor="t"/>
+          <a:lstStyle/>
+          <a:p>
+            <a:pPr indent="0" marL="0">
+              <a:lnSpc>
+                <a:spcPct val="115000"/>
+              </a:lnSpc>
+              <a:buNone/>
+            </a:pPr>
+            <a:r>
+              <a:rPr lang="en-US" sz="1500" b="1" dirty="0">
+                <a:solidFill>
+                  <a:srgbClr val="14202E"/>
+                </a:solidFill>
+                <a:latin typeface="Calibri" pitchFamily="34" charset="0"/>
+                <a:ea typeface="Calibri" pitchFamily="34" charset="-122"/>
+                <a:cs typeface="Calibri" pitchFamily="34" charset="-120"/>
+              </a:rPr>
+              <a:t>1  Messwerte</a:t>
+            </a:r>
+            <a:endParaRPr lang="en-US" sz="1500" dirty="0"/>
+          </a:p>
+        </p:txBody>
+      </p:sp>
+      <p:sp>
+        <p:nvSpPr>
+          <p:cNvPr id="8" name="Shape 5"/>
+          <p:cNvSpPr/>
+          <p:nvPr/>
+        </p:nvSpPr>
+        <p:spPr>
+          <a:xfrm>
+            <a:off x="6197600" y="1828800"/>
+            <a:ext cx="5181600" cy="1879600"/>
+          </a:xfrm>
+          <a:prstGeom prst="roundRect">
+            <a:avLst>
+              <a:gd name="adj" fmla="val 5351"/>
+            </a:avLst>
+          </a:prstGeom>
+          <a:solidFill>
+            <a:srgbClr val="FCFCFB"/>
+          </a:solidFill>
+          <a:ln w="9525">
+            <a:solidFill>
+              <a:srgbClr val="E1E0D9"/>
+            </a:solidFill>
+            <a:prstDash val="solid"/>
+          </a:ln>
+        </p:spPr>
+      </p:sp>
+      <p:sp>
+        <p:nvSpPr>
+          <p:cNvPr id="9" name="Text 6"/>
+          <p:cNvSpPr txBox="1"/>
+          <p:nvPr/>
+        </p:nvSpPr>
+        <p:spPr>
+          <a:xfrm>
+            <a:off x="6375400" y="1981200"/>
+            <a:ext cx="4826000" cy="266700"/>
+          </a:xfrm>
+          <a:prstGeom prst="rect">
+            <a:avLst/>
+          </a:prstGeom>
+          <a:noFill/>
+          <a:ln/>
+        </p:spPr>
+        <p:txBody>
+          <a:bodyPr wrap="square" lIns="0" tIns="0" rIns="0" bIns="0" rtlCol="0" anchor="t"/>
+          <a:lstStyle/>
+          <a:p>
+            <a:pPr indent="0" marL="0">
+              <a:lnSpc>
+                <a:spcPct val="115000"/>
+              </a:lnSpc>
+              <a:buNone/>
+            </a:pPr>
+            <a:r>
+              <a:rPr lang="en-US" sz="1500" b="1" dirty="0">
+                <a:solidFill>
+                  <a:srgbClr val="14202E"/>
+                </a:solidFill>
+                <a:latin typeface="Calibri" pitchFamily="34" charset="0"/>
+                <a:ea typeface="Calibri" pitchFamily="34" charset="-122"/>
+                <a:cs typeface="Calibri" pitchFamily="34" charset="-120"/>
+              </a:rPr>
+              <a:t>2  Hankel-Matrizen mit L = 3 Spalten</a:t>
+            </a:r>
+            <a:endParaRPr lang="en-US" sz="1500" dirty="0"/>
+          </a:p>
+        </p:txBody>
+      </p:sp>
+      <p:sp>
+        <p:nvSpPr>
+          <p:cNvPr id="10" name="Shape 7"/>
+          <p:cNvSpPr/>
+          <p:nvPr/>
+        </p:nvSpPr>
+        <p:spPr>
+          <a:xfrm>
+            <a:off x="812800" y="3860800"/>
+            <a:ext cx="5181600" cy="1879600"/>
+          </a:xfrm>
+          <a:prstGeom prst="roundRect">
+            <a:avLst>
+              <a:gd name="adj" fmla="val 5351"/>
+            </a:avLst>
+          </a:prstGeom>
+          <a:solidFill>
+            <a:srgbClr val="FCFCFB"/>
+          </a:solidFill>
+          <a:ln w="9525">
+            <a:solidFill>
+              <a:srgbClr val="E1E0D9"/>
+            </a:solidFill>
+            <a:prstDash val="solid"/>
+          </a:ln>
+        </p:spPr>
+      </p:sp>
+      <p:sp>
+        <p:nvSpPr>
+          <p:cNvPr id="11" name="Text 8"/>
+          <p:cNvSpPr txBox="1"/>
+          <p:nvPr/>
+        </p:nvSpPr>
+        <p:spPr>
+          <a:xfrm>
+            <a:off x="990600" y="4013200"/>
+            <a:ext cx="4826000" cy="266700"/>
+          </a:xfrm>
+          <a:prstGeom prst="rect">
+            <a:avLst/>
+          </a:prstGeom>
+          <a:noFill/>
+          <a:ln/>
+        </p:spPr>
+        <p:txBody>
+          <a:bodyPr wrap="square" lIns="0" tIns="0" rIns="0" bIns="0" rtlCol="0" anchor="t"/>
+          <a:lstStyle/>
+          <a:p>
+            <a:pPr indent="0" marL="0">
+              <a:lnSpc>
+                <a:spcPct val="115000"/>
+              </a:lnSpc>
+              <a:buNone/>
+            </a:pPr>
+            <a:r>
+              <a:rPr lang="en-US" sz="1500" b="1" dirty="0">
+                <a:solidFill>
+                  <a:srgbClr val="14202E"/>
+                </a:solidFill>
+                <a:latin typeface="Calibri" pitchFamily="34" charset="0"/>
+                <a:ea typeface="Calibri" pitchFamily="34" charset="-122"/>
+                <a:cs typeface="Calibri" pitchFamily="34" charset="-120"/>
+              </a:rPr>
+              <a:t>3  Singulärwertzerlegung von H0</a:t>
+            </a:r>
+            <a:endParaRPr lang="en-US" sz="1500" dirty="0"/>
+          </a:p>
+        </p:txBody>
+      </p:sp>
+      <p:sp>
+        <p:nvSpPr>
+          <p:cNvPr id="12" name="Shape 9"/>
+          <p:cNvSpPr/>
+          <p:nvPr/>
+        </p:nvSpPr>
+        <p:spPr>
+          <a:xfrm>
+            <a:off x="6197600" y="3860800"/>
+            <a:ext cx="5181600" cy="1879600"/>
+          </a:xfrm>
+          <a:prstGeom prst="roundRect">
+            <a:avLst>
+              <a:gd name="adj" fmla="val 5351"/>
+            </a:avLst>
+          </a:prstGeom>
+          <a:solidFill>
+            <a:srgbClr val="FCFCFB"/>
+          </a:solidFill>
+          <a:ln w="9525">
+            <a:solidFill>
+              <a:srgbClr val="E1E0D9"/>
+            </a:solidFill>
+            <a:prstDash val="solid"/>
+          </a:ln>
+        </p:spPr>
+      </p:sp>
+      <p:sp>
+        <p:nvSpPr>
+          <p:cNvPr id="13" name="Text 10"/>
+          <p:cNvSpPr txBox="1"/>
+          <p:nvPr/>
+        </p:nvSpPr>
+        <p:spPr>
+          <a:xfrm>
+            <a:off x="6375400" y="4013200"/>
+            <a:ext cx="4826000" cy="266700"/>
+          </a:xfrm>
+          <a:prstGeom prst="rect">
+            <a:avLst/>
+          </a:prstGeom>
+          <a:noFill/>
+          <a:ln/>
+        </p:spPr>
+        <p:txBody>
+          <a:bodyPr wrap="square" lIns="0" tIns="0" rIns="0" bIns="0" rtlCol="0" anchor="t"/>
+          <a:lstStyle/>
+          <a:p>
+            <a:pPr indent="0" marL="0">
+              <a:lnSpc>
+                <a:spcPct val="115000"/>
+              </a:lnSpc>
+              <a:buNone/>
+            </a:pPr>
+            <a:r>
+              <a:rPr lang="en-US" sz="1500" b="1" dirty="0">
+                <a:solidFill>
+                  <a:srgbClr val="14202E"/>
+                </a:solidFill>
+                <a:latin typeface="Calibri" pitchFamily="34" charset="0"/>
+                <a:ea typeface="Calibri" pitchFamily="34" charset="-122"/>
+                <a:cs typeface="Calibri" pitchFamily="34" charset="-120"/>
+              </a:rPr>
+              <a:t>4  Reduzierte Matrix und Eigenwerte</a:t>
+            </a:r>
+            <a:endParaRPr lang="en-US" sz="1500" dirty="0"/>
+          </a:p>
+        </p:txBody>
+      </p:sp>
+      <p:pic>
+        <p:nvPicPr>
+          <p:cNvPr id="14" name="Image 0" descr="b_x">    </p:cNvPr>
+          <p:cNvPicPr>
+            <a:picLocks noChangeAspect="1"/>
+          </p:cNvPicPr>
+          <p:nvPr/>
+        </p:nvPicPr>
+        <p:blipFill>
+          <a:blip r:embed="rId1"/>
+          <a:stretch>
+            <a:fillRect/>
+          </a:stretch>
+        </p:blipFill>
+        <p:spPr>
+          <a:xfrm>
+            <a:off x="990600" y="2197100"/>
+            <a:ext cx="2679700" cy="330200"/>
+          </a:xfrm>
+          <a:prstGeom prst="rect">
+            <a:avLst/>
+          </a:prstGeom>
+        </p:spPr>
+      </p:pic>
+      <p:pic>
+        <p:nvPicPr>
+          <p:cNvPr id="15" name="Image 1" descr="b_xv">    </p:cNvPr>
+          <p:cNvPicPr>
+            <a:picLocks noChangeAspect="1"/>
+          </p:cNvPicPr>
+          <p:nvPr/>
+        </p:nvPicPr>
+        <p:blipFill>
+          <a:blip r:embed="rId2"/>
+          <a:stretch>
+            <a:fillRect/>
+          </a:stretch>
+        </p:blipFill>
+        <p:spPr>
+          <a:xfrm>
+            <a:off x="990600" y="2603500"/>
+            <a:ext cx="3924300" cy="266700"/>
+          </a:xfrm>
+          <a:prstGeom prst="rect">
+            <a:avLst/>
+          </a:prstGeom>
+        </p:spPr>
+      </p:pic>
+      <p:sp>
+        <p:nvSpPr>
+          <p:cNvPr id="16" name="Text 11"/>
+          <p:cNvSpPr txBox="1"/>
+          <p:nvPr/>
+        </p:nvSpPr>
+        <p:spPr>
+          <a:xfrm>
+            <a:off x="990600" y="2984500"/>
+            <a:ext cx="4826000" cy="508000"/>
           </a:xfrm>
           <a:prstGeom prst="rect">
             <a:avLst/>
@@ -3356,28 +3870,100 @@
             <a:r>
               <a:rPr lang="en-US" sz="1200" dirty="0">
                 <a:solidFill>
-                  <a:srgbClr val="1C5CAB"/>
+                  <a:srgbClr val="44505E"/>
                 </a:solidFill>
-                <a:latin typeface="Consolas" pitchFamily="34" charset="0"/>
-                <a:ea typeface="Consolas" pitchFamily="34" charset="-122"/>
-                <a:cs typeface="Consolas" pitchFamily="34" charset="-120"/>
+                <a:latin typeface="Calibri" pitchFamily="34" charset="0"/>
+                <a:ea typeface="Calibri" pitchFamily="34" charset="-122"/>
+                <a:cs typeface="Calibri" pitchFamily="34" charset="-120"/>
               </a:rPr>
-              <a:t>Eigenwert von B</a:t>
+              <a:t>Eine gedämpfte Schwingung mit r und θ des Pols der negativen Sprungantwort, Δt = 0,01 s.</a:t>
             </a:r>
             <a:endParaRPr lang="en-US" sz="1200" dirty="0"/>
           </a:p>
         </p:txBody>
       </p:sp>
-      <p:sp>
-        <p:nvSpPr>
-          <p:cNvPr id="7" name="Text 4"/>
+      <p:pic>
+        <p:nvPicPr>
+          <p:cNvPr id="17" name="Image 2" descr="b_h0">    </p:cNvPr>
+          <p:cNvPicPr>
+            <a:picLocks noChangeAspect="1"/>
+          </p:cNvPicPr>
+          <p:nvPr/>
+        </p:nvPicPr>
+        <p:blipFill>
+          <a:blip r:embed="rId3"/>
+          <a:stretch>
+            <a:fillRect/>
+          </a:stretch>
+        </p:blipFill>
+        <p:spPr>
+          <a:xfrm>
+            <a:off x="6375400" y="2222500"/>
+            <a:ext cx="2209800" cy="889000"/>
+          </a:xfrm>
+          <a:prstGeom prst="rect">
+            <a:avLst/>
+          </a:prstGeom>
+        </p:spPr>
+      </p:pic>
+      <p:pic>
+        <p:nvPicPr>
+          <p:cNvPr id="18" name="Image 3" descr="b_h1">    </p:cNvPr>
+          <p:cNvPicPr>
+            <a:picLocks noChangeAspect="1"/>
+          </p:cNvPicPr>
+          <p:nvPr/>
+        </p:nvPicPr>
+        <p:blipFill>
+          <a:blip r:embed="rId4"/>
+          <a:stretch>
+            <a:fillRect/>
+          </a:stretch>
+        </p:blipFill>
+        <p:spPr>
+          <a:xfrm>
+            <a:off x="8737600" y="2222500"/>
+            <a:ext cx="2209800" cy="889000"/>
+          </a:xfrm>
+          <a:prstGeom prst="rect">
+            <a:avLst/>
+          </a:prstGeom>
+        </p:spPr>
+      </p:pic>
+      <p:pic>
+        <p:nvPicPr>
+          <p:cNvPr id="19" name="Image 4" descr="b_s">    </p:cNvPr>
+          <p:cNvPicPr>
+            <a:picLocks noChangeAspect="1"/>
+          </p:cNvPicPr>
+          <p:nvPr/>
+        </p:nvPicPr>
+        <p:blipFill>
+          <a:blip r:embed="rId5"/>
+          <a:stretch>
+            <a:fillRect/>
+          </a:stretch>
+        </p:blipFill>
+        <p:spPr>
+          <a:xfrm>
+            <a:off x="990600" y="4292600"/>
+            <a:ext cx="3505200" cy="254000"/>
+          </a:xfrm>
+          <a:prstGeom prst="rect">
+            <a:avLst/>
+          </a:prstGeom>
+        </p:spPr>
+      </p:pic>
+      <p:sp>
+        <p:nvSpPr>
+          <p:cNvPr id="20" name="Text 12"/>
           <p:cNvSpPr txBox="1"/>
           <p:nvPr/>
         </p:nvSpPr>
         <p:spPr>
           <a:xfrm>
-            <a:off x="812800" y="2603500"/>
-            <a:ext cx="5080000" cy="508000"/>
+            <a:off x="990600" y="4673600"/>
+            <a:ext cx="4826000" cy="698500"/>
           </a:xfrm>
           <a:prstGeom prst="rect">
             <a:avLst/>
@@ -3396,133 +3982,7 @@
               <a:buNone/>
             </a:pPr>
             <a:r>
-              <a:rPr lang="en-US" sz="3200" b="1" dirty="0">
-                <a:solidFill>
-                  <a:srgbClr val="14202E"/>
-                </a:solidFill>
-                <a:latin typeface="Consolas" pitchFamily="34" charset="0"/>
-                <a:ea typeface="Consolas" pitchFamily="34" charset="-122"/>
-                <a:cs typeface="Consolas" pitchFamily="34" charset="-120"/>
-              </a:rPr>
-              <a:t>z ≈ 0,988 + 0,142 i</a:t>
-            </a:r>
-            <a:endParaRPr lang="en-US" sz="3200" dirty="0"/>
-          </a:p>
-        </p:txBody>
-      </p:sp>
-      <p:sp>
-        <p:nvSpPr>
-          <p:cNvPr id="8" name="Text 5"/>
-          <p:cNvSpPr txBox="1"/>
-          <p:nvPr/>
-        </p:nvSpPr>
-        <p:spPr>
-          <a:xfrm>
-            <a:off x="812800" y="3302000"/>
-            <a:ext cx="5080000" cy="266700"/>
-          </a:xfrm>
-          <a:prstGeom prst="rect">
-            <a:avLst/>
-          </a:prstGeom>
-          <a:noFill/>
-          <a:ln/>
-        </p:spPr>
-        <p:txBody>
-          <a:bodyPr wrap="square" lIns="0" tIns="0" rIns="0" bIns="0" rtlCol="0" anchor="t"/>
-          <a:lstStyle/>
-          <a:p>
-            <a:pPr indent="0" marL="0">
-              <a:lnSpc>
-                <a:spcPct val="115000"/>
-              </a:lnSpc>
-              <a:buNone/>
-            </a:pPr>
-            <a:r>
-              <a:rPr lang="en-US" sz="1500" dirty="0">
-                <a:solidFill>
-                  <a:srgbClr val="14202E"/>
-                </a:solidFill>
-                <a:latin typeface="Calibri" pitchFamily="34" charset="0"/>
-                <a:ea typeface="Calibri" pitchFamily="34" charset="-122"/>
-                <a:cs typeface="Calibri" pitchFamily="34" charset="-120"/>
-              </a:rPr>
-              <a:t>Betrag r = |z| ≈ 0,998084</a:t>
-            </a:r>
-            <a:endParaRPr lang="en-US" sz="1500" dirty="0"/>
-          </a:p>
-        </p:txBody>
-      </p:sp>
-      <p:sp>
-        <p:nvSpPr>
-          <p:cNvPr id="9" name="Text 6"/>
-          <p:cNvSpPr txBox="1"/>
-          <p:nvPr/>
-        </p:nvSpPr>
-        <p:spPr>
-          <a:xfrm>
-            <a:off x="812800" y="3619500"/>
-            <a:ext cx="5080000" cy="266700"/>
-          </a:xfrm>
-          <a:prstGeom prst="rect">
-            <a:avLst/>
-          </a:prstGeom>
-          <a:noFill/>
-          <a:ln/>
-        </p:spPr>
-        <p:txBody>
-          <a:bodyPr wrap="square" lIns="0" tIns="0" rIns="0" bIns="0" rtlCol="0" anchor="t"/>
-          <a:lstStyle/>
-          <a:p>
-            <a:pPr indent="0" marL="0">
-              <a:lnSpc>
-                <a:spcPct val="115000"/>
-              </a:lnSpc>
-              <a:buNone/>
-            </a:pPr>
-            <a:r>
-              <a:rPr lang="en-US" sz="1500" dirty="0">
-                <a:solidFill>
-                  <a:srgbClr val="14202E"/>
-                </a:solidFill>
-                <a:latin typeface="Calibri" pitchFamily="34" charset="0"/>
-                <a:ea typeface="Calibri" pitchFamily="34" charset="-122"/>
-                <a:cs typeface="Calibri" pitchFamily="34" charset="-120"/>
-              </a:rPr>
-              <a:t>Winkel θ = atan2(Im z, Re z) ≈ 0,1425 rad</a:t>
-            </a:r>
-            <a:endParaRPr lang="en-US" sz="1500" dirty="0"/>
-          </a:p>
-        </p:txBody>
-      </p:sp>
-      <p:sp>
-        <p:nvSpPr>
-          <p:cNvPr id="10" name="Text 7"/>
-          <p:cNvSpPr txBox="1"/>
-          <p:nvPr/>
-        </p:nvSpPr>
-        <p:spPr>
-          <a:xfrm>
-            <a:off x="812800" y="4064000"/>
-            <a:ext cx="5080000" cy="571500"/>
-          </a:xfrm>
-          <a:prstGeom prst="rect">
-            <a:avLst/>
-          </a:prstGeom>
-          <a:noFill/>
-          <a:ln/>
-        </p:spPr>
-        <p:txBody>
-          <a:bodyPr wrap="square" lIns="0" tIns="0" rIns="0" bIns="0" rtlCol="0" anchor="t"/>
-          <a:lstStyle/>
-          <a:p>
-            <a:pPr indent="0" marL="0">
-              <a:lnSpc>
-                <a:spcPct val="115000"/>
-              </a:lnSpc>
-              <a:buNone/>
-            </a:pPr>
-            <a:r>
-              <a:rPr lang="en-US" sz="1500" dirty="0">
+              <a:rPr lang="en-US" sz="1200" dirty="0">
                 <a:solidFill>
                   <a:srgbClr val="44505E"/>
                 </a:solidFill>
@@ -3530,360 +3990,60 @@
                 <a:ea typeface="Calibri" pitchFamily="34" charset="-122"/>
                 <a:cs typeface="Calibri" pitchFamily="34" charset="-120"/>
               </a:rPr>
-              <a:t>Beide beschreiben die Änderung in einem Abtastschritt Δt = 0,01 s.</a:t>
+              <a:t>Nur zwei Richtungen tragen Signal: Eine reelle Schwingung braucht ein Polpaar. U₂, Σ₂, V₂ behalten nur diese beiden Richtungen.</a:t>
             </a:r>
-            <a:endParaRPr lang="en-US" sz="1500" dirty="0"/>
-          </a:p>
-        </p:txBody>
-      </p:sp>
-      <p:sp>
-        <p:nvSpPr>
-          <p:cNvPr id="11" name="Shape 8"/>
-          <p:cNvSpPr/>
-          <p:nvPr/>
-        </p:nvSpPr>
-        <p:spPr>
-          <a:xfrm>
-            <a:off x="6299200" y="1879600"/>
-            <a:ext cx="5080000" cy="1473200"/>
-          </a:xfrm>
-          <a:prstGeom prst="roundRect">
-            <a:avLst>
-              <a:gd name="adj" fmla="val 6828"/>
-            </a:avLst>
-          </a:prstGeom>
-          <a:solidFill>
-            <a:srgbClr val="FCFCFB"/>
-          </a:solidFill>
-          <a:ln w="9525">
-            <a:solidFill>
-              <a:srgbClr val="E1E0D9"/>
-            </a:solidFill>
-            <a:prstDash val="solid"/>
-          </a:ln>
-        </p:spPr>
-      </p:sp>
-      <p:sp>
-        <p:nvSpPr>
-          <p:cNvPr id="12" name="Text 9"/>
-          <p:cNvSpPr txBox="1"/>
-          <p:nvPr/>
-        </p:nvSpPr>
-        <p:spPr>
-          <a:xfrm>
-            <a:off x="6527800" y="2082800"/>
-            <a:ext cx="4635500" cy="317500"/>
-          </a:xfrm>
-          <a:prstGeom prst="rect">
-            <a:avLst/>
-          </a:prstGeom>
-          <a:noFill/>
-          <a:ln/>
-        </p:spPr>
-        <p:txBody>
-          <a:bodyPr wrap="square" lIns="0" tIns="0" rIns="0" bIns="0" rtlCol="0" anchor="t"/>
-          <a:lstStyle/>
-          <a:p>
-            <a:pPr indent="0" marL="0">
-              <a:lnSpc>
-                <a:spcPct val="115000"/>
-              </a:lnSpc>
-              <a:buNone/>
-            </a:pPr>
-            <a:r>
-              <a:rPr lang="en-US" sz="2000" b="1" dirty="0">
-                <a:solidFill>
-                  <a:srgbClr val="14202E"/>
-                </a:solidFill>
-                <a:latin typeface="Calibri" pitchFamily="34" charset="0"/>
-                <a:ea typeface="Calibri" pitchFamily="34" charset="-122"/>
-                <a:cs typeface="Calibri" pitchFamily="34" charset="-120"/>
-              </a:rPr>
-              <a:t>Frequenz</a:t>
-            </a:r>
-            <a:endParaRPr lang="en-US" sz="2000" dirty="0"/>
-          </a:p>
-        </p:txBody>
-      </p:sp>
-      <p:sp>
-        <p:nvSpPr>
-          <p:cNvPr id="13" name="Text 10"/>
-          <p:cNvSpPr txBox="1"/>
-          <p:nvPr/>
-        </p:nvSpPr>
-        <p:spPr>
-          <a:xfrm>
-            <a:off x="6527800" y="2476500"/>
-            <a:ext cx="4635500" cy="266700"/>
-          </a:xfrm>
-          <a:prstGeom prst="rect">
-            <a:avLst/>
-          </a:prstGeom>
-          <a:noFill/>
-          <a:ln/>
-        </p:spPr>
-        <p:txBody>
-          <a:bodyPr wrap="square" lIns="0" tIns="0" rIns="0" bIns="0" rtlCol="0" anchor="t"/>
-          <a:lstStyle/>
-          <a:p>
-            <a:pPr indent="0" marL="0">
-              <a:lnSpc>
-                <a:spcPct val="115000"/>
-              </a:lnSpc>
-              <a:buNone/>
-            </a:pPr>
-            <a:r>
-              <a:rPr lang="en-US" sz="1500" dirty="0">
-                <a:solidFill>
-                  <a:srgbClr val="14202E"/>
-                </a:solidFill>
-                <a:latin typeface="Consolas" pitchFamily="34" charset="0"/>
-                <a:ea typeface="Consolas" pitchFamily="34" charset="-122"/>
-                <a:cs typeface="Consolas" pitchFamily="34" charset="-120"/>
-              </a:rPr>
-              <a:t>f = θ / (2π · Δt)</a:t>
-            </a:r>
-            <a:endParaRPr lang="en-US" sz="1500" dirty="0"/>
-          </a:p>
-        </p:txBody>
-      </p:sp>
-      <p:sp>
-        <p:nvSpPr>
-          <p:cNvPr id="14" name="Text 11"/>
-          <p:cNvSpPr txBox="1"/>
-          <p:nvPr/>
-        </p:nvSpPr>
-        <p:spPr>
-          <a:xfrm>
-            <a:off x="6527800" y="2819400"/>
-            <a:ext cx="4635500" cy="266700"/>
-          </a:xfrm>
-          <a:prstGeom prst="rect">
-            <a:avLst/>
-          </a:prstGeom>
-          <a:noFill/>
-          <a:ln/>
-        </p:spPr>
-        <p:txBody>
-          <a:bodyPr wrap="square" lIns="0" tIns="0" rIns="0" bIns="0" rtlCol="0" anchor="t"/>
-          <a:lstStyle/>
-          <a:p>
-            <a:pPr indent="0" marL="0">
-              <a:lnSpc>
-                <a:spcPct val="115000"/>
-              </a:lnSpc>
-              <a:buNone/>
-            </a:pPr>
-            <a:r>
-              <a:rPr lang="en-US" sz="1500" dirty="0">
-                <a:solidFill>
-                  <a:srgbClr val="1C5CAB"/>
-                </a:solidFill>
-                <a:latin typeface="Consolas" pitchFamily="34" charset="0"/>
-                <a:ea typeface="Consolas" pitchFamily="34" charset="-122"/>
-                <a:cs typeface="Consolas" pitchFamily="34" charset="-120"/>
-              </a:rPr>
-              <a:t>≈ 0,1425 / 0,0628 s ≈ 2,268 Hz</a:t>
-            </a:r>
-            <a:endParaRPr lang="en-US" sz="1500" dirty="0"/>
-          </a:p>
-        </p:txBody>
-      </p:sp>
-      <p:sp>
-        <p:nvSpPr>
-          <p:cNvPr id="15" name="Shape 12"/>
-          <p:cNvSpPr/>
-          <p:nvPr/>
-        </p:nvSpPr>
-        <p:spPr>
-          <a:xfrm>
-            <a:off x="6299200" y="3505200"/>
-            <a:ext cx="5080000" cy="1841500"/>
-          </a:xfrm>
-          <a:prstGeom prst="roundRect">
-            <a:avLst>
-              <a:gd name="adj" fmla="val 5462"/>
-            </a:avLst>
-          </a:prstGeom>
-          <a:solidFill>
-            <a:srgbClr val="FCFCFB"/>
-          </a:solidFill>
-          <a:ln w="9525">
-            <a:solidFill>
-              <a:srgbClr val="E1E0D9"/>
-            </a:solidFill>
-            <a:prstDash val="solid"/>
-          </a:ln>
-        </p:spPr>
-      </p:sp>
-      <p:sp>
-        <p:nvSpPr>
-          <p:cNvPr id="16" name="Text 13"/>
-          <p:cNvSpPr txBox="1"/>
-          <p:nvPr/>
-        </p:nvSpPr>
-        <p:spPr>
-          <a:xfrm>
-            <a:off x="6527800" y="3708400"/>
-            <a:ext cx="4635500" cy="317500"/>
-          </a:xfrm>
-          <a:prstGeom prst="rect">
-            <a:avLst/>
-          </a:prstGeom>
-          <a:noFill/>
-          <a:ln/>
-        </p:spPr>
-        <p:txBody>
-          <a:bodyPr wrap="square" lIns="0" tIns="0" rIns="0" bIns="0" rtlCol="0" anchor="t"/>
-          <a:lstStyle/>
-          <a:p>
-            <a:pPr indent="0" marL="0">
-              <a:lnSpc>
-                <a:spcPct val="115000"/>
-              </a:lnSpc>
-              <a:buNone/>
-            </a:pPr>
-            <a:r>
-              <a:rPr lang="en-US" sz="2000" b="1" dirty="0">
-                <a:solidFill>
-                  <a:srgbClr val="14202E"/>
-                </a:solidFill>
-                <a:latin typeface="Calibri" pitchFamily="34" charset="0"/>
-                <a:ea typeface="Calibri" pitchFamily="34" charset="-122"/>
-                <a:cs typeface="Calibri" pitchFamily="34" charset="-120"/>
-              </a:rPr>
-              <a:t>Abklingrate</a:t>
-            </a:r>
-            <a:endParaRPr lang="en-US" sz="2000" dirty="0"/>
-          </a:p>
-        </p:txBody>
-      </p:sp>
-      <p:sp>
-        <p:nvSpPr>
-          <p:cNvPr id="17" name="Text 14"/>
-          <p:cNvSpPr txBox="1"/>
-          <p:nvPr/>
-        </p:nvSpPr>
-        <p:spPr>
-          <a:xfrm>
-            <a:off x="6527800" y="4102100"/>
-            <a:ext cx="4635500" cy="266700"/>
-          </a:xfrm>
-          <a:prstGeom prst="rect">
-            <a:avLst/>
-          </a:prstGeom>
-          <a:noFill/>
-          <a:ln/>
-        </p:spPr>
-        <p:txBody>
-          <a:bodyPr wrap="square" lIns="0" tIns="0" rIns="0" bIns="0" rtlCol="0" anchor="t"/>
-          <a:lstStyle/>
-          <a:p>
-            <a:pPr indent="0" marL="0">
-              <a:lnSpc>
-                <a:spcPct val="115000"/>
-              </a:lnSpc>
-              <a:buNone/>
-            </a:pPr>
-            <a:r>
-              <a:rPr lang="en-US" sz="1500" dirty="0">
-                <a:solidFill>
-                  <a:srgbClr val="14202E"/>
-                </a:solidFill>
-                <a:latin typeface="Consolas" pitchFamily="34" charset="0"/>
-                <a:ea typeface="Consolas" pitchFamily="34" charset="-122"/>
-                <a:cs typeface="Consolas" pitchFamily="34" charset="-120"/>
-              </a:rPr>
-              <a:t>σ = ln r / Δt</a:t>
-            </a:r>
-            <a:endParaRPr lang="en-US" sz="1500" dirty="0"/>
-          </a:p>
-        </p:txBody>
-      </p:sp>
-      <p:sp>
-        <p:nvSpPr>
-          <p:cNvPr id="18" name="Text 15"/>
-          <p:cNvSpPr txBox="1"/>
-          <p:nvPr/>
-        </p:nvSpPr>
-        <p:spPr>
-          <a:xfrm>
-            <a:off x="6527800" y="4445000"/>
-            <a:ext cx="4635500" cy="266700"/>
-          </a:xfrm>
-          <a:prstGeom prst="rect">
-            <a:avLst/>
-          </a:prstGeom>
-          <a:noFill/>
-          <a:ln/>
-        </p:spPr>
-        <p:txBody>
-          <a:bodyPr wrap="square" lIns="0" tIns="0" rIns="0" bIns="0" rtlCol="0" anchor="t"/>
-          <a:lstStyle/>
-          <a:p>
-            <a:pPr indent="0" marL="0">
-              <a:lnSpc>
-                <a:spcPct val="115000"/>
-              </a:lnSpc>
-              <a:buNone/>
-            </a:pPr>
-            <a:r>
-              <a:rPr lang="en-US" sz="1500" dirty="0">
-                <a:solidFill>
-                  <a:srgbClr val="1C5CAB"/>
-                </a:solidFill>
-                <a:latin typeface="Consolas" pitchFamily="34" charset="0"/>
-                <a:ea typeface="Consolas" pitchFamily="34" charset="-122"/>
-                <a:cs typeface="Consolas" pitchFamily="34" charset="-120"/>
-              </a:rPr>
-              <a:t>≈ −0,00192 / 0,01 s ≈ −0,192 1/s</a:t>
-            </a:r>
-            <a:endParaRPr lang="en-US" sz="1500" dirty="0"/>
-          </a:p>
-        </p:txBody>
-      </p:sp>
-      <p:sp>
-        <p:nvSpPr>
-          <p:cNvPr id="19" name="Text 16"/>
-          <p:cNvSpPr txBox="1"/>
-          <p:nvPr/>
-        </p:nvSpPr>
-        <p:spPr>
-          <a:xfrm>
-            <a:off x="6527800" y="4826000"/>
-            <a:ext cx="4635500" cy="266700"/>
-          </a:xfrm>
-          <a:prstGeom prst="rect">
-            <a:avLst/>
-          </a:prstGeom>
-          <a:noFill/>
-          <a:ln/>
-        </p:spPr>
-        <p:txBody>
-          <a:bodyPr wrap="square" lIns="0" tIns="0" rIns="0" bIns="0" rtlCol="0" anchor="t"/>
-          <a:lstStyle/>
-          <a:p>
-            <a:pPr indent="0" marL="0">
-              <a:lnSpc>
-                <a:spcPct val="115000"/>
-              </a:lnSpc>
-              <a:buNone/>
-            </a:pPr>
-            <a:r>
-              <a:rPr lang="en-US" sz="1500" dirty="0">
-                <a:solidFill>
-                  <a:srgbClr val="44505E"/>
-                </a:solidFill>
-                <a:latin typeface="Calibri" pitchFamily="34" charset="0"/>
-                <a:ea typeface="Calibri" pitchFamily="34" charset="-122"/>
-                <a:cs typeface="Calibri" pitchFamily="34" charset="-120"/>
-              </a:rPr>
-              <a:t>Nach 1 s bleiben e^σ ≈ 82,6 % der Amplitude.</a:t>
-            </a:r>
-            <a:endParaRPr lang="en-US" sz="1500" dirty="0"/>
-          </a:p>
-        </p:txBody>
-      </p:sp>
+            <a:endParaRPr lang="en-US" sz="1200" dirty="0"/>
+          </a:p>
+        </p:txBody>
+      </p:sp>
+      <p:pic>
+        <p:nvPicPr>
+          <p:cNvPr id="21" name="Image 5" descr="b_b">    </p:cNvPr>
+          <p:cNvPicPr>
+            <a:picLocks noChangeAspect="1"/>
+          </p:cNvPicPr>
+          <p:nvPr/>
+        </p:nvPicPr>
+        <p:blipFill>
+          <a:blip r:embed="rId6"/>
+          <a:stretch>
+            <a:fillRect/>
+          </a:stretch>
+        </p:blipFill>
+        <p:spPr>
+          <a:xfrm>
+            <a:off x="6375400" y="4254500"/>
+            <a:ext cx="3098800" cy="533400"/>
+          </a:xfrm>
+          <a:prstGeom prst="rect">
+            <a:avLst/>
+          </a:prstGeom>
+        </p:spPr>
+      </p:pic>
+      <p:pic>
+        <p:nvPicPr>
+          <p:cNvPr id="22" name="Image 6" descr="b_ev">    </p:cNvPr>
+          <p:cNvPicPr>
+            <a:picLocks noChangeAspect="1"/>
+          </p:cNvPicPr>
+          <p:nvPr/>
+        </p:nvPicPr>
+        <p:blipFill>
+          <a:blip r:embed="rId7"/>
+          <a:stretch>
+            <a:fillRect/>
+          </a:stretch>
+        </p:blipFill>
+        <p:spPr>
+          <a:xfrm>
+            <a:off x="6375400" y="4927600"/>
+            <a:ext cx="2546350" cy="304800"/>
+          </a:xfrm>
+          <a:prstGeom prst="rect">
+            <a:avLst/>
+          </a:prstGeom>
+        </p:spPr>
+      </p:pic>
       <p:sp>
         <p:nvSpPr>
           <p:cNvPr id="25" name="Slide Number Placeholder 0"/>
@@ -3993,7 +4153,7 @@
                 <a:ea typeface="Consolas" pitchFamily="34" charset="-122"/>
                 <a:cs typeface="Consolas" pitchFamily="34" charset="-120"/>
               </a:rPr>
-              <a:t>KONTROLLIERTE PRÜFUNG · SYNTHETISCHES SIGNAL</a:t>
+              <a:t>NEGATIVER SPRUNG · DOMINANTER POL</a:t>
             </a:r>
             <a:endParaRPr lang="en-US" sz="1200" dirty="0"/>
           </a:p>
@@ -4034,7 +4194,7 @@
                 <a:ea typeface="Calibri" pitchFamily="34" charset="-122"/>
                 <a:cs typeface="Calibri" pitchFamily="34" charset="-120"/>
               </a:rPr>
-              <a:t>Prüfung 1: bekannte Sollkurve</a:t>
+              <a:t>Vom Pol zu Frequenz und Abklingrate</a:t>
             </a:r>
             <a:endParaRPr lang="en-US" sz="3200" dirty="0"/>
           </a:p>
@@ -4076,15 +4236,57 @@
                 <a:ea typeface="Calibri" pitchFamily="34" charset="-122"/>
                 <a:cs typeface="Calibri" pitchFamily="34" charset="-120"/>
               </a:rPr>
-              <a:t>Diagramm: Abschnitt 1 bis 5 s · Signalwert in willkürlichen Einheiten (a. E.)</a:t>
+              <a:t>Ordnung 12, Schätzraster 100 Werte/s · Der konjugierte Pol z̄ gehört zur selben reellen Schwingung</a:t>
             </a:r>
             <a:endParaRPr lang="en-US" sz="1200" dirty="0"/>
           </a:p>
         </p:txBody>
       </p:sp>
+      <p:sp>
+        <p:nvSpPr>
+          <p:cNvPr id="6" name="Text 3"/>
+          <p:cNvSpPr txBox="1"/>
+          <p:nvPr/>
+        </p:nvSpPr>
+        <p:spPr>
+          <a:xfrm>
+            <a:off x="812800" y="2222500"/>
+            <a:ext cx="5080000" cy="215900"/>
+          </a:xfrm>
+          <a:prstGeom prst="rect">
+            <a:avLst/>
+          </a:prstGeom>
+          <a:noFill/>
+          <a:ln/>
+        </p:spPr>
+        <p:txBody>
+          <a:bodyPr wrap="square" lIns="0" tIns="0" rIns="0" bIns="0" rtlCol="0" anchor="t"/>
+          <a:lstStyle/>
+          <a:p>
+            <a:pPr indent="0" marL="0">
+              <a:lnSpc>
+                <a:spcPct val="115000"/>
+              </a:lnSpc>
+              <a:buNone/>
+            </a:pPr>
+            <a:r>
+              <a:rPr lang="en-US" sz="1200" dirty="0">
+                <a:solidFill>
+                  <a:srgbClr val="1C5CAB"/>
+                </a:solidFill>
+                <a:latin typeface="Consolas" pitchFamily="34" charset="0"/>
+                <a:ea typeface="Consolas" pitchFamily="34" charset="-122"/>
+                <a:cs typeface="Consolas" pitchFamily="34" charset="-120"/>
+              </a:rPr>
+              <a:t>Eigenwert von B</a:t>
+            </a:r>
+            <a:endParaRPr lang="en-US" sz="1200" dirty="0"/>
+          </a:p>
+        </p:txBody>
+      </p:sp>
       <p:pic>
         <p:nvPicPr>
-          <p:cNvPr id="6" name="Image 0" descr="C:\Sevgi\projects\prony_matrix_pencil_filter\outputs\ergebnisdeck\03_sollkurve.png">    </p:cNvPr>
+          <p:cNvPr id="7" name="Image 0" descr="z">    </p:cNvPr>
           <p:cNvPicPr>
             <a:picLocks noChangeAspect="1"/>
           </p:cNvPicPr>
@@ -4098,90 +4300,72 @@
         </p:blipFill>
         <p:spPr>
           <a:xfrm>
-            <a:off x="812800" y="1879600"/>
-            <a:ext cx="5588000" cy="3911600"/>
+            <a:off x="812800" y="2540000"/>
+            <a:ext cx="3092450" cy="520700"/>
           </a:xfrm>
           <a:prstGeom prst="rect">
             <a:avLst/>
           </a:prstGeom>
         </p:spPr>
       </p:pic>
-      <p:sp>
-        <p:nvSpPr>
-          <p:cNvPr id="7" name="Shape 3"/>
-          <p:cNvSpPr/>
-          <p:nvPr/>
-        </p:nvSpPr>
-        <p:spPr>
-          <a:xfrm>
-            <a:off x="812800" y="1879600"/>
-            <a:ext cx="5588000" cy="3911600"/>
-          </a:xfrm>
-          <a:prstGeom prst="roundRect">
-            <a:avLst>
-              <a:gd name="adj" fmla="val 2571"/>
-            </a:avLst>
-          </a:prstGeom>
-          <a:ln w="9525">
-            <a:solidFill>
-              <a:srgbClr val="E1E0D9"/>
-            </a:solidFill>
-            <a:prstDash val="solid"/>
-          </a:ln>
-        </p:spPr>
-      </p:sp>
-      <p:sp>
-        <p:nvSpPr>
-          <p:cNvPr id="8" name="Text 4"/>
+      <p:pic>
+        <p:nvPicPr>
+          <p:cNvPr id="8" name="Image 1" descr="r">    </p:cNvPr>
+          <p:cNvPicPr>
+            <a:picLocks noChangeAspect="1"/>
+          </p:cNvPicPr>
+          <p:nvPr/>
+        </p:nvPicPr>
+        <p:blipFill>
+          <a:blip r:embed="rId2"/>
+          <a:stretch>
+            <a:fillRect/>
+          </a:stretch>
+        </p:blipFill>
+        <p:spPr>
+          <a:xfrm>
+            <a:off x="812800" y="3238500"/>
+            <a:ext cx="1631950" cy="304800"/>
+          </a:xfrm>
+          <a:prstGeom prst="rect">
+            <a:avLst/>
+          </a:prstGeom>
+        </p:spPr>
+      </p:pic>
+      <p:pic>
+        <p:nvPicPr>
+          <p:cNvPr id="9" name="Image 2" descr="th">    </p:cNvPr>
+          <p:cNvPicPr>
+            <a:picLocks noChangeAspect="1"/>
+          </p:cNvPicPr>
+          <p:nvPr/>
+        </p:nvPicPr>
+        <p:blipFill>
+          <a:blip r:embed="rId3"/>
+          <a:stretch>
+            <a:fillRect/>
+          </a:stretch>
+        </p:blipFill>
+        <p:spPr>
+          <a:xfrm>
+            <a:off x="812800" y="3670300"/>
+            <a:ext cx="1974850" cy="279400"/>
+          </a:xfrm>
+          <a:prstGeom prst="rect">
+            <a:avLst/>
+          </a:prstGeom>
+        </p:spPr>
+      </p:pic>
+      <p:sp>
+        <p:nvSpPr>
+          <p:cNvPr id="10" name="Text 4"/>
           <p:cNvSpPr txBox="1"/>
           <p:nvPr/>
         </p:nvSpPr>
         <p:spPr>
           <a:xfrm>
-            <a:off x="6807200" y="1879600"/>
-            <a:ext cx="4572000" cy="266700"/>
-          </a:xfrm>
-          <a:prstGeom prst="rect">
-            <a:avLst/>
-          </a:prstGeom>
-          <a:noFill/>
-          <a:ln/>
-        </p:spPr>
-        <p:txBody>
-          <a:bodyPr wrap="square" lIns="0" tIns="0" rIns="0" bIns="0" rtlCol="0" anchor="t"/>
-          <a:lstStyle/>
-          <a:p>
-            <a:pPr indent="0" marL="0">
-              <a:lnSpc>
-                <a:spcPct val="115000"/>
-              </a:lnSpc>
-              <a:buNone/>
-            </a:pPr>
-            <a:r>
-              <a:rPr lang="en-US" sz="1500" b="1" dirty="0">
-                <a:solidFill>
-                  <a:srgbClr val="14202E"/>
-                </a:solidFill>
-                <a:latin typeface="Calibri" pitchFamily="34" charset="0"/>
-                <a:ea typeface="Calibri" pitchFamily="34" charset="-122"/>
-                <a:cs typeface="Calibri" pitchFamily="34" charset="-120"/>
-              </a:rPr>
-              <a:t>Testsignal</a:t>
-            </a:r>
-            <a:endParaRPr lang="en-US" sz="1500" dirty="0"/>
-          </a:p>
-        </p:txBody>
-      </p:sp>
-      <p:sp>
-        <p:nvSpPr>
-          <p:cNvPr id="9" name="Text 5"/>
-          <p:cNvSpPr txBox="1"/>
-          <p:nvPr/>
-        </p:nvSpPr>
-        <p:spPr>
-          <a:xfrm>
-            <a:off x="6807200" y="2197100"/>
-            <a:ext cx="4572000" cy="571500"/>
+            <a:off x="812800" y="4127500"/>
+            <a:ext cx="5080000" cy="571500"/>
           </a:xfrm>
           <a:prstGeom prst="rect">
             <a:avLst/>
@@ -4208,7 +4392,7 @@
                 <a:ea typeface="Calibri" pitchFamily="34" charset="-122"/>
                 <a:cs typeface="Calibri" pitchFamily="34" charset="-120"/>
               </a:rPr>
-              <a:t>Grundwertsprung plus Schwingungen bei 2,24 Hz und 5 Hz, ohne Rauschen.</a:t>
+              <a:t>Beide beschreiben die Änderung in einem Abtastschritt Δt = 0,01 s.</a:t>
             </a:r>
             <a:endParaRPr lang="en-US" sz="1500" dirty="0"/>
           </a:p>
@@ -4216,14 +4400,41 @@
       </p:sp>
       <p:sp>
         <p:nvSpPr>
-          <p:cNvPr id="10" name="Text 6"/>
+          <p:cNvPr id="11" name="Shape 5"/>
+          <p:cNvSpPr/>
+          <p:nvPr/>
+        </p:nvSpPr>
+        <p:spPr>
+          <a:xfrm>
+            <a:off x="6299200" y="1879600"/>
+            <a:ext cx="5080000" cy="1460500"/>
+          </a:xfrm>
+          <a:prstGeom prst="roundRect">
+            <a:avLst>
+              <a:gd name="adj" fmla="val 6887"/>
+            </a:avLst>
+          </a:prstGeom>
+          <a:solidFill>
+            <a:srgbClr val="FCFCFB"/>
+          </a:solidFill>
+          <a:ln w="9525">
+            <a:solidFill>
+              <a:srgbClr val="E1E0D9"/>
+            </a:solidFill>
+            <a:prstDash val="solid"/>
+          </a:ln>
+        </p:spPr>
+      </p:sp>
+      <p:sp>
+        <p:nvSpPr>
+          <p:cNvPr id="12" name="Text 6"/>
           <p:cNvSpPr txBox="1"/>
           <p:nvPr/>
         </p:nvSpPr>
         <p:spPr>
           <a:xfrm>
-            <a:off x="6807200" y="2882900"/>
-            <a:ext cx="4572000" cy="266700"/>
+            <a:off x="6527800" y="2082800"/>
+            <a:ext cx="4635500" cy="317500"/>
           </a:xfrm>
           <a:prstGeom prst="rect">
             <a:avLst/>
@@ -4242,7 +4453,7 @@
               <a:buNone/>
             </a:pPr>
             <a:r>
-              <a:rPr lang="en-US" sz="1500" b="1" dirty="0">
+              <a:rPr lang="en-US" sz="2000" b="1" dirty="0">
                 <a:solidFill>
                   <a:srgbClr val="14202E"/>
                 </a:solidFill>
@@ -4250,22 +4461,73 @@
                 <a:ea typeface="Calibri" pitchFamily="34" charset="-122"/>
                 <a:cs typeface="Calibri" pitchFamily="34" charset="-120"/>
               </a:rPr>
-              <a:t>Aufgabe</a:t>
+              <a:t>Frequenz</a:t>
             </a:r>
-            <a:endParaRPr lang="en-US" sz="1500" dirty="0"/>
-          </a:p>
-        </p:txBody>
-      </p:sp>
-      <p:sp>
-        <p:nvSpPr>
-          <p:cNvPr id="11" name="Text 7"/>
+            <a:endParaRPr lang="en-US" sz="2000" dirty="0"/>
+          </a:p>
+        </p:txBody>
+      </p:sp>
+      <p:pic>
+        <p:nvPicPr>
+          <p:cNvPr id="13" name="Image 3" descr="f">    </p:cNvPr>
+          <p:cNvPicPr>
+            <a:picLocks noChangeAspect="1"/>
+          </p:cNvPicPr>
+          <p:nvPr/>
+        </p:nvPicPr>
+        <p:blipFill>
+          <a:blip r:embed="rId4"/>
+          <a:stretch>
+            <a:fillRect/>
+          </a:stretch>
+        </p:blipFill>
+        <p:spPr>
+          <a:xfrm>
+            <a:off x="6527800" y="2540000"/>
+            <a:ext cx="3028950" cy="546100"/>
+          </a:xfrm>
+          <a:prstGeom prst="rect">
+            <a:avLst/>
+          </a:prstGeom>
+        </p:spPr>
+      </p:pic>
+      <p:sp>
+        <p:nvSpPr>
+          <p:cNvPr id="14" name="Shape 7"/>
+          <p:cNvSpPr/>
+          <p:nvPr/>
+        </p:nvSpPr>
+        <p:spPr>
+          <a:xfrm>
+            <a:off x="6299200" y="3492500"/>
+            <a:ext cx="5080000" cy="1968500"/>
+          </a:xfrm>
+          <a:prstGeom prst="roundRect">
+            <a:avLst>
+              <a:gd name="adj" fmla="val 5110"/>
+            </a:avLst>
+          </a:prstGeom>
+          <a:solidFill>
+            <a:srgbClr val="FCFCFB"/>
+          </a:solidFill>
+          <a:ln w="9525">
+            <a:solidFill>
+              <a:srgbClr val="E1E0D9"/>
+            </a:solidFill>
+            <a:prstDash val="solid"/>
+          </a:ln>
+        </p:spPr>
+      </p:sp>
+      <p:sp>
+        <p:nvSpPr>
+          <p:cNvPr id="15" name="Text 8"/>
           <p:cNvSpPr txBox="1"/>
           <p:nvPr/>
         </p:nvSpPr>
         <p:spPr>
           <a:xfrm>
-            <a:off x="6807200" y="3200400"/>
-            <a:ext cx="4572000" cy="571500"/>
+            <a:off x="6527800" y="3695700"/>
+            <a:ext cx="4635500" cy="317500"/>
           </a:xfrm>
           <a:prstGeom prst="rect">
             <a:avLst/>
@@ -4284,7 +4546,97 @@
               <a:buNone/>
             </a:pPr>
             <a:r>
-              <a:rPr lang="en-US" sz="1500" dirty="0">
+              <a:rPr lang="en-US" sz="2000" b="1" dirty="0">
+                <a:solidFill>
+                  <a:srgbClr val="14202E"/>
+                </a:solidFill>
+                <a:latin typeface="Calibri" pitchFamily="34" charset="0"/>
+                <a:ea typeface="Calibri" pitchFamily="34" charset="-122"/>
+                <a:cs typeface="Calibri" pitchFamily="34" charset="-120"/>
+              </a:rPr>
+              <a:t>Abklingrate</a:t>
+            </a:r>
+            <a:endParaRPr lang="en-US" sz="2000" dirty="0"/>
+          </a:p>
+        </p:txBody>
+      </p:sp>
+      <p:pic>
+        <p:nvPicPr>
+          <p:cNvPr id="16" name="Image 4" descr="s">    </p:cNvPr>
+          <p:cNvPicPr>
+            <a:picLocks noChangeAspect="1"/>
+          </p:cNvPicPr>
+          <p:nvPr/>
+        </p:nvPicPr>
+        <p:blipFill>
+          <a:blip r:embed="rId5"/>
+          <a:stretch>
+            <a:fillRect/>
+          </a:stretch>
+        </p:blipFill>
+        <p:spPr>
+          <a:xfrm>
+            <a:off x="6527800" y="4127500"/>
+            <a:ext cx="3162300" cy="546100"/>
+          </a:xfrm>
+          <a:prstGeom prst="rect">
+            <a:avLst/>
+          </a:prstGeom>
+        </p:spPr>
+      </p:pic>
+      <p:pic>
+        <p:nvPicPr>
+          <p:cNvPr id="17" name="Image 5" descr="e">    </p:cNvPr>
+          <p:cNvPicPr>
+            <a:picLocks noChangeAspect="1"/>
+          </p:cNvPicPr>
+          <p:nvPr/>
+        </p:nvPicPr>
+        <p:blipFill>
+          <a:blip r:embed="rId6"/>
+          <a:stretch>
+            <a:fillRect/>
+          </a:stretch>
+        </p:blipFill>
+        <p:spPr>
+          <a:xfrm>
+            <a:off x="6527800" y="4889500"/>
+            <a:ext cx="1193800" cy="317500"/>
+          </a:xfrm>
+          <a:prstGeom prst="rect">
+            <a:avLst/>
+          </a:prstGeom>
+        </p:spPr>
+      </p:pic>
+      <p:sp>
+        <p:nvSpPr>
+          <p:cNvPr id="18" name="Text 9"/>
+          <p:cNvSpPr txBox="1"/>
+          <p:nvPr/>
+        </p:nvSpPr>
+        <p:spPr>
+          <a:xfrm>
+            <a:off x="7848600" y="4953000"/>
+            <a:ext cx="3429000" cy="266700"/>
+          </a:xfrm>
+          <a:prstGeom prst="rect">
+            <a:avLst/>
+          </a:prstGeom>
+          <a:noFill/>
+          <a:ln/>
+        </p:spPr>
+        <p:txBody>
+          <a:bodyPr wrap="square" lIns="0" tIns="0" rIns="0" bIns="0" rtlCol="0" anchor="t"/>
+          <a:lstStyle/>
+          <a:p>
+            <a:pPr indent="0" marL="0">
+              <a:lnSpc>
+                <a:spcPct val="115000"/>
+              </a:lnSpc>
+              <a:buNone/>
+            </a:pPr>
+            <a:r>
+              <a:rPr lang="en-US" sz="1200" dirty="0">
                 <a:solidFill>
                   <a:srgbClr val="44505E"/>
                 </a:solidFill>
@@ -4292,93 +4644,9 @@
                 <a:ea typeface="Calibri" pitchFamily="34" charset="-122"/>
                 <a:cs typeface="Calibri" pitchFamily="34" charset="-120"/>
               </a:rPr>
-              <a:t>Nur den 2,24-Hz-Anteil entfernen; der 5-Hz-Anteil soll bleiben.</a:t>
+              <a:t>Nach 1 s bleiben 82,6 % der Amplitude.</a:t>
             </a:r>
-            <a:endParaRPr lang="en-US" sz="1500" dirty="0"/>
-          </a:p>
-        </p:txBody>
-      </p:sp>
-      <p:sp>
-        <p:nvSpPr>
-          <p:cNvPr id="12" name="Text 8"/>
-          <p:cNvSpPr txBox="1"/>
-          <p:nvPr/>
-        </p:nvSpPr>
-        <p:spPr>
-          <a:xfrm>
-            <a:off x="6807200" y="3886200"/>
-            <a:ext cx="4572000" cy="266700"/>
-          </a:xfrm>
-          <a:prstGeom prst="rect">
-            <a:avLst/>
-          </a:prstGeom>
-          <a:noFill/>
-          <a:ln/>
-        </p:spPr>
-        <p:txBody>
-          <a:bodyPr wrap="square" lIns="0" tIns="0" rIns="0" bIns="0" rtlCol="0" anchor="t"/>
-          <a:lstStyle/>
-          <a:p>
-            <a:pPr indent="0" marL="0">
-              <a:lnSpc>
-                <a:spcPct val="115000"/>
-              </a:lnSpc>
-              <a:buNone/>
-            </a:pPr>
-            <a:r>
-              <a:rPr lang="en-US" sz="1500" b="1" dirty="0">
-                <a:solidFill>
-                  <a:srgbClr val="14202E"/>
-                </a:solidFill>
-                <a:latin typeface="Calibri" pitchFamily="34" charset="0"/>
-                <a:ea typeface="Calibri" pitchFamily="34" charset="-122"/>
-                <a:cs typeface="Calibri" pitchFamily="34" charset="-120"/>
-              </a:rPr>
-              <a:t>Ergebnis</a:t>
-            </a:r>
-            <a:endParaRPr lang="en-US" sz="1500" dirty="0"/>
-          </a:p>
-        </p:txBody>
-      </p:sp>
-      <p:sp>
-        <p:nvSpPr>
-          <p:cNvPr id="13" name="Text 9"/>
-          <p:cNvSpPr txBox="1"/>
-          <p:nvPr/>
-        </p:nvSpPr>
-        <p:spPr>
-          <a:xfrm>
-            <a:off x="6807200" y="4203700"/>
-            <a:ext cx="4572000" cy="838200"/>
-          </a:xfrm>
-          <a:prstGeom prst="rect">
-            <a:avLst/>
-          </a:prstGeom>
-          <a:noFill/>
-          <a:ln/>
-        </p:spPr>
-        <p:txBody>
-          <a:bodyPr wrap="square" lIns="0" tIns="0" rIns="0" bIns="0" rtlCol="0" anchor="t"/>
-          <a:lstStyle/>
-          <a:p>
-            <a:pPr indent="0" marL="0">
-              <a:lnSpc>
-                <a:spcPct val="115000"/>
-              </a:lnSpc>
-              <a:buNone/>
-            </a:pPr>
-            <a:r>
-              <a:rPr lang="en-US" sz="1500" dirty="0">
-                <a:solidFill>
-                  <a:srgbClr val="44505E"/>
-                </a:solidFill>
-                <a:latin typeface="Calibri" pitchFamily="34" charset="0"/>
-                <a:ea typeface="Calibri" pitchFamily="34" charset="-122"/>
-                <a:cs typeface="Calibri" pitchFamily="34" charset="-120"/>
-              </a:rPr>
-              <a:t>Ausgabe und Sollkurve liegen übereinander. Größte Abweichung über 1200 Werte: &lt; 3 · 10⁻¹³.</a:t>
-            </a:r>
-            <a:endParaRPr lang="en-US" sz="1500" dirty="0"/>
+            <a:endParaRPr lang="en-US" sz="1200" dirty="0"/>
           </a:p>
         </p:txBody>
       </p:sp>
@@ -4491,6 +4759,504 @@
                 <a:ea typeface="Consolas" pitchFamily="34" charset="-122"/>
                 <a:cs typeface="Consolas" pitchFamily="34" charset="-120"/>
               </a:rPr>
+              <a:t>KONTROLLIERTE PRÜFUNG · SYNTHETISCHES SIGNAL</a:t>
+            </a:r>
+            <a:endParaRPr lang="en-US" sz="1200" dirty="0"/>
+          </a:p>
+        </p:txBody>
+      </p:sp>
+      <p:sp>
+        <p:nvSpPr>
+          <p:cNvPr id="3" name="Text 0"/>
+          <p:cNvSpPr/>
+          <p:nvPr>
+            <p:ph idx="100" type="title" hasCustomPrompt="1"/>
+          </p:nvPr>
+        </p:nvSpPr>
+        <p:spPr>
+          <a:xfrm>
+            <a:off x="812800" y="1104900"/>
+            <a:ext cx="10566400" cy="508000"/>
+          </a:xfrm>
+          <a:prstGeom prst="rect">
+            <a:avLst/>
+          </a:prstGeom>
+          <a:noFill/>
+          <a:ln/>
+        </p:spPr>
+        <p:txBody>
+          <a:bodyPr wrap="square" lIns="0" tIns="0" rIns="0" bIns="0" rtlCol="0" anchor="t"/>
+          <a:lstStyle/>
+          <a:p>
+            <a:pPr algn="l" indent="0" marL="0">
+              <a:buNone/>
+            </a:pPr>
+            <a:r>
+              <a:rPr lang="en-US" sz="3200" b="1" dirty="0">
+                <a:solidFill>
+                  <a:srgbClr val="14202E"/>
+                </a:solidFill>
+                <a:latin typeface="Calibri" pitchFamily="34" charset="0"/>
+                <a:ea typeface="Calibri" pitchFamily="34" charset="-122"/>
+                <a:cs typeface="Calibri" pitchFamily="34" charset="-120"/>
+              </a:rPr>
+              <a:t>Prüfung 1: bekannte Sollkurve</a:t>
+            </a:r>
+            <a:endParaRPr lang="en-US" sz="3200" dirty="0"/>
+          </a:p>
+        </p:txBody>
+      </p:sp>
+      <p:sp>
+        <p:nvSpPr>
+          <p:cNvPr id="4" name="Text 2"/>
+          <p:cNvSpPr txBox="1"/>
+          <p:nvPr/>
+        </p:nvSpPr>
+        <p:spPr>
+          <a:xfrm>
+            <a:off x="812800" y="6426200"/>
+            <a:ext cx="9779000" cy="228600"/>
+          </a:xfrm>
+          <a:prstGeom prst="rect">
+            <a:avLst/>
+          </a:prstGeom>
+          <a:noFill/>
+          <a:ln/>
+        </p:spPr>
+        <p:txBody>
+          <a:bodyPr wrap="square" lIns="0" tIns="0" rIns="0" bIns="0" rtlCol="0" anchor="t"/>
+          <a:lstStyle/>
+          <a:p>
+            <a:pPr indent="0" marL="0">
+              <a:lnSpc>
+                <a:spcPct val="115000"/>
+              </a:lnSpc>
+              <a:buNone/>
+            </a:pPr>
+            <a:r>
+              <a:rPr lang="en-US" sz="1200" dirty="0">
+                <a:solidFill>
+                  <a:srgbClr val="5F6873"/>
+                </a:solidFill>
+                <a:latin typeface="Calibri" pitchFamily="34" charset="0"/>
+                <a:ea typeface="Calibri" pitchFamily="34" charset="-122"/>
+                <a:cs typeface="Calibri" pitchFamily="34" charset="-120"/>
+              </a:rPr>
+              <a:t>Diagramm: Abschnitt 1 bis 5 s · Signalwert in willkürlichen Einheiten (a. E.)</a:t>
+            </a:r>
+            <a:endParaRPr lang="en-US" sz="1200" dirty="0"/>
+          </a:p>
+        </p:txBody>
+      </p:sp>
+      <p:pic>
+        <p:nvPicPr>
+          <p:cNvPr id="6" name="Image 0" descr="C:\Sevgi\projects\prony_matrix_pencil_filter\outputs\ergebnisdeck\03_sollkurve.png">    </p:cNvPr>
+          <p:cNvPicPr>
+            <a:picLocks noChangeAspect="1"/>
+          </p:cNvPicPr>
+          <p:nvPr/>
+        </p:nvPicPr>
+        <p:blipFill>
+          <a:blip r:embed="rId1"/>
+          <a:stretch>
+            <a:fillRect/>
+          </a:stretch>
+        </p:blipFill>
+        <p:spPr>
+          <a:xfrm>
+            <a:off x="812800" y="1879600"/>
+            <a:ext cx="5588000" cy="3911600"/>
+          </a:xfrm>
+          <a:prstGeom prst="rect">
+            <a:avLst/>
+          </a:prstGeom>
+        </p:spPr>
+      </p:pic>
+      <p:sp>
+        <p:nvSpPr>
+          <p:cNvPr id="7" name="Shape 3"/>
+          <p:cNvSpPr/>
+          <p:nvPr/>
+        </p:nvSpPr>
+        <p:spPr>
+          <a:xfrm>
+            <a:off x="812800" y="1879600"/>
+            <a:ext cx="5588000" cy="3911600"/>
+          </a:xfrm>
+          <a:prstGeom prst="roundRect">
+            <a:avLst>
+              <a:gd name="adj" fmla="val 2571"/>
+            </a:avLst>
+          </a:prstGeom>
+          <a:ln w="9525">
+            <a:solidFill>
+              <a:srgbClr val="E1E0D9"/>
+            </a:solidFill>
+            <a:prstDash val="solid"/>
+          </a:ln>
+        </p:spPr>
+      </p:sp>
+      <p:sp>
+        <p:nvSpPr>
+          <p:cNvPr id="8" name="Text 4"/>
+          <p:cNvSpPr txBox="1"/>
+          <p:nvPr/>
+        </p:nvSpPr>
+        <p:spPr>
+          <a:xfrm>
+            <a:off x="6807200" y="1879600"/>
+            <a:ext cx="4572000" cy="266700"/>
+          </a:xfrm>
+          <a:prstGeom prst="rect">
+            <a:avLst/>
+          </a:prstGeom>
+          <a:noFill/>
+          <a:ln/>
+        </p:spPr>
+        <p:txBody>
+          <a:bodyPr wrap="square" lIns="0" tIns="0" rIns="0" bIns="0" rtlCol="0" anchor="t"/>
+          <a:lstStyle/>
+          <a:p>
+            <a:pPr indent="0" marL="0">
+              <a:lnSpc>
+                <a:spcPct val="115000"/>
+              </a:lnSpc>
+              <a:buNone/>
+            </a:pPr>
+            <a:r>
+              <a:rPr lang="en-US" sz="1500" b="1" dirty="0">
+                <a:solidFill>
+                  <a:srgbClr val="14202E"/>
+                </a:solidFill>
+                <a:latin typeface="Calibri" pitchFamily="34" charset="0"/>
+                <a:ea typeface="Calibri" pitchFamily="34" charset="-122"/>
+                <a:cs typeface="Calibri" pitchFamily="34" charset="-120"/>
+              </a:rPr>
+              <a:t>Testsignal</a:t>
+            </a:r>
+            <a:endParaRPr lang="en-US" sz="1500" dirty="0"/>
+          </a:p>
+        </p:txBody>
+      </p:sp>
+      <p:sp>
+        <p:nvSpPr>
+          <p:cNvPr id="9" name="Text 5"/>
+          <p:cNvSpPr txBox="1"/>
+          <p:nvPr/>
+        </p:nvSpPr>
+        <p:spPr>
+          <a:xfrm>
+            <a:off x="6807200" y="2197100"/>
+            <a:ext cx="4572000" cy="571500"/>
+          </a:xfrm>
+          <a:prstGeom prst="rect">
+            <a:avLst/>
+          </a:prstGeom>
+          <a:noFill/>
+          <a:ln/>
+        </p:spPr>
+        <p:txBody>
+          <a:bodyPr wrap="square" lIns="0" tIns="0" rIns="0" bIns="0" rtlCol="0" anchor="t"/>
+          <a:lstStyle/>
+          <a:p>
+            <a:pPr indent="0" marL="0">
+              <a:lnSpc>
+                <a:spcPct val="115000"/>
+              </a:lnSpc>
+              <a:buNone/>
+            </a:pPr>
+            <a:r>
+              <a:rPr lang="en-US" sz="1500" dirty="0">
+                <a:solidFill>
+                  <a:srgbClr val="44505E"/>
+                </a:solidFill>
+                <a:latin typeface="Calibri" pitchFamily="34" charset="0"/>
+                <a:ea typeface="Calibri" pitchFamily="34" charset="-122"/>
+                <a:cs typeface="Calibri" pitchFamily="34" charset="-120"/>
+              </a:rPr>
+              <a:t>Grundwertsprung plus Schwingungen bei 2,24 Hz und 5 Hz, ohne Rauschen.</a:t>
+            </a:r>
+            <a:endParaRPr lang="en-US" sz="1500" dirty="0"/>
+          </a:p>
+        </p:txBody>
+      </p:sp>
+      <p:sp>
+        <p:nvSpPr>
+          <p:cNvPr id="10" name="Text 6"/>
+          <p:cNvSpPr txBox="1"/>
+          <p:nvPr/>
+        </p:nvSpPr>
+        <p:spPr>
+          <a:xfrm>
+            <a:off x="6807200" y="2882900"/>
+            <a:ext cx="4572000" cy="266700"/>
+          </a:xfrm>
+          <a:prstGeom prst="rect">
+            <a:avLst/>
+          </a:prstGeom>
+          <a:noFill/>
+          <a:ln/>
+        </p:spPr>
+        <p:txBody>
+          <a:bodyPr wrap="square" lIns="0" tIns="0" rIns="0" bIns="0" rtlCol="0" anchor="t"/>
+          <a:lstStyle/>
+          <a:p>
+            <a:pPr indent="0" marL="0">
+              <a:lnSpc>
+                <a:spcPct val="115000"/>
+              </a:lnSpc>
+              <a:buNone/>
+            </a:pPr>
+            <a:r>
+              <a:rPr lang="en-US" sz="1500" b="1" dirty="0">
+                <a:solidFill>
+                  <a:srgbClr val="14202E"/>
+                </a:solidFill>
+                <a:latin typeface="Calibri" pitchFamily="34" charset="0"/>
+                <a:ea typeface="Calibri" pitchFamily="34" charset="-122"/>
+                <a:cs typeface="Calibri" pitchFamily="34" charset="-120"/>
+              </a:rPr>
+              <a:t>Aufgabe</a:t>
+            </a:r>
+            <a:endParaRPr lang="en-US" sz="1500" dirty="0"/>
+          </a:p>
+        </p:txBody>
+      </p:sp>
+      <p:sp>
+        <p:nvSpPr>
+          <p:cNvPr id="11" name="Text 7"/>
+          <p:cNvSpPr txBox="1"/>
+          <p:nvPr/>
+        </p:nvSpPr>
+        <p:spPr>
+          <a:xfrm>
+            <a:off x="6807200" y="3200400"/>
+            <a:ext cx="4572000" cy="571500"/>
+          </a:xfrm>
+          <a:prstGeom prst="rect">
+            <a:avLst/>
+          </a:prstGeom>
+          <a:noFill/>
+          <a:ln/>
+        </p:spPr>
+        <p:txBody>
+          <a:bodyPr wrap="square" lIns="0" tIns="0" rIns="0" bIns="0" rtlCol="0" anchor="t"/>
+          <a:lstStyle/>
+          <a:p>
+            <a:pPr indent="0" marL="0">
+              <a:lnSpc>
+                <a:spcPct val="115000"/>
+              </a:lnSpc>
+              <a:buNone/>
+            </a:pPr>
+            <a:r>
+              <a:rPr lang="en-US" sz="1500" dirty="0">
+                <a:solidFill>
+                  <a:srgbClr val="44505E"/>
+                </a:solidFill>
+                <a:latin typeface="Calibri" pitchFamily="34" charset="0"/>
+                <a:ea typeface="Calibri" pitchFamily="34" charset="-122"/>
+                <a:cs typeface="Calibri" pitchFamily="34" charset="-120"/>
+              </a:rPr>
+              <a:t>Nur den 2,24-Hz-Anteil entfernen; der 5-Hz-Anteil soll bleiben.</a:t>
+            </a:r>
+            <a:endParaRPr lang="en-US" sz="1500" dirty="0"/>
+          </a:p>
+        </p:txBody>
+      </p:sp>
+      <p:sp>
+        <p:nvSpPr>
+          <p:cNvPr id="12" name="Text 8"/>
+          <p:cNvSpPr txBox="1"/>
+          <p:nvPr/>
+        </p:nvSpPr>
+        <p:spPr>
+          <a:xfrm>
+            <a:off x="6807200" y="3886200"/>
+            <a:ext cx="4572000" cy="266700"/>
+          </a:xfrm>
+          <a:prstGeom prst="rect">
+            <a:avLst/>
+          </a:prstGeom>
+          <a:noFill/>
+          <a:ln/>
+        </p:spPr>
+        <p:txBody>
+          <a:bodyPr wrap="square" lIns="0" tIns="0" rIns="0" bIns="0" rtlCol="0" anchor="t"/>
+          <a:lstStyle/>
+          <a:p>
+            <a:pPr indent="0" marL="0">
+              <a:lnSpc>
+                <a:spcPct val="115000"/>
+              </a:lnSpc>
+              <a:buNone/>
+            </a:pPr>
+            <a:r>
+              <a:rPr lang="en-US" sz="1500" b="1" dirty="0">
+                <a:solidFill>
+                  <a:srgbClr val="14202E"/>
+                </a:solidFill>
+                <a:latin typeface="Calibri" pitchFamily="34" charset="0"/>
+                <a:ea typeface="Calibri" pitchFamily="34" charset="-122"/>
+                <a:cs typeface="Calibri" pitchFamily="34" charset="-120"/>
+              </a:rPr>
+              <a:t>Ergebnis</a:t>
+            </a:r>
+            <a:endParaRPr lang="en-US" sz="1500" dirty="0"/>
+          </a:p>
+        </p:txBody>
+      </p:sp>
+      <p:sp>
+        <p:nvSpPr>
+          <p:cNvPr id="13" name="Text 9"/>
+          <p:cNvSpPr txBox="1"/>
+          <p:nvPr/>
+        </p:nvSpPr>
+        <p:spPr>
+          <a:xfrm>
+            <a:off x="6807200" y="4203700"/>
+            <a:ext cx="4572000" cy="838200"/>
+          </a:xfrm>
+          <a:prstGeom prst="rect">
+            <a:avLst/>
+          </a:prstGeom>
+          <a:noFill/>
+          <a:ln/>
+        </p:spPr>
+        <p:txBody>
+          <a:bodyPr wrap="square" lIns="0" tIns="0" rIns="0" bIns="0" rtlCol="0" anchor="t"/>
+          <a:lstStyle/>
+          <a:p>
+            <a:pPr indent="0" marL="0">
+              <a:lnSpc>
+                <a:spcPct val="115000"/>
+              </a:lnSpc>
+              <a:buNone/>
+            </a:pPr>
+            <a:r>
+              <a:rPr lang="en-US" sz="1500" dirty="0">
+                <a:solidFill>
+                  <a:srgbClr val="44505E"/>
+                </a:solidFill>
+                <a:latin typeface="Calibri" pitchFamily="34" charset="0"/>
+                <a:ea typeface="Calibri" pitchFamily="34" charset="-122"/>
+                <a:cs typeface="Calibri" pitchFamily="34" charset="-120"/>
+              </a:rPr>
+              <a:t>Ausgabe und Sollkurve liegen übereinander. Größte Abweichung über 1200 Werte: &lt; 3 · 10⁻¹³.</a:t>
+            </a:r>
+            <a:endParaRPr lang="en-US" sz="1500" dirty="0"/>
+          </a:p>
+        </p:txBody>
+      </p:sp>
+      <p:sp>
+        <p:nvSpPr>
+          <p:cNvPr id="25" name="Slide Number Placeholder 0"/>
+          <p:cNvSpPr>
+            <a:spLocks noGrp="1"/>
+          </p:cNvSpPr>
+          <p:nvPr>
+            <p:ph type="sldNum" sz="quarter" idx="4294967295"/>
+          </p:nvPr>
+        </p:nvSpPr>
+        <p:spPr>
+          <a:xfrm>
+            <a:off x="10795000" y="6426200"/>
+            <a:ext cx="584200" cy="228600"/>
+          </a:xfrm>
+          <a:prstGeom prst="rect">
+            <a:avLst/>
+          </a:prstGeom>
+          <a:extLst>
+            <a:ext uri="{C572A759-6A51-4108-AA02-DFA0A04FC94B}">
+              <ma14:wrappingTextBoxFlag xmlns:ma14="http://schemas.microsoft.com/office/mac/drawingml/2011/main" val="0"/>
+            </a:ext>
+          </a:extLst>
+        </p:spPr>
+        <p:txBody>
+          <a:bodyPr/>
+          <a:lstStyle>
+            <a:lvl1pPr>
+              <a:defRPr sz="1200">
+                <a:solidFill>
+                  <a:srgbClr val="5F6873"/>
+                </a:solidFill>
+                <a:latin typeface="Consolas"/>
+                <a:ea typeface="Consolas"/>
+                <a:cs typeface="Consolas"/>
+              </a:defRPr>
+            </a:lvl1pPr>
+          </a:lstStyle>
+          <a:p>
+            <a:pPr algn="r"/>
+            <a:fld id="{F7021451-1387-4CA6-816F-3879F97B5CBC}" type="slidenum">
+              <a:rPr b="0" lang="en-US"/>
+              <a:t>12</a:t>
+            </a:fld>
+            <a:endParaRPr lang="en-US"/>
+          </a:p>
+        </p:txBody>
+      </p:sp>
+    </p:spTree>
+  </p:cSld>
+  <p:clrMapOvr>
+    <a:masterClrMapping/>
+  </p:clrMapOvr>
+</p:sld>
+</file>
+
+<file path=ppt/slides/slide13.xml><?xml version="1.0" encoding="utf-8"?>
+<p:sld xmlns:a="http://schemas.openxmlformats.org/drawingml/2006/main" xmlns:r="http://schemas.openxmlformats.org/officeDocument/2006/relationships" xmlns:p="http://schemas.openxmlformats.org/presentationml/2006/main">
+  <p:cSld name="Slide 13">
+    <p:spTree>
+      <p:nvGrpSpPr>
+        <p:cNvPr id="1" name=""/>
+        <p:cNvGrpSpPr/>
+        <p:nvPr/>
+      </p:nvGrpSpPr>
+      <p:grpSpPr>
+        <a:xfrm>
+          <a:off x="0" y="0"/>
+          <a:ext cx="0" cy="0"/>
+          <a:chOff x="0" y="0"/>
+          <a:chExt cx="0" cy="0"/>
+        </a:xfrm>
+      </p:grpSpPr>
+      <p:sp>
+        <p:nvSpPr>
+          <p:cNvPr id="2" name="Text 0"/>
+          <p:cNvSpPr txBox="1"/>
+          <p:nvPr/>
+        </p:nvSpPr>
+        <p:spPr>
+          <a:xfrm>
+            <a:off x="812800" y="812800"/>
+            <a:ext cx="10566400" cy="215900"/>
+          </a:xfrm>
+          <a:prstGeom prst="rect">
+            <a:avLst/>
+          </a:prstGeom>
+          <a:noFill/>
+          <a:ln/>
+        </p:spPr>
+        <p:txBody>
+          <a:bodyPr wrap="square" lIns="0" tIns="0" rIns="0" bIns="0" rtlCol="0" anchor="t"/>
+          <a:lstStyle/>
+          <a:p>
+            <a:pPr indent="0" marL="0">
+              <a:lnSpc>
+                <a:spcPct val="115000"/>
+              </a:lnSpc>
+              <a:buNone/>
+            </a:pPr>
+            <a:r>
+              <a:rPr lang="en-US" sz="1200" spc="100" kern="0" dirty="0">
+                <a:solidFill>
+                  <a:srgbClr val="1C5CAB"/>
+                </a:solidFill>
+                <a:latin typeface="Consolas" pitchFamily="34" charset="0"/>
+                <a:ea typeface="Consolas" pitchFamily="34" charset="-122"/>
+                <a:cs typeface="Consolas" pitchFamily="34" charset="-120"/>
+              </a:rPr>
               <a:t>KONTROLLIERTE PRÜFUNG · NIST LANCZOS1</a:t>
             </a:r>
             <a:endParaRPr lang="en-US" sz="1200" dirty="0"/>
@@ -4670,51 +5436,33 @@
           </a:p>
         </p:txBody>
       </p:sp>
-      <p:sp>
-        <p:nvSpPr>
-          <p:cNvPr id="9" name="Text 5"/>
-          <p:cNvSpPr txBox="1"/>
-          <p:nvPr/>
-        </p:nvSpPr>
-        <p:spPr>
-          <a:xfrm>
-            <a:off x="6807200" y="2197100"/>
-            <a:ext cx="4572000" cy="228600"/>
-          </a:xfrm>
-          <a:prstGeom prst="rect">
-            <a:avLst/>
-          </a:prstGeom>
-          <a:noFill/>
-          <a:ln/>
-        </p:spPr>
-        <p:txBody>
-          <a:bodyPr wrap="square" lIns="0" tIns="0" rIns="0" bIns="0" rtlCol="0" anchor="t"/>
-          <a:lstStyle/>
-          <a:p>
-            <a:pPr indent="0" marL="0">
-              <a:lnSpc>
-                <a:spcPct val="115000"/>
-              </a:lnSpc>
-              <a:buNone/>
-            </a:pPr>
-            <a:r>
-              <a:rPr lang="en-US" sz="1200" dirty="0">
-                <a:solidFill>
-                  <a:srgbClr val="14202E"/>
-                </a:solidFill>
-                <a:latin typeface="Consolas" pitchFamily="34" charset="0"/>
-                <a:ea typeface="Consolas" pitchFamily="34" charset="-122"/>
-                <a:cs typeface="Consolas" pitchFamily="34" charset="-120"/>
-              </a:rPr>
-              <a:t>y = b1·e^(−b2·x) + b3·e^(−b4·x) + b5·e^(−b6·x)</a:t>
-            </a:r>
-            <a:endParaRPr lang="en-US" sz="1200" dirty="0"/>
-          </a:p>
-        </p:txBody>
-      </p:sp>
+      <p:pic>
+        <p:nvPicPr>
+          <p:cNvPr id="9" name="Image 1" descr="nist">    </p:cNvPr>
+          <p:cNvPicPr>
+            <a:picLocks noChangeAspect="1"/>
+          </p:cNvPicPr>
+          <p:nvPr/>
+        </p:nvPicPr>
+        <p:blipFill>
+          <a:blip r:embed="rId2"/>
+          <a:stretch>
+            <a:fillRect/>
+          </a:stretch>
+        </p:blipFill>
+        <p:spPr>
+          <a:xfrm>
+            <a:off x="6807200" y="2184400"/>
+            <a:ext cx="2762250" cy="323850"/>
+          </a:xfrm>
+          <a:prstGeom prst="rect">
+            <a:avLst/>
+          </a:prstGeom>
+        </p:spPr>
+      </p:pic>
       <p:graphicFrame>
         <p:nvGraphicFramePr>
-          <p:cNvPr id="13" name="Table 0"/>
+          <p:cNvPr id="14" name="Table 0"/>
           <p:cNvGraphicFramePr>
             <a:graphicFrameLocks noGrp="1"/>
           </p:cNvGraphicFramePr>
@@ -6187,7 +6935,7 @@
       </p:graphicFrame>
       <p:sp>
         <p:nvSpPr>
-          <p:cNvPr id="11" name="Text 6"/>
+          <p:cNvPr id="11" name="Text 5"/>
           <p:cNvSpPr txBox="1"/>
           <p:nvPr/>
         </p:nvSpPr>
@@ -6269,7 +7017,7 @@
             <a:pPr algn="r"/>
             <a:fld id="{F7021451-1387-4CA6-816F-3879F97B5CBC}" type="slidenum">
               <a:rPr b="0" lang="en-US"/>
-              <a:t>12</a:t>
+              <a:t>13</a:t>
             </a:fld>
             <a:endParaRPr lang="en-US"/>
           </a:p>
@@ -6283,9 +7031,9 @@
 </p:sld>
 </file>
 
-<file path=ppt/slides/slide13.xml><?xml version="1.0" encoding="utf-8"?>
+<file path=ppt/slides/slide14.xml><?xml version="1.0" encoding="utf-8"?>
 <p:sld xmlns:a="http://schemas.openxmlformats.org/drawingml/2006/main" xmlns:r="http://schemas.openxmlformats.org/officeDocument/2006/relationships" xmlns:p="http://schemas.openxmlformats.org/presentationml/2006/main">
-  <p:cSld name="Slide 13">
+  <p:cSld name="Slide 14">
     <p:spTree>
       <p:nvGrpSpPr>
         <p:cNvPr id="1" name=""/>
@@ -6427,7 +7175,7 @@
       </p:sp>
       <p:graphicFrame>
         <p:nvGraphicFramePr>
-          <p:cNvPr id="14" name="Table 0"/>
+          <p:cNvPr id="15" name="Table 0"/>
           <p:cNvGraphicFramePr>
             <a:graphicFrameLocks noGrp="1"/>
           </p:cNvGraphicFramePr>
@@ -7999,504 +8747,6 @@
             <a:pPr algn="r"/>
             <a:fld id="{F7021451-1387-4CA6-816F-3879F97B5CBC}" type="slidenum">
               <a:rPr b="0" lang="en-US"/>
-              <a:t>13</a:t>
-            </a:fld>
-            <a:endParaRPr lang="en-US"/>
-          </a:p>
-        </p:txBody>
-      </p:sp>
-    </p:spTree>
-  </p:cSld>
-  <p:clrMapOvr>
-    <a:masterClrMapping/>
-  </p:clrMapOvr>
-</p:sld>
-</file>
-
-<file path=ppt/slides/slide14.xml><?xml version="1.0" encoding="utf-8"?>
-<p:sld xmlns:a="http://schemas.openxmlformats.org/drawingml/2006/main" xmlns:r="http://schemas.openxmlformats.org/officeDocument/2006/relationships" xmlns:p="http://schemas.openxmlformats.org/presentationml/2006/main">
-  <p:cSld name="Slide 14">
-    <p:spTree>
-      <p:nvGrpSpPr>
-        <p:cNvPr id="1" name=""/>
-        <p:cNvGrpSpPr/>
-        <p:nvPr/>
-      </p:nvGrpSpPr>
-      <p:grpSpPr>
-        <a:xfrm>
-          <a:off x="0" y="0"/>
-          <a:ext cx="0" cy="0"/>
-          <a:chOff x="0" y="0"/>
-          <a:chExt cx="0" cy="0"/>
-        </a:xfrm>
-      </p:grpSpPr>
-      <p:sp>
-        <p:nvSpPr>
-          <p:cNvPr id="2" name="Text 0"/>
-          <p:cNvSpPr txBox="1"/>
-          <p:nvPr/>
-        </p:nvSpPr>
-        <p:spPr>
-          <a:xfrm>
-            <a:off x="812800" y="812800"/>
-            <a:ext cx="10566400" cy="215900"/>
-          </a:xfrm>
-          <a:prstGeom prst="rect">
-            <a:avLst/>
-          </a:prstGeom>
-          <a:noFill/>
-          <a:ln/>
-        </p:spPr>
-        <p:txBody>
-          <a:bodyPr wrap="square" lIns="0" tIns="0" rIns="0" bIns="0" rtlCol="0" anchor="t"/>
-          <a:lstStyle/>
-          <a:p>
-            <a:pPr indent="0" marL="0">
-              <a:lnSpc>
-                <a:spcPct val="115000"/>
-              </a:lnSpc>
-              <a:buNone/>
-            </a:pPr>
-            <a:r>
-              <a:rPr lang="en-US" sz="1200" spc="100" kern="0" dirty="0">
-                <a:solidFill>
-                  <a:srgbClr val="1C5CAB"/>
-                </a:solidFill>
-                <a:latin typeface="Consolas" pitchFamily="34" charset="0"/>
-                <a:ea typeface="Consolas" pitchFamily="34" charset="-122"/>
-                <a:cs typeface="Consolas" pitchFamily="34" charset="-120"/>
-              </a:rPr>
-              <a:t>PROJEKTMESSUNG · NEGATIVER SPRUNG</a:t>
-            </a:r>
-            <a:endParaRPr lang="en-US" sz="1200" dirty="0"/>
-          </a:p>
-        </p:txBody>
-      </p:sp>
-      <p:sp>
-        <p:nvSpPr>
-          <p:cNvPr id="3" name="Text 0"/>
-          <p:cNvSpPr/>
-          <p:nvPr>
-            <p:ph idx="100" type="title" hasCustomPrompt="1"/>
-          </p:nvPr>
-        </p:nvSpPr>
-        <p:spPr>
-          <a:xfrm>
-            <a:off x="812800" y="1104900"/>
-            <a:ext cx="10566400" cy="508000"/>
-          </a:xfrm>
-          <a:prstGeom prst="rect">
-            <a:avLst/>
-          </a:prstGeom>
-          <a:noFill/>
-          <a:ln/>
-        </p:spPr>
-        <p:txBody>
-          <a:bodyPr wrap="square" lIns="0" tIns="0" rIns="0" bIns="0" rtlCol="0" anchor="t"/>
-          <a:lstStyle/>
-          <a:p>
-            <a:pPr algn="l" indent="0" marL="0">
-              <a:buNone/>
-            </a:pPr>
-            <a:r>
-              <a:rPr lang="en-US" sz="3200" b="1" dirty="0">
-                <a:solidFill>
-                  <a:srgbClr val="14202E"/>
-                </a:solidFill>
-                <a:latin typeface="Calibri" pitchFamily="34" charset="0"/>
-                <a:ea typeface="Calibri" pitchFamily="34" charset="-122"/>
-                <a:cs typeface="Calibri" pitchFamily="34" charset="-120"/>
-              </a:rPr>
-              <a:t>Filterung: negative Sprungantwort</a:t>
-            </a:r>
-            <a:endParaRPr lang="en-US" sz="3200" dirty="0"/>
-          </a:p>
-        </p:txBody>
-      </p:sp>
-      <p:sp>
-        <p:nvSpPr>
-          <p:cNvPr id="4" name="Text 2"/>
-          <p:cNvSpPr txBox="1"/>
-          <p:nvPr/>
-        </p:nvSpPr>
-        <p:spPr>
-          <a:xfrm>
-            <a:off x="812800" y="6426200"/>
-            <a:ext cx="9779000" cy="228600"/>
-          </a:xfrm>
-          <a:prstGeom prst="rect">
-            <a:avLst/>
-          </a:prstGeom>
-          <a:noFill/>
-          <a:ln/>
-        </p:spPr>
-        <p:txBody>
-          <a:bodyPr wrap="square" lIns="0" tIns="0" rIns="0" bIns="0" rtlCol="0" anchor="t"/>
-          <a:lstStyle/>
-          <a:p>
-            <a:pPr indent="0" marL="0">
-              <a:lnSpc>
-                <a:spcPct val="115000"/>
-              </a:lnSpc>
-              <a:buNone/>
-            </a:pPr>
-            <a:r>
-              <a:rPr lang="en-US" sz="1200" dirty="0">
-                <a:solidFill>
-                  <a:srgbClr val="5F6873"/>
-                </a:solidFill>
-                <a:latin typeface="Calibri" pitchFamily="34" charset="0"/>
-                <a:ea typeface="Calibri" pitchFamily="34" charset="-122"/>
-                <a:cs typeface="Calibri" pitchFamily="34" charset="-120"/>
-              </a:rPr>
-              <a:t>Blau: Messung · Orange: Messung minus geschätzter 2,268-Hz-Anteil · P_pos / 10⁶ in Dateieinheit</a:t>
-            </a:r>
-            <a:endParaRPr lang="en-US" sz="1200" dirty="0"/>
-          </a:p>
-        </p:txBody>
-      </p:sp>
-      <p:pic>
-        <p:nvPicPr>
-          <p:cNvPr id="6" name="Image 0" descr="C:\Sevgi\projects\prony_matrix_pencil_filter\outputs\ergebnisdeck\05_filter_negativ.png">    </p:cNvPr>
-          <p:cNvPicPr>
-            <a:picLocks noChangeAspect="1"/>
-          </p:cNvPicPr>
-          <p:nvPr/>
-        </p:nvPicPr>
-        <p:blipFill>
-          <a:blip r:embed="rId1"/>
-          <a:stretch>
-            <a:fillRect/>
-          </a:stretch>
-        </p:blipFill>
-        <p:spPr>
-          <a:xfrm>
-            <a:off x="1524000" y="1879600"/>
-            <a:ext cx="9144000" cy="3295650"/>
-          </a:xfrm>
-          <a:prstGeom prst="rect">
-            <a:avLst/>
-          </a:prstGeom>
-        </p:spPr>
-      </p:pic>
-      <p:sp>
-        <p:nvSpPr>
-          <p:cNvPr id="7" name="Shape 3"/>
-          <p:cNvSpPr/>
-          <p:nvPr/>
-        </p:nvSpPr>
-        <p:spPr>
-          <a:xfrm>
-            <a:off x="1524000" y="1879600"/>
-            <a:ext cx="9144000" cy="3295650"/>
-          </a:xfrm>
-          <a:prstGeom prst="roundRect">
-            <a:avLst>
-              <a:gd name="adj" fmla="val 3052"/>
-            </a:avLst>
-          </a:prstGeom>
-          <a:ln w="9525">
-            <a:solidFill>
-              <a:srgbClr val="E1E0D9"/>
-            </a:solidFill>
-            <a:prstDash val="solid"/>
-          </a:ln>
-        </p:spPr>
-      </p:sp>
-      <p:sp>
-        <p:nvSpPr>
-          <p:cNvPr id="8" name="Text 4"/>
-          <p:cNvSpPr txBox="1"/>
-          <p:nvPr/>
-        </p:nvSpPr>
-        <p:spPr>
-          <a:xfrm>
-            <a:off x="812800" y="5353050"/>
-            <a:ext cx="3314700" cy="266700"/>
-          </a:xfrm>
-          <a:prstGeom prst="rect">
-            <a:avLst/>
-          </a:prstGeom>
-          <a:noFill/>
-          <a:ln/>
-        </p:spPr>
-        <p:txBody>
-          <a:bodyPr wrap="square" lIns="0" tIns="0" rIns="0" bIns="0" rtlCol="0" anchor="t"/>
-          <a:lstStyle/>
-          <a:p>
-            <a:pPr indent="0" marL="0">
-              <a:lnSpc>
-                <a:spcPct val="115000"/>
-              </a:lnSpc>
-              <a:buNone/>
-            </a:pPr>
-            <a:r>
-              <a:rPr lang="en-US" sz="1500" b="1" dirty="0">
-                <a:solidFill>
-                  <a:srgbClr val="14202E"/>
-                </a:solidFill>
-                <a:latin typeface="Calibri" pitchFamily="34" charset="0"/>
-                <a:ea typeface="Calibri" pitchFamily="34" charset="-122"/>
-                <a:cs typeface="Calibri" pitchFamily="34" charset="-120"/>
-              </a:rPr>
-              <a:t>1 Polpaar</a:t>
-            </a:r>
-            <a:endParaRPr lang="en-US" sz="1500" dirty="0"/>
-          </a:p>
-        </p:txBody>
-      </p:sp>
-      <p:sp>
-        <p:nvSpPr>
-          <p:cNvPr id="9" name="Text 5"/>
-          <p:cNvSpPr txBox="1"/>
-          <p:nvPr/>
-        </p:nvSpPr>
-        <p:spPr>
-          <a:xfrm>
-            <a:off x="812800" y="5645150"/>
-            <a:ext cx="3314700" cy="228600"/>
-          </a:xfrm>
-          <a:prstGeom prst="rect">
-            <a:avLst/>
-          </a:prstGeom>
-          <a:noFill/>
-          <a:ln/>
-        </p:spPr>
-        <p:txBody>
-          <a:bodyPr wrap="square" lIns="0" tIns="0" rIns="0" bIns="0" rtlCol="0" anchor="t"/>
-          <a:lstStyle/>
-          <a:p>
-            <a:pPr indent="0" marL="0">
-              <a:lnSpc>
-                <a:spcPct val="115000"/>
-              </a:lnSpc>
-              <a:buNone/>
-            </a:pPr>
-            <a:r>
-              <a:rPr lang="en-US" sz="1200" dirty="0">
-                <a:solidFill>
-                  <a:srgbClr val="44505E"/>
-                </a:solidFill>
-                <a:latin typeface="Calibri" pitchFamily="34" charset="0"/>
-                <a:ea typeface="Calibri" pitchFamily="34" charset="-122"/>
-                <a:cs typeface="Calibri" pitchFamily="34" charset="-120"/>
-              </a:rPr>
-              <a:t>bei 2,268 Hz abgezogen</a:t>
-            </a:r>
-            <a:endParaRPr lang="en-US" sz="1200" dirty="0"/>
-          </a:p>
-        </p:txBody>
-      </p:sp>
-      <p:sp>
-        <p:nvSpPr>
-          <p:cNvPr id="10" name="Text 6"/>
-          <p:cNvSpPr txBox="1"/>
-          <p:nvPr/>
-        </p:nvSpPr>
-        <p:spPr>
-          <a:xfrm>
-            <a:off x="4436533" y="5353050"/>
-            <a:ext cx="3314700" cy="266700"/>
-          </a:xfrm>
-          <a:prstGeom prst="rect">
-            <a:avLst/>
-          </a:prstGeom>
-          <a:noFill/>
-          <a:ln/>
-        </p:spPr>
-        <p:txBody>
-          <a:bodyPr wrap="square" lIns="0" tIns="0" rIns="0" bIns="0" rtlCol="0" anchor="t"/>
-          <a:lstStyle/>
-          <a:p>
-            <a:pPr indent="0" marL="0">
-              <a:lnSpc>
-                <a:spcPct val="115000"/>
-              </a:lnSpc>
-              <a:buNone/>
-            </a:pPr>
-            <a:r>
-              <a:rPr lang="en-US" sz="1500" b="1" dirty="0">
-                <a:solidFill>
-                  <a:srgbClr val="14202E"/>
-                </a:solidFill>
-                <a:latin typeface="Calibri" pitchFamily="34" charset="0"/>
-                <a:ea typeface="Calibri" pitchFamily="34" charset="-122"/>
-                <a:cs typeface="Calibri" pitchFamily="34" charset="-120"/>
-              </a:rPr>
-              <a:t>Unverändert vor 1 s</a:t>
-            </a:r>
-            <a:endParaRPr lang="en-US" sz="1500" dirty="0"/>
-          </a:p>
-        </p:txBody>
-      </p:sp>
-      <p:sp>
-        <p:nvSpPr>
-          <p:cNvPr id="11" name="Text 7"/>
-          <p:cNvSpPr txBox="1"/>
-          <p:nvPr/>
-        </p:nvSpPr>
-        <p:spPr>
-          <a:xfrm>
-            <a:off x="4436533" y="5645150"/>
-            <a:ext cx="3314700" cy="228600"/>
-          </a:xfrm>
-          <a:prstGeom prst="rect">
-            <a:avLst/>
-          </a:prstGeom>
-          <a:noFill/>
-          <a:ln/>
-        </p:spPr>
-        <p:txBody>
-          <a:bodyPr wrap="square" lIns="0" tIns="0" rIns="0" bIns="0" rtlCol="0" anchor="t"/>
-          <a:lstStyle/>
-          <a:p>
-            <a:pPr indent="0" marL="0">
-              <a:lnSpc>
-                <a:spcPct val="115000"/>
-              </a:lnSpc>
-              <a:buNone/>
-            </a:pPr>
-            <a:r>
-              <a:rPr lang="en-US" sz="1200" dirty="0">
-                <a:solidFill>
-                  <a:srgbClr val="44505E"/>
-                </a:solidFill>
-                <a:latin typeface="Calibri" pitchFamily="34" charset="0"/>
-                <a:ea typeface="Calibri" pitchFamily="34" charset="-122"/>
-                <a:cs typeface="Calibri" pitchFamily="34" charset="-120"/>
-              </a:rPr>
-              <a:t>Abzug erst ab Analysebeginn</a:t>
-            </a:r>
-            <a:endParaRPr lang="en-US" sz="1200" dirty="0"/>
-          </a:p>
-        </p:txBody>
-      </p:sp>
-      <p:sp>
-        <p:nvSpPr>
-          <p:cNvPr id="12" name="Text 8"/>
-          <p:cNvSpPr txBox="1"/>
-          <p:nvPr/>
-        </p:nvSpPr>
-        <p:spPr>
-          <a:xfrm>
-            <a:off x="8060267" y="5353050"/>
-            <a:ext cx="3314700" cy="266700"/>
-          </a:xfrm>
-          <a:prstGeom prst="rect">
-            <a:avLst/>
-          </a:prstGeom>
-          <a:noFill/>
-          <a:ln/>
-        </p:spPr>
-        <p:txBody>
-          <a:bodyPr wrap="square" lIns="0" tIns="0" rIns="0" bIns="0" rtlCol="0" anchor="t"/>
-          <a:lstStyle/>
-          <a:p>
-            <a:pPr indent="0" marL="0">
-              <a:lnSpc>
-                <a:spcPct val="115000"/>
-              </a:lnSpc>
-              <a:buNone/>
-            </a:pPr>
-            <a:r>
-              <a:rPr lang="en-US" sz="1500" b="1" dirty="0">
-                <a:solidFill>
-                  <a:srgbClr val="14202E"/>
-                </a:solidFill>
-                <a:latin typeface="Calibri" pitchFamily="34" charset="0"/>
-                <a:ea typeface="Calibri" pitchFamily="34" charset="-122"/>
-                <a:cs typeface="Calibri" pitchFamily="34" charset="-120"/>
-              </a:rPr>
-              <a:t>−99,999 %</a:t>
-            </a:r>
-            <a:endParaRPr lang="en-US" sz="1500" dirty="0"/>
-          </a:p>
-        </p:txBody>
-      </p:sp>
-      <p:sp>
-        <p:nvSpPr>
-          <p:cNvPr id="13" name="Text 9"/>
-          <p:cNvSpPr txBox="1"/>
-          <p:nvPr/>
-        </p:nvSpPr>
-        <p:spPr>
-          <a:xfrm>
-            <a:off x="8060267" y="5645150"/>
-            <a:ext cx="3314700" cy="228600"/>
-          </a:xfrm>
-          <a:prstGeom prst="rect">
-            <a:avLst/>
-          </a:prstGeom>
-          <a:noFill/>
-          <a:ln/>
-        </p:spPr>
-        <p:txBody>
-          <a:bodyPr wrap="square" lIns="0" tIns="0" rIns="0" bIns="0" rtlCol="0" anchor="t"/>
-          <a:lstStyle/>
-          <a:p>
-            <a:pPr indent="0" marL="0">
-              <a:lnSpc>
-                <a:spcPct val="115000"/>
-              </a:lnSpc>
-              <a:buNone/>
-            </a:pPr>
-            <a:r>
-              <a:rPr lang="en-US" sz="1200" dirty="0">
-                <a:solidFill>
-                  <a:srgbClr val="44505E"/>
-                </a:solidFill>
-                <a:latin typeface="Calibri" pitchFamily="34" charset="0"/>
-                <a:ea typeface="Calibri" pitchFamily="34" charset="-122"/>
-                <a:cs typeface="Calibri" pitchFamily="34" charset="-120"/>
-              </a:rPr>
-              <a:t>Bandenergie 1,76–2,64 Hz, 4 bis 7 s</a:t>
-            </a:r>
-            <a:endParaRPr lang="en-US" sz="1200" dirty="0"/>
-          </a:p>
-        </p:txBody>
-      </p:sp>
-      <p:sp>
-        <p:nvSpPr>
-          <p:cNvPr id="25" name="Slide Number Placeholder 0"/>
-          <p:cNvSpPr>
-            <a:spLocks noGrp="1"/>
-          </p:cNvSpPr>
-          <p:nvPr>
-            <p:ph type="sldNum" sz="quarter" idx="4294967295"/>
-          </p:nvPr>
-        </p:nvSpPr>
-        <p:spPr>
-          <a:xfrm>
-            <a:off x="10795000" y="6426200"/>
-            <a:ext cx="584200" cy="228600"/>
-          </a:xfrm>
-          <a:prstGeom prst="rect">
-            <a:avLst/>
-          </a:prstGeom>
-          <a:extLst>
-            <a:ext uri="{C572A759-6A51-4108-AA02-DFA0A04FC94B}">
-              <ma14:wrappingTextBoxFlag xmlns:ma14="http://schemas.microsoft.com/office/mac/drawingml/2011/main" val="0"/>
-            </a:ext>
-          </a:extLst>
-        </p:spPr>
-        <p:txBody>
-          <a:bodyPr/>
-          <a:lstStyle>
-            <a:lvl1pPr>
-              <a:defRPr sz="1200">
-                <a:solidFill>
-                  <a:srgbClr val="5F6873"/>
-                </a:solidFill>
-                <a:latin typeface="Consolas"/>
-                <a:ea typeface="Consolas"/>
-                <a:cs typeface="Consolas"/>
-              </a:defRPr>
-            </a:lvl1pPr>
-          </a:lstStyle>
-          <a:p>
-            <a:pPr algn="r"/>
-            <a:fld id="{F7021451-1387-4CA6-816F-3879F97B5CBC}" type="slidenum">
-              <a:rPr b="0" lang="en-US"/>
               <a:t>14</a:t>
             </a:fld>
             <a:endParaRPr lang="en-US"/>
@@ -8564,7 +8814,7 @@
                 <a:ea typeface="Consolas" pitchFamily="34" charset="-122"/>
                 <a:cs typeface="Consolas" pitchFamily="34" charset="-120"/>
               </a:rPr>
-              <a:t>PROJEKTMESSUNG · POSITIVER SPRUNG</a:t>
+              <a:t>PROJEKTMESSUNG · NEGATIVER SPRUNG</a:t>
             </a:r>
             <a:endParaRPr lang="en-US" sz="1200" dirty="0"/>
           </a:p>
@@ -8605,7 +8855,7 @@
                 <a:ea typeface="Calibri" pitchFamily="34" charset="-122"/>
                 <a:cs typeface="Calibri" pitchFamily="34" charset="-120"/>
               </a:rPr>
-              <a:t>Filterung: positive Sprungantwort</a:t>
+              <a:t>Filterung: negative Sprungantwort</a:t>
             </a:r>
             <a:endParaRPr lang="en-US" sz="3200" dirty="0"/>
           </a:p>
@@ -8647,7 +8897,7 @@
                 <a:ea typeface="Calibri" pitchFamily="34" charset="-122"/>
                 <a:cs typeface="Calibri" pitchFamily="34" charset="-120"/>
               </a:rPr>
-              <a:t>Blau: Messung · Orange: Messung minus Summe beider Anteile · P_pos / 10⁶ in Dateieinheit</a:t>
+              <a:t>Blau: Messung · Orange: Messung minus geschätzter 2,268-Hz-Anteil · P_pos / 10⁶ in Dateieinheit</a:t>
             </a:r>
             <a:endParaRPr lang="en-US" sz="1200" dirty="0"/>
           </a:p>
@@ -8655,7 +8905,7 @@
       </p:sp>
       <p:pic>
         <p:nvPicPr>
-          <p:cNvPr id="6" name="Image 0" descr="C:\Sevgi\projects\prony_matrix_pencil_filter\outputs\ergebnisdeck\06_filter_positiv.png">    </p:cNvPr>
+          <p:cNvPr id="6" name="Image 0" descr="C:\Sevgi\projects\prony_matrix_pencil_filter\outputs\ergebnisdeck\05_filter_negativ.png">    </p:cNvPr>
           <p:cNvPicPr>
             <a:picLocks noChangeAspect="1"/>
           </p:cNvPicPr>
@@ -8737,7 +8987,7 @@
                 <a:ea typeface="Calibri" pitchFamily="34" charset="-122"/>
                 <a:cs typeface="Calibri" pitchFamily="34" charset="-120"/>
               </a:rPr>
-              <a:t>2 Polpaare</a:t>
+              <a:t>1 Polpaar</a:t>
             </a:r>
             <a:endParaRPr lang="en-US" sz="1500" dirty="0"/>
           </a:p>
@@ -8779,7 +9029,7 @@
                 <a:ea typeface="Calibri" pitchFamily="34" charset="-122"/>
                 <a:cs typeface="Calibri" pitchFamily="34" charset="-120"/>
               </a:rPr>
-              <a:t>bei 2,268 Hz und 2,480 Hz abgezogen</a:t>
+              <a:t>bei 2,268 Hz abgezogen</a:t>
             </a:r>
             <a:endParaRPr lang="en-US" sz="1200" dirty="0"/>
           </a:p>
@@ -8905,7 +9155,7 @@
                 <a:ea typeface="Calibri" pitchFamily="34" charset="-122"/>
                 <a:cs typeface="Calibri" pitchFamily="34" charset="-120"/>
               </a:rPr>
-              <a:t>−99,87 %</a:t>
+              <a:t>−99,999 %</a:t>
             </a:r>
             <a:endParaRPr lang="en-US" sz="1500" dirty="0"/>
           </a:p>
@@ -9056,6 +9306,504 @@
             <a:r>
               <a:rPr lang="en-US" sz="1200" spc="100" kern="0" dirty="0">
                 <a:solidFill>
+                  <a:srgbClr val="1C5CAB"/>
+                </a:solidFill>
+                <a:latin typeface="Consolas" pitchFamily="34" charset="0"/>
+                <a:ea typeface="Consolas" pitchFamily="34" charset="-122"/>
+                <a:cs typeface="Consolas" pitchFamily="34" charset="-120"/>
+              </a:rPr>
+              <a:t>PROJEKTMESSUNG · POSITIVER SPRUNG</a:t>
+            </a:r>
+            <a:endParaRPr lang="en-US" sz="1200" dirty="0"/>
+          </a:p>
+        </p:txBody>
+      </p:sp>
+      <p:sp>
+        <p:nvSpPr>
+          <p:cNvPr id="3" name="Text 0"/>
+          <p:cNvSpPr/>
+          <p:nvPr>
+            <p:ph idx="100" type="title" hasCustomPrompt="1"/>
+          </p:nvPr>
+        </p:nvSpPr>
+        <p:spPr>
+          <a:xfrm>
+            <a:off x="812800" y="1104900"/>
+            <a:ext cx="10566400" cy="508000"/>
+          </a:xfrm>
+          <a:prstGeom prst="rect">
+            <a:avLst/>
+          </a:prstGeom>
+          <a:noFill/>
+          <a:ln/>
+        </p:spPr>
+        <p:txBody>
+          <a:bodyPr wrap="square" lIns="0" tIns="0" rIns="0" bIns="0" rtlCol="0" anchor="t"/>
+          <a:lstStyle/>
+          <a:p>
+            <a:pPr algn="l" indent="0" marL="0">
+              <a:buNone/>
+            </a:pPr>
+            <a:r>
+              <a:rPr lang="en-US" sz="3200" b="1" dirty="0">
+                <a:solidFill>
+                  <a:srgbClr val="14202E"/>
+                </a:solidFill>
+                <a:latin typeface="Calibri" pitchFamily="34" charset="0"/>
+                <a:ea typeface="Calibri" pitchFamily="34" charset="-122"/>
+                <a:cs typeface="Calibri" pitchFamily="34" charset="-120"/>
+              </a:rPr>
+              <a:t>Filterung: positive Sprungantwort</a:t>
+            </a:r>
+            <a:endParaRPr lang="en-US" sz="3200" dirty="0"/>
+          </a:p>
+        </p:txBody>
+      </p:sp>
+      <p:sp>
+        <p:nvSpPr>
+          <p:cNvPr id="4" name="Text 2"/>
+          <p:cNvSpPr txBox="1"/>
+          <p:nvPr/>
+        </p:nvSpPr>
+        <p:spPr>
+          <a:xfrm>
+            <a:off x="812800" y="6426200"/>
+            <a:ext cx="9779000" cy="228600"/>
+          </a:xfrm>
+          <a:prstGeom prst="rect">
+            <a:avLst/>
+          </a:prstGeom>
+          <a:noFill/>
+          <a:ln/>
+        </p:spPr>
+        <p:txBody>
+          <a:bodyPr wrap="square" lIns="0" tIns="0" rIns="0" bIns="0" rtlCol="0" anchor="t"/>
+          <a:lstStyle/>
+          <a:p>
+            <a:pPr indent="0" marL="0">
+              <a:lnSpc>
+                <a:spcPct val="115000"/>
+              </a:lnSpc>
+              <a:buNone/>
+            </a:pPr>
+            <a:r>
+              <a:rPr lang="en-US" sz="1200" dirty="0">
+                <a:solidFill>
+                  <a:srgbClr val="5F6873"/>
+                </a:solidFill>
+                <a:latin typeface="Calibri" pitchFamily="34" charset="0"/>
+                <a:ea typeface="Calibri" pitchFamily="34" charset="-122"/>
+                <a:cs typeface="Calibri" pitchFamily="34" charset="-120"/>
+              </a:rPr>
+              <a:t>Blau: Messung · Orange: Messung minus Summe beider Anteile · P_pos / 10⁶ in Dateieinheit</a:t>
+            </a:r>
+            <a:endParaRPr lang="en-US" sz="1200" dirty="0"/>
+          </a:p>
+        </p:txBody>
+      </p:sp>
+      <p:pic>
+        <p:nvPicPr>
+          <p:cNvPr id="6" name="Image 0" descr="C:\Sevgi\projects\prony_matrix_pencil_filter\outputs\ergebnisdeck\06_filter_positiv.png">    </p:cNvPr>
+          <p:cNvPicPr>
+            <a:picLocks noChangeAspect="1"/>
+          </p:cNvPicPr>
+          <p:nvPr/>
+        </p:nvPicPr>
+        <p:blipFill>
+          <a:blip r:embed="rId1"/>
+          <a:stretch>
+            <a:fillRect/>
+          </a:stretch>
+        </p:blipFill>
+        <p:spPr>
+          <a:xfrm>
+            <a:off x="1524000" y="1879600"/>
+            <a:ext cx="9144000" cy="3295650"/>
+          </a:xfrm>
+          <a:prstGeom prst="rect">
+            <a:avLst/>
+          </a:prstGeom>
+        </p:spPr>
+      </p:pic>
+      <p:sp>
+        <p:nvSpPr>
+          <p:cNvPr id="7" name="Shape 3"/>
+          <p:cNvSpPr/>
+          <p:nvPr/>
+        </p:nvSpPr>
+        <p:spPr>
+          <a:xfrm>
+            <a:off x="1524000" y="1879600"/>
+            <a:ext cx="9144000" cy="3295650"/>
+          </a:xfrm>
+          <a:prstGeom prst="roundRect">
+            <a:avLst>
+              <a:gd name="adj" fmla="val 3052"/>
+            </a:avLst>
+          </a:prstGeom>
+          <a:ln w="9525">
+            <a:solidFill>
+              <a:srgbClr val="E1E0D9"/>
+            </a:solidFill>
+            <a:prstDash val="solid"/>
+          </a:ln>
+        </p:spPr>
+      </p:sp>
+      <p:sp>
+        <p:nvSpPr>
+          <p:cNvPr id="8" name="Text 4"/>
+          <p:cNvSpPr txBox="1"/>
+          <p:nvPr/>
+        </p:nvSpPr>
+        <p:spPr>
+          <a:xfrm>
+            <a:off x="812800" y="5353050"/>
+            <a:ext cx="3314700" cy="266700"/>
+          </a:xfrm>
+          <a:prstGeom prst="rect">
+            <a:avLst/>
+          </a:prstGeom>
+          <a:noFill/>
+          <a:ln/>
+        </p:spPr>
+        <p:txBody>
+          <a:bodyPr wrap="square" lIns="0" tIns="0" rIns="0" bIns="0" rtlCol="0" anchor="t"/>
+          <a:lstStyle/>
+          <a:p>
+            <a:pPr indent="0" marL="0">
+              <a:lnSpc>
+                <a:spcPct val="115000"/>
+              </a:lnSpc>
+              <a:buNone/>
+            </a:pPr>
+            <a:r>
+              <a:rPr lang="en-US" sz="1500" b="1" dirty="0">
+                <a:solidFill>
+                  <a:srgbClr val="14202E"/>
+                </a:solidFill>
+                <a:latin typeface="Calibri" pitchFamily="34" charset="0"/>
+                <a:ea typeface="Calibri" pitchFamily="34" charset="-122"/>
+                <a:cs typeface="Calibri" pitchFamily="34" charset="-120"/>
+              </a:rPr>
+              <a:t>2 Polpaare</a:t>
+            </a:r>
+            <a:endParaRPr lang="en-US" sz="1500" dirty="0"/>
+          </a:p>
+        </p:txBody>
+      </p:sp>
+      <p:sp>
+        <p:nvSpPr>
+          <p:cNvPr id="9" name="Text 5"/>
+          <p:cNvSpPr txBox="1"/>
+          <p:nvPr/>
+        </p:nvSpPr>
+        <p:spPr>
+          <a:xfrm>
+            <a:off x="812800" y="5645150"/>
+            <a:ext cx="3314700" cy="228600"/>
+          </a:xfrm>
+          <a:prstGeom prst="rect">
+            <a:avLst/>
+          </a:prstGeom>
+          <a:noFill/>
+          <a:ln/>
+        </p:spPr>
+        <p:txBody>
+          <a:bodyPr wrap="square" lIns="0" tIns="0" rIns="0" bIns="0" rtlCol="0" anchor="t"/>
+          <a:lstStyle/>
+          <a:p>
+            <a:pPr indent="0" marL="0">
+              <a:lnSpc>
+                <a:spcPct val="115000"/>
+              </a:lnSpc>
+              <a:buNone/>
+            </a:pPr>
+            <a:r>
+              <a:rPr lang="en-US" sz="1200" dirty="0">
+                <a:solidFill>
+                  <a:srgbClr val="44505E"/>
+                </a:solidFill>
+                <a:latin typeface="Calibri" pitchFamily="34" charset="0"/>
+                <a:ea typeface="Calibri" pitchFamily="34" charset="-122"/>
+                <a:cs typeface="Calibri" pitchFamily="34" charset="-120"/>
+              </a:rPr>
+              <a:t>bei 2,268 Hz und 2,480 Hz abgezogen</a:t>
+            </a:r>
+            <a:endParaRPr lang="en-US" sz="1200" dirty="0"/>
+          </a:p>
+        </p:txBody>
+      </p:sp>
+      <p:sp>
+        <p:nvSpPr>
+          <p:cNvPr id="10" name="Text 6"/>
+          <p:cNvSpPr txBox="1"/>
+          <p:nvPr/>
+        </p:nvSpPr>
+        <p:spPr>
+          <a:xfrm>
+            <a:off x="4436533" y="5353050"/>
+            <a:ext cx="3314700" cy="266700"/>
+          </a:xfrm>
+          <a:prstGeom prst="rect">
+            <a:avLst/>
+          </a:prstGeom>
+          <a:noFill/>
+          <a:ln/>
+        </p:spPr>
+        <p:txBody>
+          <a:bodyPr wrap="square" lIns="0" tIns="0" rIns="0" bIns="0" rtlCol="0" anchor="t"/>
+          <a:lstStyle/>
+          <a:p>
+            <a:pPr indent="0" marL="0">
+              <a:lnSpc>
+                <a:spcPct val="115000"/>
+              </a:lnSpc>
+              <a:buNone/>
+            </a:pPr>
+            <a:r>
+              <a:rPr lang="en-US" sz="1500" b="1" dirty="0">
+                <a:solidFill>
+                  <a:srgbClr val="14202E"/>
+                </a:solidFill>
+                <a:latin typeface="Calibri" pitchFamily="34" charset="0"/>
+                <a:ea typeface="Calibri" pitchFamily="34" charset="-122"/>
+                <a:cs typeface="Calibri" pitchFamily="34" charset="-120"/>
+              </a:rPr>
+              <a:t>Unverändert vor 1 s</a:t>
+            </a:r>
+            <a:endParaRPr lang="en-US" sz="1500" dirty="0"/>
+          </a:p>
+        </p:txBody>
+      </p:sp>
+      <p:sp>
+        <p:nvSpPr>
+          <p:cNvPr id="11" name="Text 7"/>
+          <p:cNvSpPr txBox="1"/>
+          <p:nvPr/>
+        </p:nvSpPr>
+        <p:spPr>
+          <a:xfrm>
+            <a:off x="4436533" y="5645150"/>
+            <a:ext cx="3314700" cy="228600"/>
+          </a:xfrm>
+          <a:prstGeom prst="rect">
+            <a:avLst/>
+          </a:prstGeom>
+          <a:noFill/>
+          <a:ln/>
+        </p:spPr>
+        <p:txBody>
+          <a:bodyPr wrap="square" lIns="0" tIns="0" rIns="0" bIns="0" rtlCol="0" anchor="t"/>
+          <a:lstStyle/>
+          <a:p>
+            <a:pPr indent="0" marL="0">
+              <a:lnSpc>
+                <a:spcPct val="115000"/>
+              </a:lnSpc>
+              <a:buNone/>
+            </a:pPr>
+            <a:r>
+              <a:rPr lang="en-US" sz="1200" dirty="0">
+                <a:solidFill>
+                  <a:srgbClr val="44505E"/>
+                </a:solidFill>
+                <a:latin typeface="Calibri" pitchFamily="34" charset="0"/>
+                <a:ea typeface="Calibri" pitchFamily="34" charset="-122"/>
+                <a:cs typeface="Calibri" pitchFamily="34" charset="-120"/>
+              </a:rPr>
+              <a:t>Abzug erst ab Analysebeginn</a:t>
+            </a:r>
+            <a:endParaRPr lang="en-US" sz="1200" dirty="0"/>
+          </a:p>
+        </p:txBody>
+      </p:sp>
+      <p:sp>
+        <p:nvSpPr>
+          <p:cNvPr id="12" name="Text 8"/>
+          <p:cNvSpPr txBox="1"/>
+          <p:nvPr/>
+        </p:nvSpPr>
+        <p:spPr>
+          <a:xfrm>
+            <a:off x="8060267" y="5353050"/>
+            <a:ext cx="3314700" cy="266700"/>
+          </a:xfrm>
+          <a:prstGeom prst="rect">
+            <a:avLst/>
+          </a:prstGeom>
+          <a:noFill/>
+          <a:ln/>
+        </p:spPr>
+        <p:txBody>
+          <a:bodyPr wrap="square" lIns="0" tIns="0" rIns="0" bIns="0" rtlCol="0" anchor="t"/>
+          <a:lstStyle/>
+          <a:p>
+            <a:pPr indent="0" marL="0">
+              <a:lnSpc>
+                <a:spcPct val="115000"/>
+              </a:lnSpc>
+              <a:buNone/>
+            </a:pPr>
+            <a:r>
+              <a:rPr lang="en-US" sz="1500" b="1" dirty="0">
+                <a:solidFill>
+                  <a:srgbClr val="14202E"/>
+                </a:solidFill>
+                <a:latin typeface="Calibri" pitchFamily="34" charset="0"/>
+                <a:ea typeface="Calibri" pitchFamily="34" charset="-122"/>
+                <a:cs typeface="Calibri" pitchFamily="34" charset="-120"/>
+              </a:rPr>
+              <a:t>−99,87 %</a:t>
+            </a:r>
+            <a:endParaRPr lang="en-US" sz="1500" dirty="0"/>
+          </a:p>
+        </p:txBody>
+      </p:sp>
+      <p:sp>
+        <p:nvSpPr>
+          <p:cNvPr id="13" name="Text 9"/>
+          <p:cNvSpPr txBox="1"/>
+          <p:nvPr/>
+        </p:nvSpPr>
+        <p:spPr>
+          <a:xfrm>
+            <a:off x="8060267" y="5645150"/>
+            <a:ext cx="3314700" cy="228600"/>
+          </a:xfrm>
+          <a:prstGeom prst="rect">
+            <a:avLst/>
+          </a:prstGeom>
+          <a:noFill/>
+          <a:ln/>
+        </p:spPr>
+        <p:txBody>
+          <a:bodyPr wrap="square" lIns="0" tIns="0" rIns="0" bIns="0" rtlCol="0" anchor="t"/>
+          <a:lstStyle/>
+          <a:p>
+            <a:pPr indent="0" marL="0">
+              <a:lnSpc>
+                <a:spcPct val="115000"/>
+              </a:lnSpc>
+              <a:buNone/>
+            </a:pPr>
+            <a:r>
+              <a:rPr lang="en-US" sz="1200" dirty="0">
+                <a:solidFill>
+                  <a:srgbClr val="44505E"/>
+                </a:solidFill>
+                <a:latin typeface="Calibri" pitchFamily="34" charset="0"/>
+                <a:ea typeface="Calibri" pitchFamily="34" charset="-122"/>
+                <a:cs typeface="Calibri" pitchFamily="34" charset="-120"/>
+              </a:rPr>
+              <a:t>Bandenergie 1,76–2,64 Hz, 4 bis 7 s</a:t>
+            </a:r>
+            <a:endParaRPr lang="en-US" sz="1200" dirty="0"/>
+          </a:p>
+        </p:txBody>
+      </p:sp>
+      <p:sp>
+        <p:nvSpPr>
+          <p:cNvPr id="25" name="Slide Number Placeholder 0"/>
+          <p:cNvSpPr>
+            <a:spLocks noGrp="1"/>
+          </p:cNvSpPr>
+          <p:nvPr>
+            <p:ph type="sldNum" sz="quarter" idx="4294967295"/>
+          </p:nvPr>
+        </p:nvSpPr>
+        <p:spPr>
+          <a:xfrm>
+            <a:off x="10795000" y="6426200"/>
+            <a:ext cx="584200" cy="228600"/>
+          </a:xfrm>
+          <a:prstGeom prst="rect">
+            <a:avLst/>
+          </a:prstGeom>
+          <a:extLst>
+            <a:ext uri="{C572A759-6A51-4108-AA02-DFA0A04FC94B}">
+              <ma14:wrappingTextBoxFlag xmlns:ma14="http://schemas.microsoft.com/office/mac/drawingml/2011/main" val="0"/>
+            </a:ext>
+          </a:extLst>
+        </p:spPr>
+        <p:txBody>
+          <a:bodyPr/>
+          <a:lstStyle>
+            <a:lvl1pPr>
+              <a:defRPr sz="1200">
+                <a:solidFill>
+                  <a:srgbClr val="5F6873"/>
+                </a:solidFill>
+                <a:latin typeface="Consolas"/>
+                <a:ea typeface="Consolas"/>
+                <a:cs typeface="Consolas"/>
+              </a:defRPr>
+            </a:lvl1pPr>
+          </a:lstStyle>
+          <a:p>
+            <a:pPr algn="r"/>
+            <a:fld id="{F7021451-1387-4CA6-816F-3879F97B5CBC}" type="slidenum">
+              <a:rPr b="0" lang="en-US"/>
+              <a:t>16</a:t>
+            </a:fld>
+            <a:endParaRPr lang="en-US"/>
+          </a:p>
+        </p:txBody>
+      </p:sp>
+    </p:spTree>
+  </p:cSld>
+  <p:clrMapOvr>
+    <a:masterClrMapping/>
+  </p:clrMapOvr>
+</p:sld>
+</file>
+
+<file path=ppt/slides/slide17.xml><?xml version="1.0" encoding="utf-8"?>
+<p:sld xmlns:a="http://schemas.openxmlformats.org/drawingml/2006/main" xmlns:r="http://schemas.openxmlformats.org/officeDocument/2006/relationships" xmlns:p="http://schemas.openxmlformats.org/presentationml/2006/main">
+  <p:cSld name="Slide 17">
+    <p:spTree>
+      <p:nvGrpSpPr>
+        <p:cNvPr id="1" name=""/>
+        <p:cNvGrpSpPr/>
+        <p:nvPr/>
+      </p:nvGrpSpPr>
+      <p:grpSpPr>
+        <a:xfrm>
+          <a:off x="0" y="0"/>
+          <a:ext cx="0" cy="0"/>
+          <a:chOff x="0" y="0"/>
+          <a:chExt cx="0" cy="0"/>
+        </a:xfrm>
+      </p:grpSpPr>
+      <p:sp>
+        <p:nvSpPr>
+          <p:cNvPr id="2" name="Text 0"/>
+          <p:cNvSpPr txBox="1"/>
+          <p:nvPr/>
+        </p:nvSpPr>
+        <p:spPr>
+          <a:xfrm>
+            <a:off x="812800" y="812800"/>
+            <a:ext cx="10566400" cy="215900"/>
+          </a:xfrm>
+          <a:prstGeom prst="rect">
+            <a:avLst/>
+          </a:prstGeom>
+          <a:noFill/>
+          <a:ln/>
+        </p:spPr>
+        <p:txBody>
+          <a:bodyPr wrap="square" lIns="0" tIns="0" rIns="0" bIns="0" rtlCol="0" anchor="t"/>
+          <a:lstStyle/>
+          <a:p>
+            <a:pPr indent="0" marL="0">
+              <a:lnSpc>
+                <a:spcPct val="115000"/>
+              </a:lnSpc>
+              <a:buNone/>
+            </a:pPr>
+            <a:r>
+              <a:rPr lang="en-US" sz="1200" spc="100" kern="0" dirty="0">
+                <a:solidFill>
                   <a:srgbClr val="B5491B"/>
                 </a:solidFill>
                 <a:latin typeface="Consolas" pitchFamily="34" charset="0"/>
@@ -9243,7 +9991,7 @@
       </p:sp>
       <p:graphicFrame>
         <p:nvGraphicFramePr>
-          <p:cNvPr id="17" name="Table 0"/>
+          <p:cNvPr id="18" name="Table 0"/>
           <p:cNvGraphicFramePr>
             <a:graphicFrameLocks noGrp="1"/>
           </p:cNvGraphicFramePr>
@@ -10726,7 +11474,7 @@
             <a:pPr algn="r"/>
             <a:fld id="{F7021451-1387-4CA6-816F-3879F97B5CBC}" type="slidenum">
               <a:rPr b="0" lang="en-US"/>
-              <a:t>16</a:t>
+              <a:t>17</a:t>
             </a:fld>
             <a:endParaRPr lang="en-US"/>
           </a:p>
@@ -10740,9 +11488,9 @@
 </p:sld>
 </file>
 
-<file path=ppt/slides/slide17.xml><?xml version="1.0" encoding="utf-8"?>
+<file path=ppt/slides/slide18.xml><?xml version="1.0" encoding="utf-8"?>
 <p:sld xmlns:a="http://schemas.openxmlformats.org/drawingml/2006/main" xmlns:r="http://schemas.openxmlformats.org/officeDocument/2006/relationships" xmlns:p="http://schemas.openxmlformats.org/presentationml/2006/main">
-  <p:cSld name="Slide 17">
+  <p:cSld name="Slide 18">
     <p:spTree>
       <p:nvGrpSpPr>
         <p:cNvPr id="1" name=""/>
@@ -10972,58 +11720,40 @@
           </a:p>
         </p:txBody>
       </p:sp>
-      <p:sp>
-        <p:nvSpPr>
-          <p:cNvPr id="9" name="Text 5"/>
+      <p:pic>
+        <p:nvPicPr>
+          <p:cNvPr id="9" name="Image 1" descr="mx">    </p:cNvPr>
+          <p:cNvPicPr>
+            <a:picLocks noChangeAspect="1"/>
+          </p:cNvPicPr>
+          <p:nvPr/>
+        </p:nvPicPr>
+        <p:blipFill>
+          <a:blip r:embed="rId2"/>
+          <a:stretch>
+            <a:fillRect/>
+          </a:stretch>
+        </p:blipFill>
+        <p:spPr>
+          <a:xfrm>
+            <a:off x="7188200" y="2616200"/>
+            <a:ext cx="2476500" cy="539750"/>
+          </a:xfrm>
+          <a:prstGeom prst="rect">
+            <a:avLst/>
+          </a:prstGeom>
+        </p:spPr>
+      </p:pic>
+      <p:sp>
+        <p:nvSpPr>
+          <p:cNvPr id="10" name="Text 5"/>
           <p:cNvSpPr txBox="1"/>
           <p:nvPr/>
         </p:nvSpPr>
         <p:spPr>
           <a:xfrm>
-            <a:off x="7188200" y="2628900"/>
-            <a:ext cx="4191000" cy="266700"/>
-          </a:xfrm>
-          <a:prstGeom prst="rect">
-            <a:avLst/>
-          </a:prstGeom>
-          <a:noFill/>
-          <a:ln/>
-        </p:spPr>
-        <p:txBody>
-          <a:bodyPr wrap="square" lIns="0" tIns="0" rIns="0" bIns="0" rtlCol="0" anchor="t"/>
-          <a:lstStyle/>
-          <a:p>
-            <a:pPr indent="0" marL="0">
-              <a:lnSpc>
-                <a:spcPct val="115000"/>
-              </a:lnSpc>
-              <a:buNone/>
-            </a:pPr>
-            <a:r>
-              <a:rPr lang="en-US" sz="1500" dirty="0">
-                <a:solidFill>
-                  <a:srgbClr val="14202E"/>
-                </a:solidFill>
-                <a:latin typeface="Consolas" pitchFamily="34" charset="0"/>
-                <a:ea typeface="Consolas" pitchFamily="34" charset="-122"/>
-                <a:cs typeface="Consolas" pitchFamily="34" charset="-120"/>
-              </a:rPr>
-              <a:t>5,565 mHz / 32,646 mHz</a:t>
-            </a:r>
-            <a:endParaRPr lang="en-US" sz="1500" dirty="0"/>
-          </a:p>
-        </p:txBody>
-      </p:sp>
-      <p:sp>
-        <p:nvSpPr>
-          <p:cNvPr id="10" name="Text 6"/>
-          <p:cNvSpPr txBox="1"/>
-          <p:nvPr/>
-        </p:nvSpPr>
-        <p:spPr>
-          <a:xfrm>
-            <a:off x="7188200" y="2933700"/>
-            <a:ext cx="4191000" cy="444500"/>
+            <a:off x="7188200" y="3187700"/>
+            <a:ext cx="4191000" cy="228600"/>
           </a:xfrm>
           <a:prstGeom prst="rect">
             <a:avLst/>
@@ -11050,7 +11780,7 @@
                 <a:ea typeface="Calibri" pitchFamily="34" charset="-122"/>
                 <a:cs typeface="Calibri" pitchFamily="34" charset="-120"/>
               </a:rPr>
-              <a:t>RMSE der Abweichung durch RMS der Messung, an denselben 301 Zeitpunkten</a:t>
+              <a:t>über dieselben 301 Zeitpunkte</a:t>
             </a:r>
             <a:endParaRPr lang="en-US" sz="1200" dirty="0"/>
           </a:p>
@@ -11058,13 +11788,13 @@
       </p:sp>
       <p:sp>
         <p:nvSpPr>
-          <p:cNvPr id="11" name="Text 7"/>
+          <p:cNvPr id="11" name="Text 6"/>
           <p:cNvSpPr txBox="1"/>
           <p:nvPr/>
         </p:nvSpPr>
         <p:spPr>
           <a:xfrm>
-            <a:off x="7188200" y="3530600"/>
+            <a:off x="7188200" y="3568700"/>
             <a:ext cx="4191000" cy="266700"/>
           </a:xfrm>
           <a:prstGeom prst="rect">
@@ -11100,13 +11830,13 @@
       </p:sp>
       <p:sp>
         <p:nvSpPr>
-          <p:cNvPr id="12" name="Text 8"/>
+          <p:cNvPr id="12" name="Text 7"/>
           <p:cNvSpPr txBox="1"/>
           <p:nvPr/>
         </p:nvSpPr>
         <p:spPr>
           <a:xfrm>
-            <a:off x="7188200" y="3848100"/>
+            <a:off x="7188200" y="3886200"/>
             <a:ext cx="4191000" cy="571500"/>
           </a:xfrm>
           <a:prstGeom prst="rect">
@@ -11142,13 +11872,13 @@
       </p:sp>
       <p:sp>
         <p:nvSpPr>
-          <p:cNvPr id="13" name="Text 9"/>
+          <p:cNvPr id="13" name="Text 8"/>
           <p:cNvSpPr txBox="1"/>
           <p:nvPr/>
         </p:nvSpPr>
         <p:spPr>
           <a:xfrm>
-            <a:off x="7188200" y="4533900"/>
+            <a:off x="7188200" y="4572000"/>
             <a:ext cx="4191000" cy="266700"/>
           </a:xfrm>
           <a:prstGeom prst="rect">
@@ -11184,13 +11914,13 @@
       </p:sp>
       <p:sp>
         <p:nvSpPr>
-          <p:cNvPr id="14" name="Text 10"/>
+          <p:cNvPr id="14" name="Text 9"/>
           <p:cNvSpPr txBox="1"/>
           <p:nvPr/>
         </p:nvSpPr>
         <p:spPr>
           <a:xfrm>
-            <a:off x="7188200" y="4851400"/>
+            <a:off x="7188200" y="4889500"/>
             <a:ext cx="4191000" cy="838200"/>
           </a:xfrm>
           <a:prstGeom prst="rect">
@@ -11266,7 +11996,7 @@
             <a:pPr algn="r"/>
             <a:fld id="{F7021451-1387-4CA6-816F-3879F97B5CBC}" type="slidenum">
               <a:rPr b="0" lang="en-US"/>
-              <a:t>17</a:t>
+              <a:t>18</a:t>
             </a:fld>
             <a:endParaRPr lang="en-US"/>
           </a:p>
@@ -11280,9 +12010,9 @@
 </p:sld>
 </file>
 
-<file path=ppt/slides/slide18.xml><?xml version="1.0" encoding="utf-8"?>
+<file path=ppt/slides/slide19.xml><?xml version="1.0" encoding="utf-8"?>
 <p:sld xmlns:a="http://schemas.openxmlformats.org/drawingml/2006/main" xmlns:r="http://schemas.openxmlformats.org/officeDocument/2006/relationships" xmlns:p="http://schemas.openxmlformats.org/presentationml/2006/main">
-  <p:cSld name="Slide 18">
+  <p:cSld name="Slide 19">
     <p:spTree>
       <p:nvGrpSpPr>
         <p:cNvPr id="1" name=""/>
@@ -11571,554 +12301,6 @@
             <a:pPr algn="r"/>
             <a:fld id="{F7021451-1387-4CA6-816F-3879F97B5CBC}" type="slidenum">
               <a:rPr b="0" lang="en-US"/>
-              <a:t>18</a:t>
-            </a:fld>
-            <a:endParaRPr lang="en-US"/>
-          </a:p>
-        </p:txBody>
-      </p:sp>
-    </p:spTree>
-  </p:cSld>
-  <p:clrMapOvr>
-    <a:masterClrMapping/>
-  </p:clrMapOvr>
-</p:sld>
-</file>
-
-<file path=ppt/slides/slide19.xml><?xml version="1.0" encoding="utf-8"?>
-<p:sld xmlns:a="http://schemas.openxmlformats.org/drawingml/2006/main" xmlns:r="http://schemas.openxmlformats.org/officeDocument/2006/relationships" xmlns:p="http://schemas.openxmlformats.org/presentationml/2006/main">
-  <p:cSld name="Slide 19">
-    <p:spTree>
-      <p:nvGrpSpPr>
-        <p:cNvPr id="1" name=""/>
-        <p:cNvGrpSpPr/>
-        <p:nvPr/>
-      </p:nvGrpSpPr>
-      <p:grpSpPr>
-        <a:xfrm>
-          <a:off x="0" y="0"/>
-          <a:ext cx="0" cy="0"/>
-          <a:chOff x="0" y="0"/>
-          <a:chExt cx="0" cy="0"/>
-        </a:xfrm>
-      </p:grpSpPr>
-      <p:sp>
-        <p:nvSpPr>
-          <p:cNvPr id="2" name="Text 0"/>
-          <p:cNvSpPr txBox="1"/>
-          <p:nvPr/>
-        </p:nvSpPr>
-        <p:spPr>
-          <a:xfrm>
-            <a:off x="812800" y="812800"/>
-            <a:ext cx="10566400" cy="215900"/>
-          </a:xfrm>
-          <a:prstGeom prst="rect">
-            <a:avLst/>
-          </a:prstGeom>
-          <a:noFill/>
-          <a:ln/>
-        </p:spPr>
-        <p:txBody>
-          <a:bodyPr wrap="square" lIns="0" tIns="0" rIns="0" bIns="0" rtlCol="0" anchor="t"/>
-          <a:lstStyle/>
-          <a:p>
-            <a:pPr indent="0" marL="0">
-              <a:lnSpc>
-                <a:spcPct val="115000"/>
-              </a:lnSpc>
-              <a:buNone/>
-            </a:pPr>
-            <a:r>
-              <a:rPr lang="en-US" sz="1200" spc="100" kern="0" dirty="0">
-                <a:solidFill>
-                  <a:srgbClr val="7FB2EE"/>
-                </a:solidFill>
-                <a:latin typeface="Consolas" pitchFamily="34" charset="0"/>
-                <a:ea typeface="Consolas" pitchFamily="34" charset="-122"/>
-                <a:cs typeface="Consolas" pitchFamily="34" charset="-120"/>
-              </a:rPr>
-              <a:t>SCHLUSSFOLGERUNGEN</a:t>
-            </a:r>
-            <a:endParaRPr lang="en-US" sz="1200" dirty="0"/>
-          </a:p>
-        </p:txBody>
-      </p:sp>
-      <p:sp>
-        <p:nvSpPr>
-          <p:cNvPr id="3" name="Text 0"/>
-          <p:cNvSpPr/>
-          <p:nvPr>
-            <p:ph idx="100" type="title" hasCustomPrompt="1"/>
-          </p:nvPr>
-        </p:nvSpPr>
-        <p:spPr>
-          <a:xfrm>
-            <a:off x="812800" y="1104900"/>
-            <a:ext cx="10566400" cy="508000"/>
-          </a:xfrm>
-          <a:prstGeom prst="rect">
-            <a:avLst/>
-          </a:prstGeom>
-          <a:noFill/>
-          <a:ln/>
-        </p:spPr>
-        <p:txBody>
-          <a:bodyPr wrap="square" lIns="0" tIns="0" rIns="0" bIns="0" rtlCol="0" anchor="t"/>
-          <a:lstStyle/>
-          <a:p>
-            <a:pPr algn="l" indent="0" marL="0">
-              <a:buNone/>
-            </a:pPr>
-            <a:r>
-              <a:rPr lang="en-US" sz="3200" b="1" dirty="0">
-                <a:solidFill>
-                  <a:srgbClr val="F4F3EF"/>
-                </a:solidFill>
-                <a:latin typeface="Calibri" pitchFamily="34" charset="0"/>
-                <a:ea typeface="Calibri" pitchFamily="34" charset="-122"/>
-                <a:cs typeface="Calibri" pitchFamily="34" charset="-120"/>
-              </a:rPr>
-              <a:t>Was die Ergebnisse zeigen</a:t>
-            </a:r>
-            <a:endParaRPr lang="en-US" sz="3200" dirty="0"/>
-          </a:p>
-        </p:txBody>
-      </p:sp>
-      <p:sp>
-        <p:nvSpPr>
-          <p:cNvPr id="4" name="Text 2"/>
-          <p:cNvSpPr txBox="1"/>
-          <p:nvPr/>
-        </p:nvSpPr>
-        <p:spPr>
-          <a:xfrm>
-            <a:off x="812800" y="6426200"/>
-            <a:ext cx="9779000" cy="228600"/>
-          </a:xfrm>
-          <a:prstGeom prst="rect">
-            <a:avLst/>
-          </a:prstGeom>
-          <a:noFill/>
-          <a:ln/>
-        </p:spPr>
-        <p:txBody>
-          <a:bodyPr wrap="square" lIns="0" tIns="0" rIns="0" bIns="0" rtlCol="0" anchor="t"/>
-          <a:lstStyle/>
-          <a:p>
-            <a:pPr indent="0" marL="0">
-              <a:lnSpc>
-                <a:spcPct val="115000"/>
-              </a:lnSpc>
-              <a:buNone/>
-            </a:pPr>
-            <a:r>
-              <a:rPr lang="en-US" sz="1200" dirty="0">
-                <a:solidFill>
-                  <a:srgbClr val="B8C3CF"/>
-                </a:solidFill>
-                <a:latin typeface="Calibri" pitchFamily="34" charset="0"/>
-                <a:ea typeface="Calibri" pitchFamily="34" charset="-122"/>
-                <a:cs typeface="Calibri" pitchFamily="34" charset="-120"/>
-              </a:rPr>
-              <a:t>Projektarbeit Schwingungsanalyse mit Matrix Pencil · Arbeitsfassung 16.10.2026</a:t>
-            </a:r>
-            <a:endParaRPr lang="en-US" sz="1200" dirty="0"/>
-          </a:p>
-        </p:txBody>
-      </p:sp>
-      <p:sp>
-        <p:nvSpPr>
-          <p:cNvPr id="6" name="Shape 3"/>
-          <p:cNvSpPr/>
-          <p:nvPr/>
-        </p:nvSpPr>
-        <p:spPr>
-          <a:xfrm>
-            <a:off x="812800" y="1879600"/>
-            <a:ext cx="5181600" cy="2286000"/>
-          </a:xfrm>
-          <a:prstGeom prst="roundRect">
-            <a:avLst>
-              <a:gd name="adj" fmla="val 4400"/>
-            </a:avLst>
-          </a:prstGeom>
-          <a:solidFill>
-            <a:srgbClr val="1E2D3F"/>
-          </a:solidFill>
-          <a:ln w="9525">
-            <a:solidFill>
-              <a:srgbClr val="33465C"/>
-            </a:solidFill>
-            <a:prstDash val="solid"/>
-          </a:ln>
-        </p:spPr>
-      </p:sp>
-      <p:sp>
-        <p:nvSpPr>
-          <p:cNvPr id="7" name="Text 4"/>
-          <p:cNvSpPr txBox="1"/>
-          <p:nvPr/>
-        </p:nvSpPr>
-        <p:spPr>
-          <a:xfrm>
-            <a:off x="1066800" y="2133600"/>
-            <a:ext cx="4673600" cy="317500"/>
-          </a:xfrm>
-          <a:prstGeom prst="rect">
-            <a:avLst/>
-          </a:prstGeom>
-          <a:noFill/>
-          <a:ln/>
-        </p:spPr>
-        <p:txBody>
-          <a:bodyPr wrap="square" lIns="0" tIns="0" rIns="0" bIns="0" rtlCol="0" anchor="t"/>
-          <a:lstStyle/>
-          <a:p>
-            <a:pPr indent="0" marL="0">
-              <a:lnSpc>
-                <a:spcPct val="115000"/>
-              </a:lnSpc>
-              <a:buNone/>
-            </a:pPr>
-            <a:r>
-              <a:rPr lang="en-US" sz="2000" b="1" dirty="0">
-                <a:solidFill>
-                  <a:srgbClr val="7FB2EE"/>
-                </a:solidFill>
-                <a:latin typeface="Calibri" pitchFamily="34" charset="0"/>
-                <a:ea typeface="Calibri" pitchFamily="34" charset="-122"/>
-                <a:cs typeface="Calibri" pitchFamily="34" charset="-120"/>
-              </a:rPr>
-              <a:t>Leistung P_pos (Projekt)</a:t>
-            </a:r>
-            <a:endParaRPr lang="en-US" sz="2000" dirty="0"/>
-          </a:p>
-        </p:txBody>
-      </p:sp>
-      <p:sp>
-        <p:nvSpPr>
-          <p:cNvPr id="8" name="Text 5"/>
-          <p:cNvSpPr txBox="1"/>
-          <p:nvPr/>
-        </p:nvSpPr>
-        <p:spPr>
-          <a:xfrm>
-            <a:off x="1066800" y="2565400"/>
-            <a:ext cx="4673600" cy="1460500"/>
-          </a:xfrm>
-          <a:prstGeom prst="rect">
-            <a:avLst/>
-          </a:prstGeom>
-          <a:noFill/>
-          <a:ln/>
-        </p:spPr>
-        <p:txBody>
-          <a:bodyPr wrap="square" lIns="0" tIns="0" rIns="0" bIns="0" rtlCol="0" anchor="t"/>
-          <a:lstStyle/>
-          <a:p>
-            <a:pPr marL="342900" indent="-342900">
-              <a:spcAft>
-                <a:spcPts val="600"/>
-              </a:spcAft>
-              <a:buSzPct val="100000"/>
-              <a:buChar char="•"/>
-            </a:pPr>
-            <a:r>
-              <a:rPr lang="en-US" sz="1500" dirty="0">
-                <a:solidFill>
-                  <a:srgbClr val="D5DDE6"/>
-                </a:solidFill>
-                <a:latin typeface="Calibri" pitchFamily="34" charset="0"/>
-                <a:ea typeface="Calibri" pitchFamily="34" charset="-122"/>
-                <a:cs typeface="Calibri" pitchFamily="34" charset="-120"/>
-              </a:rPr>
-              <a:t>Pendelung bei 2,268 Hz in beiden Sprungantworten</a:t>
-            </a:r>
-            <a:endParaRPr lang="en-US" sz="1500" dirty="0"/>
-          </a:p>
-          <a:p>
-            <a:pPr marL="342900" indent="-342900">
-              <a:spcAft>
-                <a:spcPts val="600"/>
-              </a:spcAft>
-              <a:buSzPct val="100000"/>
-              <a:buChar char="•"/>
-            </a:pPr>
-            <a:r>
-              <a:rPr lang="en-US" sz="1500" dirty="0">
-                <a:solidFill>
-                  <a:srgbClr val="D5DDE6"/>
-                </a:solidFill>
-                <a:latin typeface="Calibri" pitchFamily="34" charset="0"/>
-                <a:ea typeface="Calibri" pitchFamily="34" charset="-122"/>
-                <a:cs typeface="Calibri" pitchFamily="34" charset="-120"/>
-              </a:rPr>
-              <a:t>Modellfehler 0,763 % und 0,594 %</a:t>
-            </a:r>
-            <a:endParaRPr lang="en-US" sz="1500" dirty="0"/>
-          </a:p>
-          <a:p>
-            <a:pPr marL="342900" indent="-342900">
-              <a:spcAft>
-                <a:spcPts val="600"/>
-              </a:spcAft>
-              <a:buSzPct val="100000"/>
-              <a:buChar char="•"/>
-            </a:pPr>
-            <a:r>
-              <a:rPr lang="en-US" sz="1500" dirty="0">
-                <a:solidFill>
-                  <a:srgbClr val="D5DDE6"/>
-                </a:solidFill>
-                <a:latin typeface="Calibri" pitchFamily="34" charset="0"/>
-                <a:ea typeface="Calibri" pitchFamily="34" charset="-122"/>
-                <a:cs typeface="Calibri" pitchFamily="34" charset="-120"/>
-              </a:rPr>
-              <a:t>Beide Abzüge freigegeben, positiv mit zwei Anteilen</a:t>
-            </a:r>
-            <a:endParaRPr lang="en-US" sz="1500" dirty="0"/>
-          </a:p>
-        </p:txBody>
-      </p:sp>
-      <p:sp>
-        <p:nvSpPr>
-          <p:cNvPr id="9" name="Shape 6"/>
-          <p:cNvSpPr/>
-          <p:nvPr/>
-        </p:nvSpPr>
-        <p:spPr>
-          <a:xfrm>
-            <a:off x="6197600" y="1879600"/>
-            <a:ext cx="5181600" cy="2286000"/>
-          </a:xfrm>
-          <a:prstGeom prst="roundRect">
-            <a:avLst>
-              <a:gd name="adj" fmla="val 4400"/>
-            </a:avLst>
-          </a:prstGeom>
-          <a:solidFill>
-            <a:srgbClr val="1E2D3F"/>
-          </a:solidFill>
-          <a:ln w="9525">
-            <a:solidFill>
-              <a:srgbClr val="33465C"/>
-            </a:solidFill>
-            <a:prstDash val="solid"/>
-          </a:ln>
-        </p:spPr>
-      </p:sp>
-      <p:sp>
-        <p:nvSpPr>
-          <p:cNvPr id="10" name="Text 7"/>
-          <p:cNvSpPr txBox="1"/>
-          <p:nvPr/>
-        </p:nvSpPr>
-        <p:spPr>
-          <a:xfrm>
-            <a:off x="6451600" y="2133600"/>
-            <a:ext cx="4673600" cy="317500"/>
-          </a:xfrm>
-          <a:prstGeom prst="rect">
-            <a:avLst/>
-          </a:prstGeom>
-          <a:noFill/>
-          <a:ln/>
-        </p:spPr>
-        <p:txBody>
-          <a:bodyPr wrap="square" lIns="0" tIns="0" rIns="0" bIns="0" rtlCol="0" anchor="t"/>
-          <a:lstStyle/>
-          <a:p>
-            <a:pPr indent="0" marL="0">
-              <a:lnSpc>
-                <a:spcPct val="115000"/>
-              </a:lnSpc>
-              <a:buNone/>
-            </a:pPr>
-            <a:r>
-              <a:rPr lang="en-US" sz="2000" b="1" dirty="0">
-                <a:solidFill>
-                  <a:srgbClr val="F2A07B"/>
-                </a:solidFill>
-                <a:latin typeface="Calibri" pitchFamily="34" charset="0"/>
-                <a:ea typeface="Calibri" pitchFamily="34" charset="-122"/>
-                <a:cs typeface="Calibri" pitchFamily="34" charset="-120"/>
-              </a:rPr>
-              <a:t>Netzfrequenz Mexiko (extern)</a:t>
-            </a:r>
-            <a:endParaRPr lang="en-US" sz="2000" dirty="0"/>
-          </a:p>
-        </p:txBody>
-      </p:sp>
-      <p:sp>
-        <p:nvSpPr>
-          <p:cNvPr id="11" name="Text 8"/>
-          <p:cNvSpPr txBox="1"/>
-          <p:nvPr/>
-        </p:nvSpPr>
-        <p:spPr>
-          <a:xfrm>
-            <a:off x="6451600" y="2565400"/>
-            <a:ext cx="4673600" cy="1460500"/>
-          </a:xfrm>
-          <a:prstGeom prst="rect">
-            <a:avLst/>
-          </a:prstGeom>
-          <a:noFill/>
-          <a:ln/>
-        </p:spPr>
-        <p:txBody>
-          <a:bodyPr wrap="square" lIns="0" tIns="0" rIns="0" bIns="0" rtlCol="0" anchor="t"/>
-          <a:lstStyle/>
-          <a:p>
-            <a:pPr marL="342900" indent="-342900">
-              <a:spcAft>
-                <a:spcPts val="600"/>
-              </a:spcAft>
-              <a:buSzPct val="100000"/>
-              <a:buChar char="•"/>
-            </a:pPr>
-            <a:r>
-              <a:rPr lang="en-US" sz="1500" dirty="0">
-                <a:solidFill>
-                  <a:srgbClr val="D5DDE6"/>
-                </a:solidFill>
-                <a:latin typeface="Calibri" pitchFamily="34" charset="0"/>
-                <a:ea typeface="Calibri" pitchFamily="34" charset="-122"/>
-                <a:cs typeface="Calibri" pitchFamily="34" charset="-120"/>
-              </a:rPr>
-              <a:t>Drei Frequenzen auf unter 0,06 % wie veröffentlicht</a:t>
-            </a:r>
-            <a:endParaRPr lang="en-US" sz="1500" dirty="0"/>
-          </a:p>
-          <a:p>
-            <a:pPr marL="342900" indent="-342900">
-              <a:spcAft>
-                <a:spcPts val="600"/>
-              </a:spcAft>
-              <a:buSzPct val="100000"/>
-              <a:buChar char="•"/>
-            </a:pPr>
-            <a:r>
-              <a:rPr lang="en-US" sz="1500" dirty="0">
-                <a:solidFill>
-                  <a:srgbClr val="D5DDE6"/>
-                </a:solidFill>
-                <a:latin typeface="Calibri" pitchFamily="34" charset="0"/>
-                <a:ea typeface="Calibri" pitchFamily="34" charset="-122"/>
-                <a:cs typeface="Calibri" pitchFamily="34" charset="-120"/>
-              </a:rPr>
-              <a:t>Modellfehler 17,05 %: Abzug blockiert</a:t>
-            </a:r>
-            <a:endParaRPr lang="en-US" sz="1500" dirty="0"/>
-          </a:p>
-          <a:p>
-            <a:pPr marL="342900" indent="-342900">
-              <a:spcAft>
-                <a:spcPts val="600"/>
-              </a:spcAft>
-              <a:buSzPct val="100000"/>
-              <a:buChar char="•"/>
-            </a:pPr>
-            <a:r>
-              <a:rPr lang="en-US" sz="1500" dirty="0">
-                <a:solidFill>
-                  <a:srgbClr val="D5DDE6"/>
-                </a:solidFill>
-                <a:latin typeface="Calibri" pitchFamily="34" charset="0"/>
-                <a:ea typeface="Calibri" pitchFamily="34" charset="-122"/>
-                <a:cs typeface="Calibri" pitchFamily="34" charset="-120"/>
-              </a:rPr>
-              <a:t>Höhere Ordnung passt besser, zerlegt aber anders</a:t>
-            </a:r>
-            <a:endParaRPr lang="en-US" sz="1500" dirty="0"/>
-          </a:p>
-        </p:txBody>
-      </p:sp>
-      <p:sp>
-        <p:nvSpPr>
-          <p:cNvPr id="12" name="Text 9"/>
-          <p:cNvSpPr txBox="1"/>
-          <p:nvPr/>
-        </p:nvSpPr>
-        <p:spPr>
-          <a:xfrm>
-            <a:off x="812800" y="4508500"/>
-            <a:ext cx="10566400" cy="762000"/>
-          </a:xfrm>
-          <a:prstGeom prst="rect">
-            <a:avLst/>
-          </a:prstGeom>
-          <a:noFill/>
-          <a:ln/>
-        </p:spPr>
-        <p:txBody>
-          <a:bodyPr wrap="square" lIns="0" tIns="0" rIns="0" bIns="0" rtlCol="0" anchor="t"/>
-          <a:lstStyle/>
-          <a:p>
-            <a:pPr indent="0" marL="0">
-              <a:lnSpc>
-                <a:spcPct val="115000"/>
-              </a:lnSpc>
-              <a:buNone/>
-            </a:pPr>
-            <a:r>
-              <a:rPr lang="en-US" sz="2000" b="1" dirty="0">
-                <a:solidFill>
-                  <a:srgbClr val="F4F3EF"/>
-                </a:solidFill>
-                <a:latin typeface="Calibri" pitchFamily="34" charset="0"/>
-                <a:ea typeface="Calibri" pitchFamily="34" charset="-122"/>
-                <a:cs typeface="Calibri" pitchFamily="34" charset="-120"/>
-              </a:rPr>
-              <a:t>Frequenzübereinstimmung und Filterfreigabe sind getrennt zu bewerten. Für die Messdaten fehlt eine unabhängig bekannte Sollkurve.</a:t>
-            </a:r>
-            <a:endParaRPr lang="en-US" sz="2000" dirty="0"/>
-          </a:p>
-        </p:txBody>
-      </p:sp>
-      <p:sp>
-        <p:nvSpPr>
-          <p:cNvPr id="25" name="Slide Number Placeholder 0"/>
-          <p:cNvSpPr>
-            <a:spLocks noGrp="1"/>
-          </p:cNvSpPr>
-          <p:nvPr>
-            <p:ph type="sldNum" sz="quarter" idx="4294967295"/>
-          </p:nvPr>
-        </p:nvSpPr>
-        <p:spPr>
-          <a:xfrm>
-            <a:off x="10795000" y="6426200"/>
-            <a:ext cx="584200" cy="228600"/>
-          </a:xfrm>
-          <a:prstGeom prst="rect">
-            <a:avLst/>
-          </a:prstGeom>
-          <a:extLst>
-            <a:ext uri="{C572A759-6A51-4108-AA02-DFA0A04FC94B}">
-              <ma14:wrappingTextBoxFlag xmlns:ma14="http://schemas.microsoft.com/office/mac/drawingml/2011/main" val="0"/>
-            </a:ext>
-          </a:extLst>
-        </p:spPr>
-        <p:txBody>
-          <a:bodyPr/>
-          <a:lstStyle>
-            <a:lvl1pPr>
-              <a:defRPr sz="1200">
-                <a:solidFill>
-                  <a:srgbClr val="B8C3CF"/>
-                </a:solidFill>
-                <a:latin typeface="Consolas"/>
-                <a:ea typeface="Consolas"/>
-                <a:cs typeface="Consolas"/>
-              </a:defRPr>
-            </a:lvl1pPr>
-          </a:lstStyle>
-          <a:p>
-            <a:pPr algn="r"/>
-            <a:fld id="{F7021451-1387-4CA6-816F-3879F97B5CBC}" type="slidenum">
-              <a:rPr b="0" lang="en-US"/>
               <a:t>19</a:t>
             </a:fld>
             <a:endParaRPr lang="en-US"/>
@@ -12832,6 +13014,3079 @@
 </p:sld>
 </file>
 
+<file path=ppt/slides/slide20.xml><?xml version="1.0" encoding="utf-8"?>
+<p:sld xmlns:a="http://schemas.openxmlformats.org/drawingml/2006/main" xmlns:r="http://schemas.openxmlformats.org/officeDocument/2006/relationships" xmlns:p="http://schemas.openxmlformats.org/presentationml/2006/main">
+  <p:cSld name="Slide 20">
+    <p:spTree>
+      <p:nvGrpSpPr>
+        <p:cNvPr id="1" name=""/>
+        <p:cNvGrpSpPr/>
+        <p:nvPr/>
+      </p:nvGrpSpPr>
+      <p:grpSpPr>
+        <a:xfrm>
+          <a:off x="0" y="0"/>
+          <a:ext cx="0" cy="0"/>
+          <a:chOff x="0" y="0"/>
+          <a:chExt cx="0" cy="0"/>
+        </a:xfrm>
+      </p:grpSpPr>
+      <p:sp>
+        <p:nvSpPr>
+          <p:cNvPr id="2" name="Text 0"/>
+          <p:cNvSpPr txBox="1"/>
+          <p:nvPr/>
+        </p:nvSpPr>
+        <p:spPr>
+          <a:xfrm>
+            <a:off x="812800" y="812800"/>
+            <a:ext cx="10566400" cy="215900"/>
+          </a:xfrm>
+          <a:prstGeom prst="rect">
+            <a:avLst/>
+          </a:prstGeom>
+          <a:noFill/>
+          <a:ln/>
+        </p:spPr>
+        <p:txBody>
+          <a:bodyPr wrap="square" lIns="0" tIns="0" rIns="0" bIns="0" rtlCol="0" anchor="t"/>
+          <a:lstStyle/>
+          <a:p>
+            <a:pPr indent="0" marL="0">
+              <a:lnSpc>
+                <a:spcPct val="115000"/>
+              </a:lnSpc>
+              <a:buNone/>
+            </a:pPr>
+            <a:r>
+              <a:rPr lang="en-US" sz="1200" spc="100" kern="0" dirty="0">
+                <a:solidFill>
+                  <a:srgbClr val="7FB2EE"/>
+                </a:solidFill>
+                <a:latin typeface="Consolas" pitchFamily="34" charset="0"/>
+                <a:ea typeface="Consolas" pitchFamily="34" charset="-122"/>
+                <a:cs typeface="Consolas" pitchFamily="34" charset="-120"/>
+              </a:rPr>
+              <a:t>SCHLUSSFOLGERUNGEN</a:t>
+            </a:r>
+            <a:endParaRPr lang="en-US" sz="1200" dirty="0"/>
+          </a:p>
+        </p:txBody>
+      </p:sp>
+      <p:sp>
+        <p:nvSpPr>
+          <p:cNvPr id="3" name="Text 0"/>
+          <p:cNvSpPr/>
+          <p:nvPr>
+            <p:ph idx="100" type="title" hasCustomPrompt="1"/>
+          </p:nvPr>
+        </p:nvSpPr>
+        <p:spPr>
+          <a:xfrm>
+            <a:off x="812800" y="1104900"/>
+            <a:ext cx="10566400" cy="508000"/>
+          </a:xfrm>
+          <a:prstGeom prst="rect">
+            <a:avLst/>
+          </a:prstGeom>
+          <a:noFill/>
+          <a:ln/>
+        </p:spPr>
+        <p:txBody>
+          <a:bodyPr wrap="square" lIns="0" tIns="0" rIns="0" bIns="0" rtlCol="0" anchor="t"/>
+          <a:lstStyle/>
+          <a:p>
+            <a:pPr algn="l" indent="0" marL="0">
+              <a:buNone/>
+            </a:pPr>
+            <a:r>
+              <a:rPr lang="en-US" sz="3200" b="1" dirty="0">
+                <a:solidFill>
+                  <a:srgbClr val="F4F3EF"/>
+                </a:solidFill>
+                <a:latin typeface="Calibri" pitchFamily="34" charset="0"/>
+                <a:ea typeface="Calibri" pitchFamily="34" charset="-122"/>
+                <a:cs typeface="Calibri" pitchFamily="34" charset="-120"/>
+              </a:rPr>
+              <a:t>Was die Ergebnisse zeigen</a:t>
+            </a:r>
+            <a:endParaRPr lang="en-US" sz="3200" dirty="0"/>
+          </a:p>
+        </p:txBody>
+      </p:sp>
+      <p:sp>
+        <p:nvSpPr>
+          <p:cNvPr id="4" name="Text 2"/>
+          <p:cNvSpPr txBox="1"/>
+          <p:nvPr/>
+        </p:nvSpPr>
+        <p:spPr>
+          <a:xfrm>
+            <a:off x="812800" y="6426200"/>
+            <a:ext cx="9779000" cy="228600"/>
+          </a:xfrm>
+          <a:prstGeom prst="rect">
+            <a:avLst/>
+          </a:prstGeom>
+          <a:noFill/>
+          <a:ln/>
+        </p:spPr>
+        <p:txBody>
+          <a:bodyPr wrap="square" lIns="0" tIns="0" rIns="0" bIns="0" rtlCol="0" anchor="t"/>
+          <a:lstStyle/>
+          <a:p>
+            <a:pPr indent="0" marL="0">
+              <a:lnSpc>
+                <a:spcPct val="115000"/>
+              </a:lnSpc>
+              <a:buNone/>
+            </a:pPr>
+            <a:r>
+              <a:rPr lang="en-US" sz="1200" dirty="0">
+                <a:solidFill>
+                  <a:srgbClr val="B8C3CF"/>
+                </a:solidFill>
+                <a:latin typeface="Calibri" pitchFamily="34" charset="0"/>
+                <a:ea typeface="Calibri" pitchFamily="34" charset="-122"/>
+                <a:cs typeface="Calibri" pitchFamily="34" charset="-120"/>
+              </a:rPr>
+              <a:t>Projektarbeit Schwingungsanalyse mit Matrix Pencil · Arbeitsfassung 16.10.2026</a:t>
+            </a:r>
+            <a:endParaRPr lang="en-US" sz="1200" dirty="0"/>
+          </a:p>
+        </p:txBody>
+      </p:sp>
+      <p:sp>
+        <p:nvSpPr>
+          <p:cNvPr id="6" name="Shape 3"/>
+          <p:cNvSpPr/>
+          <p:nvPr/>
+        </p:nvSpPr>
+        <p:spPr>
+          <a:xfrm>
+            <a:off x="812800" y="1879600"/>
+            <a:ext cx="5181600" cy="2286000"/>
+          </a:xfrm>
+          <a:prstGeom prst="roundRect">
+            <a:avLst>
+              <a:gd name="adj" fmla="val 4400"/>
+            </a:avLst>
+          </a:prstGeom>
+          <a:solidFill>
+            <a:srgbClr val="1E2D3F"/>
+          </a:solidFill>
+          <a:ln w="9525">
+            <a:solidFill>
+              <a:srgbClr val="33465C"/>
+            </a:solidFill>
+            <a:prstDash val="solid"/>
+          </a:ln>
+        </p:spPr>
+      </p:sp>
+      <p:sp>
+        <p:nvSpPr>
+          <p:cNvPr id="7" name="Text 4"/>
+          <p:cNvSpPr txBox="1"/>
+          <p:nvPr/>
+        </p:nvSpPr>
+        <p:spPr>
+          <a:xfrm>
+            <a:off x="1066800" y="2133600"/>
+            <a:ext cx="4673600" cy="317500"/>
+          </a:xfrm>
+          <a:prstGeom prst="rect">
+            <a:avLst/>
+          </a:prstGeom>
+          <a:noFill/>
+          <a:ln/>
+        </p:spPr>
+        <p:txBody>
+          <a:bodyPr wrap="square" lIns="0" tIns="0" rIns="0" bIns="0" rtlCol="0" anchor="t"/>
+          <a:lstStyle/>
+          <a:p>
+            <a:pPr indent="0" marL="0">
+              <a:lnSpc>
+                <a:spcPct val="115000"/>
+              </a:lnSpc>
+              <a:buNone/>
+            </a:pPr>
+            <a:r>
+              <a:rPr lang="en-US" sz="2000" b="1" dirty="0">
+                <a:solidFill>
+                  <a:srgbClr val="7FB2EE"/>
+                </a:solidFill>
+                <a:latin typeface="Calibri" pitchFamily="34" charset="0"/>
+                <a:ea typeface="Calibri" pitchFamily="34" charset="-122"/>
+                <a:cs typeface="Calibri" pitchFamily="34" charset="-120"/>
+              </a:rPr>
+              <a:t>Leistung P_pos (Projekt)</a:t>
+            </a:r>
+            <a:endParaRPr lang="en-US" sz="2000" dirty="0"/>
+          </a:p>
+        </p:txBody>
+      </p:sp>
+      <p:sp>
+        <p:nvSpPr>
+          <p:cNvPr id="8" name="Text 5"/>
+          <p:cNvSpPr txBox="1"/>
+          <p:nvPr/>
+        </p:nvSpPr>
+        <p:spPr>
+          <a:xfrm>
+            <a:off x="1066800" y="2565400"/>
+            <a:ext cx="4673600" cy="1460500"/>
+          </a:xfrm>
+          <a:prstGeom prst="rect">
+            <a:avLst/>
+          </a:prstGeom>
+          <a:noFill/>
+          <a:ln/>
+        </p:spPr>
+        <p:txBody>
+          <a:bodyPr wrap="square" lIns="0" tIns="0" rIns="0" bIns="0" rtlCol="0" anchor="t"/>
+          <a:lstStyle/>
+          <a:p>
+            <a:pPr marL="342900" indent="-342900">
+              <a:spcAft>
+                <a:spcPts val="600"/>
+              </a:spcAft>
+              <a:buSzPct val="100000"/>
+              <a:buChar char="•"/>
+            </a:pPr>
+            <a:r>
+              <a:rPr lang="en-US" sz="1500" dirty="0">
+                <a:solidFill>
+                  <a:srgbClr val="D5DDE6"/>
+                </a:solidFill>
+                <a:latin typeface="Calibri" pitchFamily="34" charset="0"/>
+                <a:ea typeface="Calibri" pitchFamily="34" charset="-122"/>
+                <a:cs typeface="Calibri" pitchFamily="34" charset="-120"/>
+              </a:rPr>
+              <a:t>Pendelung bei 2,268 Hz in beiden Sprungantworten</a:t>
+            </a:r>
+            <a:endParaRPr lang="en-US" sz="1500" dirty="0"/>
+          </a:p>
+          <a:p>
+            <a:pPr marL="342900" indent="-342900">
+              <a:spcAft>
+                <a:spcPts val="600"/>
+              </a:spcAft>
+              <a:buSzPct val="100000"/>
+              <a:buChar char="•"/>
+            </a:pPr>
+            <a:r>
+              <a:rPr lang="en-US" sz="1500" dirty="0">
+                <a:solidFill>
+                  <a:srgbClr val="D5DDE6"/>
+                </a:solidFill>
+                <a:latin typeface="Calibri" pitchFamily="34" charset="0"/>
+                <a:ea typeface="Calibri" pitchFamily="34" charset="-122"/>
+                <a:cs typeface="Calibri" pitchFamily="34" charset="-120"/>
+              </a:rPr>
+              <a:t>Modellfehler 0,763 % und 0,594 %</a:t>
+            </a:r>
+            <a:endParaRPr lang="en-US" sz="1500" dirty="0"/>
+          </a:p>
+          <a:p>
+            <a:pPr marL="342900" indent="-342900">
+              <a:spcAft>
+                <a:spcPts val="600"/>
+              </a:spcAft>
+              <a:buSzPct val="100000"/>
+              <a:buChar char="•"/>
+            </a:pPr>
+            <a:r>
+              <a:rPr lang="en-US" sz="1500" dirty="0">
+                <a:solidFill>
+                  <a:srgbClr val="D5DDE6"/>
+                </a:solidFill>
+                <a:latin typeface="Calibri" pitchFamily="34" charset="0"/>
+                <a:ea typeface="Calibri" pitchFamily="34" charset="-122"/>
+                <a:cs typeface="Calibri" pitchFamily="34" charset="-120"/>
+              </a:rPr>
+              <a:t>Beide Abzüge freigegeben, positiv mit zwei Anteilen</a:t>
+            </a:r>
+            <a:endParaRPr lang="en-US" sz="1500" dirty="0"/>
+          </a:p>
+        </p:txBody>
+      </p:sp>
+      <p:sp>
+        <p:nvSpPr>
+          <p:cNvPr id="9" name="Shape 6"/>
+          <p:cNvSpPr/>
+          <p:nvPr/>
+        </p:nvSpPr>
+        <p:spPr>
+          <a:xfrm>
+            <a:off x="6197600" y="1879600"/>
+            <a:ext cx="5181600" cy="2286000"/>
+          </a:xfrm>
+          <a:prstGeom prst="roundRect">
+            <a:avLst>
+              <a:gd name="adj" fmla="val 4400"/>
+            </a:avLst>
+          </a:prstGeom>
+          <a:solidFill>
+            <a:srgbClr val="1E2D3F"/>
+          </a:solidFill>
+          <a:ln w="9525">
+            <a:solidFill>
+              <a:srgbClr val="33465C"/>
+            </a:solidFill>
+            <a:prstDash val="solid"/>
+          </a:ln>
+        </p:spPr>
+      </p:sp>
+      <p:sp>
+        <p:nvSpPr>
+          <p:cNvPr id="10" name="Text 7"/>
+          <p:cNvSpPr txBox="1"/>
+          <p:nvPr/>
+        </p:nvSpPr>
+        <p:spPr>
+          <a:xfrm>
+            <a:off x="6451600" y="2133600"/>
+            <a:ext cx="4673600" cy="317500"/>
+          </a:xfrm>
+          <a:prstGeom prst="rect">
+            <a:avLst/>
+          </a:prstGeom>
+          <a:noFill/>
+          <a:ln/>
+        </p:spPr>
+        <p:txBody>
+          <a:bodyPr wrap="square" lIns="0" tIns="0" rIns="0" bIns="0" rtlCol="0" anchor="t"/>
+          <a:lstStyle/>
+          <a:p>
+            <a:pPr indent="0" marL="0">
+              <a:lnSpc>
+                <a:spcPct val="115000"/>
+              </a:lnSpc>
+              <a:buNone/>
+            </a:pPr>
+            <a:r>
+              <a:rPr lang="en-US" sz="2000" b="1" dirty="0">
+                <a:solidFill>
+                  <a:srgbClr val="F2A07B"/>
+                </a:solidFill>
+                <a:latin typeface="Calibri" pitchFamily="34" charset="0"/>
+                <a:ea typeface="Calibri" pitchFamily="34" charset="-122"/>
+                <a:cs typeface="Calibri" pitchFamily="34" charset="-120"/>
+              </a:rPr>
+              <a:t>Netzfrequenz Mexiko (extern)</a:t>
+            </a:r>
+            <a:endParaRPr lang="en-US" sz="2000" dirty="0"/>
+          </a:p>
+        </p:txBody>
+      </p:sp>
+      <p:sp>
+        <p:nvSpPr>
+          <p:cNvPr id="11" name="Text 8"/>
+          <p:cNvSpPr txBox="1"/>
+          <p:nvPr/>
+        </p:nvSpPr>
+        <p:spPr>
+          <a:xfrm>
+            <a:off x="6451600" y="2565400"/>
+            <a:ext cx="4673600" cy="1460500"/>
+          </a:xfrm>
+          <a:prstGeom prst="rect">
+            <a:avLst/>
+          </a:prstGeom>
+          <a:noFill/>
+          <a:ln/>
+        </p:spPr>
+        <p:txBody>
+          <a:bodyPr wrap="square" lIns="0" tIns="0" rIns="0" bIns="0" rtlCol="0" anchor="t"/>
+          <a:lstStyle/>
+          <a:p>
+            <a:pPr marL="342900" indent="-342900">
+              <a:spcAft>
+                <a:spcPts val="600"/>
+              </a:spcAft>
+              <a:buSzPct val="100000"/>
+              <a:buChar char="•"/>
+            </a:pPr>
+            <a:r>
+              <a:rPr lang="en-US" sz="1500" dirty="0">
+                <a:solidFill>
+                  <a:srgbClr val="D5DDE6"/>
+                </a:solidFill>
+                <a:latin typeface="Calibri" pitchFamily="34" charset="0"/>
+                <a:ea typeface="Calibri" pitchFamily="34" charset="-122"/>
+                <a:cs typeface="Calibri" pitchFamily="34" charset="-120"/>
+              </a:rPr>
+              <a:t>Drei Frequenzen auf unter 0,06 % wie veröffentlicht</a:t>
+            </a:r>
+            <a:endParaRPr lang="en-US" sz="1500" dirty="0"/>
+          </a:p>
+          <a:p>
+            <a:pPr marL="342900" indent="-342900">
+              <a:spcAft>
+                <a:spcPts val="600"/>
+              </a:spcAft>
+              <a:buSzPct val="100000"/>
+              <a:buChar char="•"/>
+            </a:pPr>
+            <a:r>
+              <a:rPr lang="en-US" sz="1500" dirty="0">
+                <a:solidFill>
+                  <a:srgbClr val="D5DDE6"/>
+                </a:solidFill>
+                <a:latin typeface="Calibri" pitchFamily="34" charset="0"/>
+                <a:ea typeface="Calibri" pitchFamily="34" charset="-122"/>
+                <a:cs typeface="Calibri" pitchFamily="34" charset="-120"/>
+              </a:rPr>
+              <a:t>Modellfehler 17,05 %: Abzug blockiert</a:t>
+            </a:r>
+            <a:endParaRPr lang="en-US" sz="1500" dirty="0"/>
+          </a:p>
+          <a:p>
+            <a:pPr marL="342900" indent="-342900">
+              <a:spcAft>
+                <a:spcPts val="600"/>
+              </a:spcAft>
+              <a:buSzPct val="100000"/>
+              <a:buChar char="•"/>
+            </a:pPr>
+            <a:r>
+              <a:rPr lang="en-US" sz="1500" dirty="0">
+                <a:solidFill>
+                  <a:srgbClr val="D5DDE6"/>
+                </a:solidFill>
+                <a:latin typeface="Calibri" pitchFamily="34" charset="0"/>
+                <a:ea typeface="Calibri" pitchFamily="34" charset="-122"/>
+                <a:cs typeface="Calibri" pitchFamily="34" charset="-120"/>
+              </a:rPr>
+              <a:t>Höhere Ordnung passt besser, zerlegt aber anders</a:t>
+            </a:r>
+            <a:endParaRPr lang="en-US" sz="1500" dirty="0"/>
+          </a:p>
+        </p:txBody>
+      </p:sp>
+      <p:sp>
+        <p:nvSpPr>
+          <p:cNvPr id="12" name="Text 9"/>
+          <p:cNvSpPr txBox="1"/>
+          <p:nvPr/>
+        </p:nvSpPr>
+        <p:spPr>
+          <a:xfrm>
+            <a:off x="812800" y="4508500"/>
+            <a:ext cx="10566400" cy="762000"/>
+          </a:xfrm>
+          <a:prstGeom prst="rect">
+            <a:avLst/>
+          </a:prstGeom>
+          <a:noFill/>
+          <a:ln/>
+        </p:spPr>
+        <p:txBody>
+          <a:bodyPr wrap="square" lIns="0" tIns="0" rIns="0" bIns="0" rtlCol="0" anchor="t"/>
+          <a:lstStyle/>
+          <a:p>
+            <a:pPr indent="0" marL="0">
+              <a:lnSpc>
+                <a:spcPct val="115000"/>
+              </a:lnSpc>
+              <a:buNone/>
+            </a:pPr>
+            <a:r>
+              <a:rPr lang="en-US" sz="2000" b="1" dirty="0">
+                <a:solidFill>
+                  <a:srgbClr val="F4F3EF"/>
+                </a:solidFill>
+                <a:latin typeface="Calibri" pitchFamily="34" charset="0"/>
+                <a:ea typeface="Calibri" pitchFamily="34" charset="-122"/>
+                <a:cs typeface="Calibri" pitchFamily="34" charset="-120"/>
+              </a:rPr>
+              <a:t>Frequenzübereinstimmung und Filterfreigabe sind getrennt zu bewerten. Für die Messdaten fehlt eine unabhängig bekannte Sollkurve.</a:t>
+            </a:r>
+            <a:endParaRPr lang="en-US" sz="2000" dirty="0"/>
+          </a:p>
+        </p:txBody>
+      </p:sp>
+      <p:sp>
+        <p:nvSpPr>
+          <p:cNvPr id="25" name="Slide Number Placeholder 0"/>
+          <p:cNvSpPr>
+            <a:spLocks noGrp="1"/>
+          </p:cNvSpPr>
+          <p:nvPr>
+            <p:ph type="sldNum" sz="quarter" idx="4294967295"/>
+          </p:nvPr>
+        </p:nvSpPr>
+        <p:spPr>
+          <a:xfrm>
+            <a:off x="10795000" y="6426200"/>
+            <a:ext cx="584200" cy="228600"/>
+          </a:xfrm>
+          <a:prstGeom prst="rect">
+            <a:avLst/>
+          </a:prstGeom>
+          <a:extLst>
+            <a:ext uri="{C572A759-6A51-4108-AA02-DFA0A04FC94B}">
+              <ma14:wrappingTextBoxFlag xmlns:ma14="http://schemas.microsoft.com/office/mac/drawingml/2011/main" val="0"/>
+            </a:ext>
+          </a:extLst>
+        </p:spPr>
+        <p:txBody>
+          <a:bodyPr/>
+          <a:lstStyle>
+            <a:lvl1pPr>
+              <a:defRPr sz="1200">
+                <a:solidFill>
+                  <a:srgbClr val="B8C3CF"/>
+                </a:solidFill>
+                <a:latin typeface="Consolas"/>
+                <a:ea typeface="Consolas"/>
+                <a:cs typeface="Consolas"/>
+              </a:defRPr>
+            </a:lvl1pPr>
+          </a:lstStyle>
+          <a:p>
+            <a:pPr algn="r"/>
+            <a:fld id="{F7021451-1387-4CA6-816F-3879F97B5CBC}" type="slidenum">
+              <a:rPr b="0" lang="en-US"/>
+              <a:t>20</a:t>
+            </a:fld>
+            <a:endParaRPr lang="en-US"/>
+          </a:p>
+        </p:txBody>
+      </p:sp>
+    </p:spTree>
+  </p:cSld>
+  <p:clrMapOvr>
+    <a:masterClrMapping/>
+  </p:clrMapOvr>
+</p:sld>
+</file>
+
+<file path=ppt/slides/slide21.xml><?xml version="1.0" encoding="utf-8"?>
+<p:sld xmlns:a="http://schemas.openxmlformats.org/drawingml/2006/main" xmlns:r="http://schemas.openxmlformats.org/officeDocument/2006/relationships" xmlns:p="http://schemas.openxmlformats.org/presentationml/2006/main">
+  <p:cSld name="Slide 21">
+    <p:spTree>
+      <p:nvGrpSpPr>
+        <p:cNvPr id="1" name=""/>
+        <p:cNvGrpSpPr/>
+        <p:nvPr/>
+      </p:nvGrpSpPr>
+      <p:grpSpPr>
+        <a:xfrm>
+          <a:off x="0" y="0"/>
+          <a:ext cx="0" cy="0"/>
+          <a:chOff x="0" y="0"/>
+          <a:chExt cx="0" cy="0"/>
+        </a:xfrm>
+      </p:grpSpPr>
+      <p:sp>
+        <p:nvSpPr>
+          <p:cNvPr id="2" name="Text 0"/>
+          <p:cNvSpPr txBox="1"/>
+          <p:nvPr/>
+        </p:nvSpPr>
+        <p:spPr>
+          <a:xfrm>
+            <a:off x="812800" y="812800"/>
+            <a:ext cx="10566400" cy="215900"/>
+          </a:xfrm>
+          <a:prstGeom prst="rect">
+            <a:avLst/>
+          </a:prstGeom>
+          <a:noFill/>
+          <a:ln/>
+        </p:spPr>
+        <p:txBody>
+          <a:bodyPr wrap="square" lIns="0" tIns="0" rIns="0" bIns="0" rtlCol="0" anchor="t"/>
+          <a:lstStyle/>
+          <a:p>
+            <a:pPr indent="0" marL="0">
+              <a:lnSpc>
+                <a:spcPct val="115000"/>
+              </a:lnSpc>
+              <a:buNone/>
+            </a:pPr>
+            <a:r>
+              <a:rPr lang="en-US" sz="1200" spc="100" kern="0" dirty="0">
+                <a:solidFill>
+                  <a:srgbClr val="1C5CAB"/>
+                </a:solidFill>
+                <a:latin typeface="Consolas" pitchFamily="34" charset="0"/>
+                <a:ea typeface="Consolas" pitchFamily="34" charset="-122"/>
+                <a:cs typeface="Consolas" pitchFamily="34" charset="-120"/>
+              </a:rPr>
+              <a:t>ANHANG</a:t>
+            </a:r>
+            <a:endParaRPr lang="en-US" sz="1200" dirty="0"/>
+          </a:p>
+        </p:txBody>
+      </p:sp>
+      <p:sp>
+        <p:nvSpPr>
+          <p:cNvPr id="3" name="Text 0"/>
+          <p:cNvSpPr/>
+          <p:nvPr>
+            <p:ph idx="100" type="title" hasCustomPrompt="1"/>
+          </p:nvPr>
+        </p:nvSpPr>
+        <p:spPr>
+          <a:xfrm>
+            <a:off x="812800" y="1104900"/>
+            <a:ext cx="10566400" cy="508000"/>
+          </a:xfrm>
+          <a:prstGeom prst="rect">
+            <a:avLst/>
+          </a:prstGeom>
+          <a:noFill/>
+          <a:ln/>
+        </p:spPr>
+        <p:txBody>
+          <a:bodyPr wrap="square" lIns="0" tIns="0" rIns="0" bIns="0" rtlCol="0" anchor="t"/>
+          <a:lstStyle/>
+          <a:p>
+            <a:pPr algn="l" indent="0" marL="0">
+              <a:buNone/>
+            </a:pPr>
+            <a:r>
+              <a:rPr lang="en-US" sz="3200" b="1" dirty="0">
+                <a:solidFill>
+                  <a:srgbClr val="14202E"/>
+                </a:solidFill>
+                <a:latin typeface="Calibri" pitchFamily="34" charset="0"/>
+                <a:ea typeface="Calibri" pitchFamily="34" charset="-122"/>
+                <a:cs typeface="Calibri" pitchFamily="34" charset="-120"/>
+              </a:rPr>
+              <a:t>Abkürzungen und Formelzeichen</a:t>
+            </a:r>
+            <a:endParaRPr lang="en-US" sz="3200" dirty="0"/>
+          </a:p>
+        </p:txBody>
+      </p:sp>
+      <p:sp>
+        <p:nvSpPr>
+          <p:cNvPr id="4" name="Text 2"/>
+          <p:cNvSpPr txBox="1"/>
+          <p:nvPr/>
+        </p:nvSpPr>
+        <p:spPr>
+          <a:xfrm>
+            <a:off x="812800" y="6426200"/>
+            <a:ext cx="9779000" cy="228600"/>
+          </a:xfrm>
+          <a:prstGeom prst="rect">
+            <a:avLst/>
+          </a:prstGeom>
+          <a:noFill/>
+          <a:ln/>
+        </p:spPr>
+        <p:txBody>
+          <a:bodyPr wrap="square" lIns="0" tIns="0" rIns="0" bIns="0" rtlCol="0" anchor="t"/>
+          <a:lstStyle/>
+          <a:p>
+            <a:pPr indent="0" marL="0">
+              <a:lnSpc>
+                <a:spcPct val="115000"/>
+              </a:lnSpc>
+              <a:buNone/>
+            </a:pPr>
+            <a:r>
+              <a:rPr lang="en-US" sz="1200" dirty="0">
+                <a:solidFill>
+                  <a:srgbClr val="5F6873"/>
+                </a:solidFill>
+                <a:latin typeface="Calibri" pitchFamily="34" charset="0"/>
+                <a:ea typeface="Calibri" pitchFamily="34" charset="-122"/>
+                <a:cs typeface="Calibri" pitchFamily="34" charset="-120"/>
+              </a:rPr>
+              <a:t>Definitionen von SCR, PEmax, p1 und D nach VDE FNN Hinweis Netzbildende Eigenschaften v2.1, Abschnitt 3</a:t>
+            </a:r>
+            <a:endParaRPr lang="en-US" sz="1200" dirty="0"/>
+          </a:p>
+        </p:txBody>
+      </p:sp>
+      <p:graphicFrame>
+        <p:nvGraphicFramePr>
+          <p:cNvPr id="22" name="Table 0"/>
+          <p:cNvGraphicFramePr>
+            <a:graphicFrameLocks noGrp="1"/>
+          </p:cNvGraphicFramePr>
+          <p:nvPr>
+            <p:extLst>
+              <p:ext uri="{D42A27DB-BD31-4B8C-83A1-F6EECF244321}">
+                <p14:modId xmlns:p14="http://schemas.microsoft.com/office/powerpoint/2010/main" val="1579011935"/>
+              </p:ext>
+            </p:extLst>
+          </p:nvPr>
+        </p:nvGraphicFramePr>
+        <p:xfrm>
+          <a:off x="812800" y="1879600"/>
+          <a:ext cx="5130800" cy="914400"/>
+        </p:xfrm>
+        <a:graphic>
+          <a:graphicData uri="http://schemas.openxmlformats.org/drawingml/2006/table">
+            <a:tbl>
+              <a:tblPr/>
+              <a:tblGrid>
+                <a:gridCol w="1435100"/>
+                <a:gridCol w="3695700"/>
+              </a:tblGrid>
+              <a:tr h="0">
+                <a:tc>
+                  <a:txBody>
+                    <a:bodyPr/>
+                    <a:lstStyle/>
+                    <a:p>
+                      <a:pPr algn="l" indent="0" marL="0">
+                        <a:buNone/>
+                      </a:pPr>
+                      <a:r>
+                        <a:rPr lang="en-US" sz="1200" b="1" dirty="0">
+                          <a:solidFill>
+                            <a:srgbClr val="14202E"/>
+                          </a:solidFill>
+                          <a:latin typeface="Calibri" pitchFamily="34" charset="0"/>
+                          <a:ea typeface="Calibri" pitchFamily="34" charset="-122"/>
+                          <a:cs typeface="Calibri" pitchFamily="34" charset="-120"/>
+                        </a:rPr>
+                        <a:t>Kürzel</a:t>
+                      </a:r>
+                      <a:endParaRPr lang="en-US" sz="1200" dirty="0">
+                        <a:latin typeface="Calibri" charset="0"/>
+                        <a:ea typeface="Calibri" charset="0"/>
+                        <a:cs typeface="Calibri" charset="0"/>
+                      </a:endParaRPr>
+                    </a:p>
+                  </a:txBody>
+                  <a:tcPr marL="76200" marR="76200" marT="38100" marB="38100" anchor="ctr">
+                    <a:lnL w="9525" cap="flat" cmpd="sng" algn="ctr">
+                      <a:solidFill>
+                        <a:srgbClr val="D9D8D1"/>
+                      </a:solidFill>
+                      <a:prstDash val="solid"/>
+                      <a:round/>
+                      <a:headEnd type="none" w="med" len="med"/>
+                      <a:tailEnd type="none" w="med" len="med"/>
+                    </a:lnL>
+                    <a:lnR w="9525" cap="flat" cmpd="sng" algn="ctr">
+                      <a:solidFill>
+                        <a:srgbClr val="D9D8D1"/>
+                      </a:solidFill>
+                      <a:prstDash val="solid"/>
+                      <a:round/>
+                      <a:headEnd type="none" w="med" len="med"/>
+                      <a:tailEnd type="none" w="med" len="med"/>
+                    </a:lnR>
+                    <a:lnT w="9525" cap="flat" cmpd="sng" algn="ctr">
+                      <a:solidFill>
+                        <a:srgbClr val="D9D8D1"/>
+                      </a:solidFill>
+                      <a:prstDash val="solid"/>
+                      <a:round/>
+                      <a:headEnd type="none" w="med" len="med"/>
+                      <a:tailEnd type="none" w="med" len="med"/>
+                    </a:lnT>
+                    <a:lnB w="9525" cap="flat" cmpd="sng" algn="ctr">
+                      <a:solidFill>
+                        <a:srgbClr val="D9D8D1"/>
+                      </a:solidFill>
+                      <a:prstDash val="solid"/>
+                      <a:round/>
+                      <a:headEnd type="none" w="med" len="med"/>
+                      <a:tailEnd type="none" w="med" len="med"/>
+                    </a:lnB>
+                    <a:solidFill>
+                      <a:srgbClr val="E9E8E2"/>
+                    </a:solidFill>
+                  </a:tcPr>
+                </a:tc>
+                <a:tc>
+                  <a:txBody>
+                    <a:bodyPr/>
+                    <a:lstStyle/>
+                    <a:p>
+                      <a:pPr algn="l" indent="0" marL="0">
+                        <a:buNone/>
+                      </a:pPr>
+                      <a:r>
+                        <a:rPr lang="en-US" sz="1200" b="1" dirty="0">
+                          <a:solidFill>
+                            <a:srgbClr val="14202E"/>
+                          </a:solidFill>
+                          <a:latin typeface="Calibri" pitchFamily="34" charset="0"/>
+                          <a:ea typeface="Calibri" pitchFamily="34" charset="-122"/>
+                          <a:cs typeface="Calibri" pitchFamily="34" charset="-120"/>
+                        </a:rPr>
+                        <a:t>Bedeutung</a:t>
+                      </a:r>
+                      <a:endParaRPr lang="en-US" sz="1200" dirty="0">
+                        <a:latin typeface="Calibri" charset="0"/>
+                        <a:ea typeface="Calibri" charset="0"/>
+                        <a:cs typeface="Calibri" charset="0"/>
+                      </a:endParaRPr>
+                    </a:p>
+                  </a:txBody>
+                  <a:tcPr marL="76200" marR="76200" marT="38100" marB="38100" anchor="ctr">
+                    <a:lnL w="9525" cap="flat" cmpd="sng" algn="ctr">
+                      <a:solidFill>
+                        <a:srgbClr val="D9D8D1"/>
+                      </a:solidFill>
+                      <a:prstDash val="solid"/>
+                      <a:round/>
+                      <a:headEnd type="none" w="med" len="med"/>
+                      <a:tailEnd type="none" w="med" len="med"/>
+                    </a:lnL>
+                    <a:lnR w="9525" cap="flat" cmpd="sng" algn="ctr">
+                      <a:solidFill>
+                        <a:srgbClr val="D9D8D1"/>
+                      </a:solidFill>
+                      <a:prstDash val="solid"/>
+                      <a:round/>
+                      <a:headEnd type="none" w="med" len="med"/>
+                      <a:tailEnd type="none" w="med" len="med"/>
+                    </a:lnR>
+                    <a:lnT w="9525" cap="flat" cmpd="sng" algn="ctr">
+                      <a:solidFill>
+                        <a:srgbClr val="D9D8D1"/>
+                      </a:solidFill>
+                      <a:prstDash val="solid"/>
+                      <a:round/>
+                      <a:headEnd type="none" w="med" len="med"/>
+                      <a:tailEnd type="none" w="med" len="med"/>
+                    </a:lnT>
+                    <a:lnB w="9525" cap="flat" cmpd="sng" algn="ctr">
+                      <a:solidFill>
+                        <a:srgbClr val="D9D8D1"/>
+                      </a:solidFill>
+                      <a:prstDash val="solid"/>
+                      <a:round/>
+                      <a:headEnd type="none" w="med" len="med"/>
+                      <a:tailEnd type="none" w="med" len="med"/>
+                    </a:lnB>
+                    <a:solidFill>
+                      <a:srgbClr val="E9E8E2"/>
+                    </a:solidFill>
+                  </a:tcPr>
+                </a:tc>
+              </a:tr>
+              <a:tr h="0">
+                <a:tc>
+                  <a:txBody>
+                    <a:bodyPr/>
+                    <a:lstStyle/>
+                    <a:p>
+                      <a:pPr algn="l" indent="0" marL="0">
+                        <a:buNone/>
+                      </a:pPr>
+                      <a:r>
+                        <a:rPr lang="en-US" sz="1200" dirty="0">
+                          <a:solidFill>
+                            <a:srgbClr val="14202E"/>
+                          </a:solidFill>
+                          <a:latin typeface="Calibri" pitchFamily="34" charset="0"/>
+                          <a:ea typeface="Calibri" pitchFamily="34" charset="-122"/>
+                          <a:cs typeface="Calibri" pitchFamily="34" charset="-120"/>
+                        </a:rPr>
+                        <a:t>AV21, AV32</a:t>
+                      </a:r>
+                      <a:endParaRPr lang="en-US" sz="1200" dirty="0">
+                        <a:latin typeface="Calibri" charset="0"/>
+                        <a:ea typeface="Calibri" charset="0"/>
+                        <a:cs typeface="Calibri" charset="0"/>
+                      </a:endParaRPr>
+                    </a:p>
+                  </a:txBody>
+                  <a:tcPr marL="76200" marR="76200" marT="38100" marB="38100" anchor="ctr">
+                    <a:lnL w="9525" cap="flat" cmpd="sng" algn="ctr">
+                      <a:solidFill>
+                        <a:srgbClr val="D9D8D1"/>
+                      </a:solidFill>
+                      <a:prstDash val="solid"/>
+                      <a:round/>
+                      <a:headEnd type="none" w="med" len="med"/>
+                      <a:tailEnd type="none" w="med" len="med"/>
+                    </a:lnL>
+                    <a:lnR w="9525" cap="flat" cmpd="sng" algn="ctr">
+                      <a:solidFill>
+                        <a:srgbClr val="D9D8D1"/>
+                      </a:solidFill>
+                      <a:prstDash val="solid"/>
+                      <a:round/>
+                      <a:headEnd type="none" w="med" len="med"/>
+                      <a:tailEnd type="none" w="med" len="med"/>
+                    </a:lnR>
+                    <a:lnT w="9525" cap="flat" cmpd="sng" algn="ctr">
+                      <a:solidFill>
+                        <a:srgbClr val="D9D8D1"/>
+                      </a:solidFill>
+                      <a:prstDash val="solid"/>
+                      <a:round/>
+                      <a:headEnd type="none" w="med" len="med"/>
+                      <a:tailEnd type="none" w="med" len="med"/>
+                    </a:lnT>
+                    <a:lnB w="9525" cap="flat" cmpd="sng" algn="ctr">
+                      <a:solidFill>
+                        <a:srgbClr val="D9D8D1"/>
+                      </a:solidFill>
+                      <a:prstDash val="solid"/>
+                      <a:round/>
+                      <a:headEnd type="none" w="med" len="med"/>
+                      <a:tailEnd type="none" w="med" len="med"/>
+                    </a:lnB>
+                    <a:solidFill>
+                      <a:srgbClr val="F4F3EF"/>
+                    </a:solidFill>
+                  </a:tcPr>
+                </a:tc>
+                <a:tc>
+                  <a:txBody>
+                    <a:bodyPr/>
+                    <a:lstStyle/>
+                    <a:p>
+                      <a:pPr algn="l" indent="0" marL="0">
+                        <a:buNone/>
+                      </a:pPr>
+                      <a:r>
+                        <a:rPr lang="en-US" sz="1200" dirty="0">
+                          <a:solidFill>
+                            <a:srgbClr val="14202E"/>
+                          </a:solidFill>
+                          <a:latin typeface="Calibri" pitchFamily="34" charset="0"/>
+                          <a:ea typeface="Calibri" pitchFamily="34" charset="-122"/>
+                          <a:cs typeface="Calibri" pitchFamily="34" charset="-120"/>
+                        </a:rPr>
+                        <a:t>Verhältnis zweier Überschwinger, z. B. ΔPS2 / ΔPS1</a:t>
+                      </a:r>
+                      <a:endParaRPr lang="en-US" sz="1200" dirty="0">
+                        <a:latin typeface="Calibri" charset="0"/>
+                        <a:ea typeface="Calibri" charset="0"/>
+                        <a:cs typeface="Calibri" charset="0"/>
+                      </a:endParaRPr>
+                    </a:p>
+                  </a:txBody>
+                  <a:tcPr marL="76200" marR="76200" marT="38100" marB="38100" anchor="ctr">
+                    <a:lnL w="9525" cap="flat" cmpd="sng" algn="ctr">
+                      <a:solidFill>
+                        <a:srgbClr val="D9D8D1"/>
+                      </a:solidFill>
+                      <a:prstDash val="solid"/>
+                      <a:round/>
+                      <a:headEnd type="none" w="med" len="med"/>
+                      <a:tailEnd type="none" w="med" len="med"/>
+                    </a:lnL>
+                    <a:lnR w="9525" cap="flat" cmpd="sng" algn="ctr">
+                      <a:solidFill>
+                        <a:srgbClr val="D9D8D1"/>
+                      </a:solidFill>
+                      <a:prstDash val="solid"/>
+                      <a:round/>
+                      <a:headEnd type="none" w="med" len="med"/>
+                      <a:tailEnd type="none" w="med" len="med"/>
+                    </a:lnR>
+                    <a:lnT w="9525" cap="flat" cmpd="sng" algn="ctr">
+                      <a:solidFill>
+                        <a:srgbClr val="D9D8D1"/>
+                      </a:solidFill>
+                      <a:prstDash val="solid"/>
+                      <a:round/>
+                      <a:headEnd type="none" w="med" len="med"/>
+                      <a:tailEnd type="none" w="med" len="med"/>
+                    </a:lnT>
+                    <a:lnB w="9525" cap="flat" cmpd="sng" algn="ctr">
+                      <a:solidFill>
+                        <a:srgbClr val="D9D8D1"/>
+                      </a:solidFill>
+                      <a:prstDash val="solid"/>
+                      <a:round/>
+                      <a:headEnd type="none" w="med" len="med"/>
+                      <a:tailEnd type="none" w="med" len="med"/>
+                    </a:lnB>
+                    <a:solidFill>
+                      <a:srgbClr val="F4F3EF"/>
+                    </a:solidFill>
+                  </a:tcPr>
+                </a:tc>
+              </a:tr>
+              <a:tr h="0">
+                <a:tc>
+                  <a:txBody>
+                    <a:bodyPr/>
+                    <a:lstStyle/>
+                    <a:p>
+                      <a:pPr algn="l" indent="0" marL="0">
+                        <a:buNone/>
+                      </a:pPr>
+                      <a:r>
+                        <a:rPr lang="en-US" sz="1200" dirty="0">
+                          <a:solidFill>
+                            <a:srgbClr val="14202E"/>
+                          </a:solidFill>
+                          <a:latin typeface="Calibri" pitchFamily="34" charset="0"/>
+                          <a:ea typeface="Calibri" pitchFamily="34" charset="-122"/>
+                          <a:cs typeface="Calibri" pitchFamily="34" charset="-120"/>
+                        </a:rPr>
+                        <a:t>D</a:t>
+                      </a:r>
+                      <a:endParaRPr lang="en-US" sz="1200" dirty="0">
+                        <a:latin typeface="Calibri" charset="0"/>
+                        <a:ea typeface="Calibri" charset="0"/>
+                        <a:cs typeface="Calibri" charset="0"/>
+                      </a:endParaRPr>
+                    </a:p>
+                  </a:txBody>
+                  <a:tcPr marL="76200" marR="76200" marT="38100" marB="38100" anchor="ctr">
+                    <a:lnL w="9525" cap="flat" cmpd="sng" algn="ctr">
+                      <a:solidFill>
+                        <a:srgbClr val="D9D8D1"/>
+                      </a:solidFill>
+                      <a:prstDash val="solid"/>
+                      <a:round/>
+                      <a:headEnd type="none" w="med" len="med"/>
+                      <a:tailEnd type="none" w="med" len="med"/>
+                    </a:lnL>
+                    <a:lnR w="9525" cap="flat" cmpd="sng" algn="ctr">
+                      <a:solidFill>
+                        <a:srgbClr val="D9D8D1"/>
+                      </a:solidFill>
+                      <a:prstDash val="solid"/>
+                      <a:round/>
+                      <a:headEnd type="none" w="med" len="med"/>
+                      <a:tailEnd type="none" w="med" len="med"/>
+                    </a:lnR>
+                    <a:lnT w="9525" cap="flat" cmpd="sng" algn="ctr">
+                      <a:solidFill>
+                        <a:srgbClr val="D9D8D1"/>
+                      </a:solidFill>
+                      <a:prstDash val="solid"/>
+                      <a:round/>
+                      <a:headEnd type="none" w="med" len="med"/>
+                      <a:tailEnd type="none" w="med" len="med"/>
+                    </a:lnT>
+                    <a:lnB w="9525" cap="flat" cmpd="sng" algn="ctr">
+                      <a:solidFill>
+                        <a:srgbClr val="D9D8D1"/>
+                      </a:solidFill>
+                      <a:prstDash val="solid"/>
+                      <a:round/>
+                      <a:headEnd type="none" w="med" len="med"/>
+                      <a:tailEnd type="none" w="med" len="med"/>
+                    </a:lnB>
+                    <a:solidFill>
+                      <a:srgbClr val="F4F3EF"/>
+                    </a:solidFill>
+                  </a:tcPr>
+                </a:tc>
+                <a:tc>
+                  <a:txBody>
+                    <a:bodyPr/>
+                    <a:lstStyle/>
+                    <a:p>
+                      <a:pPr algn="l" indent="0" marL="0">
+                        <a:buNone/>
+                      </a:pPr>
+                      <a:r>
+                        <a:rPr lang="en-US" sz="1200" dirty="0">
+                          <a:solidFill>
+                            <a:srgbClr val="14202E"/>
+                          </a:solidFill>
+                          <a:latin typeface="Calibri" pitchFamily="34" charset="0"/>
+                          <a:ea typeface="Calibri" pitchFamily="34" charset="-122"/>
+                          <a:cs typeface="Calibri" pitchFamily="34" charset="-120"/>
+                        </a:rPr>
+                        <a:t>Dämpfungsmaß (Dämpfungsgrad)</a:t>
+                      </a:r>
+                      <a:endParaRPr lang="en-US" sz="1200" dirty="0">
+                        <a:latin typeface="Calibri" charset="0"/>
+                        <a:ea typeface="Calibri" charset="0"/>
+                        <a:cs typeface="Calibri" charset="0"/>
+                      </a:endParaRPr>
+                    </a:p>
+                  </a:txBody>
+                  <a:tcPr marL="76200" marR="76200" marT="38100" marB="38100" anchor="ctr">
+                    <a:lnL w="9525" cap="flat" cmpd="sng" algn="ctr">
+                      <a:solidFill>
+                        <a:srgbClr val="D9D8D1"/>
+                      </a:solidFill>
+                      <a:prstDash val="solid"/>
+                      <a:round/>
+                      <a:headEnd type="none" w="med" len="med"/>
+                      <a:tailEnd type="none" w="med" len="med"/>
+                    </a:lnL>
+                    <a:lnR w="9525" cap="flat" cmpd="sng" algn="ctr">
+                      <a:solidFill>
+                        <a:srgbClr val="D9D8D1"/>
+                      </a:solidFill>
+                      <a:prstDash val="solid"/>
+                      <a:round/>
+                      <a:headEnd type="none" w="med" len="med"/>
+                      <a:tailEnd type="none" w="med" len="med"/>
+                    </a:lnR>
+                    <a:lnT w="9525" cap="flat" cmpd="sng" algn="ctr">
+                      <a:solidFill>
+                        <a:srgbClr val="D9D8D1"/>
+                      </a:solidFill>
+                      <a:prstDash val="solid"/>
+                      <a:round/>
+                      <a:headEnd type="none" w="med" len="med"/>
+                      <a:tailEnd type="none" w="med" len="med"/>
+                    </a:lnT>
+                    <a:lnB w="9525" cap="flat" cmpd="sng" algn="ctr">
+                      <a:solidFill>
+                        <a:srgbClr val="D9D8D1"/>
+                      </a:solidFill>
+                      <a:prstDash val="solid"/>
+                      <a:round/>
+                      <a:headEnd type="none" w="med" len="med"/>
+                      <a:tailEnd type="none" w="med" len="med"/>
+                    </a:lnB>
+                    <a:solidFill>
+                      <a:srgbClr val="F4F3EF"/>
+                    </a:solidFill>
+                  </a:tcPr>
+                </a:tc>
+              </a:tr>
+              <a:tr h="0">
+                <a:tc>
+                  <a:txBody>
+                    <a:bodyPr/>
+                    <a:lstStyle/>
+                    <a:p>
+                      <a:pPr algn="l" indent="0" marL="0">
+                        <a:buNone/>
+                      </a:pPr>
+                      <a:r>
+                        <a:rPr lang="en-US" sz="1200" dirty="0">
+                          <a:solidFill>
+                            <a:srgbClr val="14202E"/>
+                          </a:solidFill>
+                          <a:latin typeface="Calibri" pitchFamily="34" charset="0"/>
+                          <a:ea typeface="Calibri" pitchFamily="34" charset="-122"/>
+                          <a:cs typeface="Calibri" pitchFamily="34" charset="-120"/>
+                        </a:rPr>
+                        <a:t>ERA</a:t>
+                      </a:r>
+                      <a:endParaRPr lang="en-US" sz="1200" dirty="0">
+                        <a:latin typeface="Calibri" charset="0"/>
+                        <a:ea typeface="Calibri" charset="0"/>
+                        <a:cs typeface="Calibri" charset="0"/>
+                      </a:endParaRPr>
+                    </a:p>
+                  </a:txBody>
+                  <a:tcPr marL="76200" marR="76200" marT="38100" marB="38100" anchor="ctr">
+                    <a:lnL w="9525" cap="flat" cmpd="sng" algn="ctr">
+                      <a:solidFill>
+                        <a:srgbClr val="D9D8D1"/>
+                      </a:solidFill>
+                      <a:prstDash val="solid"/>
+                      <a:round/>
+                      <a:headEnd type="none" w="med" len="med"/>
+                      <a:tailEnd type="none" w="med" len="med"/>
+                    </a:lnL>
+                    <a:lnR w="9525" cap="flat" cmpd="sng" algn="ctr">
+                      <a:solidFill>
+                        <a:srgbClr val="D9D8D1"/>
+                      </a:solidFill>
+                      <a:prstDash val="solid"/>
+                      <a:round/>
+                      <a:headEnd type="none" w="med" len="med"/>
+                      <a:tailEnd type="none" w="med" len="med"/>
+                    </a:lnR>
+                    <a:lnT w="9525" cap="flat" cmpd="sng" algn="ctr">
+                      <a:solidFill>
+                        <a:srgbClr val="D9D8D1"/>
+                      </a:solidFill>
+                      <a:prstDash val="solid"/>
+                      <a:round/>
+                      <a:headEnd type="none" w="med" len="med"/>
+                      <a:tailEnd type="none" w="med" len="med"/>
+                    </a:lnT>
+                    <a:lnB w="9525" cap="flat" cmpd="sng" algn="ctr">
+                      <a:solidFill>
+                        <a:srgbClr val="D9D8D1"/>
+                      </a:solidFill>
+                      <a:prstDash val="solid"/>
+                      <a:round/>
+                      <a:headEnd type="none" w="med" len="med"/>
+                      <a:tailEnd type="none" w="med" len="med"/>
+                    </a:lnB>
+                    <a:solidFill>
+                      <a:srgbClr val="F4F3EF"/>
+                    </a:solidFill>
+                  </a:tcPr>
+                </a:tc>
+                <a:tc>
+                  <a:txBody>
+                    <a:bodyPr/>
+                    <a:lstStyle/>
+                    <a:p>
+                      <a:pPr algn="l" indent="0" marL="0">
+                        <a:buNone/>
+                      </a:pPr>
+                      <a:r>
+                        <a:rPr lang="en-US" sz="1200" dirty="0">
+                          <a:solidFill>
+                            <a:srgbClr val="14202E"/>
+                          </a:solidFill>
+                          <a:latin typeface="Calibri" pitchFamily="34" charset="0"/>
+                          <a:ea typeface="Calibri" pitchFamily="34" charset="-122"/>
+                          <a:cs typeface="Calibri" pitchFamily="34" charset="-120"/>
+                        </a:rPr>
+                        <a:t>Eigensystem Realization Algorithm</a:t>
+                      </a:r>
+                      <a:endParaRPr lang="en-US" sz="1200" dirty="0">
+                        <a:latin typeface="Calibri" charset="0"/>
+                        <a:ea typeface="Calibri" charset="0"/>
+                        <a:cs typeface="Calibri" charset="0"/>
+                      </a:endParaRPr>
+                    </a:p>
+                  </a:txBody>
+                  <a:tcPr marL="76200" marR="76200" marT="38100" marB="38100" anchor="ctr">
+                    <a:lnL w="9525" cap="flat" cmpd="sng" algn="ctr">
+                      <a:solidFill>
+                        <a:srgbClr val="D9D8D1"/>
+                      </a:solidFill>
+                      <a:prstDash val="solid"/>
+                      <a:round/>
+                      <a:headEnd type="none" w="med" len="med"/>
+                      <a:tailEnd type="none" w="med" len="med"/>
+                    </a:lnL>
+                    <a:lnR w="9525" cap="flat" cmpd="sng" algn="ctr">
+                      <a:solidFill>
+                        <a:srgbClr val="D9D8D1"/>
+                      </a:solidFill>
+                      <a:prstDash val="solid"/>
+                      <a:round/>
+                      <a:headEnd type="none" w="med" len="med"/>
+                      <a:tailEnd type="none" w="med" len="med"/>
+                    </a:lnR>
+                    <a:lnT w="9525" cap="flat" cmpd="sng" algn="ctr">
+                      <a:solidFill>
+                        <a:srgbClr val="D9D8D1"/>
+                      </a:solidFill>
+                      <a:prstDash val="solid"/>
+                      <a:round/>
+                      <a:headEnd type="none" w="med" len="med"/>
+                      <a:tailEnd type="none" w="med" len="med"/>
+                    </a:lnT>
+                    <a:lnB w="9525" cap="flat" cmpd="sng" algn="ctr">
+                      <a:solidFill>
+                        <a:srgbClr val="D9D8D1"/>
+                      </a:solidFill>
+                      <a:prstDash val="solid"/>
+                      <a:round/>
+                      <a:headEnd type="none" w="med" len="med"/>
+                      <a:tailEnd type="none" w="med" len="med"/>
+                    </a:lnB>
+                    <a:solidFill>
+                      <a:srgbClr val="F4F3EF"/>
+                    </a:solidFill>
+                  </a:tcPr>
+                </a:tc>
+              </a:tr>
+              <a:tr h="0">
+                <a:tc>
+                  <a:txBody>
+                    <a:bodyPr/>
+                    <a:lstStyle/>
+                    <a:p>
+                      <a:pPr algn="l" indent="0" marL="0">
+                        <a:buNone/>
+                      </a:pPr>
+                      <a:r>
+                        <a:rPr lang="en-US" sz="1200" dirty="0">
+                          <a:solidFill>
+                            <a:srgbClr val="14202E"/>
+                          </a:solidFill>
+                          <a:latin typeface="Calibri" pitchFamily="34" charset="0"/>
+                          <a:ea typeface="Calibri" pitchFamily="34" charset="-122"/>
+                          <a:cs typeface="Calibri" pitchFamily="34" charset="-120"/>
+                        </a:rPr>
+                        <a:t>FFT</a:t>
+                      </a:r>
+                      <a:endParaRPr lang="en-US" sz="1200" dirty="0">
+                        <a:latin typeface="Calibri" charset="0"/>
+                        <a:ea typeface="Calibri" charset="0"/>
+                        <a:cs typeface="Calibri" charset="0"/>
+                      </a:endParaRPr>
+                    </a:p>
+                  </a:txBody>
+                  <a:tcPr marL="76200" marR="76200" marT="38100" marB="38100" anchor="ctr">
+                    <a:lnL w="9525" cap="flat" cmpd="sng" algn="ctr">
+                      <a:solidFill>
+                        <a:srgbClr val="D9D8D1"/>
+                      </a:solidFill>
+                      <a:prstDash val="solid"/>
+                      <a:round/>
+                      <a:headEnd type="none" w="med" len="med"/>
+                      <a:tailEnd type="none" w="med" len="med"/>
+                    </a:lnL>
+                    <a:lnR w="9525" cap="flat" cmpd="sng" algn="ctr">
+                      <a:solidFill>
+                        <a:srgbClr val="D9D8D1"/>
+                      </a:solidFill>
+                      <a:prstDash val="solid"/>
+                      <a:round/>
+                      <a:headEnd type="none" w="med" len="med"/>
+                      <a:tailEnd type="none" w="med" len="med"/>
+                    </a:lnR>
+                    <a:lnT w="9525" cap="flat" cmpd="sng" algn="ctr">
+                      <a:solidFill>
+                        <a:srgbClr val="D9D8D1"/>
+                      </a:solidFill>
+                      <a:prstDash val="solid"/>
+                      <a:round/>
+                      <a:headEnd type="none" w="med" len="med"/>
+                      <a:tailEnd type="none" w="med" len="med"/>
+                    </a:lnT>
+                    <a:lnB w="9525" cap="flat" cmpd="sng" algn="ctr">
+                      <a:solidFill>
+                        <a:srgbClr val="D9D8D1"/>
+                      </a:solidFill>
+                      <a:prstDash val="solid"/>
+                      <a:round/>
+                      <a:headEnd type="none" w="med" len="med"/>
+                      <a:tailEnd type="none" w="med" len="med"/>
+                    </a:lnB>
+                    <a:solidFill>
+                      <a:srgbClr val="F4F3EF"/>
+                    </a:solidFill>
+                  </a:tcPr>
+                </a:tc>
+                <a:tc>
+                  <a:txBody>
+                    <a:bodyPr/>
+                    <a:lstStyle/>
+                    <a:p>
+                      <a:pPr algn="l" indent="0" marL="0">
+                        <a:buNone/>
+                      </a:pPr>
+                      <a:r>
+                        <a:rPr lang="en-US" sz="1200" dirty="0">
+                          <a:solidFill>
+                            <a:srgbClr val="14202E"/>
+                          </a:solidFill>
+                          <a:latin typeface="Calibri" pitchFamily="34" charset="0"/>
+                          <a:ea typeface="Calibri" pitchFamily="34" charset="-122"/>
+                          <a:cs typeface="Calibri" pitchFamily="34" charset="-120"/>
+                        </a:rPr>
+                        <a:t>Schnelle Fourier-Transformation</a:t>
+                      </a:r>
+                      <a:endParaRPr lang="en-US" sz="1200" dirty="0">
+                        <a:latin typeface="Calibri" charset="0"/>
+                        <a:ea typeface="Calibri" charset="0"/>
+                        <a:cs typeface="Calibri" charset="0"/>
+                      </a:endParaRPr>
+                    </a:p>
+                  </a:txBody>
+                  <a:tcPr marL="76200" marR="76200" marT="38100" marB="38100" anchor="ctr">
+                    <a:lnL w="9525" cap="flat" cmpd="sng" algn="ctr">
+                      <a:solidFill>
+                        <a:srgbClr val="D9D8D1"/>
+                      </a:solidFill>
+                      <a:prstDash val="solid"/>
+                      <a:round/>
+                      <a:headEnd type="none" w="med" len="med"/>
+                      <a:tailEnd type="none" w="med" len="med"/>
+                    </a:lnL>
+                    <a:lnR w="9525" cap="flat" cmpd="sng" algn="ctr">
+                      <a:solidFill>
+                        <a:srgbClr val="D9D8D1"/>
+                      </a:solidFill>
+                      <a:prstDash val="solid"/>
+                      <a:round/>
+                      <a:headEnd type="none" w="med" len="med"/>
+                      <a:tailEnd type="none" w="med" len="med"/>
+                    </a:lnR>
+                    <a:lnT w="9525" cap="flat" cmpd="sng" algn="ctr">
+                      <a:solidFill>
+                        <a:srgbClr val="D9D8D1"/>
+                      </a:solidFill>
+                      <a:prstDash val="solid"/>
+                      <a:round/>
+                      <a:headEnd type="none" w="med" len="med"/>
+                      <a:tailEnd type="none" w="med" len="med"/>
+                    </a:lnT>
+                    <a:lnB w="9525" cap="flat" cmpd="sng" algn="ctr">
+                      <a:solidFill>
+                        <a:srgbClr val="D9D8D1"/>
+                      </a:solidFill>
+                      <a:prstDash val="solid"/>
+                      <a:round/>
+                      <a:headEnd type="none" w="med" len="med"/>
+                      <a:tailEnd type="none" w="med" len="med"/>
+                    </a:lnB>
+                    <a:solidFill>
+                      <a:srgbClr val="F4F3EF"/>
+                    </a:solidFill>
+                  </a:tcPr>
+                </a:tc>
+              </a:tr>
+              <a:tr h="0">
+                <a:tc>
+                  <a:txBody>
+                    <a:bodyPr/>
+                    <a:lstStyle/>
+                    <a:p>
+                      <a:pPr algn="l" indent="0" marL="0">
+                        <a:buNone/>
+                      </a:pPr>
+                      <a:r>
+                        <a:rPr lang="en-US" sz="1200" dirty="0">
+                          <a:solidFill>
+                            <a:srgbClr val="14202E"/>
+                          </a:solidFill>
+                          <a:latin typeface="Calibri" pitchFamily="34" charset="0"/>
+                          <a:ea typeface="Calibri" pitchFamily="34" charset="-122"/>
+                          <a:cs typeface="Calibri" pitchFamily="34" charset="-120"/>
+                        </a:rPr>
+                        <a:t>FNET</a:t>
+                      </a:r>
+                      <a:endParaRPr lang="en-US" sz="1200" dirty="0">
+                        <a:latin typeface="Calibri" charset="0"/>
+                        <a:ea typeface="Calibri" charset="0"/>
+                        <a:cs typeface="Calibri" charset="0"/>
+                      </a:endParaRPr>
+                    </a:p>
+                  </a:txBody>
+                  <a:tcPr marL="76200" marR="76200" marT="38100" marB="38100" anchor="ctr">
+                    <a:lnL w="9525" cap="flat" cmpd="sng" algn="ctr">
+                      <a:solidFill>
+                        <a:srgbClr val="D9D8D1"/>
+                      </a:solidFill>
+                      <a:prstDash val="solid"/>
+                      <a:round/>
+                      <a:headEnd type="none" w="med" len="med"/>
+                      <a:tailEnd type="none" w="med" len="med"/>
+                    </a:lnL>
+                    <a:lnR w="9525" cap="flat" cmpd="sng" algn="ctr">
+                      <a:solidFill>
+                        <a:srgbClr val="D9D8D1"/>
+                      </a:solidFill>
+                      <a:prstDash val="solid"/>
+                      <a:round/>
+                      <a:headEnd type="none" w="med" len="med"/>
+                      <a:tailEnd type="none" w="med" len="med"/>
+                    </a:lnR>
+                    <a:lnT w="9525" cap="flat" cmpd="sng" algn="ctr">
+                      <a:solidFill>
+                        <a:srgbClr val="D9D8D1"/>
+                      </a:solidFill>
+                      <a:prstDash val="solid"/>
+                      <a:round/>
+                      <a:headEnd type="none" w="med" len="med"/>
+                      <a:tailEnd type="none" w="med" len="med"/>
+                    </a:lnT>
+                    <a:lnB w="9525" cap="flat" cmpd="sng" algn="ctr">
+                      <a:solidFill>
+                        <a:srgbClr val="D9D8D1"/>
+                      </a:solidFill>
+                      <a:prstDash val="solid"/>
+                      <a:round/>
+                      <a:headEnd type="none" w="med" len="med"/>
+                      <a:tailEnd type="none" w="med" len="med"/>
+                    </a:lnB>
+                    <a:solidFill>
+                      <a:srgbClr val="F4F3EF"/>
+                    </a:solidFill>
+                  </a:tcPr>
+                </a:tc>
+                <a:tc>
+                  <a:txBody>
+                    <a:bodyPr/>
+                    <a:lstStyle/>
+                    <a:p>
+                      <a:pPr algn="l" indent="0" marL="0">
+                        <a:buNone/>
+                      </a:pPr>
+                      <a:r>
+                        <a:rPr lang="en-US" sz="1200" dirty="0">
+                          <a:solidFill>
+                            <a:srgbClr val="14202E"/>
+                          </a:solidFill>
+                          <a:latin typeface="Calibri" pitchFamily="34" charset="0"/>
+                          <a:ea typeface="Calibri" pitchFamily="34" charset="-122"/>
+                          <a:cs typeface="Calibri" pitchFamily="34" charset="-120"/>
+                        </a:rPr>
+                        <a:t>Messnetz für die Netzfrequenz</a:t>
+                      </a:r>
+                      <a:endParaRPr lang="en-US" sz="1200" dirty="0">
+                        <a:latin typeface="Calibri" charset="0"/>
+                        <a:ea typeface="Calibri" charset="0"/>
+                        <a:cs typeface="Calibri" charset="0"/>
+                      </a:endParaRPr>
+                    </a:p>
+                  </a:txBody>
+                  <a:tcPr marL="76200" marR="76200" marT="38100" marB="38100" anchor="ctr">
+                    <a:lnL w="9525" cap="flat" cmpd="sng" algn="ctr">
+                      <a:solidFill>
+                        <a:srgbClr val="D9D8D1"/>
+                      </a:solidFill>
+                      <a:prstDash val="solid"/>
+                      <a:round/>
+                      <a:headEnd type="none" w="med" len="med"/>
+                      <a:tailEnd type="none" w="med" len="med"/>
+                    </a:lnL>
+                    <a:lnR w="9525" cap="flat" cmpd="sng" algn="ctr">
+                      <a:solidFill>
+                        <a:srgbClr val="D9D8D1"/>
+                      </a:solidFill>
+                      <a:prstDash val="solid"/>
+                      <a:round/>
+                      <a:headEnd type="none" w="med" len="med"/>
+                      <a:tailEnd type="none" w="med" len="med"/>
+                    </a:lnR>
+                    <a:lnT w="9525" cap="flat" cmpd="sng" algn="ctr">
+                      <a:solidFill>
+                        <a:srgbClr val="D9D8D1"/>
+                      </a:solidFill>
+                      <a:prstDash val="solid"/>
+                      <a:round/>
+                      <a:headEnd type="none" w="med" len="med"/>
+                      <a:tailEnd type="none" w="med" len="med"/>
+                    </a:lnT>
+                    <a:lnB w="9525" cap="flat" cmpd="sng" algn="ctr">
+                      <a:solidFill>
+                        <a:srgbClr val="D9D8D1"/>
+                      </a:solidFill>
+                      <a:prstDash val="solid"/>
+                      <a:round/>
+                      <a:headEnd type="none" w="med" len="med"/>
+                      <a:tailEnd type="none" w="med" len="med"/>
+                    </a:lnB>
+                    <a:solidFill>
+                      <a:srgbClr val="F4F3EF"/>
+                    </a:solidFill>
+                  </a:tcPr>
+                </a:tc>
+              </a:tr>
+              <a:tr h="0">
+                <a:tc>
+                  <a:txBody>
+                    <a:bodyPr/>
+                    <a:lstStyle/>
+                    <a:p>
+                      <a:pPr algn="l" indent="0" marL="0">
+                        <a:buNone/>
+                      </a:pPr>
+                      <a:r>
+                        <a:rPr lang="en-US" sz="1200" dirty="0">
+                          <a:solidFill>
+                            <a:srgbClr val="14202E"/>
+                          </a:solidFill>
+                          <a:latin typeface="Calibri" pitchFamily="34" charset="0"/>
+                          <a:ea typeface="Calibri" pitchFamily="34" charset="-122"/>
+                          <a:cs typeface="Calibri" pitchFamily="34" charset="-120"/>
+                        </a:rPr>
+                        <a:t>FNN</a:t>
+                      </a:r>
+                      <a:endParaRPr lang="en-US" sz="1200" dirty="0">
+                        <a:latin typeface="Calibri" charset="0"/>
+                        <a:ea typeface="Calibri" charset="0"/>
+                        <a:cs typeface="Calibri" charset="0"/>
+                      </a:endParaRPr>
+                    </a:p>
+                  </a:txBody>
+                  <a:tcPr marL="76200" marR="76200" marT="38100" marB="38100" anchor="ctr">
+                    <a:lnL w="9525" cap="flat" cmpd="sng" algn="ctr">
+                      <a:solidFill>
+                        <a:srgbClr val="D9D8D1"/>
+                      </a:solidFill>
+                      <a:prstDash val="solid"/>
+                      <a:round/>
+                      <a:headEnd type="none" w="med" len="med"/>
+                      <a:tailEnd type="none" w="med" len="med"/>
+                    </a:lnL>
+                    <a:lnR w="9525" cap="flat" cmpd="sng" algn="ctr">
+                      <a:solidFill>
+                        <a:srgbClr val="D9D8D1"/>
+                      </a:solidFill>
+                      <a:prstDash val="solid"/>
+                      <a:round/>
+                      <a:headEnd type="none" w="med" len="med"/>
+                      <a:tailEnd type="none" w="med" len="med"/>
+                    </a:lnR>
+                    <a:lnT w="9525" cap="flat" cmpd="sng" algn="ctr">
+                      <a:solidFill>
+                        <a:srgbClr val="D9D8D1"/>
+                      </a:solidFill>
+                      <a:prstDash val="solid"/>
+                      <a:round/>
+                      <a:headEnd type="none" w="med" len="med"/>
+                      <a:tailEnd type="none" w="med" len="med"/>
+                    </a:lnT>
+                    <a:lnB w="9525" cap="flat" cmpd="sng" algn="ctr">
+                      <a:solidFill>
+                        <a:srgbClr val="D9D8D1"/>
+                      </a:solidFill>
+                      <a:prstDash val="solid"/>
+                      <a:round/>
+                      <a:headEnd type="none" w="med" len="med"/>
+                      <a:tailEnd type="none" w="med" len="med"/>
+                    </a:lnB>
+                    <a:solidFill>
+                      <a:srgbClr val="F4F3EF"/>
+                    </a:solidFill>
+                  </a:tcPr>
+                </a:tc>
+                <a:tc>
+                  <a:txBody>
+                    <a:bodyPr/>
+                    <a:lstStyle/>
+                    <a:p>
+                      <a:pPr algn="l" indent="0" marL="0">
+                        <a:buNone/>
+                      </a:pPr>
+                      <a:r>
+                        <a:rPr lang="en-US" sz="1200" dirty="0">
+                          <a:solidFill>
+                            <a:srgbClr val="14202E"/>
+                          </a:solidFill>
+                          <a:latin typeface="Calibri" pitchFamily="34" charset="0"/>
+                          <a:ea typeface="Calibri" pitchFamily="34" charset="-122"/>
+                          <a:cs typeface="Calibri" pitchFamily="34" charset="-120"/>
+                        </a:rPr>
+                        <a:t>Forum Netztechnik/Netzbetrieb im VDE</a:t>
+                      </a:r>
+                      <a:endParaRPr lang="en-US" sz="1200" dirty="0">
+                        <a:latin typeface="Calibri" charset="0"/>
+                        <a:ea typeface="Calibri" charset="0"/>
+                        <a:cs typeface="Calibri" charset="0"/>
+                      </a:endParaRPr>
+                    </a:p>
+                  </a:txBody>
+                  <a:tcPr marL="76200" marR="76200" marT="38100" marB="38100" anchor="ctr">
+                    <a:lnL w="9525" cap="flat" cmpd="sng" algn="ctr">
+                      <a:solidFill>
+                        <a:srgbClr val="D9D8D1"/>
+                      </a:solidFill>
+                      <a:prstDash val="solid"/>
+                      <a:round/>
+                      <a:headEnd type="none" w="med" len="med"/>
+                      <a:tailEnd type="none" w="med" len="med"/>
+                    </a:lnL>
+                    <a:lnR w="9525" cap="flat" cmpd="sng" algn="ctr">
+                      <a:solidFill>
+                        <a:srgbClr val="D9D8D1"/>
+                      </a:solidFill>
+                      <a:prstDash val="solid"/>
+                      <a:round/>
+                      <a:headEnd type="none" w="med" len="med"/>
+                      <a:tailEnd type="none" w="med" len="med"/>
+                    </a:lnR>
+                    <a:lnT w="9525" cap="flat" cmpd="sng" algn="ctr">
+                      <a:solidFill>
+                        <a:srgbClr val="D9D8D1"/>
+                      </a:solidFill>
+                      <a:prstDash val="solid"/>
+                      <a:round/>
+                      <a:headEnd type="none" w="med" len="med"/>
+                      <a:tailEnd type="none" w="med" len="med"/>
+                    </a:lnT>
+                    <a:lnB w="9525" cap="flat" cmpd="sng" algn="ctr">
+                      <a:solidFill>
+                        <a:srgbClr val="D9D8D1"/>
+                      </a:solidFill>
+                      <a:prstDash val="solid"/>
+                      <a:round/>
+                      <a:headEnd type="none" w="med" len="med"/>
+                      <a:tailEnd type="none" w="med" len="med"/>
+                    </a:lnB>
+                    <a:solidFill>
+                      <a:srgbClr val="F4F3EF"/>
+                    </a:solidFill>
+                  </a:tcPr>
+                </a:tc>
+              </a:tr>
+              <a:tr h="0">
+                <a:tc>
+                  <a:txBody>
+                    <a:bodyPr/>
+                    <a:lstStyle/>
+                    <a:p>
+                      <a:pPr algn="l" indent="0" marL="0">
+                        <a:buNone/>
+                      </a:pPr>
+                      <a:r>
+                        <a:rPr lang="en-US" sz="1200" dirty="0">
+                          <a:solidFill>
+                            <a:srgbClr val="14202E"/>
+                          </a:solidFill>
+                          <a:latin typeface="Calibri" pitchFamily="34" charset="0"/>
+                          <a:ea typeface="Calibri" pitchFamily="34" charset="-122"/>
+                          <a:cs typeface="Calibri" pitchFamily="34" charset="-120"/>
+                        </a:rPr>
+                        <a:t>NIST, StRD</a:t>
+                      </a:r>
+                      <a:endParaRPr lang="en-US" sz="1200" dirty="0">
+                        <a:latin typeface="Calibri" charset="0"/>
+                        <a:ea typeface="Calibri" charset="0"/>
+                        <a:cs typeface="Calibri" charset="0"/>
+                      </a:endParaRPr>
+                    </a:p>
+                  </a:txBody>
+                  <a:tcPr marL="76200" marR="76200" marT="38100" marB="38100" anchor="ctr">
+                    <a:lnL w="9525" cap="flat" cmpd="sng" algn="ctr">
+                      <a:solidFill>
+                        <a:srgbClr val="D9D8D1"/>
+                      </a:solidFill>
+                      <a:prstDash val="solid"/>
+                      <a:round/>
+                      <a:headEnd type="none" w="med" len="med"/>
+                      <a:tailEnd type="none" w="med" len="med"/>
+                    </a:lnL>
+                    <a:lnR w="9525" cap="flat" cmpd="sng" algn="ctr">
+                      <a:solidFill>
+                        <a:srgbClr val="D9D8D1"/>
+                      </a:solidFill>
+                      <a:prstDash val="solid"/>
+                      <a:round/>
+                      <a:headEnd type="none" w="med" len="med"/>
+                      <a:tailEnd type="none" w="med" len="med"/>
+                    </a:lnR>
+                    <a:lnT w="9525" cap="flat" cmpd="sng" algn="ctr">
+                      <a:solidFill>
+                        <a:srgbClr val="D9D8D1"/>
+                      </a:solidFill>
+                      <a:prstDash val="solid"/>
+                      <a:round/>
+                      <a:headEnd type="none" w="med" len="med"/>
+                      <a:tailEnd type="none" w="med" len="med"/>
+                    </a:lnT>
+                    <a:lnB w="9525" cap="flat" cmpd="sng" algn="ctr">
+                      <a:solidFill>
+                        <a:srgbClr val="D9D8D1"/>
+                      </a:solidFill>
+                      <a:prstDash val="solid"/>
+                      <a:round/>
+                      <a:headEnd type="none" w="med" len="med"/>
+                      <a:tailEnd type="none" w="med" len="med"/>
+                    </a:lnB>
+                    <a:solidFill>
+                      <a:srgbClr val="F4F3EF"/>
+                    </a:solidFill>
+                  </a:tcPr>
+                </a:tc>
+                <a:tc>
+                  <a:txBody>
+                    <a:bodyPr/>
+                    <a:lstStyle/>
+                    <a:p>
+                      <a:pPr algn="l" indent="0" marL="0">
+                        <a:buNone/>
+                      </a:pPr>
+                      <a:r>
+                        <a:rPr lang="en-US" sz="1200" dirty="0">
+                          <a:solidFill>
+                            <a:srgbClr val="14202E"/>
+                          </a:solidFill>
+                          <a:latin typeface="Calibri" pitchFamily="34" charset="0"/>
+                          <a:ea typeface="Calibri" pitchFamily="34" charset="-122"/>
+                          <a:cs typeface="Calibri" pitchFamily="34" charset="-120"/>
+                        </a:rPr>
+                        <a:t>US-Normungsinstitut, Referenzdatensätze</a:t>
+                      </a:r>
+                      <a:endParaRPr lang="en-US" sz="1200" dirty="0">
+                        <a:latin typeface="Calibri" charset="0"/>
+                        <a:ea typeface="Calibri" charset="0"/>
+                        <a:cs typeface="Calibri" charset="0"/>
+                      </a:endParaRPr>
+                    </a:p>
+                  </a:txBody>
+                  <a:tcPr marL="76200" marR="76200" marT="38100" marB="38100" anchor="ctr">
+                    <a:lnL w="9525" cap="flat" cmpd="sng" algn="ctr">
+                      <a:solidFill>
+                        <a:srgbClr val="D9D8D1"/>
+                      </a:solidFill>
+                      <a:prstDash val="solid"/>
+                      <a:round/>
+                      <a:headEnd type="none" w="med" len="med"/>
+                      <a:tailEnd type="none" w="med" len="med"/>
+                    </a:lnL>
+                    <a:lnR w="9525" cap="flat" cmpd="sng" algn="ctr">
+                      <a:solidFill>
+                        <a:srgbClr val="D9D8D1"/>
+                      </a:solidFill>
+                      <a:prstDash val="solid"/>
+                      <a:round/>
+                      <a:headEnd type="none" w="med" len="med"/>
+                      <a:tailEnd type="none" w="med" len="med"/>
+                    </a:lnR>
+                    <a:lnT w="9525" cap="flat" cmpd="sng" algn="ctr">
+                      <a:solidFill>
+                        <a:srgbClr val="D9D8D1"/>
+                      </a:solidFill>
+                      <a:prstDash val="solid"/>
+                      <a:round/>
+                      <a:headEnd type="none" w="med" len="med"/>
+                      <a:tailEnd type="none" w="med" len="med"/>
+                    </a:lnT>
+                    <a:lnB w="9525" cap="flat" cmpd="sng" algn="ctr">
+                      <a:solidFill>
+                        <a:srgbClr val="D9D8D1"/>
+                      </a:solidFill>
+                      <a:prstDash val="solid"/>
+                      <a:round/>
+                      <a:headEnd type="none" w="med" len="med"/>
+                      <a:tailEnd type="none" w="med" len="med"/>
+                    </a:lnB>
+                    <a:solidFill>
+                      <a:srgbClr val="F4F3EF"/>
+                    </a:solidFill>
+                  </a:tcPr>
+                </a:tc>
+              </a:tr>
+            </a:tbl>
+          </a:graphicData>
+        </a:graphic>
+      </p:graphicFrame>
+      <p:graphicFrame>
+        <p:nvGraphicFramePr>
+          <p:cNvPr id="43" name="Table 1"/>
+          <p:cNvGraphicFramePr>
+            <a:graphicFrameLocks noGrp="1"/>
+          </p:cNvGraphicFramePr>
+          <p:nvPr>
+            <p:extLst>
+              <p:ext uri="{D42A27DB-BD31-4B8C-83A1-F6EECF244321}">
+                <p14:modId xmlns:p14="http://schemas.microsoft.com/office/powerpoint/2010/main" val="1579011935"/>
+              </p:ext>
+            </p:extLst>
+          </p:nvPr>
+        </p:nvGraphicFramePr>
+        <p:xfrm>
+          <a:off x="6248400" y="1879600"/>
+          <a:ext cx="5130800" cy="914400"/>
+        </p:xfrm>
+        <a:graphic>
+          <a:graphicData uri="http://schemas.openxmlformats.org/drawingml/2006/table">
+            <a:tbl>
+              <a:tblPr/>
+              <a:tblGrid>
+                <a:gridCol w="1435100"/>
+                <a:gridCol w="3695700"/>
+              </a:tblGrid>
+              <a:tr h="0">
+                <a:tc>
+                  <a:txBody>
+                    <a:bodyPr/>
+                    <a:lstStyle/>
+                    <a:p>
+                      <a:pPr algn="l" indent="0" marL="0">
+                        <a:buNone/>
+                      </a:pPr>
+                      <a:r>
+                        <a:rPr lang="en-US" sz="1200" b="1" dirty="0">
+                          <a:solidFill>
+                            <a:srgbClr val="14202E"/>
+                          </a:solidFill>
+                          <a:latin typeface="Calibri" pitchFamily="34" charset="0"/>
+                          <a:ea typeface="Calibri" pitchFamily="34" charset="-122"/>
+                          <a:cs typeface="Calibri" pitchFamily="34" charset="-120"/>
+                        </a:rPr>
+                        <a:t>Kürzel</a:t>
+                      </a:r>
+                      <a:endParaRPr lang="en-US" sz="1200" dirty="0">
+                        <a:latin typeface="Calibri" charset="0"/>
+                        <a:ea typeface="Calibri" charset="0"/>
+                        <a:cs typeface="Calibri" charset="0"/>
+                      </a:endParaRPr>
+                    </a:p>
+                  </a:txBody>
+                  <a:tcPr marL="76200" marR="76200" marT="38100" marB="38100" anchor="ctr">
+                    <a:lnL w="9525" cap="flat" cmpd="sng" algn="ctr">
+                      <a:solidFill>
+                        <a:srgbClr val="D9D8D1"/>
+                      </a:solidFill>
+                      <a:prstDash val="solid"/>
+                      <a:round/>
+                      <a:headEnd type="none" w="med" len="med"/>
+                      <a:tailEnd type="none" w="med" len="med"/>
+                    </a:lnL>
+                    <a:lnR w="9525" cap="flat" cmpd="sng" algn="ctr">
+                      <a:solidFill>
+                        <a:srgbClr val="D9D8D1"/>
+                      </a:solidFill>
+                      <a:prstDash val="solid"/>
+                      <a:round/>
+                      <a:headEnd type="none" w="med" len="med"/>
+                      <a:tailEnd type="none" w="med" len="med"/>
+                    </a:lnR>
+                    <a:lnT w="9525" cap="flat" cmpd="sng" algn="ctr">
+                      <a:solidFill>
+                        <a:srgbClr val="D9D8D1"/>
+                      </a:solidFill>
+                      <a:prstDash val="solid"/>
+                      <a:round/>
+                      <a:headEnd type="none" w="med" len="med"/>
+                      <a:tailEnd type="none" w="med" len="med"/>
+                    </a:lnT>
+                    <a:lnB w="9525" cap="flat" cmpd="sng" algn="ctr">
+                      <a:solidFill>
+                        <a:srgbClr val="D9D8D1"/>
+                      </a:solidFill>
+                      <a:prstDash val="solid"/>
+                      <a:round/>
+                      <a:headEnd type="none" w="med" len="med"/>
+                      <a:tailEnd type="none" w="med" len="med"/>
+                    </a:lnB>
+                    <a:solidFill>
+                      <a:srgbClr val="E9E8E2"/>
+                    </a:solidFill>
+                  </a:tcPr>
+                </a:tc>
+                <a:tc>
+                  <a:txBody>
+                    <a:bodyPr/>
+                    <a:lstStyle/>
+                    <a:p>
+                      <a:pPr algn="l" indent="0" marL="0">
+                        <a:buNone/>
+                      </a:pPr>
+                      <a:r>
+                        <a:rPr lang="en-US" sz="1200" b="1" dirty="0">
+                          <a:solidFill>
+                            <a:srgbClr val="14202E"/>
+                          </a:solidFill>
+                          <a:latin typeface="Calibri" pitchFamily="34" charset="0"/>
+                          <a:ea typeface="Calibri" pitchFamily="34" charset="-122"/>
+                          <a:cs typeface="Calibri" pitchFamily="34" charset="-120"/>
+                        </a:rPr>
+                        <a:t>Bedeutung</a:t>
+                      </a:r>
+                      <a:endParaRPr lang="en-US" sz="1200" dirty="0">
+                        <a:latin typeface="Calibri" charset="0"/>
+                        <a:ea typeface="Calibri" charset="0"/>
+                        <a:cs typeface="Calibri" charset="0"/>
+                      </a:endParaRPr>
+                    </a:p>
+                  </a:txBody>
+                  <a:tcPr marL="76200" marR="76200" marT="38100" marB="38100" anchor="ctr">
+                    <a:lnL w="9525" cap="flat" cmpd="sng" algn="ctr">
+                      <a:solidFill>
+                        <a:srgbClr val="D9D8D1"/>
+                      </a:solidFill>
+                      <a:prstDash val="solid"/>
+                      <a:round/>
+                      <a:headEnd type="none" w="med" len="med"/>
+                      <a:tailEnd type="none" w="med" len="med"/>
+                    </a:lnL>
+                    <a:lnR w="9525" cap="flat" cmpd="sng" algn="ctr">
+                      <a:solidFill>
+                        <a:srgbClr val="D9D8D1"/>
+                      </a:solidFill>
+                      <a:prstDash val="solid"/>
+                      <a:round/>
+                      <a:headEnd type="none" w="med" len="med"/>
+                      <a:tailEnd type="none" w="med" len="med"/>
+                    </a:lnR>
+                    <a:lnT w="9525" cap="flat" cmpd="sng" algn="ctr">
+                      <a:solidFill>
+                        <a:srgbClr val="D9D8D1"/>
+                      </a:solidFill>
+                      <a:prstDash val="solid"/>
+                      <a:round/>
+                      <a:headEnd type="none" w="med" len="med"/>
+                      <a:tailEnd type="none" w="med" len="med"/>
+                    </a:lnT>
+                    <a:lnB w="9525" cap="flat" cmpd="sng" algn="ctr">
+                      <a:solidFill>
+                        <a:srgbClr val="D9D8D1"/>
+                      </a:solidFill>
+                      <a:prstDash val="solid"/>
+                      <a:round/>
+                      <a:headEnd type="none" w="med" len="med"/>
+                      <a:tailEnd type="none" w="med" len="med"/>
+                    </a:lnB>
+                    <a:solidFill>
+                      <a:srgbClr val="E9E8E2"/>
+                    </a:solidFill>
+                  </a:tcPr>
+                </a:tc>
+              </a:tr>
+              <a:tr h="0">
+                <a:tc>
+                  <a:txBody>
+                    <a:bodyPr/>
+                    <a:lstStyle/>
+                    <a:p>
+                      <a:pPr algn="l" indent="0" marL="0">
+                        <a:buNone/>
+                      </a:pPr>
+                      <a:r>
+                        <a:rPr lang="en-US" sz="1200" dirty="0">
+                          <a:solidFill>
+                            <a:srgbClr val="14202E"/>
+                          </a:solidFill>
+                          <a:latin typeface="Calibri" pitchFamily="34" charset="0"/>
+                          <a:ea typeface="Calibri" pitchFamily="34" charset="-122"/>
+                          <a:cs typeface="Calibri" pitchFamily="34" charset="-120"/>
+                        </a:rPr>
+                        <a:t>p1</a:t>
+                      </a:r>
+                      <a:endParaRPr lang="en-US" sz="1200" dirty="0">
+                        <a:latin typeface="Calibri" charset="0"/>
+                        <a:ea typeface="Calibri" charset="0"/>
+                        <a:cs typeface="Calibri" charset="0"/>
+                      </a:endParaRPr>
+                    </a:p>
+                  </a:txBody>
+                  <a:tcPr marL="76200" marR="76200" marT="38100" marB="38100" anchor="ctr">
+                    <a:lnL w="9525" cap="flat" cmpd="sng" algn="ctr">
+                      <a:solidFill>
+                        <a:srgbClr val="D9D8D1"/>
+                      </a:solidFill>
+                      <a:prstDash val="solid"/>
+                      <a:round/>
+                      <a:headEnd type="none" w="med" len="med"/>
+                      <a:tailEnd type="none" w="med" len="med"/>
+                    </a:lnL>
+                    <a:lnR w="9525" cap="flat" cmpd="sng" algn="ctr">
+                      <a:solidFill>
+                        <a:srgbClr val="D9D8D1"/>
+                      </a:solidFill>
+                      <a:prstDash val="solid"/>
+                      <a:round/>
+                      <a:headEnd type="none" w="med" len="med"/>
+                      <a:tailEnd type="none" w="med" len="med"/>
+                    </a:lnR>
+                    <a:lnT w="9525" cap="flat" cmpd="sng" algn="ctr">
+                      <a:solidFill>
+                        <a:srgbClr val="D9D8D1"/>
+                      </a:solidFill>
+                      <a:prstDash val="solid"/>
+                      <a:round/>
+                      <a:headEnd type="none" w="med" len="med"/>
+                      <a:tailEnd type="none" w="med" len="med"/>
+                    </a:lnT>
+                    <a:lnB w="9525" cap="flat" cmpd="sng" algn="ctr">
+                      <a:solidFill>
+                        <a:srgbClr val="D9D8D1"/>
+                      </a:solidFill>
+                      <a:prstDash val="solid"/>
+                      <a:round/>
+                      <a:headEnd type="none" w="med" len="med"/>
+                      <a:tailEnd type="none" w="med" len="med"/>
+                    </a:lnB>
+                    <a:solidFill>
+                      <a:srgbClr val="F4F3EF"/>
+                    </a:solidFill>
+                  </a:tcPr>
+                </a:tc>
+                <a:tc>
+                  <a:txBody>
+                    <a:bodyPr/>
+                    <a:lstStyle/>
+                    <a:p>
+                      <a:pPr algn="l" indent="0" marL="0">
+                        <a:buNone/>
+                      </a:pPr>
+                      <a:r>
+                        <a:rPr lang="en-US" sz="1200" dirty="0">
+                          <a:solidFill>
+                            <a:srgbClr val="14202E"/>
+                          </a:solidFill>
+                          <a:latin typeface="Calibri" pitchFamily="34" charset="0"/>
+                          <a:ea typeface="Calibri" pitchFamily="34" charset="-122"/>
+                          <a:cs typeface="Calibri" pitchFamily="34" charset="-120"/>
+                        </a:rPr>
+                        <a:t>Mitsystem-Wirkleistung der Grundschwingung</a:t>
+                      </a:r>
+                      <a:endParaRPr lang="en-US" sz="1200" dirty="0">
+                        <a:latin typeface="Calibri" charset="0"/>
+                        <a:ea typeface="Calibri" charset="0"/>
+                        <a:cs typeface="Calibri" charset="0"/>
+                      </a:endParaRPr>
+                    </a:p>
+                  </a:txBody>
+                  <a:tcPr marL="76200" marR="76200" marT="38100" marB="38100" anchor="ctr">
+                    <a:lnL w="9525" cap="flat" cmpd="sng" algn="ctr">
+                      <a:solidFill>
+                        <a:srgbClr val="D9D8D1"/>
+                      </a:solidFill>
+                      <a:prstDash val="solid"/>
+                      <a:round/>
+                      <a:headEnd type="none" w="med" len="med"/>
+                      <a:tailEnd type="none" w="med" len="med"/>
+                    </a:lnL>
+                    <a:lnR w="9525" cap="flat" cmpd="sng" algn="ctr">
+                      <a:solidFill>
+                        <a:srgbClr val="D9D8D1"/>
+                      </a:solidFill>
+                      <a:prstDash val="solid"/>
+                      <a:round/>
+                      <a:headEnd type="none" w="med" len="med"/>
+                      <a:tailEnd type="none" w="med" len="med"/>
+                    </a:lnR>
+                    <a:lnT w="9525" cap="flat" cmpd="sng" algn="ctr">
+                      <a:solidFill>
+                        <a:srgbClr val="D9D8D1"/>
+                      </a:solidFill>
+                      <a:prstDash val="solid"/>
+                      <a:round/>
+                      <a:headEnd type="none" w="med" len="med"/>
+                      <a:tailEnd type="none" w="med" len="med"/>
+                    </a:lnT>
+                    <a:lnB w="9525" cap="flat" cmpd="sng" algn="ctr">
+                      <a:solidFill>
+                        <a:srgbClr val="D9D8D1"/>
+                      </a:solidFill>
+                      <a:prstDash val="solid"/>
+                      <a:round/>
+                      <a:headEnd type="none" w="med" len="med"/>
+                      <a:tailEnd type="none" w="med" len="med"/>
+                    </a:lnB>
+                    <a:solidFill>
+                      <a:srgbClr val="F4F3EF"/>
+                    </a:solidFill>
+                  </a:tcPr>
+                </a:tc>
+              </a:tr>
+              <a:tr h="0">
+                <a:tc>
+                  <a:txBody>
+                    <a:bodyPr/>
+                    <a:lstStyle/>
+                    <a:p>
+                      <a:pPr algn="l" indent="0" marL="0">
+                        <a:buNone/>
+                      </a:pPr>
+                      <a:r>
+                        <a:rPr lang="en-US" sz="1200" dirty="0">
+                          <a:solidFill>
+                            <a:srgbClr val="14202E"/>
+                          </a:solidFill>
+                          <a:latin typeface="Calibri" pitchFamily="34" charset="0"/>
+                          <a:ea typeface="Calibri" pitchFamily="34" charset="-122"/>
+                          <a:cs typeface="Calibri" pitchFamily="34" charset="-120"/>
+                        </a:rPr>
+                        <a:t>PEmax</a:t>
+                      </a:r>
+                      <a:endParaRPr lang="en-US" sz="1200" dirty="0">
+                        <a:latin typeface="Calibri" charset="0"/>
+                        <a:ea typeface="Calibri" charset="0"/>
+                        <a:cs typeface="Calibri" charset="0"/>
+                      </a:endParaRPr>
+                    </a:p>
+                  </a:txBody>
+                  <a:tcPr marL="76200" marR="76200" marT="38100" marB="38100" anchor="ctr">
+                    <a:lnL w="9525" cap="flat" cmpd="sng" algn="ctr">
+                      <a:solidFill>
+                        <a:srgbClr val="D9D8D1"/>
+                      </a:solidFill>
+                      <a:prstDash val="solid"/>
+                      <a:round/>
+                      <a:headEnd type="none" w="med" len="med"/>
+                      <a:tailEnd type="none" w="med" len="med"/>
+                    </a:lnL>
+                    <a:lnR w="9525" cap="flat" cmpd="sng" algn="ctr">
+                      <a:solidFill>
+                        <a:srgbClr val="D9D8D1"/>
+                      </a:solidFill>
+                      <a:prstDash val="solid"/>
+                      <a:round/>
+                      <a:headEnd type="none" w="med" len="med"/>
+                      <a:tailEnd type="none" w="med" len="med"/>
+                    </a:lnR>
+                    <a:lnT w="9525" cap="flat" cmpd="sng" algn="ctr">
+                      <a:solidFill>
+                        <a:srgbClr val="D9D8D1"/>
+                      </a:solidFill>
+                      <a:prstDash val="solid"/>
+                      <a:round/>
+                      <a:headEnd type="none" w="med" len="med"/>
+                      <a:tailEnd type="none" w="med" len="med"/>
+                    </a:lnT>
+                    <a:lnB w="9525" cap="flat" cmpd="sng" algn="ctr">
+                      <a:solidFill>
+                        <a:srgbClr val="D9D8D1"/>
+                      </a:solidFill>
+                      <a:prstDash val="solid"/>
+                      <a:round/>
+                      <a:headEnd type="none" w="med" len="med"/>
+                      <a:tailEnd type="none" w="med" len="med"/>
+                    </a:lnB>
+                    <a:solidFill>
+                      <a:srgbClr val="F4F3EF"/>
+                    </a:solidFill>
+                  </a:tcPr>
+                </a:tc>
+                <a:tc>
+                  <a:txBody>
+                    <a:bodyPr/>
+                    <a:lstStyle/>
+                    <a:p>
+                      <a:pPr algn="l" indent="0" marL="0">
+                        <a:buNone/>
+                      </a:pPr>
+                      <a:r>
+                        <a:rPr lang="en-US" sz="1200" dirty="0">
+                          <a:solidFill>
+                            <a:srgbClr val="14202E"/>
+                          </a:solidFill>
+                          <a:latin typeface="Calibri" pitchFamily="34" charset="0"/>
+                          <a:ea typeface="Calibri" pitchFamily="34" charset="-122"/>
+                          <a:cs typeface="Calibri" pitchFamily="34" charset="-120"/>
+                        </a:rPr>
+                        <a:t>Maximale Wirkleistung der Einheit</a:t>
+                      </a:r>
+                      <a:endParaRPr lang="en-US" sz="1200" dirty="0">
+                        <a:latin typeface="Calibri" charset="0"/>
+                        <a:ea typeface="Calibri" charset="0"/>
+                        <a:cs typeface="Calibri" charset="0"/>
+                      </a:endParaRPr>
+                    </a:p>
+                  </a:txBody>
+                  <a:tcPr marL="76200" marR="76200" marT="38100" marB="38100" anchor="ctr">
+                    <a:lnL w="9525" cap="flat" cmpd="sng" algn="ctr">
+                      <a:solidFill>
+                        <a:srgbClr val="D9D8D1"/>
+                      </a:solidFill>
+                      <a:prstDash val="solid"/>
+                      <a:round/>
+                      <a:headEnd type="none" w="med" len="med"/>
+                      <a:tailEnd type="none" w="med" len="med"/>
+                    </a:lnL>
+                    <a:lnR w="9525" cap="flat" cmpd="sng" algn="ctr">
+                      <a:solidFill>
+                        <a:srgbClr val="D9D8D1"/>
+                      </a:solidFill>
+                      <a:prstDash val="solid"/>
+                      <a:round/>
+                      <a:headEnd type="none" w="med" len="med"/>
+                      <a:tailEnd type="none" w="med" len="med"/>
+                    </a:lnR>
+                    <a:lnT w="9525" cap="flat" cmpd="sng" algn="ctr">
+                      <a:solidFill>
+                        <a:srgbClr val="D9D8D1"/>
+                      </a:solidFill>
+                      <a:prstDash val="solid"/>
+                      <a:round/>
+                      <a:headEnd type="none" w="med" len="med"/>
+                      <a:tailEnd type="none" w="med" len="med"/>
+                    </a:lnT>
+                    <a:lnB w="9525" cap="flat" cmpd="sng" algn="ctr">
+                      <a:solidFill>
+                        <a:srgbClr val="D9D8D1"/>
+                      </a:solidFill>
+                      <a:prstDash val="solid"/>
+                      <a:round/>
+                      <a:headEnd type="none" w="med" len="med"/>
+                      <a:tailEnd type="none" w="med" len="med"/>
+                    </a:lnB>
+                    <a:solidFill>
+                      <a:srgbClr val="F4F3EF"/>
+                    </a:solidFill>
+                  </a:tcPr>
+                </a:tc>
+              </a:tr>
+              <a:tr h="0">
+                <a:tc>
+                  <a:txBody>
+                    <a:bodyPr/>
+                    <a:lstStyle/>
+                    <a:p>
+                      <a:pPr algn="l" indent="0" marL="0">
+                        <a:buNone/>
+                      </a:pPr>
+                      <a:r>
+                        <a:rPr lang="en-US" sz="1200" dirty="0">
+                          <a:solidFill>
+                            <a:srgbClr val="14202E"/>
+                          </a:solidFill>
+                          <a:latin typeface="Calibri" pitchFamily="34" charset="0"/>
+                          <a:ea typeface="Calibri" pitchFamily="34" charset="-122"/>
+                          <a:cs typeface="Calibri" pitchFamily="34" charset="-120"/>
+                        </a:rPr>
+                        <a:t>P_pos</a:t>
+                      </a:r>
+                      <a:endParaRPr lang="en-US" sz="1200" dirty="0">
+                        <a:latin typeface="Calibri" charset="0"/>
+                        <a:ea typeface="Calibri" charset="0"/>
+                        <a:cs typeface="Calibri" charset="0"/>
+                      </a:endParaRPr>
+                    </a:p>
+                  </a:txBody>
+                  <a:tcPr marL="76200" marR="76200" marT="38100" marB="38100" anchor="ctr">
+                    <a:lnL w="9525" cap="flat" cmpd="sng" algn="ctr">
+                      <a:solidFill>
+                        <a:srgbClr val="D9D8D1"/>
+                      </a:solidFill>
+                      <a:prstDash val="solid"/>
+                      <a:round/>
+                      <a:headEnd type="none" w="med" len="med"/>
+                      <a:tailEnd type="none" w="med" len="med"/>
+                    </a:lnL>
+                    <a:lnR w="9525" cap="flat" cmpd="sng" algn="ctr">
+                      <a:solidFill>
+                        <a:srgbClr val="D9D8D1"/>
+                      </a:solidFill>
+                      <a:prstDash val="solid"/>
+                      <a:round/>
+                      <a:headEnd type="none" w="med" len="med"/>
+                      <a:tailEnd type="none" w="med" len="med"/>
+                    </a:lnR>
+                    <a:lnT w="9525" cap="flat" cmpd="sng" algn="ctr">
+                      <a:solidFill>
+                        <a:srgbClr val="D9D8D1"/>
+                      </a:solidFill>
+                      <a:prstDash val="solid"/>
+                      <a:round/>
+                      <a:headEnd type="none" w="med" len="med"/>
+                      <a:tailEnd type="none" w="med" len="med"/>
+                    </a:lnT>
+                    <a:lnB w="9525" cap="flat" cmpd="sng" algn="ctr">
+                      <a:solidFill>
+                        <a:srgbClr val="D9D8D1"/>
+                      </a:solidFill>
+                      <a:prstDash val="solid"/>
+                      <a:round/>
+                      <a:headEnd type="none" w="med" len="med"/>
+                      <a:tailEnd type="none" w="med" len="med"/>
+                    </a:lnB>
+                    <a:solidFill>
+                      <a:srgbClr val="F4F3EF"/>
+                    </a:solidFill>
+                  </a:tcPr>
+                </a:tc>
+                <a:tc>
+                  <a:txBody>
+                    <a:bodyPr/>
+                    <a:lstStyle/>
+                    <a:p>
+                      <a:pPr algn="l" indent="0" marL="0">
+                        <a:buNone/>
+                      </a:pPr>
+                      <a:r>
+                        <a:rPr lang="en-US" sz="1200" dirty="0">
+                          <a:solidFill>
+                            <a:srgbClr val="14202E"/>
+                          </a:solidFill>
+                          <a:latin typeface="Calibri" pitchFamily="34" charset="0"/>
+                          <a:ea typeface="Calibri" pitchFamily="34" charset="-122"/>
+                          <a:cs typeface="Calibri" pitchFamily="34" charset="-120"/>
+                        </a:rPr>
+                        <a:t>Leistungskanal der Messdatei</a:t>
+                      </a:r>
+                      <a:endParaRPr lang="en-US" sz="1200" dirty="0">
+                        <a:latin typeface="Calibri" charset="0"/>
+                        <a:ea typeface="Calibri" charset="0"/>
+                        <a:cs typeface="Calibri" charset="0"/>
+                      </a:endParaRPr>
+                    </a:p>
+                  </a:txBody>
+                  <a:tcPr marL="76200" marR="76200" marT="38100" marB="38100" anchor="ctr">
+                    <a:lnL w="9525" cap="flat" cmpd="sng" algn="ctr">
+                      <a:solidFill>
+                        <a:srgbClr val="D9D8D1"/>
+                      </a:solidFill>
+                      <a:prstDash val="solid"/>
+                      <a:round/>
+                      <a:headEnd type="none" w="med" len="med"/>
+                      <a:tailEnd type="none" w="med" len="med"/>
+                    </a:lnL>
+                    <a:lnR w="9525" cap="flat" cmpd="sng" algn="ctr">
+                      <a:solidFill>
+                        <a:srgbClr val="D9D8D1"/>
+                      </a:solidFill>
+                      <a:prstDash val="solid"/>
+                      <a:round/>
+                      <a:headEnd type="none" w="med" len="med"/>
+                      <a:tailEnd type="none" w="med" len="med"/>
+                    </a:lnR>
+                    <a:lnT w="9525" cap="flat" cmpd="sng" algn="ctr">
+                      <a:solidFill>
+                        <a:srgbClr val="D9D8D1"/>
+                      </a:solidFill>
+                      <a:prstDash val="solid"/>
+                      <a:round/>
+                      <a:headEnd type="none" w="med" len="med"/>
+                      <a:tailEnd type="none" w="med" len="med"/>
+                    </a:lnT>
+                    <a:lnB w="9525" cap="flat" cmpd="sng" algn="ctr">
+                      <a:solidFill>
+                        <a:srgbClr val="D9D8D1"/>
+                      </a:solidFill>
+                      <a:prstDash val="solid"/>
+                      <a:round/>
+                      <a:headEnd type="none" w="med" len="med"/>
+                      <a:tailEnd type="none" w="med" len="med"/>
+                    </a:lnB>
+                    <a:solidFill>
+                      <a:srgbClr val="F4F3EF"/>
+                    </a:solidFill>
+                  </a:tcPr>
+                </a:tc>
+              </a:tr>
+              <a:tr h="0">
+                <a:tc>
+                  <a:txBody>
+                    <a:bodyPr/>
+                    <a:lstStyle/>
+                    <a:p>
+                      <a:pPr algn="l" indent="0" marL="0">
+                        <a:buNone/>
+                      </a:pPr>
+                      <a:r>
+                        <a:rPr lang="en-US" sz="1200" dirty="0">
+                          <a:solidFill>
+                            <a:srgbClr val="14202E"/>
+                          </a:solidFill>
+                          <a:latin typeface="Calibri" pitchFamily="34" charset="0"/>
+                          <a:ea typeface="Calibri" pitchFamily="34" charset="-122"/>
+                          <a:cs typeface="Calibri" pitchFamily="34" charset="-120"/>
+                        </a:rPr>
+                        <a:t>RMS, RMSE</a:t>
+                      </a:r>
+                      <a:endParaRPr lang="en-US" sz="1200" dirty="0">
+                        <a:latin typeface="Calibri" charset="0"/>
+                        <a:ea typeface="Calibri" charset="0"/>
+                        <a:cs typeface="Calibri" charset="0"/>
+                      </a:endParaRPr>
+                    </a:p>
+                  </a:txBody>
+                  <a:tcPr marL="76200" marR="76200" marT="38100" marB="38100" anchor="ctr">
+                    <a:lnL w="9525" cap="flat" cmpd="sng" algn="ctr">
+                      <a:solidFill>
+                        <a:srgbClr val="D9D8D1"/>
+                      </a:solidFill>
+                      <a:prstDash val="solid"/>
+                      <a:round/>
+                      <a:headEnd type="none" w="med" len="med"/>
+                      <a:tailEnd type="none" w="med" len="med"/>
+                    </a:lnL>
+                    <a:lnR w="9525" cap="flat" cmpd="sng" algn="ctr">
+                      <a:solidFill>
+                        <a:srgbClr val="D9D8D1"/>
+                      </a:solidFill>
+                      <a:prstDash val="solid"/>
+                      <a:round/>
+                      <a:headEnd type="none" w="med" len="med"/>
+                      <a:tailEnd type="none" w="med" len="med"/>
+                    </a:lnR>
+                    <a:lnT w="9525" cap="flat" cmpd="sng" algn="ctr">
+                      <a:solidFill>
+                        <a:srgbClr val="D9D8D1"/>
+                      </a:solidFill>
+                      <a:prstDash val="solid"/>
+                      <a:round/>
+                      <a:headEnd type="none" w="med" len="med"/>
+                      <a:tailEnd type="none" w="med" len="med"/>
+                    </a:lnT>
+                    <a:lnB w="9525" cap="flat" cmpd="sng" algn="ctr">
+                      <a:solidFill>
+                        <a:srgbClr val="D9D8D1"/>
+                      </a:solidFill>
+                      <a:prstDash val="solid"/>
+                      <a:round/>
+                      <a:headEnd type="none" w="med" len="med"/>
+                      <a:tailEnd type="none" w="med" len="med"/>
+                    </a:lnB>
+                    <a:solidFill>
+                      <a:srgbClr val="F4F3EF"/>
+                    </a:solidFill>
+                  </a:tcPr>
+                </a:tc>
+                <a:tc>
+                  <a:txBody>
+                    <a:bodyPr/>
+                    <a:lstStyle/>
+                    <a:p>
+                      <a:pPr algn="l" indent="0" marL="0">
+                        <a:buNone/>
+                      </a:pPr>
+                      <a:r>
+                        <a:rPr lang="en-US" sz="1200" dirty="0">
+                          <a:solidFill>
+                            <a:srgbClr val="14202E"/>
+                          </a:solidFill>
+                          <a:latin typeface="Calibri" pitchFamily="34" charset="0"/>
+                          <a:ea typeface="Calibri" pitchFamily="34" charset="-122"/>
+                          <a:cs typeface="Calibri" pitchFamily="34" charset="-120"/>
+                        </a:rPr>
+                        <a:t>Effektivwert, Wurzel des mittleren Fehlerquadrats</a:t>
+                      </a:r>
+                      <a:endParaRPr lang="en-US" sz="1200" dirty="0">
+                        <a:latin typeface="Calibri" charset="0"/>
+                        <a:ea typeface="Calibri" charset="0"/>
+                        <a:cs typeface="Calibri" charset="0"/>
+                      </a:endParaRPr>
+                    </a:p>
+                  </a:txBody>
+                  <a:tcPr marL="76200" marR="76200" marT="38100" marB="38100" anchor="ctr">
+                    <a:lnL w="9525" cap="flat" cmpd="sng" algn="ctr">
+                      <a:solidFill>
+                        <a:srgbClr val="D9D8D1"/>
+                      </a:solidFill>
+                      <a:prstDash val="solid"/>
+                      <a:round/>
+                      <a:headEnd type="none" w="med" len="med"/>
+                      <a:tailEnd type="none" w="med" len="med"/>
+                    </a:lnL>
+                    <a:lnR w="9525" cap="flat" cmpd="sng" algn="ctr">
+                      <a:solidFill>
+                        <a:srgbClr val="D9D8D1"/>
+                      </a:solidFill>
+                      <a:prstDash val="solid"/>
+                      <a:round/>
+                      <a:headEnd type="none" w="med" len="med"/>
+                      <a:tailEnd type="none" w="med" len="med"/>
+                    </a:lnR>
+                    <a:lnT w="9525" cap="flat" cmpd="sng" algn="ctr">
+                      <a:solidFill>
+                        <a:srgbClr val="D9D8D1"/>
+                      </a:solidFill>
+                      <a:prstDash val="solid"/>
+                      <a:round/>
+                      <a:headEnd type="none" w="med" len="med"/>
+                      <a:tailEnd type="none" w="med" len="med"/>
+                    </a:lnT>
+                    <a:lnB w="9525" cap="flat" cmpd="sng" algn="ctr">
+                      <a:solidFill>
+                        <a:srgbClr val="D9D8D1"/>
+                      </a:solidFill>
+                      <a:prstDash val="solid"/>
+                      <a:round/>
+                      <a:headEnd type="none" w="med" len="med"/>
+                      <a:tailEnd type="none" w="med" len="med"/>
+                    </a:lnB>
+                    <a:solidFill>
+                      <a:srgbClr val="F4F3EF"/>
+                    </a:solidFill>
+                  </a:tcPr>
+                </a:tc>
+              </a:tr>
+              <a:tr h="0">
+                <a:tc>
+                  <a:txBody>
+                    <a:bodyPr/>
+                    <a:lstStyle/>
+                    <a:p>
+                      <a:pPr algn="l" indent="0" marL="0">
+                        <a:buNone/>
+                      </a:pPr>
+                      <a:r>
+                        <a:rPr lang="en-US" sz="1200" dirty="0">
+                          <a:solidFill>
+                            <a:srgbClr val="14202E"/>
+                          </a:solidFill>
+                          <a:latin typeface="Calibri" pitchFamily="34" charset="0"/>
+                          <a:ea typeface="Calibri" pitchFamily="34" charset="-122"/>
+                          <a:cs typeface="Calibri" pitchFamily="34" charset="-120"/>
+                        </a:rPr>
+                        <a:t>SCR</a:t>
+                      </a:r>
+                      <a:endParaRPr lang="en-US" sz="1200" dirty="0">
+                        <a:latin typeface="Calibri" charset="0"/>
+                        <a:ea typeface="Calibri" charset="0"/>
+                        <a:cs typeface="Calibri" charset="0"/>
+                      </a:endParaRPr>
+                    </a:p>
+                  </a:txBody>
+                  <a:tcPr marL="76200" marR="76200" marT="38100" marB="38100" anchor="ctr">
+                    <a:lnL w="9525" cap="flat" cmpd="sng" algn="ctr">
+                      <a:solidFill>
+                        <a:srgbClr val="D9D8D1"/>
+                      </a:solidFill>
+                      <a:prstDash val="solid"/>
+                      <a:round/>
+                      <a:headEnd type="none" w="med" len="med"/>
+                      <a:tailEnd type="none" w="med" len="med"/>
+                    </a:lnL>
+                    <a:lnR w="9525" cap="flat" cmpd="sng" algn="ctr">
+                      <a:solidFill>
+                        <a:srgbClr val="D9D8D1"/>
+                      </a:solidFill>
+                      <a:prstDash val="solid"/>
+                      <a:round/>
+                      <a:headEnd type="none" w="med" len="med"/>
+                      <a:tailEnd type="none" w="med" len="med"/>
+                    </a:lnR>
+                    <a:lnT w="9525" cap="flat" cmpd="sng" algn="ctr">
+                      <a:solidFill>
+                        <a:srgbClr val="D9D8D1"/>
+                      </a:solidFill>
+                      <a:prstDash val="solid"/>
+                      <a:round/>
+                      <a:headEnd type="none" w="med" len="med"/>
+                      <a:tailEnd type="none" w="med" len="med"/>
+                    </a:lnT>
+                    <a:lnB w="9525" cap="flat" cmpd="sng" algn="ctr">
+                      <a:solidFill>
+                        <a:srgbClr val="D9D8D1"/>
+                      </a:solidFill>
+                      <a:prstDash val="solid"/>
+                      <a:round/>
+                      <a:headEnd type="none" w="med" len="med"/>
+                      <a:tailEnd type="none" w="med" len="med"/>
+                    </a:lnB>
+                    <a:solidFill>
+                      <a:srgbClr val="F4F3EF"/>
+                    </a:solidFill>
+                  </a:tcPr>
+                </a:tc>
+                <a:tc>
+                  <a:txBody>
+                    <a:bodyPr/>
+                    <a:lstStyle/>
+                    <a:p>
+                      <a:pPr algn="l" indent="0" marL="0">
+                        <a:buNone/>
+                      </a:pPr>
+                      <a:r>
+                        <a:rPr lang="en-US" sz="1200" dirty="0">
+                          <a:solidFill>
+                            <a:srgbClr val="14202E"/>
+                          </a:solidFill>
+                          <a:latin typeface="Calibri" pitchFamily="34" charset="0"/>
+                          <a:ea typeface="Calibri" pitchFamily="34" charset="-122"/>
+                          <a:cs typeface="Calibri" pitchFamily="34" charset="-120"/>
+                        </a:rPr>
+                        <a:t>Kurzschlussleistungsverhältnis (Short Circuit Ratio)</a:t>
+                      </a:r>
+                      <a:endParaRPr lang="en-US" sz="1200" dirty="0">
+                        <a:latin typeface="Calibri" charset="0"/>
+                        <a:ea typeface="Calibri" charset="0"/>
+                        <a:cs typeface="Calibri" charset="0"/>
+                      </a:endParaRPr>
+                    </a:p>
+                  </a:txBody>
+                  <a:tcPr marL="76200" marR="76200" marT="38100" marB="38100" anchor="ctr">
+                    <a:lnL w="9525" cap="flat" cmpd="sng" algn="ctr">
+                      <a:solidFill>
+                        <a:srgbClr val="D9D8D1"/>
+                      </a:solidFill>
+                      <a:prstDash val="solid"/>
+                      <a:round/>
+                      <a:headEnd type="none" w="med" len="med"/>
+                      <a:tailEnd type="none" w="med" len="med"/>
+                    </a:lnL>
+                    <a:lnR w="9525" cap="flat" cmpd="sng" algn="ctr">
+                      <a:solidFill>
+                        <a:srgbClr val="D9D8D1"/>
+                      </a:solidFill>
+                      <a:prstDash val="solid"/>
+                      <a:round/>
+                      <a:headEnd type="none" w="med" len="med"/>
+                      <a:tailEnd type="none" w="med" len="med"/>
+                    </a:lnR>
+                    <a:lnT w="9525" cap="flat" cmpd="sng" algn="ctr">
+                      <a:solidFill>
+                        <a:srgbClr val="D9D8D1"/>
+                      </a:solidFill>
+                      <a:prstDash val="solid"/>
+                      <a:round/>
+                      <a:headEnd type="none" w="med" len="med"/>
+                      <a:tailEnd type="none" w="med" len="med"/>
+                    </a:lnT>
+                    <a:lnB w="9525" cap="flat" cmpd="sng" algn="ctr">
+                      <a:solidFill>
+                        <a:srgbClr val="D9D8D1"/>
+                      </a:solidFill>
+                      <a:prstDash val="solid"/>
+                      <a:round/>
+                      <a:headEnd type="none" w="med" len="med"/>
+                      <a:tailEnd type="none" w="med" len="med"/>
+                    </a:lnB>
+                    <a:solidFill>
+                      <a:srgbClr val="F4F3EF"/>
+                    </a:solidFill>
+                  </a:tcPr>
+                </a:tc>
+              </a:tr>
+              <a:tr h="0">
+                <a:tc>
+                  <a:txBody>
+                    <a:bodyPr/>
+                    <a:lstStyle/>
+                    <a:p>
+                      <a:pPr algn="l" indent="0" marL="0">
+                        <a:buNone/>
+                      </a:pPr>
+                      <a:r>
+                        <a:rPr lang="en-US" sz="1200" dirty="0">
+                          <a:solidFill>
+                            <a:srgbClr val="14202E"/>
+                          </a:solidFill>
+                          <a:latin typeface="Calibri" pitchFamily="34" charset="0"/>
+                          <a:ea typeface="Calibri" pitchFamily="34" charset="-122"/>
+                          <a:cs typeface="Calibri" pitchFamily="34" charset="-120"/>
+                        </a:rPr>
+                        <a:t>SVD</a:t>
+                      </a:r>
+                      <a:endParaRPr lang="en-US" sz="1200" dirty="0">
+                        <a:latin typeface="Calibri" charset="0"/>
+                        <a:ea typeface="Calibri" charset="0"/>
+                        <a:cs typeface="Calibri" charset="0"/>
+                      </a:endParaRPr>
+                    </a:p>
+                  </a:txBody>
+                  <a:tcPr marL="76200" marR="76200" marT="38100" marB="38100" anchor="ctr">
+                    <a:lnL w="9525" cap="flat" cmpd="sng" algn="ctr">
+                      <a:solidFill>
+                        <a:srgbClr val="D9D8D1"/>
+                      </a:solidFill>
+                      <a:prstDash val="solid"/>
+                      <a:round/>
+                      <a:headEnd type="none" w="med" len="med"/>
+                      <a:tailEnd type="none" w="med" len="med"/>
+                    </a:lnL>
+                    <a:lnR w="9525" cap="flat" cmpd="sng" algn="ctr">
+                      <a:solidFill>
+                        <a:srgbClr val="D9D8D1"/>
+                      </a:solidFill>
+                      <a:prstDash val="solid"/>
+                      <a:round/>
+                      <a:headEnd type="none" w="med" len="med"/>
+                      <a:tailEnd type="none" w="med" len="med"/>
+                    </a:lnR>
+                    <a:lnT w="9525" cap="flat" cmpd="sng" algn="ctr">
+                      <a:solidFill>
+                        <a:srgbClr val="D9D8D1"/>
+                      </a:solidFill>
+                      <a:prstDash val="solid"/>
+                      <a:round/>
+                      <a:headEnd type="none" w="med" len="med"/>
+                      <a:tailEnd type="none" w="med" len="med"/>
+                    </a:lnT>
+                    <a:lnB w="9525" cap="flat" cmpd="sng" algn="ctr">
+                      <a:solidFill>
+                        <a:srgbClr val="D9D8D1"/>
+                      </a:solidFill>
+                      <a:prstDash val="solid"/>
+                      <a:round/>
+                      <a:headEnd type="none" w="med" len="med"/>
+                      <a:tailEnd type="none" w="med" len="med"/>
+                    </a:lnB>
+                    <a:solidFill>
+                      <a:srgbClr val="F4F3EF"/>
+                    </a:solidFill>
+                  </a:tcPr>
+                </a:tc>
+                <a:tc>
+                  <a:txBody>
+                    <a:bodyPr/>
+                    <a:lstStyle/>
+                    <a:p>
+                      <a:pPr algn="l" indent="0" marL="0">
+                        <a:buNone/>
+                      </a:pPr>
+                      <a:r>
+                        <a:rPr lang="en-US" sz="1200" dirty="0">
+                          <a:solidFill>
+                            <a:srgbClr val="14202E"/>
+                          </a:solidFill>
+                          <a:latin typeface="Calibri" pitchFamily="34" charset="0"/>
+                          <a:ea typeface="Calibri" pitchFamily="34" charset="-122"/>
+                          <a:cs typeface="Calibri" pitchFamily="34" charset="-120"/>
+                        </a:rPr>
+                        <a:t>Singulärwertzerlegung</a:t>
+                      </a:r>
+                      <a:endParaRPr lang="en-US" sz="1200" dirty="0">
+                        <a:latin typeface="Calibri" charset="0"/>
+                        <a:ea typeface="Calibri" charset="0"/>
+                        <a:cs typeface="Calibri" charset="0"/>
+                      </a:endParaRPr>
+                    </a:p>
+                  </a:txBody>
+                  <a:tcPr marL="76200" marR="76200" marT="38100" marB="38100" anchor="ctr">
+                    <a:lnL w="9525" cap="flat" cmpd="sng" algn="ctr">
+                      <a:solidFill>
+                        <a:srgbClr val="D9D8D1"/>
+                      </a:solidFill>
+                      <a:prstDash val="solid"/>
+                      <a:round/>
+                      <a:headEnd type="none" w="med" len="med"/>
+                      <a:tailEnd type="none" w="med" len="med"/>
+                    </a:lnL>
+                    <a:lnR w="9525" cap="flat" cmpd="sng" algn="ctr">
+                      <a:solidFill>
+                        <a:srgbClr val="D9D8D1"/>
+                      </a:solidFill>
+                      <a:prstDash val="solid"/>
+                      <a:round/>
+                      <a:headEnd type="none" w="med" len="med"/>
+                      <a:tailEnd type="none" w="med" len="med"/>
+                    </a:lnR>
+                    <a:lnT w="9525" cap="flat" cmpd="sng" algn="ctr">
+                      <a:solidFill>
+                        <a:srgbClr val="D9D8D1"/>
+                      </a:solidFill>
+                      <a:prstDash val="solid"/>
+                      <a:round/>
+                      <a:headEnd type="none" w="med" len="med"/>
+                      <a:tailEnd type="none" w="med" len="med"/>
+                    </a:lnT>
+                    <a:lnB w="9525" cap="flat" cmpd="sng" algn="ctr">
+                      <a:solidFill>
+                        <a:srgbClr val="D9D8D1"/>
+                      </a:solidFill>
+                      <a:prstDash val="solid"/>
+                      <a:round/>
+                      <a:headEnd type="none" w="med" len="med"/>
+                      <a:tailEnd type="none" w="med" len="med"/>
+                    </a:lnB>
+                    <a:solidFill>
+                      <a:srgbClr val="F4F3EF"/>
+                    </a:solidFill>
+                  </a:tcPr>
+                </a:tc>
+              </a:tr>
+              <a:tr h="0">
+                <a:tc>
+                  <a:txBody>
+                    <a:bodyPr/>
+                    <a:lstStyle/>
+                    <a:p>
+                      <a:pPr algn="l" indent="0" marL="0">
+                        <a:buNone/>
+                      </a:pPr>
+                      <a:r>
+                        <a:rPr lang="en-US" sz="1200" dirty="0">
+                          <a:solidFill>
+                            <a:srgbClr val="14202E"/>
+                          </a:solidFill>
+                          <a:latin typeface="Calibri" pitchFamily="34" charset="0"/>
+                          <a:ea typeface="Calibri" pitchFamily="34" charset="-122"/>
+                          <a:cs typeface="Calibri" pitchFamily="34" charset="-120"/>
+                        </a:rPr>
+                        <a:t>TR8</a:t>
+                      </a:r>
+                      <a:endParaRPr lang="en-US" sz="1200" dirty="0">
+                        <a:latin typeface="Calibri" charset="0"/>
+                        <a:ea typeface="Calibri" charset="0"/>
+                        <a:cs typeface="Calibri" charset="0"/>
+                      </a:endParaRPr>
+                    </a:p>
+                  </a:txBody>
+                  <a:tcPr marL="76200" marR="76200" marT="38100" marB="38100" anchor="ctr">
+                    <a:lnL w="9525" cap="flat" cmpd="sng" algn="ctr">
+                      <a:solidFill>
+                        <a:srgbClr val="D9D8D1"/>
+                      </a:solidFill>
+                      <a:prstDash val="solid"/>
+                      <a:round/>
+                      <a:headEnd type="none" w="med" len="med"/>
+                      <a:tailEnd type="none" w="med" len="med"/>
+                    </a:lnL>
+                    <a:lnR w="9525" cap="flat" cmpd="sng" algn="ctr">
+                      <a:solidFill>
+                        <a:srgbClr val="D9D8D1"/>
+                      </a:solidFill>
+                      <a:prstDash val="solid"/>
+                      <a:round/>
+                      <a:headEnd type="none" w="med" len="med"/>
+                      <a:tailEnd type="none" w="med" len="med"/>
+                    </a:lnR>
+                    <a:lnT w="9525" cap="flat" cmpd="sng" algn="ctr">
+                      <a:solidFill>
+                        <a:srgbClr val="D9D8D1"/>
+                      </a:solidFill>
+                      <a:prstDash val="solid"/>
+                      <a:round/>
+                      <a:headEnd type="none" w="med" len="med"/>
+                      <a:tailEnd type="none" w="med" len="med"/>
+                    </a:lnT>
+                    <a:lnB w="9525" cap="flat" cmpd="sng" algn="ctr">
+                      <a:solidFill>
+                        <a:srgbClr val="D9D8D1"/>
+                      </a:solidFill>
+                      <a:prstDash val="solid"/>
+                      <a:round/>
+                      <a:headEnd type="none" w="med" len="med"/>
+                      <a:tailEnd type="none" w="med" len="med"/>
+                    </a:lnB>
+                    <a:solidFill>
+                      <a:srgbClr val="F4F3EF"/>
+                    </a:solidFill>
+                  </a:tcPr>
+                </a:tc>
+                <a:tc>
+                  <a:txBody>
+                    <a:bodyPr/>
+                    <a:lstStyle/>
+                    <a:p>
+                      <a:pPr algn="l" indent="0" marL="0">
+                        <a:buNone/>
+                      </a:pPr>
+                      <a:r>
+                        <a:rPr lang="en-US" sz="1200" dirty="0">
+                          <a:solidFill>
+                            <a:srgbClr val="14202E"/>
+                          </a:solidFill>
+                          <a:latin typeface="Calibri" pitchFamily="34" charset="0"/>
+                          <a:ea typeface="Calibri" pitchFamily="34" charset="-122"/>
+                          <a:cs typeface="Calibri" pitchFamily="34" charset="-120"/>
+                        </a:rPr>
+                        <a:t>FGW-Richtlinie 8 zur Zertifizierung</a:t>
+                      </a:r>
+                      <a:endParaRPr lang="en-US" sz="1200" dirty="0">
+                        <a:latin typeface="Calibri" charset="0"/>
+                        <a:ea typeface="Calibri" charset="0"/>
+                        <a:cs typeface="Calibri" charset="0"/>
+                      </a:endParaRPr>
+                    </a:p>
+                  </a:txBody>
+                  <a:tcPr marL="76200" marR="76200" marT="38100" marB="38100" anchor="ctr">
+                    <a:lnL w="9525" cap="flat" cmpd="sng" algn="ctr">
+                      <a:solidFill>
+                        <a:srgbClr val="D9D8D1"/>
+                      </a:solidFill>
+                      <a:prstDash val="solid"/>
+                      <a:round/>
+                      <a:headEnd type="none" w="med" len="med"/>
+                      <a:tailEnd type="none" w="med" len="med"/>
+                    </a:lnL>
+                    <a:lnR w="9525" cap="flat" cmpd="sng" algn="ctr">
+                      <a:solidFill>
+                        <a:srgbClr val="D9D8D1"/>
+                      </a:solidFill>
+                      <a:prstDash val="solid"/>
+                      <a:round/>
+                      <a:headEnd type="none" w="med" len="med"/>
+                      <a:tailEnd type="none" w="med" len="med"/>
+                    </a:lnR>
+                    <a:lnT w="9525" cap="flat" cmpd="sng" algn="ctr">
+                      <a:solidFill>
+                        <a:srgbClr val="D9D8D1"/>
+                      </a:solidFill>
+                      <a:prstDash val="solid"/>
+                      <a:round/>
+                      <a:headEnd type="none" w="med" len="med"/>
+                      <a:tailEnd type="none" w="med" len="med"/>
+                    </a:lnT>
+                    <a:lnB w="9525" cap="flat" cmpd="sng" algn="ctr">
+                      <a:solidFill>
+                        <a:srgbClr val="D9D8D1"/>
+                      </a:solidFill>
+                      <a:prstDash val="solid"/>
+                      <a:round/>
+                      <a:headEnd type="none" w="med" len="med"/>
+                      <a:tailEnd type="none" w="med" len="med"/>
+                    </a:lnB>
+                    <a:solidFill>
+                      <a:srgbClr val="F4F3EF"/>
+                    </a:solidFill>
+                  </a:tcPr>
+                </a:tc>
+              </a:tr>
+            </a:tbl>
+          </a:graphicData>
+        </a:graphic>
+      </p:graphicFrame>
+      <p:sp>
+        <p:nvSpPr>
+          <p:cNvPr id="8" name="Text 3"/>
+          <p:cNvSpPr txBox="1"/>
+          <p:nvPr/>
+        </p:nvSpPr>
+        <p:spPr>
+          <a:xfrm>
+            <a:off x="812800" y="4826000"/>
+            <a:ext cx="10566400" cy="571500"/>
+          </a:xfrm>
+          <a:prstGeom prst="rect">
+            <a:avLst/>
+          </a:prstGeom>
+          <a:noFill/>
+          <a:ln/>
+        </p:spPr>
+        <p:txBody>
+          <a:bodyPr wrap="square" lIns="0" tIns="0" rIns="0" bIns="0" rtlCol="0" anchor="t"/>
+          <a:lstStyle/>
+          <a:p>
+            <a:pPr indent="0" marL="0">
+              <a:lnSpc>
+                <a:spcPct val="115000"/>
+              </a:lnSpc>
+              <a:buNone/>
+            </a:pPr>
+            <a:r>
+              <a:rPr lang="en-US" sz="1500" b="1" dirty="0">
+                <a:solidFill>
+                  <a:srgbClr val="14202E"/>
+                </a:solidFill>
+                <a:latin typeface="Calibri" pitchFamily="34" charset="0"/>
+                <a:ea typeface="Calibri" pitchFamily="34" charset="-122"/>
+                <a:cs typeface="Calibri" pitchFamily="34" charset="-120"/>
+              </a:rPr>
+              <a:t>Formelzeichen: </a:t>
+            </a:r>
+            <a:pPr indent="0" marL="0">
+              <a:lnSpc>
+                <a:spcPct val="115000"/>
+              </a:lnSpc>
+              <a:buNone/>
+            </a:pPr>
+            <a:r>
+              <a:rPr lang="en-US" sz="1500" dirty="0">
+                <a:solidFill>
+                  <a:srgbClr val="44505E"/>
+                </a:solidFill>
+                <a:latin typeface="Calibri" pitchFamily="34" charset="0"/>
+                <a:ea typeface="Calibri" pitchFamily="34" charset="-122"/>
+                <a:cs typeface="Calibri" pitchFamily="34" charset="-120"/>
+              </a:rPr>
+              <a:t>z Pol, r = |z| Betrag, θ Winkel pro Schritt, σ Abklingrate in 1/s, f Frequenz in Hz, Δt = 0,01 s Abtastschritt, H0 und H1 Hankel-Matrizen, B reduzierte Matrix.</a:t>
+            </a:r>
+            <a:endParaRPr lang="en-US" sz="1500" dirty="0"/>
+          </a:p>
+        </p:txBody>
+      </p:sp>
+      <p:sp>
+        <p:nvSpPr>
+          <p:cNvPr id="25" name="Slide Number Placeholder 0"/>
+          <p:cNvSpPr>
+            <a:spLocks noGrp="1"/>
+          </p:cNvSpPr>
+          <p:nvPr>
+            <p:ph type="sldNum" sz="quarter" idx="4294967295"/>
+          </p:nvPr>
+        </p:nvSpPr>
+        <p:spPr>
+          <a:xfrm>
+            <a:off x="10795000" y="6426200"/>
+            <a:ext cx="584200" cy="228600"/>
+          </a:xfrm>
+          <a:prstGeom prst="rect">
+            <a:avLst/>
+          </a:prstGeom>
+          <a:extLst>
+            <a:ext uri="{C572A759-6A51-4108-AA02-DFA0A04FC94B}">
+              <ma14:wrappingTextBoxFlag xmlns:ma14="http://schemas.microsoft.com/office/mac/drawingml/2011/main" val="0"/>
+            </a:ext>
+          </a:extLst>
+        </p:spPr>
+        <p:txBody>
+          <a:bodyPr/>
+          <a:lstStyle>
+            <a:lvl1pPr>
+              <a:defRPr sz="1200">
+                <a:solidFill>
+                  <a:srgbClr val="5F6873"/>
+                </a:solidFill>
+                <a:latin typeface="Consolas"/>
+                <a:ea typeface="Consolas"/>
+                <a:cs typeface="Consolas"/>
+              </a:defRPr>
+            </a:lvl1pPr>
+          </a:lstStyle>
+          <a:p>
+            <a:pPr algn="r"/>
+            <a:fld id="{F7021451-1387-4CA6-816F-3879F97B5CBC}" type="slidenum">
+              <a:rPr b="0" lang="en-US"/>
+              <a:t>21</a:t>
+            </a:fld>
+            <a:endParaRPr lang="en-US"/>
+          </a:p>
+        </p:txBody>
+      </p:sp>
+    </p:spTree>
+  </p:cSld>
+  <p:clrMapOvr>
+    <a:masterClrMapping/>
+  </p:clrMapOvr>
+</p:sld>
+</file>
+
 <file path=ppt/slides/slide3.xml><?xml version="1.0" encoding="utf-8"?>
 <p:sld xmlns:a="http://schemas.openxmlformats.org/drawingml/2006/main" xmlns:r="http://schemas.openxmlformats.org/officeDocument/2006/relationships" xmlns:p="http://schemas.openxmlformats.org/presentationml/2006/main">
   <p:cSld name="Slide 3">
@@ -12982,8 +16237,8 @@
         </p:nvSpPr>
         <p:spPr>
           <a:xfrm>
-            <a:off x="812800" y="1905000"/>
-            <a:ext cx="6350000" cy="0"/>
+            <a:off x="812800" y="1879600"/>
+            <a:ext cx="6731000" cy="0"/>
           </a:xfrm>
           <a:prstGeom prst="line">
             <a:avLst/>
@@ -13005,8 +16260,8 @@
         </p:nvSpPr>
         <p:spPr>
           <a:xfrm>
-            <a:off x="812800" y="2032000"/>
-            <a:ext cx="6350000" cy="215900"/>
+            <a:off x="812800" y="1968500"/>
+            <a:ext cx="6731000" cy="215900"/>
           </a:xfrm>
           <a:prstGeom prst="rect">
             <a:avLst/>
@@ -13047,8 +16302,8 @@
         </p:nvSpPr>
         <p:spPr>
           <a:xfrm>
-            <a:off x="812800" y="2298700"/>
-            <a:ext cx="6350000" cy="571500"/>
+            <a:off x="812800" y="2222500"/>
+            <a:ext cx="6731000" cy="266700"/>
           </a:xfrm>
           <a:prstGeom prst="rect">
             <a:avLst/>
@@ -13075,7 +16330,7 @@
                 <a:ea typeface="Calibri" pitchFamily="34" charset="-122"/>
                 <a:cs typeface="Calibri" pitchFamily="34" charset="-120"/>
               </a:rPr>
-              <a:t>Frequenz-Leistungspendelungen von 0,05 bis 10 Hz dämpfen, Dämpfungsmaß D ≥ 0,5 (bei SCR ≥ 3).</a:t>
+              <a:t>0,05 bis 10 Hz dämpfen, Dämpfungsmaß D ≥ 0,5 bei SCR ≥ 3.</a:t>
             </a:r>
             <a:endParaRPr lang="en-US" sz="1500" dirty="0"/>
           </a:p>
@@ -13083,14 +16338,56 @@
       </p:sp>
       <p:sp>
         <p:nvSpPr>
-          <p:cNvPr id="9" name="Shape 6"/>
+          <p:cNvPr id="9" name="Text 6"/>
+          <p:cNvSpPr txBox="1"/>
+          <p:nvPr/>
+        </p:nvSpPr>
+        <p:spPr>
+          <a:xfrm>
+            <a:off x="812800" y="2527300"/>
+            <a:ext cx="6731000" cy="228600"/>
+          </a:xfrm>
+          <a:prstGeom prst="rect">
+            <a:avLst/>
+          </a:prstGeom>
+          <a:noFill/>
+          <a:ln/>
+        </p:spPr>
+        <p:txBody>
+          <a:bodyPr wrap="square" lIns="0" tIns="0" rIns="0" bIns="0" rtlCol="0" anchor="t"/>
+          <a:lstStyle/>
+          <a:p>
+            <a:pPr indent="0" marL="0">
+              <a:lnSpc>
+                <a:spcPct val="115000"/>
+              </a:lnSpc>
+              <a:buNone/>
+            </a:pPr>
+            <a:r>
+              <a:rPr lang="en-US" sz="1200" dirty="0">
+                <a:solidFill>
+                  <a:srgbClr val="44505E"/>
+                </a:solidFill>
+                <a:latin typeface="Calibri" pitchFamily="34" charset="0"/>
+                <a:ea typeface="Calibri" pitchFamily="34" charset="-122"/>
+                <a:cs typeface="Calibri" pitchFamily="34" charset="-120"/>
+              </a:rPr>
+              <a:t>SCR: Kurzschlussleistungsverhältnis am Netzanschlusspunkt, ein Maß für die Netzstärke.</a:t>
+            </a:r>
+            <a:endParaRPr lang="en-US" sz="1200" dirty="0"/>
+          </a:p>
+        </p:txBody>
+      </p:sp>
+      <p:sp>
+        <p:nvSpPr>
+          <p:cNvPr id="10" name="Shape 7"/>
           <p:cNvSpPr/>
           <p:nvPr/>
         </p:nvSpPr>
         <p:spPr>
           <a:xfrm>
-            <a:off x="812800" y="2997200"/>
-            <a:ext cx="6350000" cy="0"/>
+            <a:off x="812800" y="2844800"/>
+            <a:ext cx="6731000" cy="0"/>
           </a:xfrm>
           <a:prstGeom prst="line">
             <a:avLst/>
@@ -13106,14 +16403,14 @@
       </p:sp>
       <p:sp>
         <p:nvSpPr>
-          <p:cNvPr id="10" name="Text 7"/>
+          <p:cNvPr id="11" name="Text 8"/>
           <p:cNvSpPr txBox="1"/>
           <p:nvPr/>
         </p:nvSpPr>
         <p:spPr>
           <a:xfrm>
-            <a:off x="812800" y="3124200"/>
-            <a:ext cx="6350000" cy="215900"/>
+            <a:off x="812800" y="2933700"/>
+            <a:ext cx="6731000" cy="215900"/>
           </a:xfrm>
           <a:prstGeom prst="rect">
             <a:avLst/>
@@ -13148,14 +16445,14 @@
       </p:sp>
       <p:sp>
         <p:nvSpPr>
-          <p:cNvPr id="11" name="Text 8"/>
+          <p:cNvPr id="12" name="Text 9"/>
           <p:cNvSpPr txBox="1"/>
           <p:nvPr/>
         </p:nvSpPr>
         <p:spPr>
           <a:xfrm>
-            <a:off x="812800" y="3390900"/>
-            <a:ext cx="6350000" cy="571500"/>
+            <a:off x="812800" y="3187700"/>
+            <a:ext cx="6731000" cy="266700"/>
           </a:xfrm>
           <a:prstGeom prst="rect">
             <a:avLst/>
@@ -13182,7 +16479,7 @@
                 <a:ea typeface="Calibri" pitchFamily="34" charset="-122"/>
                 <a:cs typeface="Calibri" pitchFamily="34" charset="-120"/>
               </a:rPr>
-              <a:t>Frequenzsprung von ca. 250 bis 500 mHz oder Phasensprung, bei 50 bis 75 % PEmax; aufgezeichnet wird die Wirkleistung p1.</a:t>
+              <a:t>Frequenzsprung um 250 bis 500 mHz bei 50 bis 75 % von PEmax.</a:t>
             </a:r>
             <a:endParaRPr lang="en-US" sz="1500" dirty="0"/>
           </a:p>
@@ -13190,14 +16487,56 @@
       </p:sp>
       <p:sp>
         <p:nvSpPr>
-          <p:cNvPr id="12" name="Shape 9"/>
+          <p:cNvPr id="13" name="Text 10"/>
+          <p:cNvSpPr txBox="1"/>
+          <p:nvPr/>
+        </p:nvSpPr>
+        <p:spPr>
+          <a:xfrm>
+            <a:off x="812800" y="3492500"/>
+            <a:ext cx="6731000" cy="228600"/>
+          </a:xfrm>
+          <a:prstGeom prst="rect">
+            <a:avLst/>
+          </a:prstGeom>
+          <a:noFill/>
+          <a:ln/>
+        </p:spPr>
+        <p:txBody>
+          <a:bodyPr wrap="square" lIns="0" tIns="0" rIns="0" bIns="0" rtlCol="0" anchor="t"/>
+          <a:lstStyle/>
+          <a:p>
+            <a:pPr indent="0" marL="0">
+              <a:lnSpc>
+                <a:spcPct val="115000"/>
+              </a:lnSpc>
+              <a:buNone/>
+            </a:pPr>
+            <a:r>
+              <a:rPr lang="en-US" sz="1200" dirty="0">
+                <a:solidFill>
+                  <a:srgbClr val="44505E"/>
+                </a:solidFill>
+                <a:latin typeface="Calibri" pitchFamily="34" charset="0"/>
+                <a:ea typeface="Calibri" pitchFamily="34" charset="-122"/>
+                <a:cs typeface="Calibri" pitchFamily="34" charset="-120"/>
+              </a:rPr>
+              <a:t>PEmax: maximale Wirkleistung der Einheit · gemessen wird p1, die Mitsystem-Wirkleistung.</a:t>
+            </a:r>
+            <a:endParaRPr lang="en-US" sz="1200" dirty="0"/>
+          </a:p>
+        </p:txBody>
+      </p:sp>
+      <p:sp>
+        <p:nvSpPr>
+          <p:cNvPr id="14" name="Shape 11"/>
           <p:cNvSpPr/>
           <p:nvPr/>
         </p:nvSpPr>
         <p:spPr>
           <a:xfrm>
-            <a:off x="812800" y="4089400"/>
-            <a:ext cx="6350000" cy="0"/>
+            <a:off x="812800" y="3810000"/>
+            <a:ext cx="6731000" cy="0"/>
           </a:xfrm>
           <a:prstGeom prst="line">
             <a:avLst/>
@@ -13213,14 +16552,14 @@
       </p:sp>
       <p:sp>
         <p:nvSpPr>
-          <p:cNvPr id="13" name="Text 10"/>
+          <p:cNvPr id="15" name="Text 12"/>
           <p:cNvSpPr txBox="1"/>
           <p:nvPr/>
         </p:nvSpPr>
         <p:spPr>
           <a:xfrm>
-            <a:off x="812800" y="4216400"/>
-            <a:ext cx="6350000" cy="215900"/>
+            <a:off x="812800" y="3898900"/>
+            <a:ext cx="6731000" cy="215900"/>
           </a:xfrm>
           <a:prstGeom prst="rect">
             <a:avLst/>
@@ -13255,14 +16594,14 @@
       </p:sp>
       <p:sp>
         <p:nvSpPr>
-          <p:cNvPr id="14" name="Text 11"/>
+          <p:cNvPr id="16" name="Text 13"/>
           <p:cNvSpPr txBox="1"/>
           <p:nvPr/>
         </p:nvSpPr>
         <p:spPr>
           <a:xfrm>
-            <a:off x="812800" y="4483100"/>
-            <a:ext cx="6350000" cy="571500"/>
+            <a:off x="812800" y="4152900"/>
+            <a:ext cx="6731000" cy="533400"/>
           </a:xfrm>
           <a:prstGeom prst="rect">
             <a:avLst/>
@@ -13289,22 +16628,46 @@
                 <a:ea typeface="Calibri" pitchFamily="34" charset="-122"/>
                 <a:cs typeface="Calibri" pitchFamily="34" charset="-120"/>
               </a:rPr>
-              <a:t>Bis zu vier Maxima und Minima; nötig ist D ≥ 0,45, bei drei erkennbaren Extrema zudem AV21, AV32 &lt; 0,2.</a:t>
+              <a:t>Überschwinger ΔP nach dem Sprung: D ≥ 0,45, bei drei Extrema zudem beide Amplitudenverhältnisse &lt; 0,2.</a:t>
             </a:r>
             <a:endParaRPr lang="en-US" sz="1500" dirty="0"/>
           </a:p>
         </p:txBody>
       </p:sp>
-      <p:sp>
-        <p:nvSpPr>
-          <p:cNvPr id="15" name="Shape 12"/>
+      <p:pic>
+        <p:nvPicPr>
+          <p:cNvPr id="17" name="Image 0" descr="av">    </p:cNvPr>
+          <p:cNvPicPr>
+            <a:picLocks noChangeAspect="1"/>
+          </p:cNvPicPr>
+          <p:nvPr/>
+        </p:nvPicPr>
+        <p:blipFill>
+          <a:blip r:embed="rId1"/>
+          <a:stretch>
+            <a:fillRect/>
+          </a:stretch>
+        </p:blipFill>
+        <p:spPr>
+          <a:xfrm>
+            <a:off x="812800" y="4737100"/>
+            <a:ext cx="2895600" cy="533400"/>
+          </a:xfrm>
+          <a:prstGeom prst="rect">
+            <a:avLst/>
+          </a:prstGeom>
+        </p:spPr>
+      </p:pic>
+      <p:sp>
+        <p:nvSpPr>
+          <p:cNvPr id="18" name="Shape 14"/>
           <p:cNvSpPr/>
           <p:nvPr/>
         </p:nvSpPr>
         <p:spPr>
           <a:xfrm>
-            <a:off x="812800" y="5181600"/>
-            <a:ext cx="6350000" cy="0"/>
+            <a:off x="812800" y="5372100"/>
+            <a:ext cx="6731000" cy="0"/>
           </a:xfrm>
           <a:prstGeom prst="line">
             <a:avLst/>
@@ -13320,18 +16683,18 @@
       </p:sp>
       <p:sp>
         <p:nvSpPr>
-          <p:cNvPr id="16" name="Shape 13"/>
+          <p:cNvPr id="19" name="Shape 15"/>
           <p:cNvSpPr/>
           <p:nvPr/>
         </p:nvSpPr>
         <p:spPr>
           <a:xfrm>
-            <a:off x="7569200" y="1905000"/>
-            <a:ext cx="3810000" cy="3302000"/>
+            <a:off x="7950200" y="1879600"/>
+            <a:ext cx="3429000" cy="3810000"/>
           </a:xfrm>
           <a:prstGeom prst="roundRect">
             <a:avLst>
-              <a:gd name="adj" fmla="val 3046"/>
+              <a:gd name="adj" fmla="val 2933"/>
             </a:avLst>
           </a:prstGeom>
           <a:solidFill>
@@ -13347,14 +16710,14 @@
       </p:sp>
       <p:sp>
         <p:nvSpPr>
-          <p:cNvPr id="17" name="Text 14"/>
+          <p:cNvPr id="20" name="Text 16"/>
           <p:cNvSpPr txBox="1"/>
           <p:nvPr/>
         </p:nvSpPr>
         <p:spPr>
           <a:xfrm>
-            <a:off x="7797800" y="2133600"/>
-            <a:ext cx="3365500" cy="317500"/>
+            <a:off x="8153400" y="2082800"/>
+            <a:ext cx="3048000" cy="317500"/>
           </a:xfrm>
           <a:prstGeom prst="rect">
             <a:avLst/>
@@ -13387,58 +16750,40 @@
           </a:p>
         </p:txBody>
       </p:sp>
-      <p:sp>
-        <p:nvSpPr>
-          <p:cNvPr id="18" name="Text 15"/>
+      <p:pic>
+        <p:nvPicPr>
+          <p:cNvPr id="21" name="Image 1" descr="d_def">    </p:cNvPr>
+          <p:cNvPicPr>
+            <a:picLocks noChangeAspect="1"/>
+          </p:cNvPicPr>
+          <p:nvPr/>
+        </p:nvPicPr>
+        <p:blipFill>
+          <a:blip r:embed="rId2"/>
+          <a:stretch>
+            <a:fillRect/>
+          </a:stretch>
+        </p:blipFill>
+        <p:spPr>
+          <a:xfrm>
+            <a:off x="8153400" y="2489200"/>
+            <a:ext cx="1873250" cy="641350"/>
+          </a:xfrm>
+          <a:prstGeom prst="rect">
+            <a:avLst/>
+          </a:prstGeom>
+        </p:spPr>
+      </p:pic>
+      <p:sp>
+        <p:nvSpPr>
+          <p:cNvPr id="22" name="Text 17"/>
           <p:cNvSpPr txBox="1"/>
           <p:nvPr/>
         </p:nvSpPr>
         <p:spPr>
           <a:xfrm>
-            <a:off x="7797800" y="2540000"/>
-            <a:ext cx="3365500" cy="266700"/>
-          </a:xfrm>
-          <a:prstGeom prst="rect">
-            <a:avLst/>
-          </a:prstGeom>
-          <a:noFill/>
-          <a:ln/>
-        </p:spPr>
-        <p:txBody>
-          <a:bodyPr wrap="square" lIns="0" tIns="0" rIns="0" bIns="0" rtlCol="0" anchor="t"/>
-          <a:lstStyle/>
-          <a:p>
-            <a:pPr indent="0" marL="0">
-              <a:lnSpc>
-                <a:spcPct val="115000"/>
-              </a:lnSpc>
-              <a:buNone/>
-            </a:pPr>
-            <a:r>
-              <a:rPr lang="en-US" sz="1500" dirty="0">
-                <a:solidFill>
-                  <a:srgbClr val="14202E"/>
-                </a:solidFill>
-                <a:latin typeface="Consolas" pitchFamily="34" charset="0"/>
-                <a:ea typeface="Consolas" pitchFamily="34" charset="-122"/>
-                <a:cs typeface="Consolas" pitchFamily="34" charset="-120"/>
-              </a:rPr>
-              <a:t>D = |σ| / √(σ² + ω²)</a:t>
-            </a:r>
-            <a:endParaRPr lang="en-US" sz="1500" dirty="0"/>
-          </a:p>
-        </p:txBody>
-      </p:sp>
-      <p:sp>
-        <p:nvSpPr>
-          <p:cNvPr id="19" name="Text 16"/>
-          <p:cNvSpPr txBox="1"/>
-          <p:nvPr/>
-        </p:nvSpPr>
-        <p:spPr>
-          <a:xfrm>
-            <a:off x="7797800" y="2870200"/>
-            <a:ext cx="3365500" cy="444500"/>
+            <a:off x="8153400" y="3213100"/>
+            <a:ext cx="3048000" cy="444500"/>
           </a:xfrm>
           <a:prstGeom prst="rect">
             <a:avLst/>
@@ -13465,7 +16810,7 @@
                 <a:ea typeface="Calibri" pitchFamily="34" charset="-122"/>
                 <a:cs typeface="Calibri" pitchFamily="34" charset="-120"/>
               </a:rPr>
-              <a:t>σ: Abklingrate, ω = 2πf; maßgeblich ist der kleinste Wert.</a:t>
+              <a:t>σ: Abklingrate, ω = 2πf; es zählt der kleinste Wert.</a:t>
             </a:r>
             <a:endParaRPr lang="en-US" sz="1200" dirty="0"/>
           </a:p>
@@ -13473,14 +16818,14 @@
       </p:sp>
       <p:sp>
         <p:nvSpPr>
-          <p:cNvPr id="20" name="Shape 17"/>
+          <p:cNvPr id="23" name="Shape 18"/>
           <p:cNvSpPr/>
           <p:nvPr/>
         </p:nvSpPr>
         <p:spPr>
           <a:xfrm>
-            <a:off x="7797800" y="3429000"/>
-            <a:ext cx="3365500" cy="0"/>
+            <a:off x="8153400" y="3733800"/>
+            <a:ext cx="3022600" cy="0"/>
           </a:xfrm>
           <a:prstGeom prst="line">
             <a:avLst/>
@@ -13496,14 +16841,14 @@
       </p:sp>
       <p:sp>
         <p:nvSpPr>
-          <p:cNvPr id="21" name="Text 18"/>
+          <p:cNvPr id="24" name="Text 19"/>
           <p:cNvSpPr txBox="1"/>
           <p:nvPr/>
         </p:nvSpPr>
         <p:spPr>
           <a:xfrm>
-            <a:off x="7797800" y="3556000"/>
-            <a:ext cx="3365500" cy="266700"/>
+            <a:off x="8153400" y="3835400"/>
+            <a:ext cx="3048000" cy="266700"/>
           </a:xfrm>
           <a:prstGeom prst="rect">
             <a:avLst/>
@@ -13536,58 +16881,40 @@
           </a:p>
         </p:txBody>
       </p:sp>
-      <p:sp>
-        <p:nvSpPr>
-          <p:cNvPr id="22" name="Text 19"/>
+      <p:pic>
+        <p:nvPicPr>
+          <p:cNvPr id="25" name="Image 2" descr="d_val">    </p:cNvPr>
+          <p:cNvPicPr>
+            <a:picLocks noChangeAspect="1"/>
+          </p:cNvPicPr>
+          <p:nvPr/>
+        </p:nvPicPr>
+        <p:blipFill>
+          <a:blip r:embed="rId3"/>
+          <a:stretch>
+            <a:fillRect/>
+          </a:stretch>
+        </p:blipFill>
+        <p:spPr>
+          <a:xfrm>
+            <a:off x="8153400" y="4165600"/>
+            <a:ext cx="2717800" cy="584200"/>
+          </a:xfrm>
+          <a:prstGeom prst="rect">
+            <a:avLst/>
+          </a:prstGeom>
+        </p:spPr>
+      </p:pic>
+      <p:sp>
+        <p:nvSpPr>
+          <p:cNvPr id="26" name="Text 20"/>
           <p:cNvSpPr txBox="1"/>
           <p:nvPr/>
         </p:nvSpPr>
         <p:spPr>
           <a:xfrm>
-            <a:off x="7797800" y="3886200"/>
-            <a:ext cx="3365500" cy="266700"/>
-          </a:xfrm>
-          <a:prstGeom prst="rect">
-            <a:avLst/>
-          </a:prstGeom>
-          <a:noFill/>
-          <a:ln/>
-        </p:spPr>
-        <p:txBody>
-          <a:bodyPr wrap="square" lIns="0" tIns="0" rIns="0" bIns="0" rtlCol="0" anchor="t"/>
-          <a:lstStyle/>
-          <a:p>
-            <a:pPr indent="0" marL="0">
-              <a:lnSpc>
-                <a:spcPct val="115000"/>
-              </a:lnSpc>
-              <a:buNone/>
-            </a:pPr>
-            <a:r>
-              <a:rPr lang="en-US" sz="1500" b="1" dirty="0">
-                <a:solidFill>
-                  <a:srgbClr val="B5491B"/>
-                </a:solidFill>
-                <a:latin typeface="Consolas" pitchFamily="34" charset="0"/>
-                <a:ea typeface="Consolas" pitchFamily="34" charset="-122"/>
-                <a:cs typeface="Consolas" pitchFamily="34" charset="-120"/>
-              </a:rPr>
-              <a:t>D ≈ 0,192 / 14,25 ≈ 0,013</a:t>
-            </a:r>
-            <a:endParaRPr lang="en-US" sz="1500" dirty="0"/>
-          </a:p>
-        </p:txBody>
-      </p:sp>
-      <p:sp>
-        <p:nvSpPr>
-          <p:cNvPr id="23" name="Text 20"/>
-          <p:cNvSpPr txBox="1"/>
-          <p:nvPr/>
-        </p:nvSpPr>
-        <p:spPr>
-          <a:xfrm>
-            <a:off x="7797800" y="4241800"/>
-            <a:ext cx="3365500" cy="508000"/>
+            <a:off x="8153400" y="4851400"/>
+            <a:ext cx="3048000" cy="508000"/>
           </a:xfrm>
           <a:prstGeom prst="rect">
             <a:avLst/>
@@ -13818,6 +17145,72 @@
           </a:p>
         </p:txBody>
       </p:sp>
+      <p:sp>
+        <p:nvSpPr>
+          <p:cNvPr id="6" name="Text 3"/>
+          <p:cNvSpPr txBox="1"/>
+          <p:nvPr/>
+        </p:nvSpPr>
+        <p:spPr>
+          <a:xfrm>
+            <a:off x="812800" y="2095500"/>
+            <a:ext cx="2413000" cy="533400"/>
+          </a:xfrm>
+          <a:prstGeom prst="rect">
+            <a:avLst/>
+          </a:prstGeom>
+          <a:noFill/>
+          <a:ln/>
+        </p:spPr>
+        <p:txBody>
+          <a:bodyPr wrap="square" lIns="0" tIns="0" rIns="0" bIns="0" rtlCol="0" anchor="t"/>
+          <a:lstStyle/>
+          <a:p>
+            <a:pPr indent="0" marL="0">
+              <a:lnSpc>
+                <a:spcPct val="115000"/>
+              </a:lnSpc>
+              <a:buNone/>
+            </a:pPr>
+            <a:r>
+              <a:rPr lang="en-US" sz="1500" dirty="0">
+                <a:solidFill>
+                  <a:srgbClr val="44505E"/>
+                </a:solidFill>
+                <a:latin typeface="Calibri" pitchFamily="34" charset="0"/>
+                <a:ea typeface="Calibri" pitchFamily="34" charset="-122"/>
+                <a:cs typeface="Calibri" pitchFamily="34" charset="-120"/>
+              </a:rPr>
+              <a:t>Modell nach Anhang A.V, Gleichung (43):</a:t>
+            </a:r>
+            <a:endParaRPr lang="en-US" sz="1500" dirty="0"/>
+          </a:p>
+        </p:txBody>
+      </p:sp>
+      <p:pic>
+        <p:nvPicPr>
+          <p:cNvPr id="7" name="Image 0" descr="prony">    </p:cNvPr>
+          <p:cNvPicPr>
+            <a:picLocks noChangeAspect="1"/>
+          </p:cNvPicPr>
+          <p:nvPr/>
+        </p:nvPicPr>
+        <p:blipFill>
+          <a:blip r:embed="rId1"/>
+          <a:stretch>
+            <a:fillRect/>
+          </a:stretch>
+        </p:blipFill>
+        <p:spPr>
+          <a:xfrm>
+            <a:off x="3479800" y="1879600"/>
+            <a:ext cx="3848100" cy="806450"/>
+          </a:xfrm>
+          <a:prstGeom prst="rect">
+            <a:avLst/>
+          </a:prstGeom>
+        </p:spPr>
+      </p:pic>
       <p:graphicFrame>
         <p:nvGraphicFramePr>
           <p:cNvPr id="5" name="Table 0"/>
@@ -13833,7 +17226,7 @@
           </p:nvPr>
         </p:nvGraphicFramePr>
         <p:xfrm>
-          <a:off x="812800" y="1905000"/>
+          <a:off x="812800" y="2844800"/>
           <a:ext cx="10566400" cy="914400"/>
         </p:xfrm>
         <a:graphic>
@@ -14343,7 +17736,7 @@
                           <a:ea typeface="Calibri" pitchFamily="34" charset="-122"/>
                           <a:cs typeface="Calibri" pitchFamily="34" charset="-120"/>
                         </a:rPr>
-                        <a:t>Signal in gedämpfte Schwingungen Ai·e^(di·t)·cos(2πfi·t + φi) zerlegen (Prony-Analyse)</a:t>
+                        <a:t>Signal nach dem Modell oben zerlegen (Prony-Analyse)</a:t>
                       </a:r>
                       <a:endParaRPr lang="en-US" sz="1300" dirty="0">
                         <a:latin typeface="Calibri" charset="0"/>
@@ -14411,7 +17804,7 @@
                           <a:ea typeface="Calibri" pitchFamily="34" charset="-122"/>
                           <a:cs typeface="Calibri" pitchFamily="34" charset="-120"/>
                         </a:rPr>
-                        <a:t>Matrix Pencil, Ordnung 12: dasselbe Modell, robuster geschätzt</a:t>
+                        <a:t>Matrix Pencil, Ordnung 12: dasselbe Modell</a:t>
                       </a:r>
                       <a:endParaRPr lang="en-US" sz="1300" dirty="0">
                         <a:latin typeface="Calibri" charset="0"/>
@@ -14549,7 +17942,7 @@
                           <a:ea typeface="Calibri" pitchFamily="34" charset="-122"/>
                           <a:cs typeface="Calibri" pitchFamily="34" charset="-120"/>
                         </a:rPr>
-                        <a:t>Frequenzen mit Herstellerangaben vergleichen: bis zu 3 Resonanzen, Band ± 0,1 Hz bzw. ± 20 %</a:t>
+                        <a:t>Mit bis zu 3 Herstellerfrequenzen vergleichen, Band ± 0,1 Hz bzw. ± 20 %</a:t>
                       </a:r>
                       <a:endParaRPr lang="en-US" sz="1300" dirty="0">
                         <a:latin typeface="Calibri" charset="0"/>
@@ -14617,7 +18010,7 @@
                           <a:ea typeface="Calibri" pitchFamily="34" charset="-122"/>
                           <a:cs typeface="Calibri" pitchFamily="34" charset="-120"/>
                         </a:rPr>
-                        <a:t>Annahme 2,2 Hz ± 20 % = Band 1,76 bis 2,64 Hz</a:t>
+                        <a:t>Annahme 2,2 Hz ± 20 % = 1,76 bis 2,64 Hz</a:t>
                       </a:r>
                       <a:endParaRPr lang="en-US" sz="1300" dirty="0">
                         <a:latin typeface="Calibri" charset="0"/>
@@ -14755,7 +18148,7 @@
                           <a:ea typeface="Calibri" pitchFamily="34" charset="-122"/>
                           <a:cs typeface="Calibri" pitchFamily="34" charset="-120"/>
                         </a:rPr>
-                        <a:t>Komponenten im Band abziehen; Verläufe vor und nach der Bereinigung darstellen</a:t>
+                        <a:t>Komponenten im Band abziehen; Verlauf vor und nach der Bereinigung zeigen</a:t>
                       </a:r>
                       <a:endParaRPr lang="en-US" sz="1300" dirty="0">
                         <a:latin typeface="Calibri" charset="0"/>
@@ -14823,7 +18216,7 @@
                           <a:ea typeface="Calibri" pitchFamily="34" charset="-122"/>
                           <a:cs typeface="Calibri" pitchFamily="34" charset="-120"/>
                         </a:rPr>
-                        <a:t>Abzug auf dem Messraster; Original und Ausgabe im Bericht</a:t>
+                        <a:t>Abzug auf dem Messraster; beide Kurven im Bericht</a:t>
                       </a:r>
                       <a:endParaRPr lang="en-US" sz="1300" dirty="0">
                         <a:latin typeface="Calibri" charset="0"/>
@@ -14881,13 +18274,13 @@
       </p:graphicFrame>
       <p:sp>
         <p:nvSpPr>
-          <p:cNvPr id="7" name="Text 3"/>
+          <p:cNvPr id="9" name="Text 4"/>
           <p:cNvSpPr txBox="1"/>
           <p:nvPr/>
         </p:nvSpPr>
         <p:spPr>
           <a:xfrm>
-            <a:off x="812800" y="5080000"/>
+            <a:off x="812800" y="5207000"/>
             <a:ext cx="10566400" cy="571500"/>
           </a:xfrm>
           <a:prstGeom prst="rect">
@@ -16292,8 +19685,8 @@
         </p:blipFill>
         <p:spPr>
           <a:xfrm>
-            <a:off x="1473200" y="1879600"/>
-            <a:ext cx="9239250" cy="3276600"/>
+            <a:off x="1905000" y="1879600"/>
+            <a:ext cx="8382000" cy="2971800"/>
           </a:xfrm>
           <a:prstGeom prst="rect">
             <a:avLst/>
@@ -16308,12 +19701,12 @@
         </p:nvSpPr>
         <p:spPr>
           <a:xfrm>
-            <a:off x="1473200" y="1879600"/>
-            <a:ext cx="9239250" cy="3276600"/>
+            <a:off x="1905000" y="1879600"/>
+            <a:ext cx="8382000" cy="2971800"/>
           </a:xfrm>
           <a:prstGeom prst="roundRect">
             <a:avLst>
-              <a:gd name="adj" fmla="val 3070"/>
+              <a:gd name="adj" fmla="val 3385"/>
             </a:avLst>
           </a:prstGeom>
           <a:ln w="9525">
@@ -16324,57 +19717,39 @@
           </a:ln>
         </p:spPr>
       </p:sp>
-      <p:sp>
-        <p:nvSpPr>
-          <p:cNvPr id="8" name="Text 4"/>
+      <p:pic>
+        <p:nvPicPr>
+          <p:cNvPr id="8" name="Image 1" descr="p_T">    </p:cNvPr>
+          <p:cNvPicPr>
+            <a:picLocks noChangeAspect="1"/>
+          </p:cNvPicPr>
+          <p:nvPr/>
+        </p:nvPicPr>
+        <p:blipFill>
+          <a:blip r:embed="rId2"/>
+          <a:stretch>
+            <a:fillRect/>
+          </a:stretch>
+        </p:blipFill>
+        <p:spPr>
+          <a:xfrm>
+            <a:off x="812800" y="5003800"/>
+            <a:ext cx="1790700" cy="495300"/>
+          </a:xfrm>
+          <a:prstGeom prst="rect">
+            <a:avLst/>
+          </a:prstGeom>
+        </p:spPr>
+      </p:pic>
+      <p:sp>
+        <p:nvSpPr>
+          <p:cNvPr id="9" name="Text 4"/>
           <p:cNvSpPr txBox="1"/>
           <p:nvPr/>
         </p:nvSpPr>
         <p:spPr>
           <a:xfrm>
-            <a:off x="812800" y="5334000"/>
-            <a:ext cx="3314700" cy="266700"/>
-          </a:xfrm>
-          <a:prstGeom prst="rect">
-            <a:avLst/>
-          </a:prstGeom>
-          <a:noFill/>
-          <a:ln/>
-        </p:spPr>
-        <p:txBody>
-          <a:bodyPr wrap="square" lIns="0" tIns="0" rIns="0" bIns="0" rtlCol="0" anchor="t"/>
-          <a:lstStyle/>
-          <a:p>
-            <a:pPr indent="0" marL="0">
-              <a:lnSpc>
-                <a:spcPct val="115000"/>
-              </a:lnSpc>
-              <a:buNone/>
-            </a:pPr>
-            <a:r>
-              <a:rPr lang="en-US" sz="1500" b="1" dirty="0">
-                <a:solidFill>
-                  <a:srgbClr val="14202E"/>
-                </a:solidFill>
-                <a:latin typeface="Consolas" pitchFamily="34" charset="0"/>
-                <a:ea typeface="Consolas" pitchFamily="34" charset="-122"/>
-                <a:cs typeface="Consolas" pitchFamily="34" charset="-120"/>
-              </a:rPr>
-              <a:t>T = 0,441 s</a:t>
-            </a:r>
-            <a:endParaRPr lang="en-US" sz="1500" dirty="0"/>
-          </a:p>
-        </p:txBody>
-      </p:sp>
-      <p:sp>
-        <p:nvSpPr>
-          <p:cNvPr id="9" name="Text 5"/>
-          <p:cNvSpPr txBox="1"/>
-          <p:nvPr/>
-        </p:nvSpPr>
-        <p:spPr>
-          <a:xfrm>
-            <a:off x="812800" y="5626100"/>
+            <a:off x="812800" y="5619750"/>
             <a:ext cx="3314700" cy="228600"/>
           </a:xfrm>
           <a:prstGeom prst="rect">
@@ -16402,63 +19777,45 @@
                 <a:ea typeface="Calibri" pitchFamily="34" charset="-122"/>
                 <a:cs typeface="Calibri" pitchFamily="34" charset="-120"/>
               </a:rPr>
-              <a:t>10 Perioden in 4,41 s</a:t>
+              <a:t>10 Perioden zwischen den Maxima</a:t>
             </a:r>
             <a:endParaRPr lang="en-US" sz="1200" dirty="0"/>
           </a:p>
         </p:txBody>
       </p:sp>
-      <p:sp>
-        <p:nvSpPr>
-          <p:cNvPr id="10" name="Text 6"/>
+      <p:pic>
+        <p:nvPicPr>
+          <p:cNvPr id="10" name="Image 2" descr="p_f">    </p:cNvPr>
+          <p:cNvPicPr>
+            <a:picLocks noChangeAspect="1"/>
+          </p:cNvPicPr>
+          <p:nvPr/>
+        </p:nvPicPr>
+        <p:blipFill>
+          <a:blip r:embed="rId3"/>
+          <a:stretch>
+            <a:fillRect/>
+          </a:stretch>
+        </p:blipFill>
+        <p:spPr>
+          <a:xfrm>
+            <a:off x="4436533" y="5003800"/>
+            <a:ext cx="1612900" cy="495300"/>
+          </a:xfrm>
+          <a:prstGeom prst="rect">
+            <a:avLst/>
+          </a:prstGeom>
+        </p:spPr>
+      </p:pic>
+      <p:sp>
+        <p:nvSpPr>
+          <p:cNvPr id="11" name="Text 5"/>
           <p:cNvSpPr txBox="1"/>
           <p:nvPr/>
         </p:nvSpPr>
         <p:spPr>
           <a:xfrm>
-            <a:off x="4436533" y="5334000"/>
-            <a:ext cx="3314700" cy="266700"/>
-          </a:xfrm>
-          <a:prstGeom prst="rect">
-            <a:avLst/>
-          </a:prstGeom>
-          <a:noFill/>
-          <a:ln/>
-        </p:spPr>
-        <p:txBody>
-          <a:bodyPr wrap="square" lIns="0" tIns="0" rIns="0" bIns="0" rtlCol="0" anchor="t"/>
-          <a:lstStyle/>
-          <a:p>
-            <a:pPr indent="0" marL="0">
-              <a:lnSpc>
-                <a:spcPct val="115000"/>
-              </a:lnSpc>
-              <a:buNone/>
-            </a:pPr>
-            <a:r>
-              <a:rPr lang="en-US" sz="1500" b="1" dirty="0">
-                <a:solidFill>
-                  <a:srgbClr val="14202E"/>
-                </a:solidFill>
-                <a:latin typeface="Consolas" pitchFamily="34" charset="0"/>
-                <a:ea typeface="Consolas" pitchFamily="34" charset="-122"/>
-                <a:cs typeface="Consolas" pitchFamily="34" charset="-120"/>
-              </a:rPr>
-              <a:t>f = 1/T ≈ 2,268 Hz</a:t>
-            </a:r>
-            <a:endParaRPr lang="en-US" sz="1500" dirty="0"/>
-          </a:p>
-        </p:txBody>
-      </p:sp>
-      <p:sp>
-        <p:nvSpPr>
-          <p:cNvPr id="11" name="Text 7"/>
-          <p:cNvSpPr txBox="1"/>
-          <p:nvPr/>
-        </p:nvSpPr>
-        <p:spPr>
-          <a:xfrm>
-            <a:off x="4436533" y="5626100"/>
+            <a:off x="4436533" y="5619750"/>
             <a:ext cx="3314700" cy="228600"/>
           </a:xfrm>
           <a:prstGeom prst="rect">
@@ -16492,57 +19849,39 @@
           </a:p>
         </p:txBody>
       </p:sp>
-      <p:sp>
-        <p:nvSpPr>
-          <p:cNvPr id="12" name="Text 8"/>
+      <p:pic>
+        <p:nvPicPr>
+          <p:cNvPr id="12" name="Image 3" descr="p_s">    </p:cNvPr>
+          <p:cNvPicPr>
+            <a:picLocks noChangeAspect="1"/>
+          </p:cNvPicPr>
+          <p:nvPr/>
+        </p:nvPicPr>
+        <p:blipFill>
+          <a:blip r:embed="rId4"/>
+          <a:stretch>
+            <a:fillRect/>
+          </a:stretch>
+        </p:blipFill>
+        <p:spPr>
+          <a:xfrm>
+            <a:off x="8060267" y="5003800"/>
+            <a:ext cx="2844800" cy="552450"/>
+          </a:xfrm>
+          <a:prstGeom prst="rect">
+            <a:avLst/>
+          </a:prstGeom>
+        </p:spPr>
+      </p:pic>
+      <p:sp>
+        <p:nvSpPr>
+          <p:cNvPr id="13" name="Text 6"/>
           <p:cNvSpPr txBox="1"/>
           <p:nvPr/>
         </p:nvSpPr>
         <p:spPr>
           <a:xfrm>
-            <a:off x="8060267" y="5334000"/>
-            <a:ext cx="3314700" cy="266700"/>
-          </a:xfrm>
-          <a:prstGeom prst="rect">
-            <a:avLst/>
-          </a:prstGeom>
-          <a:noFill/>
-          <a:ln/>
-        </p:spPr>
-        <p:txBody>
-          <a:bodyPr wrap="square" lIns="0" tIns="0" rIns="0" bIns="0" rtlCol="0" anchor="t"/>
-          <a:lstStyle/>
-          <a:p>
-            <a:pPr indent="0" marL="0">
-              <a:lnSpc>
-                <a:spcPct val="115000"/>
-              </a:lnSpc>
-              <a:buNone/>
-            </a:pPr>
-            <a:r>
-              <a:rPr lang="en-US" sz="1500" b="1" dirty="0">
-                <a:solidFill>
-                  <a:srgbClr val="14202E"/>
-                </a:solidFill>
-                <a:latin typeface="Consolas" pitchFamily="34" charset="0"/>
-                <a:ea typeface="Consolas" pitchFamily="34" charset="-122"/>
-                <a:cs typeface="Consolas" pitchFamily="34" charset="-120"/>
-              </a:rPr>
-              <a:t>σ ≈ −0,19 1/s</a:t>
-            </a:r>
-            <a:endParaRPr lang="en-US" sz="1500" dirty="0"/>
-          </a:p>
-        </p:txBody>
-      </p:sp>
-      <p:sp>
-        <p:nvSpPr>
-          <p:cNvPr id="13" name="Text 9"/>
-          <p:cNvSpPr txBox="1"/>
-          <p:nvPr/>
-        </p:nvSpPr>
-        <p:spPr>
-          <a:xfrm>
-            <a:off x="8060267" y="5626100"/>
+            <a:off x="8060267" y="5619750"/>
             <a:ext cx="3314700" cy="228600"/>
           </a:xfrm>
           <a:prstGeom prst="rect">
@@ -16570,7 +19909,7 @@
                 <a:ea typeface="Calibri" pitchFamily="34" charset="-122"/>
                 <a:cs typeface="Calibri" pitchFamily="34" charset="-120"/>
               </a:rPr>
-              <a:t>Ausschlag 0,087 → 0,038 in 4,4 s</a:t>
+              <a:t>Ausschlag sinkt von 0,087 auf 0,038</a:t>
             </a:r>
             <a:endParaRPr lang="en-US" sz="1200" dirty="0"/>
           </a:p>
@@ -16783,11 +20122,11 @@
         <p:spPr>
           <a:xfrm>
             <a:off x="812800" y="1879600"/>
-            <a:ext cx="3314700" cy="2413000"/>
+            <a:ext cx="3314700" cy="2540000"/>
           </a:xfrm>
           <a:prstGeom prst="roundRect">
             <a:avLst>
-              <a:gd name="adj" fmla="val 4168"/>
+              <a:gd name="adj" fmla="val 3960"/>
             </a:avLst>
           </a:prstGeom>
           <a:solidFill>
@@ -16843,57 +20182,39 @@
           </a:p>
         </p:txBody>
       </p:sp>
-      <p:sp>
-        <p:nvSpPr>
-          <p:cNvPr id="8" name="Text 5"/>
+      <p:pic>
+        <p:nvPicPr>
+          <p:cNvPr id="8" name="Image 0" descr="i_1">    </p:cNvPr>
+          <p:cNvPicPr>
+            <a:picLocks noChangeAspect="1"/>
+          </p:cNvPicPr>
+          <p:nvPr/>
+        </p:nvPicPr>
+        <p:blipFill>
+          <a:blip r:embed="rId1"/>
+          <a:stretch>
+            <a:fillRect/>
+          </a:stretch>
+        </p:blipFill>
+        <p:spPr>
+          <a:xfrm>
+            <a:off x="1041400" y="2527300"/>
+            <a:ext cx="1638300" cy="342900"/>
+          </a:xfrm>
+          <a:prstGeom prst="rect">
+            <a:avLst/>
+          </a:prstGeom>
+        </p:spPr>
+      </p:pic>
+      <p:sp>
+        <p:nvSpPr>
+          <p:cNvPr id="9" name="Text 5"/>
           <p:cNvSpPr txBox="1"/>
           <p:nvPr/>
         </p:nvSpPr>
         <p:spPr>
           <a:xfrm>
-            <a:off x="1041400" y="2501900"/>
-            <a:ext cx="2857500" cy="266700"/>
-          </a:xfrm>
-          <a:prstGeom prst="rect">
-            <a:avLst/>
-          </a:prstGeom>
-          <a:noFill/>
-          <a:ln/>
-        </p:spPr>
-        <p:txBody>
-          <a:bodyPr wrap="square" lIns="0" tIns="0" rIns="0" bIns="0" rtlCol="0" anchor="t"/>
-          <a:lstStyle/>
-          <a:p>
-            <a:pPr indent="0" marL="0">
-              <a:lnSpc>
-                <a:spcPct val="115000"/>
-              </a:lnSpc>
-              <a:buNone/>
-            </a:pPr>
-            <a:r>
-              <a:rPr lang="en-US" sz="1500" dirty="0">
-                <a:solidFill>
-                  <a:srgbClr val="1C5CAB"/>
-                </a:solidFill>
-                <a:latin typeface="Consolas" pitchFamily="34" charset="0"/>
-                <a:ea typeface="Consolas" pitchFamily="34" charset="-122"/>
-                <a:cs typeface="Consolas" pitchFamily="34" charset="-120"/>
-              </a:rPr>
-              <a:t>y[k+1] = z · y[k]</a:t>
-            </a:r>
-            <a:endParaRPr lang="en-US" sz="1500" dirty="0"/>
-          </a:p>
-        </p:txBody>
-      </p:sp>
-      <p:sp>
-        <p:nvSpPr>
-          <p:cNvPr id="9" name="Text 6"/>
-          <p:cNvSpPr txBox="1"/>
-          <p:nvPr/>
-        </p:nvSpPr>
-        <p:spPr>
-          <a:xfrm>
-            <a:off x="1041400" y="2844800"/>
+            <a:off x="1041400" y="2984500"/>
             <a:ext cx="2857500" cy="1333500"/>
           </a:xfrm>
           <a:prstGeom prst="rect">
@@ -16929,18 +20250,18 @@
       </p:sp>
       <p:sp>
         <p:nvSpPr>
-          <p:cNvPr id="10" name="Shape 7"/>
+          <p:cNvPr id="10" name="Shape 6"/>
           <p:cNvSpPr/>
           <p:nvPr/>
         </p:nvSpPr>
         <p:spPr>
           <a:xfrm>
             <a:off x="4330700" y="1879600"/>
-            <a:ext cx="3314700" cy="2413000"/>
+            <a:ext cx="3314700" cy="2540000"/>
           </a:xfrm>
           <a:prstGeom prst="roundRect">
             <a:avLst>
-              <a:gd name="adj" fmla="val 4168"/>
+              <a:gd name="adj" fmla="val 3960"/>
             </a:avLst>
           </a:prstGeom>
           <a:solidFill>
@@ -16956,7 +20277,7 @@
       </p:sp>
       <p:sp>
         <p:nvSpPr>
-          <p:cNvPr id="11" name="Text 8"/>
+          <p:cNvPr id="11" name="Text 7"/>
           <p:cNvSpPr txBox="1"/>
           <p:nvPr/>
         </p:nvSpPr>
@@ -16996,57 +20317,39 @@
           </a:p>
         </p:txBody>
       </p:sp>
-      <p:sp>
-        <p:nvSpPr>
-          <p:cNvPr id="12" name="Text 9"/>
+      <p:pic>
+        <p:nvPicPr>
+          <p:cNvPr id="12" name="Image 1" descr="i_2">    </p:cNvPr>
+          <p:cNvPicPr>
+            <a:picLocks noChangeAspect="1"/>
+          </p:cNvPicPr>
+          <p:nvPr/>
+        </p:nvPicPr>
+        <p:blipFill>
+          <a:blip r:embed="rId2"/>
+          <a:stretch>
+            <a:fillRect/>
+          </a:stretch>
+        </p:blipFill>
+        <p:spPr>
+          <a:xfrm>
+            <a:off x="4559300" y="2527300"/>
+            <a:ext cx="1981200" cy="342900"/>
+          </a:xfrm>
+          <a:prstGeom prst="rect">
+            <a:avLst/>
+          </a:prstGeom>
+        </p:spPr>
+      </p:pic>
+      <p:sp>
+        <p:nvSpPr>
+          <p:cNvPr id="13" name="Text 8"/>
           <p:cNvSpPr txBox="1"/>
           <p:nvPr/>
         </p:nvSpPr>
         <p:spPr>
           <a:xfrm>
-            <a:off x="4559300" y="2501900"/>
-            <a:ext cx="2857500" cy="266700"/>
-          </a:xfrm>
-          <a:prstGeom prst="rect">
-            <a:avLst/>
-          </a:prstGeom>
-          <a:noFill/>
-          <a:ln/>
-        </p:spPr>
-        <p:txBody>
-          <a:bodyPr wrap="square" lIns="0" tIns="0" rIns="0" bIns="0" rtlCol="0" anchor="t"/>
-          <a:lstStyle/>
-          <a:p>
-            <a:pPr indent="0" marL="0">
-              <a:lnSpc>
-                <a:spcPct val="115000"/>
-              </a:lnSpc>
-              <a:buNone/>
-            </a:pPr>
-            <a:r>
-              <a:rPr lang="en-US" sz="1500" dirty="0">
-                <a:solidFill>
-                  <a:srgbClr val="1C5CAB"/>
-                </a:solidFill>
-                <a:latin typeface="Consolas" pitchFamily="34" charset="0"/>
-                <a:ea typeface="Consolas" pitchFamily="34" charset="-122"/>
-                <a:cs typeface="Consolas" pitchFamily="34" charset="-120"/>
-              </a:rPr>
-              <a:t>H1 = H0, verschoben</a:t>
-            </a:r>
-            <a:endParaRPr lang="en-US" sz="1500" dirty="0"/>
-          </a:p>
-        </p:txBody>
-      </p:sp>
-      <p:sp>
-        <p:nvSpPr>
-          <p:cNvPr id="13" name="Text 10"/>
-          <p:cNvSpPr txBox="1"/>
-          <p:nvPr/>
-        </p:nvSpPr>
-        <p:spPr>
-          <a:xfrm>
-            <a:off x="4559300" y="2844800"/>
+            <a:off x="4559300" y="2984500"/>
             <a:ext cx="2857500" cy="1333500"/>
           </a:xfrm>
           <a:prstGeom prst="rect">
@@ -17082,18 +20385,18 @@
       </p:sp>
       <p:sp>
         <p:nvSpPr>
-          <p:cNvPr id="14" name="Shape 11"/>
+          <p:cNvPr id="14" name="Shape 9"/>
           <p:cNvSpPr/>
           <p:nvPr/>
         </p:nvSpPr>
         <p:spPr>
           <a:xfrm>
             <a:off x="7848600" y="1879600"/>
-            <a:ext cx="3314700" cy="2413000"/>
+            <a:ext cx="3314700" cy="2540000"/>
           </a:xfrm>
           <a:prstGeom prst="roundRect">
             <a:avLst>
-              <a:gd name="adj" fmla="val 4168"/>
+              <a:gd name="adj" fmla="val 3960"/>
             </a:avLst>
           </a:prstGeom>
           <a:solidFill>
@@ -17109,7 +20412,7 @@
       </p:sp>
       <p:sp>
         <p:nvSpPr>
-          <p:cNvPr id="15" name="Text 12"/>
+          <p:cNvPr id="15" name="Text 10"/>
           <p:cNvSpPr txBox="1"/>
           <p:nvPr/>
         </p:nvSpPr>
@@ -17149,57 +20452,39 @@
           </a:p>
         </p:txBody>
       </p:sp>
-      <p:sp>
-        <p:nvSpPr>
-          <p:cNvPr id="16" name="Text 13"/>
+      <p:pic>
+        <p:nvPicPr>
+          <p:cNvPr id="16" name="Image 2" descr="i_3">    </p:cNvPr>
+          <p:cNvPicPr>
+            <a:picLocks noChangeAspect="1"/>
+          </p:cNvPicPr>
+          <p:nvPr/>
+        </p:nvPicPr>
+        <p:blipFill>
+          <a:blip r:embed="rId3"/>
+          <a:stretch>
+            <a:fillRect/>
+          </a:stretch>
+        </p:blipFill>
+        <p:spPr>
+          <a:xfrm>
+            <a:off x="8077200" y="2527300"/>
+            <a:ext cx="1117600" cy="311150"/>
+          </a:xfrm>
+          <a:prstGeom prst="rect">
+            <a:avLst/>
+          </a:prstGeom>
+        </p:spPr>
+      </p:pic>
+      <p:sp>
+        <p:nvSpPr>
+          <p:cNvPr id="17" name="Text 11"/>
           <p:cNvSpPr txBox="1"/>
           <p:nvPr/>
         </p:nvSpPr>
         <p:spPr>
           <a:xfrm>
-            <a:off x="8077200" y="2501900"/>
-            <a:ext cx="2857500" cy="266700"/>
-          </a:xfrm>
-          <a:prstGeom prst="rect">
-            <a:avLst/>
-          </a:prstGeom>
-          <a:noFill/>
-          <a:ln/>
-        </p:spPr>
-        <p:txBody>
-          <a:bodyPr wrap="square" lIns="0" tIns="0" rIns="0" bIns="0" rtlCol="0" anchor="t"/>
-          <a:lstStyle/>
-          <a:p>
-            <a:pPr indent="0" marL="0">
-              <a:lnSpc>
-                <a:spcPct val="115000"/>
-              </a:lnSpc>
-              <a:buNone/>
-            </a:pPr>
-            <a:r>
-              <a:rPr lang="en-US" sz="1500" dirty="0">
-                <a:solidFill>
-                  <a:srgbClr val="1C5CAB"/>
-                </a:solidFill>
-                <a:latin typeface="Consolas" pitchFamily="34" charset="0"/>
-                <a:ea typeface="Consolas" pitchFamily="34" charset="-122"/>
-                <a:cs typeface="Consolas" pitchFamily="34" charset="-120"/>
-              </a:rPr>
-              <a:t>H1 − z · H0</a:t>
-            </a:r>
-            <a:endParaRPr lang="en-US" sz="1500" dirty="0"/>
-          </a:p>
-        </p:txBody>
-      </p:sp>
-      <p:sp>
-        <p:nvSpPr>
-          <p:cNvPr id="17" name="Text 14"/>
-          <p:cNvSpPr txBox="1"/>
-          <p:nvPr/>
-        </p:nvSpPr>
-        <p:spPr>
-          <a:xfrm>
-            <a:off x="8077200" y="2844800"/>
+            <a:off x="8077200" y="2984500"/>
             <a:ext cx="2857500" cy="1333500"/>
           </a:xfrm>
           <a:prstGeom prst="rect">
@@ -17235,13 +20520,13 @@
       </p:sp>
       <p:sp>
         <p:nvSpPr>
-          <p:cNvPr id="18" name="Text 15"/>
+          <p:cNvPr id="18" name="Text 12"/>
           <p:cNvSpPr txBox="1"/>
           <p:nvPr/>
         </p:nvSpPr>
         <p:spPr>
           <a:xfrm>
-            <a:off x="812800" y="4572000"/>
+            <a:off x="812800" y="4673600"/>
             <a:ext cx="10566400" cy="571500"/>
           </a:xfrm>
           <a:prstGeom prst="rect">
@@ -17286,7 +20571,7 @@
                 <a:ea typeface="Calibri" pitchFamily="34" charset="-122"/>
                 <a:cs typeface="Calibri" pitchFamily="34" charset="-120"/>
               </a:rPr>
-              <a:t>keine Nullstellen eines Polynoms, sondern Eigenwerte nach einer SVD, die Signal und Rauschen trennt. Das ist weniger rauschempfindlich.</a:t>
+              <a:t>keine Nullstellen eines Polynoms, sondern Eigenwerte nach einer Singulärwertzerlegung (SVD), die Signal und Rauschen trennt. Das ist weniger rauschempfindlich.</a:t>
             </a:r>
             <a:endParaRPr lang="en-US" sz="1500" dirty="0"/>
           </a:p>
@@ -17484,7 +20769,7 @@
                 <a:ea typeface="Calibri" pitchFamily="34" charset="-122"/>
                 <a:cs typeface="Calibri" pitchFamily="34" charset="-120"/>
               </a:rPr>
-              <a:t>Code: src/prony_filter/matrix_pencil.py und filtering.py · Modell y[k] = Σ cᵢ · zᵢᵏ</a:t>
+              <a:t>Code: src/prony_filter/matrix_pencil.py und filtering.py · SVD: Singulärwertzerlegung</a:t>
             </a:r>
             <a:endParaRPr lang="en-US" sz="1200" dirty="0"/>
           </a:p>
@@ -17521,7 +20806,7 @@
         </p:nvSpPr>
         <p:spPr>
           <a:xfrm>
-            <a:off x="812800" y="2032000"/>
+            <a:off x="812800" y="2108200"/>
             <a:ext cx="508000" cy="317500"/>
           </a:xfrm>
           <a:prstGeom prst="rect">
@@ -17563,8 +20848,8 @@
         </p:nvSpPr>
         <p:spPr>
           <a:xfrm>
-            <a:off x="1524000" y="2032000"/>
-            <a:ext cx="3175000" cy="317500"/>
+            <a:off x="1524000" y="2108200"/>
+            <a:ext cx="2921000" cy="317500"/>
           </a:xfrm>
           <a:prstGeom prst="rect">
             <a:avLst/>
@@ -17605,8 +20890,8 @@
         </p:nvSpPr>
         <p:spPr>
           <a:xfrm>
-            <a:off x="4902200" y="2032000"/>
-            <a:ext cx="6477000" cy="571500"/>
+            <a:off x="4648200" y="2006600"/>
+            <a:ext cx="3175000" cy="571500"/>
           </a:xfrm>
           <a:prstGeom prst="rect">
             <a:avLst/>
@@ -17633,21 +20918,45 @@
                 <a:ea typeface="Calibri" pitchFamily="34" charset="-122"/>
                 <a:cs typeface="Calibri" pitchFamily="34" charset="-120"/>
               </a:rPr>
-              <a:t>P_pos von 1 bis 7 s, Mittelwert abgezogen; Tiefpass, dann 100 statt 4000 Werte pro Sekunde.</a:t>
+              <a:t>1 bis 7 s, ohne Mittelwert; Tiefpass, 100 Werte/s</a:t>
             </a:r>
             <a:endParaRPr lang="en-US" sz="1500" dirty="0"/>
           </a:p>
         </p:txBody>
       </p:sp>
-      <p:sp>
-        <p:nvSpPr>
-          <p:cNvPr id="10" name="Shape 7"/>
+      <p:pic>
+        <p:nvPicPr>
+          <p:cNvPr id="10" name="Image 0" descr="v_1">    </p:cNvPr>
+          <p:cNvPicPr>
+            <a:picLocks noChangeAspect="1"/>
+          </p:cNvPicPr>
+          <p:nvPr/>
+        </p:nvPicPr>
+        <p:blipFill>
+          <a:blip r:embed="rId1"/>
+          <a:stretch>
+            <a:fillRect/>
+          </a:stretch>
+        </p:blipFill>
+        <p:spPr>
+          <a:xfrm>
+            <a:off x="8026400" y="2124075"/>
+            <a:ext cx="3060700" cy="298450"/>
+          </a:xfrm>
+          <a:prstGeom prst="rect">
+            <a:avLst/>
+          </a:prstGeom>
+        </p:spPr>
+      </p:pic>
+      <p:sp>
+        <p:nvSpPr>
+          <p:cNvPr id="11" name="Shape 7"/>
           <p:cNvSpPr/>
           <p:nvPr/>
         </p:nvSpPr>
         <p:spPr>
           <a:xfrm>
-            <a:off x="812800" y="2717800"/>
+            <a:off x="812800" y="2667000"/>
             <a:ext cx="10566400" cy="0"/>
           </a:xfrm>
           <a:prstGeom prst="line">
@@ -17664,13 +20973,13 @@
       </p:sp>
       <p:sp>
         <p:nvSpPr>
-          <p:cNvPr id="11" name="Text 8"/>
+          <p:cNvPr id="12" name="Text 8"/>
           <p:cNvSpPr txBox="1"/>
           <p:nvPr/>
         </p:nvSpPr>
         <p:spPr>
           <a:xfrm>
-            <a:off x="812800" y="2870200"/>
+            <a:off x="812800" y="2895600"/>
             <a:ext cx="508000" cy="317500"/>
           </a:xfrm>
           <a:prstGeom prst="rect">
@@ -17706,14 +21015,14 @@
       </p:sp>
       <p:sp>
         <p:nvSpPr>
-          <p:cNvPr id="12" name="Text 9"/>
+          <p:cNvPr id="13" name="Text 9"/>
           <p:cNvSpPr txBox="1"/>
           <p:nvPr/>
         </p:nvSpPr>
         <p:spPr>
           <a:xfrm>
-            <a:off x="1524000" y="2870200"/>
-            <a:ext cx="3175000" cy="317500"/>
+            <a:off x="1524000" y="2895600"/>
+            <a:ext cx="2921000" cy="317500"/>
           </a:xfrm>
           <a:prstGeom prst="rect">
             <a:avLst/>
@@ -17748,14 +21057,14 @@
       </p:sp>
       <p:sp>
         <p:nvSpPr>
-          <p:cNvPr id="13" name="Text 10"/>
+          <p:cNvPr id="14" name="Text 10"/>
           <p:cNvSpPr txBox="1"/>
           <p:nvPr/>
         </p:nvSpPr>
         <p:spPr>
           <a:xfrm>
-            <a:off x="4902200" y="2870200"/>
-            <a:ext cx="6477000" cy="571500"/>
+            <a:off x="4648200" y="2794000"/>
+            <a:ext cx="3175000" cy="571500"/>
           </a:xfrm>
           <a:prstGeom prst="rect">
             <a:avLst/>
@@ -17782,21 +21091,45 @@
                 <a:ea typeface="Calibri" pitchFamily="34" charset="-122"/>
                 <a:cs typeface="Calibri" pitchFamily="34" charset="-120"/>
               </a:rPr>
-              <a:t>H0[i, j] = y[i+j] und H1[i, j] = y[i+j+1]: dieselbe Kurve, um 0,01 s verschoben, je 345 × 256.</a:t>
+              <a:t>Überlappende Ausschnitte, je 345 × 256</a:t>
             </a:r>
             <a:endParaRPr lang="en-US" sz="1500" dirty="0"/>
           </a:p>
         </p:txBody>
       </p:sp>
-      <p:sp>
-        <p:nvSpPr>
-          <p:cNvPr id="14" name="Shape 11"/>
+      <p:pic>
+        <p:nvPicPr>
+          <p:cNvPr id="15" name="Image 1" descr="v_2">    </p:cNvPr>
+          <p:cNvPicPr>
+            <a:picLocks noChangeAspect="1"/>
+          </p:cNvPicPr>
+          <p:nvPr/>
+        </p:nvPicPr>
+        <p:blipFill>
+          <a:blip r:embed="rId2"/>
+          <a:stretch>
+            <a:fillRect/>
+          </a:stretch>
+        </p:blipFill>
+        <p:spPr>
+          <a:xfrm>
+            <a:off x="8026400" y="2917825"/>
+            <a:ext cx="3054350" cy="285750"/>
+          </a:xfrm>
+          <a:prstGeom prst="rect">
+            <a:avLst/>
+          </a:prstGeom>
+        </p:spPr>
+      </p:pic>
+      <p:sp>
+        <p:nvSpPr>
+          <p:cNvPr id="16" name="Shape 11"/>
           <p:cNvSpPr/>
           <p:nvPr/>
         </p:nvSpPr>
         <p:spPr>
           <a:xfrm>
-            <a:off x="812800" y="3556000"/>
+            <a:off x="812800" y="3454400"/>
             <a:ext cx="10566400" cy="0"/>
           </a:xfrm>
           <a:prstGeom prst="line">
@@ -17813,13 +21146,13 @@
       </p:sp>
       <p:sp>
         <p:nvSpPr>
-          <p:cNvPr id="15" name="Text 12"/>
+          <p:cNvPr id="17" name="Text 12"/>
           <p:cNvSpPr txBox="1"/>
           <p:nvPr/>
         </p:nvSpPr>
         <p:spPr>
           <a:xfrm>
-            <a:off x="812800" y="3708400"/>
+            <a:off x="812800" y="3683000"/>
             <a:ext cx="508000" cy="317500"/>
           </a:xfrm>
           <a:prstGeom prst="rect">
@@ -17855,14 +21188,14 @@
       </p:sp>
       <p:sp>
         <p:nvSpPr>
-          <p:cNvPr id="16" name="Text 13"/>
+          <p:cNvPr id="18" name="Text 13"/>
           <p:cNvSpPr txBox="1"/>
           <p:nvPr/>
         </p:nvSpPr>
         <p:spPr>
           <a:xfrm>
-            <a:off x="1524000" y="3708400"/>
-            <a:ext cx="3175000" cy="317500"/>
+            <a:off x="1524000" y="3683000"/>
+            <a:ext cx="2921000" cy="317500"/>
           </a:xfrm>
           <a:prstGeom prst="rect">
             <a:avLst/>
@@ -17897,14 +21230,14 @@
       </p:sp>
       <p:sp>
         <p:nvSpPr>
-          <p:cNvPr id="17" name="Text 14"/>
+          <p:cNvPr id="19" name="Text 14"/>
           <p:cNvSpPr txBox="1"/>
           <p:nvPr/>
         </p:nvSpPr>
         <p:spPr>
           <a:xfrm>
-            <a:off x="4902200" y="3708400"/>
-            <a:ext cx="6477000" cy="571500"/>
+            <a:off x="4648200" y="3581400"/>
+            <a:ext cx="3175000" cy="571500"/>
           </a:xfrm>
           <a:prstGeom prst="rect">
             <a:avLst/>
@@ -17931,21 +21264,45 @@
                 <a:ea typeface="Calibri" pitchFamily="34" charset="-122"/>
                 <a:cs typeface="Calibri" pitchFamily="34" charset="-120"/>
               </a:rPr>
-              <a:t>H0 auf r = 12 Richtungen reduzieren: B = Σᵣ⁻¹ Uᵣᵀ H1 Vᵣ (12 × 12). Die Eigenwerte von B sind die Pole z.</a:t>
+              <a:t>r = 12 Richtungen behalten; Eigenwerte von B = Pole z</a:t>
             </a:r>
             <a:endParaRPr lang="en-US" sz="1500" dirty="0"/>
           </a:p>
         </p:txBody>
       </p:sp>
-      <p:sp>
-        <p:nvSpPr>
-          <p:cNvPr id="18" name="Shape 15"/>
+      <p:pic>
+        <p:nvPicPr>
+          <p:cNvPr id="20" name="Image 2" descr="v_3">    </p:cNvPr>
+          <p:cNvPicPr>
+            <a:picLocks noChangeAspect="1"/>
+          </p:cNvPicPr>
+          <p:nvPr/>
+        </p:nvPicPr>
+        <p:blipFill>
+          <a:blip r:embed="rId3"/>
+          <a:stretch>
+            <a:fillRect/>
+          </a:stretch>
+        </p:blipFill>
+        <p:spPr>
+          <a:xfrm>
+            <a:off x="8026400" y="3692525"/>
+            <a:ext cx="2387600" cy="311150"/>
+          </a:xfrm>
+          <a:prstGeom prst="rect">
+            <a:avLst/>
+          </a:prstGeom>
+        </p:spPr>
+      </p:pic>
+      <p:sp>
+        <p:nvSpPr>
+          <p:cNvPr id="21" name="Shape 15"/>
           <p:cNvSpPr/>
           <p:nvPr/>
         </p:nvSpPr>
         <p:spPr>
           <a:xfrm>
-            <a:off x="812800" y="4394200"/>
+            <a:off x="812800" y="4241800"/>
             <a:ext cx="10566400" cy="0"/>
           </a:xfrm>
           <a:prstGeom prst="line">
@@ -17962,13 +21319,13 @@
       </p:sp>
       <p:sp>
         <p:nvSpPr>
-          <p:cNvPr id="19" name="Text 16"/>
+          <p:cNvPr id="22" name="Text 16"/>
           <p:cNvSpPr txBox="1"/>
           <p:nvPr/>
         </p:nvSpPr>
         <p:spPr>
           <a:xfrm>
-            <a:off x="812800" y="4546600"/>
+            <a:off x="812800" y="4470400"/>
             <a:ext cx="508000" cy="317500"/>
           </a:xfrm>
           <a:prstGeom prst="rect">
@@ -18004,14 +21361,14 @@
       </p:sp>
       <p:sp>
         <p:nvSpPr>
-          <p:cNvPr id="20" name="Text 17"/>
+          <p:cNvPr id="23" name="Text 17"/>
           <p:cNvSpPr txBox="1"/>
           <p:nvPr/>
         </p:nvSpPr>
         <p:spPr>
           <a:xfrm>
-            <a:off x="1524000" y="4546600"/>
-            <a:ext cx="3175000" cy="317500"/>
+            <a:off x="1524000" y="4470400"/>
+            <a:ext cx="2921000" cy="317500"/>
           </a:xfrm>
           <a:prstGeom prst="rect">
             <a:avLst/>
@@ -18046,14 +21403,14 @@
       </p:sp>
       <p:sp>
         <p:nvSpPr>
-          <p:cNvPr id="21" name="Text 18"/>
+          <p:cNvPr id="24" name="Text 18"/>
           <p:cNvSpPr txBox="1"/>
           <p:nvPr/>
         </p:nvSpPr>
         <p:spPr>
           <a:xfrm>
-            <a:off x="4902200" y="4546600"/>
-            <a:ext cx="6477000" cy="571500"/>
+            <a:off x="4648200" y="4368800"/>
+            <a:ext cx="3175000" cy="571500"/>
           </a:xfrm>
           <a:prstGeom prst="rect">
             <a:avLst/>
@@ -18080,21 +21437,45 @@
                 <a:ea typeface="Calibri" pitchFamily="34" charset="-122"/>
                 <a:cs typeface="Calibri" pitchFamily="34" charset="-120"/>
               </a:rPr>
-              <a:t>Koeffizienten auf dem Messraster anpassen; Abzug nur bei Fitfehler ≤ 10 %, Pol im Band und Dämpfung ≤ 0,3.</a:t>
+              <a:t>Gewichte anpassen; Abzug nur, wenn die Prüfung besteht</a:t>
             </a:r>
             <a:endParaRPr lang="en-US" sz="1500" dirty="0"/>
           </a:p>
         </p:txBody>
       </p:sp>
-      <p:sp>
-        <p:nvSpPr>
-          <p:cNvPr id="22" name="Shape 19"/>
+      <p:pic>
+        <p:nvPicPr>
+          <p:cNvPr id="25" name="Image 3" descr="v_4">    </p:cNvPr>
+          <p:cNvPicPr>
+            <a:picLocks noChangeAspect="1"/>
+          </p:cNvPicPr>
+          <p:nvPr/>
+        </p:nvPicPr>
+        <p:blipFill>
+          <a:blip r:embed="rId4"/>
+          <a:stretch>
+            <a:fillRect/>
+          </a:stretch>
+        </p:blipFill>
+        <p:spPr>
+          <a:xfrm>
+            <a:off x="8026400" y="4371975"/>
+            <a:ext cx="1905000" cy="527050"/>
+          </a:xfrm>
+          <a:prstGeom prst="rect">
+            <a:avLst/>
+          </a:prstGeom>
+        </p:spPr>
+      </p:pic>
+      <p:sp>
+        <p:nvSpPr>
+          <p:cNvPr id="26" name="Shape 19"/>
           <p:cNvSpPr/>
           <p:nvPr/>
         </p:nvSpPr>
         <p:spPr>
           <a:xfrm>
-            <a:off x="812800" y="5232400"/>
+            <a:off x="812800" y="5029200"/>
             <a:ext cx="10566400" cy="0"/>
           </a:xfrm>
           <a:prstGeom prst="line">

--- a/docs/praesentation/Ergebnisse_Matrix_Pencil_Arbeitsfassung.pptx
+++ b/docs/praesentation/Ergebnisse_Matrix_Pencil_Arbeitsfassung.pptx
@@ -127,12 +127,12 @@
   <p:extLst>
     <p:ext uri="{521415D9-36F7-43E2-AB2F-B90AF26B5E84}">
       <p14:sectionLst xmlns:p14="http://schemas.microsoft.com/office/powerpoint/2010/main">
-        <p14:section name="Einstieg" id="{4bac640b-556c-0495-b3fc-84fa57367ae5}">
+        <p14:section name="Einstieg" id="{c12bd02a-3a04-60ff-e95c-52716910bf9f}">
           <p14:sldIdLst>
             <p14:sldId id="256"/>
           </p14:sldIdLst>
         </p14:section>
-        <p14:section name="Hintergrund" id="{926dad61-436f-68ac-da81-d7d8f100d7b3}">
+        <p14:section name="Hintergrund" id="{a9f2c405-f509-5b73-ffca-ae0b8354feff}">
           <p14:sldIdLst>
             <p14:sldId id="257"/>
             <p14:sldId id="258"/>
@@ -140,7 +140,7 @@
             <p14:sldId id="260"/>
           </p14:sldIdLst>
         </p14:section>
-        <p14:section name="Methode" id="{cf913497-1967-6eaf-f330-0a98e6f27a02}">
+        <p14:section name="Methode" id="{40581a1d-6993-2b38-80eb-398fac4e3352}">
           <p14:sldIdLst>
             <p14:sldId id="261"/>
             <p14:sldId id="262"/>
@@ -150,32 +150,28 @@
             <p14:sldId id="266"/>
           </p14:sldIdLst>
         </p14:section>
-        <p14:section name="Prüfungen" id="{8a0bd692-f19c-1c8f-d9ea-2e3cd469dbca}">
+        <p14:section name="Prüfstufen 1 bis 3" id="{04d5960e-a4a0-2c50-a657-1c27f21f9939}">
           <p14:sldIdLst>
             <p14:sldId id="267"/>
             <p14:sldId id="268"/>
-          </p14:sldIdLst>
-        </p14:section>
-        <p14:section name="Leistungsmessungen" id="{0611af2a-8ca0-d0b6-4efe-08598c848d57}">
-          <p14:sldIdLst>
             <p14:sldId id="269"/>
             <p14:sldId id="270"/>
             <p14:sldId id="271"/>
           </p14:sldIdLst>
         </p14:section>
-        <p14:section name="Mexiko" id="{f2644408-8d89-5ef1-e56b-0dd051c48244}">
+        <p14:section name="Prüfstufe 4: eigene Messungen" id="{34c56f2a-6490-4f53-77fd-7b4216bce027}">
           <p14:sldIdLst>
             <p14:sldId id="272"/>
             <p14:sldId id="273"/>
             <p14:sldId id="274"/>
           </p14:sldIdLst>
         </p14:section>
-        <p14:section name="Fazit" id="{5790930e-f0d5-9ebe-6fe8-ba1970f3a5e9}">
+        <p14:section name="Fazit" id="{a7b5af04-c073-d1db-5723-97c06e22363e}">
           <p14:sldIdLst>
             <p14:sldId id="275"/>
           </p14:sldIdLst>
         </p14:section>
-        <p14:section name="Anhang" id="{78cb7833-c1b2-6cf1-03aa-63d481b918db}">
+        <p14:section name="Anhang" id="{1abc53d1-b7af-c62b-3919-89033edb0204}">
           <p14:sldIdLst>
             <p14:sldId id="276"/>
           </p14:sldIdLst>
@@ -858,10 +854,12 @@
           <a:p>
             <a:r>
               <a:rPr lang="en-US" dirty="0"/>
-              <a:t>Wie prüft man, ob der Filter wirklich den gewünschten Anteil entfernt? Man braucht ein Signal, dessen Bestandteile man vorher kennt.
-Dieses künstliche Signal enthält einen Grundwertsprung und zwei Schwingungen, eine bei 2,24 Hertz und eine bei 5 Hertz. Entfernt werden soll nur die erste. Die Sollkurve ist das erwartete Ergebnis: Grundwert plus die 5-Hertz-Schwingung.
-Blau ist der Eingang, Orange die Filterausgabe, schwarz gestrichelt die Sollkurve. Orange und Schwarz liegen exakt übereinander. Die verbleibenden Wellen sind erwünscht, denn der 5-Hertz-Anteil soll bleiben.
-Über alle 1200 Werte bleibt die größte Abweichung unter drei mal zehn hoch minus dreizehn. Der Rechenablauf ist damit für ein rauschfreies Beispiel bestätigt. Rauschen und Modellfehler einer echten Messung prüft dieser Test nicht.</a:t>
+              <a:t>Erste Prüfstufe: Funktioniert der Rechenweg, wenn wir die Antwort vorher kennen?
+Dafür bauen wir ein Signal selbst. Bis eine Sekunde liegt es konstant bei 100, dann springt der Grundwert auf 120. Ab dem Sprung kommen zwei gedämpfte Schwingungen dazu: eine bei 2,24 Hertz mit Anfangsamplitude drei, die entfernt werden soll, und eine kleinere bei fünf Hertz, die bleiben soll. Die Formel rechts zeigt genau dieses Signal; tau ist die Zeit seit dem Sprung. Die Sollkurve ist damit eindeutig: Grundwert plus Fünf-Hertz-Anteil.
+Oben im Diagramm: Blau ist der Eingang, Orange die Filterausgabe, schwarz gestrichelt die Sollkurve. Orange und Schwarz liegen aufeinander, deshalb sieht man die gestrichelte Linie mitten auf der orangen. Die verbleibende Welle ist gewollt, das ist der Fünf-Hertz-Anteil.
+Warum liegen sie exakt übereinander? Das Signal erfüllt das Modell exakt, ohne Rauschen. Ordnung fünf reicht: zwei Polpaare für die beiden Schwingungen und ein reeller Pol für den Gleichanteil, der nach dem Mittelwertabzug übrig bleibt. Matrix Pencil findet diese Pole exakt, also wird genau der richtige Anteil abgezogen.
+Unten sehen wir die Differenz der beiden Kurven, um den Faktor zehn hoch dreizehn vergrößert. Sie bleibt unter 6,7 mal zehn hoch minus dreizehn. Bei Werten um 120 ist das die Größenordnung der Rundungsfehler in der Gleitkommarechnung.
+Diese Stufe bestätigt den Rechenweg. Rauschen, Modellfehler und echte Messdaten prüft sie nicht; dafür sind die nächsten Stufen da.</a:t>
             </a:r>
             <a:endParaRPr lang="en-US" dirty="0"/>
           </a:p>
@@ -949,10 +947,12 @@
           <a:p>
             <a:r>
               <a:rPr lang="en-US" dirty="0"/>
-              <a:t>Die zweite Prüfung fragt: Findet Matrix Pencil die Konstanten eines bekannten Modells wieder?
-Der Datensatz Lanczos1 vom amerikanischen Normungsinstitut NIST enthält 24 künstlich erzeugte Werte. Sie entstehen aus drei Anteilen, die nur abklingen und nicht pendeln. Die veröffentlichten Referenzparameter sind die drei Gewichte und die drei Abklingraten eins, drei und fünf pro x-Einheit. Für die Achsen sind keine Einheiten angegeben.
-Blau sind die NIST-Daten, Orange ist das Matrix-Pencil-Modell. Die Tabelle vergleicht die veröffentlichten Werte mit unserer Schätzung: Auf vier Nachkommastellen sind sie identisch. Der relative Modellfehler liegt bei 8,74 mal zehn hoch minus vierzehn.
-Anders als später bei Mexiko sind diese Referenzwerte Bestandteile eines bekannten künstlichen Modells und keine Schätzungen aus einer Messung. Nach diesen beiden kontrollierten Prüfungen folgen die Ergebnisse der Leistungsmessungen.</a:t>
+              <a:t>Zweite Prüfstufe: Findet Matrix Pencil die Konstanten eines bekannten Modells wieder?
+NIST, das amerikanische Normungsinstitut, veröffentlicht Referenzdatensätze, mit denen man Rechenprogramme prüft. Lanczos1 geht auf ein Beispiel von Cornelius Lanczos aus dem Jahr 1956 zurück: Die Summe von drei abklingenden Exponentialfunktionen wurde an 24 Stellen ausgewertet, x von null bis 1,15 in Schritten von 0,05, und auf 13 Stellen gerundet. Daher die 24 Werte. Der Datensatz ist bekannt dafür, dass sich solche Anteile schlecht trennen lassen. Die Achsen haben keine Einheit.
+Im Diagramm sind die NIST-Werte blaue Ringe. Die orange Modellkurve läuft durch jede Ringmitte; das ist gemeint, wenn das Modell unter den Punkten zu liegen scheint: Es trifft sie. Grau gestrichelt sind die drei Einzelanteile, deren Summe die orange Kurve ergibt.
+Die Tabelle liest man zeilenweise, ein Anteil pro Zeile: ein Gewicht, also der Startwert bei x gleich null, und eine Abklingrate. Gewicht und Rate sind die zertifizierten Werte von NIST. Die letzte Spalte sagt, wie weit unsere Schätzung davon abweicht, relativ gesehen: höchstens drei mal zehn hoch minus zehn. Auf vier Nachkommastellen sind die Werte also identisch.
+Die Verbindung zu Matrix Pencil: Jeder Anteil liefert einen Pol z gleich e hoch minus b mal 0,05. Diese Pole sind reell und positiv, ihr Winkel ist null. Deshalb gibt es hier keine Frequenz, nur Abklingen.
+Der relative Modellfehler liegt bei 8,74 mal zehn hoch minus vierzehn. Wichtig: Diese Referenzwerte sind Teil eines bekannten künstlichen Modells. In der nächsten Stufe, bei Mexiko, haben wir nur noch Schätzungen anderer Autoren als Vergleich.</a:t>
             </a:r>
             <a:endParaRPr lang="en-US" dirty="0"/>
           </a:p>
@@ -1040,11 +1040,10 @@
           <a:p>
             <a:r>
               <a:rPr lang="en-US" dirty="0"/>
-              <a:t>Die Tabelle fasst beide Leistungsmessungen zusammen, jeweils mit Ordnung zwölf von einer bis sieben Sekunden.
-In beiden Messungen liegt die dominante Schwingung bei 2,268 Hertz. Beim negativen Sprung klingt sie schneller ab, mit minus 0,192 pro Sekunde gegenüber minus 0,107. Die Anfangsamplitude bezieht sich auf den Beginn des Analyseabschnitts bei einer Sekunde und ist in der Dateieinheit angegeben, also vor der Division durch eine Million.
-Beide Modelle bilden die Messung auf dem Schätzraster mit weniger als einem Prozent Fehler nach, und beide Abzüge werden freigegeben.
-Der Unterschied steckt in der Zerlegung: Beim positiven Sprung liegt ein zweiter Anteil bei 2,480 Hertz im Zielband. Er klingt deutlich schneller ab und wird mit abgezogen. Ein ähnlich kleiner Gesamtfehler bedeutet also nicht dieselbe Zerlegung.
-Die letzte Zeile ist eine spektrale Vergleichsgröße: die Summe der quadrierten FFT-Beträge im Zielband zwischen vier und sieben Sekunden, vor und nach dem Abzug. Sie ist keine physikalische Energie.</a:t>
+              <a:t>Dritte Prüfstufe: eine echte Messung, die andere Autoren bereits ausgewertet haben. Wichtig: Die Messgröße ist hier nicht die Leistung, sondern die Netzfrequenz selbst, in Hertz. Die Aufzeichnung gehört zu einem Netzereignis in Mexiko vom 28. Dezember 2020; wir haben sie nicht selbst gemessen.
+Links sehen wir 301 Werte über 30 Sekunden im Abstand von einer Zehntelsekunde. Die Netzfrequenz liegt knapp unter 60 Hertz und schwankt langsam darüber und darunter; die Ausschläge werden kleiner.
+Andere Autoren haben dieselbe Zeitreihe im ROMA-Handbuch mit der ERA-Methode ausgewertet. Die Tabelle stellt ihre gerundeten Werte unseren Matrix-Pencil-Ergebnissen bei Ordnung zwölf gegenüber. Alle drei Frequenzen weichen um weniger als 0,06 Prozent ab, und auch die Abklingraten passen.
+Das spricht dafür, dass beide Verfahren ähnliche Schwingungsanteile erkennen. Die Autorenwerte sind jedoch Schätzungen, keine bekannten Wahrheitswerte. Die nächste Folie stellt eine andere Frage: Wie gut bildet das Gesamtmodell die ganze Kurve nach?</a:t>
             </a:r>
             <a:endParaRPr lang="en-US" dirty="0"/>
           </a:p>
@@ -1132,10 +1131,10 @@
           <a:p>
             <a:r>
               <a:rPr lang="en-US" dirty="0"/>
-              <a:t>Diese Folie zeigt die Filterung der negativen Sprungantwort. Blau ist die Messung, Orange die Filterausgabe. Links steht der gesamte Verlauf, rechts der Abschnitt von vier bis sieben Sekunden vergrößert. In beiden Diagrammen ist P pos durch eine Million geteilt.
-Entfernt wird ein Polpaar, die Schwingung bei 2,268 Hertz. Im rechten Ausschnitt ist der Effekt deutlich: Die Pendelung verschwindet, übrig bleibt der langsam steigende Verlauf. Im linken Diagramm würde der große Übergang diesen Unterschied optisch verdecken; deshalb der vergrößerte Ausschnitt.
-Vor einer Sekunde sind Messung und Ausgabe identisch. Danach ist die Differenz genau der berechnete Abzugsanteil. Die Bandenergie im Zielband sinkt zwischen vier und sieben Sekunden um 99,999 Prozent.
-Eine unabhängig bekannte, saubere Sollkurve gibt es für diese Messung nicht. Die Folie belegt den rechnerischen Eingriff, aber keine vollständig abgesicherte physikalische Bereinigung.</a:t>
+              <a:t>Oben vergleichen wir die gemessene Netzfrequenz mit der Summe aller geschätzten Modellanteile. Der Mittelwert von etwa 59,773 Hertz ist abgezogen; die Achse zeigt deshalb Abweichungen in Millihertz. Unten steht der Rest: Messwert minus Modellwert an jedem Zeitpunkt.
+Über große Bereiche liegen beide Kurven dicht zusammen. Zwischen 240 und 243 Sekunden treten aber schnelle Änderungen auf, die das Modell nicht nachbildet. Dieser kurze Abschnitt trägt etwa 55 Prozent zur Fehlerquadratsumme bei. Seine Ursache bleibt offen.
+Die 17,05 Prozent entstehen so: Die typische Modellabweichung, der RMSE, beträgt 5,565 Millihertz. Bezogen wird sie auf die Stärke der gemessenen Schwankung, deren RMS 32,646 Millihertz beträgt. Verglichen werden also Signalwerte an denselben 301 Zeitpunkten, keine Frequenzen.
+Deshalb können die Frequenzen sehr gut stimmen, während das Gesamtmodell einen deutlichen Fehler hat. Ein Mangel unserer Schätzung ist das nicht: Nimmt man die drei Frequenzen und Abklingraten der Autoren und wählt Amplituden und Phasen so gut wie möglich, bleibt ein Fehler von 40,6 Prozent. Drei Moden reichen für diese 30 Sekunden schlicht nicht aus. Lässt man den Abschnitt von 240 bis 243 Sekunden weg, liegt unser Fehler immer noch bei 11,8 Prozent; der kurze Abschnitt ist also nicht der einzige Grund. Der Fehler liegt über der eingestellten Grenze von zehn Prozent, und der Code blockiert den Abzug: Die Filterausgabe ist exakt das Eingangssignal. Die zehn Prozent sind eine heuristische Schutzregel des Prototyps.</a:t>
             </a:r>
             <a:endParaRPr lang="en-US" dirty="0"/>
           </a:p>
@@ -1223,10 +1222,12 @@
           <a:p>
             <a:r>
               <a:rPr lang="en-US" dirty="0"/>
-              <a:t>Auch hier ist die Messung blau und die Filterausgabe orange, links der gesamte Verlauf, rechts der Abschnitt von vier bis sieben Sekunden.
-Beim positiven Frequenzsprung bricht P pos kurz nach einer Sekunde stark ein und pendelt danach. Abgezogen werden zwei Schwingungsanteile: der dominante bei 2,268 Hertz und ein zweiter bei 2,480 Hertz, der deutlich schneller abklingt. Die orange Kurve ist also die Messung minus die Summe beider Anteile.
-Im Ausschnitt bleiben kleine Restwellen sichtbar, die Bandenergie im Zielband sinkt aber um 99,87 Prozent. Vor einer Sekunde bleiben alle Werte unverändert.
-Das Gesamtmodell passt mit weniger als einem Prozent Fehler. Daraus folgt aber noch nicht, dass beide Anteile eindeutig reale Vorgänge beschreiben. Als Nächstes prüfen wir das Verfahren an einem externen Fall mit veröffentlichten Vergleichswerten.</a:t>
+              <a:t>Warum nehmen wir nicht einfach eine höhere Ordnung? Links steht der relative Fehler über der Modellordnung. Mit mehr Exponentialanteilen passt sich die Modellkurve immer besser an: 17,05 Prozent bei Ordnung zwölf, 12,83 bei 24 und 8,76 Prozent bei 36. Damit läge der Fehler unter der Zehn-Prozent-Grenze.
+Rechts sehen wir, warum das allein nicht reicht. Hier wird das Modell nur aus jedem zweiten Messwert geschätzt, also aus 151 Punkten; die 150 Zwischenpunkte bleiben unbenutzt. Blau ist der Fehler auf den verwendeten Punkten, Orange auf den ausgelassenen. Bei Ordnung 36 sind es 4,72 und 10,13 Prozent. Bei Ordnung 72 sinkt Blau auf 0,36 Prozent, Orange steigt aber auf 13,99 Prozent. Das ist ein Hinweis auf Überanpassung.
+Dazu verändert sich die Zerlegung: Für die Mode nahe 0,72 Hertz nennen die Autoren eine Amplitude von etwa 0,004 Hertz. Ordnung zwölf liefert 0,0045, Ordnung 36 dagegen 0,0213 Hertz. Eine bessere Gesamtkurve bedeutet also keine bessere physikalische Beschreibung.
+Außerdem tauchen bei Ordnung 36 zwei Schwingungen mit positiver Abklingrate auf, also Anteile, die mit der Zeit wachsen. Nach einem abklingenden Netzereignis ist das physikalisch nicht plausibel; das Modell nutzt sie nur, um die Kurve nachzuzeichnen.
+Deshalb nehmen wir keine höhere Ordnung, nur weil dann die Zehn-Prozent-Regel bestanden wäre. Die Ordnung so lange zu erhöhen, bis eine Prüfung besteht, würde die Schutzregel aushebeln, und der abgezogene Anteil hinge von einer willkürlichen Wahl ab.
+Diese Prüfung bleibt innerhalb derselben Aufzeichnung; benachbarte Werte hängen zusammen. Eine unabhängige Messung wäre der stärkere Nachweis. Damit sind die drei Prüfstufen abgeschlossen, und wir wenden das Verfahren auf unsere eigenen Messungen an.</a:t>
             </a:r>
             <a:endParaRPr lang="en-US" dirty="0"/>
           </a:p>
@@ -1314,10 +1315,11 @@
           <a:p>
             <a:r>
               <a:rPr lang="en-US" dirty="0"/>
-              <a:t>Jetzt wechseln wir zu einem externen Referenzfall. Wichtig: Die Messgröße ist hier nicht die Leistung, sondern die Netzfrequenz selbst, in Hertz. Die Aufzeichnung gehört zu einem Netzereignis in Mexiko vom 28. Dezember 2020; wir haben sie nicht selbst gemessen.
-Links sehen wir 301 Werte über 30 Sekunden im Abstand von einer Zehntelsekunde. Die Netzfrequenz liegt knapp unter 60 Hertz und schwankt langsam darüber und darunter; die Ausschläge werden kleiner.
-Andere Autoren haben dieselbe Zeitreihe im ROMA-Handbuch mit der ERA-Methode ausgewertet. Die Tabelle stellt ihre gerundeten Werte unseren Matrix-Pencil-Ergebnissen bei Ordnung zwölf gegenüber. Alle drei Frequenzen weichen um weniger als 0,06 Prozent ab, und auch die Abklingraten passen.
-Das spricht dafür, dass beide Verfahren ähnliche Schwingungsanteile erkennen. Die Autorenwerte sind jedoch Schätzungen, keine bekannten Wahrheitswerte. Die nächste Folie stellt eine andere Frage: Wie gut bildet das Gesamtmodell die ganze Kurve nach?</a:t>
+              <a:t>Nach den drei Prüfstufen kommen wir zur vierten: unseren eigenen Messungen, für die es keine unabhängige Referenz gibt. Die Tabelle fasst beide Leistungsmessungen zusammen, jeweils mit Ordnung zwölf von einer bis sieben Sekunden.
+In beiden Messungen liegt die dominante Schwingung bei 2,268 Hertz. Beim negativen Sprung klingt sie schneller ab, mit minus 0,192 pro Sekunde gegenüber minus 0,107. Die Anfangsamplitude bezieht sich auf den Beginn des Analyseabschnitts bei einer Sekunde und ist in der Dateieinheit angegeben, also vor der Division durch eine Million.
+Beide Modelle bilden die Messung auf dem Schätzraster mit weniger als einem Prozent Fehler nach, und beide Abzüge werden freigegeben.
+Der Unterschied steckt in der Zerlegung: Beim positiven Sprung liegt ein zweiter Anteil bei 2,480 Hertz im Zielband. Er klingt deutlich schneller ab und wird mit abgezogen. Ein ähnlich kleiner Gesamtfehler bedeutet also nicht dieselbe Zerlegung.
+Die letzte Zeile ist eine spektrale Vergleichsgröße: die Summe der quadrierten FFT-Beträge im Zielband zwischen vier und sieben Sekunden, vor und nach dem Abzug. Sie ist keine physikalische Energie.</a:t>
             </a:r>
             <a:endParaRPr lang="en-US" dirty="0"/>
           </a:p>
@@ -1405,10 +1407,10 @@
           <a:p>
             <a:r>
               <a:rPr lang="en-US" dirty="0"/>
-              <a:t>Oben vergleichen wir die gemessene Netzfrequenz mit der Summe aller geschätzten Modellanteile. Der Mittelwert von etwa 59,773 Hertz ist abgezogen; die Achse zeigt deshalb Abweichungen in Millihertz. Unten steht der Rest: Messwert minus Modellwert an jedem Zeitpunkt.
-Über große Bereiche liegen beide Kurven dicht zusammen. Zwischen 240 und 243 Sekunden treten aber schnelle Änderungen auf, die das Modell nicht nachbildet. Dieser kurze Abschnitt trägt etwa 55 Prozent zur Fehlerquadratsumme bei. Seine Ursache bleibt offen.
-Die 17,05 Prozent entstehen so: Die typische Modellabweichung, der RMSE, beträgt 5,565 Millihertz. Bezogen wird sie auf die Stärke der gemessenen Schwankung, deren RMS 32,646 Millihertz beträgt. Verglichen werden also Signalwerte an denselben 301 Zeitpunkten, keine Frequenzen.
-Deshalb können die Frequenzen sehr gut stimmen, während das Gesamtmodell einen deutlichen Fehler hat. Der Fehler liegt über der eingestellten Grenze von zehn Prozent, und der Code blockiert den Abzug: Die Filterausgabe ist exakt das Eingangssignal. Die zehn Prozent sind eine heuristische Schutzregel des Prototyps.</a:t>
+              <a:t>Diese Folie zeigt die Filterung der negativen Sprungantwort. Blau ist die Messung, Orange die Filterausgabe. Links steht der gesamte Verlauf, rechts der Abschnitt von vier bis sieben Sekunden vergrößert. In beiden Diagrammen ist P pos durch eine Million geteilt.
+Entfernt wird ein Polpaar, die Schwingung bei 2,268 Hertz. Im rechten Ausschnitt ist der Effekt deutlich: Die Pendelung verschwindet, übrig bleibt der langsam steigende Verlauf. Im linken Diagramm würde der große Übergang diesen Unterschied optisch verdecken; deshalb der vergrößerte Ausschnitt.
+Vor einer Sekunde sind Messung und Ausgabe identisch. Danach ist die Differenz genau der berechnete Abzugsanteil. Die Bandenergie im Zielband sinkt zwischen vier und sieben Sekunden um 99,999 Prozent.
+Eine unabhängig bekannte, saubere Sollkurve gibt es für diese Messung nicht. Die Folie belegt den rechnerischen Eingriff, aber keine vollständig abgesicherte physikalische Bereinigung.</a:t>
             </a:r>
             <a:endParaRPr lang="en-US" dirty="0"/>
           </a:p>
@@ -1496,10 +1498,10 @@
           <a:p>
             <a:r>
               <a:rPr lang="en-US" dirty="0"/>
-              <a:t>Würde eine höhere Ordnung das Problem lösen? Links steht der relative Fehler über der Modellordnung. Mit mehr Exponentialanteilen passt sich die Modellkurve immer besser an: 17,05 Prozent bei Ordnung zwölf, 12,83 bei 24 und 8,76 Prozent bei 36. Damit läge der Fehler unter der Zehn-Prozent-Grenze.
-Rechts sehen wir, warum das allein nicht reicht. Hier wird das Modell nur aus jedem zweiten Messwert geschätzt, also aus 151 Punkten; die 150 Zwischenpunkte bleiben unbenutzt. Blau ist der Fehler auf den verwendeten Punkten, Orange auf den ausgelassenen. Bei Ordnung 36 sind es 4,72 und 10,13 Prozent. Bei Ordnung 72 sinkt Blau auf 0,36 Prozent, Orange steigt aber auf 13,99 Prozent. Das ist ein Hinweis auf Überanpassung.
-Dazu verändert sich die Zerlegung: Für die Mode nahe 0,72 Hertz nennen die Autoren eine Amplitude von etwa 0,004 Hertz. Ordnung zwölf liefert 0,0045, Ordnung 36 dagegen 0,0213 Hertz. Eine bessere Gesamtkurve bedeutet also keine bessere physikalische Beschreibung.
-Diese Prüfung bleibt innerhalb derselben Aufzeichnung; benachbarte Werte hängen zusammen. Eine unabhängige Messung wäre der stärkere Nachweis.</a:t>
+              <a:t>Auch hier ist die Messung blau und die Filterausgabe orange, links der gesamte Verlauf, rechts der Abschnitt von vier bis sieben Sekunden.
+Beim positiven Frequenzsprung bricht P pos kurz nach einer Sekunde stark ein und pendelt danach. Abgezogen werden zwei Schwingungsanteile: der dominante bei 2,268 Hertz und ein zweiter bei 2,480 Hertz, der deutlich schneller abklingt. Die orange Kurve ist also die Messung minus die Summe beider Anteile.
+Im Ausschnitt bleiben kleine Restwellen sichtbar, die Bandenergie im Zielband sinkt aber um 99,87 Prozent. Vor einer Sekunde bleiben alle Werte unverändert.
+Das Gesamtmodell passt mit weniger als einem Prozent Fehler. Daraus folgt aber noch nicht, dass beide Anteile eindeutig reale Vorgänge beschreiben. Wie bei Mexiko gesehen, bestätigt ein kleiner Fehler allein keine physikalisch eindeutige Zerlegung.</a:t>
             </a:r>
             <a:endParaRPr lang="en-US" dirty="0"/>
           </a:p>
@@ -1679,10 +1681,10 @@
           <a:p>
             <a:r>
               <a:rPr lang="en-US" dirty="0"/>
-              <a:t>Zum Schluss die beiden Datengruppen nebeneinander.
-Links unsere Projektmessungen des Leistungskanals P pos. In beiden Sprungantworten liegt die Pendelung bei etwa 2,268 Hertz. Das Modell bildet die Messungen mit 0,763 und 0,594 Prozent Fehler nach, und beide Abzüge werden mit der Standardeinstellung freigegeben. Beim positiven Sprung werden dabei zwei Anteile abgezogen.
-Rechts der externe Fall aus Mexiko mit der Netzfrequenz als Messgröße. Die Frequenzen stimmen sehr gut mit der Veröffentlichung überein. Das Gesamtmodell hat bei Ordnung zwölf aber 17,05 Prozent Fehler, deshalb bleibt der Abzug blockiert. Eine höhere Ordnung senkt den Kurvenfehler, verändert aber die Zerlegung und zeigt Überanpassung.
-Daraus folgt: Eine gut erkannte Frequenz bestätigt noch keine ausreichende Rekonstruktion, und eine ausgeführte Filterung beweist noch keine physikalisch richtige Bereinigung. Für die realen Messungen fehlt eine unabhängig bekannte, saubere Referenzkurve. Diese Grenze gehört zur Bewertung der Ergebnisse dazu.</a:t>
+              <a:t>Zum Schluss die vier Prüfstufen im Überblick.
+Links die drei Stufen mit Referenz. Beim künstlichen Signal trifft die Filterausgabe die Sollkurve bis auf Rundungsfehler. Bei NIST findet Matrix Pencil die zertifizierten Parameter bis auf wenige Zehnmilliardstel relativ. Bei Mexiko stimmen die drei Frequenzen auf weniger als 0,06 Prozent mit der Veröffentlichung überein. Das Gesamtmodell hat dort aber 17,05 Prozent Fehler, und der Abzug bleibt blockiert. Eine höhere Ordnung würde die Grenze unterschreiten, zeigt aber Überanpassung und eine veränderte Zerlegung.
+Rechts unsere eigenen Messungen des Leistungskanals P pos. Nach beiden Frequenzsprüngen pendelt die Leistung mit etwa 2,268 Hertz. Das Modell bildet die Messungen mit 0,763 und 0,594 Prozent Fehler nach. Nach dem Abzug sinkt die spektrale Bandenergie im Zielband zwischen vier und sieben Sekunden um mehr als 99,8 Prozent. Beide Abzüge werden mit der Standardeinstellung freigegeben, beim positiven Sprung mit zwei Anteilen.
+Daraus folgt: Eine gut erkannte Frequenz bestätigt noch keine ausreichende Rekonstruktion, und eine ausgeführte Filterung beweist noch keine physikalisch richtige Bereinigung. Für die eigenen Messungen gibt es keine unabhängig bekannte, saubere Referenzkurve. Ihr Ergebnis ist so belastbar, wie die Prüfstufen das Verfahren bestätigt haben.</a:t>
             </a:r>
             <a:endParaRPr lang="en-US" dirty="0"/>
           </a:p>
@@ -2045,11 +2047,13 @@
           <a:p>
             <a:r>
               <a:rPr lang="en-US" dirty="0"/>
-              <a:t>Vorweg die vier wichtigsten Zahlen.
-Erstens: In beiden Leistungsmessungen pendelt der Kanal P pos mit etwa 2,268 Hertz, also gut zweimal pro Sekunde. Das ist eine Leistungspendelung, nicht die Netzfrequenz von 50 Hertz.
-Zweitens: Das Modell aus zwölf Exponentialanteilen bildet beide Messungen mit weniger als einem Prozent Fehler nach, gemessen auf dem Schätzraster mit 100 Werten pro Sekunde.
-Drittens: Nach dem Abzug des geschätzten Anteils sinkt die spektrale Bandenergie zwischen 1,76 und 2,64 Hertz im Abschnitt von vier bis sieben Sekunden um mehr als 99,8 Prozent. Das ist eine spektrale Vergleichsgröße, keine physikalische Energie.
-Viertens, der Gegenfall: Bei der Netzfrequenzmessung aus Mexiko stimmen die Frequenzen sehr gut mit der Veröffentlichung überein, das Gesamtmodell hat aber 17,05 Prozent Fehler. Deshalb blockiert die Prüfregel dort den Abzug. Genau diese Trennung zwischen Erkennen und Freigeben zieht sich durch die ganze Präsentation.</a:t>
+              <a:t>Bevor wir rechnen, der Plan für den Rest des Vortrags. Ergebnisse zeige ich bewusst noch nicht: Zahlen wie ein Modellfehler oder eine Frequenz sagen erst etwas, wenn man weiß, wie sie entstehen und wie weit man ihnen trauen kann.
+Deshalb gehen wir vom Bekannten zum Unbekannten, in vier Stufen. Von links nach rechts wird die Referenz, an der wir das Ergebnis messen können, schwächer.
+Stufe eins ist ein künstliches Signal ohne Rauschen. Wir kennen jeden Anteil und damit auch das gewünschte Ergebnis nach dem Filtern, die Sollkurve. Hier lässt sich der komplette Rechenweg bis zum Abzug exakt prüfen.
+Stufe zwei ist ein Referenzdatensatz des amerikanischen Normungsinstituts NIST. Bekannt sind die zertifizierten Modellparameter. Geprüft wird nur, ob Matrix Pencil diese Parameter wiederfindet.
+Stufe drei ist eine echte Messung aus Mexiko, die andere Autoren bereits ausgewertet haben. Deren Werte sind selbst Schätzungen, also keine Wahrheit, aber ein unabhängiger Vergleich. Hier sehen wir auch, wie die Schutzregel des Filters reagiert, wenn das Modell die Kurve nicht gut genug beschreibt.
+Stufe vier sind unsere eigenen Messungen. Dafür gibt es keine unabhängige Referenz. Wir können ihnen nur so weit trauen, wie die ersten drei Stufen das Verfahren bestätigt haben.
+Vorher, auf den Folien sechs bis elf, schauen wir uns die Messung an und wie Matrix Pencil aus ihr Frequenz und Abklingen gewinnt.</a:t>
             </a:r>
             <a:endParaRPr lang="en-US" dirty="0"/>
           </a:p>
@@ -4759,7 +4763,7 @@
                 <a:ea typeface="Consolas" pitchFamily="34" charset="-122"/>
                 <a:cs typeface="Consolas" pitchFamily="34" charset="-120"/>
               </a:rPr>
-              <a:t>KONTROLLIERTE PRÜFUNG · SYNTHETISCHES SIGNAL</a:t>
+              <a:t>PRÜFSTUFE 1 · SYNTHETISCHES SIGNAL</a:t>
             </a:r>
             <a:endParaRPr lang="en-US" sz="1200" dirty="0"/>
           </a:p>
@@ -4800,7 +4804,7 @@
                 <a:ea typeface="Calibri" pitchFamily="34" charset="-122"/>
                 <a:cs typeface="Calibri" pitchFamily="34" charset="-120"/>
               </a:rPr>
-              <a:t>Prüfung 1: bekannte Sollkurve</a:t>
+              <a:t>Bekannte Sollkurve: Rechenweg exakt</a:t>
             </a:r>
             <a:endParaRPr lang="en-US" sz="3200" dirty="0"/>
           </a:p>
@@ -4842,7 +4846,7 @@
                 <a:ea typeface="Calibri" pitchFamily="34" charset="-122"/>
                 <a:cs typeface="Calibri" pitchFamily="34" charset="-120"/>
               </a:rPr>
-              <a:t>Diagramm: Abschnitt 1 bis 5 s · Signalwert in willkürlichen Einheiten (a. E.)</a:t>
+              <a:t>Erzeugung: examples/synthetic_reference.py · 1200 Werte, 0 bis 11,99 s, Δt = 0,01 s · Signalwert in willkürlichen Einheiten (a. E.)</a:t>
             </a:r>
             <a:endParaRPr lang="en-US" sz="1200" dirty="0"/>
           </a:p>
@@ -4865,7 +4869,7 @@
         <p:spPr>
           <a:xfrm>
             <a:off x="812800" y="1879600"/>
-            <a:ext cx="5588000" cy="3911600"/>
+            <a:ext cx="5080000" cy="3911600"/>
           </a:xfrm>
           <a:prstGeom prst="rect">
             <a:avLst/>
@@ -4881,7 +4885,7 @@
         <p:spPr>
           <a:xfrm>
             <a:off x="812800" y="1879600"/>
-            <a:ext cx="5588000" cy="3911600"/>
+            <a:ext cx="5080000" cy="3911600"/>
           </a:xfrm>
           <a:prstGeom prst="roundRect">
             <a:avLst>
@@ -4904,8 +4908,8 @@
         </p:nvSpPr>
         <p:spPr>
           <a:xfrm>
-            <a:off x="6807200" y="1879600"/>
-            <a:ext cx="4572000" cy="266700"/>
+            <a:off x="6248400" y="1879600"/>
+            <a:ext cx="5130800" cy="266700"/>
           </a:xfrm>
           <a:prstGeom prst="rect">
             <a:avLst/>
@@ -4932,22 +4936,46 @@
                 <a:ea typeface="Calibri" pitchFamily="34" charset="-122"/>
                 <a:cs typeface="Calibri" pitchFamily="34" charset="-120"/>
               </a:rPr>
-              <a:t>Testsignal</a:t>
+              <a:t>Testsignal ab dem Sprung (τ = t − 1 s)</a:t>
             </a:r>
             <a:endParaRPr lang="en-US" sz="1500" dirty="0"/>
           </a:p>
         </p:txBody>
       </p:sp>
-      <p:sp>
-        <p:nvSpPr>
-          <p:cNvPr id="9" name="Text 5"/>
+      <p:pic>
+        <p:nvPicPr>
+          <p:cNvPr id="9" name="Image 1" descr="syn">    </p:cNvPr>
+          <p:cNvPicPr>
+            <a:picLocks noChangeAspect="1"/>
+          </p:cNvPicPr>
+          <p:nvPr/>
+        </p:nvPicPr>
+        <p:blipFill>
+          <a:blip r:embed="rId2"/>
+          <a:stretch>
+            <a:fillRect/>
+          </a:stretch>
+        </p:blipFill>
+        <p:spPr>
+          <a:xfrm>
+            <a:off x="6248400" y="2197100"/>
+            <a:ext cx="4521200" cy="482600"/>
+          </a:xfrm>
+          <a:prstGeom prst="rect">
+            <a:avLst/>
+          </a:prstGeom>
+        </p:spPr>
+      </p:pic>
+      <p:sp>
+        <p:nvSpPr>
+          <p:cNvPr id="10" name="Text 5"/>
           <p:cNvSpPr txBox="1"/>
           <p:nvPr/>
         </p:nvSpPr>
         <p:spPr>
           <a:xfrm>
-            <a:off x="6807200" y="2197100"/>
-            <a:ext cx="4572000" cy="571500"/>
+            <a:off x="6248400" y="2755900"/>
+            <a:ext cx="5130800" cy="228600"/>
           </a:xfrm>
           <a:prstGeom prst="rect">
             <a:avLst/>
@@ -4966,7 +4994,7 @@
               <a:buNone/>
             </a:pPr>
             <a:r>
-              <a:rPr lang="en-US" sz="1500" dirty="0">
+              <a:rPr lang="en-US" sz="1200" dirty="0">
                 <a:solidFill>
                   <a:srgbClr val="44505E"/>
                 </a:solidFill>
@@ -4974,22 +5002,22 @@
                 <a:ea typeface="Calibri" pitchFamily="34" charset="-122"/>
                 <a:cs typeface="Calibri" pitchFamily="34" charset="-120"/>
               </a:rPr>
-              <a:t>Grundwertsprung plus Schwingungen bei 2,24 Hz und 5 Hz, ohne Rauschen.</a:t>
-            </a:r>
-            <a:endParaRPr lang="en-US" sz="1500" dirty="0"/>
-          </a:p>
-        </p:txBody>
-      </p:sp>
-      <p:sp>
-        <p:nvSpPr>
-          <p:cNvPr id="10" name="Text 6"/>
+              <a:t>Vor 1 s gilt x = 100. Sollkurve = Eingang ohne den 2,24-Hz-Anteil.</a:t>
+            </a:r>
+            <a:endParaRPr lang="en-US" sz="1200" dirty="0"/>
+          </a:p>
+        </p:txBody>
+      </p:sp>
+      <p:sp>
+        <p:nvSpPr>
+          <p:cNvPr id="11" name="Text 6"/>
           <p:cNvSpPr txBox="1"/>
           <p:nvPr/>
         </p:nvSpPr>
         <p:spPr>
           <a:xfrm>
-            <a:off x="6807200" y="2882900"/>
-            <a:ext cx="4572000" cy="266700"/>
+            <a:off x="6248400" y="3149600"/>
+            <a:ext cx="5130800" cy="266700"/>
           </a:xfrm>
           <a:prstGeom prst="rect">
             <a:avLst/>
@@ -5016,7 +5044,7 @@
                 <a:ea typeface="Calibri" pitchFamily="34" charset="-122"/>
                 <a:cs typeface="Calibri" pitchFamily="34" charset="-120"/>
               </a:rPr>
-              <a:t>Aufgabe</a:t>
+              <a:t>Warum die Kurven übereinanderliegen</a:t>
             </a:r>
             <a:endParaRPr lang="en-US" sz="1500" dirty="0"/>
           </a:p>
@@ -5024,14 +5052,14 @@
       </p:sp>
       <p:sp>
         <p:nvSpPr>
-          <p:cNvPr id="11" name="Text 7"/>
+          <p:cNvPr id="12" name="Text 7"/>
           <p:cNvSpPr txBox="1"/>
           <p:nvPr/>
         </p:nvSpPr>
         <p:spPr>
           <a:xfrm>
-            <a:off x="6807200" y="3200400"/>
-            <a:ext cx="4572000" cy="571500"/>
+            <a:off x="6248400" y="3467100"/>
+            <a:ext cx="5130800" cy="838200"/>
           </a:xfrm>
           <a:prstGeom prst="rect">
             <a:avLst/>
@@ -5058,7 +5086,7 @@
                 <a:ea typeface="Calibri" pitchFamily="34" charset="-122"/>
                 <a:cs typeface="Calibri" pitchFamily="34" charset="-120"/>
               </a:rPr>
-              <a:t>Nur den 2,24-Hz-Anteil entfernen; der 5-Hz-Anteil soll bleiben.</a:t>
+              <a:t>Das Signal ist exakt eine Summe gedämpfter Schwingungen. Mit Ordnung 5 findet Matrix Pencil alle Pole exakt und zieht genau den 2,24-Hz-Anteil ab.</a:t>
             </a:r>
             <a:endParaRPr lang="en-US" sz="1500" dirty="0"/>
           </a:p>
@@ -5066,14 +5094,14 @@
       </p:sp>
       <p:sp>
         <p:nvSpPr>
-          <p:cNvPr id="12" name="Text 8"/>
+          <p:cNvPr id="13" name="Text 8"/>
           <p:cNvSpPr txBox="1"/>
           <p:nvPr/>
         </p:nvSpPr>
         <p:spPr>
           <a:xfrm>
-            <a:off x="6807200" y="3886200"/>
-            <a:ext cx="4572000" cy="266700"/>
+            <a:off x="6248400" y="4419600"/>
+            <a:ext cx="5130800" cy="266700"/>
           </a:xfrm>
           <a:prstGeom prst="rect">
             <a:avLst/>
@@ -5108,14 +5136,14 @@
       </p:sp>
       <p:sp>
         <p:nvSpPr>
-          <p:cNvPr id="13" name="Text 9"/>
+          <p:cNvPr id="14" name="Text 9"/>
           <p:cNvSpPr txBox="1"/>
           <p:nvPr/>
         </p:nvSpPr>
         <p:spPr>
           <a:xfrm>
-            <a:off x="6807200" y="4203700"/>
-            <a:ext cx="4572000" cy="838200"/>
+            <a:off x="6248400" y="4737100"/>
+            <a:ext cx="5130800" cy="571500"/>
           </a:xfrm>
           <a:prstGeom prst="rect">
             <a:avLst/>
@@ -5142,7 +5170,7 @@
                 <a:ea typeface="Calibri" pitchFamily="34" charset="-122"/>
                 <a:cs typeface="Calibri" pitchFamily="34" charset="-120"/>
               </a:rPr>
-              <a:t>Ausgabe und Sollkurve liegen übereinander. Größte Abweichung über 1200 Werte: &lt; 3 · 10⁻¹³.</a:t>
+              <a:t>Größte Differenz über alle 1200 Werte: 6,7 · 10⁻¹³, also Rundung der Gleitkommarechnung.</a:t>
             </a:r>
             <a:endParaRPr lang="en-US" sz="1500" dirty="0"/>
           </a:p>
@@ -5257,7 +5285,7 @@
                 <a:ea typeface="Consolas" pitchFamily="34" charset="-122"/>
                 <a:cs typeface="Consolas" pitchFamily="34" charset="-120"/>
               </a:rPr>
-              <a:t>KONTROLLIERTE PRÜFUNG · NIST LANCZOS1</a:t>
+              <a:t>PRÜFSTUFE 2 · NIST LANCZOS1</a:t>
             </a:r>
             <a:endParaRPr lang="en-US" sz="1200" dirty="0"/>
           </a:p>
@@ -5298,7 +5326,7 @@
                 <a:ea typeface="Calibri" pitchFamily="34" charset="-122"/>
                 <a:cs typeface="Calibri" pitchFamily="34" charset="-120"/>
               </a:rPr>
-              <a:t>Prüfung 2: NIST-Referenzmodell</a:t>
+              <a:t>NIST: zertifizierte Parameter wiedergefunden</a:t>
             </a:r>
             <a:endParaRPr lang="en-US" sz="3200" dirty="0"/>
           </a:p>
@@ -5340,7 +5368,7 @@
                 <a:ea typeface="Calibri" pitchFamily="34" charset="-122"/>
                 <a:cs typeface="Calibri" pitchFamily="34" charset="-120"/>
               </a:rPr>
-              <a:t>Quelle: NIST StRD Lanczos1 (24 künstliche Werte) · Werte auf vier Nachkommastellen gerundet</a:t>
+              <a:t>Quelle: NIST StRD, Datensatz Lanczos1 nach Lanczos (1956), zertifizierte Werte mit 11 Stellen · Ordnung 3, ohne Mittelwertabzug</a:t>
             </a:r>
             <a:endParaRPr lang="en-US" sz="1200" dirty="0"/>
           </a:p>
@@ -5402,8 +5430,8 @@
         </p:nvSpPr>
         <p:spPr>
           <a:xfrm>
-            <a:off x="6807200" y="1879600"/>
-            <a:ext cx="4572000" cy="266700"/>
+            <a:off x="6756400" y="1879600"/>
+            <a:ext cx="4622800" cy="444500"/>
           </a:xfrm>
           <a:prstGeom prst="rect">
             <a:avLst/>
@@ -5422,7 +5450,7 @@
               <a:buNone/>
             </a:pPr>
             <a:r>
-              <a:rPr lang="en-US" sz="1500" dirty="0">
+              <a:rPr lang="en-US" sz="1200" dirty="0">
                 <a:solidFill>
                   <a:srgbClr val="44505E"/>
                 </a:solidFill>
@@ -5430,9 +5458,9 @@
                 <a:ea typeface="Calibri" pitchFamily="34" charset="-122"/>
                 <a:cs typeface="Calibri" pitchFamily="34" charset="-120"/>
               </a:rPr>
-              <a:t>Drei abklingende Exponentialanteile, keine Schwingung:</a:t>
-            </a:r>
-            <a:endParaRPr lang="en-US" sz="1500" dirty="0"/>
+              <a:t>24 Werte, x = 0 bis 1,15 in Schritten von 0,05, aus drei abklingenden Anteilen:</a:t>
+            </a:r>
+            <a:endParaRPr lang="en-US" sz="1200" dirty="0"/>
           </a:p>
         </p:txBody>
       </p:sp>
@@ -5452,7 +5480,7 @@
         </p:blipFill>
         <p:spPr>
           <a:xfrm>
-            <a:off x="6807200" y="2184400"/>
+            <a:off x="6756400" y="2362200"/>
             <a:ext cx="2762250" cy="323850"/>
           </a:xfrm>
           <a:prstGeom prst="rect">
@@ -5475,17 +5503,18 @@
           </p:nvPr>
         </p:nvGraphicFramePr>
         <p:xfrm>
-          <a:off x="6807200" y="2603500"/>
-          <a:ext cx="4572000" cy="914400"/>
+          <a:off x="6756400" y="2832100"/>
+          <a:ext cx="4622800" cy="914400"/>
         </p:xfrm>
         <a:graphic>
           <a:graphicData uri="http://schemas.openxmlformats.org/drawingml/2006/table">
             <a:tbl>
               <a:tblPr/>
               <a:tblGrid>
-                <a:gridCol w="2006600"/>
-                <a:gridCol w="1282700"/>
-                <a:gridCol w="1282700"/>
+                <a:gridCol w="762000"/>
+                <a:gridCol w="1270000"/>
+                <a:gridCol w="1143000"/>
+                <a:gridCol w="1447800"/>
               </a:tblGrid>
               <a:tr h="0">
                 <a:tc>
@@ -5497,7 +5526,7 @@
                         <a:buNone/>
                       </a:pPr>
                       <a:r>
-                        <a:rPr lang="en-US" sz="1300" b="1" dirty="0">
+                        <a:rPr lang="en-US" sz="1200" b="1" dirty="0">
                           <a:solidFill>
                             <a:srgbClr val="14202E"/>
                           </a:solidFill>
@@ -5505,9 +5534,9 @@
                           <a:ea typeface="Calibri" pitchFamily="34" charset="-122"/>
                           <a:cs typeface="Calibri" pitchFamily="34" charset="-120"/>
                         </a:rPr>
-                        <a:t>Parameter</a:t>
+                        <a:t>Anteil</a:t>
                       </a:r>
-                      <a:endParaRPr lang="en-US" sz="1300" dirty="0">
+                      <a:endParaRPr lang="en-US" sz="1200" dirty="0">
                         <a:latin typeface="Calibri" charset="0"/>
                         <a:ea typeface="Calibri" charset="0"/>
                         <a:cs typeface="Calibri" charset="0"/>
@@ -5565,7 +5594,7 @@
                         <a:buNone/>
                       </a:pPr>
                       <a:r>
-                        <a:rPr lang="en-US" sz="1300" b="1" dirty="0">
+                        <a:rPr lang="en-US" sz="1200" b="1" dirty="0">
                           <a:solidFill>
                             <a:srgbClr val="14202E"/>
                           </a:solidFill>
@@ -5573,9 +5602,9 @@
                           <a:ea typeface="Calibri" pitchFamily="34" charset="-122"/>
                           <a:cs typeface="Calibri" pitchFamily="34" charset="-120"/>
                         </a:rPr>
-                        <a:t>NIST</a:t>
+                        <a:t>Gewicht</a:t>
                       </a:r>
-                      <a:endParaRPr lang="en-US" sz="1300" dirty="0">
+                      <a:endParaRPr lang="en-US" sz="1200" dirty="0">
                         <a:latin typeface="Calibri" charset="0"/>
                         <a:ea typeface="Calibri" charset="0"/>
                         <a:cs typeface="Calibri" charset="0"/>
@@ -5633,7 +5662,7 @@
                         <a:buNone/>
                       </a:pPr>
                       <a:r>
-                        <a:rPr lang="en-US" sz="1300" b="1" dirty="0">
+                        <a:rPr lang="en-US" sz="1200" b="1" dirty="0">
                           <a:solidFill>
                             <a:srgbClr val="14202E"/>
                           </a:solidFill>
@@ -5641,9 +5670,77 @@
                           <a:ea typeface="Calibri" pitchFamily="34" charset="-122"/>
                           <a:cs typeface="Calibri" pitchFamily="34" charset="-120"/>
                         </a:rPr>
-                        <a:t>Matrix Pencil</a:t>
+                        <a:t>Abklingrate</a:t>
                       </a:r>
-                      <a:endParaRPr lang="en-US" sz="1300" dirty="0">
+                      <a:endParaRPr lang="en-US" sz="1200" dirty="0">
+                        <a:latin typeface="Calibri" charset="0"/>
+                        <a:ea typeface="Calibri" charset="0"/>
+                        <a:cs typeface="Calibri" charset="0"/>
+                      </a:endParaRPr>
+                    </a:p>
+                  </a:txBody>
+                  <a:tcPr marL="76200" marR="76200" marT="38100" marB="38100" anchor="ctr">
+                    <a:lnL w="9525" cap="flat" cmpd="sng" algn="ctr">
+                      <a:solidFill>
+                        <a:srgbClr val="D9D8D1"/>
+                      </a:solidFill>
+                      <a:prstDash val="solid"/>
+                      <a:round/>
+                      <a:headEnd type="none" w="med" len="med"/>
+                      <a:tailEnd type="none" w="med" len="med"/>
+                    </a:lnL>
+                    <a:lnR w="9525" cap="flat" cmpd="sng" algn="ctr">
+                      <a:solidFill>
+                        <a:srgbClr val="D9D8D1"/>
+                      </a:solidFill>
+                      <a:prstDash val="solid"/>
+                      <a:round/>
+                      <a:headEnd type="none" w="med" len="med"/>
+                      <a:tailEnd type="none" w="med" len="med"/>
+                    </a:lnR>
+                    <a:lnT w="9525" cap="flat" cmpd="sng" algn="ctr">
+                      <a:solidFill>
+                        <a:srgbClr val="D9D8D1"/>
+                      </a:solidFill>
+                      <a:prstDash val="solid"/>
+                      <a:round/>
+                      <a:headEnd type="none" w="med" len="med"/>
+                      <a:tailEnd type="none" w="med" len="med"/>
+                    </a:lnT>
+                    <a:lnB w="9525" cap="flat" cmpd="sng" algn="ctr">
+                      <a:solidFill>
+                        <a:srgbClr val="D9D8D1"/>
+                      </a:solidFill>
+                      <a:prstDash val="solid"/>
+                      <a:round/>
+                      <a:headEnd type="none" w="med" len="med"/>
+                      <a:tailEnd type="none" w="med" len="med"/>
+                    </a:lnB>
+                    <a:solidFill>
+                      <a:srgbClr val="E9E8E2"/>
+                    </a:solidFill>
+                  </a:tcPr>
+                </a:tc>
+                <a:tc>
+                  <a:txBody>
+                    <a:bodyPr/>
+                    <a:lstStyle/>
+                    <a:p>
+                      <a:pPr algn="r" indent="0" marL="0">
+                        <a:buNone/>
+                      </a:pPr>
+                      <a:r>
+                        <a:rPr lang="en-US" sz="1200" b="1" dirty="0">
+                          <a:solidFill>
+                            <a:srgbClr val="14202E"/>
+                          </a:solidFill>
+                          <a:latin typeface="Calibri" pitchFamily="34" charset="0"/>
+                          <a:ea typeface="Calibri" pitchFamily="34" charset="-122"/>
+                          <a:cs typeface="Calibri" pitchFamily="34" charset="-120"/>
+                        </a:rPr>
+                        <a:t>Abweichung MP</a:t>
+                      </a:r>
+                      <a:endParaRPr lang="en-US" sz="1200" dirty="0">
                         <a:latin typeface="Calibri" charset="0"/>
                         <a:ea typeface="Calibri" charset="0"/>
                         <a:cs typeface="Calibri" charset="0"/>
@@ -5703,7 +5800,7 @@
                         <a:buNone/>
                       </a:pPr>
                       <a:r>
-                        <a:rPr lang="en-US" sz="1300" dirty="0">
+                        <a:rPr lang="en-US" sz="1200" dirty="0">
                           <a:solidFill>
                             <a:srgbClr val="14202E"/>
                           </a:solidFill>
@@ -5711,9 +5808,9 @@
                           <a:ea typeface="Calibri" pitchFamily="34" charset="-122"/>
                           <a:cs typeface="Calibri" pitchFamily="34" charset="-120"/>
                         </a:rPr>
-                        <a:t>Gewicht b1</a:t>
+                        <a:t>1</a:t>
                       </a:r>
-                      <a:endParaRPr lang="en-US" sz="1300" dirty="0">
+                      <a:endParaRPr lang="en-US" sz="1200" dirty="0">
                         <a:latin typeface="Calibri" charset="0"/>
                         <a:ea typeface="Calibri" charset="0"/>
                         <a:cs typeface="Calibri" charset="0"/>
@@ -5771,7 +5868,7 @@
                         <a:buNone/>
                       </a:pPr>
                       <a:r>
-                        <a:rPr lang="en-US" sz="1300" dirty="0">
+                        <a:rPr lang="en-US" sz="1200" dirty="0">
                           <a:solidFill>
                             <a:srgbClr val="14202E"/>
                           </a:solidFill>
@@ -5779,9 +5876,9 @@
                           <a:ea typeface="Calibri" pitchFamily="34" charset="-122"/>
                           <a:cs typeface="Calibri" pitchFamily="34" charset="-120"/>
                         </a:rPr>
-                        <a:t>0,0951</a:t>
+                        <a:t>b₁ = 0,0951</a:t>
                       </a:r>
-                      <a:endParaRPr lang="en-US" sz="1300" dirty="0">
+                      <a:endParaRPr lang="en-US" sz="1200" dirty="0">
                         <a:latin typeface="Calibri" charset="0"/>
                         <a:ea typeface="Calibri" charset="0"/>
                         <a:cs typeface="Calibri" charset="0"/>
@@ -5839,7 +5936,7 @@
                         <a:buNone/>
                       </a:pPr>
                       <a:r>
-                        <a:rPr lang="en-US" sz="1300" dirty="0">
+                        <a:rPr lang="en-US" sz="1200" dirty="0">
                           <a:solidFill>
                             <a:srgbClr val="14202E"/>
                           </a:solidFill>
@@ -5847,9 +5944,77 @@
                           <a:ea typeface="Calibri" pitchFamily="34" charset="-122"/>
                           <a:cs typeface="Calibri" pitchFamily="34" charset="-120"/>
                         </a:rPr>
-                        <a:t>0,0951</a:t>
+                        <a:t>b₂ = 1</a:t>
                       </a:r>
-                      <a:endParaRPr lang="en-US" sz="1300" dirty="0">
+                      <a:endParaRPr lang="en-US" sz="1200" dirty="0">
+                        <a:latin typeface="Calibri" charset="0"/>
+                        <a:ea typeface="Calibri" charset="0"/>
+                        <a:cs typeface="Calibri" charset="0"/>
+                      </a:endParaRPr>
+                    </a:p>
+                  </a:txBody>
+                  <a:tcPr marL="76200" marR="76200" marT="38100" marB="38100" anchor="ctr">
+                    <a:lnL w="9525" cap="flat" cmpd="sng" algn="ctr">
+                      <a:solidFill>
+                        <a:srgbClr val="D9D8D1"/>
+                      </a:solidFill>
+                      <a:prstDash val="solid"/>
+                      <a:round/>
+                      <a:headEnd type="none" w="med" len="med"/>
+                      <a:tailEnd type="none" w="med" len="med"/>
+                    </a:lnL>
+                    <a:lnR w="9525" cap="flat" cmpd="sng" algn="ctr">
+                      <a:solidFill>
+                        <a:srgbClr val="D9D8D1"/>
+                      </a:solidFill>
+                      <a:prstDash val="solid"/>
+                      <a:round/>
+                      <a:headEnd type="none" w="med" len="med"/>
+                      <a:tailEnd type="none" w="med" len="med"/>
+                    </a:lnR>
+                    <a:lnT w="9525" cap="flat" cmpd="sng" algn="ctr">
+                      <a:solidFill>
+                        <a:srgbClr val="D9D8D1"/>
+                      </a:solidFill>
+                      <a:prstDash val="solid"/>
+                      <a:round/>
+                      <a:headEnd type="none" w="med" len="med"/>
+                      <a:tailEnd type="none" w="med" len="med"/>
+                    </a:lnT>
+                    <a:lnB w="9525" cap="flat" cmpd="sng" algn="ctr">
+                      <a:solidFill>
+                        <a:srgbClr val="D9D8D1"/>
+                      </a:solidFill>
+                      <a:prstDash val="solid"/>
+                      <a:round/>
+                      <a:headEnd type="none" w="med" len="med"/>
+                      <a:tailEnd type="none" w="med" len="med"/>
+                    </a:lnB>
+                    <a:solidFill>
+                      <a:srgbClr val="F4F3EF"/>
+                    </a:solidFill>
+                  </a:tcPr>
+                </a:tc>
+                <a:tc>
+                  <a:txBody>
+                    <a:bodyPr/>
+                    <a:lstStyle/>
+                    <a:p>
+                      <a:pPr algn="r" indent="0" marL="0">
+                        <a:buNone/>
+                      </a:pPr>
+                      <a:r>
+                        <a:rPr lang="en-US" sz="1200" dirty="0">
+                          <a:solidFill>
+                            <a:srgbClr val="14202E"/>
+                          </a:solidFill>
+                          <a:latin typeface="Calibri" pitchFamily="34" charset="0"/>
+                          <a:ea typeface="Calibri" pitchFamily="34" charset="-122"/>
+                          <a:cs typeface="Calibri" pitchFamily="34" charset="-120"/>
+                        </a:rPr>
+                        <a:t>3 · 10⁻¹⁰</a:t>
+                      </a:r>
+                      <a:endParaRPr lang="en-US" sz="1200" dirty="0">
                         <a:latin typeface="Calibri" charset="0"/>
                         <a:ea typeface="Calibri" charset="0"/>
                         <a:cs typeface="Calibri" charset="0"/>
@@ -5909,7 +6074,7 @@
                         <a:buNone/>
                       </a:pPr>
                       <a:r>
-                        <a:rPr lang="en-US" sz="1300" dirty="0">
+                        <a:rPr lang="en-US" sz="1200" dirty="0">
                           <a:solidFill>
                             <a:srgbClr val="14202E"/>
                           </a:solidFill>
@@ -5917,9 +6082,9 @@
                           <a:ea typeface="Calibri" pitchFamily="34" charset="-122"/>
                           <a:cs typeface="Calibri" pitchFamily="34" charset="-120"/>
                         </a:rPr>
-                        <a:t>Abklingrate b2</a:t>
+                        <a:t>2</a:t>
                       </a:r>
-                      <a:endParaRPr lang="en-US" sz="1300" dirty="0">
+                      <a:endParaRPr lang="en-US" sz="1200" dirty="0">
                         <a:latin typeface="Calibri" charset="0"/>
                         <a:ea typeface="Calibri" charset="0"/>
                         <a:cs typeface="Calibri" charset="0"/>
@@ -5977,7 +6142,7 @@
                         <a:buNone/>
                       </a:pPr>
                       <a:r>
-                        <a:rPr lang="en-US" sz="1300" dirty="0">
+                        <a:rPr lang="en-US" sz="1200" dirty="0">
                           <a:solidFill>
                             <a:srgbClr val="14202E"/>
                           </a:solidFill>
@@ -5985,9 +6150,9 @@
                           <a:ea typeface="Calibri" pitchFamily="34" charset="-122"/>
                           <a:cs typeface="Calibri" pitchFamily="34" charset="-120"/>
                         </a:rPr>
-                        <a:t>1,0000</a:t>
+                        <a:t>b₃ = 0,8607</a:t>
                       </a:r>
-                      <a:endParaRPr lang="en-US" sz="1300" dirty="0">
+                      <a:endParaRPr lang="en-US" sz="1200" dirty="0">
                         <a:latin typeface="Calibri" charset="0"/>
                         <a:ea typeface="Calibri" charset="0"/>
                         <a:cs typeface="Calibri" charset="0"/>
@@ -6045,7 +6210,7 @@
                         <a:buNone/>
                       </a:pPr>
                       <a:r>
-                        <a:rPr lang="en-US" sz="1300" dirty="0">
+                        <a:rPr lang="en-US" sz="1200" dirty="0">
                           <a:solidFill>
                             <a:srgbClr val="14202E"/>
                           </a:solidFill>
@@ -6053,9 +6218,77 @@
                           <a:ea typeface="Calibri" pitchFamily="34" charset="-122"/>
                           <a:cs typeface="Calibri" pitchFamily="34" charset="-120"/>
                         </a:rPr>
-                        <a:t>1,0000</a:t>
+                        <a:t>b₄ = 3</a:t>
                       </a:r>
-                      <a:endParaRPr lang="en-US" sz="1300" dirty="0">
+                      <a:endParaRPr lang="en-US" sz="1200" dirty="0">
+                        <a:latin typeface="Calibri" charset="0"/>
+                        <a:ea typeface="Calibri" charset="0"/>
+                        <a:cs typeface="Calibri" charset="0"/>
+                      </a:endParaRPr>
+                    </a:p>
+                  </a:txBody>
+                  <a:tcPr marL="76200" marR="76200" marT="38100" marB="38100" anchor="ctr">
+                    <a:lnL w="9525" cap="flat" cmpd="sng" algn="ctr">
+                      <a:solidFill>
+                        <a:srgbClr val="D9D8D1"/>
+                      </a:solidFill>
+                      <a:prstDash val="solid"/>
+                      <a:round/>
+                      <a:headEnd type="none" w="med" len="med"/>
+                      <a:tailEnd type="none" w="med" len="med"/>
+                    </a:lnL>
+                    <a:lnR w="9525" cap="flat" cmpd="sng" algn="ctr">
+                      <a:solidFill>
+                        <a:srgbClr val="D9D8D1"/>
+                      </a:solidFill>
+                      <a:prstDash val="solid"/>
+                      <a:round/>
+                      <a:headEnd type="none" w="med" len="med"/>
+                      <a:tailEnd type="none" w="med" len="med"/>
+                    </a:lnR>
+                    <a:lnT w="9525" cap="flat" cmpd="sng" algn="ctr">
+                      <a:solidFill>
+                        <a:srgbClr val="D9D8D1"/>
+                      </a:solidFill>
+                      <a:prstDash val="solid"/>
+                      <a:round/>
+                      <a:headEnd type="none" w="med" len="med"/>
+                      <a:tailEnd type="none" w="med" len="med"/>
+                    </a:lnT>
+                    <a:lnB w="9525" cap="flat" cmpd="sng" algn="ctr">
+                      <a:solidFill>
+                        <a:srgbClr val="D9D8D1"/>
+                      </a:solidFill>
+                      <a:prstDash val="solid"/>
+                      <a:round/>
+                      <a:headEnd type="none" w="med" len="med"/>
+                      <a:tailEnd type="none" w="med" len="med"/>
+                    </a:lnB>
+                    <a:solidFill>
+                      <a:srgbClr val="F4F3EF"/>
+                    </a:solidFill>
+                  </a:tcPr>
+                </a:tc>
+                <a:tc>
+                  <a:txBody>
+                    <a:bodyPr/>
+                    <a:lstStyle/>
+                    <a:p>
+                      <a:pPr algn="r" indent="0" marL="0">
+                        <a:buNone/>
+                      </a:pPr>
+                      <a:r>
+                        <a:rPr lang="en-US" sz="1200" dirty="0">
+                          <a:solidFill>
+                            <a:srgbClr val="14202E"/>
+                          </a:solidFill>
+                          <a:latin typeface="Calibri" pitchFamily="34" charset="0"/>
+                          <a:ea typeface="Calibri" pitchFamily="34" charset="-122"/>
+                          <a:cs typeface="Calibri" pitchFamily="34" charset="-120"/>
+                        </a:rPr>
+                        <a:t>8 · 10⁻¹¹</a:t>
+                      </a:r>
+                      <a:endParaRPr lang="en-US" sz="1200" dirty="0">
                         <a:latin typeface="Calibri" charset="0"/>
                         <a:ea typeface="Calibri" charset="0"/>
                         <a:cs typeface="Calibri" charset="0"/>
@@ -6115,7 +6348,7 @@
                         <a:buNone/>
                       </a:pPr>
                       <a:r>
-                        <a:rPr lang="en-US" sz="1300" dirty="0">
+                        <a:rPr lang="en-US" sz="1200" dirty="0">
                           <a:solidFill>
                             <a:srgbClr val="14202E"/>
                           </a:solidFill>
@@ -6123,9 +6356,9 @@
                           <a:ea typeface="Calibri" pitchFamily="34" charset="-122"/>
                           <a:cs typeface="Calibri" pitchFamily="34" charset="-120"/>
                         </a:rPr>
-                        <a:t>Gewicht b3</a:t>
+                        <a:t>3</a:t>
                       </a:r>
-                      <a:endParaRPr lang="en-US" sz="1300" dirty="0">
+                      <a:endParaRPr lang="en-US" sz="1200" dirty="0">
                         <a:latin typeface="Calibri" charset="0"/>
                         <a:ea typeface="Calibri" charset="0"/>
                         <a:cs typeface="Calibri" charset="0"/>
@@ -6183,7 +6416,7 @@
                         <a:buNone/>
                       </a:pPr>
                       <a:r>
-                        <a:rPr lang="en-US" sz="1300" dirty="0">
+                        <a:rPr lang="en-US" sz="1200" dirty="0">
                           <a:solidFill>
                             <a:srgbClr val="14202E"/>
                           </a:solidFill>
@@ -6191,9 +6424,9 @@
                           <a:ea typeface="Calibri" pitchFamily="34" charset="-122"/>
                           <a:cs typeface="Calibri" pitchFamily="34" charset="-120"/>
                         </a:rPr>
-                        <a:t>0,8607</a:t>
+                        <a:t>b₅ = 1,5576</a:t>
                       </a:r>
-                      <a:endParaRPr lang="en-US" sz="1300" dirty="0">
+                      <a:endParaRPr lang="en-US" sz="1200" dirty="0">
                         <a:latin typeface="Calibri" charset="0"/>
                         <a:ea typeface="Calibri" charset="0"/>
                         <a:cs typeface="Calibri" charset="0"/>
@@ -6251,7 +6484,7 @@
                         <a:buNone/>
                       </a:pPr>
                       <a:r>
-                        <a:rPr lang="en-US" sz="1300" dirty="0">
+                        <a:rPr lang="en-US" sz="1200" dirty="0">
                           <a:solidFill>
                             <a:srgbClr val="14202E"/>
                           </a:solidFill>
@@ -6259,79 +6492,9 @@
                           <a:ea typeface="Calibri" pitchFamily="34" charset="-122"/>
                           <a:cs typeface="Calibri" pitchFamily="34" charset="-120"/>
                         </a:rPr>
-                        <a:t>0,8607</a:t>
+                        <a:t>b₆ = 5</a:t>
                       </a:r>
-                      <a:endParaRPr lang="en-US" sz="1300" dirty="0">
-                        <a:latin typeface="Calibri" charset="0"/>
-                        <a:ea typeface="Calibri" charset="0"/>
-                        <a:cs typeface="Calibri" charset="0"/>
-                      </a:endParaRPr>
-                    </a:p>
-                  </a:txBody>
-                  <a:tcPr marL="76200" marR="76200" marT="38100" marB="38100" anchor="ctr">
-                    <a:lnL w="9525" cap="flat" cmpd="sng" algn="ctr">
-                      <a:solidFill>
-                        <a:srgbClr val="D9D8D1"/>
-                      </a:solidFill>
-                      <a:prstDash val="solid"/>
-                      <a:round/>
-                      <a:headEnd type="none" w="med" len="med"/>
-                      <a:tailEnd type="none" w="med" len="med"/>
-                    </a:lnL>
-                    <a:lnR w="9525" cap="flat" cmpd="sng" algn="ctr">
-                      <a:solidFill>
-                        <a:srgbClr val="D9D8D1"/>
-                      </a:solidFill>
-                      <a:prstDash val="solid"/>
-                      <a:round/>
-                      <a:headEnd type="none" w="med" len="med"/>
-                      <a:tailEnd type="none" w="med" len="med"/>
-                    </a:lnR>
-                    <a:lnT w="9525" cap="flat" cmpd="sng" algn="ctr">
-                      <a:solidFill>
-                        <a:srgbClr val="D9D8D1"/>
-                      </a:solidFill>
-                      <a:prstDash val="solid"/>
-                      <a:round/>
-                      <a:headEnd type="none" w="med" len="med"/>
-                      <a:tailEnd type="none" w="med" len="med"/>
-                    </a:lnT>
-                    <a:lnB w="9525" cap="flat" cmpd="sng" algn="ctr">
-                      <a:solidFill>
-                        <a:srgbClr val="D9D8D1"/>
-                      </a:solidFill>
-                      <a:prstDash val="solid"/>
-                      <a:round/>
-                      <a:headEnd type="none" w="med" len="med"/>
-                      <a:tailEnd type="none" w="med" len="med"/>
-                    </a:lnB>
-                    <a:solidFill>
-                      <a:srgbClr val="F4F3EF"/>
-                    </a:solidFill>
-                  </a:tcPr>
-                </a:tc>
-              </a:tr>
-              <a:tr h="0">
-                <a:tc>
-                  <a:txBody>
-                    <a:bodyPr/>
-                    <a:lstStyle/>
-                    <a:p>
-                      <a:pPr algn="l" indent="0" marL="0">
-                        <a:buNone/>
-                      </a:pPr>
-                      <a:r>
-                        <a:rPr lang="en-US" sz="1300" dirty="0">
-                          <a:solidFill>
-                            <a:srgbClr val="14202E"/>
-                          </a:solidFill>
-                          <a:latin typeface="Calibri" pitchFamily="34" charset="0"/>
-                          <a:ea typeface="Calibri" pitchFamily="34" charset="-122"/>
-                          <a:cs typeface="Calibri" pitchFamily="34" charset="-120"/>
-                        </a:rPr>
-                        <a:t>Abklingrate b4</a:t>
-                      </a:r>
-                      <a:endParaRPr lang="en-US" sz="1300" dirty="0">
+                      <a:endParaRPr lang="en-US" sz="1200" dirty="0">
                         <a:latin typeface="Calibri" charset="0"/>
                         <a:ea typeface="Calibri" charset="0"/>
                         <a:cs typeface="Calibri" charset="0"/>
@@ -6389,7 +6552,7 @@
                         <a:buNone/>
                       </a:pPr>
                       <a:r>
-                        <a:rPr lang="en-US" sz="1300" dirty="0">
+                        <a:rPr lang="en-US" sz="1200" dirty="0">
                           <a:solidFill>
                             <a:srgbClr val="14202E"/>
                           </a:solidFill>
@@ -6397,489 +6560,9 @@
                           <a:ea typeface="Calibri" pitchFamily="34" charset="-122"/>
                           <a:cs typeface="Calibri" pitchFamily="34" charset="-120"/>
                         </a:rPr>
-                        <a:t>3,0000</a:t>
+                        <a:t>4 · 10⁻¹¹</a:t>
                       </a:r>
-                      <a:endParaRPr lang="en-US" sz="1300" dirty="0">
-                        <a:latin typeface="Calibri" charset="0"/>
-                        <a:ea typeface="Calibri" charset="0"/>
-                        <a:cs typeface="Calibri" charset="0"/>
-                      </a:endParaRPr>
-                    </a:p>
-                  </a:txBody>
-                  <a:tcPr marL="76200" marR="76200" marT="38100" marB="38100" anchor="ctr">
-                    <a:lnL w="9525" cap="flat" cmpd="sng" algn="ctr">
-                      <a:solidFill>
-                        <a:srgbClr val="D9D8D1"/>
-                      </a:solidFill>
-                      <a:prstDash val="solid"/>
-                      <a:round/>
-                      <a:headEnd type="none" w="med" len="med"/>
-                      <a:tailEnd type="none" w="med" len="med"/>
-                    </a:lnL>
-                    <a:lnR w="9525" cap="flat" cmpd="sng" algn="ctr">
-                      <a:solidFill>
-                        <a:srgbClr val="D9D8D1"/>
-                      </a:solidFill>
-                      <a:prstDash val="solid"/>
-                      <a:round/>
-                      <a:headEnd type="none" w="med" len="med"/>
-                      <a:tailEnd type="none" w="med" len="med"/>
-                    </a:lnR>
-                    <a:lnT w="9525" cap="flat" cmpd="sng" algn="ctr">
-                      <a:solidFill>
-                        <a:srgbClr val="D9D8D1"/>
-                      </a:solidFill>
-                      <a:prstDash val="solid"/>
-                      <a:round/>
-                      <a:headEnd type="none" w="med" len="med"/>
-                      <a:tailEnd type="none" w="med" len="med"/>
-                    </a:lnT>
-                    <a:lnB w="9525" cap="flat" cmpd="sng" algn="ctr">
-                      <a:solidFill>
-                        <a:srgbClr val="D9D8D1"/>
-                      </a:solidFill>
-                      <a:prstDash val="solid"/>
-                      <a:round/>
-                      <a:headEnd type="none" w="med" len="med"/>
-                      <a:tailEnd type="none" w="med" len="med"/>
-                    </a:lnB>
-                    <a:solidFill>
-                      <a:srgbClr val="F4F3EF"/>
-                    </a:solidFill>
-                  </a:tcPr>
-                </a:tc>
-                <a:tc>
-                  <a:txBody>
-                    <a:bodyPr/>
-                    <a:lstStyle/>
-                    <a:p>
-                      <a:pPr algn="r" indent="0" marL="0">
-                        <a:buNone/>
-                      </a:pPr>
-                      <a:r>
-                        <a:rPr lang="en-US" sz="1300" dirty="0">
-                          <a:solidFill>
-                            <a:srgbClr val="14202E"/>
-                          </a:solidFill>
-                          <a:latin typeface="Calibri" pitchFamily="34" charset="0"/>
-                          <a:ea typeface="Calibri" pitchFamily="34" charset="-122"/>
-                          <a:cs typeface="Calibri" pitchFamily="34" charset="-120"/>
-                        </a:rPr>
-                        <a:t>3,0000</a:t>
-                      </a:r>
-                      <a:endParaRPr lang="en-US" sz="1300" dirty="0">
-                        <a:latin typeface="Calibri" charset="0"/>
-                        <a:ea typeface="Calibri" charset="0"/>
-                        <a:cs typeface="Calibri" charset="0"/>
-                      </a:endParaRPr>
-                    </a:p>
-                  </a:txBody>
-                  <a:tcPr marL="76200" marR="76200" marT="38100" marB="38100" anchor="ctr">
-                    <a:lnL w="9525" cap="flat" cmpd="sng" algn="ctr">
-                      <a:solidFill>
-                        <a:srgbClr val="D9D8D1"/>
-                      </a:solidFill>
-                      <a:prstDash val="solid"/>
-                      <a:round/>
-                      <a:headEnd type="none" w="med" len="med"/>
-                      <a:tailEnd type="none" w="med" len="med"/>
-                    </a:lnL>
-                    <a:lnR w="9525" cap="flat" cmpd="sng" algn="ctr">
-                      <a:solidFill>
-                        <a:srgbClr val="D9D8D1"/>
-                      </a:solidFill>
-                      <a:prstDash val="solid"/>
-                      <a:round/>
-                      <a:headEnd type="none" w="med" len="med"/>
-                      <a:tailEnd type="none" w="med" len="med"/>
-                    </a:lnR>
-                    <a:lnT w="9525" cap="flat" cmpd="sng" algn="ctr">
-                      <a:solidFill>
-                        <a:srgbClr val="D9D8D1"/>
-                      </a:solidFill>
-                      <a:prstDash val="solid"/>
-                      <a:round/>
-                      <a:headEnd type="none" w="med" len="med"/>
-                      <a:tailEnd type="none" w="med" len="med"/>
-                    </a:lnT>
-                    <a:lnB w="9525" cap="flat" cmpd="sng" algn="ctr">
-                      <a:solidFill>
-                        <a:srgbClr val="D9D8D1"/>
-                      </a:solidFill>
-                      <a:prstDash val="solid"/>
-                      <a:round/>
-                      <a:headEnd type="none" w="med" len="med"/>
-                      <a:tailEnd type="none" w="med" len="med"/>
-                    </a:lnB>
-                    <a:solidFill>
-                      <a:srgbClr val="F4F3EF"/>
-                    </a:solidFill>
-                  </a:tcPr>
-                </a:tc>
-              </a:tr>
-              <a:tr h="0">
-                <a:tc>
-                  <a:txBody>
-                    <a:bodyPr/>
-                    <a:lstStyle/>
-                    <a:p>
-                      <a:pPr algn="l" indent="0" marL="0">
-                        <a:buNone/>
-                      </a:pPr>
-                      <a:r>
-                        <a:rPr lang="en-US" sz="1300" dirty="0">
-                          <a:solidFill>
-                            <a:srgbClr val="14202E"/>
-                          </a:solidFill>
-                          <a:latin typeface="Calibri" pitchFamily="34" charset="0"/>
-                          <a:ea typeface="Calibri" pitchFamily="34" charset="-122"/>
-                          <a:cs typeface="Calibri" pitchFamily="34" charset="-120"/>
-                        </a:rPr>
-                        <a:t>Gewicht b5</a:t>
-                      </a:r>
-                      <a:endParaRPr lang="en-US" sz="1300" dirty="0">
-                        <a:latin typeface="Calibri" charset="0"/>
-                        <a:ea typeface="Calibri" charset="0"/>
-                        <a:cs typeface="Calibri" charset="0"/>
-                      </a:endParaRPr>
-                    </a:p>
-                  </a:txBody>
-                  <a:tcPr marL="76200" marR="76200" marT="38100" marB="38100" anchor="ctr">
-                    <a:lnL w="9525" cap="flat" cmpd="sng" algn="ctr">
-                      <a:solidFill>
-                        <a:srgbClr val="D9D8D1"/>
-                      </a:solidFill>
-                      <a:prstDash val="solid"/>
-                      <a:round/>
-                      <a:headEnd type="none" w="med" len="med"/>
-                      <a:tailEnd type="none" w="med" len="med"/>
-                    </a:lnL>
-                    <a:lnR w="9525" cap="flat" cmpd="sng" algn="ctr">
-                      <a:solidFill>
-                        <a:srgbClr val="D9D8D1"/>
-                      </a:solidFill>
-                      <a:prstDash val="solid"/>
-                      <a:round/>
-                      <a:headEnd type="none" w="med" len="med"/>
-                      <a:tailEnd type="none" w="med" len="med"/>
-                    </a:lnR>
-                    <a:lnT w="9525" cap="flat" cmpd="sng" algn="ctr">
-                      <a:solidFill>
-                        <a:srgbClr val="D9D8D1"/>
-                      </a:solidFill>
-                      <a:prstDash val="solid"/>
-                      <a:round/>
-                      <a:headEnd type="none" w="med" len="med"/>
-                      <a:tailEnd type="none" w="med" len="med"/>
-                    </a:lnT>
-                    <a:lnB w="9525" cap="flat" cmpd="sng" algn="ctr">
-                      <a:solidFill>
-                        <a:srgbClr val="D9D8D1"/>
-                      </a:solidFill>
-                      <a:prstDash val="solid"/>
-                      <a:round/>
-                      <a:headEnd type="none" w="med" len="med"/>
-                      <a:tailEnd type="none" w="med" len="med"/>
-                    </a:lnB>
-                    <a:solidFill>
-                      <a:srgbClr val="F4F3EF"/>
-                    </a:solidFill>
-                  </a:tcPr>
-                </a:tc>
-                <a:tc>
-                  <a:txBody>
-                    <a:bodyPr/>
-                    <a:lstStyle/>
-                    <a:p>
-                      <a:pPr algn="r" indent="0" marL="0">
-                        <a:buNone/>
-                      </a:pPr>
-                      <a:r>
-                        <a:rPr lang="en-US" sz="1300" dirty="0">
-                          <a:solidFill>
-                            <a:srgbClr val="14202E"/>
-                          </a:solidFill>
-                          <a:latin typeface="Calibri" pitchFamily="34" charset="0"/>
-                          <a:ea typeface="Calibri" pitchFamily="34" charset="-122"/>
-                          <a:cs typeface="Calibri" pitchFamily="34" charset="-120"/>
-                        </a:rPr>
-                        <a:t>1,5576</a:t>
-                      </a:r>
-                      <a:endParaRPr lang="en-US" sz="1300" dirty="0">
-                        <a:latin typeface="Calibri" charset="0"/>
-                        <a:ea typeface="Calibri" charset="0"/>
-                        <a:cs typeface="Calibri" charset="0"/>
-                      </a:endParaRPr>
-                    </a:p>
-                  </a:txBody>
-                  <a:tcPr marL="76200" marR="76200" marT="38100" marB="38100" anchor="ctr">
-                    <a:lnL w="9525" cap="flat" cmpd="sng" algn="ctr">
-                      <a:solidFill>
-                        <a:srgbClr val="D9D8D1"/>
-                      </a:solidFill>
-                      <a:prstDash val="solid"/>
-                      <a:round/>
-                      <a:headEnd type="none" w="med" len="med"/>
-                      <a:tailEnd type="none" w="med" len="med"/>
-                    </a:lnL>
-                    <a:lnR w="9525" cap="flat" cmpd="sng" algn="ctr">
-                      <a:solidFill>
-                        <a:srgbClr val="D9D8D1"/>
-                      </a:solidFill>
-                      <a:prstDash val="solid"/>
-                      <a:round/>
-                      <a:headEnd type="none" w="med" len="med"/>
-                      <a:tailEnd type="none" w="med" len="med"/>
-                    </a:lnR>
-                    <a:lnT w="9525" cap="flat" cmpd="sng" algn="ctr">
-                      <a:solidFill>
-                        <a:srgbClr val="D9D8D1"/>
-                      </a:solidFill>
-                      <a:prstDash val="solid"/>
-                      <a:round/>
-                      <a:headEnd type="none" w="med" len="med"/>
-                      <a:tailEnd type="none" w="med" len="med"/>
-                    </a:lnT>
-                    <a:lnB w="9525" cap="flat" cmpd="sng" algn="ctr">
-                      <a:solidFill>
-                        <a:srgbClr val="D9D8D1"/>
-                      </a:solidFill>
-                      <a:prstDash val="solid"/>
-                      <a:round/>
-                      <a:headEnd type="none" w="med" len="med"/>
-                      <a:tailEnd type="none" w="med" len="med"/>
-                    </a:lnB>
-                    <a:solidFill>
-                      <a:srgbClr val="F4F3EF"/>
-                    </a:solidFill>
-                  </a:tcPr>
-                </a:tc>
-                <a:tc>
-                  <a:txBody>
-                    <a:bodyPr/>
-                    <a:lstStyle/>
-                    <a:p>
-                      <a:pPr algn="r" indent="0" marL="0">
-                        <a:buNone/>
-                      </a:pPr>
-                      <a:r>
-                        <a:rPr lang="en-US" sz="1300" dirty="0">
-                          <a:solidFill>
-                            <a:srgbClr val="14202E"/>
-                          </a:solidFill>
-                          <a:latin typeface="Calibri" pitchFamily="34" charset="0"/>
-                          <a:ea typeface="Calibri" pitchFamily="34" charset="-122"/>
-                          <a:cs typeface="Calibri" pitchFamily="34" charset="-120"/>
-                        </a:rPr>
-                        <a:t>1,5576</a:t>
-                      </a:r>
-                      <a:endParaRPr lang="en-US" sz="1300" dirty="0">
-                        <a:latin typeface="Calibri" charset="0"/>
-                        <a:ea typeface="Calibri" charset="0"/>
-                        <a:cs typeface="Calibri" charset="0"/>
-                      </a:endParaRPr>
-                    </a:p>
-                  </a:txBody>
-                  <a:tcPr marL="76200" marR="76200" marT="38100" marB="38100" anchor="ctr">
-                    <a:lnL w="9525" cap="flat" cmpd="sng" algn="ctr">
-                      <a:solidFill>
-                        <a:srgbClr val="D9D8D1"/>
-                      </a:solidFill>
-                      <a:prstDash val="solid"/>
-                      <a:round/>
-                      <a:headEnd type="none" w="med" len="med"/>
-                      <a:tailEnd type="none" w="med" len="med"/>
-                    </a:lnL>
-                    <a:lnR w="9525" cap="flat" cmpd="sng" algn="ctr">
-                      <a:solidFill>
-                        <a:srgbClr val="D9D8D1"/>
-                      </a:solidFill>
-                      <a:prstDash val="solid"/>
-                      <a:round/>
-                      <a:headEnd type="none" w="med" len="med"/>
-                      <a:tailEnd type="none" w="med" len="med"/>
-                    </a:lnR>
-                    <a:lnT w="9525" cap="flat" cmpd="sng" algn="ctr">
-                      <a:solidFill>
-                        <a:srgbClr val="D9D8D1"/>
-                      </a:solidFill>
-                      <a:prstDash val="solid"/>
-                      <a:round/>
-                      <a:headEnd type="none" w="med" len="med"/>
-                      <a:tailEnd type="none" w="med" len="med"/>
-                    </a:lnT>
-                    <a:lnB w="9525" cap="flat" cmpd="sng" algn="ctr">
-                      <a:solidFill>
-                        <a:srgbClr val="D9D8D1"/>
-                      </a:solidFill>
-                      <a:prstDash val="solid"/>
-                      <a:round/>
-                      <a:headEnd type="none" w="med" len="med"/>
-                      <a:tailEnd type="none" w="med" len="med"/>
-                    </a:lnB>
-                    <a:solidFill>
-                      <a:srgbClr val="F4F3EF"/>
-                    </a:solidFill>
-                  </a:tcPr>
-                </a:tc>
-              </a:tr>
-              <a:tr h="0">
-                <a:tc>
-                  <a:txBody>
-                    <a:bodyPr/>
-                    <a:lstStyle/>
-                    <a:p>
-                      <a:pPr algn="l" indent="0" marL="0">
-                        <a:buNone/>
-                      </a:pPr>
-                      <a:r>
-                        <a:rPr lang="en-US" sz="1300" dirty="0">
-                          <a:solidFill>
-                            <a:srgbClr val="14202E"/>
-                          </a:solidFill>
-                          <a:latin typeface="Calibri" pitchFamily="34" charset="0"/>
-                          <a:ea typeface="Calibri" pitchFamily="34" charset="-122"/>
-                          <a:cs typeface="Calibri" pitchFamily="34" charset="-120"/>
-                        </a:rPr>
-                        <a:t>Abklingrate b6</a:t>
-                      </a:r>
-                      <a:endParaRPr lang="en-US" sz="1300" dirty="0">
-                        <a:latin typeface="Calibri" charset="0"/>
-                        <a:ea typeface="Calibri" charset="0"/>
-                        <a:cs typeface="Calibri" charset="0"/>
-                      </a:endParaRPr>
-                    </a:p>
-                  </a:txBody>
-                  <a:tcPr marL="76200" marR="76200" marT="38100" marB="38100" anchor="ctr">
-                    <a:lnL w="9525" cap="flat" cmpd="sng" algn="ctr">
-                      <a:solidFill>
-                        <a:srgbClr val="D9D8D1"/>
-                      </a:solidFill>
-                      <a:prstDash val="solid"/>
-                      <a:round/>
-                      <a:headEnd type="none" w="med" len="med"/>
-                      <a:tailEnd type="none" w="med" len="med"/>
-                    </a:lnL>
-                    <a:lnR w="9525" cap="flat" cmpd="sng" algn="ctr">
-                      <a:solidFill>
-                        <a:srgbClr val="D9D8D1"/>
-                      </a:solidFill>
-                      <a:prstDash val="solid"/>
-                      <a:round/>
-                      <a:headEnd type="none" w="med" len="med"/>
-                      <a:tailEnd type="none" w="med" len="med"/>
-                    </a:lnR>
-                    <a:lnT w="9525" cap="flat" cmpd="sng" algn="ctr">
-                      <a:solidFill>
-                        <a:srgbClr val="D9D8D1"/>
-                      </a:solidFill>
-                      <a:prstDash val="solid"/>
-                      <a:round/>
-                      <a:headEnd type="none" w="med" len="med"/>
-                      <a:tailEnd type="none" w="med" len="med"/>
-                    </a:lnT>
-                    <a:lnB w="9525" cap="flat" cmpd="sng" algn="ctr">
-                      <a:solidFill>
-                        <a:srgbClr val="D9D8D1"/>
-                      </a:solidFill>
-                      <a:prstDash val="solid"/>
-                      <a:round/>
-                      <a:headEnd type="none" w="med" len="med"/>
-                      <a:tailEnd type="none" w="med" len="med"/>
-                    </a:lnB>
-                    <a:solidFill>
-                      <a:srgbClr val="F4F3EF"/>
-                    </a:solidFill>
-                  </a:tcPr>
-                </a:tc>
-                <a:tc>
-                  <a:txBody>
-                    <a:bodyPr/>
-                    <a:lstStyle/>
-                    <a:p>
-                      <a:pPr algn="r" indent="0" marL="0">
-                        <a:buNone/>
-                      </a:pPr>
-                      <a:r>
-                        <a:rPr lang="en-US" sz="1300" dirty="0">
-                          <a:solidFill>
-                            <a:srgbClr val="14202E"/>
-                          </a:solidFill>
-                          <a:latin typeface="Calibri" pitchFamily="34" charset="0"/>
-                          <a:ea typeface="Calibri" pitchFamily="34" charset="-122"/>
-                          <a:cs typeface="Calibri" pitchFamily="34" charset="-120"/>
-                        </a:rPr>
-                        <a:t>5,0000</a:t>
-                      </a:r>
-                      <a:endParaRPr lang="en-US" sz="1300" dirty="0">
-                        <a:latin typeface="Calibri" charset="0"/>
-                        <a:ea typeface="Calibri" charset="0"/>
-                        <a:cs typeface="Calibri" charset="0"/>
-                      </a:endParaRPr>
-                    </a:p>
-                  </a:txBody>
-                  <a:tcPr marL="76200" marR="76200" marT="38100" marB="38100" anchor="ctr">
-                    <a:lnL w="9525" cap="flat" cmpd="sng" algn="ctr">
-                      <a:solidFill>
-                        <a:srgbClr val="D9D8D1"/>
-                      </a:solidFill>
-                      <a:prstDash val="solid"/>
-                      <a:round/>
-                      <a:headEnd type="none" w="med" len="med"/>
-                      <a:tailEnd type="none" w="med" len="med"/>
-                    </a:lnL>
-                    <a:lnR w="9525" cap="flat" cmpd="sng" algn="ctr">
-                      <a:solidFill>
-                        <a:srgbClr val="D9D8D1"/>
-                      </a:solidFill>
-                      <a:prstDash val="solid"/>
-                      <a:round/>
-                      <a:headEnd type="none" w="med" len="med"/>
-                      <a:tailEnd type="none" w="med" len="med"/>
-                    </a:lnR>
-                    <a:lnT w="9525" cap="flat" cmpd="sng" algn="ctr">
-                      <a:solidFill>
-                        <a:srgbClr val="D9D8D1"/>
-                      </a:solidFill>
-                      <a:prstDash val="solid"/>
-                      <a:round/>
-                      <a:headEnd type="none" w="med" len="med"/>
-                      <a:tailEnd type="none" w="med" len="med"/>
-                    </a:lnT>
-                    <a:lnB w="9525" cap="flat" cmpd="sng" algn="ctr">
-                      <a:solidFill>
-                        <a:srgbClr val="D9D8D1"/>
-                      </a:solidFill>
-                      <a:prstDash val="solid"/>
-                      <a:round/>
-                      <a:headEnd type="none" w="med" len="med"/>
-                      <a:tailEnd type="none" w="med" len="med"/>
-                    </a:lnB>
-                    <a:solidFill>
-                      <a:srgbClr val="F4F3EF"/>
-                    </a:solidFill>
-                  </a:tcPr>
-                </a:tc>
-                <a:tc>
-                  <a:txBody>
-                    <a:bodyPr/>
-                    <a:lstStyle/>
-                    <a:p>
-                      <a:pPr algn="r" indent="0" marL="0">
-                        <a:buNone/>
-                      </a:pPr>
-                      <a:r>
-                        <a:rPr lang="en-US" sz="1300" dirty="0">
-                          <a:solidFill>
-                            <a:srgbClr val="14202E"/>
-                          </a:solidFill>
-                          <a:latin typeface="Calibri" pitchFamily="34" charset="0"/>
-                          <a:ea typeface="Calibri" pitchFamily="34" charset="-122"/>
-                          <a:cs typeface="Calibri" pitchFamily="34" charset="-120"/>
-                        </a:rPr>
-                        <a:t>5,0000</a:t>
-                      </a:r>
-                      <a:endParaRPr lang="en-US" sz="1300" dirty="0">
+                      <a:endParaRPr lang="en-US" sz="1200" dirty="0">
                         <a:latin typeface="Calibri" charset="0"/>
                         <a:ea typeface="Calibri" charset="0"/>
                         <a:cs typeface="Calibri" charset="0"/>
@@ -6941,8 +6624,92 @@
         </p:nvSpPr>
         <p:spPr>
           <a:xfrm>
-            <a:off x="6807200" y="5270500"/>
-            <a:ext cx="4572000" cy="266700"/>
+            <a:off x="6756400" y="4064000"/>
+            <a:ext cx="4622800" cy="444500"/>
+          </a:xfrm>
+          <a:prstGeom prst="rect">
+            <a:avLst/>
+          </a:prstGeom>
+          <a:noFill/>
+          <a:ln/>
+        </p:spPr>
+        <p:txBody>
+          <a:bodyPr wrap="square" lIns="0" tIns="0" rIns="0" bIns="0" rtlCol="0" anchor="t"/>
+          <a:lstStyle/>
+          <a:p>
+            <a:pPr indent="0" marL="0">
+              <a:lnSpc>
+                <a:spcPct val="115000"/>
+              </a:lnSpc>
+              <a:buNone/>
+            </a:pPr>
+            <a:r>
+              <a:rPr lang="en-US" sz="1200" dirty="0">
+                <a:solidFill>
+                  <a:srgbClr val="44505E"/>
+                </a:solidFill>
+                <a:latin typeface="Calibri" pitchFamily="34" charset="0"/>
+                <a:ea typeface="Calibri" pitchFamily="34" charset="-122"/>
+                <a:cs typeface="Calibri" pitchFamily="34" charset="-120"/>
+              </a:rPr>
+              <a:t>Gewicht und Rate: zertifizierte NIST-Werte. Abweichung: größte relative Abweichung der Matrix-Pencil-Schätzung davon.</a:t>
+            </a:r>
+            <a:endParaRPr lang="en-US" sz="1200" dirty="0"/>
+          </a:p>
+        </p:txBody>
+      </p:sp>
+      <p:sp>
+        <p:nvSpPr>
+          <p:cNvPr id="12" name="Text 6"/>
+          <p:cNvSpPr txBox="1"/>
+          <p:nvPr/>
+        </p:nvSpPr>
+        <p:spPr>
+          <a:xfrm>
+            <a:off x="6756400" y="4584700"/>
+            <a:ext cx="4622800" cy="825500"/>
+          </a:xfrm>
+          <a:prstGeom prst="rect">
+            <a:avLst/>
+          </a:prstGeom>
+          <a:noFill/>
+          <a:ln/>
+        </p:spPr>
+        <p:txBody>
+          <a:bodyPr wrap="square" lIns="0" tIns="0" rIns="0" bIns="0" rtlCol="0" anchor="t"/>
+          <a:lstStyle/>
+          <a:p>
+            <a:pPr indent="0" marL="0">
+              <a:lnSpc>
+                <a:spcPct val="115000"/>
+              </a:lnSpc>
+              <a:buNone/>
+            </a:pPr>
+            <a:r>
+              <a:rPr lang="en-US" sz="1500" dirty="0">
+                <a:solidFill>
+                  <a:srgbClr val="44505E"/>
+                </a:solidFill>
+                <a:latin typeface="Calibri" pitchFamily="34" charset="0"/>
+                <a:ea typeface="Calibri" pitchFamily="34" charset="-122"/>
+                <a:cs typeface="Calibri" pitchFamily="34" charset="-120"/>
+              </a:rPr>
+              <a:t>Jeder Anteil ergibt einen reellen Pol z = exp(−0,05·b), hier 0,951, 0,861 und 0,779: Winkel null, also keine Schwingung.</a:t>
+            </a:r>
+            <a:endParaRPr lang="en-US" sz="1500" dirty="0"/>
+          </a:p>
+        </p:txBody>
+      </p:sp>
+      <p:sp>
+        <p:nvSpPr>
+          <p:cNvPr id="13" name="Text 7"/>
+          <p:cNvSpPr txBox="1"/>
+          <p:nvPr/>
+        </p:nvSpPr>
+        <p:spPr>
+          <a:xfrm>
+            <a:off x="6756400" y="5245100"/>
+            <a:ext cx="4622800" cy="266700"/>
           </a:xfrm>
           <a:prstGeom prst="rect">
             <a:avLst/>
@@ -7078,13 +6845,13 @@
             <a:r>
               <a:rPr lang="en-US" sz="1200" spc="100" kern="0" dirty="0">
                 <a:solidFill>
-                  <a:srgbClr val="1C5CAB"/>
+                  <a:srgbClr val="B5491B"/>
                 </a:solidFill>
                 <a:latin typeface="Consolas" pitchFamily="34" charset="0"/>
                 <a:ea typeface="Consolas" pitchFamily="34" charset="-122"/>
                 <a:cs typeface="Consolas" pitchFamily="34" charset="-120"/>
               </a:rPr>
-              <a:t>PROJEKTMESSUNGEN · LEISTUNGSKANAL P_POS</a:t>
+              <a:t>PRÜFSTUFE 3 · REALE FREMDMESSUNG</a:t>
             </a:r>
             <a:endParaRPr lang="en-US" sz="1200" dirty="0"/>
           </a:p>
@@ -7125,7 +6892,7 @@
                 <a:ea typeface="Calibri" pitchFamily="34" charset="-122"/>
                 <a:cs typeface="Calibri" pitchFamily="34" charset="-120"/>
               </a:rPr>
-              <a:t>Sprungantworten im Vergleich</a:t>
+              <a:t>Mexiko: Frequenzen stimmen überein</a:t>
             </a:r>
             <a:endParaRPr lang="en-US" sz="3200" dirty="0"/>
           </a:p>
@@ -7167,1737 +6934,7 @@
                 <a:ea typeface="Calibri" pitchFamily="34" charset="-122"/>
                 <a:cs typeface="Calibri" pitchFamily="34" charset="-120"/>
               </a:rPr>
-              <a:t>Auswertung: examples/presentation_demo.py · Zielband 2,2 Hz ± 20 % = 1,76 bis 2,64 Hz</a:t>
-            </a:r>
-            <a:endParaRPr lang="en-US" sz="1200" dirty="0"/>
-          </a:p>
-        </p:txBody>
-      </p:sp>
-      <p:graphicFrame>
-        <p:nvGraphicFramePr>
-          <p:cNvPr id="15" name="Table 0"/>
-          <p:cNvGraphicFramePr>
-            <a:graphicFrameLocks noGrp="1"/>
-          </p:cNvGraphicFramePr>
-          <p:nvPr>
-            <p:extLst>
-              <p:ext uri="{D42A27DB-BD31-4B8C-83A1-F6EECF244321}">
-                <p14:modId xmlns:p14="http://schemas.microsoft.com/office/powerpoint/2010/main" val="1579011935"/>
-              </p:ext>
-            </p:extLst>
-          </p:nvPr>
-        </p:nvGraphicFramePr>
-        <p:xfrm>
-          <a:off x="812800" y="1879600"/>
-          <a:ext cx="10566400" cy="914400"/>
-        </p:xfrm>
-        <a:graphic>
-          <a:graphicData uri="http://schemas.openxmlformats.org/drawingml/2006/table">
-            <a:tbl>
-              <a:tblPr/>
-              <a:tblGrid>
-                <a:gridCol w="4864100"/>
-                <a:gridCol w="2851150"/>
-                <a:gridCol w="2851150"/>
-              </a:tblGrid>
-              <a:tr h="0">
-                <a:tc>
-                  <a:txBody>
-                    <a:bodyPr/>
-                    <a:lstStyle/>
-                    <a:p>
-                      <a:pPr algn="l" indent="0" marL="0">
-                        <a:buNone/>
-                      </a:pPr>
-                      <a:r>
-                        <a:rPr lang="en-US" sz="1500" b="1" dirty="0">
-                          <a:solidFill>
-                            <a:srgbClr val="14202E"/>
-                          </a:solidFill>
-                          <a:latin typeface="Calibri" pitchFamily="34" charset="0"/>
-                          <a:ea typeface="Calibri" pitchFamily="34" charset="-122"/>
-                          <a:cs typeface="Calibri" pitchFamily="34" charset="-120"/>
-                        </a:rPr>
-                        <a:t>Ordnung 12, Abschnitt 1 bis 7 s</a:t>
-                      </a:r>
-                      <a:endParaRPr lang="en-US" sz="1500" dirty="0">
-                        <a:latin typeface="Calibri" charset="0"/>
-                        <a:ea typeface="Calibri" charset="0"/>
-                        <a:cs typeface="Calibri" charset="0"/>
-                      </a:endParaRPr>
-                    </a:p>
-                  </a:txBody>
-                  <a:tcPr marL="76200" marR="76200" marT="38100" marB="38100" anchor="ctr">
-                    <a:lnL w="9525" cap="flat" cmpd="sng" algn="ctr">
-                      <a:solidFill>
-                        <a:srgbClr val="D9D8D1"/>
-                      </a:solidFill>
-                      <a:prstDash val="solid"/>
-                      <a:round/>
-                      <a:headEnd type="none" w="med" len="med"/>
-                      <a:tailEnd type="none" w="med" len="med"/>
-                    </a:lnL>
-                    <a:lnR w="9525" cap="flat" cmpd="sng" algn="ctr">
-                      <a:solidFill>
-                        <a:srgbClr val="D9D8D1"/>
-                      </a:solidFill>
-                      <a:prstDash val="solid"/>
-                      <a:round/>
-                      <a:headEnd type="none" w="med" len="med"/>
-                      <a:tailEnd type="none" w="med" len="med"/>
-                    </a:lnR>
-                    <a:lnT w="9525" cap="flat" cmpd="sng" algn="ctr">
-                      <a:solidFill>
-                        <a:srgbClr val="D9D8D1"/>
-                      </a:solidFill>
-                      <a:prstDash val="solid"/>
-                      <a:round/>
-                      <a:headEnd type="none" w="med" len="med"/>
-                      <a:tailEnd type="none" w="med" len="med"/>
-                    </a:lnT>
-                    <a:lnB w="9525" cap="flat" cmpd="sng" algn="ctr">
-                      <a:solidFill>
-                        <a:srgbClr val="D9D8D1"/>
-                      </a:solidFill>
-                      <a:prstDash val="solid"/>
-                      <a:round/>
-                      <a:headEnd type="none" w="med" len="med"/>
-                      <a:tailEnd type="none" w="med" len="med"/>
-                    </a:lnB>
-                    <a:solidFill>
-                      <a:srgbClr val="E9E8E2"/>
-                    </a:solidFill>
-                  </a:tcPr>
-                </a:tc>
-                <a:tc>
-                  <a:txBody>
-                    <a:bodyPr/>
-                    <a:lstStyle/>
-                    <a:p>
-                      <a:pPr algn="r" indent="0" marL="0">
-                        <a:buNone/>
-                      </a:pPr>
-                      <a:r>
-                        <a:rPr lang="en-US" sz="1500" b="1" dirty="0">
-                          <a:solidFill>
-                            <a:srgbClr val="14202E"/>
-                          </a:solidFill>
-                          <a:latin typeface="Calibri" pitchFamily="34" charset="0"/>
-                          <a:ea typeface="Calibri" pitchFamily="34" charset="-122"/>
-                          <a:cs typeface="Calibri" pitchFamily="34" charset="-120"/>
-                        </a:rPr>
-                        <a:t>Positiver Sprung</a:t>
-                      </a:r>
-                      <a:endParaRPr lang="en-US" sz="1500" dirty="0">
-                        <a:latin typeface="Calibri" charset="0"/>
-                        <a:ea typeface="Calibri" charset="0"/>
-                        <a:cs typeface="Calibri" charset="0"/>
-                      </a:endParaRPr>
-                    </a:p>
-                  </a:txBody>
-                  <a:tcPr marL="76200" marR="76200" marT="38100" marB="38100" anchor="ctr">
-                    <a:lnL w="9525" cap="flat" cmpd="sng" algn="ctr">
-                      <a:solidFill>
-                        <a:srgbClr val="D9D8D1"/>
-                      </a:solidFill>
-                      <a:prstDash val="solid"/>
-                      <a:round/>
-                      <a:headEnd type="none" w="med" len="med"/>
-                      <a:tailEnd type="none" w="med" len="med"/>
-                    </a:lnL>
-                    <a:lnR w="9525" cap="flat" cmpd="sng" algn="ctr">
-                      <a:solidFill>
-                        <a:srgbClr val="D9D8D1"/>
-                      </a:solidFill>
-                      <a:prstDash val="solid"/>
-                      <a:round/>
-                      <a:headEnd type="none" w="med" len="med"/>
-                      <a:tailEnd type="none" w="med" len="med"/>
-                    </a:lnR>
-                    <a:lnT w="9525" cap="flat" cmpd="sng" algn="ctr">
-                      <a:solidFill>
-                        <a:srgbClr val="D9D8D1"/>
-                      </a:solidFill>
-                      <a:prstDash val="solid"/>
-                      <a:round/>
-                      <a:headEnd type="none" w="med" len="med"/>
-                      <a:tailEnd type="none" w="med" len="med"/>
-                    </a:lnT>
-                    <a:lnB w="9525" cap="flat" cmpd="sng" algn="ctr">
-                      <a:solidFill>
-                        <a:srgbClr val="D9D8D1"/>
-                      </a:solidFill>
-                      <a:prstDash val="solid"/>
-                      <a:round/>
-                      <a:headEnd type="none" w="med" len="med"/>
-                      <a:tailEnd type="none" w="med" len="med"/>
-                    </a:lnB>
-                    <a:solidFill>
-                      <a:srgbClr val="E9E8E2"/>
-                    </a:solidFill>
-                  </a:tcPr>
-                </a:tc>
-                <a:tc>
-                  <a:txBody>
-                    <a:bodyPr/>
-                    <a:lstStyle/>
-                    <a:p>
-                      <a:pPr algn="r" indent="0" marL="0">
-                        <a:buNone/>
-                      </a:pPr>
-                      <a:r>
-                        <a:rPr lang="en-US" sz="1500" b="1" dirty="0">
-                          <a:solidFill>
-                            <a:srgbClr val="14202E"/>
-                          </a:solidFill>
-                          <a:latin typeface="Calibri" pitchFamily="34" charset="0"/>
-                          <a:ea typeface="Calibri" pitchFamily="34" charset="-122"/>
-                          <a:cs typeface="Calibri" pitchFamily="34" charset="-120"/>
-                        </a:rPr>
-                        <a:t>Negativer Sprung</a:t>
-                      </a:r>
-                      <a:endParaRPr lang="en-US" sz="1500" dirty="0">
-                        <a:latin typeface="Calibri" charset="0"/>
-                        <a:ea typeface="Calibri" charset="0"/>
-                        <a:cs typeface="Calibri" charset="0"/>
-                      </a:endParaRPr>
-                    </a:p>
-                  </a:txBody>
-                  <a:tcPr marL="76200" marR="76200" marT="38100" marB="38100" anchor="ctr">
-                    <a:lnL w="9525" cap="flat" cmpd="sng" algn="ctr">
-                      <a:solidFill>
-                        <a:srgbClr val="D9D8D1"/>
-                      </a:solidFill>
-                      <a:prstDash val="solid"/>
-                      <a:round/>
-                      <a:headEnd type="none" w="med" len="med"/>
-                      <a:tailEnd type="none" w="med" len="med"/>
-                    </a:lnL>
-                    <a:lnR w="9525" cap="flat" cmpd="sng" algn="ctr">
-                      <a:solidFill>
-                        <a:srgbClr val="D9D8D1"/>
-                      </a:solidFill>
-                      <a:prstDash val="solid"/>
-                      <a:round/>
-                      <a:headEnd type="none" w="med" len="med"/>
-                      <a:tailEnd type="none" w="med" len="med"/>
-                    </a:lnR>
-                    <a:lnT w="9525" cap="flat" cmpd="sng" algn="ctr">
-                      <a:solidFill>
-                        <a:srgbClr val="D9D8D1"/>
-                      </a:solidFill>
-                      <a:prstDash val="solid"/>
-                      <a:round/>
-                      <a:headEnd type="none" w="med" len="med"/>
-                      <a:tailEnd type="none" w="med" len="med"/>
-                    </a:lnT>
-                    <a:lnB w="9525" cap="flat" cmpd="sng" algn="ctr">
-                      <a:solidFill>
-                        <a:srgbClr val="D9D8D1"/>
-                      </a:solidFill>
-                      <a:prstDash val="solid"/>
-                      <a:round/>
-                      <a:headEnd type="none" w="med" len="med"/>
-                      <a:tailEnd type="none" w="med" len="med"/>
-                    </a:lnB>
-                    <a:solidFill>
-                      <a:srgbClr val="E9E8E2"/>
-                    </a:solidFill>
-                  </a:tcPr>
-                </a:tc>
-              </a:tr>
-              <a:tr h="0">
-                <a:tc>
-                  <a:txBody>
-                    <a:bodyPr/>
-                    <a:lstStyle/>
-                    <a:p>
-                      <a:pPr algn="l" indent="0" marL="0">
-                        <a:buNone/>
-                      </a:pPr>
-                      <a:r>
-                        <a:rPr lang="en-US" sz="1500" dirty="0">
-                          <a:solidFill>
-                            <a:srgbClr val="14202E"/>
-                          </a:solidFill>
-                          <a:latin typeface="Calibri" pitchFamily="34" charset="0"/>
-                          <a:ea typeface="Calibri" pitchFamily="34" charset="-122"/>
-                          <a:cs typeface="Calibri" pitchFamily="34" charset="-120"/>
-                        </a:rPr>
-                        <a:t>Dominante Frequenz</a:t>
-                      </a:r>
-                      <a:endParaRPr lang="en-US" sz="1500" dirty="0">
-                        <a:latin typeface="Calibri" charset="0"/>
-                        <a:ea typeface="Calibri" charset="0"/>
-                        <a:cs typeface="Calibri" charset="0"/>
-                      </a:endParaRPr>
-                    </a:p>
-                  </a:txBody>
-                  <a:tcPr marL="76200" marR="76200" marT="38100" marB="38100" anchor="ctr">
-                    <a:lnL w="9525" cap="flat" cmpd="sng" algn="ctr">
-                      <a:solidFill>
-                        <a:srgbClr val="D9D8D1"/>
-                      </a:solidFill>
-                      <a:prstDash val="solid"/>
-                      <a:round/>
-                      <a:headEnd type="none" w="med" len="med"/>
-                      <a:tailEnd type="none" w="med" len="med"/>
-                    </a:lnL>
-                    <a:lnR w="9525" cap="flat" cmpd="sng" algn="ctr">
-                      <a:solidFill>
-                        <a:srgbClr val="D9D8D1"/>
-                      </a:solidFill>
-                      <a:prstDash val="solid"/>
-                      <a:round/>
-                      <a:headEnd type="none" w="med" len="med"/>
-                      <a:tailEnd type="none" w="med" len="med"/>
-                    </a:lnR>
-                    <a:lnT w="9525" cap="flat" cmpd="sng" algn="ctr">
-                      <a:solidFill>
-                        <a:srgbClr val="D9D8D1"/>
-                      </a:solidFill>
-                      <a:prstDash val="solid"/>
-                      <a:round/>
-                      <a:headEnd type="none" w="med" len="med"/>
-                      <a:tailEnd type="none" w="med" len="med"/>
-                    </a:lnT>
-                    <a:lnB w="9525" cap="flat" cmpd="sng" algn="ctr">
-                      <a:solidFill>
-                        <a:srgbClr val="D9D8D1"/>
-                      </a:solidFill>
-                      <a:prstDash val="solid"/>
-                      <a:round/>
-                      <a:headEnd type="none" w="med" len="med"/>
-                      <a:tailEnd type="none" w="med" len="med"/>
-                    </a:lnB>
-                    <a:solidFill>
-                      <a:srgbClr val="F4F3EF"/>
-                    </a:solidFill>
-                  </a:tcPr>
-                </a:tc>
-                <a:tc>
-                  <a:txBody>
-                    <a:bodyPr/>
-                    <a:lstStyle/>
-                    <a:p>
-                      <a:pPr algn="r" indent="0" marL="0">
-                        <a:buNone/>
-                      </a:pPr>
-                      <a:r>
-                        <a:rPr lang="en-US" sz="1500" dirty="0">
-                          <a:solidFill>
-                            <a:srgbClr val="14202E"/>
-                          </a:solidFill>
-                          <a:latin typeface="Calibri" pitchFamily="34" charset="0"/>
-                          <a:ea typeface="Calibri" pitchFamily="34" charset="-122"/>
-                          <a:cs typeface="Calibri" pitchFamily="34" charset="-120"/>
-                        </a:rPr>
-                        <a:t>2,268418 Hz</a:t>
-                      </a:r>
-                      <a:endParaRPr lang="en-US" sz="1500" dirty="0">
-                        <a:latin typeface="Calibri" charset="0"/>
-                        <a:ea typeface="Calibri" charset="0"/>
-                        <a:cs typeface="Calibri" charset="0"/>
-                      </a:endParaRPr>
-                    </a:p>
-                  </a:txBody>
-                  <a:tcPr marL="76200" marR="76200" marT="38100" marB="38100" anchor="ctr">
-                    <a:lnL w="9525" cap="flat" cmpd="sng" algn="ctr">
-                      <a:solidFill>
-                        <a:srgbClr val="D9D8D1"/>
-                      </a:solidFill>
-                      <a:prstDash val="solid"/>
-                      <a:round/>
-                      <a:headEnd type="none" w="med" len="med"/>
-                      <a:tailEnd type="none" w="med" len="med"/>
-                    </a:lnL>
-                    <a:lnR w="9525" cap="flat" cmpd="sng" algn="ctr">
-                      <a:solidFill>
-                        <a:srgbClr val="D9D8D1"/>
-                      </a:solidFill>
-                      <a:prstDash val="solid"/>
-                      <a:round/>
-                      <a:headEnd type="none" w="med" len="med"/>
-                      <a:tailEnd type="none" w="med" len="med"/>
-                    </a:lnR>
-                    <a:lnT w="9525" cap="flat" cmpd="sng" algn="ctr">
-                      <a:solidFill>
-                        <a:srgbClr val="D9D8D1"/>
-                      </a:solidFill>
-                      <a:prstDash val="solid"/>
-                      <a:round/>
-                      <a:headEnd type="none" w="med" len="med"/>
-                      <a:tailEnd type="none" w="med" len="med"/>
-                    </a:lnT>
-                    <a:lnB w="9525" cap="flat" cmpd="sng" algn="ctr">
-                      <a:solidFill>
-                        <a:srgbClr val="D9D8D1"/>
-                      </a:solidFill>
-                      <a:prstDash val="solid"/>
-                      <a:round/>
-                      <a:headEnd type="none" w="med" len="med"/>
-                      <a:tailEnd type="none" w="med" len="med"/>
-                    </a:lnB>
-                    <a:solidFill>
-                      <a:srgbClr val="F4F3EF"/>
-                    </a:solidFill>
-                  </a:tcPr>
-                </a:tc>
-                <a:tc>
-                  <a:txBody>
-                    <a:bodyPr/>
-                    <a:lstStyle/>
-                    <a:p>
-                      <a:pPr algn="r" indent="0" marL="0">
-                        <a:buNone/>
-                      </a:pPr>
-                      <a:r>
-                        <a:rPr lang="en-US" sz="1500" dirty="0">
-                          <a:solidFill>
-                            <a:srgbClr val="14202E"/>
-                          </a:solidFill>
-                          <a:latin typeface="Calibri" pitchFamily="34" charset="0"/>
-                          <a:ea typeface="Calibri" pitchFamily="34" charset="-122"/>
-                          <a:cs typeface="Calibri" pitchFamily="34" charset="-120"/>
-                        </a:rPr>
-                        <a:t>2,267978 Hz</a:t>
-                      </a:r>
-                      <a:endParaRPr lang="en-US" sz="1500" dirty="0">
-                        <a:latin typeface="Calibri" charset="0"/>
-                        <a:ea typeface="Calibri" charset="0"/>
-                        <a:cs typeface="Calibri" charset="0"/>
-                      </a:endParaRPr>
-                    </a:p>
-                  </a:txBody>
-                  <a:tcPr marL="76200" marR="76200" marT="38100" marB="38100" anchor="ctr">
-                    <a:lnL w="9525" cap="flat" cmpd="sng" algn="ctr">
-                      <a:solidFill>
-                        <a:srgbClr val="D9D8D1"/>
-                      </a:solidFill>
-                      <a:prstDash val="solid"/>
-                      <a:round/>
-                      <a:headEnd type="none" w="med" len="med"/>
-                      <a:tailEnd type="none" w="med" len="med"/>
-                    </a:lnL>
-                    <a:lnR w="9525" cap="flat" cmpd="sng" algn="ctr">
-                      <a:solidFill>
-                        <a:srgbClr val="D9D8D1"/>
-                      </a:solidFill>
-                      <a:prstDash val="solid"/>
-                      <a:round/>
-                      <a:headEnd type="none" w="med" len="med"/>
-                      <a:tailEnd type="none" w="med" len="med"/>
-                    </a:lnR>
-                    <a:lnT w="9525" cap="flat" cmpd="sng" algn="ctr">
-                      <a:solidFill>
-                        <a:srgbClr val="D9D8D1"/>
-                      </a:solidFill>
-                      <a:prstDash val="solid"/>
-                      <a:round/>
-                      <a:headEnd type="none" w="med" len="med"/>
-                      <a:tailEnd type="none" w="med" len="med"/>
-                    </a:lnT>
-                    <a:lnB w="9525" cap="flat" cmpd="sng" algn="ctr">
-                      <a:solidFill>
-                        <a:srgbClr val="D9D8D1"/>
-                      </a:solidFill>
-                      <a:prstDash val="solid"/>
-                      <a:round/>
-                      <a:headEnd type="none" w="med" len="med"/>
-                      <a:tailEnd type="none" w="med" len="med"/>
-                    </a:lnB>
-                    <a:solidFill>
-                      <a:srgbClr val="F4F3EF"/>
-                    </a:solidFill>
-                  </a:tcPr>
-                </a:tc>
-              </a:tr>
-              <a:tr h="0">
-                <a:tc>
-                  <a:txBody>
-                    <a:bodyPr/>
-                    <a:lstStyle/>
-                    <a:p>
-                      <a:pPr algn="l" indent="0" marL="0">
-                        <a:buNone/>
-                      </a:pPr>
-                      <a:r>
-                        <a:rPr lang="en-US" sz="1500" dirty="0">
-                          <a:solidFill>
-                            <a:srgbClr val="14202E"/>
-                          </a:solidFill>
-                          <a:latin typeface="Calibri" pitchFamily="34" charset="0"/>
-                          <a:ea typeface="Calibri" pitchFamily="34" charset="-122"/>
-                          <a:cs typeface="Calibri" pitchFamily="34" charset="-120"/>
-                        </a:rPr>
-                        <a:t>Abklingrate σ</a:t>
-                      </a:r>
-                      <a:endParaRPr lang="en-US" sz="1500" dirty="0">
-                        <a:latin typeface="Calibri" charset="0"/>
-                        <a:ea typeface="Calibri" charset="0"/>
-                        <a:cs typeface="Calibri" charset="0"/>
-                      </a:endParaRPr>
-                    </a:p>
-                  </a:txBody>
-                  <a:tcPr marL="76200" marR="76200" marT="38100" marB="38100" anchor="ctr">
-                    <a:lnL w="9525" cap="flat" cmpd="sng" algn="ctr">
-                      <a:solidFill>
-                        <a:srgbClr val="D9D8D1"/>
-                      </a:solidFill>
-                      <a:prstDash val="solid"/>
-                      <a:round/>
-                      <a:headEnd type="none" w="med" len="med"/>
-                      <a:tailEnd type="none" w="med" len="med"/>
-                    </a:lnL>
-                    <a:lnR w="9525" cap="flat" cmpd="sng" algn="ctr">
-                      <a:solidFill>
-                        <a:srgbClr val="D9D8D1"/>
-                      </a:solidFill>
-                      <a:prstDash val="solid"/>
-                      <a:round/>
-                      <a:headEnd type="none" w="med" len="med"/>
-                      <a:tailEnd type="none" w="med" len="med"/>
-                    </a:lnR>
-                    <a:lnT w="9525" cap="flat" cmpd="sng" algn="ctr">
-                      <a:solidFill>
-                        <a:srgbClr val="D9D8D1"/>
-                      </a:solidFill>
-                      <a:prstDash val="solid"/>
-                      <a:round/>
-                      <a:headEnd type="none" w="med" len="med"/>
-                      <a:tailEnd type="none" w="med" len="med"/>
-                    </a:lnT>
-                    <a:lnB w="9525" cap="flat" cmpd="sng" algn="ctr">
-                      <a:solidFill>
-                        <a:srgbClr val="D9D8D1"/>
-                      </a:solidFill>
-                      <a:prstDash val="solid"/>
-                      <a:round/>
-                      <a:headEnd type="none" w="med" len="med"/>
-                      <a:tailEnd type="none" w="med" len="med"/>
-                    </a:lnB>
-                    <a:solidFill>
-                      <a:srgbClr val="F4F3EF"/>
-                    </a:solidFill>
-                  </a:tcPr>
-                </a:tc>
-                <a:tc>
-                  <a:txBody>
-                    <a:bodyPr/>
-                    <a:lstStyle/>
-                    <a:p>
-                      <a:pPr algn="r" indent="0" marL="0">
-                        <a:buNone/>
-                      </a:pPr>
-                      <a:r>
-                        <a:rPr lang="en-US" sz="1500" dirty="0">
-                          <a:solidFill>
-                            <a:srgbClr val="14202E"/>
-                          </a:solidFill>
-                          <a:latin typeface="Calibri" pitchFamily="34" charset="0"/>
-                          <a:ea typeface="Calibri" pitchFamily="34" charset="-122"/>
-                          <a:cs typeface="Calibri" pitchFamily="34" charset="-120"/>
-                        </a:rPr>
-                        <a:t>−0,107 1/s</a:t>
-                      </a:r>
-                      <a:endParaRPr lang="en-US" sz="1500" dirty="0">
-                        <a:latin typeface="Calibri" charset="0"/>
-                        <a:ea typeface="Calibri" charset="0"/>
-                        <a:cs typeface="Calibri" charset="0"/>
-                      </a:endParaRPr>
-                    </a:p>
-                  </a:txBody>
-                  <a:tcPr marL="76200" marR="76200" marT="38100" marB="38100" anchor="ctr">
-                    <a:lnL w="9525" cap="flat" cmpd="sng" algn="ctr">
-                      <a:solidFill>
-                        <a:srgbClr val="D9D8D1"/>
-                      </a:solidFill>
-                      <a:prstDash val="solid"/>
-                      <a:round/>
-                      <a:headEnd type="none" w="med" len="med"/>
-                      <a:tailEnd type="none" w="med" len="med"/>
-                    </a:lnL>
-                    <a:lnR w="9525" cap="flat" cmpd="sng" algn="ctr">
-                      <a:solidFill>
-                        <a:srgbClr val="D9D8D1"/>
-                      </a:solidFill>
-                      <a:prstDash val="solid"/>
-                      <a:round/>
-                      <a:headEnd type="none" w="med" len="med"/>
-                      <a:tailEnd type="none" w="med" len="med"/>
-                    </a:lnR>
-                    <a:lnT w="9525" cap="flat" cmpd="sng" algn="ctr">
-                      <a:solidFill>
-                        <a:srgbClr val="D9D8D1"/>
-                      </a:solidFill>
-                      <a:prstDash val="solid"/>
-                      <a:round/>
-                      <a:headEnd type="none" w="med" len="med"/>
-                      <a:tailEnd type="none" w="med" len="med"/>
-                    </a:lnT>
-                    <a:lnB w="9525" cap="flat" cmpd="sng" algn="ctr">
-                      <a:solidFill>
-                        <a:srgbClr val="D9D8D1"/>
-                      </a:solidFill>
-                      <a:prstDash val="solid"/>
-                      <a:round/>
-                      <a:headEnd type="none" w="med" len="med"/>
-                      <a:tailEnd type="none" w="med" len="med"/>
-                    </a:lnB>
-                    <a:solidFill>
-                      <a:srgbClr val="F4F3EF"/>
-                    </a:solidFill>
-                  </a:tcPr>
-                </a:tc>
-                <a:tc>
-                  <a:txBody>
-                    <a:bodyPr/>
-                    <a:lstStyle/>
-                    <a:p>
-                      <a:pPr algn="r" indent="0" marL="0">
-                        <a:buNone/>
-                      </a:pPr>
-                      <a:r>
-                        <a:rPr lang="en-US" sz="1500" dirty="0">
-                          <a:solidFill>
-                            <a:srgbClr val="14202E"/>
-                          </a:solidFill>
-                          <a:latin typeface="Calibri" pitchFamily="34" charset="0"/>
-                          <a:ea typeface="Calibri" pitchFamily="34" charset="-122"/>
-                          <a:cs typeface="Calibri" pitchFamily="34" charset="-120"/>
-                        </a:rPr>
-                        <a:t>−0,192 1/s</a:t>
-                      </a:r>
-                      <a:endParaRPr lang="en-US" sz="1500" dirty="0">
-                        <a:latin typeface="Calibri" charset="0"/>
-                        <a:ea typeface="Calibri" charset="0"/>
-                        <a:cs typeface="Calibri" charset="0"/>
-                      </a:endParaRPr>
-                    </a:p>
-                  </a:txBody>
-                  <a:tcPr marL="76200" marR="76200" marT="38100" marB="38100" anchor="ctr">
-                    <a:lnL w="9525" cap="flat" cmpd="sng" algn="ctr">
-                      <a:solidFill>
-                        <a:srgbClr val="D9D8D1"/>
-                      </a:solidFill>
-                      <a:prstDash val="solid"/>
-                      <a:round/>
-                      <a:headEnd type="none" w="med" len="med"/>
-                      <a:tailEnd type="none" w="med" len="med"/>
-                    </a:lnL>
-                    <a:lnR w="9525" cap="flat" cmpd="sng" algn="ctr">
-                      <a:solidFill>
-                        <a:srgbClr val="D9D8D1"/>
-                      </a:solidFill>
-                      <a:prstDash val="solid"/>
-                      <a:round/>
-                      <a:headEnd type="none" w="med" len="med"/>
-                      <a:tailEnd type="none" w="med" len="med"/>
-                    </a:lnR>
-                    <a:lnT w="9525" cap="flat" cmpd="sng" algn="ctr">
-                      <a:solidFill>
-                        <a:srgbClr val="D9D8D1"/>
-                      </a:solidFill>
-                      <a:prstDash val="solid"/>
-                      <a:round/>
-                      <a:headEnd type="none" w="med" len="med"/>
-                      <a:tailEnd type="none" w="med" len="med"/>
-                    </a:lnT>
-                    <a:lnB w="9525" cap="flat" cmpd="sng" algn="ctr">
-                      <a:solidFill>
-                        <a:srgbClr val="D9D8D1"/>
-                      </a:solidFill>
-                      <a:prstDash val="solid"/>
-                      <a:round/>
-                      <a:headEnd type="none" w="med" len="med"/>
-                      <a:tailEnd type="none" w="med" len="med"/>
-                    </a:lnB>
-                    <a:solidFill>
-                      <a:srgbClr val="F4F3EF"/>
-                    </a:solidFill>
-                  </a:tcPr>
-                </a:tc>
-              </a:tr>
-              <a:tr h="0">
-                <a:tc>
-                  <a:txBody>
-                    <a:bodyPr/>
-                    <a:lstStyle/>
-                    <a:p>
-                      <a:pPr algn="l" indent="0" marL="0">
-                        <a:buNone/>
-                      </a:pPr>
-                      <a:r>
-                        <a:rPr lang="en-US" sz="1500" dirty="0">
-                          <a:solidFill>
-                            <a:srgbClr val="14202E"/>
-                          </a:solidFill>
-                          <a:latin typeface="Calibri" pitchFamily="34" charset="0"/>
-                          <a:ea typeface="Calibri" pitchFamily="34" charset="-122"/>
-                          <a:cs typeface="Calibri" pitchFamily="34" charset="-120"/>
-                        </a:rPr>
-                        <a:t>Anfangsamplitude bei 1 s (Dateieinheit)</a:t>
-                      </a:r>
-                      <a:endParaRPr lang="en-US" sz="1500" dirty="0">
-                        <a:latin typeface="Calibri" charset="0"/>
-                        <a:ea typeface="Calibri" charset="0"/>
-                        <a:cs typeface="Calibri" charset="0"/>
-                      </a:endParaRPr>
-                    </a:p>
-                  </a:txBody>
-                  <a:tcPr marL="76200" marR="76200" marT="38100" marB="38100" anchor="ctr">
-                    <a:lnL w="9525" cap="flat" cmpd="sng" algn="ctr">
-                      <a:solidFill>
-                        <a:srgbClr val="D9D8D1"/>
-                      </a:solidFill>
-                      <a:prstDash val="solid"/>
-                      <a:round/>
-                      <a:headEnd type="none" w="med" len="med"/>
-                      <a:tailEnd type="none" w="med" len="med"/>
-                    </a:lnL>
-                    <a:lnR w="9525" cap="flat" cmpd="sng" algn="ctr">
-                      <a:solidFill>
-                        <a:srgbClr val="D9D8D1"/>
-                      </a:solidFill>
-                      <a:prstDash val="solid"/>
-                      <a:round/>
-                      <a:headEnd type="none" w="med" len="med"/>
-                      <a:tailEnd type="none" w="med" len="med"/>
-                    </a:lnR>
-                    <a:lnT w="9525" cap="flat" cmpd="sng" algn="ctr">
-                      <a:solidFill>
-                        <a:srgbClr val="D9D8D1"/>
-                      </a:solidFill>
-                      <a:prstDash val="solid"/>
-                      <a:round/>
-                      <a:headEnd type="none" w="med" len="med"/>
-                      <a:tailEnd type="none" w="med" len="med"/>
-                    </a:lnT>
-                    <a:lnB w="9525" cap="flat" cmpd="sng" algn="ctr">
-                      <a:solidFill>
-                        <a:srgbClr val="D9D8D1"/>
-                      </a:solidFill>
-                      <a:prstDash val="solid"/>
-                      <a:round/>
-                      <a:headEnd type="none" w="med" len="med"/>
-                      <a:tailEnd type="none" w="med" len="med"/>
-                    </a:lnB>
-                    <a:solidFill>
-                      <a:srgbClr val="F4F3EF"/>
-                    </a:solidFill>
-                  </a:tcPr>
-                </a:tc>
-                <a:tc>
-                  <a:txBody>
-                    <a:bodyPr/>
-                    <a:lstStyle/>
-                    <a:p>
-                      <a:pPr algn="r" indent="0" marL="0">
-                        <a:buNone/>
-                      </a:pPr>
-                      <a:r>
-                        <a:rPr lang="en-US" sz="1500" dirty="0">
-                          <a:solidFill>
-                            <a:srgbClr val="14202E"/>
-                          </a:solidFill>
-                          <a:latin typeface="Calibri" pitchFamily="34" charset="0"/>
-                          <a:ea typeface="Calibri" pitchFamily="34" charset="-122"/>
-                          <a:cs typeface="Calibri" pitchFamily="34" charset="-120"/>
-                        </a:rPr>
-                        <a:t>22 319</a:t>
-                      </a:r>
-                      <a:endParaRPr lang="en-US" sz="1500" dirty="0">
-                        <a:latin typeface="Calibri" charset="0"/>
-                        <a:ea typeface="Calibri" charset="0"/>
-                        <a:cs typeface="Calibri" charset="0"/>
-                      </a:endParaRPr>
-                    </a:p>
-                  </a:txBody>
-                  <a:tcPr marL="76200" marR="76200" marT="38100" marB="38100" anchor="ctr">
-                    <a:lnL w="9525" cap="flat" cmpd="sng" algn="ctr">
-                      <a:solidFill>
-                        <a:srgbClr val="D9D8D1"/>
-                      </a:solidFill>
-                      <a:prstDash val="solid"/>
-                      <a:round/>
-                      <a:headEnd type="none" w="med" len="med"/>
-                      <a:tailEnd type="none" w="med" len="med"/>
-                    </a:lnL>
-                    <a:lnR w="9525" cap="flat" cmpd="sng" algn="ctr">
-                      <a:solidFill>
-                        <a:srgbClr val="D9D8D1"/>
-                      </a:solidFill>
-                      <a:prstDash val="solid"/>
-                      <a:round/>
-                      <a:headEnd type="none" w="med" len="med"/>
-                      <a:tailEnd type="none" w="med" len="med"/>
-                    </a:lnR>
-                    <a:lnT w="9525" cap="flat" cmpd="sng" algn="ctr">
-                      <a:solidFill>
-                        <a:srgbClr val="D9D8D1"/>
-                      </a:solidFill>
-                      <a:prstDash val="solid"/>
-                      <a:round/>
-                      <a:headEnd type="none" w="med" len="med"/>
-                      <a:tailEnd type="none" w="med" len="med"/>
-                    </a:lnT>
-                    <a:lnB w="9525" cap="flat" cmpd="sng" algn="ctr">
-                      <a:solidFill>
-                        <a:srgbClr val="D9D8D1"/>
-                      </a:solidFill>
-                      <a:prstDash val="solid"/>
-                      <a:round/>
-                      <a:headEnd type="none" w="med" len="med"/>
-                      <a:tailEnd type="none" w="med" len="med"/>
-                    </a:lnB>
-                    <a:solidFill>
-                      <a:srgbClr val="F4F3EF"/>
-                    </a:solidFill>
-                  </a:tcPr>
-                </a:tc>
-                <a:tc>
-                  <a:txBody>
-                    <a:bodyPr/>
-                    <a:lstStyle/>
-                    <a:p>
-                      <a:pPr algn="r" indent="0" marL="0">
-                        <a:buNone/>
-                      </a:pPr>
-                      <a:r>
-                        <a:rPr lang="en-US" sz="1500" dirty="0">
-                          <a:solidFill>
-                            <a:srgbClr val="14202E"/>
-                          </a:solidFill>
-                          <a:latin typeface="Calibri" pitchFamily="34" charset="0"/>
-                          <a:ea typeface="Calibri" pitchFamily="34" charset="-122"/>
-                          <a:cs typeface="Calibri" pitchFamily="34" charset="-120"/>
-                        </a:rPr>
-                        <a:t>59 143</a:t>
-                      </a:r>
-                      <a:endParaRPr lang="en-US" sz="1500" dirty="0">
-                        <a:latin typeface="Calibri" charset="0"/>
-                        <a:ea typeface="Calibri" charset="0"/>
-                        <a:cs typeface="Calibri" charset="0"/>
-                      </a:endParaRPr>
-                    </a:p>
-                  </a:txBody>
-                  <a:tcPr marL="76200" marR="76200" marT="38100" marB="38100" anchor="ctr">
-                    <a:lnL w="9525" cap="flat" cmpd="sng" algn="ctr">
-                      <a:solidFill>
-                        <a:srgbClr val="D9D8D1"/>
-                      </a:solidFill>
-                      <a:prstDash val="solid"/>
-                      <a:round/>
-                      <a:headEnd type="none" w="med" len="med"/>
-                      <a:tailEnd type="none" w="med" len="med"/>
-                    </a:lnL>
-                    <a:lnR w="9525" cap="flat" cmpd="sng" algn="ctr">
-                      <a:solidFill>
-                        <a:srgbClr val="D9D8D1"/>
-                      </a:solidFill>
-                      <a:prstDash val="solid"/>
-                      <a:round/>
-                      <a:headEnd type="none" w="med" len="med"/>
-                      <a:tailEnd type="none" w="med" len="med"/>
-                    </a:lnR>
-                    <a:lnT w="9525" cap="flat" cmpd="sng" algn="ctr">
-                      <a:solidFill>
-                        <a:srgbClr val="D9D8D1"/>
-                      </a:solidFill>
-                      <a:prstDash val="solid"/>
-                      <a:round/>
-                      <a:headEnd type="none" w="med" len="med"/>
-                      <a:tailEnd type="none" w="med" len="med"/>
-                    </a:lnT>
-                    <a:lnB w="9525" cap="flat" cmpd="sng" algn="ctr">
-                      <a:solidFill>
-                        <a:srgbClr val="D9D8D1"/>
-                      </a:solidFill>
-                      <a:prstDash val="solid"/>
-                      <a:round/>
-                      <a:headEnd type="none" w="med" len="med"/>
-                      <a:tailEnd type="none" w="med" len="med"/>
-                    </a:lnB>
-                    <a:solidFill>
-                      <a:srgbClr val="F4F3EF"/>
-                    </a:solidFill>
-                  </a:tcPr>
-                </a:tc>
-              </a:tr>
-              <a:tr h="0">
-                <a:tc>
-                  <a:txBody>
-                    <a:bodyPr/>
-                    <a:lstStyle/>
-                    <a:p>
-                      <a:pPr algn="l" indent="0" marL="0">
-                        <a:buNone/>
-                      </a:pPr>
-                      <a:r>
-                        <a:rPr lang="en-US" sz="1500" dirty="0">
-                          <a:solidFill>
-                            <a:srgbClr val="14202E"/>
-                          </a:solidFill>
-                          <a:latin typeface="Calibri" pitchFamily="34" charset="0"/>
-                          <a:ea typeface="Calibri" pitchFamily="34" charset="-122"/>
-                          <a:cs typeface="Calibri" pitchFamily="34" charset="-120"/>
-                        </a:rPr>
-                        <a:t>Relativer Modellfehler (100-Hz-Raster)</a:t>
-                      </a:r>
-                      <a:endParaRPr lang="en-US" sz="1500" dirty="0">
-                        <a:latin typeface="Calibri" charset="0"/>
-                        <a:ea typeface="Calibri" charset="0"/>
-                        <a:cs typeface="Calibri" charset="0"/>
-                      </a:endParaRPr>
-                    </a:p>
-                  </a:txBody>
-                  <a:tcPr marL="76200" marR="76200" marT="38100" marB="38100" anchor="ctr">
-                    <a:lnL w="9525" cap="flat" cmpd="sng" algn="ctr">
-                      <a:solidFill>
-                        <a:srgbClr val="D9D8D1"/>
-                      </a:solidFill>
-                      <a:prstDash val="solid"/>
-                      <a:round/>
-                      <a:headEnd type="none" w="med" len="med"/>
-                      <a:tailEnd type="none" w="med" len="med"/>
-                    </a:lnL>
-                    <a:lnR w="9525" cap="flat" cmpd="sng" algn="ctr">
-                      <a:solidFill>
-                        <a:srgbClr val="D9D8D1"/>
-                      </a:solidFill>
-                      <a:prstDash val="solid"/>
-                      <a:round/>
-                      <a:headEnd type="none" w="med" len="med"/>
-                      <a:tailEnd type="none" w="med" len="med"/>
-                    </a:lnR>
-                    <a:lnT w="9525" cap="flat" cmpd="sng" algn="ctr">
-                      <a:solidFill>
-                        <a:srgbClr val="D9D8D1"/>
-                      </a:solidFill>
-                      <a:prstDash val="solid"/>
-                      <a:round/>
-                      <a:headEnd type="none" w="med" len="med"/>
-                      <a:tailEnd type="none" w="med" len="med"/>
-                    </a:lnT>
-                    <a:lnB w="9525" cap="flat" cmpd="sng" algn="ctr">
-                      <a:solidFill>
-                        <a:srgbClr val="D9D8D1"/>
-                      </a:solidFill>
-                      <a:prstDash val="solid"/>
-                      <a:round/>
-                      <a:headEnd type="none" w="med" len="med"/>
-                      <a:tailEnd type="none" w="med" len="med"/>
-                    </a:lnB>
-                    <a:solidFill>
-                      <a:srgbClr val="F4F3EF"/>
-                    </a:solidFill>
-                  </a:tcPr>
-                </a:tc>
-                <a:tc>
-                  <a:txBody>
-                    <a:bodyPr/>
-                    <a:lstStyle/>
-                    <a:p>
-                      <a:pPr algn="r" indent="0" marL="0">
-                        <a:buNone/>
-                      </a:pPr>
-                      <a:r>
-                        <a:rPr lang="en-US" sz="1500" dirty="0">
-                          <a:solidFill>
-                            <a:srgbClr val="14202E"/>
-                          </a:solidFill>
-                          <a:latin typeface="Calibri" pitchFamily="34" charset="0"/>
-                          <a:ea typeface="Calibri" pitchFamily="34" charset="-122"/>
-                          <a:cs typeface="Calibri" pitchFamily="34" charset="-120"/>
-                        </a:rPr>
-                        <a:t>0,763 %</a:t>
-                      </a:r>
-                      <a:endParaRPr lang="en-US" sz="1500" dirty="0">
-                        <a:latin typeface="Calibri" charset="0"/>
-                        <a:ea typeface="Calibri" charset="0"/>
-                        <a:cs typeface="Calibri" charset="0"/>
-                      </a:endParaRPr>
-                    </a:p>
-                  </a:txBody>
-                  <a:tcPr marL="76200" marR="76200" marT="38100" marB="38100" anchor="ctr">
-                    <a:lnL w="9525" cap="flat" cmpd="sng" algn="ctr">
-                      <a:solidFill>
-                        <a:srgbClr val="D9D8D1"/>
-                      </a:solidFill>
-                      <a:prstDash val="solid"/>
-                      <a:round/>
-                      <a:headEnd type="none" w="med" len="med"/>
-                      <a:tailEnd type="none" w="med" len="med"/>
-                    </a:lnL>
-                    <a:lnR w="9525" cap="flat" cmpd="sng" algn="ctr">
-                      <a:solidFill>
-                        <a:srgbClr val="D9D8D1"/>
-                      </a:solidFill>
-                      <a:prstDash val="solid"/>
-                      <a:round/>
-                      <a:headEnd type="none" w="med" len="med"/>
-                      <a:tailEnd type="none" w="med" len="med"/>
-                    </a:lnR>
-                    <a:lnT w="9525" cap="flat" cmpd="sng" algn="ctr">
-                      <a:solidFill>
-                        <a:srgbClr val="D9D8D1"/>
-                      </a:solidFill>
-                      <a:prstDash val="solid"/>
-                      <a:round/>
-                      <a:headEnd type="none" w="med" len="med"/>
-                      <a:tailEnd type="none" w="med" len="med"/>
-                    </a:lnT>
-                    <a:lnB w="9525" cap="flat" cmpd="sng" algn="ctr">
-                      <a:solidFill>
-                        <a:srgbClr val="D9D8D1"/>
-                      </a:solidFill>
-                      <a:prstDash val="solid"/>
-                      <a:round/>
-                      <a:headEnd type="none" w="med" len="med"/>
-                      <a:tailEnd type="none" w="med" len="med"/>
-                    </a:lnB>
-                    <a:solidFill>
-                      <a:srgbClr val="F4F3EF"/>
-                    </a:solidFill>
-                  </a:tcPr>
-                </a:tc>
-                <a:tc>
-                  <a:txBody>
-                    <a:bodyPr/>
-                    <a:lstStyle/>
-                    <a:p>
-                      <a:pPr algn="r" indent="0" marL="0">
-                        <a:buNone/>
-                      </a:pPr>
-                      <a:r>
-                        <a:rPr lang="en-US" sz="1500" dirty="0">
-                          <a:solidFill>
-                            <a:srgbClr val="14202E"/>
-                          </a:solidFill>
-                          <a:latin typeface="Calibri" pitchFamily="34" charset="0"/>
-                          <a:ea typeface="Calibri" pitchFamily="34" charset="-122"/>
-                          <a:cs typeface="Calibri" pitchFamily="34" charset="-120"/>
-                        </a:rPr>
-                        <a:t>0,594 %</a:t>
-                      </a:r>
-                      <a:endParaRPr lang="en-US" sz="1500" dirty="0">
-                        <a:latin typeface="Calibri" charset="0"/>
-                        <a:ea typeface="Calibri" charset="0"/>
-                        <a:cs typeface="Calibri" charset="0"/>
-                      </a:endParaRPr>
-                    </a:p>
-                  </a:txBody>
-                  <a:tcPr marL="76200" marR="76200" marT="38100" marB="38100" anchor="ctr">
-                    <a:lnL w="9525" cap="flat" cmpd="sng" algn="ctr">
-                      <a:solidFill>
-                        <a:srgbClr val="D9D8D1"/>
-                      </a:solidFill>
-                      <a:prstDash val="solid"/>
-                      <a:round/>
-                      <a:headEnd type="none" w="med" len="med"/>
-                      <a:tailEnd type="none" w="med" len="med"/>
-                    </a:lnL>
-                    <a:lnR w="9525" cap="flat" cmpd="sng" algn="ctr">
-                      <a:solidFill>
-                        <a:srgbClr val="D9D8D1"/>
-                      </a:solidFill>
-                      <a:prstDash val="solid"/>
-                      <a:round/>
-                      <a:headEnd type="none" w="med" len="med"/>
-                      <a:tailEnd type="none" w="med" len="med"/>
-                    </a:lnR>
-                    <a:lnT w="9525" cap="flat" cmpd="sng" algn="ctr">
-                      <a:solidFill>
-                        <a:srgbClr val="D9D8D1"/>
-                      </a:solidFill>
-                      <a:prstDash val="solid"/>
-                      <a:round/>
-                      <a:headEnd type="none" w="med" len="med"/>
-                      <a:tailEnd type="none" w="med" len="med"/>
-                    </a:lnT>
-                    <a:lnB w="9525" cap="flat" cmpd="sng" algn="ctr">
-                      <a:solidFill>
-                        <a:srgbClr val="D9D8D1"/>
-                      </a:solidFill>
-                      <a:prstDash val="solid"/>
-                      <a:round/>
-                      <a:headEnd type="none" w="med" len="med"/>
-                      <a:tailEnd type="none" w="med" len="med"/>
-                    </a:lnB>
-                    <a:solidFill>
-                      <a:srgbClr val="F4F3EF"/>
-                    </a:solidFill>
-                  </a:tcPr>
-                </a:tc>
-              </a:tr>
-              <a:tr h="0">
-                <a:tc>
-                  <a:txBody>
-                    <a:bodyPr/>
-                    <a:lstStyle/>
-                    <a:p>
-                      <a:pPr algn="l" indent="0" marL="0">
-                        <a:buNone/>
-                      </a:pPr>
-                      <a:r>
-                        <a:rPr lang="en-US" sz="1500" dirty="0">
-                          <a:solidFill>
-                            <a:srgbClr val="14202E"/>
-                          </a:solidFill>
-                          <a:latin typeface="Calibri" pitchFamily="34" charset="0"/>
-                          <a:ea typeface="Calibri" pitchFamily="34" charset="-122"/>
-                          <a:cs typeface="Calibri" pitchFamily="34" charset="-120"/>
-                        </a:rPr>
-                        <a:t>Abgezogene Polpaare</a:t>
-                      </a:r>
-                      <a:endParaRPr lang="en-US" sz="1500" dirty="0">
-                        <a:latin typeface="Calibri" charset="0"/>
-                        <a:ea typeface="Calibri" charset="0"/>
-                        <a:cs typeface="Calibri" charset="0"/>
-                      </a:endParaRPr>
-                    </a:p>
-                  </a:txBody>
-                  <a:tcPr marL="76200" marR="76200" marT="38100" marB="38100" anchor="ctr">
-                    <a:lnL w="9525" cap="flat" cmpd="sng" algn="ctr">
-                      <a:solidFill>
-                        <a:srgbClr val="D9D8D1"/>
-                      </a:solidFill>
-                      <a:prstDash val="solid"/>
-                      <a:round/>
-                      <a:headEnd type="none" w="med" len="med"/>
-                      <a:tailEnd type="none" w="med" len="med"/>
-                    </a:lnL>
-                    <a:lnR w="9525" cap="flat" cmpd="sng" algn="ctr">
-                      <a:solidFill>
-                        <a:srgbClr val="D9D8D1"/>
-                      </a:solidFill>
-                      <a:prstDash val="solid"/>
-                      <a:round/>
-                      <a:headEnd type="none" w="med" len="med"/>
-                      <a:tailEnd type="none" w="med" len="med"/>
-                    </a:lnR>
-                    <a:lnT w="9525" cap="flat" cmpd="sng" algn="ctr">
-                      <a:solidFill>
-                        <a:srgbClr val="D9D8D1"/>
-                      </a:solidFill>
-                      <a:prstDash val="solid"/>
-                      <a:round/>
-                      <a:headEnd type="none" w="med" len="med"/>
-                      <a:tailEnd type="none" w="med" len="med"/>
-                    </a:lnT>
-                    <a:lnB w="9525" cap="flat" cmpd="sng" algn="ctr">
-                      <a:solidFill>
-                        <a:srgbClr val="D9D8D1"/>
-                      </a:solidFill>
-                      <a:prstDash val="solid"/>
-                      <a:round/>
-                      <a:headEnd type="none" w="med" len="med"/>
-                      <a:tailEnd type="none" w="med" len="med"/>
-                    </a:lnB>
-                    <a:solidFill>
-                      <a:srgbClr val="F4F3EF"/>
-                    </a:solidFill>
-                  </a:tcPr>
-                </a:tc>
-                <a:tc>
-                  <a:txBody>
-                    <a:bodyPr/>
-                    <a:lstStyle/>
-                    <a:p>
-                      <a:pPr algn="r" indent="0" marL="0">
-                        <a:buNone/>
-                      </a:pPr>
-                      <a:r>
-                        <a:rPr lang="en-US" sz="1500" dirty="0">
-                          <a:solidFill>
-                            <a:srgbClr val="14202E"/>
-                          </a:solidFill>
-                          <a:latin typeface="Calibri" pitchFamily="34" charset="0"/>
-                          <a:ea typeface="Calibri" pitchFamily="34" charset="-122"/>
-                          <a:cs typeface="Calibri" pitchFamily="34" charset="-120"/>
-                        </a:rPr>
-                        <a:t>2: 2,268 + 2,480 Hz</a:t>
-                      </a:r>
-                      <a:endParaRPr lang="en-US" sz="1500" dirty="0">
-                        <a:latin typeface="Calibri" charset="0"/>
-                        <a:ea typeface="Calibri" charset="0"/>
-                        <a:cs typeface="Calibri" charset="0"/>
-                      </a:endParaRPr>
-                    </a:p>
-                  </a:txBody>
-                  <a:tcPr marL="76200" marR="76200" marT="38100" marB="38100" anchor="ctr">
-                    <a:lnL w="9525" cap="flat" cmpd="sng" algn="ctr">
-                      <a:solidFill>
-                        <a:srgbClr val="D9D8D1"/>
-                      </a:solidFill>
-                      <a:prstDash val="solid"/>
-                      <a:round/>
-                      <a:headEnd type="none" w="med" len="med"/>
-                      <a:tailEnd type="none" w="med" len="med"/>
-                    </a:lnL>
-                    <a:lnR w="9525" cap="flat" cmpd="sng" algn="ctr">
-                      <a:solidFill>
-                        <a:srgbClr val="D9D8D1"/>
-                      </a:solidFill>
-                      <a:prstDash val="solid"/>
-                      <a:round/>
-                      <a:headEnd type="none" w="med" len="med"/>
-                      <a:tailEnd type="none" w="med" len="med"/>
-                    </a:lnR>
-                    <a:lnT w="9525" cap="flat" cmpd="sng" algn="ctr">
-                      <a:solidFill>
-                        <a:srgbClr val="D9D8D1"/>
-                      </a:solidFill>
-                      <a:prstDash val="solid"/>
-                      <a:round/>
-                      <a:headEnd type="none" w="med" len="med"/>
-                      <a:tailEnd type="none" w="med" len="med"/>
-                    </a:lnT>
-                    <a:lnB w="9525" cap="flat" cmpd="sng" algn="ctr">
-                      <a:solidFill>
-                        <a:srgbClr val="D9D8D1"/>
-                      </a:solidFill>
-                      <a:prstDash val="solid"/>
-                      <a:round/>
-                      <a:headEnd type="none" w="med" len="med"/>
-                      <a:tailEnd type="none" w="med" len="med"/>
-                    </a:lnB>
-                    <a:solidFill>
-                      <a:srgbClr val="F4F3EF"/>
-                    </a:solidFill>
-                  </a:tcPr>
-                </a:tc>
-                <a:tc>
-                  <a:txBody>
-                    <a:bodyPr/>
-                    <a:lstStyle/>
-                    <a:p>
-                      <a:pPr algn="r" indent="0" marL="0">
-                        <a:buNone/>
-                      </a:pPr>
-                      <a:r>
-                        <a:rPr lang="en-US" sz="1500" dirty="0">
-                          <a:solidFill>
-                            <a:srgbClr val="14202E"/>
-                          </a:solidFill>
-                          <a:latin typeface="Calibri" pitchFamily="34" charset="0"/>
-                          <a:ea typeface="Calibri" pitchFamily="34" charset="-122"/>
-                          <a:cs typeface="Calibri" pitchFamily="34" charset="-120"/>
-                        </a:rPr>
-                        <a:t>1: 2,268 Hz</a:t>
-                      </a:r>
-                      <a:endParaRPr lang="en-US" sz="1500" dirty="0">
-                        <a:latin typeface="Calibri" charset="0"/>
-                        <a:ea typeface="Calibri" charset="0"/>
-                        <a:cs typeface="Calibri" charset="0"/>
-                      </a:endParaRPr>
-                    </a:p>
-                  </a:txBody>
-                  <a:tcPr marL="76200" marR="76200" marT="38100" marB="38100" anchor="ctr">
-                    <a:lnL w="9525" cap="flat" cmpd="sng" algn="ctr">
-                      <a:solidFill>
-                        <a:srgbClr val="D9D8D1"/>
-                      </a:solidFill>
-                      <a:prstDash val="solid"/>
-                      <a:round/>
-                      <a:headEnd type="none" w="med" len="med"/>
-                      <a:tailEnd type="none" w="med" len="med"/>
-                    </a:lnL>
-                    <a:lnR w="9525" cap="flat" cmpd="sng" algn="ctr">
-                      <a:solidFill>
-                        <a:srgbClr val="D9D8D1"/>
-                      </a:solidFill>
-                      <a:prstDash val="solid"/>
-                      <a:round/>
-                      <a:headEnd type="none" w="med" len="med"/>
-                      <a:tailEnd type="none" w="med" len="med"/>
-                    </a:lnR>
-                    <a:lnT w="9525" cap="flat" cmpd="sng" algn="ctr">
-                      <a:solidFill>
-                        <a:srgbClr val="D9D8D1"/>
-                      </a:solidFill>
-                      <a:prstDash val="solid"/>
-                      <a:round/>
-                      <a:headEnd type="none" w="med" len="med"/>
-                      <a:tailEnd type="none" w="med" len="med"/>
-                    </a:lnT>
-                    <a:lnB w="9525" cap="flat" cmpd="sng" algn="ctr">
-                      <a:solidFill>
-                        <a:srgbClr val="D9D8D1"/>
-                      </a:solidFill>
-                      <a:prstDash val="solid"/>
-                      <a:round/>
-                      <a:headEnd type="none" w="med" len="med"/>
-                      <a:tailEnd type="none" w="med" len="med"/>
-                    </a:lnB>
-                    <a:solidFill>
-                      <a:srgbClr val="F4F3EF"/>
-                    </a:solidFill>
-                  </a:tcPr>
-                </a:tc>
-              </a:tr>
-              <a:tr h="0">
-                <a:tc>
-                  <a:txBody>
-                    <a:bodyPr/>
-                    <a:lstStyle/>
-                    <a:p>
-                      <a:pPr algn="l" indent="0" marL="0">
-                        <a:buNone/>
-                      </a:pPr>
-                      <a:r>
-                        <a:rPr lang="en-US" sz="1500" dirty="0">
-                          <a:solidFill>
-                            <a:srgbClr val="14202E"/>
-                          </a:solidFill>
-                          <a:latin typeface="Calibri" pitchFamily="34" charset="0"/>
-                          <a:ea typeface="Calibri" pitchFamily="34" charset="-122"/>
-                          <a:cs typeface="Calibri" pitchFamily="34" charset="-120"/>
-                        </a:rPr>
-                        <a:t>Rückgang Bandenergie 4 bis 7 s</a:t>
-                      </a:r>
-                      <a:endParaRPr lang="en-US" sz="1500" dirty="0">
-                        <a:latin typeface="Calibri" charset="0"/>
-                        <a:ea typeface="Calibri" charset="0"/>
-                        <a:cs typeface="Calibri" charset="0"/>
-                      </a:endParaRPr>
-                    </a:p>
-                  </a:txBody>
-                  <a:tcPr marL="76200" marR="76200" marT="38100" marB="38100" anchor="ctr">
-                    <a:lnL w="9525" cap="flat" cmpd="sng" algn="ctr">
-                      <a:solidFill>
-                        <a:srgbClr val="D9D8D1"/>
-                      </a:solidFill>
-                      <a:prstDash val="solid"/>
-                      <a:round/>
-                      <a:headEnd type="none" w="med" len="med"/>
-                      <a:tailEnd type="none" w="med" len="med"/>
-                    </a:lnL>
-                    <a:lnR w="9525" cap="flat" cmpd="sng" algn="ctr">
-                      <a:solidFill>
-                        <a:srgbClr val="D9D8D1"/>
-                      </a:solidFill>
-                      <a:prstDash val="solid"/>
-                      <a:round/>
-                      <a:headEnd type="none" w="med" len="med"/>
-                      <a:tailEnd type="none" w="med" len="med"/>
-                    </a:lnR>
-                    <a:lnT w="9525" cap="flat" cmpd="sng" algn="ctr">
-                      <a:solidFill>
-                        <a:srgbClr val="D9D8D1"/>
-                      </a:solidFill>
-                      <a:prstDash val="solid"/>
-                      <a:round/>
-                      <a:headEnd type="none" w="med" len="med"/>
-                      <a:tailEnd type="none" w="med" len="med"/>
-                    </a:lnT>
-                    <a:lnB w="9525" cap="flat" cmpd="sng" algn="ctr">
-                      <a:solidFill>
-                        <a:srgbClr val="D9D8D1"/>
-                      </a:solidFill>
-                      <a:prstDash val="solid"/>
-                      <a:round/>
-                      <a:headEnd type="none" w="med" len="med"/>
-                      <a:tailEnd type="none" w="med" len="med"/>
-                    </a:lnB>
-                    <a:solidFill>
-                      <a:srgbClr val="F4F3EF"/>
-                    </a:solidFill>
-                  </a:tcPr>
-                </a:tc>
-                <a:tc>
-                  <a:txBody>
-                    <a:bodyPr/>
-                    <a:lstStyle/>
-                    <a:p>
-                      <a:pPr algn="r" indent="0" marL="0">
-                        <a:buNone/>
-                      </a:pPr>
-                      <a:r>
-                        <a:rPr lang="en-US" sz="1500" dirty="0">
-                          <a:solidFill>
-                            <a:srgbClr val="14202E"/>
-                          </a:solidFill>
-                          <a:latin typeface="Calibri" pitchFamily="34" charset="0"/>
-                          <a:ea typeface="Calibri" pitchFamily="34" charset="-122"/>
-                          <a:cs typeface="Calibri" pitchFamily="34" charset="-120"/>
-                        </a:rPr>
-                        <a:t>99,87 %</a:t>
-                      </a:r>
-                      <a:endParaRPr lang="en-US" sz="1500" dirty="0">
-                        <a:latin typeface="Calibri" charset="0"/>
-                        <a:ea typeface="Calibri" charset="0"/>
-                        <a:cs typeface="Calibri" charset="0"/>
-                      </a:endParaRPr>
-                    </a:p>
-                  </a:txBody>
-                  <a:tcPr marL="76200" marR="76200" marT="38100" marB="38100" anchor="ctr">
-                    <a:lnL w="9525" cap="flat" cmpd="sng" algn="ctr">
-                      <a:solidFill>
-                        <a:srgbClr val="D9D8D1"/>
-                      </a:solidFill>
-                      <a:prstDash val="solid"/>
-                      <a:round/>
-                      <a:headEnd type="none" w="med" len="med"/>
-                      <a:tailEnd type="none" w="med" len="med"/>
-                    </a:lnL>
-                    <a:lnR w="9525" cap="flat" cmpd="sng" algn="ctr">
-                      <a:solidFill>
-                        <a:srgbClr val="D9D8D1"/>
-                      </a:solidFill>
-                      <a:prstDash val="solid"/>
-                      <a:round/>
-                      <a:headEnd type="none" w="med" len="med"/>
-                      <a:tailEnd type="none" w="med" len="med"/>
-                    </a:lnR>
-                    <a:lnT w="9525" cap="flat" cmpd="sng" algn="ctr">
-                      <a:solidFill>
-                        <a:srgbClr val="D9D8D1"/>
-                      </a:solidFill>
-                      <a:prstDash val="solid"/>
-                      <a:round/>
-                      <a:headEnd type="none" w="med" len="med"/>
-                      <a:tailEnd type="none" w="med" len="med"/>
-                    </a:lnT>
-                    <a:lnB w="9525" cap="flat" cmpd="sng" algn="ctr">
-                      <a:solidFill>
-                        <a:srgbClr val="D9D8D1"/>
-                      </a:solidFill>
-                      <a:prstDash val="solid"/>
-                      <a:round/>
-                      <a:headEnd type="none" w="med" len="med"/>
-                      <a:tailEnd type="none" w="med" len="med"/>
-                    </a:lnB>
-                    <a:solidFill>
-                      <a:srgbClr val="F4F3EF"/>
-                    </a:solidFill>
-                  </a:tcPr>
-                </a:tc>
-                <a:tc>
-                  <a:txBody>
-                    <a:bodyPr/>
-                    <a:lstStyle/>
-                    <a:p>
-                      <a:pPr algn="r" indent="0" marL="0">
-                        <a:buNone/>
-                      </a:pPr>
-                      <a:r>
-                        <a:rPr lang="en-US" sz="1500" dirty="0">
-                          <a:solidFill>
-                            <a:srgbClr val="14202E"/>
-                          </a:solidFill>
-                          <a:latin typeface="Calibri" pitchFamily="34" charset="0"/>
-                          <a:ea typeface="Calibri" pitchFamily="34" charset="-122"/>
-                          <a:cs typeface="Calibri" pitchFamily="34" charset="-120"/>
-                        </a:rPr>
-                        <a:t>99,999 %</a:t>
-                      </a:r>
-                      <a:endParaRPr lang="en-US" sz="1500" dirty="0">
-                        <a:latin typeface="Calibri" charset="0"/>
-                        <a:ea typeface="Calibri" charset="0"/>
-                        <a:cs typeface="Calibri" charset="0"/>
-                      </a:endParaRPr>
-                    </a:p>
-                  </a:txBody>
-                  <a:tcPr marL="76200" marR="76200" marT="38100" marB="38100" anchor="ctr">
-                    <a:lnL w="9525" cap="flat" cmpd="sng" algn="ctr">
-                      <a:solidFill>
-                        <a:srgbClr val="D9D8D1"/>
-                      </a:solidFill>
-                      <a:prstDash val="solid"/>
-                      <a:round/>
-                      <a:headEnd type="none" w="med" len="med"/>
-                      <a:tailEnd type="none" w="med" len="med"/>
-                    </a:lnL>
-                    <a:lnR w="9525" cap="flat" cmpd="sng" algn="ctr">
-                      <a:solidFill>
-                        <a:srgbClr val="D9D8D1"/>
-                      </a:solidFill>
-                      <a:prstDash val="solid"/>
-                      <a:round/>
-                      <a:headEnd type="none" w="med" len="med"/>
-                      <a:tailEnd type="none" w="med" len="med"/>
-                    </a:lnR>
-                    <a:lnT w="9525" cap="flat" cmpd="sng" algn="ctr">
-                      <a:solidFill>
-                        <a:srgbClr val="D9D8D1"/>
-                      </a:solidFill>
-                      <a:prstDash val="solid"/>
-                      <a:round/>
-                      <a:headEnd type="none" w="med" len="med"/>
-                      <a:tailEnd type="none" w="med" len="med"/>
-                    </a:lnT>
-                    <a:lnB w="9525" cap="flat" cmpd="sng" algn="ctr">
-                      <a:solidFill>
-                        <a:srgbClr val="D9D8D1"/>
-                      </a:solidFill>
-                      <a:prstDash val="solid"/>
-                      <a:round/>
-                      <a:headEnd type="none" w="med" len="med"/>
-                      <a:tailEnd type="none" w="med" len="med"/>
-                    </a:lnB>
-                    <a:solidFill>
-                      <a:srgbClr val="F4F3EF"/>
-                    </a:solidFill>
-                  </a:tcPr>
-                </a:tc>
-              </a:tr>
-            </a:tbl>
-          </a:graphicData>
-        </a:graphic>
-      </p:graphicFrame>
-      <p:sp>
-        <p:nvSpPr>
-          <p:cNvPr id="7" name="Text 3"/>
-          <p:cNvSpPr txBox="1"/>
-          <p:nvPr/>
-        </p:nvSpPr>
-        <p:spPr>
-          <a:xfrm>
-            <a:off x="812800" y="4381500"/>
-            <a:ext cx="10566400" cy="571500"/>
-          </a:xfrm>
-          <a:prstGeom prst="rect">
-            <a:avLst/>
-          </a:prstGeom>
-          <a:noFill/>
-          <a:ln/>
-        </p:spPr>
-        <p:txBody>
-          <a:bodyPr wrap="square" lIns="0" tIns="0" rIns="0" bIns="0" rtlCol="0" anchor="t"/>
-          <a:lstStyle/>
-          <a:p>
-            <a:pPr indent="0" marL="0">
-              <a:lnSpc>
-                <a:spcPct val="115000"/>
-              </a:lnSpc>
-              <a:buNone/>
-            </a:pPr>
-            <a:r>
-              <a:rPr lang="en-US" sz="1500" b="1" dirty="0">
-                <a:solidFill>
-                  <a:srgbClr val="14202E"/>
-                </a:solidFill>
-                <a:latin typeface="Calibri" pitchFamily="34" charset="0"/>
-                <a:ea typeface="Calibri" pitchFamily="34" charset="-122"/>
-                <a:cs typeface="Calibri" pitchFamily="34" charset="-120"/>
-              </a:rPr>
-              <a:t>Gleich kleiner Fehler, andere Zerlegung: </a:t>
-            </a:r>
-            <a:pPr indent="0" marL="0">
-              <a:lnSpc>
-                <a:spcPct val="115000"/>
-              </a:lnSpc>
-              <a:buNone/>
-            </a:pPr>
-            <a:r>
-              <a:rPr lang="en-US" sz="1500" dirty="0">
-                <a:solidFill>
-                  <a:srgbClr val="44505E"/>
-                </a:solidFill>
-                <a:latin typeface="Calibri" pitchFamily="34" charset="0"/>
-                <a:ea typeface="Calibri" pitchFamily="34" charset="-122"/>
-                <a:cs typeface="Calibri" pitchFamily="34" charset="-120"/>
-              </a:rPr>
-              <a:t>Beim positiven Sprung wird zusätzlich ein schnell abklingender Anteil bei 2,480 Hz (σ ≈ −0,83 1/s) abgezogen.</a:t>
-            </a:r>
-            <a:endParaRPr lang="en-US" sz="1500" dirty="0"/>
-          </a:p>
-        </p:txBody>
-      </p:sp>
-      <p:sp>
-        <p:nvSpPr>
-          <p:cNvPr id="25" name="Slide Number Placeholder 0"/>
-          <p:cNvSpPr>
-            <a:spLocks noGrp="1"/>
-          </p:cNvSpPr>
-          <p:nvPr>
-            <p:ph type="sldNum" sz="quarter" idx="4294967295"/>
-          </p:nvPr>
-        </p:nvSpPr>
-        <p:spPr>
-          <a:xfrm>
-            <a:off x="10795000" y="6426200"/>
-            <a:ext cx="584200" cy="228600"/>
-          </a:xfrm>
-          <a:prstGeom prst="rect">
-            <a:avLst/>
-          </a:prstGeom>
-          <a:extLst>
-            <a:ext uri="{C572A759-6A51-4108-AA02-DFA0A04FC94B}">
-              <ma14:wrappingTextBoxFlag xmlns:ma14="http://schemas.microsoft.com/office/mac/drawingml/2011/main" val="0"/>
-            </a:ext>
-          </a:extLst>
-        </p:spPr>
-        <p:txBody>
-          <a:bodyPr/>
-          <a:lstStyle>
-            <a:lvl1pPr>
-              <a:defRPr sz="1200">
-                <a:solidFill>
-                  <a:srgbClr val="5F6873"/>
-                </a:solidFill>
-                <a:latin typeface="Consolas"/>
-                <a:ea typeface="Consolas"/>
-                <a:cs typeface="Consolas"/>
-              </a:defRPr>
-            </a:lvl1pPr>
-          </a:lstStyle>
-          <a:p>
-            <a:pPr algn="r"/>
-            <a:fld id="{F7021451-1387-4CA6-816F-3879F97B5CBC}" type="slidenum">
-              <a:rPr b="0" lang="en-US"/>
-              <a:t>14</a:t>
-            </a:fld>
-            <a:endParaRPr lang="en-US"/>
-          </a:p>
-        </p:txBody>
-      </p:sp>
-    </p:spTree>
-  </p:cSld>
-  <p:clrMapOvr>
-    <a:masterClrMapping/>
-  </p:clrMapOvr>
-</p:sld>
-</file>
-
-<file path=ppt/slides/slide15.xml><?xml version="1.0" encoding="utf-8"?>
-<p:sld xmlns:a="http://schemas.openxmlformats.org/drawingml/2006/main" xmlns:r="http://schemas.openxmlformats.org/officeDocument/2006/relationships" xmlns:p="http://schemas.openxmlformats.org/presentationml/2006/main">
-  <p:cSld name="Slide 15">
-    <p:spTree>
-      <p:nvGrpSpPr>
-        <p:cNvPr id="1" name=""/>
-        <p:cNvGrpSpPr/>
-        <p:nvPr/>
-      </p:nvGrpSpPr>
-      <p:grpSpPr>
-        <a:xfrm>
-          <a:off x="0" y="0"/>
-          <a:ext cx="0" cy="0"/>
-          <a:chOff x="0" y="0"/>
-          <a:chExt cx="0" cy="0"/>
-        </a:xfrm>
-      </p:grpSpPr>
-      <p:sp>
-        <p:nvSpPr>
-          <p:cNvPr id="2" name="Text 0"/>
-          <p:cNvSpPr txBox="1"/>
-          <p:nvPr/>
-        </p:nvSpPr>
-        <p:spPr>
-          <a:xfrm>
-            <a:off x="812800" y="812800"/>
-            <a:ext cx="10566400" cy="215900"/>
-          </a:xfrm>
-          <a:prstGeom prst="rect">
-            <a:avLst/>
-          </a:prstGeom>
-          <a:noFill/>
-          <a:ln/>
-        </p:spPr>
-        <p:txBody>
-          <a:bodyPr wrap="square" lIns="0" tIns="0" rIns="0" bIns="0" rtlCol="0" anchor="t"/>
-          <a:lstStyle/>
-          <a:p>
-            <a:pPr indent="0" marL="0">
-              <a:lnSpc>
-                <a:spcPct val="115000"/>
-              </a:lnSpc>
-              <a:buNone/>
-            </a:pPr>
-            <a:r>
-              <a:rPr lang="en-US" sz="1200" spc="100" kern="0" dirty="0">
-                <a:solidFill>
-                  <a:srgbClr val="1C5CAB"/>
-                </a:solidFill>
-                <a:latin typeface="Consolas" pitchFamily="34" charset="0"/>
-                <a:ea typeface="Consolas" pitchFamily="34" charset="-122"/>
-                <a:cs typeface="Consolas" pitchFamily="34" charset="-120"/>
-              </a:rPr>
-              <a:t>PROJEKTMESSUNG · NEGATIVER SPRUNG</a:t>
-            </a:r>
-            <a:endParaRPr lang="en-US" sz="1200" dirty="0"/>
-          </a:p>
-        </p:txBody>
-      </p:sp>
-      <p:sp>
-        <p:nvSpPr>
-          <p:cNvPr id="3" name="Text 0"/>
-          <p:cNvSpPr/>
-          <p:nvPr>
-            <p:ph idx="100" type="title" hasCustomPrompt="1"/>
-          </p:nvPr>
-        </p:nvSpPr>
-        <p:spPr>
-          <a:xfrm>
-            <a:off x="812800" y="1104900"/>
-            <a:ext cx="10566400" cy="508000"/>
-          </a:xfrm>
-          <a:prstGeom prst="rect">
-            <a:avLst/>
-          </a:prstGeom>
-          <a:noFill/>
-          <a:ln/>
-        </p:spPr>
-        <p:txBody>
-          <a:bodyPr wrap="square" lIns="0" tIns="0" rIns="0" bIns="0" rtlCol="0" anchor="t"/>
-          <a:lstStyle/>
-          <a:p>
-            <a:pPr algn="l" indent="0" marL="0">
-              <a:buNone/>
-            </a:pPr>
-            <a:r>
-              <a:rPr lang="en-US" sz="3200" b="1" dirty="0">
-                <a:solidFill>
-                  <a:srgbClr val="14202E"/>
-                </a:solidFill>
-                <a:latin typeface="Calibri" pitchFamily="34" charset="0"/>
-                <a:ea typeface="Calibri" pitchFamily="34" charset="-122"/>
-                <a:cs typeface="Calibri" pitchFamily="34" charset="-120"/>
-              </a:rPr>
-              <a:t>Filterung: negative Sprungantwort</a:t>
-            </a:r>
-            <a:endParaRPr lang="en-US" sz="3200" dirty="0"/>
-          </a:p>
-        </p:txBody>
-      </p:sp>
-      <p:sp>
-        <p:nvSpPr>
-          <p:cNvPr id="4" name="Text 2"/>
-          <p:cNvSpPr txBox="1"/>
-          <p:nvPr/>
-        </p:nvSpPr>
-        <p:spPr>
-          <a:xfrm>
-            <a:off x="812800" y="6426200"/>
-            <a:ext cx="9779000" cy="228600"/>
-          </a:xfrm>
-          <a:prstGeom prst="rect">
-            <a:avLst/>
-          </a:prstGeom>
-          <a:noFill/>
-          <a:ln/>
-        </p:spPr>
-        <p:txBody>
-          <a:bodyPr wrap="square" lIns="0" tIns="0" rIns="0" bIns="0" rtlCol="0" anchor="t"/>
-          <a:lstStyle/>
-          <a:p>
-            <a:pPr indent="0" marL="0">
-              <a:lnSpc>
-                <a:spcPct val="115000"/>
-              </a:lnSpc>
-              <a:buNone/>
-            </a:pPr>
-            <a:r>
-              <a:rPr lang="en-US" sz="1200" dirty="0">
-                <a:solidFill>
-                  <a:srgbClr val="5F6873"/>
-                </a:solidFill>
-                <a:latin typeface="Calibri" pitchFamily="34" charset="0"/>
-                <a:ea typeface="Calibri" pitchFamily="34" charset="-122"/>
-                <a:cs typeface="Calibri" pitchFamily="34" charset="-120"/>
-              </a:rPr>
-              <a:t>Blau: Messung · Orange: Messung minus geschätzter 2,268-Hz-Anteil · P_pos / 10⁶ in Dateieinheit</a:t>
+              <a:t>f in Hz, σ in 1/s · Quelle: FNET, 28.12.2020, Kanal med_1422 (Mazatlán); ROMA User Guide, Tab. 2.1 (ERA)</a:t>
             </a:r>
             <a:endParaRPr lang="en-US" sz="1200" dirty="0"/>
           </a:p>
@@ -8905,7 +6942,7 @@
       </p:sp>
       <p:pic>
         <p:nvPicPr>
-          <p:cNvPr id="6" name="Image 0" descr="C:\Sevgi\projects\prony_matrix_pencil_filter\outputs\ergebnisdeck\05_filter_negativ.png">    </p:cNvPr>
+          <p:cNvPr id="6" name="Image 0" descr="C:\Sevgi\projects\prony_matrix_pencil_filter\outputs\ergebnisdeck\07_mexiko_messung.png">    </p:cNvPr>
           <p:cNvPicPr>
             <a:picLocks noChangeAspect="1"/>
           </p:cNvPicPr>
@@ -8919,8 +6956,8 @@
         </p:blipFill>
         <p:spPr>
           <a:xfrm>
-            <a:off x="1524000" y="1879600"/>
-            <a:ext cx="9144000" cy="3295650"/>
+            <a:off x="812800" y="1879600"/>
+            <a:ext cx="5588000" cy="3492500"/>
           </a:xfrm>
           <a:prstGeom prst="rect">
             <a:avLst/>
@@ -8935,12 +6972,12 @@
         </p:nvSpPr>
         <p:spPr>
           <a:xfrm>
-            <a:off x="1524000" y="1879600"/>
-            <a:ext cx="9144000" cy="3295650"/>
+            <a:off x="812800" y="1879600"/>
+            <a:ext cx="5588000" cy="3492500"/>
           </a:xfrm>
           <a:prstGeom prst="roundRect">
             <a:avLst>
-              <a:gd name="adj" fmla="val 3052"/>
+              <a:gd name="adj" fmla="val 2880"/>
             </a:avLst>
           </a:prstGeom>
           <a:ln w="9525">
@@ -8959,8 +6996,8 @@
         </p:nvSpPr>
         <p:spPr>
           <a:xfrm>
-            <a:off x="812800" y="5353050"/>
-            <a:ext cx="3314700" cy="266700"/>
+            <a:off x="6807200" y="1879600"/>
+            <a:ext cx="4572000" cy="571500"/>
           </a:xfrm>
           <a:prstGeom prst="rect">
             <a:avLst/>
@@ -8979,1002 +7016,6 @@
               <a:buNone/>
             </a:pPr>
             <a:r>
-              <a:rPr lang="en-US" sz="1500" b="1" dirty="0">
-                <a:solidFill>
-                  <a:srgbClr val="14202E"/>
-                </a:solidFill>
-                <a:latin typeface="Calibri" pitchFamily="34" charset="0"/>
-                <a:ea typeface="Calibri" pitchFamily="34" charset="-122"/>
-                <a:cs typeface="Calibri" pitchFamily="34" charset="-120"/>
-              </a:rPr>
-              <a:t>1 Polpaar</a:t>
-            </a:r>
-            <a:endParaRPr lang="en-US" sz="1500" dirty="0"/>
-          </a:p>
-        </p:txBody>
-      </p:sp>
-      <p:sp>
-        <p:nvSpPr>
-          <p:cNvPr id="9" name="Text 5"/>
-          <p:cNvSpPr txBox="1"/>
-          <p:nvPr/>
-        </p:nvSpPr>
-        <p:spPr>
-          <a:xfrm>
-            <a:off x="812800" y="5645150"/>
-            <a:ext cx="3314700" cy="228600"/>
-          </a:xfrm>
-          <a:prstGeom prst="rect">
-            <a:avLst/>
-          </a:prstGeom>
-          <a:noFill/>
-          <a:ln/>
-        </p:spPr>
-        <p:txBody>
-          <a:bodyPr wrap="square" lIns="0" tIns="0" rIns="0" bIns="0" rtlCol="0" anchor="t"/>
-          <a:lstStyle/>
-          <a:p>
-            <a:pPr indent="0" marL="0">
-              <a:lnSpc>
-                <a:spcPct val="115000"/>
-              </a:lnSpc>
-              <a:buNone/>
-            </a:pPr>
-            <a:r>
-              <a:rPr lang="en-US" sz="1200" dirty="0">
-                <a:solidFill>
-                  <a:srgbClr val="44505E"/>
-                </a:solidFill>
-                <a:latin typeface="Calibri" pitchFamily="34" charset="0"/>
-                <a:ea typeface="Calibri" pitchFamily="34" charset="-122"/>
-                <a:cs typeface="Calibri" pitchFamily="34" charset="-120"/>
-              </a:rPr>
-              <a:t>bei 2,268 Hz abgezogen</a:t>
-            </a:r>
-            <a:endParaRPr lang="en-US" sz="1200" dirty="0"/>
-          </a:p>
-        </p:txBody>
-      </p:sp>
-      <p:sp>
-        <p:nvSpPr>
-          <p:cNvPr id="10" name="Text 6"/>
-          <p:cNvSpPr txBox="1"/>
-          <p:nvPr/>
-        </p:nvSpPr>
-        <p:spPr>
-          <a:xfrm>
-            <a:off x="4436533" y="5353050"/>
-            <a:ext cx="3314700" cy="266700"/>
-          </a:xfrm>
-          <a:prstGeom prst="rect">
-            <a:avLst/>
-          </a:prstGeom>
-          <a:noFill/>
-          <a:ln/>
-        </p:spPr>
-        <p:txBody>
-          <a:bodyPr wrap="square" lIns="0" tIns="0" rIns="0" bIns="0" rtlCol="0" anchor="t"/>
-          <a:lstStyle/>
-          <a:p>
-            <a:pPr indent="0" marL="0">
-              <a:lnSpc>
-                <a:spcPct val="115000"/>
-              </a:lnSpc>
-              <a:buNone/>
-            </a:pPr>
-            <a:r>
-              <a:rPr lang="en-US" sz="1500" b="1" dirty="0">
-                <a:solidFill>
-                  <a:srgbClr val="14202E"/>
-                </a:solidFill>
-                <a:latin typeface="Calibri" pitchFamily="34" charset="0"/>
-                <a:ea typeface="Calibri" pitchFamily="34" charset="-122"/>
-                <a:cs typeface="Calibri" pitchFamily="34" charset="-120"/>
-              </a:rPr>
-              <a:t>Unverändert vor 1 s</a:t>
-            </a:r>
-            <a:endParaRPr lang="en-US" sz="1500" dirty="0"/>
-          </a:p>
-        </p:txBody>
-      </p:sp>
-      <p:sp>
-        <p:nvSpPr>
-          <p:cNvPr id="11" name="Text 7"/>
-          <p:cNvSpPr txBox="1"/>
-          <p:nvPr/>
-        </p:nvSpPr>
-        <p:spPr>
-          <a:xfrm>
-            <a:off x="4436533" y="5645150"/>
-            <a:ext cx="3314700" cy="228600"/>
-          </a:xfrm>
-          <a:prstGeom prst="rect">
-            <a:avLst/>
-          </a:prstGeom>
-          <a:noFill/>
-          <a:ln/>
-        </p:spPr>
-        <p:txBody>
-          <a:bodyPr wrap="square" lIns="0" tIns="0" rIns="0" bIns="0" rtlCol="0" anchor="t"/>
-          <a:lstStyle/>
-          <a:p>
-            <a:pPr indent="0" marL="0">
-              <a:lnSpc>
-                <a:spcPct val="115000"/>
-              </a:lnSpc>
-              <a:buNone/>
-            </a:pPr>
-            <a:r>
-              <a:rPr lang="en-US" sz="1200" dirty="0">
-                <a:solidFill>
-                  <a:srgbClr val="44505E"/>
-                </a:solidFill>
-                <a:latin typeface="Calibri" pitchFamily="34" charset="0"/>
-                <a:ea typeface="Calibri" pitchFamily="34" charset="-122"/>
-                <a:cs typeface="Calibri" pitchFamily="34" charset="-120"/>
-              </a:rPr>
-              <a:t>Abzug erst ab Analysebeginn</a:t>
-            </a:r>
-            <a:endParaRPr lang="en-US" sz="1200" dirty="0"/>
-          </a:p>
-        </p:txBody>
-      </p:sp>
-      <p:sp>
-        <p:nvSpPr>
-          <p:cNvPr id="12" name="Text 8"/>
-          <p:cNvSpPr txBox="1"/>
-          <p:nvPr/>
-        </p:nvSpPr>
-        <p:spPr>
-          <a:xfrm>
-            <a:off x="8060267" y="5353050"/>
-            <a:ext cx="3314700" cy="266700"/>
-          </a:xfrm>
-          <a:prstGeom prst="rect">
-            <a:avLst/>
-          </a:prstGeom>
-          <a:noFill/>
-          <a:ln/>
-        </p:spPr>
-        <p:txBody>
-          <a:bodyPr wrap="square" lIns="0" tIns="0" rIns="0" bIns="0" rtlCol="0" anchor="t"/>
-          <a:lstStyle/>
-          <a:p>
-            <a:pPr indent="0" marL="0">
-              <a:lnSpc>
-                <a:spcPct val="115000"/>
-              </a:lnSpc>
-              <a:buNone/>
-            </a:pPr>
-            <a:r>
-              <a:rPr lang="en-US" sz="1500" b="1" dirty="0">
-                <a:solidFill>
-                  <a:srgbClr val="14202E"/>
-                </a:solidFill>
-                <a:latin typeface="Calibri" pitchFamily="34" charset="0"/>
-                <a:ea typeface="Calibri" pitchFamily="34" charset="-122"/>
-                <a:cs typeface="Calibri" pitchFamily="34" charset="-120"/>
-              </a:rPr>
-              <a:t>−99,999 %</a:t>
-            </a:r>
-            <a:endParaRPr lang="en-US" sz="1500" dirty="0"/>
-          </a:p>
-        </p:txBody>
-      </p:sp>
-      <p:sp>
-        <p:nvSpPr>
-          <p:cNvPr id="13" name="Text 9"/>
-          <p:cNvSpPr txBox="1"/>
-          <p:nvPr/>
-        </p:nvSpPr>
-        <p:spPr>
-          <a:xfrm>
-            <a:off x="8060267" y="5645150"/>
-            <a:ext cx="3314700" cy="228600"/>
-          </a:xfrm>
-          <a:prstGeom prst="rect">
-            <a:avLst/>
-          </a:prstGeom>
-          <a:noFill/>
-          <a:ln/>
-        </p:spPr>
-        <p:txBody>
-          <a:bodyPr wrap="square" lIns="0" tIns="0" rIns="0" bIns="0" rtlCol="0" anchor="t"/>
-          <a:lstStyle/>
-          <a:p>
-            <a:pPr indent="0" marL="0">
-              <a:lnSpc>
-                <a:spcPct val="115000"/>
-              </a:lnSpc>
-              <a:buNone/>
-            </a:pPr>
-            <a:r>
-              <a:rPr lang="en-US" sz="1200" dirty="0">
-                <a:solidFill>
-                  <a:srgbClr val="44505E"/>
-                </a:solidFill>
-                <a:latin typeface="Calibri" pitchFamily="34" charset="0"/>
-                <a:ea typeface="Calibri" pitchFamily="34" charset="-122"/>
-                <a:cs typeface="Calibri" pitchFamily="34" charset="-120"/>
-              </a:rPr>
-              <a:t>Bandenergie 1,76–2,64 Hz, 4 bis 7 s</a:t>
-            </a:r>
-            <a:endParaRPr lang="en-US" sz="1200" dirty="0"/>
-          </a:p>
-        </p:txBody>
-      </p:sp>
-      <p:sp>
-        <p:nvSpPr>
-          <p:cNvPr id="25" name="Slide Number Placeholder 0"/>
-          <p:cNvSpPr>
-            <a:spLocks noGrp="1"/>
-          </p:cNvSpPr>
-          <p:nvPr>
-            <p:ph type="sldNum" sz="quarter" idx="4294967295"/>
-          </p:nvPr>
-        </p:nvSpPr>
-        <p:spPr>
-          <a:xfrm>
-            <a:off x="10795000" y="6426200"/>
-            <a:ext cx="584200" cy="228600"/>
-          </a:xfrm>
-          <a:prstGeom prst="rect">
-            <a:avLst/>
-          </a:prstGeom>
-          <a:extLst>
-            <a:ext uri="{C572A759-6A51-4108-AA02-DFA0A04FC94B}">
-              <ma14:wrappingTextBoxFlag xmlns:ma14="http://schemas.microsoft.com/office/mac/drawingml/2011/main" val="0"/>
-            </a:ext>
-          </a:extLst>
-        </p:spPr>
-        <p:txBody>
-          <a:bodyPr/>
-          <a:lstStyle>
-            <a:lvl1pPr>
-              <a:defRPr sz="1200">
-                <a:solidFill>
-                  <a:srgbClr val="5F6873"/>
-                </a:solidFill>
-                <a:latin typeface="Consolas"/>
-                <a:ea typeface="Consolas"/>
-                <a:cs typeface="Consolas"/>
-              </a:defRPr>
-            </a:lvl1pPr>
-          </a:lstStyle>
-          <a:p>
-            <a:pPr algn="r"/>
-            <a:fld id="{F7021451-1387-4CA6-816F-3879F97B5CBC}" type="slidenum">
-              <a:rPr b="0" lang="en-US"/>
-              <a:t>15</a:t>
-            </a:fld>
-            <a:endParaRPr lang="en-US"/>
-          </a:p>
-        </p:txBody>
-      </p:sp>
-    </p:spTree>
-  </p:cSld>
-  <p:clrMapOvr>
-    <a:masterClrMapping/>
-  </p:clrMapOvr>
-</p:sld>
-</file>
-
-<file path=ppt/slides/slide16.xml><?xml version="1.0" encoding="utf-8"?>
-<p:sld xmlns:a="http://schemas.openxmlformats.org/drawingml/2006/main" xmlns:r="http://schemas.openxmlformats.org/officeDocument/2006/relationships" xmlns:p="http://schemas.openxmlformats.org/presentationml/2006/main">
-  <p:cSld name="Slide 16">
-    <p:spTree>
-      <p:nvGrpSpPr>
-        <p:cNvPr id="1" name=""/>
-        <p:cNvGrpSpPr/>
-        <p:nvPr/>
-      </p:nvGrpSpPr>
-      <p:grpSpPr>
-        <a:xfrm>
-          <a:off x="0" y="0"/>
-          <a:ext cx="0" cy="0"/>
-          <a:chOff x="0" y="0"/>
-          <a:chExt cx="0" cy="0"/>
-        </a:xfrm>
-      </p:grpSpPr>
-      <p:sp>
-        <p:nvSpPr>
-          <p:cNvPr id="2" name="Text 0"/>
-          <p:cNvSpPr txBox="1"/>
-          <p:nvPr/>
-        </p:nvSpPr>
-        <p:spPr>
-          <a:xfrm>
-            <a:off x="812800" y="812800"/>
-            <a:ext cx="10566400" cy="215900"/>
-          </a:xfrm>
-          <a:prstGeom prst="rect">
-            <a:avLst/>
-          </a:prstGeom>
-          <a:noFill/>
-          <a:ln/>
-        </p:spPr>
-        <p:txBody>
-          <a:bodyPr wrap="square" lIns="0" tIns="0" rIns="0" bIns="0" rtlCol="0" anchor="t"/>
-          <a:lstStyle/>
-          <a:p>
-            <a:pPr indent="0" marL="0">
-              <a:lnSpc>
-                <a:spcPct val="115000"/>
-              </a:lnSpc>
-              <a:buNone/>
-            </a:pPr>
-            <a:r>
-              <a:rPr lang="en-US" sz="1200" spc="100" kern="0" dirty="0">
-                <a:solidFill>
-                  <a:srgbClr val="1C5CAB"/>
-                </a:solidFill>
-                <a:latin typeface="Consolas" pitchFamily="34" charset="0"/>
-                <a:ea typeface="Consolas" pitchFamily="34" charset="-122"/>
-                <a:cs typeface="Consolas" pitchFamily="34" charset="-120"/>
-              </a:rPr>
-              <a:t>PROJEKTMESSUNG · POSITIVER SPRUNG</a:t>
-            </a:r>
-            <a:endParaRPr lang="en-US" sz="1200" dirty="0"/>
-          </a:p>
-        </p:txBody>
-      </p:sp>
-      <p:sp>
-        <p:nvSpPr>
-          <p:cNvPr id="3" name="Text 0"/>
-          <p:cNvSpPr/>
-          <p:nvPr>
-            <p:ph idx="100" type="title" hasCustomPrompt="1"/>
-          </p:nvPr>
-        </p:nvSpPr>
-        <p:spPr>
-          <a:xfrm>
-            <a:off x="812800" y="1104900"/>
-            <a:ext cx="10566400" cy="508000"/>
-          </a:xfrm>
-          <a:prstGeom prst="rect">
-            <a:avLst/>
-          </a:prstGeom>
-          <a:noFill/>
-          <a:ln/>
-        </p:spPr>
-        <p:txBody>
-          <a:bodyPr wrap="square" lIns="0" tIns="0" rIns="0" bIns="0" rtlCol="0" anchor="t"/>
-          <a:lstStyle/>
-          <a:p>
-            <a:pPr algn="l" indent="0" marL="0">
-              <a:buNone/>
-            </a:pPr>
-            <a:r>
-              <a:rPr lang="en-US" sz="3200" b="1" dirty="0">
-                <a:solidFill>
-                  <a:srgbClr val="14202E"/>
-                </a:solidFill>
-                <a:latin typeface="Calibri" pitchFamily="34" charset="0"/>
-                <a:ea typeface="Calibri" pitchFamily="34" charset="-122"/>
-                <a:cs typeface="Calibri" pitchFamily="34" charset="-120"/>
-              </a:rPr>
-              <a:t>Filterung: positive Sprungantwort</a:t>
-            </a:r>
-            <a:endParaRPr lang="en-US" sz="3200" dirty="0"/>
-          </a:p>
-        </p:txBody>
-      </p:sp>
-      <p:sp>
-        <p:nvSpPr>
-          <p:cNvPr id="4" name="Text 2"/>
-          <p:cNvSpPr txBox="1"/>
-          <p:nvPr/>
-        </p:nvSpPr>
-        <p:spPr>
-          <a:xfrm>
-            <a:off x="812800" y="6426200"/>
-            <a:ext cx="9779000" cy="228600"/>
-          </a:xfrm>
-          <a:prstGeom prst="rect">
-            <a:avLst/>
-          </a:prstGeom>
-          <a:noFill/>
-          <a:ln/>
-        </p:spPr>
-        <p:txBody>
-          <a:bodyPr wrap="square" lIns="0" tIns="0" rIns="0" bIns="0" rtlCol="0" anchor="t"/>
-          <a:lstStyle/>
-          <a:p>
-            <a:pPr indent="0" marL="0">
-              <a:lnSpc>
-                <a:spcPct val="115000"/>
-              </a:lnSpc>
-              <a:buNone/>
-            </a:pPr>
-            <a:r>
-              <a:rPr lang="en-US" sz="1200" dirty="0">
-                <a:solidFill>
-                  <a:srgbClr val="5F6873"/>
-                </a:solidFill>
-                <a:latin typeface="Calibri" pitchFamily="34" charset="0"/>
-                <a:ea typeface="Calibri" pitchFamily="34" charset="-122"/>
-                <a:cs typeface="Calibri" pitchFamily="34" charset="-120"/>
-              </a:rPr>
-              <a:t>Blau: Messung · Orange: Messung minus Summe beider Anteile · P_pos / 10⁶ in Dateieinheit</a:t>
-            </a:r>
-            <a:endParaRPr lang="en-US" sz="1200" dirty="0"/>
-          </a:p>
-        </p:txBody>
-      </p:sp>
-      <p:pic>
-        <p:nvPicPr>
-          <p:cNvPr id="6" name="Image 0" descr="C:\Sevgi\projects\prony_matrix_pencil_filter\outputs\ergebnisdeck\06_filter_positiv.png">    </p:cNvPr>
-          <p:cNvPicPr>
-            <a:picLocks noChangeAspect="1"/>
-          </p:cNvPicPr>
-          <p:nvPr/>
-        </p:nvPicPr>
-        <p:blipFill>
-          <a:blip r:embed="rId1"/>
-          <a:stretch>
-            <a:fillRect/>
-          </a:stretch>
-        </p:blipFill>
-        <p:spPr>
-          <a:xfrm>
-            <a:off x="1524000" y="1879600"/>
-            <a:ext cx="9144000" cy="3295650"/>
-          </a:xfrm>
-          <a:prstGeom prst="rect">
-            <a:avLst/>
-          </a:prstGeom>
-        </p:spPr>
-      </p:pic>
-      <p:sp>
-        <p:nvSpPr>
-          <p:cNvPr id="7" name="Shape 3"/>
-          <p:cNvSpPr/>
-          <p:nvPr/>
-        </p:nvSpPr>
-        <p:spPr>
-          <a:xfrm>
-            <a:off x="1524000" y="1879600"/>
-            <a:ext cx="9144000" cy="3295650"/>
-          </a:xfrm>
-          <a:prstGeom prst="roundRect">
-            <a:avLst>
-              <a:gd name="adj" fmla="val 3052"/>
-            </a:avLst>
-          </a:prstGeom>
-          <a:ln w="9525">
-            <a:solidFill>
-              <a:srgbClr val="E1E0D9"/>
-            </a:solidFill>
-            <a:prstDash val="solid"/>
-          </a:ln>
-        </p:spPr>
-      </p:sp>
-      <p:sp>
-        <p:nvSpPr>
-          <p:cNvPr id="8" name="Text 4"/>
-          <p:cNvSpPr txBox="1"/>
-          <p:nvPr/>
-        </p:nvSpPr>
-        <p:spPr>
-          <a:xfrm>
-            <a:off x="812800" y="5353050"/>
-            <a:ext cx="3314700" cy="266700"/>
-          </a:xfrm>
-          <a:prstGeom prst="rect">
-            <a:avLst/>
-          </a:prstGeom>
-          <a:noFill/>
-          <a:ln/>
-        </p:spPr>
-        <p:txBody>
-          <a:bodyPr wrap="square" lIns="0" tIns="0" rIns="0" bIns="0" rtlCol="0" anchor="t"/>
-          <a:lstStyle/>
-          <a:p>
-            <a:pPr indent="0" marL="0">
-              <a:lnSpc>
-                <a:spcPct val="115000"/>
-              </a:lnSpc>
-              <a:buNone/>
-            </a:pPr>
-            <a:r>
-              <a:rPr lang="en-US" sz="1500" b="1" dirty="0">
-                <a:solidFill>
-                  <a:srgbClr val="14202E"/>
-                </a:solidFill>
-                <a:latin typeface="Calibri" pitchFamily="34" charset="0"/>
-                <a:ea typeface="Calibri" pitchFamily="34" charset="-122"/>
-                <a:cs typeface="Calibri" pitchFamily="34" charset="-120"/>
-              </a:rPr>
-              <a:t>2 Polpaare</a:t>
-            </a:r>
-            <a:endParaRPr lang="en-US" sz="1500" dirty="0"/>
-          </a:p>
-        </p:txBody>
-      </p:sp>
-      <p:sp>
-        <p:nvSpPr>
-          <p:cNvPr id="9" name="Text 5"/>
-          <p:cNvSpPr txBox="1"/>
-          <p:nvPr/>
-        </p:nvSpPr>
-        <p:spPr>
-          <a:xfrm>
-            <a:off x="812800" y="5645150"/>
-            <a:ext cx="3314700" cy="228600"/>
-          </a:xfrm>
-          <a:prstGeom prst="rect">
-            <a:avLst/>
-          </a:prstGeom>
-          <a:noFill/>
-          <a:ln/>
-        </p:spPr>
-        <p:txBody>
-          <a:bodyPr wrap="square" lIns="0" tIns="0" rIns="0" bIns="0" rtlCol="0" anchor="t"/>
-          <a:lstStyle/>
-          <a:p>
-            <a:pPr indent="0" marL="0">
-              <a:lnSpc>
-                <a:spcPct val="115000"/>
-              </a:lnSpc>
-              <a:buNone/>
-            </a:pPr>
-            <a:r>
-              <a:rPr lang="en-US" sz="1200" dirty="0">
-                <a:solidFill>
-                  <a:srgbClr val="44505E"/>
-                </a:solidFill>
-                <a:latin typeface="Calibri" pitchFamily="34" charset="0"/>
-                <a:ea typeface="Calibri" pitchFamily="34" charset="-122"/>
-                <a:cs typeface="Calibri" pitchFamily="34" charset="-120"/>
-              </a:rPr>
-              <a:t>bei 2,268 Hz und 2,480 Hz abgezogen</a:t>
-            </a:r>
-            <a:endParaRPr lang="en-US" sz="1200" dirty="0"/>
-          </a:p>
-        </p:txBody>
-      </p:sp>
-      <p:sp>
-        <p:nvSpPr>
-          <p:cNvPr id="10" name="Text 6"/>
-          <p:cNvSpPr txBox="1"/>
-          <p:nvPr/>
-        </p:nvSpPr>
-        <p:spPr>
-          <a:xfrm>
-            <a:off x="4436533" y="5353050"/>
-            <a:ext cx="3314700" cy="266700"/>
-          </a:xfrm>
-          <a:prstGeom prst="rect">
-            <a:avLst/>
-          </a:prstGeom>
-          <a:noFill/>
-          <a:ln/>
-        </p:spPr>
-        <p:txBody>
-          <a:bodyPr wrap="square" lIns="0" tIns="0" rIns="0" bIns="0" rtlCol="0" anchor="t"/>
-          <a:lstStyle/>
-          <a:p>
-            <a:pPr indent="0" marL="0">
-              <a:lnSpc>
-                <a:spcPct val="115000"/>
-              </a:lnSpc>
-              <a:buNone/>
-            </a:pPr>
-            <a:r>
-              <a:rPr lang="en-US" sz="1500" b="1" dirty="0">
-                <a:solidFill>
-                  <a:srgbClr val="14202E"/>
-                </a:solidFill>
-                <a:latin typeface="Calibri" pitchFamily="34" charset="0"/>
-                <a:ea typeface="Calibri" pitchFamily="34" charset="-122"/>
-                <a:cs typeface="Calibri" pitchFamily="34" charset="-120"/>
-              </a:rPr>
-              <a:t>Unverändert vor 1 s</a:t>
-            </a:r>
-            <a:endParaRPr lang="en-US" sz="1500" dirty="0"/>
-          </a:p>
-        </p:txBody>
-      </p:sp>
-      <p:sp>
-        <p:nvSpPr>
-          <p:cNvPr id="11" name="Text 7"/>
-          <p:cNvSpPr txBox="1"/>
-          <p:nvPr/>
-        </p:nvSpPr>
-        <p:spPr>
-          <a:xfrm>
-            <a:off x="4436533" y="5645150"/>
-            <a:ext cx="3314700" cy="228600"/>
-          </a:xfrm>
-          <a:prstGeom prst="rect">
-            <a:avLst/>
-          </a:prstGeom>
-          <a:noFill/>
-          <a:ln/>
-        </p:spPr>
-        <p:txBody>
-          <a:bodyPr wrap="square" lIns="0" tIns="0" rIns="0" bIns="0" rtlCol="0" anchor="t"/>
-          <a:lstStyle/>
-          <a:p>
-            <a:pPr indent="0" marL="0">
-              <a:lnSpc>
-                <a:spcPct val="115000"/>
-              </a:lnSpc>
-              <a:buNone/>
-            </a:pPr>
-            <a:r>
-              <a:rPr lang="en-US" sz="1200" dirty="0">
-                <a:solidFill>
-                  <a:srgbClr val="44505E"/>
-                </a:solidFill>
-                <a:latin typeface="Calibri" pitchFamily="34" charset="0"/>
-                <a:ea typeface="Calibri" pitchFamily="34" charset="-122"/>
-                <a:cs typeface="Calibri" pitchFamily="34" charset="-120"/>
-              </a:rPr>
-              <a:t>Abzug erst ab Analysebeginn</a:t>
-            </a:r>
-            <a:endParaRPr lang="en-US" sz="1200" dirty="0"/>
-          </a:p>
-        </p:txBody>
-      </p:sp>
-      <p:sp>
-        <p:nvSpPr>
-          <p:cNvPr id="12" name="Text 8"/>
-          <p:cNvSpPr txBox="1"/>
-          <p:nvPr/>
-        </p:nvSpPr>
-        <p:spPr>
-          <a:xfrm>
-            <a:off x="8060267" y="5353050"/>
-            <a:ext cx="3314700" cy="266700"/>
-          </a:xfrm>
-          <a:prstGeom prst="rect">
-            <a:avLst/>
-          </a:prstGeom>
-          <a:noFill/>
-          <a:ln/>
-        </p:spPr>
-        <p:txBody>
-          <a:bodyPr wrap="square" lIns="0" tIns="0" rIns="0" bIns="0" rtlCol="0" anchor="t"/>
-          <a:lstStyle/>
-          <a:p>
-            <a:pPr indent="0" marL="0">
-              <a:lnSpc>
-                <a:spcPct val="115000"/>
-              </a:lnSpc>
-              <a:buNone/>
-            </a:pPr>
-            <a:r>
-              <a:rPr lang="en-US" sz="1500" b="1" dirty="0">
-                <a:solidFill>
-                  <a:srgbClr val="14202E"/>
-                </a:solidFill>
-                <a:latin typeface="Calibri" pitchFamily="34" charset="0"/>
-                <a:ea typeface="Calibri" pitchFamily="34" charset="-122"/>
-                <a:cs typeface="Calibri" pitchFamily="34" charset="-120"/>
-              </a:rPr>
-              <a:t>−99,87 %</a:t>
-            </a:r>
-            <a:endParaRPr lang="en-US" sz="1500" dirty="0"/>
-          </a:p>
-        </p:txBody>
-      </p:sp>
-      <p:sp>
-        <p:nvSpPr>
-          <p:cNvPr id="13" name="Text 9"/>
-          <p:cNvSpPr txBox="1"/>
-          <p:nvPr/>
-        </p:nvSpPr>
-        <p:spPr>
-          <a:xfrm>
-            <a:off x="8060267" y="5645150"/>
-            <a:ext cx="3314700" cy="228600"/>
-          </a:xfrm>
-          <a:prstGeom prst="rect">
-            <a:avLst/>
-          </a:prstGeom>
-          <a:noFill/>
-          <a:ln/>
-        </p:spPr>
-        <p:txBody>
-          <a:bodyPr wrap="square" lIns="0" tIns="0" rIns="0" bIns="0" rtlCol="0" anchor="t"/>
-          <a:lstStyle/>
-          <a:p>
-            <a:pPr indent="0" marL="0">
-              <a:lnSpc>
-                <a:spcPct val="115000"/>
-              </a:lnSpc>
-              <a:buNone/>
-            </a:pPr>
-            <a:r>
-              <a:rPr lang="en-US" sz="1200" dirty="0">
-                <a:solidFill>
-                  <a:srgbClr val="44505E"/>
-                </a:solidFill>
-                <a:latin typeface="Calibri" pitchFamily="34" charset="0"/>
-                <a:ea typeface="Calibri" pitchFamily="34" charset="-122"/>
-                <a:cs typeface="Calibri" pitchFamily="34" charset="-120"/>
-              </a:rPr>
-              <a:t>Bandenergie 1,76–2,64 Hz, 4 bis 7 s</a:t>
-            </a:r>
-            <a:endParaRPr lang="en-US" sz="1200" dirty="0"/>
-          </a:p>
-        </p:txBody>
-      </p:sp>
-      <p:sp>
-        <p:nvSpPr>
-          <p:cNvPr id="25" name="Slide Number Placeholder 0"/>
-          <p:cNvSpPr>
-            <a:spLocks noGrp="1"/>
-          </p:cNvSpPr>
-          <p:nvPr>
-            <p:ph type="sldNum" sz="quarter" idx="4294967295"/>
-          </p:nvPr>
-        </p:nvSpPr>
-        <p:spPr>
-          <a:xfrm>
-            <a:off x="10795000" y="6426200"/>
-            <a:ext cx="584200" cy="228600"/>
-          </a:xfrm>
-          <a:prstGeom prst="rect">
-            <a:avLst/>
-          </a:prstGeom>
-          <a:extLst>
-            <a:ext uri="{C572A759-6A51-4108-AA02-DFA0A04FC94B}">
-              <ma14:wrappingTextBoxFlag xmlns:ma14="http://schemas.microsoft.com/office/mac/drawingml/2011/main" val="0"/>
-            </a:ext>
-          </a:extLst>
-        </p:spPr>
-        <p:txBody>
-          <a:bodyPr/>
-          <a:lstStyle>
-            <a:lvl1pPr>
-              <a:defRPr sz="1200">
-                <a:solidFill>
-                  <a:srgbClr val="5F6873"/>
-                </a:solidFill>
-                <a:latin typeface="Consolas"/>
-                <a:ea typeface="Consolas"/>
-                <a:cs typeface="Consolas"/>
-              </a:defRPr>
-            </a:lvl1pPr>
-          </a:lstStyle>
-          <a:p>
-            <a:pPr algn="r"/>
-            <a:fld id="{F7021451-1387-4CA6-816F-3879F97B5CBC}" type="slidenum">
-              <a:rPr b="0" lang="en-US"/>
-              <a:t>16</a:t>
-            </a:fld>
-            <a:endParaRPr lang="en-US"/>
-          </a:p>
-        </p:txBody>
-      </p:sp>
-    </p:spTree>
-  </p:cSld>
-  <p:clrMapOvr>
-    <a:masterClrMapping/>
-  </p:clrMapOvr>
-</p:sld>
-</file>
-
-<file path=ppt/slides/slide17.xml><?xml version="1.0" encoding="utf-8"?>
-<p:sld xmlns:a="http://schemas.openxmlformats.org/drawingml/2006/main" xmlns:r="http://schemas.openxmlformats.org/officeDocument/2006/relationships" xmlns:p="http://schemas.openxmlformats.org/presentationml/2006/main">
-  <p:cSld name="Slide 17">
-    <p:spTree>
-      <p:nvGrpSpPr>
-        <p:cNvPr id="1" name=""/>
-        <p:cNvGrpSpPr/>
-        <p:nvPr/>
-      </p:nvGrpSpPr>
-      <p:grpSpPr>
-        <a:xfrm>
-          <a:off x="0" y="0"/>
-          <a:ext cx="0" cy="0"/>
-          <a:chOff x="0" y="0"/>
-          <a:chExt cx="0" cy="0"/>
-        </a:xfrm>
-      </p:grpSpPr>
-      <p:sp>
-        <p:nvSpPr>
-          <p:cNvPr id="2" name="Text 0"/>
-          <p:cNvSpPr txBox="1"/>
-          <p:nvPr/>
-        </p:nvSpPr>
-        <p:spPr>
-          <a:xfrm>
-            <a:off x="812800" y="812800"/>
-            <a:ext cx="10566400" cy="215900"/>
-          </a:xfrm>
-          <a:prstGeom prst="rect">
-            <a:avLst/>
-          </a:prstGeom>
-          <a:noFill/>
-          <a:ln/>
-        </p:spPr>
-        <p:txBody>
-          <a:bodyPr wrap="square" lIns="0" tIns="0" rIns="0" bIns="0" rtlCol="0" anchor="t"/>
-          <a:lstStyle/>
-          <a:p>
-            <a:pPr indent="0" marL="0">
-              <a:lnSpc>
-                <a:spcPct val="115000"/>
-              </a:lnSpc>
-              <a:buNone/>
-            </a:pPr>
-            <a:r>
-              <a:rPr lang="en-US" sz="1200" spc="100" kern="0" dirty="0">
-                <a:solidFill>
-                  <a:srgbClr val="B5491B"/>
-                </a:solidFill>
-                <a:latin typeface="Consolas" pitchFamily="34" charset="0"/>
-                <a:ea typeface="Consolas" pitchFamily="34" charset="-122"/>
-                <a:cs typeface="Consolas" pitchFamily="34" charset="-120"/>
-              </a:rPr>
-              <a:t>EXTERNER VERGLEICHSFALL · NETZFREQUENZ MEXIKO</a:t>
-            </a:r>
-            <a:endParaRPr lang="en-US" sz="1200" dirty="0"/>
-          </a:p>
-        </p:txBody>
-      </p:sp>
-      <p:sp>
-        <p:nvSpPr>
-          <p:cNvPr id="3" name="Text 0"/>
-          <p:cNvSpPr/>
-          <p:nvPr>
-            <p:ph idx="100" type="title" hasCustomPrompt="1"/>
-          </p:nvPr>
-        </p:nvSpPr>
-        <p:spPr>
-          <a:xfrm>
-            <a:off x="812800" y="1104900"/>
-            <a:ext cx="10566400" cy="508000"/>
-          </a:xfrm>
-          <a:prstGeom prst="rect">
-            <a:avLst/>
-          </a:prstGeom>
-          <a:noFill/>
-          <a:ln/>
-        </p:spPr>
-        <p:txBody>
-          <a:bodyPr wrap="square" lIns="0" tIns="0" rIns="0" bIns="0" rtlCol="0" anchor="t"/>
-          <a:lstStyle/>
-          <a:p>
-            <a:pPr algn="l" indent="0" marL="0">
-              <a:buNone/>
-            </a:pPr>
-            <a:r>
-              <a:rPr lang="en-US" sz="3200" b="1" dirty="0">
-                <a:solidFill>
-                  <a:srgbClr val="14202E"/>
-                </a:solidFill>
-                <a:latin typeface="Calibri" pitchFamily="34" charset="0"/>
-                <a:ea typeface="Calibri" pitchFamily="34" charset="-122"/>
-                <a:cs typeface="Calibri" pitchFamily="34" charset="-120"/>
-              </a:rPr>
-              <a:t>Mexiko: Frequenzen stimmen überein</a:t>
-            </a:r>
-            <a:endParaRPr lang="en-US" sz="3200" dirty="0"/>
-          </a:p>
-        </p:txBody>
-      </p:sp>
-      <p:sp>
-        <p:nvSpPr>
-          <p:cNvPr id="4" name="Text 2"/>
-          <p:cNvSpPr txBox="1"/>
-          <p:nvPr/>
-        </p:nvSpPr>
-        <p:spPr>
-          <a:xfrm>
-            <a:off x="812800" y="6426200"/>
-            <a:ext cx="9779000" cy="228600"/>
-          </a:xfrm>
-          <a:prstGeom prst="rect">
-            <a:avLst/>
-          </a:prstGeom>
-          <a:noFill/>
-          <a:ln/>
-        </p:spPr>
-        <p:txBody>
-          <a:bodyPr wrap="square" lIns="0" tIns="0" rIns="0" bIns="0" rtlCol="0" anchor="t"/>
-          <a:lstStyle/>
-          <a:p>
-            <a:pPr indent="0" marL="0">
-              <a:lnSpc>
-                <a:spcPct val="115000"/>
-              </a:lnSpc>
-              <a:buNone/>
-            </a:pPr>
-            <a:r>
-              <a:rPr lang="en-US" sz="1200" dirty="0">
-                <a:solidFill>
-                  <a:srgbClr val="5F6873"/>
-                </a:solidFill>
-                <a:latin typeface="Calibri" pitchFamily="34" charset="0"/>
-                <a:ea typeface="Calibri" pitchFamily="34" charset="-122"/>
-                <a:cs typeface="Calibri" pitchFamily="34" charset="-120"/>
-              </a:rPr>
-              <a:t>f in Hz, σ in 1/s · Quelle: FNET, 28.12.2020, Kanal med_1422 (Mazatlán); ROMA User Guide, Tab. 2.1 (ERA)</a:t>
-            </a:r>
-            <a:endParaRPr lang="en-US" sz="1200" dirty="0"/>
-          </a:p>
-        </p:txBody>
-      </p:sp>
-      <p:pic>
-        <p:nvPicPr>
-          <p:cNvPr id="6" name="Image 0" descr="C:\Sevgi\projects\prony_matrix_pencil_filter\outputs\ergebnisdeck\07_mexiko_messung.png">    </p:cNvPr>
-          <p:cNvPicPr>
-            <a:picLocks noChangeAspect="1"/>
-          </p:cNvPicPr>
-          <p:nvPr/>
-        </p:nvPicPr>
-        <p:blipFill>
-          <a:blip r:embed="rId1"/>
-          <a:stretch>
-            <a:fillRect/>
-          </a:stretch>
-        </p:blipFill>
-        <p:spPr>
-          <a:xfrm>
-            <a:off x="812800" y="1879600"/>
-            <a:ext cx="5588000" cy="3492500"/>
-          </a:xfrm>
-          <a:prstGeom prst="rect">
-            <a:avLst/>
-          </a:prstGeom>
-        </p:spPr>
-      </p:pic>
-      <p:sp>
-        <p:nvSpPr>
-          <p:cNvPr id="7" name="Shape 3"/>
-          <p:cNvSpPr/>
-          <p:nvPr/>
-        </p:nvSpPr>
-        <p:spPr>
-          <a:xfrm>
-            <a:off x="812800" y="1879600"/>
-            <a:ext cx="5588000" cy="3492500"/>
-          </a:xfrm>
-          <a:prstGeom prst="roundRect">
-            <a:avLst>
-              <a:gd name="adj" fmla="val 2880"/>
-            </a:avLst>
-          </a:prstGeom>
-          <a:ln w="9525">
-            <a:solidFill>
-              <a:srgbClr val="E1E0D9"/>
-            </a:solidFill>
-            <a:prstDash val="solid"/>
-          </a:ln>
-        </p:spPr>
-      </p:sp>
-      <p:sp>
-        <p:nvSpPr>
-          <p:cNvPr id="8" name="Text 4"/>
-          <p:cNvSpPr txBox="1"/>
-          <p:nvPr/>
-        </p:nvSpPr>
-        <p:spPr>
-          <a:xfrm>
-            <a:off x="6807200" y="1879600"/>
-            <a:ext cx="4572000" cy="571500"/>
-          </a:xfrm>
-          <a:prstGeom prst="rect">
-            <a:avLst/>
-          </a:prstGeom>
-          <a:noFill/>
-          <a:ln/>
-        </p:spPr>
-        <p:txBody>
-          <a:bodyPr wrap="square" lIns="0" tIns="0" rIns="0" bIns="0" rtlCol="0" anchor="t"/>
-          <a:lstStyle/>
-          <a:p>
-            <a:pPr indent="0" marL="0">
-              <a:lnSpc>
-                <a:spcPct val="115000"/>
-              </a:lnSpc>
-              <a:buNone/>
-            </a:pPr>
-            <a:r>
               <a:rPr lang="en-US" sz="1500" dirty="0">
                 <a:solidFill>
                   <a:srgbClr val="44505E"/>
@@ -9991,7 +7032,7 @@
       </p:sp>
       <p:graphicFrame>
         <p:nvGraphicFramePr>
-          <p:cNvPr id="18" name="Table 0"/>
+          <p:cNvPr id="15" name="Table 0"/>
           <p:cNvGraphicFramePr>
             <a:graphicFrameLocks noGrp="1"/>
           </p:cNvGraphicFramePr>
@@ -11474,6 +8515,2765 @@
             <a:pPr algn="r"/>
             <a:fld id="{F7021451-1387-4CA6-816F-3879F97B5CBC}" type="slidenum">
               <a:rPr b="0" lang="en-US"/>
+              <a:t>14</a:t>
+            </a:fld>
+            <a:endParaRPr lang="en-US"/>
+          </a:p>
+        </p:txBody>
+      </p:sp>
+    </p:spTree>
+  </p:cSld>
+  <p:clrMapOvr>
+    <a:masterClrMapping/>
+  </p:clrMapOvr>
+</p:sld>
+</file>
+
+<file path=ppt/slides/slide15.xml><?xml version="1.0" encoding="utf-8"?>
+<p:sld xmlns:a="http://schemas.openxmlformats.org/drawingml/2006/main" xmlns:r="http://schemas.openxmlformats.org/officeDocument/2006/relationships" xmlns:p="http://schemas.openxmlformats.org/presentationml/2006/main">
+  <p:cSld name="Slide 15">
+    <p:spTree>
+      <p:nvGrpSpPr>
+        <p:cNvPr id="1" name=""/>
+        <p:cNvGrpSpPr/>
+        <p:nvPr/>
+      </p:nvGrpSpPr>
+      <p:grpSpPr>
+        <a:xfrm>
+          <a:off x="0" y="0"/>
+          <a:ext cx="0" cy="0"/>
+          <a:chOff x="0" y="0"/>
+          <a:chExt cx="0" cy="0"/>
+        </a:xfrm>
+      </p:grpSpPr>
+      <p:sp>
+        <p:nvSpPr>
+          <p:cNvPr id="2" name="Text 0"/>
+          <p:cNvSpPr txBox="1"/>
+          <p:nvPr/>
+        </p:nvSpPr>
+        <p:spPr>
+          <a:xfrm>
+            <a:off x="812800" y="812800"/>
+            <a:ext cx="10566400" cy="215900"/>
+          </a:xfrm>
+          <a:prstGeom prst="rect">
+            <a:avLst/>
+          </a:prstGeom>
+          <a:noFill/>
+          <a:ln/>
+        </p:spPr>
+        <p:txBody>
+          <a:bodyPr wrap="square" lIns="0" tIns="0" rIns="0" bIns="0" rtlCol="0" anchor="t"/>
+          <a:lstStyle/>
+          <a:p>
+            <a:pPr indent="0" marL="0">
+              <a:lnSpc>
+                <a:spcPct val="115000"/>
+              </a:lnSpc>
+              <a:buNone/>
+            </a:pPr>
+            <a:r>
+              <a:rPr lang="en-US" sz="1200" spc="100" kern="0" dirty="0">
+                <a:solidFill>
+                  <a:srgbClr val="B5491B"/>
+                </a:solidFill>
+                <a:latin typeface="Consolas" pitchFamily="34" charset="0"/>
+                <a:ea typeface="Consolas" pitchFamily="34" charset="-122"/>
+                <a:cs typeface="Consolas" pitchFamily="34" charset="-120"/>
+              </a:rPr>
+              <a:t>PRÜFSTUFE 3 · ORDNUNG 12</a:t>
+            </a:r>
+            <a:endParaRPr lang="en-US" sz="1200" dirty="0"/>
+          </a:p>
+        </p:txBody>
+      </p:sp>
+      <p:sp>
+        <p:nvSpPr>
+          <p:cNvPr id="3" name="Text 0"/>
+          <p:cNvSpPr/>
+          <p:nvPr>
+            <p:ph idx="100" type="title" hasCustomPrompt="1"/>
+          </p:nvPr>
+        </p:nvSpPr>
+        <p:spPr>
+          <a:xfrm>
+            <a:off x="812800" y="1104900"/>
+            <a:ext cx="10566400" cy="508000"/>
+          </a:xfrm>
+          <a:prstGeom prst="rect">
+            <a:avLst/>
+          </a:prstGeom>
+          <a:noFill/>
+          <a:ln/>
+        </p:spPr>
+        <p:txBody>
+          <a:bodyPr wrap="square" lIns="0" tIns="0" rIns="0" bIns="0" rtlCol="0" anchor="t"/>
+          <a:lstStyle/>
+          <a:p>
+            <a:pPr algn="l" indent="0" marL="0">
+              <a:buNone/>
+            </a:pPr>
+            <a:r>
+              <a:rPr lang="en-US" sz="3200" b="1" dirty="0">
+                <a:solidFill>
+                  <a:srgbClr val="14202E"/>
+                </a:solidFill>
+                <a:latin typeface="Calibri" pitchFamily="34" charset="0"/>
+                <a:ea typeface="Calibri" pitchFamily="34" charset="-122"/>
+                <a:cs typeface="Calibri" pitchFamily="34" charset="-120"/>
+              </a:rPr>
+              <a:t>Mexiko: Modellfehler 17,05 %</a:t>
+            </a:r>
+            <a:endParaRPr lang="en-US" sz="3200" dirty="0"/>
+          </a:p>
+        </p:txBody>
+      </p:sp>
+      <p:sp>
+        <p:nvSpPr>
+          <p:cNvPr id="4" name="Text 2"/>
+          <p:cNvSpPr txBox="1"/>
+          <p:nvPr/>
+        </p:nvSpPr>
+        <p:spPr>
+          <a:xfrm>
+            <a:off x="812800" y="6426200"/>
+            <a:ext cx="9779000" cy="228600"/>
+          </a:xfrm>
+          <a:prstGeom prst="rect">
+            <a:avLst/>
+          </a:prstGeom>
+          <a:noFill/>
+          <a:ln/>
+        </p:spPr>
+        <p:txBody>
+          <a:bodyPr wrap="square" lIns="0" tIns="0" rIns="0" bIns="0" rtlCol="0" anchor="t"/>
+          <a:lstStyle/>
+          <a:p>
+            <a:pPr indent="0" marL="0">
+              <a:lnSpc>
+                <a:spcPct val="115000"/>
+              </a:lnSpc>
+              <a:buNone/>
+            </a:pPr>
+            <a:r>
+              <a:rPr lang="en-US" sz="1200" dirty="0">
+                <a:solidFill>
+                  <a:srgbClr val="5F6873"/>
+                </a:solidFill>
+                <a:latin typeface="Calibri" pitchFamily="34" charset="0"/>
+                <a:ea typeface="Calibri" pitchFamily="34" charset="-122"/>
+                <a:cs typeface="Calibri" pitchFamily="34" charset="-120"/>
+              </a:rPr>
+              <a:t>Mittelwert ≈ 59,773 Hz abgezogen · 1 mHz = 0,001 Hz · Ursache des Fehlers im Abschnitt nicht nachgewiesen</a:t>
+            </a:r>
+            <a:endParaRPr lang="en-US" sz="1200" dirty="0"/>
+          </a:p>
+        </p:txBody>
+      </p:sp>
+      <p:pic>
+        <p:nvPicPr>
+          <p:cNvPr id="6" name="Image 0" descr="C:\Sevgi\projects\prony_matrix_pencil_filter\outputs\ergebnisdeck\08_mexiko_rekonstruktion.png">    </p:cNvPr>
+          <p:cNvPicPr>
+            <a:picLocks noChangeAspect="1"/>
+          </p:cNvPicPr>
+          <p:nvPr/>
+        </p:nvPicPr>
+        <p:blipFill>
+          <a:blip r:embed="rId1"/>
+          <a:stretch>
+            <a:fillRect/>
+          </a:stretch>
+        </p:blipFill>
+        <p:spPr>
+          <a:xfrm>
+            <a:off x="812800" y="1879600"/>
+            <a:ext cx="5969000" cy="3962400"/>
+          </a:xfrm>
+          <a:prstGeom prst="rect">
+            <a:avLst/>
+          </a:prstGeom>
+        </p:spPr>
+      </p:pic>
+      <p:sp>
+        <p:nvSpPr>
+          <p:cNvPr id="7" name="Shape 3"/>
+          <p:cNvSpPr/>
+          <p:nvPr/>
+        </p:nvSpPr>
+        <p:spPr>
+          <a:xfrm>
+            <a:off x="812800" y="1879600"/>
+            <a:ext cx="5969000" cy="3962400"/>
+          </a:xfrm>
+          <a:prstGeom prst="roundRect">
+            <a:avLst>
+              <a:gd name="adj" fmla="val 2538"/>
+            </a:avLst>
+          </a:prstGeom>
+          <a:ln w="9525">
+            <a:solidFill>
+              <a:srgbClr val="E1E0D9"/>
+            </a:solidFill>
+            <a:prstDash val="solid"/>
+          </a:ln>
+        </p:spPr>
+      </p:sp>
+      <p:sp>
+        <p:nvSpPr>
+          <p:cNvPr id="8" name="Text 4"/>
+          <p:cNvSpPr txBox="1"/>
+          <p:nvPr/>
+        </p:nvSpPr>
+        <p:spPr>
+          <a:xfrm>
+            <a:off x="7188200" y="1879600"/>
+            <a:ext cx="4191000" cy="533400"/>
+          </a:xfrm>
+          <a:prstGeom prst="rect">
+            <a:avLst/>
+          </a:prstGeom>
+          <a:noFill/>
+          <a:ln/>
+        </p:spPr>
+        <p:txBody>
+          <a:bodyPr wrap="square" lIns="0" tIns="0" rIns="0" bIns="0" rtlCol="0" anchor="t"/>
+          <a:lstStyle/>
+          <a:p>
+            <a:pPr indent="0" marL="0">
+              <a:lnSpc>
+                <a:spcPct val="115000"/>
+              </a:lnSpc>
+              <a:buNone/>
+            </a:pPr>
+            <a:r>
+              <a:rPr lang="en-US" sz="3600" b="1" dirty="0">
+                <a:solidFill>
+                  <a:srgbClr val="B5491B"/>
+                </a:solidFill>
+                <a:latin typeface="Calibri" pitchFamily="34" charset="0"/>
+                <a:ea typeface="Calibri" pitchFamily="34" charset="-122"/>
+                <a:cs typeface="Calibri" pitchFamily="34" charset="-120"/>
+              </a:rPr>
+              <a:t>17,05 %</a:t>
+            </a:r>
+            <a:endParaRPr lang="en-US" sz="3600" dirty="0"/>
+          </a:p>
+        </p:txBody>
+      </p:sp>
+      <p:pic>
+        <p:nvPicPr>
+          <p:cNvPr id="9" name="Image 1" descr="mx">    </p:cNvPr>
+          <p:cNvPicPr>
+            <a:picLocks noChangeAspect="1"/>
+          </p:cNvPicPr>
+          <p:nvPr/>
+        </p:nvPicPr>
+        <p:blipFill>
+          <a:blip r:embed="rId2"/>
+          <a:stretch>
+            <a:fillRect/>
+          </a:stretch>
+        </p:blipFill>
+        <p:spPr>
+          <a:xfrm>
+            <a:off x="7188200" y="2463800"/>
+            <a:ext cx="2476500" cy="539750"/>
+          </a:xfrm>
+          <a:prstGeom prst="rect">
+            <a:avLst/>
+          </a:prstGeom>
+        </p:spPr>
+      </p:pic>
+      <p:sp>
+        <p:nvSpPr>
+          <p:cNvPr id="10" name="Text 5"/>
+          <p:cNvSpPr txBox="1"/>
+          <p:nvPr/>
+        </p:nvSpPr>
+        <p:spPr>
+          <a:xfrm>
+            <a:off x="7188200" y="3035300"/>
+            <a:ext cx="4191000" cy="228600"/>
+          </a:xfrm>
+          <a:prstGeom prst="rect">
+            <a:avLst/>
+          </a:prstGeom>
+          <a:noFill/>
+          <a:ln/>
+        </p:spPr>
+        <p:txBody>
+          <a:bodyPr wrap="square" lIns="0" tIns="0" rIns="0" bIns="0" rtlCol="0" anchor="t"/>
+          <a:lstStyle/>
+          <a:p>
+            <a:pPr indent="0" marL="0">
+              <a:lnSpc>
+                <a:spcPct val="115000"/>
+              </a:lnSpc>
+              <a:buNone/>
+            </a:pPr>
+            <a:r>
+              <a:rPr lang="en-US" sz="1200" dirty="0">
+                <a:solidFill>
+                  <a:srgbClr val="44505E"/>
+                </a:solidFill>
+                <a:latin typeface="Calibri" pitchFamily="34" charset="0"/>
+                <a:ea typeface="Calibri" pitchFamily="34" charset="-122"/>
+                <a:cs typeface="Calibri" pitchFamily="34" charset="-120"/>
+              </a:rPr>
+              <a:t>über dieselben 301 Zeitpunkte</a:t>
+            </a:r>
+            <a:endParaRPr lang="en-US" sz="1200" dirty="0"/>
+          </a:p>
+        </p:txBody>
+      </p:sp>
+      <p:sp>
+        <p:nvSpPr>
+          <p:cNvPr id="11" name="Text 6"/>
+          <p:cNvSpPr txBox="1"/>
+          <p:nvPr/>
+        </p:nvSpPr>
+        <p:spPr>
+          <a:xfrm>
+            <a:off x="7188200" y="3365500"/>
+            <a:ext cx="4191000" cy="266700"/>
+          </a:xfrm>
+          <a:prstGeom prst="rect">
+            <a:avLst/>
+          </a:prstGeom>
+          <a:noFill/>
+          <a:ln/>
+        </p:spPr>
+        <p:txBody>
+          <a:bodyPr wrap="square" lIns="0" tIns="0" rIns="0" bIns="0" rtlCol="0" anchor="t"/>
+          <a:lstStyle/>
+          <a:p>
+            <a:pPr indent="0" marL="0">
+              <a:lnSpc>
+                <a:spcPct val="115000"/>
+              </a:lnSpc>
+              <a:buNone/>
+            </a:pPr>
+            <a:r>
+              <a:rPr lang="en-US" sz="1500" b="1" dirty="0">
+                <a:solidFill>
+                  <a:srgbClr val="14202E"/>
+                </a:solidFill>
+                <a:latin typeface="Calibri" pitchFamily="34" charset="0"/>
+                <a:ea typeface="Calibri" pitchFamily="34" charset="-122"/>
+                <a:cs typeface="Calibri" pitchFamily="34" charset="-120"/>
+              </a:rPr>
+              <a:t>Wo der Fehler entsteht</a:t>
+            </a:r>
+            <a:endParaRPr lang="en-US" sz="1500" dirty="0"/>
+          </a:p>
+        </p:txBody>
+      </p:sp>
+      <p:sp>
+        <p:nvSpPr>
+          <p:cNvPr id="12" name="Text 7"/>
+          <p:cNvSpPr txBox="1"/>
+          <p:nvPr/>
+        </p:nvSpPr>
+        <p:spPr>
+          <a:xfrm>
+            <a:off x="7188200" y="3683000"/>
+            <a:ext cx="4191000" cy="571500"/>
+          </a:xfrm>
+          <a:prstGeom prst="rect">
+            <a:avLst/>
+          </a:prstGeom>
+          <a:noFill/>
+          <a:ln/>
+        </p:spPr>
+        <p:txBody>
+          <a:bodyPr wrap="square" lIns="0" tIns="0" rIns="0" bIns="0" rtlCol="0" anchor="t"/>
+          <a:lstStyle/>
+          <a:p>
+            <a:pPr indent="0" marL="0">
+              <a:lnSpc>
+                <a:spcPct val="115000"/>
+              </a:lnSpc>
+              <a:buNone/>
+            </a:pPr>
+            <a:r>
+              <a:rPr lang="en-US" sz="1500" dirty="0">
+                <a:solidFill>
+                  <a:srgbClr val="44505E"/>
+                </a:solidFill>
+                <a:latin typeface="Calibri" pitchFamily="34" charset="0"/>
+                <a:ea typeface="Calibri" pitchFamily="34" charset="-122"/>
+                <a:cs typeface="Calibri" pitchFamily="34" charset="-120"/>
+              </a:rPr>
+              <a:t>240 bis 243 s: 55 % der Fehlerquadratsumme. Ohne diesen Abschnitt noch 11,8 %.</a:t>
+            </a:r>
+            <a:endParaRPr lang="en-US" sz="1500" dirty="0"/>
+          </a:p>
+        </p:txBody>
+      </p:sp>
+      <p:sp>
+        <p:nvSpPr>
+          <p:cNvPr id="13" name="Text 8"/>
+          <p:cNvSpPr txBox="1"/>
+          <p:nvPr/>
+        </p:nvSpPr>
+        <p:spPr>
+          <a:xfrm>
+            <a:off x="7188200" y="4368800"/>
+            <a:ext cx="4191000" cy="266700"/>
+          </a:xfrm>
+          <a:prstGeom prst="rect">
+            <a:avLst/>
+          </a:prstGeom>
+          <a:noFill/>
+          <a:ln/>
+        </p:spPr>
+        <p:txBody>
+          <a:bodyPr wrap="square" lIns="0" tIns="0" rIns="0" bIns="0" rtlCol="0" anchor="t"/>
+          <a:lstStyle/>
+          <a:p>
+            <a:pPr indent="0" marL="0">
+              <a:lnSpc>
+                <a:spcPct val="115000"/>
+              </a:lnSpc>
+              <a:buNone/>
+            </a:pPr>
+            <a:r>
+              <a:rPr lang="en-US" sz="1500" b="1" dirty="0">
+                <a:solidFill>
+                  <a:srgbClr val="14202E"/>
+                </a:solidFill>
+                <a:latin typeface="Calibri" pitchFamily="34" charset="0"/>
+                <a:ea typeface="Calibri" pitchFamily="34" charset="-122"/>
+                <a:cs typeface="Calibri" pitchFamily="34" charset="-120"/>
+              </a:rPr>
+              <a:t>Kein Mangel von Matrix Pencil</a:t>
+            </a:r>
+            <a:endParaRPr lang="en-US" sz="1500" dirty="0"/>
+          </a:p>
+        </p:txBody>
+      </p:sp>
+      <p:sp>
+        <p:nvSpPr>
+          <p:cNvPr id="14" name="Text 9"/>
+          <p:cNvSpPr txBox="1"/>
+          <p:nvPr/>
+        </p:nvSpPr>
+        <p:spPr>
+          <a:xfrm>
+            <a:off x="7188200" y="4686300"/>
+            <a:ext cx="4191000" cy="571500"/>
+          </a:xfrm>
+          <a:prstGeom prst="rect">
+            <a:avLst/>
+          </a:prstGeom>
+          <a:noFill/>
+          <a:ln/>
+        </p:spPr>
+        <p:txBody>
+          <a:bodyPr wrap="square" lIns="0" tIns="0" rIns="0" bIns="0" rtlCol="0" anchor="t"/>
+          <a:lstStyle/>
+          <a:p>
+            <a:pPr indent="0" marL="0">
+              <a:lnSpc>
+                <a:spcPct val="115000"/>
+              </a:lnSpc>
+              <a:buNone/>
+            </a:pPr>
+            <a:r>
+              <a:rPr lang="en-US" sz="1500" dirty="0">
+                <a:solidFill>
+                  <a:srgbClr val="44505E"/>
+                </a:solidFill>
+                <a:latin typeface="Calibri" pitchFamily="34" charset="0"/>
+                <a:ea typeface="Calibri" pitchFamily="34" charset="-122"/>
+                <a:cs typeface="Calibri" pitchFamily="34" charset="-120"/>
+              </a:rPr>
+              <a:t>Mit den drei Moden der Autoren erreicht selbst die beste Anpassung 40,6 % Fehler.</a:t>
+            </a:r>
+            <a:endParaRPr lang="en-US" sz="1500" dirty="0"/>
+          </a:p>
+        </p:txBody>
+      </p:sp>
+      <p:sp>
+        <p:nvSpPr>
+          <p:cNvPr id="15" name="Text 10"/>
+          <p:cNvSpPr txBox="1"/>
+          <p:nvPr/>
+        </p:nvSpPr>
+        <p:spPr>
+          <a:xfrm>
+            <a:off x="7188200" y="5372100"/>
+            <a:ext cx="4191000" cy="266700"/>
+          </a:xfrm>
+          <a:prstGeom prst="rect">
+            <a:avLst/>
+          </a:prstGeom>
+          <a:noFill/>
+          <a:ln/>
+        </p:spPr>
+        <p:txBody>
+          <a:bodyPr wrap="square" lIns="0" tIns="0" rIns="0" bIns="0" rtlCol="0" anchor="t"/>
+          <a:lstStyle/>
+          <a:p>
+            <a:pPr indent="0" marL="0">
+              <a:lnSpc>
+                <a:spcPct val="115000"/>
+              </a:lnSpc>
+              <a:buNone/>
+            </a:pPr>
+            <a:r>
+              <a:rPr lang="en-US" sz="1500" b="1" dirty="0">
+                <a:solidFill>
+                  <a:srgbClr val="B5491B"/>
+                </a:solidFill>
+                <a:latin typeface="Calibri" pitchFamily="34" charset="0"/>
+                <a:ea typeface="Calibri" pitchFamily="34" charset="-122"/>
+                <a:cs typeface="Calibri" pitchFamily="34" charset="-120"/>
+              </a:rPr>
+              <a:t>Folge: über 10 %, Abzug blockiert.</a:t>
+            </a:r>
+            <a:endParaRPr lang="en-US" sz="1500" dirty="0"/>
+          </a:p>
+        </p:txBody>
+      </p:sp>
+      <p:sp>
+        <p:nvSpPr>
+          <p:cNvPr id="25" name="Slide Number Placeholder 0"/>
+          <p:cNvSpPr>
+            <a:spLocks noGrp="1"/>
+          </p:cNvSpPr>
+          <p:nvPr>
+            <p:ph type="sldNum" sz="quarter" idx="4294967295"/>
+          </p:nvPr>
+        </p:nvSpPr>
+        <p:spPr>
+          <a:xfrm>
+            <a:off x="10795000" y="6426200"/>
+            <a:ext cx="584200" cy="228600"/>
+          </a:xfrm>
+          <a:prstGeom prst="rect">
+            <a:avLst/>
+          </a:prstGeom>
+          <a:extLst>
+            <a:ext uri="{C572A759-6A51-4108-AA02-DFA0A04FC94B}">
+              <ma14:wrappingTextBoxFlag xmlns:ma14="http://schemas.microsoft.com/office/mac/drawingml/2011/main" val="0"/>
+            </a:ext>
+          </a:extLst>
+        </p:spPr>
+        <p:txBody>
+          <a:bodyPr/>
+          <a:lstStyle>
+            <a:lvl1pPr>
+              <a:defRPr sz="1200">
+                <a:solidFill>
+                  <a:srgbClr val="5F6873"/>
+                </a:solidFill>
+                <a:latin typeface="Consolas"/>
+                <a:ea typeface="Consolas"/>
+                <a:cs typeface="Consolas"/>
+              </a:defRPr>
+            </a:lvl1pPr>
+          </a:lstStyle>
+          <a:p>
+            <a:pPr algn="r"/>
+            <a:fld id="{F7021451-1387-4CA6-816F-3879F97B5CBC}" type="slidenum">
+              <a:rPr b="0" lang="en-US"/>
+              <a:t>15</a:t>
+            </a:fld>
+            <a:endParaRPr lang="en-US"/>
+          </a:p>
+        </p:txBody>
+      </p:sp>
+    </p:spTree>
+  </p:cSld>
+  <p:clrMapOvr>
+    <a:masterClrMapping/>
+  </p:clrMapOvr>
+</p:sld>
+</file>
+
+<file path=ppt/slides/slide16.xml><?xml version="1.0" encoding="utf-8"?>
+<p:sld xmlns:a="http://schemas.openxmlformats.org/drawingml/2006/main" xmlns:r="http://schemas.openxmlformats.org/officeDocument/2006/relationships" xmlns:p="http://schemas.openxmlformats.org/presentationml/2006/main">
+  <p:cSld name="Slide 16">
+    <p:spTree>
+      <p:nvGrpSpPr>
+        <p:cNvPr id="1" name=""/>
+        <p:cNvGrpSpPr/>
+        <p:nvPr/>
+      </p:nvGrpSpPr>
+      <p:grpSpPr>
+        <a:xfrm>
+          <a:off x="0" y="0"/>
+          <a:ext cx="0" cy="0"/>
+          <a:chOff x="0" y="0"/>
+          <a:chExt cx="0" cy="0"/>
+        </a:xfrm>
+      </p:grpSpPr>
+      <p:sp>
+        <p:nvSpPr>
+          <p:cNvPr id="2" name="Text 0"/>
+          <p:cNvSpPr txBox="1"/>
+          <p:nvPr/>
+        </p:nvSpPr>
+        <p:spPr>
+          <a:xfrm>
+            <a:off x="812800" y="812800"/>
+            <a:ext cx="10566400" cy="215900"/>
+          </a:xfrm>
+          <a:prstGeom prst="rect">
+            <a:avLst/>
+          </a:prstGeom>
+          <a:noFill/>
+          <a:ln/>
+        </p:spPr>
+        <p:txBody>
+          <a:bodyPr wrap="square" lIns="0" tIns="0" rIns="0" bIns="0" rtlCol="0" anchor="t"/>
+          <a:lstStyle/>
+          <a:p>
+            <a:pPr indent="0" marL="0">
+              <a:lnSpc>
+                <a:spcPct val="115000"/>
+              </a:lnSpc>
+              <a:buNone/>
+            </a:pPr>
+            <a:r>
+              <a:rPr lang="en-US" sz="1200" spc="100" kern="0" dirty="0">
+                <a:solidFill>
+                  <a:srgbClr val="B5491B"/>
+                </a:solidFill>
+                <a:latin typeface="Consolas" pitchFamily="34" charset="0"/>
+                <a:ea typeface="Consolas" pitchFamily="34" charset="-122"/>
+                <a:cs typeface="Consolas" pitchFamily="34" charset="-120"/>
+              </a:rPr>
+              <a:t>PRÜFSTUFE 3 · ORDNUNGSSTUDIE</a:t>
+            </a:r>
+            <a:endParaRPr lang="en-US" sz="1200" dirty="0"/>
+          </a:p>
+        </p:txBody>
+      </p:sp>
+      <p:sp>
+        <p:nvSpPr>
+          <p:cNvPr id="3" name="Text 0"/>
+          <p:cNvSpPr/>
+          <p:nvPr>
+            <p:ph idx="100" type="title" hasCustomPrompt="1"/>
+          </p:nvPr>
+        </p:nvSpPr>
+        <p:spPr>
+          <a:xfrm>
+            <a:off x="812800" y="1104900"/>
+            <a:ext cx="10566400" cy="508000"/>
+          </a:xfrm>
+          <a:prstGeom prst="rect">
+            <a:avLst/>
+          </a:prstGeom>
+          <a:noFill/>
+          <a:ln/>
+        </p:spPr>
+        <p:txBody>
+          <a:bodyPr wrap="square" lIns="0" tIns="0" rIns="0" bIns="0" rtlCol="0" anchor="t"/>
+          <a:lstStyle/>
+          <a:p>
+            <a:pPr algn="l" indent="0" marL="0">
+              <a:buNone/>
+            </a:pPr>
+            <a:r>
+              <a:rPr lang="en-US" sz="3200" b="1" dirty="0">
+                <a:solidFill>
+                  <a:srgbClr val="14202E"/>
+                </a:solidFill>
+                <a:latin typeface="Calibri" pitchFamily="34" charset="0"/>
+                <a:ea typeface="Calibri" pitchFamily="34" charset="-122"/>
+                <a:cs typeface="Calibri" pitchFamily="34" charset="-120"/>
+              </a:rPr>
+              <a:t>Mexiko: Warum nicht einfach höhere Ordnung?</a:t>
+            </a:r>
+            <a:endParaRPr lang="en-US" sz="3200" dirty="0"/>
+          </a:p>
+        </p:txBody>
+      </p:sp>
+      <p:sp>
+        <p:nvSpPr>
+          <p:cNvPr id="4" name="Text 2"/>
+          <p:cNvSpPr txBox="1"/>
+          <p:nvPr/>
+        </p:nvSpPr>
+        <p:spPr>
+          <a:xfrm>
+            <a:off x="812800" y="6426200"/>
+            <a:ext cx="9779000" cy="228600"/>
+          </a:xfrm>
+          <a:prstGeom prst="rect">
+            <a:avLst/>
+          </a:prstGeom>
+          <a:noFill/>
+          <a:ln/>
+        </p:spPr>
+        <p:txBody>
+          <a:bodyPr wrap="square" lIns="0" tIns="0" rIns="0" bIns="0" rtlCol="0" anchor="t"/>
+          <a:lstStyle/>
+          <a:p>
+            <a:pPr indent="0" marL="0">
+              <a:lnSpc>
+                <a:spcPct val="115000"/>
+              </a:lnSpc>
+              <a:buNone/>
+            </a:pPr>
+            <a:r>
+              <a:rPr lang="en-US" sz="1200" dirty="0">
+                <a:solidFill>
+                  <a:srgbClr val="5F6873"/>
+                </a:solidFill>
+                <a:latin typeface="Calibri" pitchFamily="34" charset="0"/>
+                <a:ea typeface="Calibri" pitchFamily="34" charset="-122"/>
+                <a:cs typeface="Calibri" pitchFamily="34" charset="-120"/>
+              </a:rPr>
+              <a:t>Gestrichelt: Schutzgrenze des Filters (10 %) · Prüfung innerhalb derselben Aufzeichnung, keine unabhängige Validierung</a:t>
+            </a:r>
+            <a:endParaRPr lang="en-US" sz="1200" dirty="0"/>
+          </a:p>
+        </p:txBody>
+      </p:sp>
+      <p:pic>
+        <p:nvPicPr>
+          <p:cNvPr id="6" name="Image 0" descr="C:\Sevgi\projects\prony_matrix_pencil_filter\outputs\ergebnisdeck\09_mexiko_ordnung.png">    </p:cNvPr>
+          <p:cNvPicPr>
+            <a:picLocks noChangeAspect="1"/>
+          </p:cNvPicPr>
+          <p:nvPr/>
+        </p:nvPicPr>
+        <p:blipFill>
+          <a:blip r:embed="rId1"/>
+          <a:stretch>
+            <a:fillRect/>
+          </a:stretch>
+        </p:blipFill>
+        <p:spPr>
+          <a:xfrm>
+            <a:off x="2413000" y="1879600"/>
+            <a:ext cx="7366000" cy="2698750"/>
+          </a:xfrm>
+          <a:prstGeom prst="rect">
+            <a:avLst/>
+          </a:prstGeom>
+        </p:spPr>
+      </p:pic>
+      <p:sp>
+        <p:nvSpPr>
+          <p:cNvPr id="7" name="Shape 3"/>
+          <p:cNvSpPr/>
+          <p:nvPr/>
+        </p:nvSpPr>
+        <p:spPr>
+          <a:xfrm>
+            <a:off x="2413000" y="1879600"/>
+            <a:ext cx="7366000" cy="2698750"/>
+          </a:xfrm>
+          <a:prstGeom prst="roundRect">
+            <a:avLst>
+              <a:gd name="adj" fmla="val 3727"/>
+            </a:avLst>
+          </a:prstGeom>
+          <a:ln w="9525">
+            <a:solidFill>
+              <a:srgbClr val="E1E0D9"/>
+            </a:solidFill>
+            <a:prstDash val="solid"/>
+          </a:ln>
+        </p:spPr>
+      </p:sp>
+      <p:sp>
+        <p:nvSpPr>
+          <p:cNvPr id="8" name="Text 4"/>
+          <p:cNvSpPr txBox="1"/>
+          <p:nvPr/>
+        </p:nvSpPr>
+        <p:spPr>
+          <a:xfrm>
+            <a:off x="812800" y="4749800"/>
+            <a:ext cx="3352800" cy="762000"/>
+          </a:xfrm>
+          <a:prstGeom prst="rect">
+            <a:avLst/>
+          </a:prstGeom>
+          <a:noFill/>
+          <a:ln/>
+        </p:spPr>
+        <p:txBody>
+          <a:bodyPr wrap="square" lIns="0" tIns="0" rIns="0" bIns="0" rtlCol="0" anchor="t"/>
+          <a:lstStyle/>
+          <a:p>
+            <a:pPr indent="0" marL="0">
+              <a:lnSpc>
+                <a:spcPct val="115000"/>
+              </a:lnSpc>
+              <a:buNone/>
+            </a:pPr>
+            <a:r>
+              <a:rPr lang="en-US" sz="1300" b="1" dirty="0">
+                <a:solidFill>
+                  <a:srgbClr val="14202E"/>
+                </a:solidFill>
+                <a:latin typeface="Calibri" pitchFamily="34" charset="0"/>
+                <a:ea typeface="Calibri" pitchFamily="34" charset="-122"/>
+                <a:cs typeface="Calibri" pitchFamily="34" charset="-120"/>
+              </a:rPr>
+              <a:t>Überanpassung: </a:t>
+            </a:r>
+            <a:pPr indent="0" marL="0">
+              <a:lnSpc>
+                <a:spcPct val="115000"/>
+              </a:lnSpc>
+              <a:buNone/>
+            </a:pPr>
+            <a:r>
+              <a:rPr lang="en-US" sz="1300" dirty="0">
+                <a:solidFill>
+                  <a:srgbClr val="44505E"/>
+                </a:solidFill>
+                <a:latin typeface="Calibri" pitchFamily="34" charset="0"/>
+                <a:ea typeface="Calibri" pitchFamily="34" charset="-122"/>
+                <a:cs typeface="Calibri" pitchFamily="34" charset="-120"/>
+              </a:rPr>
+              <a:t>Auf den ausgelassenen Punkten steigt der Fehler ab Ordnung 36 wieder, bis 13,99 %.</a:t>
+            </a:r>
+            <a:endParaRPr lang="en-US" sz="1300" dirty="0"/>
+          </a:p>
+        </p:txBody>
+      </p:sp>
+      <p:sp>
+        <p:nvSpPr>
+          <p:cNvPr id="9" name="Text 5"/>
+          <p:cNvSpPr txBox="1"/>
+          <p:nvPr/>
+        </p:nvSpPr>
+        <p:spPr>
+          <a:xfrm>
+            <a:off x="4419600" y="4749800"/>
+            <a:ext cx="3352800" cy="762000"/>
+          </a:xfrm>
+          <a:prstGeom prst="rect">
+            <a:avLst/>
+          </a:prstGeom>
+          <a:noFill/>
+          <a:ln/>
+        </p:spPr>
+        <p:txBody>
+          <a:bodyPr wrap="square" lIns="0" tIns="0" rIns="0" bIns="0" rtlCol="0" anchor="t"/>
+          <a:lstStyle/>
+          <a:p>
+            <a:pPr indent="0" marL="0">
+              <a:lnSpc>
+                <a:spcPct val="115000"/>
+              </a:lnSpc>
+              <a:buNone/>
+            </a:pPr>
+            <a:r>
+              <a:rPr lang="en-US" sz="1300" b="1" dirty="0">
+                <a:solidFill>
+                  <a:srgbClr val="14202E"/>
+                </a:solidFill>
+                <a:latin typeface="Calibri" pitchFamily="34" charset="0"/>
+                <a:ea typeface="Calibri" pitchFamily="34" charset="-122"/>
+                <a:cs typeface="Calibri" pitchFamily="34" charset="-120"/>
+              </a:rPr>
+              <a:t>Andere Zerlegung: </a:t>
+            </a:r>
+            <a:pPr indent="0" marL="0">
+              <a:lnSpc>
+                <a:spcPct val="115000"/>
+              </a:lnSpc>
+              <a:buNone/>
+            </a:pPr>
+            <a:r>
+              <a:rPr lang="en-US" sz="1300" dirty="0">
+                <a:solidFill>
+                  <a:srgbClr val="44505E"/>
+                </a:solidFill>
+                <a:latin typeface="Calibri" pitchFamily="34" charset="0"/>
+                <a:ea typeface="Calibri" pitchFamily="34" charset="-122"/>
+                <a:cs typeface="Calibri" pitchFamily="34" charset="-120"/>
+              </a:rPr>
+              <a:t>Die Mode bei 0,72 Hz wächst von 4,5 mHz (Ordnung 12) auf 21,3 mHz; die Autoren nennen 4 mHz.</a:t>
+            </a:r>
+            <a:endParaRPr lang="en-US" sz="1300" dirty="0"/>
+          </a:p>
+        </p:txBody>
+      </p:sp>
+      <p:sp>
+        <p:nvSpPr>
+          <p:cNvPr id="10" name="Text 6"/>
+          <p:cNvSpPr txBox="1"/>
+          <p:nvPr/>
+        </p:nvSpPr>
+        <p:spPr>
+          <a:xfrm>
+            <a:off x="8026400" y="4749800"/>
+            <a:ext cx="3352800" cy="762000"/>
+          </a:xfrm>
+          <a:prstGeom prst="rect">
+            <a:avLst/>
+          </a:prstGeom>
+          <a:noFill/>
+          <a:ln/>
+        </p:spPr>
+        <p:txBody>
+          <a:bodyPr wrap="square" lIns="0" tIns="0" rIns="0" bIns="0" rtlCol="0" anchor="t"/>
+          <a:lstStyle/>
+          <a:p>
+            <a:pPr indent="0" marL="0">
+              <a:lnSpc>
+                <a:spcPct val="115000"/>
+              </a:lnSpc>
+              <a:buNone/>
+            </a:pPr>
+            <a:r>
+              <a:rPr lang="en-US" sz="1300" b="1" dirty="0">
+                <a:solidFill>
+                  <a:srgbClr val="14202E"/>
+                </a:solidFill>
+                <a:latin typeface="Calibri" pitchFamily="34" charset="0"/>
+                <a:ea typeface="Calibri" pitchFamily="34" charset="-122"/>
+                <a:cs typeface="Calibri" pitchFamily="34" charset="-120"/>
+              </a:rPr>
+              <a:t>Unphysikalisch: </a:t>
+            </a:r>
+            <a:pPr indent="0" marL="0">
+              <a:lnSpc>
+                <a:spcPct val="115000"/>
+              </a:lnSpc>
+              <a:buNone/>
+            </a:pPr>
+            <a:r>
+              <a:rPr lang="en-US" sz="1300" dirty="0">
+                <a:solidFill>
+                  <a:srgbClr val="44505E"/>
+                </a:solidFill>
+                <a:latin typeface="Calibri" pitchFamily="34" charset="0"/>
+                <a:ea typeface="Calibri" pitchFamily="34" charset="-122"/>
+                <a:cs typeface="Calibri" pitchFamily="34" charset="-120"/>
+              </a:rPr>
+              <a:t>Bei Ordnung 36 wachsen 2 von 17 Schwingungen an (σ &gt; 0).</a:t>
+            </a:r>
+            <a:endParaRPr lang="en-US" sz="1300" dirty="0"/>
+          </a:p>
+        </p:txBody>
+      </p:sp>
+      <p:sp>
+        <p:nvSpPr>
+          <p:cNvPr id="11" name="Text 7"/>
+          <p:cNvSpPr txBox="1"/>
+          <p:nvPr/>
+        </p:nvSpPr>
+        <p:spPr>
+          <a:xfrm>
+            <a:off x="812800" y="5613400"/>
+            <a:ext cx="10566400" cy="292100"/>
+          </a:xfrm>
+          <a:prstGeom prst="rect">
+            <a:avLst/>
+          </a:prstGeom>
+          <a:noFill/>
+          <a:ln/>
+        </p:spPr>
+        <p:txBody>
+          <a:bodyPr wrap="square" lIns="0" tIns="0" rIns="0" bIns="0" rtlCol="0" anchor="t"/>
+          <a:lstStyle/>
+          <a:p>
+            <a:pPr indent="0" marL="0">
+              <a:lnSpc>
+                <a:spcPct val="115000"/>
+              </a:lnSpc>
+              <a:buNone/>
+            </a:pPr>
+            <a:r>
+              <a:rPr lang="en-US" sz="1500" b="1" dirty="0">
+                <a:solidFill>
+                  <a:srgbClr val="14202E"/>
+                </a:solidFill>
+                <a:latin typeface="Calibri" pitchFamily="34" charset="0"/>
+                <a:ea typeface="Calibri" pitchFamily="34" charset="-122"/>
+                <a:cs typeface="Calibri" pitchFamily="34" charset="-120"/>
+              </a:rPr>
+              <a:t>Die Ordnung so lange zu erhöhen, bis die 10-%-Regel besteht, würde die Schutzregel aushebeln.</a:t>
+            </a:r>
+            <a:endParaRPr lang="en-US" sz="1500" dirty="0"/>
+          </a:p>
+        </p:txBody>
+      </p:sp>
+      <p:sp>
+        <p:nvSpPr>
+          <p:cNvPr id="25" name="Slide Number Placeholder 0"/>
+          <p:cNvSpPr>
+            <a:spLocks noGrp="1"/>
+          </p:cNvSpPr>
+          <p:nvPr>
+            <p:ph type="sldNum" sz="quarter" idx="4294967295"/>
+          </p:nvPr>
+        </p:nvSpPr>
+        <p:spPr>
+          <a:xfrm>
+            <a:off x="10795000" y="6426200"/>
+            <a:ext cx="584200" cy="228600"/>
+          </a:xfrm>
+          <a:prstGeom prst="rect">
+            <a:avLst/>
+          </a:prstGeom>
+          <a:extLst>
+            <a:ext uri="{C572A759-6A51-4108-AA02-DFA0A04FC94B}">
+              <ma14:wrappingTextBoxFlag xmlns:ma14="http://schemas.microsoft.com/office/mac/drawingml/2011/main" val="0"/>
+            </a:ext>
+          </a:extLst>
+        </p:spPr>
+        <p:txBody>
+          <a:bodyPr/>
+          <a:lstStyle>
+            <a:lvl1pPr>
+              <a:defRPr sz="1200">
+                <a:solidFill>
+                  <a:srgbClr val="5F6873"/>
+                </a:solidFill>
+                <a:latin typeface="Consolas"/>
+                <a:ea typeface="Consolas"/>
+                <a:cs typeface="Consolas"/>
+              </a:defRPr>
+            </a:lvl1pPr>
+          </a:lstStyle>
+          <a:p>
+            <a:pPr algn="r"/>
+            <a:fld id="{F7021451-1387-4CA6-816F-3879F97B5CBC}" type="slidenum">
+              <a:rPr b="0" lang="en-US"/>
+              <a:t>16</a:t>
+            </a:fld>
+            <a:endParaRPr lang="en-US"/>
+          </a:p>
+        </p:txBody>
+      </p:sp>
+    </p:spTree>
+  </p:cSld>
+  <p:clrMapOvr>
+    <a:masterClrMapping/>
+  </p:clrMapOvr>
+</p:sld>
+</file>
+
+<file path=ppt/slides/slide17.xml><?xml version="1.0" encoding="utf-8"?>
+<p:sld xmlns:a="http://schemas.openxmlformats.org/drawingml/2006/main" xmlns:r="http://schemas.openxmlformats.org/officeDocument/2006/relationships" xmlns:p="http://schemas.openxmlformats.org/presentationml/2006/main">
+  <p:cSld name="Slide 17">
+    <p:spTree>
+      <p:nvGrpSpPr>
+        <p:cNvPr id="1" name=""/>
+        <p:cNvGrpSpPr/>
+        <p:nvPr/>
+      </p:nvGrpSpPr>
+      <p:grpSpPr>
+        <a:xfrm>
+          <a:off x="0" y="0"/>
+          <a:ext cx="0" cy="0"/>
+          <a:chOff x="0" y="0"/>
+          <a:chExt cx="0" cy="0"/>
+        </a:xfrm>
+      </p:grpSpPr>
+      <p:sp>
+        <p:nvSpPr>
+          <p:cNvPr id="2" name="Text 0"/>
+          <p:cNvSpPr txBox="1"/>
+          <p:nvPr/>
+        </p:nvSpPr>
+        <p:spPr>
+          <a:xfrm>
+            <a:off x="812800" y="812800"/>
+            <a:ext cx="10566400" cy="215900"/>
+          </a:xfrm>
+          <a:prstGeom prst="rect">
+            <a:avLst/>
+          </a:prstGeom>
+          <a:noFill/>
+          <a:ln/>
+        </p:spPr>
+        <p:txBody>
+          <a:bodyPr wrap="square" lIns="0" tIns="0" rIns="0" bIns="0" rtlCol="0" anchor="t"/>
+          <a:lstStyle/>
+          <a:p>
+            <a:pPr indent="0" marL="0">
+              <a:lnSpc>
+                <a:spcPct val="115000"/>
+              </a:lnSpc>
+              <a:buNone/>
+            </a:pPr>
+            <a:r>
+              <a:rPr lang="en-US" sz="1200" spc="100" kern="0" dirty="0">
+                <a:solidFill>
+                  <a:srgbClr val="1C5CAB"/>
+                </a:solidFill>
+                <a:latin typeface="Consolas" pitchFamily="34" charset="0"/>
+                <a:ea typeface="Consolas" pitchFamily="34" charset="-122"/>
+                <a:cs typeface="Consolas" pitchFamily="34" charset="-120"/>
+              </a:rPr>
+              <a:t>PRÜFSTUFE 4 · EIGENE MESSUNGEN P_POS</a:t>
+            </a:r>
+            <a:endParaRPr lang="en-US" sz="1200" dirty="0"/>
+          </a:p>
+        </p:txBody>
+      </p:sp>
+      <p:sp>
+        <p:nvSpPr>
+          <p:cNvPr id="3" name="Text 0"/>
+          <p:cNvSpPr/>
+          <p:nvPr>
+            <p:ph idx="100" type="title" hasCustomPrompt="1"/>
+          </p:nvPr>
+        </p:nvSpPr>
+        <p:spPr>
+          <a:xfrm>
+            <a:off x="812800" y="1104900"/>
+            <a:ext cx="10566400" cy="508000"/>
+          </a:xfrm>
+          <a:prstGeom prst="rect">
+            <a:avLst/>
+          </a:prstGeom>
+          <a:noFill/>
+          <a:ln/>
+        </p:spPr>
+        <p:txBody>
+          <a:bodyPr wrap="square" lIns="0" tIns="0" rIns="0" bIns="0" rtlCol="0" anchor="t"/>
+          <a:lstStyle/>
+          <a:p>
+            <a:pPr algn="l" indent="0" marL="0">
+              <a:buNone/>
+            </a:pPr>
+            <a:r>
+              <a:rPr lang="en-US" sz="3200" b="1" dirty="0">
+                <a:solidFill>
+                  <a:srgbClr val="14202E"/>
+                </a:solidFill>
+                <a:latin typeface="Calibri" pitchFamily="34" charset="0"/>
+                <a:ea typeface="Calibri" pitchFamily="34" charset="-122"/>
+                <a:cs typeface="Calibri" pitchFamily="34" charset="-120"/>
+              </a:rPr>
+              <a:t>Sprungantworten im Vergleich</a:t>
+            </a:r>
+            <a:endParaRPr lang="en-US" sz="3200" dirty="0"/>
+          </a:p>
+        </p:txBody>
+      </p:sp>
+      <p:sp>
+        <p:nvSpPr>
+          <p:cNvPr id="4" name="Text 2"/>
+          <p:cNvSpPr txBox="1"/>
+          <p:nvPr/>
+        </p:nvSpPr>
+        <p:spPr>
+          <a:xfrm>
+            <a:off x="812800" y="6426200"/>
+            <a:ext cx="9779000" cy="228600"/>
+          </a:xfrm>
+          <a:prstGeom prst="rect">
+            <a:avLst/>
+          </a:prstGeom>
+          <a:noFill/>
+          <a:ln/>
+        </p:spPr>
+        <p:txBody>
+          <a:bodyPr wrap="square" lIns="0" tIns="0" rIns="0" bIns="0" rtlCol="0" anchor="t"/>
+          <a:lstStyle/>
+          <a:p>
+            <a:pPr indent="0" marL="0">
+              <a:lnSpc>
+                <a:spcPct val="115000"/>
+              </a:lnSpc>
+              <a:buNone/>
+            </a:pPr>
+            <a:r>
+              <a:rPr lang="en-US" sz="1200" dirty="0">
+                <a:solidFill>
+                  <a:srgbClr val="5F6873"/>
+                </a:solidFill>
+                <a:latin typeface="Calibri" pitchFamily="34" charset="0"/>
+                <a:ea typeface="Calibri" pitchFamily="34" charset="-122"/>
+                <a:cs typeface="Calibri" pitchFamily="34" charset="-120"/>
+              </a:rPr>
+              <a:t>Auswertung: examples/presentation_demo.py · Zielband 2,2 Hz ± 20 % = 1,76 bis 2,64 Hz</a:t>
+            </a:r>
+            <a:endParaRPr lang="en-US" sz="1200" dirty="0"/>
+          </a:p>
+        </p:txBody>
+      </p:sp>
+      <p:graphicFrame>
+        <p:nvGraphicFramePr>
+          <p:cNvPr id="18" name="Table 0"/>
+          <p:cNvGraphicFramePr>
+            <a:graphicFrameLocks noGrp="1"/>
+          </p:cNvGraphicFramePr>
+          <p:nvPr>
+            <p:extLst>
+              <p:ext uri="{D42A27DB-BD31-4B8C-83A1-F6EECF244321}">
+                <p14:modId xmlns:p14="http://schemas.microsoft.com/office/powerpoint/2010/main" val="1579011935"/>
+              </p:ext>
+            </p:extLst>
+          </p:nvPr>
+        </p:nvGraphicFramePr>
+        <p:xfrm>
+          <a:off x="812800" y="1879600"/>
+          <a:ext cx="10566400" cy="914400"/>
+        </p:xfrm>
+        <a:graphic>
+          <a:graphicData uri="http://schemas.openxmlformats.org/drawingml/2006/table">
+            <a:tbl>
+              <a:tblPr/>
+              <a:tblGrid>
+                <a:gridCol w="4864100"/>
+                <a:gridCol w="2851150"/>
+                <a:gridCol w="2851150"/>
+              </a:tblGrid>
+              <a:tr h="0">
+                <a:tc>
+                  <a:txBody>
+                    <a:bodyPr/>
+                    <a:lstStyle/>
+                    <a:p>
+                      <a:pPr algn="l" indent="0" marL="0">
+                        <a:buNone/>
+                      </a:pPr>
+                      <a:r>
+                        <a:rPr lang="en-US" sz="1500" b="1" dirty="0">
+                          <a:solidFill>
+                            <a:srgbClr val="14202E"/>
+                          </a:solidFill>
+                          <a:latin typeface="Calibri" pitchFamily="34" charset="0"/>
+                          <a:ea typeface="Calibri" pitchFamily="34" charset="-122"/>
+                          <a:cs typeface="Calibri" pitchFamily="34" charset="-120"/>
+                        </a:rPr>
+                        <a:t>Ordnung 12, Abschnitt 1 bis 7 s</a:t>
+                      </a:r>
+                      <a:endParaRPr lang="en-US" sz="1500" dirty="0">
+                        <a:latin typeface="Calibri" charset="0"/>
+                        <a:ea typeface="Calibri" charset="0"/>
+                        <a:cs typeface="Calibri" charset="0"/>
+                      </a:endParaRPr>
+                    </a:p>
+                  </a:txBody>
+                  <a:tcPr marL="76200" marR="76200" marT="38100" marB="38100" anchor="ctr">
+                    <a:lnL w="9525" cap="flat" cmpd="sng" algn="ctr">
+                      <a:solidFill>
+                        <a:srgbClr val="D9D8D1"/>
+                      </a:solidFill>
+                      <a:prstDash val="solid"/>
+                      <a:round/>
+                      <a:headEnd type="none" w="med" len="med"/>
+                      <a:tailEnd type="none" w="med" len="med"/>
+                    </a:lnL>
+                    <a:lnR w="9525" cap="flat" cmpd="sng" algn="ctr">
+                      <a:solidFill>
+                        <a:srgbClr val="D9D8D1"/>
+                      </a:solidFill>
+                      <a:prstDash val="solid"/>
+                      <a:round/>
+                      <a:headEnd type="none" w="med" len="med"/>
+                      <a:tailEnd type="none" w="med" len="med"/>
+                    </a:lnR>
+                    <a:lnT w="9525" cap="flat" cmpd="sng" algn="ctr">
+                      <a:solidFill>
+                        <a:srgbClr val="D9D8D1"/>
+                      </a:solidFill>
+                      <a:prstDash val="solid"/>
+                      <a:round/>
+                      <a:headEnd type="none" w="med" len="med"/>
+                      <a:tailEnd type="none" w="med" len="med"/>
+                    </a:lnT>
+                    <a:lnB w="9525" cap="flat" cmpd="sng" algn="ctr">
+                      <a:solidFill>
+                        <a:srgbClr val="D9D8D1"/>
+                      </a:solidFill>
+                      <a:prstDash val="solid"/>
+                      <a:round/>
+                      <a:headEnd type="none" w="med" len="med"/>
+                      <a:tailEnd type="none" w="med" len="med"/>
+                    </a:lnB>
+                    <a:solidFill>
+                      <a:srgbClr val="E9E8E2"/>
+                    </a:solidFill>
+                  </a:tcPr>
+                </a:tc>
+                <a:tc>
+                  <a:txBody>
+                    <a:bodyPr/>
+                    <a:lstStyle/>
+                    <a:p>
+                      <a:pPr algn="r" indent="0" marL="0">
+                        <a:buNone/>
+                      </a:pPr>
+                      <a:r>
+                        <a:rPr lang="en-US" sz="1500" b="1" dirty="0">
+                          <a:solidFill>
+                            <a:srgbClr val="14202E"/>
+                          </a:solidFill>
+                          <a:latin typeface="Calibri" pitchFamily="34" charset="0"/>
+                          <a:ea typeface="Calibri" pitchFamily="34" charset="-122"/>
+                          <a:cs typeface="Calibri" pitchFamily="34" charset="-120"/>
+                        </a:rPr>
+                        <a:t>Positiver Sprung</a:t>
+                      </a:r>
+                      <a:endParaRPr lang="en-US" sz="1500" dirty="0">
+                        <a:latin typeface="Calibri" charset="0"/>
+                        <a:ea typeface="Calibri" charset="0"/>
+                        <a:cs typeface="Calibri" charset="0"/>
+                      </a:endParaRPr>
+                    </a:p>
+                  </a:txBody>
+                  <a:tcPr marL="76200" marR="76200" marT="38100" marB="38100" anchor="ctr">
+                    <a:lnL w="9525" cap="flat" cmpd="sng" algn="ctr">
+                      <a:solidFill>
+                        <a:srgbClr val="D9D8D1"/>
+                      </a:solidFill>
+                      <a:prstDash val="solid"/>
+                      <a:round/>
+                      <a:headEnd type="none" w="med" len="med"/>
+                      <a:tailEnd type="none" w="med" len="med"/>
+                    </a:lnL>
+                    <a:lnR w="9525" cap="flat" cmpd="sng" algn="ctr">
+                      <a:solidFill>
+                        <a:srgbClr val="D9D8D1"/>
+                      </a:solidFill>
+                      <a:prstDash val="solid"/>
+                      <a:round/>
+                      <a:headEnd type="none" w="med" len="med"/>
+                      <a:tailEnd type="none" w="med" len="med"/>
+                    </a:lnR>
+                    <a:lnT w="9525" cap="flat" cmpd="sng" algn="ctr">
+                      <a:solidFill>
+                        <a:srgbClr val="D9D8D1"/>
+                      </a:solidFill>
+                      <a:prstDash val="solid"/>
+                      <a:round/>
+                      <a:headEnd type="none" w="med" len="med"/>
+                      <a:tailEnd type="none" w="med" len="med"/>
+                    </a:lnT>
+                    <a:lnB w="9525" cap="flat" cmpd="sng" algn="ctr">
+                      <a:solidFill>
+                        <a:srgbClr val="D9D8D1"/>
+                      </a:solidFill>
+                      <a:prstDash val="solid"/>
+                      <a:round/>
+                      <a:headEnd type="none" w="med" len="med"/>
+                      <a:tailEnd type="none" w="med" len="med"/>
+                    </a:lnB>
+                    <a:solidFill>
+                      <a:srgbClr val="E9E8E2"/>
+                    </a:solidFill>
+                  </a:tcPr>
+                </a:tc>
+                <a:tc>
+                  <a:txBody>
+                    <a:bodyPr/>
+                    <a:lstStyle/>
+                    <a:p>
+                      <a:pPr algn="r" indent="0" marL="0">
+                        <a:buNone/>
+                      </a:pPr>
+                      <a:r>
+                        <a:rPr lang="en-US" sz="1500" b="1" dirty="0">
+                          <a:solidFill>
+                            <a:srgbClr val="14202E"/>
+                          </a:solidFill>
+                          <a:latin typeface="Calibri" pitchFamily="34" charset="0"/>
+                          <a:ea typeface="Calibri" pitchFamily="34" charset="-122"/>
+                          <a:cs typeface="Calibri" pitchFamily="34" charset="-120"/>
+                        </a:rPr>
+                        <a:t>Negativer Sprung</a:t>
+                      </a:r>
+                      <a:endParaRPr lang="en-US" sz="1500" dirty="0">
+                        <a:latin typeface="Calibri" charset="0"/>
+                        <a:ea typeface="Calibri" charset="0"/>
+                        <a:cs typeface="Calibri" charset="0"/>
+                      </a:endParaRPr>
+                    </a:p>
+                  </a:txBody>
+                  <a:tcPr marL="76200" marR="76200" marT="38100" marB="38100" anchor="ctr">
+                    <a:lnL w="9525" cap="flat" cmpd="sng" algn="ctr">
+                      <a:solidFill>
+                        <a:srgbClr val="D9D8D1"/>
+                      </a:solidFill>
+                      <a:prstDash val="solid"/>
+                      <a:round/>
+                      <a:headEnd type="none" w="med" len="med"/>
+                      <a:tailEnd type="none" w="med" len="med"/>
+                    </a:lnL>
+                    <a:lnR w="9525" cap="flat" cmpd="sng" algn="ctr">
+                      <a:solidFill>
+                        <a:srgbClr val="D9D8D1"/>
+                      </a:solidFill>
+                      <a:prstDash val="solid"/>
+                      <a:round/>
+                      <a:headEnd type="none" w="med" len="med"/>
+                      <a:tailEnd type="none" w="med" len="med"/>
+                    </a:lnR>
+                    <a:lnT w="9525" cap="flat" cmpd="sng" algn="ctr">
+                      <a:solidFill>
+                        <a:srgbClr val="D9D8D1"/>
+                      </a:solidFill>
+                      <a:prstDash val="solid"/>
+                      <a:round/>
+                      <a:headEnd type="none" w="med" len="med"/>
+                      <a:tailEnd type="none" w="med" len="med"/>
+                    </a:lnT>
+                    <a:lnB w="9525" cap="flat" cmpd="sng" algn="ctr">
+                      <a:solidFill>
+                        <a:srgbClr val="D9D8D1"/>
+                      </a:solidFill>
+                      <a:prstDash val="solid"/>
+                      <a:round/>
+                      <a:headEnd type="none" w="med" len="med"/>
+                      <a:tailEnd type="none" w="med" len="med"/>
+                    </a:lnB>
+                    <a:solidFill>
+                      <a:srgbClr val="E9E8E2"/>
+                    </a:solidFill>
+                  </a:tcPr>
+                </a:tc>
+              </a:tr>
+              <a:tr h="0">
+                <a:tc>
+                  <a:txBody>
+                    <a:bodyPr/>
+                    <a:lstStyle/>
+                    <a:p>
+                      <a:pPr algn="l" indent="0" marL="0">
+                        <a:buNone/>
+                      </a:pPr>
+                      <a:r>
+                        <a:rPr lang="en-US" sz="1500" dirty="0">
+                          <a:solidFill>
+                            <a:srgbClr val="14202E"/>
+                          </a:solidFill>
+                          <a:latin typeface="Calibri" pitchFamily="34" charset="0"/>
+                          <a:ea typeface="Calibri" pitchFamily="34" charset="-122"/>
+                          <a:cs typeface="Calibri" pitchFamily="34" charset="-120"/>
+                        </a:rPr>
+                        <a:t>Dominante Frequenz</a:t>
+                      </a:r>
+                      <a:endParaRPr lang="en-US" sz="1500" dirty="0">
+                        <a:latin typeface="Calibri" charset="0"/>
+                        <a:ea typeface="Calibri" charset="0"/>
+                        <a:cs typeface="Calibri" charset="0"/>
+                      </a:endParaRPr>
+                    </a:p>
+                  </a:txBody>
+                  <a:tcPr marL="76200" marR="76200" marT="38100" marB="38100" anchor="ctr">
+                    <a:lnL w="9525" cap="flat" cmpd="sng" algn="ctr">
+                      <a:solidFill>
+                        <a:srgbClr val="D9D8D1"/>
+                      </a:solidFill>
+                      <a:prstDash val="solid"/>
+                      <a:round/>
+                      <a:headEnd type="none" w="med" len="med"/>
+                      <a:tailEnd type="none" w="med" len="med"/>
+                    </a:lnL>
+                    <a:lnR w="9525" cap="flat" cmpd="sng" algn="ctr">
+                      <a:solidFill>
+                        <a:srgbClr val="D9D8D1"/>
+                      </a:solidFill>
+                      <a:prstDash val="solid"/>
+                      <a:round/>
+                      <a:headEnd type="none" w="med" len="med"/>
+                      <a:tailEnd type="none" w="med" len="med"/>
+                    </a:lnR>
+                    <a:lnT w="9525" cap="flat" cmpd="sng" algn="ctr">
+                      <a:solidFill>
+                        <a:srgbClr val="D9D8D1"/>
+                      </a:solidFill>
+                      <a:prstDash val="solid"/>
+                      <a:round/>
+                      <a:headEnd type="none" w="med" len="med"/>
+                      <a:tailEnd type="none" w="med" len="med"/>
+                    </a:lnT>
+                    <a:lnB w="9525" cap="flat" cmpd="sng" algn="ctr">
+                      <a:solidFill>
+                        <a:srgbClr val="D9D8D1"/>
+                      </a:solidFill>
+                      <a:prstDash val="solid"/>
+                      <a:round/>
+                      <a:headEnd type="none" w="med" len="med"/>
+                      <a:tailEnd type="none" w="med" len="med"/>
+                    </a:lnB>
+                    <a:solidFill>
+                      <a:srgbClr val="F4F3EF"/>
+                    </a:solidFill>
+                  </a:tcPr>
+                </a:tc>
+                <a:tc>
+                  <a:txBody>
+                    <a:bodyPr/>
+                    <a:lstStyle/>
+                    <a:p>
+                      <a:pPr algn="r" indent="0" marL="0">
+                        <a:buNone/>
+                      </a:pPr>
+                      <a:r>
+                        <a:rPr lang="en-US" sz="1500" dirty="0">
+                          <a:solidFill>
+                            <a:srgbClr val="14202E"/>
+                          </a:solidFill>
+                          <a:latin typeface="Calibri" pitchFamily="34" charset="0"/>
+                          <a:ea typeface="Calibri" pitchFamily="34" charset="-122"/>
+                          <a:cs typeface="Calibri" pitchFamily="34" charset="-120"/>
+                        </a:rPr>
+                        <a:t>2,268418 Hz</a:t>
+                      </a:r>
+                      <a:endParaRPr lang="en-US" sz="1500" dirty="0">
+                        <a:latin typeface="Calibri" charset="0"/>
+                        <a:ea typeface="Calibri" charset="0"/>
+                        <a:cs typeface="Calibri" charset="0"/>
+                      </a:endParaRPr>
+                    </a:p>
+                  </a:txBody>
+                  <a:tcPr marL="76200" marR="76200" marT="38100" marB="38100" anchor="ctr">
+                    <a:lnL w="9525" cap="flat" cmpd="sng" algn="ctr">
+                      <a:solidFill>
+                        <a:srgbClr val="D9D8D1"/>
+                      </a:solidFill>
+                      <a:prstDash val="solid"/>
+                      <a:round/>
+                      <a:headEnd type="none" w="med" len="med"/>
+                      <a:tailEnd type="none" w="med" len="med"/>
+                    </a:lnL>
+                    <a:lnR w="9525" cap="flat" cmpd="sng" algn="ctr">
+                      <a:solidFill>
+                        <a:srgbClr val="D9D8D1"/>
+                      </a:solidFill>
+                      <a:prstDash val="solid"/>
+                      <a:round/>
+                      <a:headEnd type="none" w="med" len="med"/>
+                      <a:tailEnd type="none" w="med" len="med"/>
+                    </a:lnR>
+                    <a:lnT w="9525" cap="flat" cmpd="sng" algn="ctr">
+                      <a:solidFill>
+                        <a:srgbClr val="D9D8D1"/>
+                      </a:solidFill>
+                      <a:prstDash val="solid"/>
+                      <a:round/>
+                      <a:headEnd type="none" w="med" len="med"/>
+                      <a:tailEnd type="none" w="med" len="med"/>
+                    </a:lnT>
+                    <a:lnB w="9525" cap="flat" cmpd="sng" algn="ctr">
+                      <a:solidFill>
+                        <a:srgbClr val="D9D8D1"/>
+                      </a:solidFill>
+                      <a:prstDash val="solid"/>
+                      <a:round/>
+                      <a:headEnd type="none" w="med" len="med"/>
+                      <a:tailEnd type="none" w="med" len="med"/>
+                    </a:lnB>
+                    <a:solidFill>
+                      <a:srgbClr val="F4F3EF"/>
+                    </a:solidFill>
+                  </a:tcPr>
+                </a:tc>
+                <a:tc>
+                  <a:txBody>
+                    <a:bodyPr/>
+                    <a:lstStyle/>
+                    <a:p>
+                      <a:pPr algn="r" indent="0" marL="0">
+                        <a:buNone/>
+                      </a:pPr>
+                      <a:r>
+                        <a:rPr lang="en-US" sz="1500" dirty="0">
+                          <a:solidFill>
+                            <a:srgbClr val="14202E"/>
+                          </a:solidFill>
+                          <a:latin typeface="Calibri" pitchFamily="34" charset="0"/>
+                          <a:ea typeface="Calibri" pitchFamily="34" charset="-122"/>
+                          <a:cs typeface="Calibri" pitchFamily="34" charset="-120"/>
+                        </a:rPr>
+                        <a:t>2,267978 Hz</a:t>
+                      </a:r>
+                      <a:endParaRPr lang="en-US" sz="1500" dirty="0">
+                        <a:latin typeface="Calibri" charset="0"/>
+                        <a:ea typeface="Calibri" charset="0"/>
+                        <a:cs typeface="Calibri" charset="0"/>
+                      </a:endParaRPr>
+                    </a:p>
+                  </a:txBody>
+                  <a:tcPr marL="76200" marR="76200" marT="38100" marB="38100" anchor="ctr">
+                    <a:lnL w="9525" cap="flat" cmpd="sng" algn="ctr">
+                      <a:solidFill>
+                        <a:srgbClr val="D9D8D1"/>
+                      </a:solidFill>
+                      <a:prstDash val="solid"/>
+                      <a:round/>
+                      <a:headEnd type="none" w="med" len="med"/>
+                      <a:tailEnd type="none" w="med" len="med"/>
+                    </a:lnL>
+                    <a:lnR w="9525" cap="flat" cmpd="sng" algn="ctr">
+                      <a:solidFill>
+                        <a:srgbClr val="D9D8D1"/>
+                      </a:solidFill>
+                      <a:prstDash val="solid"/>
+                      <a:round/>
+                      <a:headEnd type="none" w="med" len="med"/>
+                      <a:tailEnd type="none" w="med" len="med"/>
+                    </a:lnR>
+                    <a:lnT w="9525" cap="flat" cmpd="sng" algn="ctr">
+                      <a:solidFill>
+                        <a:srgbClr val="D9D8D1"/>
+                      </a:solidFill>
+                      <a:prstDash val="solid"/>
+                      <a:round/>
+                      <a:headEnd type="none" w="med" len="med"/>
+                      <a:tailEnd type="none" w="med" len="med"/>
+                    </a:lnT>
+                    <a:lnB w="9525" cap="flat" cmpd="sng" algn="ctr">
+                      <a:solidFill>
+                        <a:srgbClr val="D9D8D1"/>
+                      </a:solidFill>
+                      <a:prstDash val="solid"/>
+                      <a:round/>
+                      <a:headEnd type="none" w="med" len="med"/>
+                      <a:tailEnd type="none" w="med" len="med"/>
+                    </a:lnB>
+                    <a:solidFill>
+                      <a:srgbClr val="F4F3EF"/>
+                    </a:solidFill>
+                  </a:tcPr>
+                </a:tc>
+              </a:tr>
+              <a:tr h="0">
+                <a:tc>
+                  <a:txBody>
+                    <a:bodyPr/>
+                    <a:lstStyle/>
+                    <a:p>
+                      <a:pPr algn="l" indent="0" marL="0">
+                        <a:buNone/>
+                      </a:pPr>
+                      <a:r>
+                        <a:rPr lang="en-US" sz="1500" dirty="0">
+                          <a:solidFill>
+                            <a:srgbClr val="14202E"/>
+                          </a:solidFill>
+                          <a:latin typeface="Calibri" pitchFamily="34" charset="0"/>
+                          <a:ea typeface="Calibri" pitchFamily="34" charset="-122"/>
+                          <a:cs typeface="Calibri" pitchFamily="34" charset="-120"/>
+                        </a:rPr>
+                        <a:t>Abklingrate σ</a:t>
+                      </a:r>
+                      <a:endParaRPr lang="en-US" sz="1500" dirty="0">
+                        <a:latin typeface="Calibri" charset="0"/>
+                        <a:ea typeface="Calibri" charset="0"/>
+                        <a:cs typeface="Calibri" charset="0"/>
+                      </a:endParaRPr>
+                    </a:p>
+                  </a:txBody>
+                  <a:tcPr marL="76200" marR="76200" marT="38100" marB="38100" anchor="ctr">
+                    <a:lnL w="9525" cap="flat" cmpd="sng" algn="ctr">
+                      <a:solidFill>
+                        <a:srgbClr val="D9D8D1"/>
+                      </a:solidFill>
+                      <a:prstDash val="solid"/>
+                      <a:round/>
+                      <a:headEnd type="none" w="med" len="med"/>
+                      <a:tailEnd type="none" w="med" len="med"/>
+                    </a:lnL>
+                    <a:lnR w="9525" cap="flat" cmpd="sng" algn="ctr">
+                      <a:solidFill>
+                        <a:srgbClr val="D9D8D1"/>
+                      </a:solidFill>
+                      <a:prstDash val="solid"/>
+                      <a:round/>
+                      <a:headEnd type="none" w="med" len="med"/>
+                      <a:tailEnd type="none" w="med" len="med"/>
+                    </a:lnR>
+                    <a:lnT w="9525" cap="flat" cmpd="sng" algn="ctr">
+                      <a:solidFill>
+                        <a:srgbClr val="D9D8D1"/>
+                      </a:solidFill>
+                      <a:prstDash val="solid"/>
+                      <a:round/>
+                      <a:headEnd type="none" w="med" len="med"/>
+                      <a:tailEnd type="none" w="med" len="med"/>
+                    </a:lnT>
+                    <a:lnB w="9525" cap="flat" cmpd="sng" algn="ctr">
+                      <a:solidFill>
+                        <a:srgbClr val="D9D8D1"/>
+                      </a:solidFill>
+                      <a:prstDash val="solid"/>
+                      <a:round/>
+                      <a:headEnd type="none" w="med" len="med"/>
+                      <a:tailEnd type="none" w="med" len="med"/>
+                    </a:lnB>
+                    <a:solidFill>
+                      <a:srgbClr val="F4F3EF"/>
+                    </a:solidFill>
+                  </a:tcPr>
+                </a:tc>
+                <a:tc>
+                  <a:txBody>
+                    <a:bodyPr/>
+                    <a:lstStyle/>
+                    <a:p>
+                      <a:pPr algn="r" indent="0" marL="0">
+                        <a:buNone/>
+                      </a:pPr>
+                      <a:r>
+                        <a:rPr lang="en-US" sz="1500" dirty="0">
+                          <a:solidFill>
+                            <a:srgbClr val="14202E"/>
+                          </a:solidFill>
+                          <a:latin typeface="Calibri" pitchFamily="34" charset="0"/>
+                          <a:ea typeface="Calibri" pitchFamily="34" charset="-122"/>
+                          <a:cs typeface="Calibri" pitchFamily="34" charset="-120"/>
+                        </a:rPr>
+                        <a:t>−0,107 1/s</a:t>
+                      </a:r>
+                      <a:endParaRPr lang="en-US" sz="1500" dirty="0">
+                        <a:latin typeface="Calibri" charset="0"/>
+                        <a:ea typeface="Calibri" charset="0"/>
+                        <a:cs typeface="Calibri" charset="0"/>
+                      </a:endParaRPr>
+                    </a:p>
+                  </a:txBody>
+                  <a:tcPr marL="76200" marR="76200" marT="38100" marB="38100" anchor="ctr">
+                    <a:lnL w="9525" cap="flat" cmpd="sng" algn="ctr">
+                      <a:solidFill>
+                        <a:srgbClr val="D9D8D1"/>
+                      </a:solidFill>
+                      <a:prstDash val="solid"/>
+                      <a:round/>
+                      <a:headEnd type="none" w="med" len="med"/>
+                      <a:tailEnd type="none" w="med" len="med"/>
+                    </a:lnL>
+                    <a:lnR w="9525" cap="flat" cmpd="sng" algn="ctr">
+                      <a:solidFill>
+                        <a:srgbClr val="D9D8D1"/>
+                      </a:solidFill>
+                      <a:prstDash val="solid"/>
+                      <a:round/>
+                      <a:headEnd type="none" w="med" len="med"/>
+                      <a:tailEnd type="none" w="med" len="med"/>
+                    </a:lnR>
+                    <a:lnT w="9525" cap="flat" cmpd="sng" algn="ctr">
+                      <a:solidFill>
+                        <a:srgbClr val="D9D8D1"/>
+                      </a:solidFill>
+                      <a:prstDash val="solid"/>
+                      <a:round/>
+                      <a:headEnd type="none" w="med" len="med"/>
+                      <a:tailEnd type="none" w="med" len="med"/>
+                    </a:lnT>
+                    <a:lnB w="9525" cap="flat" cmpd="sng" algn="ctr">
+                      <a:solidFill>
+                        <a:srgbClr val="D9D8D1"/>
+                      </a:solidFill>
+                      <a:prstDash val="solid"/>
+                      <a:round/>
+                      <a:headEnd type="none" w="med" len="med"/>
+                      <a:tailEnd type="none" w="med" len="med"/>
+                    </a:lnB>
+                    <a:solidFill>
+                      <a:srgbClr val="F4F3EF"/>
+                    </a:solidFill>
+                  </a:tcPr>
+                </a:tc>
+                <a:tc>
+                  <a:txBody>
+                    <a:bodyPr/>
+                    <a:lstStyle/>
+                    <a:p>
+                      <a:pPr algn="r" indent="0" marL="0">
+                        <a:buNone/>
+                      </a:pPr>
+                      <a:r>
+                        <a:rPr lang="en-US" sz="1500" dirty="0">
+                          <a:solidFill>
+                            <a:srgbClr val="14202E"/>
+                          </a:solidFill>
+                          <a:latin typeface="Calibri" pitchFamily="34" charset="0"/>
+                          <a:ea typeface="Calibri" pitchFamily="34" charset="-122"/>
+                          <a:cs typeface="Calibri" pitchFamily="34" charset="-120"/>
+                        </a:rPr>
+                        <a:t>−0,192 1/s</a:t>
+                      </a:r>
+                      <a:endParaRPr lang="en-US" sz="1500" dirty="0">
+                        <a:latin typeface="Calibri" charset="0"/>
+                        <a:ea typeface="Calibri" charset="0"/>
+                        <a:cs typeface="Calibri" charset="0"/>
+                      </a:endParaRPr>
+                    </a:p>
+                  </a:txBody>
+                  <a:tcPr marL="76200" marR="76200" marT="38100" marB="38100" anchor="ctr">
+                    <a:lnL w="9525" cap="flat" cmpd="sng" algn="ctr">
+                      <a:solidFill>
+                        <a:srgbClr val="D9D8D1"/>
+                      </a:solidFill>
+                      <a:prstDash val="solid"/>
+                      <a:round/>
+                      <a:headEnd type="none" w="med" len="med"/>
+                      <a:tailEnd type="none" w="med" len="med"/>
+                    </a:lnL>
+                    <a:lnR w="9525" cap="flat" cmpd="sng" algn="ctr">
+                      <a:solidFill>
+                        <a:srgbClr val="D9D8D1"/>
+                      </a:solidFill>
+                      <a:prstDash val="solid"/>
+                      <a:round/>
+                      <a:headEnd type="none" w="med" len="med"/>
+                      <a:tailEnd type="none" w="med" len="med"/>
+                    </a:lnR>
+                    <a:lnT w="9525" cap="flat" cmpd="sng" algn="ctr">
+                      <a:solidFill>
+                        <a:srgbClr val="D9D8D1"/>
+                      </a:solidFill>
+                      <a:prstDash val="solid"/>
+                      <a:round/>
+                      <a:headEnd type="none" w="med" len="med"/>
+                      <a:tailEnd type="none" w="med" len="med"/>
+                    </a:lnT>
+                    <a:lnB w="9525" cap="flat" cmpd="sng" algn="ctr">
+                      <a:solidFill>
+                        <a:srgbClr val="D9D8D1"/>
+                      </a:solidFill>
+                      <a:prstDash val="solid"/>
+                      <a:round/>
+                      <a:headEnd type="none" w="med" len="med"/>
+                      <a:tailEnd type="none" w="med" len="med"/>
+                    </a:lnB>
+                    <a:solidFill>
+                      <a:srgbClr val="F4F3EF"/>
+                    </a:solidFill>
+                  </a:tcPr>
+                </a:tc>
+              </a:tr>
+              <a:tr h="0">
+                <a:tc>
+                  <a:txBody>
+                    <a:bodyPr/>
+                    <a:lstStyle/>
+                    <a:p>
+                      <a:pPr algn="l" indent="0" marL="0">
+                        <a:buNone/>
+                      </a:pPr>
+                      <a:r>
+                        <a:rPr lang="en-US" sz="1500" dirty="0">
+                          <a:solidFill>
+                            <a:srgbClr val="14202E"/>
+                          </a:solidFill>
+                          <a:latin typeface="Calibri" pitchFamily="34" charset="0"/>
+                          <a:ea typeface="Calibri" pitchFamily="34" charset="-122"/>
+                          <a:cs typeface="Calibri" pitchFamily="34" charset="-120"/>
+                        </a:rPr>
+                        <a:t>Anfangsamplitude bei 1 s (Dateieinheit)</a:t>
+                      </a:r>
+                      <a:endParaRPr lang="en-US" sz="1500" dirty="0">
+                        <a:latin typeface="Calibri" charset="0"/>
+                        <a:ea typeface="Calibri" charset="0"/>
+                        <a:cs typeface="Calibri" charset="0"/>
+                      </a:endParaRPr>
+                    </a:p>
+                  </a:txBody>
+                  <a:tcPr marL="76200" marR="76200" marT="38100" marB="38100" anchor="ctr">
+                    <a:lnL w="9525" cap="flat" cmpd="sng" algn="ctr">
+                      <a:solidFill>
+                        <a:srgbClr val="D9D8D1"/>
+                      </a:solidFill>
+                      <a:prstDash val="solid"/>
+                      <a:round/>
+                      <a:headEnd type="none" w="med" len="med"/>
+                      <a:tailEnd type="none" w="med" len="med"/>
+                    </a:lnL>
+                    <a:lnR w="9525" cap="flat" cmpd="sng" algn="ctr">
+                      <a:solidFill>
+                        <a:srgbClr val="D9D8D1"/>
+                      </a:solidFill>
+                      <a:prstDash val="solid"/>
+                      <a:round/>
+                      <a:headEnd type="none" w="med" len="med"/>
+                      <a:tailEnd type="none" w="med" len="med"/>
+                    </a:lnR>
+                    <a:lnT w="9525" cap="flat" cmpd="sng" algn="ctr">
+                      <a:solidFill>
+                        <a:srgbClr val="D9D8D1"/>
+                      </a:solidFill>
+                      <a:prstDash val="solid"/>
+                      <a:round/>
+                      <a:headEnd type="none" w="med" len="med"/>
+                      <a:tailEnd type="none" w="med" len="med"/>
+                    </a:lnT>
+                    <a:lnB w="9525" cap="flat" cmpd="sng" algn="ctr">
+                      <a:solidFill>
+                        <a:srgbClr val="D9D8D1"/>
+                      </a:solidFill>
+                      <a:prstDash val="solid"/>
+                      <a:round/>
+                      <a:headEnd type="none" w="med" len="med"/>
+                      <a:tailEnd type="none" w="med" len="med"/>
+                    </a:lnB>
+                    <a:solidFill>
+                      <a:srgbClr val="F4F3EF"/>
+                    </a:solidFill>
+                  </a:tcPr>
+                </a:tc>
+                <a:tc>
+                  <a:txBody>
+                    <a:bodyPr/>
+                    <a:lstStyle/>
+                    <a:p>
+                      <a:pPr algn="r" indent="0" marL="0">
+                        <a:buNone/>
+                      </a:pPr>
+                      <a:r>
+                        <a:rPr lang="en-US" sz="1500" dirty="0">
+                          <a:solidFill>
+                            <a:srgbClr val="14202E"/>
+                          </a:solidFill>
+                          <a:latin typeface="Calibri" pitchFamily="34" charset="0"/>
+                          <a:ea typeface="Calibri" pitchFamily="34" charset="-122"/>
+                          <a:cs typeface="Calibri" pitchFamily="34" charset="-120"/>
+                        </a:rPr>
+                        <a:t>22 319</a:t>
+                      </a:r>
+                      <a:endParaRPr lang="en-US" sz="1500" dirty="0">
+                        <a:latin typeface="Calibri" charset="0"/>
+                        <a:ea typeface="Calibri" charset="0"/>
+                        <a:cs typeface="Calibri" charset="0"/>
+                      </a:endParaRPr>
+                    </a:p>
+                  </a:txBody>
+                  <a:tcPr marL="76200" marR="76200" marT="38100" marB="38100" anchor="ctr">
+                    <a:lnL w="9525" cap="flat" cmpd="sng" algn="ctr">
+                      <a:solidFill>
+                        <a:srgbClr val="D9D8D1"/>
+                      </a:solidFill>
+                      <a:prstDash val="solid"/>
+                      <a:round/>
+                      <a:headEnd type="none" w="med" len="med"/>
+                      <a:tailEnd type="none" w="med" len="med"/>
+                    </a:lnL>
+                    <a:lnR w="9525" cap="flat" cmpd="sng" algn="ctr">
+                      <a:solidFill>
+                        <a:srgbClr val="D9D8D1"/>
+                      </a:solidFill>
+                      <a:prstDash val="solid"/>
+                      <a:round/>
+                      <a:headEnd type="none" w="med" len="med"/>
+                      <a:tailEnd type="none" w="med" len="med"/>
+                    </a:lnR>
+                    <a:lnT w="9525" cap="flat" cmpd="sng" algn="ctr">
+                      <a:solidFill>
+                        <a:srgbClr val="D9D8D1"/>
+                      </a:solidFill>
+                      <a:prstDash val="solid"/>
+                      <a:round/>
+                      <a:headEnd type="none" w="med" len="med"/>
+                      <a:tailEnd type="none" w="med" len="med"/>
+                    </a:lnT>
+                    <a:lnB w="9525" cap="flat" cmpd="sng" algn="ctr">
+                      <a:solidFill>
+                        <a:srgbClr val="D9D8D1"/>
+                      </a:solidFill>
+                      <a:prstDash val="solid"/>
+                      <a:round/>
+                      <a:headEnd type="none" w="med" len="med"/>
+                      <a:tailEnd type="none" w="med" len="med"/>
+                    </a:lnB>
+                    <a:solidFill>
+                      <a:srgbClr val="F4F3EF"/>
+                    </a:solidFill>
+                  </a:tcPr>
+                </a:tc>
+                <a:tc>
+                  <a:txBody>
+                    <a:bodyPr/>
+                    <a:lstStyle/>
+                    <a:p>
+                      <a:pPr algn="r" indent="0" marL="0">
+                        <a:buNone/>
+                      </a:pPr>
+                      <a:r>
+                        <a:rPr lang="en-US" sz="1500" dirty="0">
+                          <a:solidFill>
+                            <a:srgbClr val="14202E"/>
+                          </a:solidFill>
+                          <a:latin typeface="Calibri" pitchFamily="34" charset="0"/>
+                          <a:ea typeface="Calibri" pitchFamily="34" charset="-122"/>
+                          <a:cs typeface="Calibri" pitchFamily="34" charset="-120"/>
+                        </a:rPr>
+                        <a:t>59 143</a:t>
+                      </a:r>
+                      <a:endParaRPr lang="en-US" sz="1500" dirty="0">
+                        <a:latin typeface="Calibri" charset="0"/>
+                        <a:ea typeface="Calibri" charset="0"/>
+                        <a:cs typeface="Calibri" charset="0"/>
+                      </a:endParaRPr>
+                    </a:p>
+                  </a:txBody>
+                  <a:tcPr marL="76200" marR="76200" marT="38100" marB="38100" anchor="ctr">
+                    <a:lnL w="9525" cap="flat" cmpd="sng" algn="ctr">
+                      <a:solidFill>
+                        <a:srgbClr val="D9D8D1"/>
+                      </a:solidFill>
+                      <a:prstDash val="solid"/>
+                      <a:round/>
+                      <a:headEnd type="none" w="med" len="med"/>
+                      <a:tailEnd type="none" w="med" len="med"/>
+                    </a:lnL>
+                    <a:lnR w="9525" cap="flat" cmpd="sng" algn="ctr">
+                      <a:solidFill>
+                        <a:srgbClr val="D9D8D1"/>
+                      </a:solidFill>
+                      <a:prstDash val="solid"/>
+                      <a:round/>
+                      <a:headEnd type="none" w="med" len="med"/>
+                      <a:tailEnd type="none" w="med" len="med"/>
+                    </a:lnR>
+                    <a:lnT w="9525" cap="flat" cmpd="sng" algn="ctr">
+                      <a:solidFill>
+                        <a:srgbClr val="D9D8D1"/>
+                      </a:solidFill>
+                      <a:prstDash val="solid"/>
+                      <a:round/>
+                      <a:headEnd type="none" w="med" len="med"/>
+                      <a:tailEnd type="none" w="med" len="med"/>
+                    </a:lnT>
+                    <a:lnB w="9525" cap="flat" cmpd="sng" algn="ctr">
+                      <a:solidFill>
+                        <a:srgbClr val="D9D8D1"/>
+                      </a:solidFill>
+                      <a:prstDash val="solid"/>
+                      <a:round/>
+                      <a:headEnd type="none" w="med" len="med"/>
+                      <a:tailEnd type="none" w="med" len="med"/>
+                    </a:lnB>
+                    <a:solidFill>
+                      <a:srgbClr val="F4F3EF"/>
+                    </a:solidFill>
+                  </a:tcPr>
+                </a:tc>
+              </a:tr>
+              <a:tr h="0">
+                <a:tc>
+                  <a:txBody>
+                    <a:bodyPr/>
+                    <a:lstStyle/>
+                    <a:p>
+                      <a:pPr algn="l" indent="0" marL="0">
+                        <a:buNone/>
+                      </a:pPr>
+                      <a:r>
+                        <a:rPr lang="en-US" sz="1500" dirty="0">
+                          <a:solidFill>
+                            <a:srgbClr val="14202E"/>
+                          </a:solidFill>
+                          <a:latin typeface="Calibri" pitchFamily="34" charset="0"/>
+                          <a:ea typeface="Calibri" pitchFamily="34" charset="-122"/>
+                          <a:cs typeface="Calibri" pitchFamily="34" charset="-120"/>
+                        </a:rPr>
+                        <a:t>Relativer Modellfehler (100-Hz-Raster)</a:t>
+                      </a:r>
+                      <a:endParaRPr lang="en-US" sz="1500" dirty="0">
+                        <a:latin typeface="Calibri" charset="0"/>
+                        <a:ea typeface="Calibri" charset="0"/>
+                        <a:cs typeface="Calibri" charset="0"/>
+                      </a:endParaRPr>
+                    </a:p>
+                  </a:txBody>
+                  <a:tcPr marL="76200" marR="76200" marT="38100" marB="38100" anchor="ctr">
+                    <a:lnL w="9525" cap="flat" cmpd="sng" algn="ctr">
+                      <a:solidFill>
+                        <a:srgbClr val="D9D8D1"/>
+                      </a:solidFill>
+                      <a:prstDash val="solid"/>
+                      <a:round/>
+                      <a:headEnd type="none" w="med" len="med"/>
+                      <a:tailEnd type="none" w="med" len="med"/>
+                    </a:lnL>
+                    <a:lnR w="9525" cap="flat" cmpd="sng" algn="ctr">
+                      <a:solidFill>
+                        <a:srgbClr val="D9D8D1"/>
+                      </a:solidFill>
+                      <a:prstDash val="solid"/>
+                      <a:round/>
+                      <a:headEnd type="none" w="med" len="med"/>
+                      <a:tailEnd type="none" w="med" len="med"/>
+                    </a:lnR>
+                    <a:lnT w="9525" cap="flat" cmpd="sng" algn="ctr">
+                      <a:solidFill>
+                        <a:srgbClr val="D9D8D1"/>
+                      </a:solidFill>
+                      <a:prstDash val="solid"/>
+                      <a:round/>
+                      <a:headEnd type="none" w="med" len="med"/>
+                      <a:tailEnd type="none" w="med" len="med"/>
+                    </a:lnT>
+                    <a:lnB w="9525" cap="flat" cmpd="sng" algn="ctr">
+                      <a:solidFill>
+                        <a:srgbClr val="D9D8D1"/>
+                      </a:solidFill>
+                      <a:prstDash val="solid"/>
+                      <a:round/>
+                      <a:headEnd type="none" w="med" len="med"/>
+                      <a:tailEnd type="none" w="med" len="med"/>
+                    </a:lnB>
+                    <a:solidFill>
+                      <a:srgbClr val="F4F3EF"/>
+                    </a:solidFill>
+                  </a:tcPr>
+                </a:tc>
+                <a:tc>
+                  <a:txBody>
+                    <a:bodyPr/>
+                    <a:lstStyle/>
+                    <a:p>
+                      <a:pPr algn="r" indent="0" marL="0">
+                        <a:buNone/>
+                      </a:pPr>
+                      <a:r>
+                        <a:rPr lang="en-US" sz="1500" dirty="0">
+                          <a:solidFill>
+                            <a:srgbClr val="14202E"/>
+                          </a:solidFill>
+                          <a:latin typeface="Calibri" pitchFamily="34" charset="0"/>
+                          <a:ea typeface="Calibri" pitchFamily="34" charset="-122"/>
+                          <a:cs typeface="Calibri" pitchFamily="34" charset="-120"/>
+                        </a:rPr>
+                        <a:t>0,763 %</a:t>
+                      </a:r>
+                      <a:endParaRPr lang="en-US" sz="1500" dirty="0">
+                        <a:latin typeface="Calibri" charset="0"/>
+                        <a:ea typeface="Calibri" charset="0"/>
+                        <a:cs typeface="Calibri" charset="0"/>
+                      </a:endParaRPr>
+                    </a:p>
+                  </a:txBody>
+                  <a:tcPr marL="76200" marR="76200" marT="38100" marB="38100" anchor="ctr">
+                    <a:lnL w="9525" cap="flat" cmpd="sng" algn="ctr">
+                      <a:solidFill>
+                        <a:srgbClr val="D9D8D1"/>
+                      </a:solidFill>
+                      <a:prstDash val="solid"/>
+                      <a:round/>
+                      <a:headEnd type="none" w="med" len="med"/>
+                      <a:tailEnd type="none" w="med" len="med"/>
+                    </a:lnL>
+                    <a:lnR w="9525" cap="flat" cmpd="sng" algn="ctr">
+                      <a:solidFill>
+                        <a:srgbClr val="D9D8D1"/>
+                      </a:solidFill>
+                      <a:prstDash val="solid"/>
+                      <a:round/>
+                      <a:headEnd type="none" w="med" len="med"/>
+                      <a:tailEnd type="none" w="med" len="med"/>
+                    </a:lnR>
+                    <a:lnT w="9525" cap="flat" cmpd="sng" algn="ctr">
+                      <a:solidFill>
+                        <a:srgbClr val="D9D8D1"/>
+                      </a:solidFill>
+                      <a:prstDash val="solid"/>
+                      <a:round/>
+                      <a:headEnd type="none" w="med" len="med"/>
+                      <a:tailEnd type="none" w="med" len="med"/>
+                    </a:lnT>
+                    <a:lnB w="9525" cap="flat" cmpd="sng" algn="ctr">
+                      <a:solidFill>
+                        <a:srgbClr val="D9D8D1"/>
+                      </a:solidFill>
+                      <a:prstDash val="solid"/>
+                      <a:round/>
+                      <a:headEnd type="none" w="med" len="med"/>
+                      <a:tailEnd type="none" w="med" len="med"/>
+                    </a:lnB>
+                    <a:solidFill>
+                      <a:srgbClr val="F4F3EF"/>
+                    </a:solidFill>
+                  </a:tcPr>
+                </a:tc>
+                <a:tc>
+                  <a:txBody>
+                    <a:bodyPr/>
+                    <a:lstStyle/>
+                    <a:p>
+                      <a:pPr algn="r" indent="0" marL="0">
+                        <a:buNone/>
+                      </a:pPr>
+                      <a:r>
+                        <a:rPr lang="en-US" sz="1500" dirty="0">
+                          <a:solidFill>
+                            <a:srgbClr val="14202E"/>
+                          </a:solidFill>
+                          <a:latin typeface="Calibri" pitchFamily="34" charset="0"/>
+                          <a:ea typeface="Calibri" pitchFamily="34" charset="-122"/>
+                          <a:cs typeface="Calibri" pitchFamily="34" charset="-120"/>
+                        </a:rPr>
+                        <a:t>0,594 %</a:t>
+                      </a:r>
+                      <a:endParaRPr lang="en-US" sz="1500" dirty="0">
+                        <a:latin typeface="Calibri" charset="0"/>
+                        <a:ea typeface="Calibri" charset="0"/>
+                        <a:cs typeface="Calibri" charset="0"/>
+                      </a:endParaRPr>
+                    </a:p>
+                  </a:txBody>
+                  <a:tcPr marL="76200" marR="76200" marT="38100" marB="38100" anchor="ctr">
+                    <a:lnL w="9525" cap="flat" cmpd="sng" algn="ctr">
+                      <a:solidFill>
+                        <a:srgbClr val="D9D8D1"/>
+                      </a:solidFill>
+                      <a:prstDash val="solid"/>
+                      <a:round/>
+                      <a:headEnd type="none" w="med" len="med"/>
+                      <a:tailEnd type="none" w="med" len="med"/>
+                    </a:lnL>
+                    <a:lnR w="9525" cap="flat" cmpd="sng" algn="ctr">
+                      <a:solidFill>
+                        <a:srgbClr val="D9D8D1"/>
+                      </a:solidFill>
+                      <a:prstDash val="solid"/>
+                      <a:round/>
+                      <a:headEnd type="none" w="med" len="med"/>
+                      <a:tailEnd type="none" w="med" len="med"/>
+                    </a:lnR>
+                    <a:lnT w="9525" cap="flat" cmpd="sng" algn="ctr">
+                      <a:solidFill>
+                        <a:srgbClr val="D9D8D1"/>
+                      </a:solidFill>
+                      <a:prstDash val="solid"/>
+                      <a:round/>
+                      <a:headEnd type="none" w="med" len="med"/>
+                      <a:tailEnd type="none" w="med" len="med"/>
+                    </a:lnT>
+                    <a:lnB w="9525" cap="flat" cmpd="sng" algn="ctr">
+                      <a:solidFill>
+                        <a:srgbClr val="D9D8D1"/>
+                      </a:solidFill>
+                      <a:prstDash val="solid"/>
+                      <a:round/>
+                      <a:headEnd type="none" w="med" len="med"/>
+                      <a:tailEnd type="none" w="med" len="med"/>
+                    </a:lnB>
+                    <a:solidFill>
+                      <a:srgbClr val="F4F3EF"/>
+                    </a:solidFill>
+                  </a:tcPr>
+                </a:tc>
+              </a:tr>
+              <a:tr h="0">
+                <a:tc>
+                  <a:txBody>
+                    <a:bodyPr/>
+                    <a:lstStyle/>
+                    <a:p>
+                      <a:pPr algn="l" indent="0" marL="0">
+                        <a:buNone/>
+                      </a:pPr>
+                      <a:r>
+                        <a:rPr lang="en-US" sz="1500" dirty="0">
+                          <a:solidFill>
+                            <a:srgbClr val="14202E"/>
+                          </a:solidFill>
+                          <a:latin typeface="Calibri" pitchFamily="34" charset="0"/>
+                          <a:ea typeface="Calibri" pitchFamily="34" charset="-122"/>
+                          <a:cs typeface="Calibri" pitchFamily="34" charset="-120"/>
+                        </a:rPr>
+                        <a:t>Abgezogene Polpaare</a:t>
+                      </a:r>
+                      <a:endParaRPr lang="en-US" sz="1500" dirty="0">
+                        <a:latin typeface="Calibri" charset="0"/>
+                        <a:ea typeface="Calibri" charset="0"/>
+                        <a:cs typeface="Calibri" charset="0"/>
+                      </a:endParaRPr>
+                    </a:p>
+                  </a:txBody>
+                  <a:tcPr marL="76200" marR="76200" marT="38100" marB="38100" anchor="ctr">
+                    <a:lnL w="9525" cap="flat" cmpd="sng" algn="ctr">
+                      <a:solidFill>
+                        <a:srgbClr val="D9D8D1"/>
+                      </a:solidFill>
+                      <a:prstDash val="solid"/>
+                      <a:round/>
+                      <a:headEnd type="none" w="med" len="med"/>
+                      <a:tailEnd type="none" w="med" len="med"/>
+                    </a:lnL>
+                    <a:lnR w="9525" cap="flat" cmpd="sng" algn="ctr">
+                      <a:solidFill>
+                        <a:srgbClr val="D9D8D1"/>
+                      </a:solidFill>
+                      <a:prstDash val="solid"/>
+                      <a:round/>
+                      <a:headEnd type="none" w="med" len="med"/>
+                      <a:tailEnd type="none" w="med" len="med"/>
+                    </a:lnR>
+                    <a:lnT w="9525" cap="flat" cmpd="sng" algn="ctr">
+                      <a:solidFill>
+                        <a:srgbClr val="D9D8D1"/>
+                      </a:solidFill>
+                      <a:prstDash val="solid"/>
+                      <a:round/>
+                      <a:headEnd type="none" w="med" len="med"/>
+                      <a:tailEnd type="none" w="med" len="med"/>
+                    </a:lnT>
+                    <a:lnB w="9525" cap="flat" cmpd="sng" algn="ctr">
+                      <a:solidFill>
+                        <a:srgbClr val="D9D8D1"/>
+                      </a:solidFill>
+                      <a:prstDash val="solid"/>
+                      <a:round/>
+                      <a:headEnd type="none" w="med" len="med"/>
+                      <a:tailEnd type="none" w="med" len="med"/>
+                    </a:lnB>
+                    <a:solidFill>
+                      <a:srgbClr val="F4F3EF"/>
+                    </a:solidFill>
+                  </a:tcPr>
+                </a:tc>
+                <a:tc>
+                  <a:txBody>
+                    <a:bodyPr/>
+                    <a:lstStyle/>
+                    <a:p>
+                      <a:pPr algn="r" indent="0" marL="0">
+                        <a:buNone/>
+                      </a:pPr>
+                      <a:r>
+                        <a:rPr lang="en-US" sz="1500" dirty="0">
+                          <a:solidFill>
+                            <a:srgbClr val="14202E"/>
+                          </a:solidFill>
+                          <a:latin typeface="Calibri" pitchFamily="34" charset="0"/>
+                          <a:ea typeface="Calibri" pitchFamily="34" charset="-122"/>
+                          <a:cs typeface="Calibri" pitchFamily="34" charset="-120"/>
+                        </a:rPr>
+                        <a:t>2: 2,268 + 2,480 Hz</a:t>
+                      </a:r>
+                      <a:endParaRPr lang="en-US" sz="1500" dirty="0">
+                        <a:latin typeface="Calibri" charset="0"/>
+                        <a:ea typeface="Calibri" charset="0"/>
+                        <a:cs typeface="Calibri" charset="0"/>
+                      </a:endParaRPr>
+                    </a:p>
+                  </a:txBody>
+                  <a:tcPr marL="76200" marR="76200" marT="38100" marB="38100" anchor="ctr">
+                    <a:lnL w="9525" cap="flat" cmpd="sng" algn="ctr">
+                      <a:solidFill>
+                        <a:srgbClr val="D9D8D1"/>
+                      </a:solidFill>
+                      <a:prstDash val="solid"/>
+                      <a:round/>
+                      <a:headEnd type="none" w="med" len="med"/>
+                      <a:tailEnd type="none" w="med" len="med"/>
+                    </a:lnL>
+                    <a:lnR w="9525" cap="flat" cmpd="sng" algn="ctr">
+                      <a:solidFill>
+                        <a:srgbClr val="D9D8D1"/>
+                      </a:solidFill>
+                      <a:prstDash val="solid"/>
+                      <a:round/>
+                      <a:headEnd type="none" w="med" len="med"/>
+                      <a:tailEnd type="none" w="med" len="med"/>
+                    </a:lnR>
+                    <a:lnT w="9525" cap="flat" cmpd="sng" algn="ctr">
+                      <a:solidFill>
+                        <a:srgbClr val="D9D8D1"/>
+                      </a:solidFill>
+                      <a:prstDash val="solid"/>
+                      <a:round/>
+                      <a:headEnd type="none" w="med" len="med"/>
+                      <a:tailEnd type="none" w="med" len="med"/>
+                    </a:lnT>
+                    <a:lnB w="9525" cap="flat" cmpd="sng" algn="ctr">
+                      <a:solidFill>
+                        <a:srgbClr val="D9D8D1"/>
+                      </a:solidFill>
+                      <a:prstDash val="solid"/>
+                      <a:round/>
+                      <a:headEnd type="none" w="med" len="med"/>
+                      <a:tailEnd type="none" w="med" len="med"/>
+                    </a:lnB>
+                    <a:solidFill>
+                      <a:srgbClr val="F4F3EF"/>
+                    </a:solidFill>
+                  </a:tcPr>
+                </a:tc>
+                <a:tc>
+                  <a:txBody>
+                    <a:bodyPr/>
+                    <a:lstStyle/>
+                    <a:p>
+                      <a:pPr algn="r" indent="0" marL="0">
+                        <a:buNone/>
+                      </a:pPr>
+                      <a:r>
+                        <a:rPr lang="en-US" sz="1500" dirty="0">
+                          <a:solidFill>
+                            <a:srgbClr val="14202E"/>
+                          </a:solidFill>
+                          <a:latin typeface="Calibri" pitchFamily="34" charset="0"/>
+                          <a:ea typeface="Calibri" pitchFamily="34" charset="-122"/>
+                          <a:cs typeface="Calibri" pitchFamily="34" charset="-120"/>
+                        </a:rPr>
+                        <a:t>1: 2,268 Hz</a:t>
+                      </a:r>
+                      <a:endParaRPr lang="en-US" sz="1500" dirty="0">
+                        <a:latin typeface="Calibri" charset="0"/>
+                        <a:ea typeface="Calibri" charset="0"/>
+                        <a:cs typeface="Calibri" charset="0"/>
+                      </a:endParaRPr>
+                    </a:p>
+                  </a:txBody>
+                  <a:tcPr marL="76200" marR="76200" marT="38100" marB="38100" anchor="ctr">
+                    <a:lnL w="9525" cap="flat" cmpd="sng" algn="ctr">
+                      <a:solidFill>
+                        <a:srgbClr val="D9D8D1"/>
+                      </a:solidFill>
+                      <a:prstDash val="solid"/>
+                      <a:round/>
+                      <a:headEnd type="none" w="med" len="med"/>
+                      <a:tailEnd type="none" w="med" len="med"/>
+                    </a:lnL>
+                    <a:lnR w="9525" cap="flat" cmpd="sng" algn="ctr">
+                      <a:solidFill>
+                        <a:srgbClr val="D9D8D1"/>
+                      </a:solidFill>
+                      <a:prstDash val="solid"/>
+                      <a:round/>
+                      <a:headEnd type="none" w="med" len="med"/>
+                      <a:tailEnd type="none" w="med" len="med"/>
+                    </a:lnR>
+                    <a:lnT w="9525" cap="flat" cmpd="sng" algn="ctr">
+                      <a:solidFill>
+                        <a:srgbClr val="D9D8D1"/>
+                      </a:solidFill>
+                      <a:prstDash val="solid"/>
+                      <a:round/>
+                      <a:headEnd type="none" w="med" len="med"/>
+                      <a:tailEnd type="none" w="med" len="med"/>
+                    </a:lnT>
+                    <a:lnB w="9525" cap="flat" cmpd="sng" algn="ctr">
+                      <a:solidFill>
+                        <a:srgbClr val="D9D8D1"/>
+                      </a:solidFill>
+                      <a:prstDash val="solid"/>
+                      <a:round/>
+                      <a:headEnd type="none" w="med" len="med"/>
+                      <a:tailEnd type="none" w="med" len="med"/>
+                    </a:lnB>
+                    <a:solidFill>
+                      <a:srgbClr val="F4F3EF"/>
+                    </a:solidFill>
+                  </a:tcPr>
+                </a:tc>
+              </a:tr>
+              <a:tr h="0">
+                <a:tc>
+                  <a:txBody>
+                    <a:bodyPr/>
+                    <a:lstStyle/>
+                    <a:p>
+                      <a:pPr algn="l" indent="0" marL="0">
+                        <a:buNone/>
+                      </a:pPr>
+                      <a:r>
+                        <a:rPr lang="en-US" sz="1500" dirty="0">
+                          <a:solidFill>
+                            <a:srgbClr val="14202E"/>
+                          </a:solidFill>
+                          <a:latin typeface="Calibri" pitchFamily="34" charset="0"/>
+                          <a:ea typeface="Calibri" pitchFamily="34" charset="-122"/>
+                          <a:cs typeface="Calibri" pitchFamily="34" charset="-120"/>
+                        </a:rPr>
+                        <a:t>Rückgang Bandenergie 4 bis 7 s</a:t>
+                      </a:r>
+                      <a:endParaRPr lang="en-US" sz="1500" dirty="0">
+                        <a:latin typeface="Calibri" charset="0"/>
+                        <a:ea typeface="Calibri" charset="0"/>
+                        <a:cs typeface="Calibri" charset="0"/>
+                      </a:endParaRPr>
+                    </a:p>
+                  </a:txBody>
+                  <a:tcPr marL="76200" marR="76200" marT="38100" marB="38100" anchor="ctr">
+                    <a:lnL w="9525" cap="flat" cmpd="sng" algn="ctr">
+                      <a:solidFill>
+                        <a:srgbClr val="D9D8D1"/>
+                      </a:solidFill>
+                      <a:prstDash val="solid"/>
+                      <a:round/>
+                      <a:headEnd type="none" w="med" len="med"/>
+                      <a:tailEnd type="none" w="med" len="med"/>
+                    </a:lnL>
+                    <a:lnR w="9525" cap="flat" cmpd="sng" algn="ctr">
+                      <a:solidFill>
+                        <a:srgbClr val="D9D8D1"/>
+                      </a:solidFill>
+                      <a:prstDash val="solid"/>
+                      <a:round/>
+                      <a:headEnd type="none" w="med" len="med"/>
+                      <a:tailEnd type="none" w="med" len="med"/>
+                    </a:lnR>
+                    <a:lnT w="9525" cap="flat" cmpd="sng" algn="ctr">
+                      <a:solidFill>
+                        <a:srgbClr val="D9D8D1"/>
+                      </a:solidFill>
+                      <a:prstDash val="solid"/>
+                      <a:round/>
+                      <a:headEnd type="none" w="med" len="med"/>
+                      <a:tailEnd type="none" w="med" len="med"/>
+                    </a:lnT>
+                    <a:lnB w="9525" cap="flat" cmpd="sng" algn="ctr">
+                      <a:solidFill>
+                        <a:srgbClr val="D9D8D1"/>
+                      </a:solidFill>
+                      <a:prstDash val="solid"/>
+                      <a:round/>
+                      <a:headEnd type="none" w="med" len="med"/>
+                      <a:tailEnd type="none" w="med" len="med"/>
+                    </a:lnB>
+                    <a:solidFill>
+                      <a:srgbClr val="F4F3EF"/>
+                    </a:solidFill>
+                  </a:tcPr>
+                </a:tc>
+                <a:tc>
+                  <a:txBody>
+                    <a:bodyPr/>
+                    <a:lstStyle/>
+                    <a:p>
+                      <a:pPr algn="r" indent="0" marL="0">
+                        <a:buNone/>
+                      </a:pPr>
+                      <a:r>
+                        <a:rPr lang="en-US" sz="1500" dirty="0">
+                          <a:solidFill>
+                            <a:srgbClr val="14202E"/>
+                          </a:solidFill>
+                          <a:latin typeface="Calibri" pitchFamily="34" charset="0"/>
+                          <a:ea typeface="Calibri" pitchFamily="34" charset="-122"/>
+                          <a:cs typeface="Calibri" pitchFamily="34" charset="-120"/>
+                        </a:rPr>
+                        <a:t>99,87 %</a:t>
+                      </a:r>
+                      <a:endParaRPr lang="en-US" sz="1500" dirty="0">
+                        <a:latin typeface="Calibri" charset="0"/>
+                        <a:ea typeface="Calibri" charset="0"/>
+                        <a:cs typeface="Calibri" charset="0"/>
+                      </a:endParaRPr>
+                    </a:p>
+                  </a:txBody>
+                  <a:tcPr marL="76200" marR="76200" marT="38100" marB="38100" anchor="ctr">
+                    <a:lnL w="9525" cap="flat" cmpd="sng" algn="ctr">
+                      <a:solidFill>
+                        <a:srgbClr val="D9D8D1"/>
+                      </a:solidFill>
+                      <a:prstDash val="solid"/>
+                      <a:round/>
+                      <a:headEnd type="none" w="med" len="med"/>
+                      <a:tailEnd type="none" w="med" len="med"/>
+                    </a:lnL>
+                    <a:lnR w="9525" cap="flat" cmpd="sng" algn="ctr">
+                      <a:solidFill>
+                        <a:srgbClr val="D9D8D1"/>
+                      </a:solidFill>
+                      <a:prstDash val="solid"/>
+                      <a:round/>
+                      <a:headEnd type="none" w="med" len="med"/>
+                      <a:tailEnd type="none" w="med" len="med"/>
+                    </a:lnR>
+                    <a:lnT w="9525" cap="flat" cmpd="sng" algn="ctr">
+                      <a:solidFill>
+                        <a:srgbClr val="D9D8D1"/>
+                      </a:solidFill>
+                      <a:prstDash val="solid"/>
+                      <a:round/>
+                      <a:headEnd type="none" w="med" len="med"/>
+                      <a:tailEnd type="none" w="med" len="med"/>
+                    </a:lnT>
+                    <a:lnB w="9525" cap="flat" cmpd="sng" algn="ctr">
+                      <a:solidFill>
+                        <a:srgbClr val="D9D8D1"/>
+                      </a:solidFill>
+                      <a:prstDash val="solid"/>
+                      <a:round/>
+                      <a:headEnd type="none" w="med" len="med"/>
+                      <a:tailEnd type="none" w="med" len="med"/>
+                    </a:lnB>
+                    <a:solidFill>
+                      <a:srgbClr val="F4F3EF"/>
+                    </a:solidFill>
+                  </a:tcPr>
+                </a:tc>
+                <a:tc>
+                  <a:txBody>
+                    <a:bodyPr/>
+                    <a:lstStyle/>
+                    <a:p>
+                      <a:pPr algn="r" indent="0" marL="0">
+                        <a:buNone/>
+                      </a:pPr>
+                      <a:r>
+                        <a:rPr lang="en-US" sz="1500" dirty="0">
+                          <a:solidFill>
+                            <a:srgbClr val="14202E"/>
+                          </a:solidFill>
+                          <a:latin typeface="Calibri" pitchFamily="34" charset="0"/>
+                          <a:ea typeface="Calibri" pitchFamily="34" charset="-122"/>
+                          <a:cs typeface="Calibri" pitchFamily="34" charset="-120"/>
+                        </a:rPr>
+                        <a:t>99,999 %</a:t>
+                      </a:r>
+                      <a:endParaRPr lang="en-US" sz="1500" dirty="0">
+                        <a:latin typeface="Calibri" charset="0"/>
+                        <a:ea typeface="Calibri" charset="0"/>
+                        <a:cs typeface="Calibri" charset="0"/>
+                      </a:endParaRPr>
+                    </a:p>
+                  </a:txBody>
+                  <a:tcPr marL="76200" marR="76200" marT="38100" marB="38100" anchor="ctr">
+                    <a:lnL w="9525" cap="flat" cmpd="sng" algn="ctr">
+                      <a:solidFill>
+                        <a:srgbClr val="D9D8D1"/>
+                      </a:solidFill>
+                      <a:prstDash val="solid"/>
+                      <a:round/>
+                      <a:headEnd type="none" w="med" len="med"/>
+                      <a:tailEnd type="none" w="med" len="med"/>
+                    </a:lnL>
+                    <a:lnR w="9525" cap="flat" cmpd="sng" algn="ctr">
+                      <a:solidFill>
+                        <a:srgbClr val="D9D8D1"/>
+                      </a:solidFill>
+                      <a:prstDash val="solid"/>
+                      <a:round/>
+                      <a:headEnd type="none" w="med" len="med"/>
+                      <a:tailEnd type="none" w="med" len="med"/>
+                    </a:lnR>
+                    <a:lnT w="9525" cap="flat" cmpd="sng" algn="ctr">
+                      <a:solidFill>
+                        <a:srgbClr val="D9D8D1"/>
+                      </a:solidFill>
+                      <a:prstDash val="solid"/>
+                      <a:round/>
+                      <a:headEnd type="none" w="med" len="med"/>
+                      <a:tailEnd type="none" w="med" len="med"/>
+                    </a:lnT>
+                    <a:lnB w="9525" cap="flat" cmpd="sng" algn="ctr">
+                      <a:solidFill>
+                        <a:srgbClr val="D9D8D1"/>
+                      </a:solidFill>
+                      <a:prstDash val="solid"/>
+                      <a:round/>
+                      <a:headEnd type="none" w="med" len="med"/>
+                      <a:tailEnd type="none" w="med" len="med"/>
+                    </a:lnB>
+                    <a:solidFill>
+                      <a:srgbClr val="F4F3EF"/>
+                    </a:solidFill>
+                  </a:tcPr>
+                </a:tc>
+              </a:tr>
+            </a:tbl>
+          </a:graphicData>
+        </a:graphic>
+      </p:graphicFrame>
+      <p:sp>
+        <p:nvSpPr>
+          <p:cNvPr id="7" name="Text 3"/>
+          <p:cNvSpPr txBox="1"/>
+          <p:nvPr/>
+        </p:nvSpPr>
+        <p:spPr>
+          <a:xfrm>
+            <a:off x="812800" y="4381500"/>
+            <a:ext cx="10566400" cy="571500"/>
+          </a:xfrm>
+          <a:prstGeom prst="rect">
+            <a:avLst/>
+          </a:prstGeom>
+          <a:noFill/>
+          <a:ln/>
+        </p:spPr>
+        <p:txBody>
+          <a:bodyPr wrap="square" lIns="0" tIns="0" rIns="0" bIns="0" rtlCol="0" anchor="t"/>
+          <a:lstStyle/>
+          <a:p>
+            <a:pPr indent="0" marL="0">
+              <a:lnSpc>
+                <a:spcPct val="115000"/>
+              </a:lnSpc>
+              <a:buNone/>
+            </a:pPr>
+            <a:r>
+              <a:rPr lang="en-US" sz="1500" b="1" dirty="0">
+                <a:solidFill>
+                  <a:srgbClr val="14202E"/>
+                </a:solidFill>
+                <a:latin typeface="Calibri" pitchFamily="34" charset="0"/>
+                <a:ea typeface="Calibri" pitchFamily="34" charset="-122"/>
+                <a:cs typeface="Calibri" pitchFamily="34" charset="-120"/>
+              </a:rPr>
+              <a:t>Gleich kleiner Fehler, andere Zerlegung: </a:t>
+            </a:r>
+            <a:pPr indent="0" marL="0">
+              <a:lnSpc>
+                <a:spcPct val="115000"/>
+              </a:lnSpc>
+              <a:buNone/>
+            </a:pPr>
+            <a:r>
+              <a:rPr lang="en-US" sz="1500" dirty="0">
+                <a:solidFill>
+                  <a:srgbClr val="44505E"/>
+                </a:solidFill>
+                <a:latin typeface="Calibri" pitchFamily="34" charset="0"/>
+                <a:ea typeface="Calibri" pitchFamily="34" charset="-122"/>
+                <a:cs typeface="Calibri" pitchFamily="34" charset="-120"/>
+              </a:rPr>
+              <a:t>Beim positiven Sprung wird zusätzlich ein schnell abklingender Anteil bei 2,480 Hz (σ ≈ −0,83 1/s) abgezogen.</a:t>
+            </a:r>
+            <a:endParaRPr lang="en-US" sz="1500" dirty="0"/>
+          </a:p>
+        </p:txBody>
+      </p:sp>
+      <p:sp>
+        <p:nvSpPr>
+          <p:cNvPr id="25" name="Slide Number Placeholder 0"/>
+          <p:cNvSpPr>
+            <a:spLocks noGrp="1"/>
+          </p:cNvSpPr>
+          <p:nvPr>
+            <p:ph type="sldNum" sz="quarter" idx="4294967295"/>
+          </p:nvPr>
+        </p:nvSpPr>
+        <p:spPr>
+          <a:xfrm>
+            <a:off x="10795000" y="6426200"/>
+            <a:ext cx="584200" cy="228600"/>
+          </a:xfrm>
+          <a:prstGeom prst="rect">
+            <a:avLst/>
+          </a:prstGeom>
+          <a:extLst>
+            <a:ext uri="{C572A759-6A51-4108-AA02-DFA0A04FC94B}">
+              <ma14:wrappingTextBoxFlag xmlns:ma14="http://schemas.microsoft.com/office/mac/drawingml/2011/main" val="0"/>
+            </a:ext>
+          </a:extLst>
+        </p:spPr>
+        <p:txBody>
+          <a:bodyPr/>
+          <a:lstStyle>
+            <a:lvl1pPr>
+              <a:defRPr sz="1200">
+                <a:solidFill>
+                  <a:srgbClr val="5F6873"/>
+                </a:solidFill>
+                <a:latin typeface="Consolas"/>
+                <a:ea typeface="Consolas"/>
+                <a:cs typeface="Consolas"/>
+              </a:defRPr>
+            </a:lvl1pPr>
+          </a:lstStyle>
+          <a:p>
+            <a:pPr algn="r"/>
+            <a:fld id="{F7021451-1387-4CA6-816F-3879F97B5CBC}" type="slidenum">
+              <a:rPr b="0" lang="en-US"/>
               <a:t>17</a:t>
             </a:fld>
             <a:endParaRPr lang="en-US"/>
@@ -11535,13 +11335,13 @@
             <a:r>
               <a:rPr lang="en-US" sz="1200" spc="100" kern="0" dirty="0">
                 <a:solidFill>
-                  <a:srgbClr val="B5491B"/>
+                  <a:srgbClr val="1C5CAB"/>
                 </a:solidFill>
                 <a:latin typeface="Consolas" pitchFamily="34" charset="0"/>
                 <a:ea typeface="Consolas" pitchFamily="34" charset="-122"/>
                 <a:cs typeface="Consolas" pitchFamily="34" charset="-120"/>
               </a:rPr>
-              <a:t>EXTERNER VERGLEICHSFALL · ORDNUNG 12</a:t>
+              <a:t>PRÜFSTUFE 4 · NEGATIVER SPRUNG</a:t>
             </a:r>
             <a:endParaRPr lang="en-US" sz="1200" dirty="0"/>
           </a:p>
@@ -11582,7 +11382,7 @@
                 <a:ea typeface="Calibri" pitchFamily="34" charset="-122"/>
                 <a:cs typeface="Calibri" pitchFamily="34" charset="-120"/>
               </a:rPr>
-              <a:t>Mexiko: Modellfehler 17,05 %</a:t>
+              <a:t>Filterung: negative Sprungantwort</a:t>
             </a:r>
             <a:endParaRPr lang="en-US" sz="3200" dirty="0"/>
           </a:p>
@@ -11624,7 +11424,7 @@
                 <a:ea typeface="Calibri" pitchFamily="34" charset="-122"/>
                 <a:cs typeface="Calibri" pitchFamily="34" charset="-120"/>
               </a:rPr>
-              <a:t>Mittelwert ≈ 59,773 Hz abgezogen · 1 mHz = 0,001 Hz · Ursache des Fehlers im Abschnitt nicht nachgewiesen</a:t>
+              <a:t>Blau: Messung · Orange: Messung minus geschätzter 2,268-Hz-Anteil · P_pos / 10⁶ in Dateieinheit</a:t>
             </a:r>
             <a:endParaRPr lang="en-US" sz="1200" dirty="0"/>
           </a:p>
@@ -11632,7 +11432,7 @@
       </p:sp>
       <p:pic>
         <p:nvPicPr>
-          <p:cNvPr id="6" name="Image 0" descr="C:\Sevgi\projects\prony_matrix_pencil_filter\outputs\ergebnisdeck\08_mexiko_rekonstruktion.png">    </p:cNvPr>
+          <p:cNvPr id="6" name="Image 0" descr="C:\Sevgi\projects\prony_matrix_pencil_filter\outputs\ergebnisdeck\05_filter_negativ.png">    </p:cNvPr>
           <p:cNvPicPr>
             <a:picLocks noChangeAspect="1"/>
           </p:cNvPicPr>
@@ -11646,8 +11446,8 @@
         </p:blipFill>
         <p:spPr>
           <a:xfrm>
-            <a:off x="812800" y="1879600"/>
-            <a:ext cx="5969000" cy="3962400"/>
+            <a:off x="1524000" y="1879600"/>
+            <a:ext cx="9144000" cy="3295650"/>
           </a:xfrm>
           <a:prstGeom prst="rect">
             <a:avLst/>
@@ -11662,12 +11462,12 @@
         </p:nvSpPr>
         <p:spPr>
           <a:xfrm>
-            <a:off x="812800" y="1879600"/>
-            <a:ext cx="5969000" cy="3962400"/>
+            <a:off x="1524000" y="1879600"/>
+            <a:ext cx="9144000" cy="3295650"/>
           </a:xfrm>
           <a:prstGeom prst="roundRect">
             <a:avLst>
-              <a:gd name="adj" fmla="val 2538"/>
+              <a:gd name="adj" fmla="val 3052"/>
             </a:avLst>
           </a:prstGeom>
           <a:ln w="9525">
@@ -11686,8 +11486,8 @@
         </p:nvSpPr>
         <p:spPr>
           <a:xfrm>
-            <a:off x="7188200" y="1879600"/>
-            <a:ext cx="4191000" cy="698500"/>
+            <a:off x="812800" y="5353050"/>
+            <a:ext cx="3314700" cy="266700"/>
           </a:xfrm>
           <a:prstGeom prst="rect">
             <a:avLst/>
@@ -11706,54 +11506,30 @@
               <a:buNone/>
             </a:pPr>
             <a:r>
-              <a:rPr lang="en-US" sz="4800" b="1" dirty="0">
-                <a:solidFill>
-                  <a:srgbClr val="B5491B"/>
+              <a:rPr lang="en-US" sz="1500" b="1" dirty="0">
+                <a:solidFill>
+                  <a:srgbClr val="14202E"/>
                 </a:solidFill>
                 <a:latin typeface="Calibri" pitchFamily="34" charset="0"/>
                 <a:ea typeface="Calibri" pitchFamily="34" charset="-122"/>
                 <a:cs typeface="Calibri" pitchFamily="34" charset="-120"/>
               </a:rPr>
-              <a:t>17,05 %</a:t>
-            </a:r>
-            <a:endParaRPr lang="en-US" sz="4800" dirty="0"/>
-          </a:p>
-        </p:txBody>
-      </p:sp>
-      <p:pic>
-        <p:nvPicPr>
-          <p:cNvPr id="9" name="Image 1" descr="mx">    </p:cNvPr>
-          <p:cNvPicPr>
-            <a:picLocks noChangeAspect="1"/>
-          </p:cNvPicPr>
-          <p:nvPr/>
-        </p:nvPicPr>
-        <p:blipFill>
-          <a:blip r:embed="rId2"/>
-          <a:stretch>
-            <a:fillRect/>
-          </a:stretch>
-        </p:blipFill>
-        <p:spPr>
-          <a:xfrm>
-            <a:off x="7188200" y="2616200"/>
-            <a:ext cx="2476500" cy="539750"/>
-          </a:xfrm>
-          <a:prstGeom prst="rect">
-            <a:avLst/>
-          </a:prstGeom>
-        </p:spPr>
-      </p:pic>
-      <p:sp>
-        <p:nvSpPr>
-          <p:cNvPr id="10" name="Text 5"/>
+              <a:t>1 Polpaar</a:t>
+            </a:r>
+            <a:endParaRPr lang="en-US" sz="1500" dirty="0"/>
+          </a:p>
+        </p:txBody>
+      </p:sp>
+      <p:sp>
+        <p:nvSpPr>
+          <p:cNvPr id="9" name="Text 5"/>
           <p:cNvSpPr txBox="1"/>
           <p:nvPr/>
         </p:nvSpPr>
         <p:spPr>
           <a:xfrm>
-            <a:off x="7188200" y="3187700"/>
-            <a:ext cx="4191000" cy="228600"/>
+            <a:off x="812800" y="5645150"/>
+            <a:ext cx="3314700" cy="228600"/>
           </a:xfrm>
           <a:prstGeom prst="rect">
             <a:avLst/>
@@ -11780,7 +11556,7 @@
                 <a:ea typeface="Calibri" pitchFamily="34" charset="-122"/>
                 <a:cs typeface="Calibri" pitchFamily="34" charset="-120"/>
               </a:rPr>
-              <a:t>über dieselben 301 Zeitpunkte</a:t>
+              <a:t>bei 2,268 Hz abgezogen</a:t>
             </a:r>
             <a:endParaRPr lang="en-US" sz="1200" dirty="0"/>
           </a:p>
@@ -11788,14 +11564,14 @@
       </p:sp>
       <p:sp>
         <p:nvSpPr>
-          <p:cNvPr id="11" name="Text 6"/>
+          <p:cNvPr id="10" name="Text 6"/>
           <p:cNvSpPr txBox="1"/>
           <p:nvPr/>
         </p:nvSpPr>
         <p:spPr>
           <a:xfrm>
-            <a:off x="7188200" y="3568700"/>
-            <a:ext cx="4191000" cy="266700"/>
+            <a:off x="4436533" y="5353050"/>
+            <a:ext cx="3314700" cy="266700"/>
           </a:xfrm>
           <a:prstGeom prst="rect">
             <a:avLst/>
@@ -11822,7 +11598,7 @@
                 <a:ea typeface="Calibri" pitchFamily="34" charset="-122"/>
                 <a:cs typeface="Calibri" pitchFamily="34" charset="-120"/>
               </a:rPr>
-              <a:t>Wo der Fehler entsteht</a:t>
+              <a:t>Unverändert vor 1 s</a:t>
             </a:r>
             <a:endParaRPr lang="en-US" sz="1500" dirty="0"/>
           </a:p>
@@ -11830,14 +11606,14 @@
       </p:sp>
       <p:sp>
         <p:nvSpPr>
-          <p:cNvPr id="12" name="Text 7"/>
+          <p:cNvPr id="11" name="Text 7"/>
           <p:cNvSpPr txBox="1"/>
           <p:nvPr/>
         </p:nvSpPr>
         <p:spPr>
           <a:xfrm>
-            <a:off x="7188200" y="3886200"/>
-            <a:ext cx="4191000" cy="571500"/>
+            <a:off x="4436533" y="5645150"/>
+            <a:ext cx="3314700" cy="228600"/>
           </a:xfrm>
           <a:prstGeom prst="rect">
             <a:avLst/>
@@ -11856,7 +11632,7 @@
               <a:buNone/>
             </a:pPr>
             <a:r>
-              <a:rPr lang="en-US" sz="1500" dirty="0">
+              <a:rPr lang="en-US" sz="1200" dirty="0">
                 <a:solidFill>
                   <a:srgbClr val="44505E"/>
                 </a:solidFill>
@@ -11864,22 +11640,22 @@
                 <a:ea typeface="Calibri" pitchFamily="34" charset="-122"/>
                 <a:cs typeface="Calibri" pitchFamily="34" charset="-120"/>
               </a:rPr>
-              <a:t>240 bis 243 s: schnelle Änderungen, 55 % der Fehlerquadratsumme.</a:t>
-            </a:r>
-            <a:endParaRPr lang="en-US" sz="1500" dirty="0"/>
-          </a:p>
-        </p:txBody>
-      </p:sp>
-      <p:sp>
-        <p:nvSpPr>
-          <p:cNvPr id="13" name="Text 8"/>
+              <a:t>Abzug erst ab Analysebeginn</a:t>
+            </a:r>
+            <a:endParaRPr lang="en-US" sz="1200" dirty="0"/>
+          </a:p>
+        </p:txBody>
+      </p:sp>
+      <p:sp>
+        <p:nvSpPr>
+          <p:cNvPr id="12" name="Text 8"/>
           <p:cNvSpPr txBox="1"/>
           <p:nvPr/>
         </p:nvSpPr>
         <p:spPr>
           <a:xfrm>
-            <a:off x="7188200" y="4572000"/>
-            <a:ext cx="4191000" cy="266700"/>
+            <a:off x="8060267" y="5353050"/>
+            <a:ext cx="3314700" cy="266700"/>
           </a:xfrm>
           <a:prstGeom prst="rect">
             <a:avLst/>
@@ -11906,7 +11682,7 @@
                 <a:ea typeface="Calibri" pitchFamily="34" charset="-122"/>
                 <a:cs typeface="Calibri" pitchFamily="34" charset="-120"/>
               </a:rPr>
-              <a:t>Folge</a:t>
+              <a:t>−99,999 %</a:t>
             </a:r>
             <a:endParaRPr lang="en-US" sz="1500" dirty="0"/>
           </a:p>
@@ -11914,14 +11690,14 @@
       </p:sp>
       <p:sp>
         <p:nvSpPr>
-          <p:cNvPr id="14" name="Text 9"/>
+          <p:cNvPr id="13" name="Text 9"/>
           <p:cNvSpPr txBox="1"/>
           <p:nvPr/>
         </p:nvSpPr>
         <p:spPr>
           <a:xfrm>
-            <a:off x="7188200" y="4889500"/>
-            <a:ext cx="4191000" cy="838200"/>
+            <a:off x="8060267" y="5645150"/>
+            <a:ext cx="3314700" cy="228600"/>
           </a:xfrm>
           <a:prstGeom prst="rect">
             <a:avLst/>
@@ -11940,7 +11716,7 @@
               <a:buNone/>
             </a:pPr>
             <a:r>
-              <a:rPr lang="en-US" sz="1500" dirty="0">
+              <a:rPr lang="en-US" sz="1200" dirty="0">
                 <a:solidFill>
                   <a:srgbClr val="44505E"/>
                 </a:solidFill>
@@ -11948,9 +11724,9 @@
                 <a:ea typeface="Calibri" pitchFamily="34" charset="-122"/>
                 <a:cs typeface="Calibri" pitchFamily="34" charset="-120"/>
               </a:rPr>
-              <a:t>Über der 10-%-Grenze: Der Abzug wird blockiert, die Ausgabe bleibt das Eingangssignal.</a:t>
-            </a:r>
-            <a:endParaRPr lang="en-US" sz="1500" dirty="0"/>
+              <a:t>Bandenergie 1,76–2,64 Hz, 4 bis 7 s</a:t>
+            </a:r>
+            <a:endParaRPr lang="en-US" sz="1200" dirty="0"/>
           </a:p>
         </p:txBody>
       </p:sp>
@@ -12057,13 +11833,13 @@
             <a:r>
               <a:rPr lang="en-US" sz="1200" spc="100" kern="0" dirty="0">
                 <a:solidFill>
-                  <a:srgbClr val="B5491B"/>
+                  <a:srgbClr val="1C5CAB"/>
                 </a:solidFill>
                 <a:latin typeface="Consolas" pitchFamily="34" charset="0"/>
                 <a:ea typeface="Consolas" pitchFamily="34" charset="-122"/>
                 <a:cs typeface="Consolas" pitchFamily="34" charset="-120"/>
               </a:rPr>
-              <a:t>EXTERNER VERGLEICHSFALL · ORDNUNGSSTUDIE</a:t>
+              <a:t>PRÜFSTUFE 4 · POSITIVER SPRUNG</a:t>
             </a:r>
             <a:endParaRPr lang="en-US" sz="1200" dirty="0"/>
           </a:p>
@@ -12104,7 +11880,7 @@
                 <a:ea typeface="Calibri" pitchFamily="34" charset="-122"/>
                 <a:cs typeface="Calibri" pitchFamily="34" charset="-120"/>
               </a:rPr>
-              <a:t>Mexiko: mehr Ordnung, andere Zerlegung</a:t>
+              <a:t>Filterung: positive Sprungantwort</a:t>
             </a:r>
             <a:endParaRPr lang="en-US" sz="3200" dirty="0"/>
           </a:p>
@@ -12146,7 +11922,7 @@
                 <a:ea typeface="Calibri" pitchFamily="34" charset="-122"/>
                 <a:cs typeface="Calibri" pitchFamily="34" charset="-120"/>
               </a:rPr>
-              <a:t>Gestrichelt: Schutzgrenze des Filters (10 %) · Prüfung innerhalb derselben Aufzeichnung, keine unabhängige Validierung</a:t>
+              <a:t>Blau: Messung · Orange: Messung minus Summe beider Anteile · P_pos / 10⁶ in Dateieinheit</a:t>
             </a:r>
             <a:endParaRPr lang="en-US" sz="1200" dirty="0"/>
           </a:p>
@@ -12154,7 +11930,7 @@
       </p:sp>
       <p:pic>
         <p:nvPicPr>
-          <p:cNvPr id="6" name="Image 0" descr="C:\Sevgi\projects\prony_matrix_pencil_filter\outputs\ergebnisdeck\09_mexiko_ordnung.png">    </p:cNvPr>
+          <p:cNvPr id="6" name="Image 0" descr="C:\Sevgi\projects\prony_matrix_pencil_filter\outputs\ergebnisdeck\06_filter_positiv.png">    </p:cNvPr>
           <p:cNvPicPr>
             <a:picLocks noChangeAspect="1"/>
           </p:cNvPicPr>
@@ -12168,8 +11944,8 @@
         </p:blipFill>
         <p:spPr>
           <a:xfrm>
-            <a:off x="2032000" y="1879600"/>
-            <a:ext cx="8128000" cy="2978150"/>
+            <a:off x="1524000" y="1879600"/>
+            <a:ext cx="9144000" cy="3295650"/>
           </a:xfrm>
           <a:prstGeom prst="rect">
             <a:avLst/>
@@ -12184,12 +11960,12 @@
         </p:nvSpPr>
         <p:spPr>
           <a:xfrm>
-            <a:off x="2032000" y="1879600"/>
-            <a:ext cx="8128000" cy="2978150"/>
+            <a:off x="1524000" y="1879600"/>
+            <a:ext cx="9144000" cy="3295650"/>
           </a:xfrm>
           <a:prstGeom prst="roundRect">
             <a:avLst>
-              <a:gd name="adj" fmla="val 3377"/>
+              <a:gd name="adj" fmla="val 3052"/>
             </a:avLst>
           </a:prstGeom>
           <a:ln w="9525">
@@ -12208,8 +11984,8 @@
         </p:nvSpPr>
         <p:spPr>
           <a:xfrm>
-            <a:off x="812800" y="5048250"/>
-            <a:ext cx="10566400" cy="825500"/>
+            <a:off x="812800" y="5353050"/>
+            <a:ext cx="3314700" cy="266700"/>
           </a:xfrm>
           <a:prstGeom prst="rect">
             <a:avLst/>
@@ -12236,8 +12012,33 @@
                 <a:ea typeface="Calibri" pitchFamily="34" charset="-122"/>
                 <a:cs typeface="Calibri" pitchFamily="34" charset="-120"/>
               </a:rPr>
-              <a:t>Mehr Modellanteile senken den Fehler auf den verwendeten Punkten, nicht auf den ausgelassenen. </a:t>
-            </a:r>
+              <a:t>2 Polpaare</a:t>
+            </a:r>
+            <a:endParaRPr lang="en-US" sz="1500" dirty="0"/>
+          </a:p>
+        </p:txBody>
+      </p:sp>
+      <p:sp>
+        <p:nvSpPr>
+          <p:cNvPr id="9" name="Text 5"/>
+          <p:cNvSpPr txBox="1"/>
+          <p:nvPr/>
+        </p:nvSpPr>
+        <p:spPr>
+          <a:xfrm>
+            <a:off x="812800" y="5645150"/>
+            <a:ext cx="3314700" cy="228600"/>
+          </a:xfrm>
+          <a:prstGeom prst="rect">
+            <a:avLst/>
+          </a:prstGeom>
+          <a:noFill/>
+          <a:ln/>
+        </p:spPr>
+        <p:txBody>
+          <a:bodyPr wrap="square" lIns="0" tIns="0" rIns="0" bIns="0" rtlCol="0" anchor="t"/>
+          <a:lstStyle/>
+          <a:p>
             <a:pPr indent="0" marL="0">
               <a:lnSpc>
                 <a:spcPct val="115000"/>
@@ -12245,7 +12046,7 @@
               <a:buNone/>
             </a:pPr>
             <a:r>
-              <a:rPr lang="en-US" sz="1500" dirty="0">
+              <a:rPr lang="en-US" sz="1200" dirty="0">
                 <a:solidFill>
                   <a:srgbClr val="44505E"/>
                 </a:solidFill>
@@ -12253,9 +12054,177 @@
                 <a:ea typeface="Calibri" pitchFamily="34" charset="-122"/>
                 <a:cs typeface="Calibri" pitchFamily="34" charset="-120"/>
               </a:rPr>
-              <a:t>Zugleich wächst die Amplitude nahe 0,72 Hz von 0,0045 Hz (Ordnung 12) auf 0,0213 Hz (Ordnung 36); die Autoren nennen 0,004 Hz.</a:t>
+              <a:t>bei 2,268 Hz und 2,480 Hz abgezogen</a:t>
+            </a:r>
+            <a:endParaRPr lang="en-US" sz="1200" dirty="0"/>
+          </a:p>
+        </p:txBody>
+      </p:sp>
+      <p:sp>
+        <p:nvSpPr>
+          <p:cNvPr id="10" name="Text 6"/>
+          <p:cNvSpPr txBox="1"/>
+          <p:nvPr/>
+        </p:nvSpPr>
+        <p:spPr>
+          <a:xfrm>
+            <a:off x="4436533" y="5353050"/>
+            <a:ext cx="3314700" cy="266700"/>
+          </a:xfrm>
+          <a:prstGeom prst="rect">
+            <a:avLst/>
+          </a:prstGeom>
+          <a:noFill/>
+          <a:ln/>
+        </p:spPr>
+        <p:txBody>
+          <a:bodyPr wrap="square" lIns="0" tIns="0" rIns="0" bIns="0" rtlCol="0" anchor="t"/>
+          <a:lstStyle/>
+          <a:p>
+            <a:pPr indent="0" marL="0">
+              <a:lnSpc>
+                <a:spcPct val="115000"/>
+              </a:lnSpc>
+              <a:buNone/>
+            </a:pPr>
+            <a:r>
+              <a:rPr lang="en-US" sz="1500" b="1" dirty="0">
+                <a:solidFill>
+                  <a:srgbClr val="14202E"/>
+                </a:solidFill>
+                <a:latin typeface="Calibri" pitchFamily="34" charset="0"/>
+                <a:ea typeface="Calibri" pitchFamily="34" charset="-122"/>
+                <a:cs typeface="Calibri" pitchFamily="34" charset="-120"/>
+              </a:rPr>
+              <a:t>Unverändert vor 1 s</a:t>
             </a:r>
             <a:endParaRPr lang="en-US" sz="1500" dirty="0"/>
+          </a:p>
+        </p:txBody>
+      </p:sp>
+      <p:sp>
+        <p:nvSpPr>
+          <p:cNvPr id="11" name="Text 7"/>
+          <p:cNvSpPr txBox="1"/>
+          <p:nvPr/>
+        </p:nvSpPr>
+        <p:spPr>
+          <a:xfrm>
+            <a:off x="4436533" y="5645150"/>
+            <a:ext cx="3314700" cy="228600"/>
+          </a:xfrm>
+          <a:prstGeom prst="rect">
+            <a:avLst/>
+          </a:prstGeom>
+          <a:noFill/>
+          <a:ln/>
+        </p:spPr>
+        <p:txBody>
+          <a:bodyPr wrap="square" lIns="0" tIns="0" rIns="0" bIns="0" rtlCol="0" anchor="t"/>
+          <a:lstStyle/>
+          <a:p>
+            <a:pPr indent="0" marL="0">
+              <a:lnSpc>
+                <a:spcPct val="115000"/>
+              </a:lnSpc>
+              <a:buNone/>
+            </a:pPr>
+            <a:r>
+              <a:rPr lang="en-US" sz="1200" dirty="0">
+                <a:solidFill>
+                  <a:srgbClr val="44505E"/>
+                </a:solidFill>
+                <a:latin typeface="Calibri" pitchFamily="34" charset="0"/>
+                <a:ea typeface="Calibri" pitchFamily="34" charset="-122"/>
+                <a:cs typeface="Calibri" pitchFamily="34" charset="-120"/>
+              </a:rPr>
+              <a:t>Abzug erst ab Analysebeginn</a:t>
+            </a:r>
+            <a:endParaRPr lang="en-US" sz="1200" dirty="0"/>
+          </a:p>
+        </p:txBody>
+      </p:sp>
+      <p:sp>
+        <p:nvSpPr>
+          <p:cNvPr id="12" name="Text 8"/>
+          <p:cNvSpPr txBox="1"/>
+          <p:nvPr/>
+        </p:nvSpPr>
+        <p:spPr>
+          <a:xfrm>
+            <a:off x="8060267" y="5353050"/>
+            <a:ext cx="3314700" cy="266700"/>
+          </a:xfrm>
+          <a:prstGeom prst="rect">
+            <a:avLst/>
+          </a:prstGeom>
+          <a:noFill/>
+          <a:ln/>
+        </p:spPr>
+        <p:txBody>
+          <a:bodyPr wrap="square" lIns="0" tIns="0" rIns="0" bIns="0" rtlCol="0" anchor="t"/>
+          <a:lstStyle/>
+          <a:p>
+            <a:pPr indent="0" marL="0">
+              <a:lnSpc>
+                <a:spcPct val="115000"/>
+              </a:lnSpc>
+              <a:buNone/>
+            </a:pPr>
+            <a:r>
+              <a:rPr lang="en-US" sz="1500" b="1" dirty="0">
+                <a:solidFill>
+                  <a:srgbClr val="14202E"/>
+                </a:solidFill>
+                <a:latin typeface="Calibri" pitchFamily="34" charset="0"/>
+                <a:ea typeface="Calibri" pitchFamily="34" charset="-122"/>
+                <a:cs typeface="Calibri" pitchFamily="34" charset="-120"/>
+              </a:rPr>
+              <a:t>−99,87 %</a:t>
+            </a:r>
+            <a:endParaRPr lang="en-US" sz="1500" dirty="0"/>
+          </a:p>
+        </p:txBody>
+      </p:sp>
+      <p:sp>
+        <p:nvSpPr>
+          <p:cNvPr id="13" name="Text 9"/>
+          <p:cNvSpPr txBox="1"/>
+          <p:nvPr/>
+        </p:nvSpPr>
+        <p:spPr>
+          <a:xfrm>
+            <a:off x="8060267" y="5645150"/>
+            <a:ext cx="3314700" cy="228600"/>
+          </a:xfrm>
+          <a:prstGeom prst="rect">
+            <a:avLst/>
+          </a:prstGeom>
+          <a:noFill/>
+          <a:ln/>
+        </p:spPr>
+        <p:txBody>
+          <a:bodyPr wrap="square" lIns="0" tIns="0" rIns="0" bIns="0" rtlCol="0" anchor="t"/>
+          <a:lstStyle/>
+          <a:p>
+            <a:pPr indent="0" marL="0">
+              <a:lnSpc>
+                <a:spcPct val="115000"/>
+              </a:lnSpc>
+              <a:buNone/>
+            </a:pPr>
+            <a:r>
+              <a:rPr lang="en-US" sz="1200" dirty="0">
+                <a:solidFill>
+                  <a:srgbClr val="44505E"/>
+                </a:solidFill>
+                <a:latin typeface="Calibri" pitchFamily="34" charset="0"/>
+                <a:ea typeface="Calibri" pitchFamily="34" charset="-122"/>
+                <a:cs typeface="Calibri" pitchFamily="34" charset="-120"/>
+              </a:rPr>
+              <a:t>Bandenergie 1,76–2,64 Hz, 4 bis 7 s</a:t>
+            </a:r>
+            <a:endParaRPr lang="en-US" sz="1200" dirty="0"/>
           </a:p>
         </p:txBody>
       </p:sp>
@@ -13150,7 +13119,7 @@
                 <a:ea typeface="Calibri" pitchFamily="34" charset="-122"/>
                 <a:cs typeface="Calibri" pitchFamily="34" charset="-120"/>
               </a:rPr>
-              <a:t>Projektarbeit Schwingungsanalyse mit Matrix Pencil · Arbeitsfassung 16.10.2026</a:t>
+              <a:t>Projektarbeit Schwingungsanalyse mit Matrix Pencil · Arbeitsfassung 29.10.2026</a:t>
             </a:r>
             <a:endParaRPr lang="en-US" sz="1200" dirty="0"/>
           </a:p>
@@ -13164,12 +13133,12 @@
         </p:nvSpPr>
         <p:spPr>
           <a:xfrm>
-            <a:off x="812800" y="1879600"/>
-            <a:ext cx="5181600" cy="2286000"/>
+            <a:off x="812800" y="1841500"/>
+            <a:ext cx="5181600" cy="2095500"/>
           </a:xfrm>
           <a:prstGeom prst="roundRect">
             <a:avLst>
-              <a:gd name="adj" fmla="val 4400"/>
+              <a:gd name="adj" fmla="val 4800"/>
             </a:avLst>
           </a:prstGeom>
           <a:solidFill>
@@ -13191,8 +13160,8 @@
         </p:nvSpPr>
         <p:spPr>
           <a:xfrm>
-            <a:off x="1066800" y="2133600"/>
-            <a:ext cx="4673600" cy="317500"/>
+            <a:off x="1041400" y="2044700"/>
+            <a:ext cx="4724400" cy="292100"/>
           </a:xfrm>
           <a:prstGeom prst="rect">
             <a:avLst/>
@@ -13211,17 +13180,17 @@
               <a:buNone/>
             </a:pPr>
             <a:r>
-              <a:rPr lang="en-US" sz="2000" b="1" dirty="0">
-                <a:solidFill>
-                  <a:srgbClr val="7FB2EE"/>
+              <a:rPr lang="en-US" sz="1800" b="1" dirty="0">
+                <a:solidFill>
+                  <a:srgbClr val="F2A07B"/>
                 </a:solidFill>
                 <a:latin typeface="Calibri" pitchFamily="34" charset="0"/>
                 <a:ea typeface="Calibri" pitchFamily="34" charset="-122"/>
                 <a:cs typeface="Calibri" pitchFamily="34" charset="-120"/>
               </a:rPr>
-              <a:t>Leistung P_pos (Projekt)</a:t>
-            </a:r>
-            <a:endParaRPr lang="en-US" sz="2000" dirty="0"/>
+              <a:t>Prüfstufen 1 bis 3</a:t>
+            </a:r>
+            <a:endParaRPr lang="en-US" sz="1800" dirty="0"/>
           </a:p>
         </p:txBody>
       </p:sp>
@@ -13233,8 +13202,8 @@
         </p:nvSpPr>
         <p:spPr>
           <a:xfrm>
-            <a:off x="1066800" y="2565400"/>
-            <a:ext cx="4673600" cy="1460500"/>
+            <a:off x="1041400" y="2438400"/>
+            <a:ext cx="4724400" cy="1397000"/>
           </a:xfrm>
           <a:prstGeom prst="rect">
             <a:avLst/>
@@ -13248,13 +13217,13 @@
           <a:p>
             <a:pPr marL="342900" indent="-342900">
               <a:spcAft>
-                <a:spcPts val="600"/>
+                <a:spcPts val="400"/>
               </a:spcAft>
               <a:buSzPct val="100000"/>
               <a:buChar char="•"/>
             </a:pPr>
             <a:r>
-              <a:rPr lang="en-US" sz="1500" dirty="0">
+              <a:rPr lang="en-US" sz="1400" dirty="0">
                 <a:solidFill>
                   <a:srgbClr val="D5DDE6"/>
                 </a:solidFill>
@@ -13262,20 +13231,20 @@
                 <a:ea typeface="Calibri" pitchFamily="34" charset="-122"/>
                 <a:cs typeface="Calibri" pitchFamily="34" charset="-120"/>
               </a:rPr>
-              <a:t>Pendelung bei 2,268 Hz in beiden Sprungantworten</a:t>
-            </a:r>
-            <a:endParaRPr lang="en-US" sz="1500" dirty="0"/>
+              <a:t>Sollkurve: Abweichung 6,7 · 10⁻¹³, Rechenweg exakt</a:t>
+            </a:r>
+            <a:endParaRPr lang="en-US" sz="1400" dirty="0"/>
           </a:p>
           <a:p>
             <a:pPr marL="342900" indent="-342900">
               <a:spcAft>
-                <a:spcPts val="600"/>
+                <a:spcPts val="400"/>
               </a:spcAft>
               <a:buSzPct val="100000"/>
               <a:buChar char="•"/>
             </a:pPr>
             <a:r>
-              <a:rPr lang="en-US" sz="1500" dirty="0">
+              <a:rPr lang="en-US" sz="1400" dirty="0">
                 <a:solidFill>
                   <a:srgbClr val="D5DDE6"/>
                 </a:solidFill>
@@ -13283,20 +13252,20 @@
                 <a:ea typeface="Calibri" pitchFamily="34" charset="-122"/>
                 <a:cs typeface="Calibri" pitchFamily="34" charset="-120"/>
               </a:rPr>
-              <a:t>Modellfehler 0,763 % und 0,594 %</a:t>
-            </a:r>
-            <a:endParaRPr lang="en-US" sz="1500" dirty="0"/>
+              <a:t>NIST: zertifizierte Parameter bis 3 · 10⁻¹⁰ getroffen</a:t>
+            </a:r>
+            <a:endParaRPr lang="en-US" sz="1400" dirty="0"/>
           </a:p>
           <a:p>
             <a:pPr marL="342900" indent="-342900">
               <a:spcAft>
-                <a:spcPts val="600"/>
+                <a:spcPts val="400"/>
               </a:spcAft>
               <a:buSzPct val="100000"/>
               <a:buChar char="•"/>
             </a:pPr>
             <a:r>
-              <a:rPr lang="en-US" sz="1500" dirty="0">
+              <a:rPr lang="en-US" sz="1400" dirty="0">
                 <a:solidFill>
                   <a:srgbClr val="D5DDE6"/>
                 </a:solidFill>
@@ -13304,9 +13273,30 @@
                 <a:ea typeface="Calibri" pitchFamily="34" charset="-122"/>
                 <a:cs typeface="Calibri" pitchFamily="34" charset="-120"/>
               </a:rPr>
-              <a:t>Beide Abzüge freigegeben, positiv mit zwei Anteilen</a:t>
-            </a:r>
-            <a:endParaRPr lang="en-US" sz="1500" dirty="0"/>
+              <a:t>Mexiko: Frequenzen auf &lt; 0,06 % wie veröffentlicht</a:t>
+            </a:r>
+            <a:endParaRPr lang="en-US" sz="1400" dirty="0"/>
+          </a:p>
+          <a:p>
+            <a:pPr marL="342900" indent="-342900">
+              <a:spcAft>
+                <a:spcPts val="400"/>
+              </a:spcAft>
+              <a:buSzPct val="100000"/>
+              <a:buChar char="•"/>
+            </a:pPr>
+            <a:r>
+              <a:rPr lang="en-US" sz="1400" dirty="0">
+                <a:solidFill>
+                  <a:srgbClr val="D5DDE6"/>
+                </a:solidFill>
+                <a:latin typeface="Calibri" pitchFamily="34" charset="0"/>
+                <a:ea typeface="Calibri" pitchFamily="34" charset="-122"/>
+                <a:cs typeface="Calibri" pitchFamily="34" charset="-120"/>
+              </a:rPr>
+              <a:t>Mexiko: Modellfehler 17,05 %, Abzug blockiert; höhere Ordnung passt nur scheinbar besser</a:t>
+            </a:r>
+            <a:endParaRPr lang="en-US" sz="1400" dirty="0"/>
           </a:p>
         </p:txBody>
       </p:sp>
@@ -13318,12 +13308,12 @@
         </p:nvSpPr>
         <p:spPr>
           <a:xfrm>
-            <a:off x="6197600" y="1879600"/>
-            <a:ext cx="5181600" cy="2286000"/>
+            <a:off x="6197600" y="1841500"/>
+            <a:ext cx="5181600" cy="2095500"/>
           </a:xfrm>
           <a:prstGeom prst="roundRect">
             <a:avLst>
-              <a:gd name="adj" fmla="val 4400"/>
+              <a:gd name="adj" fmla="val 4800"/>
             </a:avLst>
           </a:prstGeom>
           <a:solidFill>
@@ -13345,8 +13335,8 @@
         </p:nvSpPr>
         <p:spPr>
           <a:xfrm>
-            <a:off x="6451600" y="2133600"/>
-            <a:ext cx="4673600" cy="317500"/>
+            <a:off x="6426200" y="2044700"/>
+            <a:ext cx="4724400" cy="292100"/>
           </a:xfrm>
           <a:prstGeom prst="rect">
             <a:avLst/>
@@ -13365,17 +13355,17 @@
               <a:buNone/>
             </a:pPr>
             <a:r>
-              <a:rPr lang="en-US" sz="2000" b="1" dirty="0">
-                <a:solidFill>
-                  <a:srgbClr val="F2A07B"/>
+              <a:rPr lang="en-US" sz="1800" b="1" dirty="0">
+                <a:solidFill>
+                  <a:srgbClr val="7FB2EE"/>
                 </a:solidFill>
                 <a:latin typeface="Calibri" pitchFamily="34" charset="0"/>
                 <a:ea typeface="Calibri" pitchFamily="34" charset="-122"/>
                 <a:cs typeface="Calibri" pitchFamily="34" charset="-120"/>
               </a:rPr>
-              <a:t>Netzfrequenz Mexiko (extern)</a:t>
-            </a:r>
-            <a:endParaRPr lang="en-US" sz="2000" dirty="0"/>
+              <a:t>Stufe 4: eigene Messungen P_pos</a:t>
+            </a:r>
+            <a:endParaRPr lang="en-US" sz="1800" dirty="0"/>
           </a:p>
         </p:txBody>
       </p:sp>
@@ -13387,8 +13377,8 @@
         </p:nvSpPr>
         <p:spPr>
           <a:xfrm>
-            <a:off x="6451600" y="2565400"/>
-            <a:ext cx="4673600" cy="1460500"/>
+            <a:off x="6426200" y="2438400"/>
+            <a:ext cx="4724400" cy="1397000"/>
           </a:xfrm>
           <a:prstGeom prst="rect">
             <a:avLst/>
@@ -13402,13 +13392,13 @@
           <a:p>
             <a:pPr marL="342900" indent="-342900">
               <a:spcAft>
-                <a:spcPts val="600"/>
+                <a:spcPts val="400"/>
               </a:spcAft>
               <a:buSzPct val="100000"/>
               <a:buChar char="•"/>
             </a:pPr>
             <a:r>
-              <a:rPr lang="en-US" sz="1500" dirty="0">
+              <a:rPr lang="en-US" sz="1400" dirty="0">
                 <a:solidFill>
                   <a:srgbClr val="D5DDE6"/>
                 </a:solidFill>
@@ -13416,20 +13406,20 @@
                 <a:ea typeface="Calibri" pitchFamily="34" charset="-122"/>
                 <a:cs typeface="Calibri" pitchFamily="34" charset="-120"/>
               </a:rPr>
-              <a:t>Drei Frequenzen auf unter 0,06 % wie veröffentlicht</a:t>
-            </a:r>
-            <a:endParaRPr lang="en-US" sz="1500" dirty="0"/>
+              <a:t>Pendelung bei 2,268 Hz nach beiden Sprüngen</a:t>
+            </a:r>
+            <a:endParaRPr lang="en-US" sz="1400" dirty="0"/>
           </a:p>
           <a:p>
             <a:pPr marL="342900" indent="-342900">
               <a:spcAft>
-                <a:spcPts val="600"/>
+                <a:spcPts val="400"/>
               </a:spcAft>
               <a:buSzPct val="100000"/>
               <a:buChar char="•"/>
             </a:pPr>
             <a:r>
-              <a:rPr lang="en-US" sz="1500" dirty="0">
+              <a:rPr lang="en-US" sz="1400" dirty="0">
                 <a:solidFill>
                   <a:srgbClr val="D5DDE6"/>
                 </a:solidFill>
@@ -13437,20 +13427,20 @@
                 <a:ea typeface="Calibri" pitchFamily="34" charset="-122"/>
                 <a:cs typeface="Calibri" pitchFamily="34" charset="-120"/>
               </a:rPr>
-              <a:t>Modellfehler 17,05 %: Abzug blockiert</a:t>
-            </a:r>
-            <a:endParaRPr lang="en-US" sz="1500" dirty="0"/>
+              <a:t>Modellfehler 0,763 % (positiv) und 0,594 % (negativ)</a:t>
+            </a:r>
+            <a:endParaRPr lang="en-US" sz="1400" dirty="0"/>
           </a:p>
           <a:p>
             <a:pPr marL="342900" indent="-342900">
               <a:spcAft>
-                <a:spcPts val="600"/>
+                <a:spcPts val="400"/>
               </a:spcAft>
               <a:buSzPct val="100000"/>
               <a:buChar char="•"/>
             </a:pPr>
             <a:r>
-              <a:rPr lang="en-US" sz="1500" dirty="0">
+              <a:rPr lang="en-US" sz="1400" dirty="0">
                 <a:solidFill>
                   <a:srgbClr val="D5DDE6"/>
                 </a:solidFill>
@@ -13458,9 +13448,30 @@
                 <a:ea typeface="Calibri" pitchFamily="34" charset="-122"/>
                 <a:cs typeface="Calibri" pitchFamily="34" charset="-120"/>
               </a:rPr>
-              <a:t>Höhere Ordnung passt besser, zerlegt aber anders</a:t>
-            </a:r>
-            <a:endParaRPr lang="en-US" sz="1500" dirty="0"/>
+              <a:t>Bandenergie 1,76–2,64 Hz nach dem Abzug um &gt; 99,8 % kleiner</a:t>
+            </a:r>
+            <a:endParaRPr lang="en-US" sz="1400" dirty="0"/>
+          </a:p>
+          <a:p>
+            <a:pPr marL="342900" indent="-342900">
+              <a:spcAft>
+                <a:spcPts val="400"/>
+              </a:spcAft>
+              <a:buSzPct val="100000"/>
+              <a:buChar char="•"/>
+            </a:pPr>
+            <a:r>
+              <a:rPr lang="en-US" sz="1400" dirty="0">
+                <a:solidFill>
+                  <a:srgbClr val="D5DDE6"/>
+                </a:solidFill>
+                <a:latin typeface="Calibri" pitchFamily="34" charset="0"/>
+                <a:ea typeface="Calibri" pitchFamily="34" charset="-122"/>
+                <a:cs typeface="Calibri" pitchFamily="34" charset="-120"/>
+              </a:rPr>
+              <a:t>Beide Abzüge freigegeben, positiv mit zwei Anteilen</a:t>
+            </a:r>
+            <a:endParaRPr lang="en-US" sz="1400" dirty="0"/>
           </a:p>
         </p:txBody>
       </p:sp>
@@ -13472,8 +13483,8 @@
         </p:nvSpPr>
         <p:spPr>
           <a:xfrm>
-            <a:off x="812800" y="4508500"/>
-            <a:ext cx="10566400" cy="762000"/>
+            <a:off x="812800" y="4216400"/>
+            <a:ext cx="10566400" cy="698500"/>
           </a:xfrm>
           <a:prstGeom prst="rect">
             <a:avLst/>
@@ -13492,7 +13503,7 @@
               <a:buNone/>
             </a:pPr>
             <a:r>
-              <a:rPr lang="en-US" sz="2000" b="1" dirty="0">
+              <a:rPr lang="en-US" sz="1800" b="1" dirty="0">
                 <a:solidFill>
                   <a:srgbClr val="F4F3EF"/>
                 </a:solidFill>
@@ -13500,9 +13511,9 @@
                 <a:ea typeface="Calibri" pitchFamily="34" charset="-122"/>
                 <a:cs typeface="Calibri" pitchFamily="34" charset="-120"/>
               </a:rPr>
-              <a:t>Frequenzübereinstimmung und Filterfreigabe sind getrennt zu bewerten. Für die Messdaten fehlt eine unabhängig bekannte Sollkurve.</a:t>
-            </a:r>
-            <a:endParaRPr lang="en-US" sz="2000" dirty="0"/>
+              <a:t>Erkennen und Freigeben sind getrennt zu bewerten. Für unsere Messungen fehlt eine unabhängig bekannte Sollkurve.</a:t>
+            </a:r>
+            <a:endParaRPr lang="en-US" sz="1800" dirty="0"/>
           </a:p>
         </p:txBody>
       </p:sp>
@@ -18440,7 +18451,7 @@
                 <a:ea typeface="Consolas" pitchFamily="34" charset="-122"/>
                 <a:cs typeface="Consolas" pitchFamily="34" charset="-120"/>
               </a:rPr>
-              <a:t>ZUSAMMENFASSUNG</a:t>
+              <a:t>VORGEHEN</a:t>
             </a:r>
             <a:endParaRPr lang="en-US" sz="1200" dirty="0"/>
           </a:p>
@@ -18481,7 +18492,7 @@
                 <a:ea typeface="Calibri" pitchFamily="34" charset="-122"/>
                 <a:cs typeface="Calibri" pitchFamily="34" charset="-120"/>
               </a:rPr>
-              <a:t>Die Ergebnisse auf einen Blick</a:t>
+              <a:t>Vom Bekannten zum Unbekannten</a:t>
             </a:r>
             <a:endParaRPr lang="en-US" sz="3200" dirty="0"/>
           </a:p>
@@ -18523,7 +18534,7 @@
                 <a:ea typeface="Calibri" pitchFamily="34" charset="-122"/>
                 <a:cs typeface="Calibri" pitchFamily="34" charset="-120"/>
               </a:rPr>
-              <a:t>Auswertung: examples/presentation_demo.py · Mexiko: ROMA User Guide, Tabelle 2.1</a:t>
+              <a:t>Jede Stufe prüft, was die vorige nicht prüfen konnte</a:t>
             </a:r>
             <a:endParaRPr lang="en-US" sz="1200" dirty="0"/>
           </a:p>
@@ -18537,12 +18548,12 @@
         </p:nvSpPr>
         <p:spPr>
           <a:xfrm>
-            <a:off x="812800" y="1879600"/>
-            <a:ext cx="5181600" cy="1790700"/>
+            <a:off x="812800" y="1841500"/>
+            <a:ext cx="2527300" cy="2540000"/>
           </a:xfrm>
           <a:prstGeom prst="roundRect">
             <a:avLst>
-              <a:gd name="adj" fmla="val 5617"/>
+              <a:gd name="adj" fmla="val 3980"/>
             </a:avLst>
           </a:prstGeom>
           <a:solidFill>
@@ -18558,14 +18569,39 @@
       </p:sp>
       <p:sp>
         <p:nvSpPr>
-          <p:cNvPr id="7" name="Text 4"/>
+          <p:cNvPr id="7" name="Shape 4"/>
+          <p:cNvSpPr/>
+          <p:nvPr/>
+        </p:nvSpPr>
+        <p:spPr>
+          <a:xfrm>
+            <a:off x="863600" y="1841500"/>
+            <a:ext cx="2425700" cy="50800"/>
+          </a:xfrm>
+          <a:prstGeom prst="rect">
+            <a:avLst/>
+          </a:prstGeom>
+          <a:solidFill>
+            <a:srgbClr val="1C5CAB"/>
+          </a:solidFill>
+          <a:ln w="12700">
+            <a:solidFill>
+              <a:srgbClr val="1C5CAB"/>
+            </a:solidFill>
+            <a:prstDash val="solid"/>
+          </a:ln>
+        </p:spPr>
+      </p:sp>
+      <p:sp>
+        <p:nvSpPr>
+          <p:cNvPr id="8" name="Text 5"/>
           <p:cNvSpPr txBox="1"/>
           <p:nvPr/>
         </p:nvSpPr>
         <p:spPr>
           <a:xfrm>
-            <a:off x="1066800" y="2108200"/>
-            <a:ext cx="4673600" cy="698500"/>
+            <a:off x="990600" y="2044700"/>
+            <a:ext cx="2171700" cy="215900"/>
           </a:xfrm>
           <a:prstGeom prst="rect">
             <a:avLst/>
@@ -18584,30 +18620,30 @@
               <a:buNone/>
             </a:pPr>
             <a:r>
-              <a:rPr lang="en-US" sz="4800" b="1" dirty="0">
-                <a:solidFill>
-                  <a:srgbClr val="14202E"/>
-                </a:solidFill>
-                <a:latin typeface="Calibri" pitchFamily="34" charset="0"/>
-                <a:ea typeface="Calibri" pitchFamily="34" charset="-122"/>
-                <a:cs typeface="Calibri" pitchFamily="34" charset="-120"/>
+              <a:rPr lang="en-US" sz="1200" dirty="0">
+                <a:solidFill>
+                  <a:srgbClr val="1C5CAB"/>
+                </a:solidFill>
+                <a:latin typeface="Consolas" pitchFamily="34" charset="0"/>
+                <a:ea typeface="Consolas" pitchFamily="34" charset="-122"/>
+                <a:cs typeface="Consolas" pitchFamily="34" charset="-120"/>
               </a:rPr>
-              <a:t>2,268 Hz</a:t>
-            </a:r>
-            <a:endParaRPr lang="en-US" sz="4800" dirty="0"/>
-          </a:p>
-        </p:txBody>
-      </p:sp>
-      <p:sp>
-        <p:nvSpPr>
-          <p:cNvPr id="8" name="Text 5"/>
+              <a:t>Stufe 1 · Folie 12</a:t>
+            </a:r>
+            <a:endParaRPr lang="en-US" sz="1200" dirty="0"/>
+          </a:p>
+        </p:txBody>
+      </p:sp>
+      <p:sp>
+        <p:nvSpPr>
+          <p:cNvPr id="9" name="Text 6"/>
           <p:cNvSpPr txBox="1"/>
           <p:nvPr/>
         </p:nvSpPr>
         <p:spPr>
           <a:xfrm>
-            <a:off x="1066800" y="2895600"/>
-            <a:ext cx="4673600" cy="571500"/>
+            <a:off x="990600" y="2324100"/>
+            <a:ext cx="2171700" cy="292100"/>
           </a:xfrm>
           <a:prstGeom prst="rect">
             <a:avLst/>
@@ -18626,34 +18662,194 @@
               <a:buNone/>
             </a:pPr>
             <a:r>
-              <a:rPr lang="en-US" sz="1500" dirty="0">
-                <a:solidFill>
-                  <a:srgbClr val="44505E"/>
+              <a:rPr lang="en-US" sz="1800" b="1" dirty="0">
+                <a:solidFill>
+                  <a:srgbClr val="14202E"/>
                 </a:solidFill>
                 <a:latin typeface="Calibri" pitchFamily="34" charset="0"/>
                 <a:ea typeface="Calibri" pitchFamily="34" charset="-122"/>
                 <a:cs typeface="Calibri" pitchFamily="34" charset="-120"/>
               </a:rPr>
-              <a:t>Leistungspendelung in P_pos, nach positivem und negativem Sprung</a:t>
-            </a:r>
-            <a:endParaRPr lang="en-US" sz="1500" dirty="0"/>
-          </a:p>
-        </p:txBody>
-      </p:sp>
-      <p:sp>
-        <p:nvSpPr>
-          <p:cNvPr id="9" name="Shape 6"/>
+              <a:t>Sollkurve</a:t>
+            </a:r>
+            <a:endParaRPr lang="en-US" sz="1800" dirty="0"/>
+          </a:p>
+        </p:txBody>
+      </p:sp>
+      <p:sp>
+        <p:nvSpPr>
+          <p:cNvPr id="10" name="Text 7"/>
+          <p:cNvSpPr txBox="1"/>
+          <p:nvPr/>
+        </p:nvSpPr>
+        <p:spPr>
+          <a:xfrm>
+            <a:off x="990600" y="2667000"/>
+            <a:ext cx="2171700" cy="444500"/>
+          </a:xfrm>
+          <a:prstGeom prst="rect">
+            <a:avLst/>
+          </a:prstGeom>
+          <a:noFill/>
+          <a:ln/>
+        </p:spPr>
+        <p:txBody>
+          <a:bodyPr wrap="square" lIns="0" tIns="0" rIns="0" bIns="0" rtlCol="0" anchor="t"/>
+          <a:lstStyle/>
+          <a:p>
+            <a:pPr indent="0" marL="0">
+              <a:lnSpc>
+                <a:spcPct val="115000"/>
+              </a:lnSpc>
+              <a:buNone/>
+            </a:pPr>
+            <a:r>
+              <a:rPr lang="en-US" sz="1200" dirty="0">
+                <a:solidFill>
+                  <a:srgbClr val="44505E"/>
+                </a:solidFill>
+                <a:latin typeface="Calibri" pitchFamily="34" charset="0"/>
+                <a:ea typeface="Calibri" pitchFamily="34" charset="-122"/>
+                <a:cs typeface="Calibri" pitchFamily="34" charset="-120"/>
+              </a:rPr>
+              <a:t>Künstliches Signal ohne Rauschen</a:t>
+            </a:r>
+            <a:endParaRPr lang="en-US" sz="1200" dirty="0"/>
+          </a:p>
+        </p:txBody>
+      </p:sp>
+      <p:sp>
+        <p:nvSpPr>
+          <p:cNvPr id="11" name="Text 8"/>
+          <p:cNvSpPr txBox="1"/>
+          <p:nvPr/>
+        </p:nvSpPr>
+        <p:spPr>
+          <a:xfrm>
+            <a:off x="990600" y="3136900"/>
+            <a:ext cx="2171700" cy="508000"/>
+          </a:xfrm>
+          <a:prstGeom prst="rect">
+            <a:avLst/>
+          </a:prstGeom>
+          <a:noFill/>
+          <a:ln/>
+        </p:spPr>
+        <p:txBody>
+          <a:bodyPr wrap="square" lIns="0" tIns="0" rIns="0" bIns="0" rtlCol="0" anchor="t"/>
+          <a:lstStyle/>
+          <a:p>
+            <a:pPr indent="0" marL="0">
+              <a:lnSpc>
+                <a:spcPct val="115000"/>
+              </a:lnSpc>
+              <a:buNone/>
+            </a:pPr>
+            <a:r>
+              <a:rPr lang="en-US" sz="1300" b="1" dirty="0">
+                <a:solidFill>
+                  <a:srgbClr val="14202E"/>
+                </a:solidFill>
+                <a:latin typeface="Calibri" pitchFamily="34" charset="0"/>
+                <a:ea typeface="Calibri" pitchFamily="34" charset="-122"/>
+                <a:cs typeface="Calibri" pitchFamily="34" charset="-120"/>
+              </a:rPr>
+              <a:t>Bekannt: </a:t>
+            </a:r>
+            <a:pPr indent="0" marL="0">
+              <a:lnSpc>
+                <a:spcPct val="115000"/>
+              </a:lnSpc>
+              <a:buNone/>
+            </a:pPr>
+            <a:r>
+              <a:rPr lang="en-US" sz="1300" dirty="0">
+                <a:solidFill>
+                  <a:srgbClr val="14202E"/>
+                </a:solidFill>
+                <a:latin typeface="Calibri" pitchFamily="34" charset="0"/>
+                <a:ea typeface="Calibri" pitchFamily="34" charset="-122"/>
+                <a:cs typeface="Calibri" pitchFamily="34" charset="-120"/>
+              </a:rPr>
+              <a:t>jeder Anteil und das gewünschte Ergebnis</a:t>
+            </a:r>
+            <a:endParaRPr lang="en-US" sz="1300" dirty="0"/>
+          </a:p>
+        </p:txBody>
+      </p:sp>
+      <p:sp>
+        <p:nvSpPr>
+          <p:cNvPr id="12" name="Text 9"/>
+          <p:cNvSpPr txBox="1"/>
+          <p:nvPr/>
+        </p:nvSpPr>
+        <p:spPr>
+          <a:xfrm>
+            <a:off x="990600" y="3695700"/>
+            <a:ext cx="2171700" cy="508000"/>
+          </a:xfrm>
+          <a:prstGeom prst="rect">
+            <a:avLst/>
+          </a:prstGeom>
+          <a:noFill/>
+          <a:ln/>
+        </p:spPr>
+        <p:txBody>
+          <a:bodyPr wrap="square" lIns="0" tIns="0" rIns="0" bIns="0" rtlCol="0" anchor="t"/>
+          <a:lstStyle/>
+          <a:p>
+            <a:pPr indent="0" marL="0">
+              <a:lnSpc>
+                <a:spcPct val="115000"/>
+              </a:lnSpc>
+              <a:buNone/>
+            </a:pPr>
+            <a:r>
+              <a:rPr lang="en-US" sz="1300" b="1" dirty="0">
+                <a:solidFill>
+                  <a:srgbClr val="14202E"/>
+                </a:solidFill>
+                <a:latin typeface="Calibri" pitchFamily="34" charset="0"/>
+                <a:ea typeface="Calibri" pitchFamily="34" charset="-122"/>
+                <a:cs typeface="Calibri" pitchFamily="34" charset="-120"/>
+              </a:rPr>
+              <a:t>Prüft: </a:t>
+            </a:r>
+            <a:pPr indent="0" marL="0">
+              <a:lnSpc>
+                <a:spcPct val="115000"/>
+              </a:lnSpc>
+              <a:buNone/>
+            </a:pPr>
+            <a:r>
+              <a:rPr lang="en-US" sz="1300" dirty="0">
+                <a:solidFill>
+                  <a:srgbClr val="14202E"/>
+                </a:solidFill>
+                <a:latin typeface="Calibri" pitchFamily="34" charset="0"/>
+                <a:ea typeface="Calibri" pitchFamily="34" charset="-122"/>
+                <a:cs typeface="Calibri" pitchFamily="34" charset="-120"/>
+              </a:rPr>
+              <a:t>den ganzen Rechenweg bis zum Abzug</a:t>
+            </a:r>
+            <a:endParaRPr lang="en-US" sz="1300" dirty="0"/>
+          </a:p>
+        </p:txBody>
+      </p:sp>
+      <p:sp>
+        <p:nvSpPr>
+          <p:cNvPr id="13" name="Shape 10"/>
           <p:cNvSpPr/>
           <p:nvPr/>
         </p:nvSpPr>
         <p:spPr>
           <a:xfrm>
-            <a:off x="6197600" y="1879600"/>
-            <a:ext cx="5181600" cy="1790700"/>
+            <a:off x="3492500" y="1841500"/>
+            <a:ext cx="2527300" cy="2540000"/>
           </a:xfrm>
           <a:prstGeom prst="roundRect">
             <a:avLst>
-              <a:gd name="adj" fmla="val 5617"/>
+              <a:gd name="adj" fmla="val 3980"/>
             </a:avLst>
           </a:prstGeom>
           <a:solidFill>
@@ -18669,14 +18865,39 @@
       </p:sp>
       <p:sp>
         <p:nvSpPr>
-          <p:cNvPr id="10" name="Text 7"/>
+          <p:cNvPr id="14" name="Shape 11"/>
+          <p:cNvSpPr/>
+          <p:nvPr/>
+        </p:nvSpPr>
+        <p:spPr>
+          <a:xfrm>
+            <a:off x="3543300" y="1841500"/>
+            <a:ext cx="2425700" cy="50800"/>
+          </a:xfrm>
+          <a:prstGeom prst="rect">
+            <a:avLst/>
+          </a:prstGeom>
+          <a:solidFill>
+            <a:srgbClr val="2A78D6"/>
+          </a:solidFill>
+          <a:ln w="12700">
+            <a:solidFill>
+              <a:srgbClr val="2A78D6"/>
+            </a:solidFill>
+            <a:prstDash val="solid"/>
+          </a:ln>
+        </p:spPr>
+      </p:sp>
+      <p:sp>
+        <p:nvSpPr>
+          <p:cNvPr id="15" name="Text 12"/>
           <p:cNvSpPr txBox="1"/>
           <p:nvPr/>
         </p:nvSpPr>
         <p:spPr>
           <a:xfrm>
-            <a:off x="6451600" y="2108200"/>
-            <a:ext cx="4673600" cy="698500"/>
+            <a:off x="3670300" y="2044700"/>
+            <a:ext cx="2171700" cy="215900"/>
           </a:xfrm>
           <a:prstGeom prst="rect">
             <a:avLst/>
@@ -18695,30 +18916,30 @@
               <a:buNone/>
             </a:pPr>
             <a:r>
-              <a:rPr lang="en-US" sz="4800" b="1" dirty="0">
-                <a:solidFill>
-                  <a:srgbClr val="14202E"/>
-                </a:solidFill>
-                <a:latin typeface="Calibri" pitchFamily="34" charset="0"/>
-                <a:ea typeface="Calibri" pitchFamily="34" charset="-122"/>
-                <a:cs typeface="Calibri" pitchFamily="34" charset="-120"/>
+              <a:rPr lang="en-US" sz="1200" dirty="0">
+                <a:solidFill>
+                  <a:srgbClr val="1C5CAB"/>
+                </a:solidFill>
+                <a:latin typeface="Consolas" pitchFamily="34" charset="0"/>
+                <a:ea typeface="Consolas" pitchFamily="34" charset="-122"/>
+                <a:cs typeface="Consolas" pitchFamily="34" charset="-120"/>
               </a:rPr>
-              <a:t>&lt; 1 %</a:t>
-            </a:r>
-            <a:endParaRPr lang="en-US" sz="4800" dirty="0"/>
-          </a:p>
-        </p:txBody>
-      </p:sp>
-      <p:sp>
-        <p:nvSpPr>
-          <p:cNvPr id="11" name="Text 8"/>
+              <a:t>Stufe 2 · Folie 13</a:t>
+            </a:r>
+            <a:endParaRPr lang="en-US" sz="1200" dirty="0"/>
+          </a:p>
+        </p:txBody>
+      </p:sp>
+      <p:sp>
+        <p:nvSpPr>
+          <p:cNvPr id="16" name="Text 13"/>
           <p:cNvSpPr txBox="1"/>
           <p:nvPr/>
         </p:nvSpPr>
         <p:spPr>
           <a:xfrm>
-            <a:off x="6451600" y="2895600"/>
-            <a:ext cx="4673600" cy="571500"/>
+            <a:off x="3670300" y="2324100"/>
+            <a:ext cx="2171700" cy="292100"/>
           </a:xfrm>
           <a:prstGeom prst="rect">
             <a:avLst/>
@@ -18737,34 +18958,194 @@
               <a:buNone/>
             </a:pPr>
             <a:r>
-              <a:rPr lang="en-US" sz="1500" dirty="0">
-                <a:solidFill>
-                  <a:srgbClr val="44505E"/>
+              <a:rPr lang="en-US" sz="1800" b="1" dirty="0">
+                <a:solidFill>
+                  <a:srgbClr val="14202E"/>
                 </a:solidFill>
                 <a:latin typeface="Calibri" pitchFamily="34" charset="0"/>
                 <a:ea typeface="Calibri" pitchFamily="34" charset="-122"/>
                 <a:cs typeface="Calibri" pitchFamily="34" charset="-120"/>
               </a:rPr>
-              <a:t>Modellfehler der Leistungsmessungen: 0,763 % positiv, 0,594 % negativ</a:t>
-            </a:r>
-            <a:endParaRPr lang="en-US" sz="1500" dirty="0"/>
-          </a:p>
-        </p:txBody>
-      </p:sp>
-      <p:sp>
-        <p:nvSpPr>
-          <p:cNvPr id="12" name="Shape 9"/>
+              <a:t>NIST Lanczos1</a:t>
+            </a:r>
+            <a:endParaRPr lang="en-US" sz="1800" dirty="0"/>
+          </a:p>
+        </p:txBody>
+      </p:sp>
+      <p:sp>
+        <p:nvSpPr>
+          <p:cNvPr id="17" name="Text 14"/>
+          <p:cNvSpPr txBox="1"/>
+          <p:nvPr/>
+        </p:nvSpPr>
+        <p:spPr>
+          <a:xfrm>
+            <a:off x="3670300" y="2667000"/>
+            <a:ext cx="2171700" cy="444500"/>
+          </a:xfrm>
+          <a:prstGeom prst="rect">
+            <a:avLst/>
+          </a:prstGeom>
+          <a:noFill/>
+          <a:ln/>
+        </p:spPr>
+        <p:txBody>
+          <a:bodyPr wrap="square" lIns="0" tIns="0" rIns="0" bIns="0" rtlCol="0" anchor="t"/>
+          <a:lstStyle/>
+          <a:p>
+            <a:pPr indent="0" marL="0">
+              <a:lnSpc>
+                <a:spcPct val="115000"/>
+              </a:lnSpc>
+              <a:buNone/>
+            </a:pPr>
+            <a:r>
+              <a:rPr lang="en-US" sz="1200" dirty="0">
+                <a:solidFill>
+                  <a:srgbClr val="44505E"/>
+                </a:solidFill>
+                <a:latin typeface="Calibri" pitchFamily="34" charset="0"/>
+                <a:ea typeface="Calibri" pitchFamily="34" charset="-122"/>
+                <a:cs typeface="Calibri" pitchFamily="34" charset="-120"/>
+              </a:rPr>
+              <a:t>Referenzdatensatz, 24 Werte</a:t>
+            </a:r>
+            <a:endParaRPr lang="en-US" sz="1200" dirty="0"/>
+          </a:p>
+        </p:txBody>
+      </p:sp>
+      <p:sp>
+        <p:nvSpPr>
+          <p:cNvPr id="18" name="Text 15"/>
+          <p:cNvSpPr txBox="1"/>
+          <p:nvPr/>
+        </p:nvSpPr>
+        <p:spPr>
+          <a:xfrm>
+            <a:off x="3670300" y="3136900"/>
+            <a:ext cx="2171700" cy="508000"/>
+          </a:xfrm>
+          <a:prstGeom prst="rect">
+            <a:avLst/>
+          </a:prstGeom>
+          <a:noFill/>
+          <a:ln/>
+        </p:spPr>
+        <p:txBody>
+          <a:bodyPr wrap="square" lIns="0" tIns="0" rIns="0" bIns="0" rtlCol="0" anchor="t"/>
+          <a:lstStyle/>
+          <a:p>
+            <a:pPr indent="0" marL="0">
+              <a:lnSpc>
+                <a:spcPct val="115000"/>
+              </a:lnSpc>
+              <a:buNone/>
+            </a:pPr>
+            <a:r>
+              <a:rPr lang="en-US" sz="1300" b="1" dirty="0">
+                <a:solidFill>
+                  <a:srgbClr val="14202E"/>
+                </a:solidFill>
+                <a:latin typeface="Calibri" pitchFamily="34" charset="0"/>
+                <a:ea typeface="Calibri" pitchFamily="34" charset="-122"/>
+                <a:cs typeface="Calibri" pitchFamily="34" charset="-120"/>
+              </a:rPr>
+              <a:t>Bekannt: </a:t>
+            </a:r>
+            <a:pPr indent="0" marL="0">
+              <a:lnSpc>
+                <a:spcPct val="115000"/>
+              </a:lnSpc>
+              <a:buNone/>
+            </a:pPr>
+            <a:r>
+              <a:rPr lang="en-US" sz="1300" dirty="0">
+                <a:solidFill>
+                  <a:srgbClr val="14202E"/>
+                </a:solidFill>
+                <a:latin typeface="Calibri" pitchFamily="34" charset="0"/>
+                <a:ea typeface="Calibri" pitchFamily="34" charset="-122"/>
+                <a:cs typeface="Calibri" pitchFamily="34" charset="-120"/>
+              </a:rPr>
+              <a:t>zertifizierte Modellparameter</a:t>
+            </a:r>
+            <a:endParaRPr lang="en-US" sz="1300" dirty="0"/>
+          </a:p>
+        </p:txBody>
+      </p:sp>
+      <p:sp>
+        <p:nvSpPr>
+          <p:cNvPr id="19" name="Text 16"/>
+          <p:cNvSpPr txBox="1"/>
+          <p:nvPr/>
+        </p:nvSpPr>
+        <p:spPr>
+          <a:xfrm>
+            <a:off x="3670300" y="3695700"/>
+            <a:ext cx="2171700" cy="508000"/>
+          </a:xfrm>
+          <a:prstGeom prst="rect">
+            <a:avLst/>
+          </a:prstGeom>
+          <a:noFill/>
+          <a:ln/>
+        </p:spPr>
+        <p:txBody>
+          <a:bodyPr wrap="square" lIns="0" tIns="0" rIns="0" bIns="0" rtlCol="0" anchor="t"/>
+          <a:lstStyle/>
+          <a:p>
+            <a:pPr indent="0" marL="0">
+              <a:lnSpc>
+                <a:spcPct val="115000"/>
+              </a:lnSpc>
+              <a:buNone/>
+            </a:pPr>
+            <a:r>
+              <a:rPr lang="en-US" sz="1300" b="1" dirty="0">
+                <a:solidFill>
+                  <a:srgbClr val="14202E"/>
+                </a:solidFill>
+                <a:latin typeface="Calibri" pitchFamily="34" charset="0"/>
+                <a:ea typeface="Calibri" pitchFamily="34" charset="-122"/>
+                <a:cs typeface="Calibri" pitchFamily="34" charset="-120"/>
+              </a:rPr>
+              <a:t>Prüft: </a:t>
+            </a:r>
+            <a:pPr indent="0" marL="0">
+              <a:lnSpc>
+                <a:spcPct val="115000"/>
+              </a:lnSpc>
+              <a:buNone/>
+            </a:pPr>
+            <a:r>
+              <a:rPr lang="en-US" sz="1300" dirty="0">
+                <a:solidFill>
+                  <a:srgbClr val="14202E"/>
+                </a:solidFill>
+                <a:latin typeface="Calibri" pitchFamily="34" charset="0"/>
+                <a:ea typeface="Calibri" pitchFamily="34" charset="-122"/>
+                <a:cs typeface="Calibri" pitchFamily="34" charset="-120"/>
+              </a:rPr>
+              <a:t>die Parameterschätzung allein</a:t>
+            </a:r>
+            <a:endParaRPr lang="en-US" sz="1300" dirty="0"/>
+          </a:p>
+        </p:txBody>
+      </p:sp>
+      <p:sp>
+        <p:nvSpPr>
+          <p:cNvPr id="20" name="Shape 17"/>
           <p:cNvSpPr/>
           <p:nvPr/>
         </p:nvSpPr>
         <p:spPr>
           <a:xfrm>
-            <a:off x="812800" y="3835400"/>
-            <a:ext cx="5181600" cy="1790700"/>
+            <a:off x="6172200" y="1841500"/>
+            <a:ext cx="2527300" cy="2540000"/>
           </a:xfrm>
           <a:prstGeom prst="roundRect">
             <a:avLst>
-              <a:gd name="adj" fmla="val 5617"/>
+              <a:gd name="adj" fmla="val 3980"/>
             </a:avLst>
           </a:prstGeom>
           <a:solidFill>
@@ -18780,14 +19161,39 @@
       </p:sp>
       <p:sp>
         <p:nvSpPr>
-          <p:cNvPr id="13" name="Text 10"/>
+          <p:cNvPr id="21" name="Shape 18"/>
+          <p:cNvSpPr/>
+          <p:nvPr/>
+        </p:nvSpPr>
+        <p:spPr>
+          <a:xfrm>
+            <a:off x="6223000" y="1841500"/>
+            <a:ext cx="2425700" cy="50800"/>
+          </a:xfrm>
+          <a:prstGeom prst="rect">
+            <a:avLst/>
+          </a:prstGeom>
+          <a:solidFill>
+            <a:srgbClr val="EB6834"/>
+          </a:solidFill>
+          <a:ln w="12700">
+            <a:solidFill>
+              <a:srgbClr val="EB6834"/>
+            </a:solidFill>
+            <a:prstDash val="solid"/>
+          </a:ln>
+        </p:spPr>
+      </p:sp>
+      <p:sp>
+        <p:nvSpPr>
+          <p:cNvPr id="22" name="Text 19"/>
           <p:cNvSpPr txBox="1"/>
           <p:nvPr/>
         </p:nvSpPr>
         <p:spPr>
           <a:xfrm>
-            <a:off x="1066800" y="4064000"/>
-            <a:ext cx="4673600" cy="698500"/>
+            <a:off x="6350000" y="2044700"/>
+            <a:ext cx="2171700" cy="215900"/>
           </a:xfrm>
           <a:prstGeom prst="rect">
             <a:avLst/>
@@ -18806,30 +19212,30 @@
               <a:buNone/>
             </a:pPr>
             <a:r>
-              <a:rPr lang="en-US" sz="4800" b="1" dirty="0">
-                <a:solidFill>
-                  <a:srgbClr val="14202E"/>
-                </a:solidFill>
-                <a:latin typeface="Calibri" pitchFamily="34" charset="0"/>
-                <a:ea typeface="Calibri" pitchFamily="34" charset="-122"/>
-                <a:cs typeface="Calibri" pitchFamily="34" charset="-120"/>
+              <a:rPr lang="en-US" sz="1200" dirty="0">
+                <a:solidFill>
+                  <a:srgbClr val="B5491B"/>
+                </a:solidFill>
+                <a:latin typeface="Consolas" pitchFamily="34" charset="0"/>
+                <a:ea typeface="Consolas" pitchFamily="34" charset="-122"/>
+                <a:cs typeface="Consolas" pitchFamily="34" charset="-120"/>
               </a:rPr>
-              <a:t>&gt; 99,8 %</a:t>
-            </a:r>
-            <a:endParaRPr lang="en-US" sz="4800" dirty="0"/>
-          </a:p>
-        </p:txBody>
-      </p:sp>
-      <p:sp>
-        <p:nvSpPr>
-          <p:cNvPr id="14" name="Text 11"/>
+              <a:t>Stufe 3 · Folien 14–16</a:t>
+            </a:r>
+            <a:endParaRPr lang="en-US" sz="1200" dirty="0"/>
+          </a:p>
+        </p:txBody>
+      </p:sp>
+      <p:sp>
+        <p:nvSpPr>
+          <p:cNvPr id="23" name="Text 20"/>
           <p:cNvSpPr txBox="1"/>
           <p:nvPr/>
         </p:nvSpPr>
         <p:spPr>
           <a:xfrm>
-            <a:off x="1066800" y="4851400"/>
-            <a:ext cx="4673600" cy="571500"/>
+            <a:off x="6350000" y="2324100"/>
+            <a:ext cx="2171700" cy="292100"/>
           </a:xfrm>
           <a:prstGeom prst="rect">
             <a:avLst/>
@@ -18848,34 +19254,194 @@
               <a:buNone/>
             </a:pPr>
             <a:r>
-              <a:rPr lang="en-US" sz="1500" dirty="0">
-                <a:solidFill>
-                  <a:srgbClr val="44505E"/>
+              <a:rPr lang="en-US" sz="1800" b="1" dirty="0">
+                <a:solidFill>
+                  <a:srgbClr val="14202E"/>
                 </a:solidFill>
                 <a:latin typeface="Calibri" pitchFamily="34" charset="0"/>
                 <a:ea typeface="Calibri" pitchFamily="34" charset="-122"/>
                 <a:cs typeface="Calibri" pitchFamily="34" charset="-120"/>
               </a:rPr>
-              <a:t>weniger Bandenergie 1,76–2,64 Hz zwischen 4 und 7 s nach dem Abzug</a:t>
-            </a:r>
-            <a:endParaRPr lang="en-US" sz="1500" dirty="0"/>
-          </a:p>
-        </p:txBody>
-      </p:sp>
-      <p:sp>
-        <p:nvSpPr>
-          <p:cNvPr id="15" name="Shape 12"/>
+              <a:t>Mexiko</a:t>
+            </a:r>
+            <a:endParaRPr lang="en-US" sz="1800" dirty="0"/>
+          </a:p>
+        </p:txBody>
+      </p:sp>
+      <p:sp>
+        <p:nvSpPr>
+          <p:cNvPr id="24" name="Text 21"/>
+          <p:cNvSpPr txBox="1"/>
+          <p:nvPr/>
+        </p:nvSpPr>
+        <p:spPr>
+          <a:xfrm>
+            <a:off x="6350000" y="2667000"/>
+            <a:ext cx="2171700" cy="444500"/>
+          </a:xfrm>
+          <a:prstGeom prst="rect">
+            <a:avLst/>
+          </a:prstGeom>
+          <a:noFill/>
+          <a:ln/>
+        </p:spPr>
+        <p:txBody>
+          <a:bodyPr wrap="square" lIns="0" tIns="0" rIns="0" bIns="0" rtlCol="0" anchor="t"/>
+          <a:lstStyle/>
+          <a:p>
+            <a:pPr indent="0" marL="0">
+              <a:lnSpc>
+                <a:spcPct val="115000"/>
+              </a:lnSpc>
+              <a:buNone/>
+            </a:pPr>
+            <a:r>
+              <a:rPr lang="en-US" sz="1200" dirty="0">
+                <a:solidFill>
+                  <a:srgbClr val="44505E"/>
+                </a:solidFill>
+                <a:latin typeface="Calibri" pitchFamily="34" charset="0"/>
+                <a:ea typeface="Calibri" pitchFamily="34" charset="-122"/>
+                <a:cs typeface="Calibri" pitchFamily="34" charset="-120"/>
+              </a:rPr>
+              <a:t>Reale Fremdmessung der Netzfrequenz</a:t>
+            </a:r>
+            <a:endParaRPr lang="en-US" sz="1200" dirty="0"/>
+          </a:p>
+        </p:txBody>
+      </p:sp>
+      <p:sp>
+        <p:nvSpPr>
+          <p:cNvPr id="25" name="Text 22"/>
+          <p:cNvSpPr txBox="1"/>
+          <p:nvPr/>
+        </p:nvSpPr>
+        <p:spPr>
+          <a:xfrm>
+            <a:off x="6350000" y="3136900"/>
+            <a:ext cx="2171700" cy="508000"/>
+          </a:xfrm>
+          <a:prstGeom prst="rect">
+            <a:avLst/>
+          </a:prstGeom>
+          <a:noFill/>
+          <a:ln/>
+        </p:spPr>
+        <p:txBody>
+          <a:bodyPr wrap="square" lIns="0" tIns="0" rIns="0" bIns="0" rtlCol="0" anchor="t"/>
+          <a:lstStyle/>
+          <a:p>
+            <a:pPr indent="0" marL="0">
+              <a:lnSpc>
+                <a:spcPct val="115000"/>
+              </a:lnSpc>
+              <a:buNone/>
+            </a:pPr>
+            <a:r>
+              <a:rPr lang="en-US" sz="1300" b="1" dirty="0">
+                <a:solidFill>
+                  <a:srgbClr val="14202E"/>
+                </a:solidFill>
+                <a:latin typeface="Calibri" pitchFamily="34" charset="0"/>
+                <a:ea typeface="Calibri" pitchFamily="34" charset="-122"/>
+                <a:cs typeface="Calibri" pitchFamily="34" charset="-120"/>
+              </a:rPr>
+              <a:t>Bekannt: </a:t>
+            </a:r>
+            <a:pPr indent="0" marL="0">
+              <a:lnSpc>
+                <a:spcPct val="115000"/>
+              </a:lnSpc>
+              <a:buNone/>
+            </a:pPr>
+            <a:r>
+              <a:rPr lang="en-US" sz="1300" dirty="0">
+                <a:solidFill>
+                  <a:srgbClr val="14202E"/>
+                </a:solidFill>
+                <a:latin typeface="Calibri" pitchFamily="34" charset="0"/>
+                <a:ea typeface="Calibri" pitchFamily="34" charset="-122"/>
+                <a:cs typeface="Calibri" pitchFamily="34" charset="-120"/>
+              </a:rPr>
+              <a:t>Schätzwerte anderer Autoren</a:t>
+            </a:r>
+            <a:endParaRPr lang="en-US" sz="1300" dirty="0"/>
+          </a:p>
+        </p:txBody>
+      </p:sp>
+      <p:sp>
+        <p:nvSpPr>
+          <p:cNvPr id="26" name="Text 23"/>
+          <p:cNvSpPr txBox="1"/>
+          <p:nvPr/>
+        </p:nvSpPr>
+        <p:spPr>
+          <a:xfrm>
+            <a:off x="6350000" y="3695700"/>
+            <a:ext cx="2171700" cy="508000"/>
+          </a:xfrm>
+          <a:prstGeom prst="rect">
+            <a:avLst/>
+          </a:prstGeom>
+          <a:noFill/>
+          <a:ln/>
+        </p:spPr>
+        <p:txBody>
+          <a:bodyPr wrap="square" lIns="0" tIns="0" rIns="0" bIns="0" rtlCol="0" anchor="t"/>
+          <a:lstStyle/>
+          <a:p>
+            <a:pPr indent="0" marL="0">
+              <a:lnSpc>
+                <a:spcPct val="115000"/>
+              </a:lnSpc>
+              <a:buNone/>
+            </a:pPr>
+            <a:r>
+              <a:rPr lang="en-US" sz="1300" b="1" dirty="0">
+                <a:solidFill>
+                  <a:srgbClr val="14202E"/>
+                </a:solidFill>
+                <a:latin typeface="Calibri" pitchFamily="34" charset="0"/>
+                <a:ea typeface="Calibri" pitchFamily="34" charset="-122"/>
+                <a:cs typeface="Calibri" pitchFamily="34" charset="-120"/>
+              </a:rPr>
+              <a:t>Prüft: </a:t>
+            </a:r>
+            <a:pPr indent="0" marL="0">
+              <a:lnSpc>
+                <a:spcPct val="115000"/>
+              </a:lnSpc>
+              <a:buNone/>
+            </a:pPr>
+            <a:r>
+              <a:rPr lang="en-US" sz="1300" dirty="0">
+                <a:solidFill>
+                  <a:srgbClr val="14202E"/>
+                </a:solidFill>
+                <a:latin typeface="Calibri" pitchFamily="34" charset="0"/>
+                <a:ea typeface="Calibri" pitchFamily="34" charset="-122"/>
+                <a:cs typeface="Calibri" pitchFamily="34" charset="-120"/>
+              </a:rPr>
+              <a:t>echte Daten und die Schutzregel</a:t>
+            </a:r>
+            <a:endParaRPr lang="en-US" sz="1300" dirty="0"/>
+          </a:p>
+        </p:txBody>
+      </p:sp>
+      <p:sp>
+        <p:nvSpPr>
+          <p:cNvPr id="27" name="Shape 24"/>
           <p:cNvSpPr/>
           <p:nvPr/>
         </p:nvSpPr>
         <p:spPr>
           <a:xfrm>
-            <a:off x="6197600" y="3835400"/>
-            <a:ext cx="5181600" cy="1790700"/>
+            <a:off x="8851900" y="1841500"/>
+            <a:ext cx="2527300" cy="2540000"/>
           </a:xfrm>
           <a:prstGeom prst="roundRect">
             <a:avLst>
-              <a:gd name="adj" fmla="val 5617"/>
+              <a:gd name="adj" fmla="val 3980"/>
             </a:avLst>
           </a:prstGeom>
           <a:solidFill>
@@ -18891,14 +19457,39 @@
       </p:sp>
       <p:sp>
         <p:nvSpPr>
-          <p:cNvPr id="16" name="Text 13"/>
+          <p:cNvPr id="28" name="Shape 25"/>
+          <p:cNvSpPr/>
+          <p:nvPr/>
+        </p:nvSpPr>
+        <p:spPr>
+          <a:xfrm>
+            <a:off x="8902700" y="1841500"/>
+            <a:ext cx="2425700" cy="50800"/>
+          </a:xfrm>
+          <a:prstGeom prst="rect">
+            <a:avLst/>
+          </a:prstGeom>
+          <a:solidFill>
+            <a:srgbClr val="8A8F96"/>
+          </a:solidFill>
+          <a:ln w="12700">
+            <a:solidFill>
+              <a:srgbClr val="8A8F96"/>
+            </a:solidFill>
+            <a:prstDash val="solid"/>
+          </a:ln>
+        </p:spPr>
+      </p:sp>
+      <p:sp>
+        <p:nvSpPr>
+          <p:cNvPr id="29" name="Text 26"/>
           <p:cNvSpPr txBox="1"/>
           <p:nvPr/>
         </p:nvSpPr>
         <p:spPr>
           <a:xfrm>
-            <a:off x="6451600" y="4064000"/>
-            <a:ext cx="4673600" cy="698500"/>
+            <a:off x="9029700" y="2044700"/>
+            <a:ext cx="2171700" cy="215900"/>
           </a:xfrm>
           <a:prstGeom prst="rect">
             <a:avLst/>
@@ -18917,30 +19508,30 @@
               <a:buNone/>
             </a:pPr>
             <a:r>
-              <a:rPr lang="en-US" sz="4800" b="1" dirty="0">
-                <a:solidFill>
-                  <a:srgbClr val="B5491B"/>
-                </a:solidFill>
-                <a:latin typeface="Calibri" pitchFamily="34" charset="0"/>
-                <a:ea typeface="Calibri" pitchFamily="34" charset="-122"/>
-                <a:cs typeface="Calibri" pitchFamily="34" charset="-120"/>
+              <a:rPr lang="en-US" sz="1200" dirty="0">
+                <a:solidFill>
+                  <a:srgbClr val="5F6873"/>
+                </a:solidFill>
+                <a:latin typeface="Consolas" pitchFamily="34" charset="0"/>
+                <a:ea typeface="Consolas" pitchFamily="34" charset="-122"/>
+                <a:cs typeface="Consolas" pitchFamily="34" charset="-120"/>
               </a:rPr>
-              <a:t>17,05 %</a:t>
-            </a:r>
-            <a:endParaRPr lang="en-US" sz="4800" dirty="0"/>
-          </a:p>
-        </p:txBody>
-      </p:sp>
-      <p:sp>
-        <p:nvSpPr>
-          <p:cNvPr id="17" name="Text 14"/>
+              <a:t>Stufe 4 · Folien 17–19</a:t>
+            </a:r>
+            <a:endParaRPr lang="en-US" sz="1200" dirty="0"/>
+          </a:p>
+        </p:txBody>
+      </p:sp>
+      <p:sp>
+        <p:nvSpPr>
+          <p:cNvPr id="30" name="Text 27"/>
           <p:cNvSpPr txBox="1"/>
           <p:nvPr/>
         </p:nvSpPr>
         <p:spPr>
           <a:xfrm>
-            <a:off x="6451600" y="4851400"/>
-            <a:ext cx="4673600" cy="571500"/>
+            <a:off x="9029700" y="2324100"/>
+            <a:ext cx="2171700" cy="292100"/>
           </a:xfrm>
           <a:prstGeom prst="rect">
             <a:avLst/>
@@ -18959,15 +19550,283 @@
               <a:buNone/>
             </a:pPr>
             <a:r>
-              <a:rPr lang="en-US" sz="1500" dirty="0">
-                <a:solidFill>
-                  <a:srgbClr val="44505E"/>
+              <a:rPr lang="en-US" sz="1800" b="1" dirty="0">
+                <a:solidFill>
+                  <a:srgbClr val="14202E"/>
                 </a:solidFill>
                 <a:latin typeface="Calibri" pitchFamily="34" charset="0"/>
                 <a:ea typeface="Calibri" pitchFamily="34" charset="-122"/>
                 <a:cs typeface="Calibri" pitchFamily="34" charset="-120"/>
               </a:rPr>
-              <a:t>Mexiko: Modellfehler über der 10-%-Grenze, der Abzug bleibt blockiert</a:t>
+              <a:t>Eigene Messungen</a:t>
+            </a:r>
+            <a:endParaRPr lang="en-US" sz="1800" dirty="0"/>
+          </a:p>
+        </p:txBody>
+      </p:sp>
+      <p:sp>
+        <p:nvSpPr>
+          <p:cNvPr id="31" name="Text 28"/>
+          <p:cNvSpPr txBox="1"/>
+          <p:nvPr/>
+        </p:nvSpPr>
+        <p:spPr>
+          <a:xfrm>
+            <a:off x="9029700" y="2667000"/>
+            <a:ext cx="2171700" cy="444500"/>
+          </a:xfrm>
+          <a:prstGeom prst="rect">
+            <a:avLst/>
+          </a:prstGeom>
+          <a:noFill/>
+          <a:ln/>
+        </p:spPr>
+        <p:txBody>
+          <a:bodyPr wrap="square" lIns="0" tIns="0" rIns="0" bIns="0" rtlCol="0" anchor="t"/>
+          <a:lstStyle/>
+          <a:p>
+            <a:pPr indent="0" marL="0">
+              <a:lnSpc>
+                <a:spcPct val="115000"/>
+              </a:lnSpc>
+              <a:buNone/>
+            </a:pPr>
+            <a:r>
+              <a:rPr lang="en-US" sz="1200" dirty="0">
+                <a:solidFill>
+                  <a:srgbClr val="44505E"/>
+                </a:solidFill>
+                <a:latin typeface="Calibri" pitchFamily="34" charset="0"/>
+                <a:ea typeface="Calibri" pitchFamily="34" charset="-122"/>
+                <a:cs typeface="Calibri" pitchFamily="34" charset="-120"/>
+              </a:rPr>
+              <a:t>P_pos nach Frequenzsprüngen</a:t>
+            </a:r>
+            <a:endParaRPr lang="en-US" sz="1200" dirty="0"/>
+          </a:p>
+        </p:txBody>
+      </p:sp>
+      <p:sp>
+        <p:nvSpPr>
+          <p:cNvPr id="32" name="Text 29"/>
+          <p:cNvSpPr txBox="1"/>
+          <p:nvPr/>
+        </p:nvSpPr>
+        <p:spPr>
+          <a:xfrm>
+            <a:off x="9029700" y="3136900"/>
+            <a:ext cx="2171700" cy="508000"/>
+          </a:xfrm>
+          <a:prstGeom prst="rect">
+            <a:avLst/>
+          </a:prstGeom>
+          <a:noFill/>
+          <a:ln/>
+        </p:spPr>
+        <p:txBody>
+          <a:bodyPr wrap="square" lIns="0" tIns="0" rIns="0" bIns="0" rtlCol="0" anchor="t"/>
+          <a:lstStyle/>
+          <a:p>
+            <a:pPr indent="0" marL="0">
+              <a:lnSpc>
+                <a:spcPct val="115000"/>
+              </a:lnSpc>
+              <a:buNone/>
+            </a:pPr>
+            <a:r>
+              <a:rPr lang="en-US" sz="1300" b="1" dirty="0">
+                <a:solidFill>
+                  <a:srgbClr val="14202E"/>
+                </a:solidFill>
+                <a:latin typeface="Calibri" pitchFamily="34" charset="0"/>
+                <a:ea typeface="Calibri" pitchFamily="34" charset="-122"/>
+                <a:cs typeface="Calibri" pitchFamily="34" charset="-120"/>
+              </a:rPr>
+              <a:t>Bekannt: </a:t>
+            </a:r>
+            <a:pPr indent="0" marL="0">
+              <a:lnSpc>
+                <a:spcPct val="115000"/>
+              </a:lnSpc>
+              <a:buNone/>
+            </a:pPr>
+            <a:r>
+              <a:rPr lang="en-US" sz="1300" dirty="0">
+                <a:solidFill>
+                  <a:srgbClr val="14202E"/>
+                </a:solidFill>
+                <a:latin typeface="Calibri" pitchFamily="34" charset="0"/>
+                <a:ea typeface="Calibri" pitchFamily="34" charset="-122"/>
+                <a:cs typeface="Calibri" pitchFamily="34" charset="-120"/>
+              </a:rPr>
+              <a:t>keine unabhängige Referenz</a:t>
+            </a:r>
+            <a:endParaRPr lang="en-US" sz="1300" dirty="0"/>
+          </a:p>
+        </p:txBody>
+      </p:sp>
+      <p:sp>
+        <p:nvSpPr>
+          <p:cNvPr id="33" name="Text 30"/>
+          <p:cNvSpPr txBox="1"/>
+          <p:nvPr/>
+        </p:nvSpPr>
+        <p:spPr>
+          <a:xfrm>
+            <a:off x="9029700" y="3695700"/>
+            <a:ext cx="2171700" cy="508000"/>
+          </a:xfrm>
+          <a:prstGeom prst="rect">
+            <a:avLst/>
+          </a:prstGeom>
+          <a:noFill/>
+          <a:ln/>
+        </p:spPr>
+        <p:txBody>
+          <a:bodyPr wrap="square" lIns="0" tIns="0" rIns="0" bIns="0" rtlCol="0" anchor="t"/>
+          <a:lstStyle/>
+          <a:p>
+            <a:pPr indent="0" marL="0">
+              <a:lnSpc>
+                <a:spcPct val="115000"/>
+              </a:lnSpc>
+              <a:buNone/>
+            </a:pPr>
+            <a:r>
+              <a:rPr lang="en-US" sz="1300" b="1" dirty="0">
+                <a:solidFill>
+                  <a:srgbClr val="14202E"/>
+                </a:solidFill>
+                <a:latin typeface="Calibri" pitchFamily="34" charset="0"/>
+                <a:ea typeface="Calibri" pitchFamily="34" charset="-122"/>
+                <a:cs typeface="Calibri" pitchFamily="34" charset="-120"/>
+              </a:rPr>
+              <a:t>Liefert: </a:t>
+            </a:r>
+            <a:pPr indent="0" marL="0">
+              <a:lnSpc>
+                <a:spcPct val="115000"/>
+              </a:lnSpc>
+              <a:buNone/>
+            </a:pPr>
+            <a:r>
+              <a:rPr lang="en-US" sz="1300" dirty="0">
+                <a:solidFill>
+                  <a:srgbClr val="14202E"/>
+                </a:solidFill>
+                <a:latin typeface="Calibri" pitchFamily="34" charset="0"/>
+                <a:ea typeface="Calibri" pitchFamily="34" charset="-122"/>
+                <a:cs typeface="Calibri" pitchFamily="34" charset="-120"/>
+              </a:rPr>
+              <a:t>Frequenz, Abklingen und Abzug</a:t>
+            </a:r>
+            <a:endParaRPr lang="en-US" sz="1300" dirty="0"/>
+          </a:p>
+        </p:txBody>
+      </p:sp>
+      <p:sp>
+        <p:nvSpPr>
+          <p:cNvPr id="34" name="Text 31"/>
+          <p:cNvSpPr txBox="1"/>
+          <p:nvPr/>
+        </p:nvSpPr>
+        <p:spPr>
+          <a:xfrm>
+            <a:off x="812800" y="4584700"/>
+            <a:ext cx="1905000" cy="228600"/>
+          </a:xfrm>
+          <a:prstGeom prst="rect">
+            <a:avLst/>
+          </a:prstGeom>
+          <a:noFill/>
+          <a:ln/>
+        </p:spPr>
+        <p:txBody>
+          <a:bodyPr wrap="square" lIns="0" tIns="0" rIns="0" bIns="0" rtlCol="0" anchor="t"/>
+          <a:lstStyle/>
+          <a:p>
+            <a:pPr indent="0" marL="0">
+              <a:lnSpc>
+                <a:spcPct val="115000"/>
+              </a:lnSpc>
+              <a:buNone/>
+            </a:pPr>
+            <a:r>
+              <a:rPr lang="en-US" sz="1200" dirty="0">
+                <a:solidFill>
+                  <a:srgbClr val="5F6873"/>
+                </a:solidFill>
+                <a:latin typeface="Calibri" pitchFamily="34" charset="0"/>
+                <a:ea typeface="Calibri" pitchFamily="34" charset="-122"/>
+                <a:cs typeface="Calibri" pitchFamily="34" charset="-120"/>
+              </a:rPr>
+              <a:t>Referenz wird schwächer</a:t>
+            </a:r>
+            <a:endParaRPr lang="en-US" sz="1200" dirty="0"/>
+          </a:p>
+        </p:txBody>
+      </p:sp>
+      <p:sp>
+        <p:nvSpPr>
+          <p:cNvPr id="35" name="Shape 32"/>
+          <p:cNvSpPr/>
+          <p:nvPr/>
+        </p:nvSpPr>
+        <p:spPr>
+          <a:xfrm>
+            <a:off x="2667000" y="4699000"/>
+            <a:ext cx="8445500" cy="0"/>
+          </a:xfrm>
+          <a:prstGeom prst="line">
+            <a:avLst/>
+          </a:prstGeom>
+          <a:noFill/>
+          <a:ln w="25400">
+            <a:solidFill>
+              <a:srgbClr val="8A8F96"/>
+            </a:solidFill>
+            <a:prstDash val="solid"/>
+            <a:tailEnd type="triangle"/>
+          </a:ln>
+        </p:spPr>
+      </p:sp>
+      <p:sp>
+        <p:nvSpPr>
+          <p:cNvPr id="36" name="Text 33"/>
+          <p:cNvSpPr txBox="1"/>
+          <p:nvPr/>
+        </p:nvSpPr>
+        <p:spPr>
+          <a:xfrm>
+            <a:off x="812800" y="5080000"/>
+            <a:ext cx="10566400" cy="317500"/>
+          </a:xfrm>
+          <a:prstGeom prst="rect">
+            <a:avLst/>
+          </a:prstGeom>
+          <a:noFill/>
+          <a:ln/>
+        </p:spPr>
+        <p:txBody>
+          <a:bodyPr wrap="square" lIns="0" tIns="0" rIns="0" bIns="0" rtlCol="0" anchor="t"/>
+          <a:lstStyle/>
+          <a:p>
+            <a:pPr indent="0" marL="0">
+              <a:lnSpc>
+                <a:spcPct val="115000"/>
+              </a:lnSpc>
+              <a:buNone/>
+            </a:pPr>
+            <a:r>
+              <a:rPr lang="en-US" sz="1500" dirty="0">
+                <a:solidFill>
+                  <a:srgbClr val="44505E"/>
+                </a:solidFill>
+                <a:latin typeface="Calibri" pitchFamily="34" charset="0"/>
+                <a:ea typeface="Calibri" pitchFamily="34" charset="-122"/>
+                <a:cs typeface="Calibri" pitchFamily="34" charset="-120"/>
+              </a:rPr>
+              <a:t>Davor (Folien 6–11) zeigen wir die Messung und wie Matrix Pencil aus ihr Frequenz und Abklingen gewinnt.</a:t>
             </a:r>
             <a:endParaRPr lang="en-US" sz="1500" dirty="0"/>
           </a:p>

--- a/docs/praesentation/Ergebnisse_Matrix_Pencil_Arbeitsfassung.pptx
+++ b/docs/praesentation/Ergebnisse_Matrix_Pencil_Arbeitsfassung.pptx
@@ -127,12 +127,12 @@
   <p:extLst>
     <p:ext uri="{521415D9-36F7-43E2-AB2F-B90AF26B5E84}">
       <p14:sectionLst xmlns:p14="http://schemas.microsoft.com/office/powerpoint/2010/main">
-        <p14:section name="Einstieg" id="{c12bd02a-3a04-60ff-e95c-52716910bf9f}">
+        <p14:section name="Einstieg" id="{8fde3fe1-81a3-e996-7a1d-3fafadf6570b}">
           <p14:sldIdLst>
             <p14:sldId id="256"/>
           </p14:sldIdLst>
         </p14:section>
-        <p14:section name="Hintergrund" id="{a9f2c405-f509-5b73-ffca-ae0b8354feff}">
+        <p14:section name="Hintergrund" id="{2ff3b851-370b-7bf5-595e-10d471d7bd19}">
           <p14:sldIdLst>
             <p14:sldId id="257"/>
             <p14:sldId id="258"/>
@@ -140,7 +140,7 @@
             <p14:sldId id="260"/>
           </p14:sldIdLst>
         </p14:section>
-        <p14:section name="Methode" id="{40581a1d-6993-2b38-80eb-398fac4e3352}">
+        <p14:section name="Methode" id="{05e2c5e8-274e-028b-9a2c-30b8cb076fea}">
           <p14:sldIdLst>
             <p14:sldId id="261"/>
             <p14:sldId id="262"/>
@@ -150,7 +150,7 @@
             <p14:sldId id="266"/>
           </p14:sldIdLst>
         </p14:section>
-        <p14:section name="Prüfstufen 1 bis 3" id="{04d5960e-a4a0-2c50-a657-1c27f21f9939}">
+        <p14:section name="Prüfstufen 1 bis 3" id="{20f4cf55-de93-8531-0a1a-d4edee4f43c9}">
           <p14:sldIdLst>
             <p14:sldId id="267"/>
             <p14:sldId id="268"/>
@@ -159,19 +159,19 @@
             <p14:sldId id="271"/>
           </p14:sldIdLst>
         </p14:section>
-        <p14:section name="Prüfstufe 4: eigene Messungen" id="{34c56f2a-6490-4f53-77fd-7b4216bce027}">
+        <p14:section name="Prüfstufe 4: eigene Messungen" id="{d09c4c35-8783-08c2-7574-83b0a3a48fd7}">
           <p14:sldIdLst>
             <p14:sldId id="272"/>
             <p14:sldId id="273"/>
             <p14:sldId id="274"/>
           </p14:sldIdLst>
         </p14:section>
-        <p14:section name="Fazit" id="{a7b5af04-c073-d1db-5723-97c06e22363e}">
+        <p14:section name="Fazit" id="{2af36fea-2356-db6f-149f-0655087ae88e}">
           <p14:sldIdLst>
             <p14:sldId id="275"/>
           </p14:sldIdLst>
         </p14:section>
-        <p14:section name="Anhang" id="{1abc53d1-b7af-c62b-3919-89033edb0204}">
+        <p14:section name="Anhang" id="{9506262b-c4f8-e066-d5c2-b76673cc6518}">
           <p14:sldIdLst>
             <p14:sldId id="276"/>
           </p14:sldIdLst>
@@ -1500,7 +1500,12 @@
               <a:rPr lang="en-US" dirty="0"/>
               <a:t>Auch hier ist die Messung blau und die Filterausgabe orange, links der gesamte Verlauf, rechts der Abschnitt von vier bis sieben Sekunden.
 Beim positiven Frequenzsprung bricht P pos kurz nach einer Sekunde stark ein und pendelt danach. Abgezogen werden zwei Schwingungsanteile: der dominante bei 2,268 Hertz und ein zweiter bei 2,480 Hertz, der deutlich schneller abklingt. Die orange Kurve ist also die Messung minus die Summe beider Anteile.
-Im Ausschnitt bleiben kleine Restwellen sichtbar, die Bandenergie im Zielband sinkt aber um 99,87 Prozent. Vor einer Sekunde bleiben alle Werte unverändert.
+Vor einer Sekunde bleiben alle Werte unverändert. Im Ausschnitt rechts sieht man aber, anders als beim negativen Sprung, noch kleine Restwellen in der orangen Kurve. Warum?
+Das Modell beschreibt jede Schwingung als Amplitude mal e hoch Sigma t. Ihre Hüllkurve klingt also gleichmäßig exponentiell ab. Beim negativen Sprung verhält sich die Messung genau so: Sekunde für Sekunde weicht die gemessene 2,27-Hertz-Amplitude um weniger als ein Prozent vom Modell ab, und nach dem Abzug bleibt weniger als ein Prozent übrig.
+Beim positiven Sprung nicht. Zwischen zwei und vier Sekunden steigt die gemessene Amplitude zunächst noch an, von etwa 15 500 auf 18 200 Dateieinheiten, und fällt erst danach. Eine einzelne exponentiell abklingende Schwingung kann das nicht nachbilden. Das Modell hilft sich mit dem zweiten, schnell abklingenden Anteil bei 2,48 Hertz, trifft die Amplitude aber nur ungefähr. Zwischen drei und sieben Sekunden bleiben deshalb je nach Sekunde 3 bis 11 Prozent der Amplitude stehen. Das ist die sichtbare Restwelle.
+Die 99,87 Prozent weniger Bandenergie widersprechen dem nicht. Die Energie wächst mit dem Quadrat der Amplitude: Wenige Prozent Restamplitude sind nur Promille der Energie.
+Warum die Hüllkurve nicht exponentiell verläuft, ist in den Daten nicht nachgewiesen. Ein möglicher Grund ist der tiefe Einbruch nach dem positiven Sprung: Solange die Anlage diesen großen Ausschlag ausregelt, verhält sie sich vermutlich nicht wie ein einfaches lineares System.
+Beginnt man die Analyse bei 1,5 statt bei einer Sekunde, bleiben nur 1 bis 2 Prozent übrig. Dafür ändert sich die Zerlegung: drei Anteile im Band, und die Abklingrate der Hauptschwingung wird minus 0,177 statt minus 0,107 pro Sekunde. Wir bleiben bei einer Sekunde, weil der FNN-Hinweis die Zeit ab Beginn des Ereignisses zählt. Wie bei Mexiko gilt: Einen Parameter so lange zu verschieben, bis das Bild schöner aussieht, wäre keine bessere Bereinigung.
 Das Gesamtmodell passt mit weniger als einem Prozent Fehler. Daraus folgt aber noch nicht, dass beide Anteile eindeutig reale Vorgänge beschreiben. Wie bei Mexiko gesehen, bestätigt ein kleiner Fehler allein keine physikalisch eindeutige Zerlegung.</a:t>
             </a:r>
             <a:endParaRPr lang="en-US" dirty="0"/>
@@ -11944,8 +11949,8 @@
         </p:blipFill>
         <p:spPr>
           <a:xfrm>
-            <a:off x="1524000" y="1879600"/>
-            <a:ext cx="9144000" cy="3295650"/>
+            <a:off x="2286000" y="1841500"/>
+            <a:ext cx="7620000" cy="2743200"/>
           </a:xfrm>
           <a:prstGeom prst="rect">
             <a:avLst/>
@@ -11960,12 +11965,12 @@
         </p:nvSpPr>
         <p:spPr>
           <a:xfrm>
-            <a:off x="1524000" y="1879600"/>
-            <a:ext cx="9144000" cy="3295650"/>
+            <a:off x="2286000" y="1841500"/>
+            <a:ext cx="7620000" cy="2743200"/>
           </a:xfrm>
           <a:prstGeom prst="roundRect">
             <a:avLst>
-              <a:gd name="adj" fmla="val 3052"/>
+              <a:gd name="adj" fmla="val 3667"/>
             </a:avLst>
           </a:prstGeom>
           <a:ln w="9525">
@@ -11984,8 +11989,8 @@
         </p:nvSpPr>
         <p:spPr>
           <a:xfrm>
-            <a:off x="812800" y="5353050"/>
-            <a:ext cx="3314700" cy="266700"/>
+            <a:off x="812800" y="4724400"/>
+            <a:ext cx="2514600" cy="266700"/>
           </a:xfrm>
           <a:prstGeom prst="rect">
             <a:avLst/>
@@ -12026,8 +12031,8 @@
         </p:nvSpPr>
         <p:spPr>
           <a:xfrm>
-            <a:off x="812800" y="5645150"/>
-            <a:ext cx="3314700" cy="228600"/>
+            <a:off x="812800" y="5016500"/>
+            <a:ext cx="2514600" cy="444500"/>
           </a:xfrm>
           <a:prstGeom prst="rect">
             <a:avLst/>
@@ -12068,8 +12073,8 @@
         </p:nvSpPr>
         <p:spPr>
           <a:xfrm>
-            <a:off x="4436533" y="5353050"/>
-            <a:ext cx="3314700" cy="266700"/>
+            <a:off x="3517900" y="4724400"/>
+            <a:ext cx="2514600" cy="266700"/>
           </a:xfrm>
           <a:prstGeom prst="rect">
             <a:avLst/>
@@ -12110,8 +12115,8 @@
         </p:nvSpPr>
         <p:spPr>
           <a:xfrm>
-            <a:off x="4436533" y="5645150"/>
-            <a:ext cx="3314700" cy="228600"/>
+            <a:off x="3517900" y="5016500"/>
+            <a:ext cx="2514600" cy="444500"/>
           </a:xfrm>
           <a:prstGeom prst="rect">
             <a:avLst/>
@@ -12152,8 +12157,8 @@
         </p:nvSpPr>
         <p:spPr>
           <a:xfrm>
-            <a:off x="8060267" y="5353050"/>
-            <a:ext cx="3314700" cy="266700"/>
+            <a:off x="6223000" y="4724400"/>
+            <a:ext cx="2514600" cy="266700"/>
           </a:xfrm>
           <a:prstGeom prst="rect">
             <a:avLst/>
@@ -12194,8 +12199,8 @@
         </p:nvSpPr>
         <p:spPr>
           <a:xfrm>
-            <a:off x="8060267" y="5645150"/>
-            <a:ext cx="3314700" cy="228600"/>
+            <a:off x="6223000" y="5016500"/>
+            <a:ext cx="2514600" cy="444500"/>
           </a:xfrm>
           <a:prstGeom prst="rect">
             <a:avLst/>
@@ -12222,9 +12227,152 @@
                 <a:ea typeface="Calibri" pitchFamily="34" charset="-122"/>
                 <a:cs typeface="Calibri" pitchFamily="34" charset="-120"/>
               </a:rPr>
-              <a:t>Bandenergie 1,76–2,64 Hz, 4 bis 7 s</a:t>
+              <a:t>Bandenergie 1,76–2,64 Hz, 4 bis 7 s</a:t>
             </a:r>
             <a:endParaRPr lang="en-US" sz="1200" dirty="0"/>
+          </a:p>
+        </p:txBody>
+      </p:sp>
+      <p:sp>
+        <p:nvSpPr>
+          <p:cNvPr id="14" name="Text 10"/>
+          <p:cNvSpPr txBox="1"/>
+          <p:nvPr/>
+        </p:nvSpPr>
+        <p:spPr>
+          <a:xfrm>
+            <a:off x="8928100" y="4724400"/>
+            <a:ext cx="2514600" cy="266700"/>
+          </a:xfrm>
+          <a:prstGeom prst="rect">
+            <a:avLst/>
+          </a:prstGeom>
+          <a:noFill/>
+          <a:ln/>
+        </p:spPr>
+        <p:txBody>
+          <a:bodyPr wrap="square" lIns="0" tIns="0" rIns="0" bIns="0" rtlCol="0" anchor="t"/>
+          <a:lstStyle/>
+          <a:p>
+            <a:pPr indent="0" marL="0">
+              <a:lnSpc>
+                <a:spcPct val="115000"/>
+              </a:lnSpc>
+              <a:buNone/>
+            </a:pPr>
+            <a:r>
+              <a:rPr lang="en-US" sz="1500" b="1" dirty="0">
+                <a:solidFill>
+                  <a:srgbClr val="B5491B"/>
+                </a:solidFill>
+                <a:latin typeface="Calibri" pitchFamily="34" charset="0"/>
+                <a:ea typeface="Calibri" pitchFamily="34" charset="-122"/>
+                <a:cs typeface="Calibri" pitchFamily="34" charset="-120"/>
+              </a:rPr>
+              <a:t>3 bis 11 % Rest</a:t>
+            </a:r>
+            <a:endParaRPr lang="en-US" sz="1500" dirty="0"/>
+          </a:p>
+        </p:txBody>
+      </p:sp>
+      <p:sp>
+        <p:nvSpPr>
+          <p:cNvPr id="15" name="Text 11"/>
+          <p:cNvSpPr txBox="1"/>
+          <p:nvPr/>
+        </p:nvSpPr>
+        <p:spPr>
+          <a:xfrm>
+            <a:off x="8928100" y="5016500"/>
+            <a:ext cx="2514600" cy="444500"/>
+          </a:xfrm>
+          <a:prstGeom prst="rect">
+            <a:avLst/>
+          </a:prstGeom>
+          <a:noFill/>
+          <a:ln/>
+        </p:spPr>
+        <p:txBody>
+          <a:bodyPr wrap="square" lIns="0" tIns="0" rIns="0" bIns="0" rtlCol="0" anchor="t"/>
+          <a:lstStyle/>
+          <a:p>
+            <a:pPr indent="0" marL="0">
+              <a:lnSpc>
+                <a:spcPct val="115000"/>
+              </a:lnSpc>
+              <a:buNone/>
+            </a:pPr>
+            <a:r>
+              <a:rPr lang="en-US" sz="1200" dirty="0">
+                <a:solidFill>
+                  <a:srgbClr val="44505E"/>
+                </a:solidFill>
+                <a:latin typeface="Calibri" pitchFamily="34" charset="0"/>
+                <a:ea typeface="Calibri" pitchFamily="34" charset="-122"/>
+                <a:cs typeface="Calibri" pitchFamily="34" charset="-120"/>
+              </a:rPr>
+              <a:t>der 2,27-Hz-Amplitude, je Sekunde von 3 bis 7 s</a:t>
+            </a:r>
+            <a:endParaRPr lang="en-US" sz="1200" dirty="0"/>
+          </a:p>
+        </p:txBody>
+      </p:sp>
+      <p:sp>
+        <p:nvSpPr>
+          <p:cNvPr id="16" name="Text 12"/>
+          <p:cNvSpPr txBox="1"/>
+          <p:nvPr/>
+        </p:nvSpPr>
+        <p:spPr>
+          <a:xfrm>
+            <a:off x="812800" y="5575300"/>
+            <a:ext cx="10566400" cy="571500"/>
+          </a:xfrm>
+          <a:prstGeom prst="rect">
+            <a:avLst/>
+          </a:prstGeom>
+          <a:noFill/>
+          <a:ln/>
+        </p:spPr>
+        <p:txBody>
+          <a:bodyPr wrap="square" lIns="0" tIns="0" rIns="0" bIns="0" rtlCol="0" anchor="t"/>
+          <a:lstStyle/>
+          <a:p>
+            <a:pPr indent="0" marL="0">
+              <a:lnSpc>
+                <a:spcPct val="115000"/>
+              </a:lnSpc>
+              <a:buNone/>
+            </a:pPr>
+            <a:r>
+              <a:rPr lang="en-US" sz="1300" b="1" dirty="0">
+                <a:solidFill>
+                  <a:srgbClr val="14202E"/>
+                </a:solidFill>
+                <a:latin typeface="Calibri" pitchFamily="34" charset="0"/>
+                <a:ea typeface="Calibri" pitchFamily="34" charset="-122"/>
+                <a:cs typeface="Calibri" pitchFamily="34" charset="-120"/>
+              </a:rPr>
+              <a:t>Warum Restwellen bleiben: </a:t>
+            </a:r>
+            <a:pPr indent="0" marL="0">
+              <a:lnSpc>
+                <a:spcPct val="115000"/>
+              </a:lnSpc>
+              <a:buNone/>
+            </a:pPr>
+            <a:r>
+              <a:rPr lang="en-US" sz="1300" dirty="0">
+                <a:solidFill>
+                  <a:srgbClr val="44505E"/>
+                </a:solidFill>
+                <a:latin typeface="Calibri" pitchFamily="34" charset="0"/>
+                <a:ea typeface="Calibri" pitchFamily="34" charset="-122"/>
+                <a:cs typeface="Calibri" pitchFamily="34" charset="-120"/>
+              </a:rPr>
+              <a:t>Die gemessene Amplitude steigt bis etwa 4 s noch an und fällt erst dann. Das Modell kennt nur exponentielles Abklingen und trifft sie daher nur ungefähr. Beim negativen Sprung bleibt weniger als 1 %.</a:t>
+            </a:r>
+            <a:endParaRPr lang="en-US" sz="1300" dirty="0"/>
           </a:p>
         </p:txBody>
       </p:sp>

--- a/docs/praesentation/Ergebnisse_Matrix_Pencil_Arbeitsfassung.pptx
+++ b/docs/praesentation/Ergebnisse_Matrix_Pencil_Arbeitsfassung.pptx
@@ -127,12 +127,12 @@
   <p:extLst>
     <p:ext uri="{521415D9-36F7-43E2-AB2F-B90AF26B5E84}">
       <p14:sectionLst xmlns:p14="http://schemas.microsoft.com/office/powerpoint/2010/main">
-        <p14:section name="Einstieg" id="{8fde3fe1-81a3-e996-7a1d-3fafadf6570b}">
+        <p14:section name="Einstieg" id="{e49d9b48-363c-7218-a148-cf73941b1d29}">
           <p14:sldIdLst>
             <p14:sldId id="256"/>
           </p14:sldIdLst>
         </p14:section>
-        <p14:section name="Hintergrund" id="{2ff3b851-370b-7bf5-595e-10d471d7bd19}">
+        <p14:section name="Hintergrund" id="{ee707f9b-adfa-aacd-c9b9-67fef5d63118}">
           <p14:sldIdLst>
             <p14:sldId id="257"/>
             <p14:sldId id="258"/>
@@ -140,7 +140,7 @@
             <p14:sldId id="260"/>
           </p14:sldIdLst>
         </p14:section>
-        <p14:section name="Methode" id="{05e2c5e8-274e-028b-9a2c-30b8cb076fea}">
+        <p14:section name="Methode" id="{8f635698-6eee-b6e2-ca55-18ab3c510667}">
           <p14:sldIdLst>
             <p14:sldId id="261"/>
             <p14:sldId id="262"/>
@@ -150,7 +150,7 @@
             <p14:sldId id="266"/>
           </p14:sldIdLst>
         </p14:section>
-        <p14:section name="Prüfstufen 1 bis 3" id="{20f4cf55-de93-8531-0a1a-d4edee4f43c9}">
+        <p14:section name="Prüfstufen 1 bis 3" id="{c26afb07-b3be-8cba-b016-b89514040724}">
           <p14:sldIdLst>
             <p14:sldId id="267"/>
             <p14:sldId id="268"/>
@@ -159,19 +159,19 @@
             <p14:sldId id="271"/>
           </p14:sldIdLst>
         </p14:section>
-        <p14:section name="Prüfstufe 4: eigene Messungen" id="{d09c4c35-8783-08c2-7574-83b0a3a48fd7}">
+        <p14:section name="Prüfstufe 4: eigene Messungen" id="{70bd228a-ba86-995a-63dd-03594ef9b66c}">
           <p14:sldIdLst>
             <p14:sldId id="272"/>
             <p14:sldId id="273"/>
             <p14:sldId id="274"/>
           </p14:sldIdLst>
         </p14:section>
-        <p14:section name="Fazit" id="{2af36fea-2356-db6f-149f-0655087ae88e}">
+        <p14:section name="Fazit" id="{7a4a7758-1e07-b9c5-e779-e7f3c002c9e9}">
           <p14:sldIdLst>
             <p14:sldId id="275"/>
           </p14:sldIdLst>
         </p14:section>
-        <p14:section name="Anhang" id="{9506262b-c4f8-e066-d5c2-b76673cc6518}">
+        <p14:section name="Anhang" id="{469feae7-6981-887c-86ae-b2c61a5db69a}">
           <p14:sldIdLst>
             <p14:sldId id="276"/>
           </p14:sldIdLst>
@@ -1870,7 +1870,7 @@
               <a:t>Was genau fordert der FNN-Hinweis? Drei Stellen sind für uns wichtig.
 Abschnitt 4.2.1.12: Die netzbildende Einheit muss Frequenz-Leistungspendelungen zwischen 0,05 und 10 Hertz dämpfen. Das Dämpfungsmaß darf 0,5 nicht unterschreiten. Nachzuweisen ist das bei einem SCR von mindestens 3. SCR steht für Short Circuit Ratio, auf Deutsch Kurzschlussleistungsverhältnis: das Verhältnis der Kurzschlussleistung am Netzanschlusspunkt zur Leistung der Anlage. Je größer der Wert, desto stärker ist das Netz an dieser Stelle.
 Abschnitt 5.5.5.8 beschreibt die Prüfung. Bei Messverfahren 1 springt die Frequenz um etwa 250 bis 500 Millihertz, während die Einheit 50 bis 75 Prozent ihrer maximalen Wirkleistung PEmax einspeist. Gemessen wird p1, die Mitsystem-Wirkleistung der Grundschwingung. Unsere Messung passt dazu: Die Frequenz springt von 50,0 auf 49,5 Hertz, also um 500 Millihertz.
-Ausgewertet werden die Überschwinger der Wirkleistung nach dem Sprung, gemessen gegenüber dem neuen Endwert. AV21 ist der zweite Überschwinger geteilt durch den ersten, AV32 der dritte durch den zweiten. Nach dem TR8-Hinweis, also der Bewertungsgrundlage für die Zertifizierung, muss das Dämpfungsmaß mindestens 0,45 betragen. Sind drei Extrema erkennbar, müssen beide Amplitudenverhältnisse unter 0,2 liegen. Beide Grenzen passen zusammen: Bei D gleich 0,45 schrumpft ein Überschwinger zum nächsten auf etwa 0,2.
+Ausgewertet werden die Überschwinger der Wirkleistung nach der ersten Reaktion auf den Sprung. Delta P ist dabei die Abweichung vom stationären Anfangswert, also vom Leistungswert vor dem Sprung. Delta P S1 ist der erste Überschwinger, S2 und S3 sind die folgenden Extrema mit jeweils umgekehrtem Vorzeichen. AV21 ist der zweite Überschwinger geteilt durch den ersten, AV32 der dritte durch den zweiten. Diese Verhältnisse liest man direkt an der Messkurve ab, ohne Modell. Nach dem TR8-Hinweis, also der Bewertungsgrundlage für die Zertifizierung, muss das Dämpfungsmaß mindestens 0,45 betragen. Sind drei Extrema erkennbar, müssen beide Amplitudenverhältnisse unter 0,2 liegen. Beide Grenzen passen zusammen: Bei D gleich 0,45 schrumpft ein Überschwinger zum nächsten auf etwa 0,2.
 Rechts steht die Definition des Dämpfungsmaßes. Für die 2,27-Hertz-Pendelung unserer Messung ergibt sie etwa 0,013, weit unter 0,45. Wenn diese Pendelung mechanisch bedingt ist und nicht herausgerechnet wird, bestimmt sie die Bewertung, obwohl sie nichts über die Regelung der Anlage aussagt. Ob sie tatsächlich mechanisch ist, ist in unseren Daten nicht dokumentiert; im Projekt wird eine Resonanz um 2,2 Hertz angenommen.</a:t>
             </a:r>
             <a:endParaRPr lang="en-US" dirty="0"/>
